--- a/presentations/gen5_3_bull_momentum_specialist_plan.pptx
+++ b/presentations/gen5_3_bull_momentum_specialist_plan.pptx
@@ -2,21 +2,25 @@
 <file path=ppt/presentation.xml><?xml version="1.0" encoding="utf-8"?>
 <p:presentation xmlns:p="http://schemas.openxmlformats.org/presentationml/2006/main">
   <p:sldMasterIdLst>
-    <p:sldMasterId xmlns:r="http://schemas.openxmlformats.org/officeDocument/2006/relationships" id="2147483648" r:id="Rca08a83ccf4749f3"/>
+    <p:sldMasterId xmlns:r="http://schemas.openxmlformats.org/officeDocument/2006/relationships" id="2147483648" r:id="Rffc1a028262e4739"/>
   </p:sldMasterIdLst>
   <p:notesMasterIdLst>
-    <p:notesMasterId xmlns:r="http://schemas.openxmlformats.org/officeDocument/2006/relationships" r:id="R62331f5d41c146ac"/>
+    <p:notesMasterId xmlns:r="http://schemas.openxmlformats.org/officeDocument/2006/relationships" r:id="Re5715b932fd345ed"/>
   </p:notesMasterIdLst>
   <p:sldIdLst>
-    <p:sldId xmlns:r="http://schemas.openxmlformats.org/officeDocument/2006/relationships" id="256" r:id="R2a98d75fbd184a2f"/>
-    <p:sldId xmlns:r="http://schemas.openxmlformats.org/officeDocument/2006/relationships" id="257" r:id="Ra52276e0be264374"/>
-    <p:sldId xmlns:r="http://schemas.openxmlformats.org/officeDocument/2006/relationships" id="258" r:id="R1e068268f6ee4d33"/>
-    <p:sldId xmlns:r="http://schemas.openxmlformats.org/officeDocument/2006/relationships" id="259" r:id="R7fb047e1af7a4c5e"/>
-    <p:sldId xmlns:r="http://schemas.openxmlformats.org/officeDocument/2006/relationships" id="260" r:id="Rdc60a233dd744f91"/>
-    <p:sldId xmlns:r="http://schemas.openxmlformats.org/officeDocument/2006/relationships" id="261" r:id="Rcc85551454ba452c"/>
-    <p:sldId xmlns:r="http://schemas.openxmlformats.org/officeDocument/2006/relationships" id="262" r:id="Rc7614790dd2c467f"/>
-    <p:sldId xmlns:r="http://schemas.openxmlformats.org/officeDocument/2006/relationships" id="263" r:id="R06ae6ff0240649c8"/>
-    <p:sldId xmlns:r="http://schemas.openxmlformats.org/officeDocument/2006/relationships" id="264" r:id="R6a0115684f0e4740"/>
+    <p:sldId xmlns:r="http://schemas.openxmlformats.org/officeDocument/2006/relationships" id="256" r:id="Rf1bb3d7fb46c447c"/>
+    <p:sldId xmlns:r="http://schemas.openxmlformats.org/officeDocument/2006/relationships" id="257" r:id="R88a8ef7417ba4719"/>
+    <p:sldId xmlns:r="http://schemas.openxmlformats.org/officeDocument/2006/relationships" id="258" r:id="R6f6780d49d6f4419"/>
+    <p:sldId xmlns:r="http://schemas.openxmlformats.org/officeDocument/2006/relationships" id="259" r:id="R93af5d5a86d24e96"/>
+    <p:sldId xmlns:r="http://schemas.openxmlformats.org/officeDocument/2006/relationships" id="260" r:id="R684b6c2954884bc8"/>
+    <p:sldId xmlns:r="http://schemas.openxmlformats.org/officeDocument/2006/relationships" id="261" r:id="R8a05b78f19694027"/>
+    <p:sldId xmlns:r="http://schemas.openxmlformats.org/officeDocument/2006/relationships" id="262" r:id="R8073d5dd73ab41b8"/>
+    <p:sldId xmlns:r="http://schemas.openxmlformats.org/officeDocument/2006/relationships" id="263" r:id="R1491b24603014c2b"/>
+    <p:sldId xmlns:r="http://schemas.openxmlformats.org/officeDocument/2006/relationships" id="264" r:id="R16b1a4373991483b"/>
+    <p:sldId xmlns:r="http://schemas.openxmlformats.org/officeDocument/2006/relationships" id="265" r:id="Ra7d3c940f4d6418d"/>
+    <p:sldId xmlns:r="http://schemas.openxmlformats.org/officeDocument/2006/relationships" id="266" r:id="R319079a09bab4c78"/>
+    <p:sldId xmlns:r="http://schemas.openxmlformats.org/officeDocument/2006/relationships" id="267" r:id="R14ac2b761943420d"/>
+    <p:sldId xmlns:r="http://schemas.openxmlformats.org/officeDocument/2006/relationships" id="268" r:id="R38acd66fbbad4d66"/>
   </p:sldIdLst>
   <p:sldSz cx="12192000" cy="6858000"/>
   <p:notesSz cx="6858000" cy="9144000"/>
@@ -571,6 +575,270 @@
 </p:notes>
 </file>
 
+<file path=ppt/notesSlides/notesSlide10.xml><?xml version="1.0" encoding="utf-8"?>
+<p:notes xmlns:p="http://schemas.openxmlformats.org/presentationml/2006/main">
+  <p:cSld>
+    <p:spTree>
+      <p:nvGrpSpPr>
+        <p:cNvPr id="1" name=""/>
+        <p:cNvGrpSpPr/>
+        <p:nvPr/>
+      </p:nvGrpSpPr>
+      <p:grpSpPr>
+        <a:xfrm xmlns:a="http://schemas.openxmlformats.org/drawingml/2006/main"/>
+      </p:grpSpPr>
+      <p:sp>
+        <p:nvSpPr>
+          <p:cNvPr id="2" name="Slide Image Placeholder 1"/>
+          <p:cNvSpPr>
+            <a:spLocks xmlns:a="http://schemas.openxmlformats.org/drawingml/2006/main" noGrp="1"/>
+          </p:cNvSpPr>
+          <p:nvPr>
+            <p:ph type="sldImg" idx="0"/>
+          </p:nvPr>
+        </p:nvSpPr>
+        <p:spPr/>
+      </p:sp>
+      <p:sp>
+        <p:nvSpPr>
+          <p:cNvPr id="3" name="Notes Placeholder 2"/>
+          <p:cNvSpPr>
+            <a:spLocks xmlns:a="http://schemas.openxmlformats.org/drawingml/2006/main" noGrp="1"/>
+          </p:cNvSpPr>
+          <p:nvPr>
+            <p:ph type="body" idx="1"/>
+          </p:nvPr>
+        </p:nvSpPr>
+        <p:spPr/>
+        <p:txBody>
+          <a:bodyPr xmlns:a="http://schemas.openxmlformats.org/drawingml/2006/main"/>
+          <a:lstStyle xmlns:a="http://schemas.openxmlformats.org/drawingml/2006/main"/>
+          <a:p xmlns:a="http://schemas.openxmlformats.org/drawingml/2006/main"/>
+        </p:txBody>
+      </p:sp>
+      <p:sp>
+        <p:nvSpPr>
+          <p:cNvPr id="4" name="Slide Number Placeholder 3"/>
+          <p:cNvSpPr>
+            <a:spLocks xmlns:a="http://schemas.openxmlformats.org/drawingml/2006/main" noGrp="1"/>
+          </p:cNvSpPr>
+          <p:nvPr>
+            <p:ph type="sldNum" idx="5"/>
+          </p:nvPr>
+        </p:nvSpPr>
+        <p:spPr/>
+        <p:txBody>
+          <a:bodyPr xmlns:a="http://schemas.openxmlformats.org/drawingml/2006/main"/>
+          <a:lstStyle xmlns:a="http://schemas.openxmlformats.org/drawingml/2006/main"/>
+          <a:p xmlns:a="http://schemas.openxmlformats.org/drawingml/2006/main"/>
+        </p:txBody>
+      </p:sp>
+    </p:spTree>
+  </p:cSld>
+  <p:clrMapOvr>
+    <a:masterClrMapping xmlns:a="http://schemas.openxmlformats.org/drawingml/2006/main"/>
+  </p:clrMapOvr>
+</p:notes>
+</file>
+
+<file path=ppt/notesSlides/notesSlide11.xml><?xml version="1.0" encoding="utf-8"?>
+<p:notes xmlns:p="http://schemas.openxmlformats.org/presentationml/2006/main">
+  <p:cSld>
+    <p:spTree>
+      <p:nvGrpSpPr>
+        <p:cNvPr id="1" name=""/>
+        <p:cNvGrpSpPr/>
+        <p:nvPr/>
+      </p:nvGrpSpPr>
+      <p:grpSpPr>
+        <a:xfrm xmlns:a="http://schemas.openxmlformats.org/drawingml/2006/main"/>
+      </p:grpSpPr>
+      <p:sp>
+        <p:nvSpPr>
+          <p:cNvPr id="2" name="Slide Image Placeholder 1"/>
+          <p:cNvSpPr>
+            <a:spLocks xmlns:a="http://schemas.openxmlformats.org/drawingml/2006/main" noGrp="1"/>
+          </p:cNvSpPr>
+          <p:nvPr>
+            <p:ph type="sldImg" idx="0"/>
+          </p:nvPr>
+        </p:nvSpPr>
+        <p:spPr/>
+      </p:sp>
+      <p:sp>
+        <p:nvSpPr>
+          <p:cNvPr id="3" name="Notes Placeholder 2"/>
+          <p:cNvSpPr>
+            <a:spLocks xmlns:a="http://schemas.openxmlformats.org/drawingml/2006/main" noGrp="1"/>
+          </p:cNvSpPr>
+          <p:nvPr>
+            <p:ph type="body" idx="1"/>
+          </p:nvPr>
+        </p:nvSpPr>
+        <p:spPr/>
+        <p:txBody>
+          <a:bodyPr xmlns:a="http://schemas.openxmlformats.org/drawingml/2006/main"/>
+          <a:lstStyle xmlns:a="http://schemas.openxmlformats.org/drawingml/2006/main"/>
+          <a:p xmlns:a="http://schemas.openxmlformats.org/drawingml/2006/main"/>
+        </p:txBody>
+      </p:sp>
+      <p:sp>
+        <p:nvSpPr>
+          <p:cNvPr id="4" name="Slide Number Placeholder 3"/>
+          <p:cNvSpPr>
+            <a:spLocks xmlns:a="http://schemas.openxmlformats.org/drawingml/2006/main" noGrp="1"/>
+          </p:cNvSpPr>
+          <p:nvPr>
+            <p:ph type="sldNum" idx="5"/>
+          </p:nvPr>
+        </p:nvSpPr>
+        <p:spPr/>
+        <p:txBody>
+          <a:bodyPr xmlns:a="http://schemas.openxmlformats.org/drawingml/2006/main"/>
+          <a:lstStyle xmlns:a="http://schemas.openxmlformats.org/drawingml/2006/main"/>
+          <a:p xmlns:a="http://schemas.openxmlformats.org/drawingml/2006/main"/>
+        </p:txBody>
+      </p:sp>
+    </p:spTree>
+  </p:cSld>
+  <p:clrMapOvr>
+    <a:masterClrMapping xmlns:a="http://schemas.openxmlformats.org/drawingml/2006/main"/>
+  </p:clrMapOvr>
+</p:notes>
+</file>
+
+<file path=ppt/notesSlides/notesSlide12.xml><?xml version="1.0" encoding="utf-8"?>
+<p:notes xmlns:p="http://schemas.openxmlformats.org/presentationml/2006/main">
+  <p:cSld>
+    <p:spTree>
+      <p:nvGrpSpPr>
+        <p:cNvPr id="1" name=""/>
+        <p:cNvGrpSpPr/>
+        <p:nvPr/>
+      </p:nvGrpSpPr>
+      <p:grpSpPr>
+        <a:xfrm xmlns:a="http://schemas.openxmlformats.org/drawingml/2006/main"/>
+      </p:grpSpPr>
+      <p:sp>
+        <p:nvSpPr>
+          <p:cNvPr id="2" name="Slide Image Placeholder 1"/>
+          <p:cNvSpPr>
+            <a:spLocks xmlns:a="http://schemas.openxmlformats.org/drawingml/2006/main" noGrp="1"/>
+          </p:cNvSpPr>
+          <p:nvPr>
+            <p:ph type="sldImg" idx="0"/>
+          </p:nvPr>
+        </p:nvSpPr>
+        <p:spPr/>
+      </p:sp>
+      <p:sp>
+        <p:nvSpPr>
+          <p:cNvPr id="3" name="Notes Placeholder 2"/>
+          <p:cNvSpPr>
+            <a:spLocks xmlns:a="http://schemas.openxmlformats.org/drawingml/2006/main" noGrp="1"/>
+          </p:cNvSpPr>
+          <p:nvPr>
+            <p:ph type="body" idx="1"/>
+          </p:nvPr>
+        </p:nvSpPr>
+        <p:spPr/>
+        <p:txBody>
+          <a:bodyPr xmlns:a="http://schemas.openxmlformats.org/drawingml/2006/main"/>
+          <a:lstStyle xmlns:a="http://schemas.openxmlformats.org/drawingml/2006/main"/>
+          <a:p xmlns:a="http://schemas.openxmlformats.org/drawingml/2006/main"/>
+        </p:txBody>
+      </p:sp>
+      <p:sp>
+        <p:nvSpPr>
+          <p:cNvPr id="4" name="Slide Number Placeholder 3"/>
+          <p:cNvSpPr>
+            <a:spLocks xmlns:a="http://schemas.openxmlformats.org/drawingml/2006/main" noGrp="1"/>
+          </p:cNvSpPr>
+          <p:nvPr>
+            <p:ph type="sldNum" idx="5"/>
+          </p:nvPr>
+        </p:nvSpPr>
+        <p:spPr/>
+        <p:txBody>
+          <a:bodyPr xmlns:a="http://schemas.openxmlformats.org/drawingml/2006/main"/>
+          <a:lstStyle xmlns:a="http://schemas.openxmlformats.org/drawingml/2006/main"/>
+          <a:p xmlns:a="http://schemas.openxmlformats.org/drawingml/2006/main"/>
+        </p:txBody>
+      </p:sp>
+    </p:spTree>
+  </p:cSld>
+  <p:clrMapOvr>
+    <a:masterClrMapping xmlns:a="http://schemas.openxmlformats.org/drawingml/2006/main"/>
+  </p:clrMapOvr>
+</p:notes>
+</file>
+
+<file path=ppt/notesSlides/notesSlide13.xml><?xml version="1.0" encoding="utf-8"?>
+<p:notes xmlns:p="http://schemas.openxmlformats.org/presentationml/2006/main">
+  <p:cSld>
+    <p:spTree>
+      <p:nvGrpSpPr>
+        <p:cNvPr id="1" name=""/>
+        <p:cNvGrpSpPr/>
+        <p:nvPr/>
+      </p:nvGrpSpPr>
+      <p:grpSpPr>
+        <a:xfrm xmlns:a="http://schemas.openxmlformats.org/drawingml/2006/main"/>
+      </p:grpSpPr>
+      <p:sp>
+        <p:nvSpPr>
+          <p:cNvPr id="2" name="Slide Image Placeholder 1"/>
+          <p:cNvSpPr>
+            <a:spLocks xmlns:a="http://schemas.openxmlformats.org/drawingml/2006/main" noGrp="1"/>
+          </p:cNvSpPr>
+          <p:nvPr>
+            <p:ph type="sldImg" idx="0"/>
+          </p:nvPr>
+        </p:nvSpPr>
+        <p:spPr/>
+      </p:sp>
+      <p:sp>
+        <p:nvSpPr>
+          <p:cNvPr id="3" name="Notes Placeholder 2"/>
+          <p:cNvSpPr>
+            <a:spLocks xmlns:a="http://schemas.openxmlformats.org/drawingml/2006/main" noGrp="1"/>
+          </p:cNvSpPr>
+          <p:nvPr>
+            <p:ph type="body" idx="1"/>
+          </p:nvPr>
+        </p:nvSpPr>
+        <p:spPr/>
+        <p:txBody>
+          <a:bodyPr xmlns:a="http://schemas.openxmlformats.org/drawingml/2006/main"/>
+          <a:lstStyle xmlns:a="http://schemas.openxmlformats.org/drawingml/2006/main"/>
+          <a:p xmlns:a="http://schemas.openxmlformats.org/drawingml/2006/main"/>
+        </p:txBody>
+      </p:sp>
+      <p:sp>
+        <p:nvSpPr>
+          <p:cNvPr id="4" name="Slide Number Placeholder 3"/>
+          <p:cNvSpPr>
+            <a:spLocks xmlns:a="http://schemas.openxmlformats.org/drawingml/2006/main" noGrp="1"/>
+          </p:cNvSpPr>
+          <p:nvPr>
+            <p:ph type="sldNum" idx="5"/>
+          </p:nvPr>
+        </p:nvSpPr>
+        <p:spPr/>
+        <p:txBody>
+          <a:bodyPr xmlns:a="http://schemas.openxmlformats.org/drawingml/2006/main"/>
+          <a:lstStyle xmlns:a="http://schemas.openxmlformats.org/drawingml/2006/main"/>
+          <a:p xmlns:a="http://schemas.openxmlformats.org/drawingml/2006/main"/>
+        </p:txBody>
+      </p:sp>
+    </p:spTree>
+  </p:cSld>
+  <p:clrMapOvr>
+    <a:masterClrMapping xmlns:a="http://schemas.openxmlformats.org/drawingml/2006/main"/>
+  </p:clrMapOvr>
+</p:notes>
+</file>
+
 <file path=ppt/notesSlides/notesSlide2.xml><?xml version="1.0" encoding="utf-8"?>
 <p:notes xmlns:p="http://schemas.openxmlformats.org/presentationml/2006/main">
   <p:cSld>
@@ -1137,7 +1405,7 @@
   </p:cSld>
   <p:clrMap bg1="lt1" tx1="dk1" bg2="lt2" tx2="dk2" accent1="accent1" accent2="accent2" accent3="accent3" accent4="accent4" accent5="accent5" accent6="accent6" hlink="hlink" folHlink="folHlink"/>
   <p:sldLayoutIdLst>
-    <p:sldLayoutId xmlns:r="http://schemas.openxmlformats.org/officeDocument/2006/relationships" id="2147483649" r:id="R08e151bbc53a4263"/>
+    <p:sldLayoutId xmlns:r="http://schemas.openxmlformats.org/officeDocument/2006/relationships" id="2147483649" r:id="R240ed903c0b34d75"/>
   </p:sldLayoutIdLst>
   <p:txStyles>
     <p:titleStyle>
@@ -1688,7 +1956,7 @@
           <p:cNvPr id="1" name="">
             <a:extLst xmlns:a="http://schemas.openxmlformats.org/drawingml/2006/main">
               <a:ext uri="{FF2B5EF4-FFF2-40B4-BE49-F238E27FC236}">
-                <a16:creationId xmlns:a16="http://schemas.microsoft.com/office/drawing/2014/main" id="{62ACC6C8-FC0D-458B-92C3-472017CACC41}"/>
+                <a16:creationId xmlns:a16="http://schemas.microsoft.com/office/drawing/2014/main" id="{2BFEAC4A-957D-4A47-95DB-6A56AC60EAAF}"/>
               </a:ext>
             </a:extLst>
           </p:cNvPr>
@@ -1738,7 +2006,7 @@
           <p:cNvPr id="2" name="">
             <a:extLst xmlns:a="http://schemas.openxmlformats.org/drawingml/2006/main">
               <a:ext uri="{FF2B5EF4-FFF2-40B4-BE49-F238E27FC236}">
-                <a16:creationId xmlns:a16="http://schemas.microsoft.com/office/drawing/2014/main" id="{EE579332-4178-4F0D-8EED-9D17FFD020EC}"/>
+                <a16:creationId xmlns:a16="http://schemas.microsoft.com/office/drawing/2014/main" id="{92F76554-9CF5-46F4-B0B1-F6945E83BBFE}"/>
               </a:ext>
             </a:extLst>
           </p:cNvPr>
@@ -1788,7 +2056,7 @@
           <p:cNvPr id="3" name="">
             <a:extLst xmlns:a="http://schemas.openxmlformats.org/drawingml/2006/main">
               <a:ext uri="{FF2B5EF4-FFF2-40B4-BE49-F238E27FC236}">
-                <a16:creationId xmlns:a16="http://schemas.microsoft.com/office/drawing/2014/main" id="{C515E8B0-34C7-4E9A-AD99-A89D440B3B6D}"/>
+                <a16:creationId xmlns:a16="http://schemas.microsoft.com/office/drawing/2014/main" id="{ED232ACF-A13F-4192-9AD8-C30CE7E378EC}"/>
               </a:ext>
             </a:extLst>
           </p:cNvPr>
@@ -1838,7 +2106,7 @@
           <p:cNvPr id="4" name="">
             <a:extLst xmlns:a="http://schemas.openxmlformats.org/drawingml/2006/main">
               <a:ext uri="{FF2B5EF4-FFF2-40B4-BE49-F238E27FC236}">
-                <a16:creationId xmlns:a16="http://schemas.microsoft.com/office/drawing/2014/main" id="{3C36ADAA-6B90-4C42-A9D3-93AAA6A32C41}"/>
+                <a16:creationId xmlns:a16="http://schemas.microsoft.com/office/drawing/2014/main" id="{B2B9F2DA-D573-4559-9FFF-47C11C7D0AA4}"/>
               </a:ext>
             </a:extLst>
           </p:cNvPr>
@@ -1873,7 +2141,7 @@
           <p:cNvPr id="5" name="">
             <a:extLst xmlns:a="http://schemas.openxmlformats.org/drawingml/2006/main">
               <a:ext uri="{FF2B5EF4-FFF2-40B4-BE49-F238E27FC236}">
-                <a16:creationId xmlns:a16="http://schemas.microsoft.com/office/drawing/2014/main" id="{85160087-AF58-4F08-BF09-E77CC83F0463}"/>
+                <a16:creationId xmlns:a16="http://schemas.microsoft.com/office/drawing/2014/main" id="{376A605F-C51F-4C6C-B7F6-97CD7934731B}"/>
               </a:ext>
             </a:extLst>
           </p:cNvPr>
@@ -1923,7 +2191,7 @@
           <p:cNvPr id="6" name="">
             <a:extLst xmlns:a="http://schemas.openxmlformats.org/drawingml/2006/main">
               <a:ext uri="{FF2B5EF4-FFF2-40B4-BE49-F238E27FC236}">
-                <a16:creationId xmlns:a16="http://schemas.microsoft.com/office/drawing/2014/main" id="{1A7551BC-743D-4BA3-81E8-C072F31E82C1}"/>
+                <a16:creationId xmlns:a16="http://schemas.microsoft.com/office/drawing/2014/main" id="{3FD3B4CB-0407-4782-8CAE-FDFCF65373BD}"/>
               </a:ext>
             </a:extLst>
           </p:cNvPr>
@@ -1973,7 +2241,7 @@
           <p:cNvPr id="7" name="">
             <a:extLst xmlns:a="http://schemas.openxmlformats.org/drawingml/2006/main">
               <a:ext uri="{FF2B5EF4-FFF2-40B4-BE49-F238E27FC236}">
-                <a16:creationId xmlns:a16="http://schemas.microsoft.com/office/drawing/2014/main" id="{87DBAD15-A19A-4F86-9CBD-F3CBFE8A1254}"/>
+                <a16:creationId xmlns:a16="http://schemas.microsoft.com/office/drawing/2014/main" id="{A3BAA75E-F23C-4F30-B972-C2A1265B5C1B}"/>
               </a:ext>
             </a:extLst>
           </p:cNvPr>
@@ -2021,7 +2289,2688 @@
     </p:spTree>
     <p:extLst>
       <p:ext uri="{BB962C8B-B14F-4D97-AF65-F5344CB8AC3E}">
-        <p14:creationId xmlns:p14="http://schemas.microsoft.com/office/powerpoint/2010/main" val="987875923"/>
+        <p14:creationId xmlns:p14="http://schemas.microsoft.com/office/powerpoint/2010/main" val="563850745"/>
+      </p:ext>
+    </p:extLst>
+  </p:cSld>
+</p:sld>
+</file>
+
+<file path=ppt/slides/slide10.xml><?xml version="1.0" encoding="utf-8"?>
+<p:sld xmlns:p="http://schemas.openxmlformats.org/presentationml/2006/main">
+  <p:cSld>
+    <p:bg>
+      <p:bgPr>
+        <a:solidFill xmlns:a="http://schemas.openxmlformats.org/drawingml/2006/main">
+          <a:srgbClr val="FFFFFF"/>
+        </a:solidFill>
+      </p:bgPr>
+    </p:bg>
+    <p:spTree>
+      <p:nvGrpSpPr>
+        <p:cNvPr id="1" name=""/>
+        <p:cNvGrpSpPr/>
+        <p:nvPr/>
+      </p:nvGrpSpPr>
+      <p:grpSpPr>
+        <a:xfrm xmlns:a="http://schemas.openxmlformats.org/drawingml/2006/main"/>
+      </p:grpSpPr>
+      <p:sp>
+        <p:nvSpPr>
+          <p:cNvPr id="1" name="">
+            <a:extLst xmlns:a="http://schemas.openxmlformats.org/drawingml/2006/main">
+              <a:ext uri="{FF2B5EF4-FFF2-40B4-BE49-F238E27FC236}">
+                <a16:creationId xmlns:a16="http://schemas.microsoft.com/office/drawing/2014/main" id="{23FC7A45-F790-4641-956E-1021CB3C1B51}"/>
+              </a:ext>
+            </a:extLst>
+          </p:cNvPr>
+          <p:cNvSpPr>
+            <a:spLocks xmlns:a="http://schemas.openxmlformats.org/drawingml/2006/main" noGrp="1"/>
+          </p:cNvSpPr>
+          <p:nvPr/>
+        </p:nvSpPr>
+        <p:spPr>
+          <a:xfrm xmlns:a="http://schemas.openxmlformats.org/drawingml/2006/main">
+            <a:off x="609600" y="304800"/>
+            <a:ext cx="5334000" cy="209550"/>
+          </a:xfrm>
+          <a:prstGeom xmlns:a="http://schemas.openxmlformats.org/drawingml/2006/main" prst="rect">
+            <a:avLst/>
+          </a:prstGeom>
+          <a:noFill xmlns:a="http://schemas.openxmlformats.org/drawingml/2006/main"/>
+          <a:ln xmlns:a="http://schemas.openxmlformats.org/drawingml/2006/main" w="0">
+            <a:noFill/>
+            <a:prstDash val="solid"/>
+          </a:ln>
+        </p:spPr>
+        <p:txBody>
+          <a:bodyPr xmlns:a="http://schemas.openxmlformats.org/drawingml/2006/main"/>
+          <a:lstStyle xmlns:a="http://schemas.openxmlformats.org/drawingml/2006/main"/>
+          <a:p xmlns:a="http://schemas.openxmlformats.org/drawingml/2006/main">
+            <a:pPr>
+              <a:defRPr sz="975" b="1">
+                <a:solidFill>
+                  <a:srgbClr val="2563EB"/>
+                </a:solidFill>
+              </a:defRPr>
+            </a:pPr>
+            <a:r>
+              <a:rPr sz="975" b="1">
+                <a:solidFill>
+                  <a:srgbClr val="2563EB"/>
+                </a:solidFill>
+              </a:rPr>
+              <a:t>GEN5.3 PCA RESEARCH PIVOT</a:t>
+            </a:r>
+          </a:p>
+        </p:txBody>
+      </p:sp>
+      <p:sp>
+        <p:nvSpPr>
+          <p:cNvPr id="2" name="">
+            <a:extLst xmlns:a="http://schemas.openxmlformats.org/drawingml/2006/main">
+              <a:ext uri="{FF2B5EF4-FFF2-40B4-BE49-F238E27FC236}">
+                <a16:creationId xmlns:a16="http://schemas.microsoft.com/office/drawing/2014/main" id="{29A9BC32-4796-4D97-AE25-5A65F73F16C3}"/>
+              </a:ext>
+            </a:extLst>
+          </p:cNvPr>
+          <p:cNvSpPr>
+            <a:spLocks xmlns:a="http://schemas.openxmlformats.org/drawingml/2006/main" noGrp="1"/>
+          </p:cNvSpPr>
+          <p:nvPr/>
+        </p:nvSpPr>
+        <p:spPr>
+          <a:xfrm xmlns:a="http://schemas.openxmlformats.org/drawingml/2006/main">
+            <a:off x="609600" y="647700"/>
+            <a:ext cx="9334500" cy="876300"/>
+          </a:xfrm>
+          <a:prstGeom xmlns:a="http://schemas.openxmlformats.org/drawingml/2006/main" prst="rect">
+            <a:avLst/>
+          </a:prstGeom>
+          <a:noFill xmlns:a="http://schemas.openxmlformats.org/drawingml/2006/main"/>
+          <a:ln xmlns:a="http://schemas.openxmlformats.org/drawingml/2006/main" w="0">
+            <a:noFill/>
+            <a:prstDash val="solid"/>
+          </a:ln>
+        </p:spPr>
+        <p:txBody>
+          <a:bodyPr xmlns:a="http://schemas.openxmlformats.org/drawingml/2006/main"/>
+          <a:lstStyle xmlns:a="http://schemas.openxmlformats.org/drawingml/2006/main"/>
+          <a:p xmlns:a="http://schemas.openxmlformats.org/drawingml/2006/main">
+            <a:pPr>
+              <a:defRPr sz="2775" b="1">
+                <a:solidFill>
+                  <a:srgbClr val="111827"/>
+                </a:solidFill>
+              </a:defRPr>
+            </a:pPr>
+            <a:r>
+              <a:rPr sz="2775" b="1">
+                <a:solidFill>
+                  <a:srgbClr val="111827"/>
+                </a:solidFill>
+              </a:rPr>
+              <a:t>The first baseline gives us a clean, bounded answer</a:t>
+            </a:r>
+          </a:p>
+        </p:txBody>
+      </p:sp>
+      <p:sp>
+        <p:nvSpPr>
+          <p:cNvPr id="3" name="">
+            <a:extLst xmlns:a="http://schemas.openxmlformats.org/drawingml/2006/main">
+              <a:ext uri="{FF2B5EF4-FFF2-40B4-BE49-F238E27FC236}">
+                <a16:creationId xmlns:a16="http://schemas.microsoft.com/office/drawing/2014/main" id="{E24DE787-D63A-4D71-8268-0A833CBE4F2B}"/>
+              </a:ext>
+            </a:extLst>
+          </p:cNvPr>
+          <p:cNvSpPr>
+            <a:spLocks xmlns:a="http://schemas.openxmlformats.org/drawingml/2006/main" noGrp="1"/>
+          </p:cNvSpPr>
+          <p:nvPr/>
+        </p:nvSpPr>
+        <p:spPr>
+          <a:xfrm xmlns:a="http://schemas.openxmlformats.org/drawingml/2006/main">
+            <a:off x="609600" y="1485900"/>
+            <a:ext cx="10572750" cy="9525"/>
+          </a:xfrm>
+          <a:prstGeom xmlns:a="http://schemas.openxmlformats.org/drawingml/2006/main" prst="rect">
+            <a:avLst/>
+          </a:prstGeom>
+          <a:solidFill xmlns:a="http://schemas.openxmlformats.org/drawingml/2006/main">
+            <a:srgbClr val="CBD3DD"/>
+          </a:solidFill>
+          <a:ln xmlns:a="http://schemas.openxmlformats.org/drawingml/2006/main" w="0">
+            <a:solidFill>
+              <a:srgbClr val="CBD3DD"/>
+            </a:solidFill>
+            <a:prstDash val="solid"/>
+          </a:ln>
+        </p:spPr>
+      </p:sp>
+      <p:sp>
+        <p:nvSpPr>
+          <p:cNvPr id="4" name="">
+            <a:extLst xmlns:a="http://schemas.openxmlformats.org/drawingml/2006/main">
+              <a:ext uri="{FF2B5EF4-FFF2-40B4-BE49-F238E27FC236}">
+                <a16:creationId xmlns:a16="http://schemas.microsoft.com/office/drawing/2014/main" id="{88341BA6-A0C7-4389-A348-0EDE8444AF55}"/>
+              </a:ext>
+            </a:extLst>
+          </p:cNvPr>
+          <p:cNvSpPr>
+            <a:spLocks xmlns:a="http://schemas.openxmlformats.org/drawingml/2006/main" noGrp="1"/>
+          </p:cNvSpPr>
+          <p:nvPr/>
+        </p:nvSpPr>
+        <p:spPr>
+          <a:xfrm xmlns:a="http://schemas.openxmlformats.org/drawingml/2006/main">
+            <a:off x="704850" y="1943100"/>
+            <a:ext cx="4953000" cy="3333750"/>
+          </a:xfrm>
+          <a:prstGeom xmlns:a="http://schemas.openxmlformats.org/drawingml/2006/main" prst="roundRect">
+            <a:avLst>
+              <a:gd name="adj" fmla="val 2286"/>
+            </a:avLst>
+          </a:prstGeom>
+          <a:solidFill xmlns:a="http://schemas.openxmlformats.org/drawingml/2006/main">
+            <a:srgbClr val="EFF6FF"/>
+          </a:solidFill>
+          <a:ln xmlns:a="http://schemas.openxmlformats.org/drawingml/2006/main" w="9525">
+            <a:solidFill>
+              <a:srgbClr val="BFDBFE"/>
+            </a:solidFill>
+            <a:prstDash val="solid"/>
+          </a:ln>
+        </p:spPr>
+      </p:sp>
+      <p:sp>
+        <p:nvSpPr>
+          <p:cNvPr id="5" name="">
+            <a:extLst xmlns:a="http://schemas.openxmlformats.org/drawingml/2006/main">
+              <a:ext uri="{FF2B5EF4-FFF2-40B4-BE49-F238E27FC236}">
+                <a16:creationId xmlns:a16="http://schemas.microsoft.com/office/drawing/2014/main" id="{946ECB9C-7386-4FAC-8147-EE10B7234CF0}"/>
+              </a:ext>
+            </a:extLst>
+          </p:cNvPr>
+          <p:cNvSpPr>
+            <a:spLocks xmlns:a="http://schemas.openxmlformats.org/drawingml/2006/main" noGrp="1"/>
+          </p:cNvSpPr>
+          <p:nvPr/>
+        </p:nvSpPr>
+        <p:spPr>
+          <a:xfrm xmlns:a="http://schemas.openxmlformats.org/drawingml/2006/main">
+            <a:off x="1028700" y="2247900"/>
+            <a:ext cx="3429000" cy="304800"/>
+          </a:xfrm>
+          <a:prstGeom xmlns:a="http://schemas.openxmlformats.org/drawingml/2006/main" prst="rect">
+            <a:avLst/>
+          </a:prstGeom>
+          <a:noFill xmlns:a="http://schemas.openxmlformats.org/drawingml/2006/main"/>
+          <a:ln xmlns:a="http://schemas.openxmlformats.org/drawingml/2006/main" w="0">
+            <a:noFill/>
+            <a:prstDash val="solid"/>
+          </a:ln>
+        </p:spPr>
+        <p:txBody>
+          <a:bodyPr xmlns:a="http://schemas.openxmlformats.org/drawingml/2006/main"/>
+          <a:lstStyle xmlns:a="http://schemas.openxmlformats.org/drawingml/2006/main"/>
+          <a:p xmlns:a="http://schemas.openxmlformats.org/drawingml/2006/main">
+            <a:pPr>
+              <a:defRPr sz="2025" b="1">
+                <a:solidFill>
+                  <a:srgbClr val="2563EB"/>
+                </a:solidFill>
+              </a:defRPr>
+            </a:pPr>
+            <a:r>
+              <a:rPr sz="2025" b="1">
+                <a:solidFill>
+                  <a:srgbClr val="2563EB"/>
+                </a:solidFill>
+              </a:rPr>
+              <a:t>What we tested</a:t>
+            </a:r>
+          </a:p>
+        </p:txBody>
+      </p:sp>
+      <p:sp>
+        <p:nvSpPr>
+          <p:cNvPr id="6" name="">
+            <a:extLst xmlns:a="http://schemas.openxmlformats.org/drawingml/2006/main">
+              <a:ext uri="{FF2B5EF4-FFF2-40B4-BE49-F238E27FC236}">
+                <a16:creationId xmlns:a16="http://schemas.microsoft.com/office/drawing/2014/main" id="{C48F1386-E841-49EF-A08F-F88963D64767}"/>
+              </a:ext>
+            </a:extLst>
+          </p:cNvPr>
+          <p:cNvSpPr>
+            <a:spLocks xmlns:a="http://schemas.openxmlformats.org/drawingml/2006/main" noGrp="1"/>
+          </p:cNvSpPr>
+          <p:nvPr/>
+        </p:nvSpPr>
+        <p:spPr>
+          <a:xfrm xmlns:a="http://schemas.openxmlformats.org/drawingml/2006/main">
+            <a:off x="1047750" y="2924175"/>
+            <a:ext cx="76200" cy="76200"/>
+          </a:xfrm>
+          <a:prstGeom xmlns:a="http://schemas.openxmlformats.org/drawingml/2006/main" prst="ellipse">
+            <a:avLst/>
+          </a:prstGeom>
+          <a:solidFill xmlns:a="http://schemas.openxmlformats.org/drawingml/2006/main">
+            <a:srgbClr val="2563EB"/>
+          </a:solidFill>
+          <a:ln xmlns:a="http://schemas.openxmlformats.org/drawingml/2006/main" w="0">
+            <a:noFill/>
+            <a:prstDash val="solid"/>
+          </a:ln>
+        </p:spPr>
+      </p:sp>
+      <p:sp>
+        <p:nvSpPr>
+          <p:cNvPr id="7" name="">
+            <a:extLst xmlns:a="http://schemas.openxmlformats.org/drawingml/2006/main">
+              <a:ext uri="{FF2B5EF4-FFF2-40B4-BE49-F238E27FC236}">
+                <a16:creationId xmlns:a16="http://schemas.microsoft.com/office/drawing/2014/main" id="{CEF94EC5-F88D-419C-8787-27A92ECAA2B2}"/>
+              </a:ext>
+            </a:extLst>
+          </p:cNvPr>
+          <p:cNvSpPr>
+            <a:spLocks xmlns:a="http://schemas.openxmlformats.org/drawingml/2006/main" noGrp="1"/>
+          </p:cNvSpPr>
+          <p:nvPr/>
+        </p:nvSpPr>
+        <p:spPr>
+          <a:xfrm xmlns:a="http://schemas.openxmlformats.org/drawingml/2006/main">
+            <a:off x="1257300" y="2838450"/>
+            <a:ext cx="3695700" cy="361950"/>
+          </a:xfrm>
+          <a:prstGeom xmlns:a="http://schemas.openxmlformats.org/drawingml/2006/main" prst="rect">
+            <a:avLst/>
+          </a:prstGeom>
+          <a:noFill xmlns:a="http://schemas.openxmlformats.org/drawingml/2006/main"/>
+          <a:ln xmlns:a="http://schemas.openxmlformats.org/drawingml/2006/main" w="0">
+            <a:noFill/>
+            <a:prstDash val="solid"/>
+          </a:ln>
+        </p:spPr>
+        <p:txBody>
+          <a:bodyPr xmlns:a="http://schemas.openxmlformats.org/drawingml/2006/main"/>
+          <a:lstStyle xmlns:a="http://schemas.openxmlformats.org/drawingml/2006/main"/>
+          <a:p xmlns:a="http://schemas.openxmlformats.org/drawingml/2006/main">
+            <a:pPr>
+              <a:defRPr sz="1350" b="0">
+                <a:solidFill>
+                  <a:srgbClr val="111827"/>
+                </a:solidFill>
+              </a:defRPr>
+            </a:pPr>
+            <a:r>
+              <a:rPr sz="1350" b="0">
+                <a:solidFill>
+                  <a:srgbClr val="111827"/>
+                </a:solidFill>
+              </a:rPr>
+              <a:t>High-beta basket: AMD, NVDA, TSLA, AAPL, MSTR</a:t>
+            </a:r>
+          </a:p>
+        </p:txBody>
+      </p:sp>
+      <p:sp>
+        <p:nvSpPr>
+          <p:cNvPr id="8" name="">
+            <a:extLst xmlns:a="http://schemas.openxmlformats.org/drawingml/2006/main">
+              <a:ext uri="{FF2B5EF4-FFF2-40B4-BE49-F238E27FC236}">
+                <a16:creationId xmlns:a16="http://schemas.microsoft.com/office/drawing/2014/main" id="{D3ABC21C-1006-4A43-B782-46DF7D13F5E6}"/>
+              </a:ext>
+            </a:extLst>
+          </p:cNvPr>
+          <p:cNvSpPr>
+            <a:spLocks xmlns:a="http://schemas.openxmlformats.org/drawingml/2006/main" noGrp="1"/>
+          </p:cNvSpPr>
+          <p:nvPr/>
+        </p:nvSpPr>
+        <p:spPr>
+          <a:xfrm xmlns:a="http://schemas.openxmlformats.org/drawingml/2006/main">
+            <a:off x="1047750" y="3248025"/>
+            <a:ext cx="76200" cy="76200"/>
+          </a:xfrm>
+          <a:prstGeom xmlns:a="http://schemas.openxmlformats.org/drawingml/2006/main" prst="ellipse">
+            <a:avLst/>
+          </a:prstGeom>
+          <a:solidFill xmlns:a="http://schemas.openxmlformats.org/drawingml/2006/main">
+            <a:srgbClr val="2563EB"/>
+          </a:solidFill>
+          <a:ln xmlns:a="http://schemas.openxmlformats.org/drawingml/2006/main" w="0">
+            <a:noFill/>
+            <a:prstDash val="solid"/>
+          </a:ln>
+        </p:spPr>
+      </p:sp>
+      <p:sp>
+        <p:nvSpPr>
+          <p:cNvPr id="9" name="">
+            <a:extLst xmlns:a="http://schemas.openxmlformats.org/drawingml/2006/main">
+              <a:ext uri="{FF2B5EF4-FFF2-40B4-BE49-F238E27FC236}">
+                <a16:creationId xmlns:a16="http://schemas.microsoft.com/office/drawing/2014/main" id="{226EE91E-4877-4D4A-A319-37CFDBA3F934}"/>
+              </a:ext>
+            </a:extLst>
+          </p:cNvPr>
+          <p:cNvSpPr>
+            <a:spLocks xmlns:a="http://schemas.openxmlformats.org/drawingml/2006/main" noGrp="1"/>
+          </p:cNvSpPr>
+          <p:nvPr/>
+        </p:nvSpPr>
+        <p:spPr>
+          <a:xfrm xmlns:a="http://schemas.openxmlformats.org/drawingml/2006/main">
+            <a:off x="1257300" y="3162300"/>
+            <a:ext cx="3695700" cy="361950"/>
+          </a:xfrm>
+          <a:prstGeom xmlns:a="http://schemas.openxmlformats.org/drawingml/2006/main" prst="rect">
+            <a:avLst/>
+          </a:prstGeom>
+          <a:noFill xmlns:a="http://schemas.openxmlformats.org/drawingml/2006/main"/>
+          <a:ln xmlns:a="http://schemas.openxmlformats.org/drawingml/2006/main" w="0">
+            <a:noFill/>
+            <a:prstDash val="solid"/>
+          </a:ln>
+        </p:spPr>
+        <p:txBody>
+          <a:bodyPr xmlns:a="http://schemas.openxmlformats.org/drawingml/2006/main"/>
+          <a:lstStyle xmlns:a="http://schemas.openxmlformats.org/drawingml/2006/main"/>
+          <a:p xmlns:a="http://schemas.openxmlformats.org/drawingml/2006/main">
+            <a:pPr>
+              <a:defRPr sz="1350" b="0">
+                <a:solidFill>
+                  <a:srgbClr val="111827"/>
+                </a:solidFill>
+              </a:defRPr>
+            </a:pPr>
+            <a:r>
+              <a:rPr sz="1350" b="0">
+                <a:solidFill>
+                  <a:srgbClr val="111827"/>
+                </a:solidFill>
+              </a:rPr>
+              <a:t>Context: basket + SPY/QQQ/IWM/SMH/TLT/GLD</a:t>
+            </a:r>
+          </a:p>
+        </p:txBody>
+      </p:sp>
+      <p:sp>
+        <p:nvSpPr>
+          <p:cNvPr id="10" name="">
+            <a:extLst xmlns:a="http://schemas.openxmlformats.org/drawingml/2006/main">
+              <a:ext uri="{FF2B5EF4-FFF2-40B4-BE49-F238E27FC236}">
+                <a16:creationId xmlns:a16="http://schemas.microsoft.com/office/drawing/2014/main" id="{AB940544-8A0A-4C1A-A2D3-56112916A610}"/>
+              </a:ext>
+            </a:extLst>
+          </p:cNvPr>
+          <p:cNvSpPr>
+            <a:spLocks xmlns:a="http://schemas.openxmlformats.org/drawingml/2006/main" noGrp="1"/>
+          </p:cNvSpPr>
+          <p:nvPr/>
+        </p:nvSpPr>
+        <p:spPr>
+          <a:xfrm xmlns:a="http://schemas.openxmlformats.org/drawingml/2006/main">
+            <a:off x="1047750" y="3571875"/>
+            <a:ext cx="76200" cy="76200"/>
+          </a:xfrm>
+          <a:prstGeom xmlns:a="http://schemas.openxmlformats.org/drawingml/2006/main" prst="ellipse">
+            <a:avLst/>
+          </a:prstGeom>
+          <a:solidFill xmlns:a="http://schemas.openxmlformats.org/drawingml/2006/main">
+            <a:srgbClr val="2563EB"/>
+          </a:solidFill>
+          <a:ln xmlns:a="http://schemas.openxmlformats.org/drawingml/2006/main" w="0">
+            <a:noFill/>
+            <a:prstDash val="solid"/>
+          </a:ln>
+        </p:spPr>
+      </p:sp>
+      <p:sp>
+        <p:nvSpPr>
+          <p:cNvPr id="11" name="">
+            <a:extLst xmlns:a="http://schemas.openxmlformats.org/drawingml/2006/main">
+              <a:ext uri="{FF2B5EF4-FFF2-40B4-BE49-F238E27FC236}">
+                <a16:creationId xmlns:a16="http://schemas.microsoft.com/office/drawing/2014/main" id="{86CA11B9-23ED-4EA7-A27E-52D9F1B4D7B0}"/>
+              </a:ext>
+            </a:extLst>
+          </p:cNvPr>
+          <p:cNvSpPr>
+            <a:spLocks xmlns:a="http://schemas.openxmlformats.org/drawingml/2006/main" noGrp="1"/>
+          </p:cNvSpPr>
+          <p:nvPr/>
+        </p:nvSpPr>
+        <p:spPr>
+          <a:xfrm xmlns:a="http://schemas.openxmlformats.org/drawingml/2006/main">
+            <a:off x="1257300" y="3486150"/>
+            <a:ext cx="3695700" cy="361950"/>
+          </a:xfrm>
+          <a:prstGeom xmlns:a="http://schemas.openxmlformats.org/drawingml/2006/main" prst="rect">
+            <a:avLst/>
+          </a:prstGeom>
+          <a:noFill xmlns:a="http://schemas.openxmlformats.org/drawingml/2006/main"/>
+          <a:ln xmlns:a="http://schemas.openxmlformats.org/drawingml/2006/main" w="0">
+            <a:noFill/>
+            <a:prstDash val="solid"/>
+          </a:ln>
+        </p:spPr>
+        <p:txBody>
+          <a:bodyPr xmlns:a="http://schemas.openxmlformats.org/drawingml/2006/main"/>
+          <a:lstStyle xmlns:a="http://schemas.openxmlformats.org/drawingml/2006/main"/>
+          <a:p xmlns:a="http://schemas.openxmlformats.org/drawingml/2006/main">
+            <a:pPr>
+              <a:defRPr sz="1350" b="0">
+                <a:solidFill>
+                  <a:srgbClr val="111827"/>
+                </a:solidFill>
+              </a:defRPr>
+            </a:pPr>
+            <a:r>
+              <a:rPr sz="1350" b="0">
+                <a:solidFill>
+                  <a:srgbClr val="111827"/>
+                </a:solidFill>
+              </a:rPr>
+              <a:t>PCA: behavioral-pool, 3x3 quantile states</a:t>
+            </a:r>
+          </a:p>
+        </p:txBody>
+      </p:sp>
+      <p:sp>
+        <p:nvSpPr>
+          <p:cNvPr id="12" name="">
+            <a:extLst xmlns:a="http://schemas.openxmlformats.org/drawingml/2006/main">
+              <a:ext uri="{FF2B5EF4-FFF2-40B4-BE49-F238E27FC236}">
+                <a16:creationId xmlns:a16="http://schemas.microsoft.com/office/drawing/2014/main" id="{618126D9-1435-48C4-99F2-63BC7F47CB9D}"/>
+              </a:ext>
+            </a:extLst>
+          </p:cNvPr>
+          <p:cNvSpPr>
+            <a:spLocks xmlns:a="http://schemas.openxmlformats.org/drawingml/2006/main" noGrp="1"/>
+          </p:cNvSpPr>
+          <p:nvPr/>
+        </p:nvSpPr>
+        <p:spPr>
+          <a:xfrm xmlns:a="http://schemas.openxmlformats.org/drawingml/2006/main">
+            <a:off x="1047750" y="3895725"/>
+            <a:ext cx="76200" cy="76200"/>
+          </a:xfrm>
+          <a:prstGeom xmlns:a="http://schemas.openxmlformats.org/drawingml/2006/main" prst="ellipse">
+            <a:avLst/>
+          </a:prstGeom>
+          <a:solidFill xmlns:a="http://schemas.openxmlformats.org/drawingml/2006/main">
+            <a:srgbClr val="2563EB"/>
+          </a:solidFill>
+          <a:ln xmlns:a="http://schemas.openxmlformats.org/drawingml/2006/main" w="0">
+            <a:noFill/>
+            <a:prstDash val="solid"/>
+          </a:ln>
+        </p:spPr>
+      </p:sp>
+      <p:sp>
+        <p:nvSpPr>
+          <p:cNvPr id="13" name="">
+            <a:extLst xmlns:a="http://schemas.openxmlformats.org/drawingml/2006/main">
+              <a:ext uri="{FF2B5EF4-FFF2-40B4-BE49-F238E27FC236}">
+                <a16:creationId xmlns:a16="http://schemas.microsoft.com/office/drawing/2014/main" id="{3AEBBC96-9B67-4488-8414-423F59D7463D}"/>
+              </a:ext>
+            </a:extLst>
+          </p:cNvPr>
+          <p:cNvSpPr>
+            <a:spLocks xmlns:a="http://schemas.openxmlformats.org/drawingml/2006/main" noGrp="1"/>
+          </p:cNvSpPr>
+          <p:nvPr/>
+        </p:nvSpPr>
+        <p:spPr>
+          <a:xfrm xmlns:a="http://schemas.openxmlformats.org/drawingml/2006/main">
+            <a:off x="1257300" y="3810000"/>
+            <a:ext cx="3695700" cy="361950"/>
+          </a:xfrm>
+          <a:prstGeom xmlns:a="http://schemas.openxmlformats.org/drawingml/2006/main" prst="rect">
+            <a:avLst/>
+          </a:prstGeom>
+          <a:noFill xmlns:a="http://schemas.openxmlformats.org/drawingml/2006/main"/>
+          <a:ln xmlns:a="http://schemas.openxmlformats.org/drawingml/2006/main" w="0">
+            <a:noFill/>
+            <a:prstDash val="solid"/>
+          </a:ln>
+        </p:spPr>
+        <p:txBody>
+          <a:bodyPr xmlns:a="http://schemas.openxmlformats.org/drawingml/2006/main"/>
+          <a:lstStyle xmlns:a="http://schemas.openxmlformats.org/drawingml/2006/main"/>
+          <a:p xmlns:a="http://schemas.openxmlformats.org/drawingml/2006/main">
+            <a:pPr>
+              <a:defRPr sz="1350" b="0">
+                <a:solidFill>
+                  <a:srgbClr val="111827"/>
+                </a:solidFill>
+              </a:defRPr>
+            </a:pPr>
+            <a:r>
+              <a:rPr sz="1350" b="0">
+                <a:solidFill>
+                  <a:srgbClr val="111827"/>
+                </a:solidFill>
+              </a:rPr>
+              <a:t>Policy: pooled-family asset-variant</a:t>
+            </a:r>
+          </a:p>
+        </p:txBody>
+      </p:sp>
+      <p:sp>
+        <p:nvSpPr>
+          <p:cNvPr id="14" name="">
+            <a:extLst xmlns:a="http://schemas.openxmlformats.org/drawingml/2006/main">
+              <a:ext uri="{FF2B5EF4-FFF2-40B4-BE49-F238E27FC236}">
+                <a16:creationId xmlns:a16="http://schemas.microsoft.com/office/drawing/2014/main" id="{6F48D719-5AF5-42F6-8F17-11DA2E7ED6B8}"/>
+              </a:ext>
+            </a:extLst>
+          </p:cNvPr>
+          <p:cNvSpPr>
+            <a:spLocks xmlns:a="http://schemas.openxmlformats.org/drawingml/2006/main" noGrp="1"/>
+          </p:cNvSpPr>
+          <p:nvPr/>
+        </p:nvSpPr>
+        <p:spPr>
+          <a:xfrm xmlns:a="http://schemas.openxmlformats.org/drawingml/2006/main">
+            <a:off x="1047750" y="4219575"/>
+            <a:ext cx="76200" cy="76200"/>
+          </a:xfrm>
+          <a:prstGeom xmlns:a="http://schemas.openxmlformats.org/drawingml/2006/main" prst="ellipse">
+            <a:avLst/>
+          </a:prstGeom>
+          <a:solidFill xmlns:a="http://schemas.openxmlformats.org/drawingml/2006/main">
+            <a:srgbClr val="2563EB"/>
+          </a:solidFill>
+          <a:ln xmlns:a="http://schemas.openxmlformats.org/drawingml/2006/main" w="0">
+            <a:noFill/>
+            <a:prstDash val="solid"/>
+          </a:ln>
+        </p:spPr>
+      </p:sp>
+      <p:sp>
+        <p:nvSpPr>
+          <p:cNvPr id="15" name="">
+            <a:extLst xmlns:a="http://schemas.openxmlformats.org/drawingml/2006/main">
+              <a:ext uri="{FF2B5EF4-FFF2-40B4-BE49-F238E27FC236}">
+                <a16:creationId xmlns:a16="http://schemas.microsoft.com/office/drawing/2014/main" id="{6EF81309-8F0C-412D-8A67-C6DB5089B12E}"/>
+              </a:ext>
+            </a:extLst>
+          </p:cNvPr>
+          <p:cNvSpPr>
+            <a:spLocks xmlns:a="http://schemas.openxmlformats.org/drawingml/2006/main" noGrp="1"/>
+          </p:cNvSpPr>
+          <p:nvPr/>
+        </p:nvSpPr>
+        <p:spPr>
+          <a:xfrm xmlns:a="http://schemas.openxmlformats.org/drawingml/2006/main">
+            <a:off x="1257300" y="4133850"/>
+            <a:ext cx="3695700" cy="361950"/>
+          </a:xfrm>
+          <a:prstGeom xmlns:a="http://schemas.openxmlformats.org/drawingml/2006/main" prst="rect">
+            <a:avLst/>
+          </a:prstGeom>
+          <a:noFill xmlns:a="http://schemas.openxmlformats.org/drawingml/2006/main"/>
+          <a:ln xmlns:a="http://schemas.openxmlformats.org/drawingml/2006/main" w="0">
+            <a:noFill/>
+            <a:prstDash val="solid"/>
+          </a:ln>
+        </p:spPr>
+        <p:txBody>
+          <a:bodyPr xmlns:a="http://schemas.openxmlformats.org/drawingml/2006/main"/>
+          <a:lstStyle xmlns:a="http://schemas.openxmlformats.org/drawingml/2006/main"/>
+          <a:p xmlns:a="http://schemas.openxmlformats.org/drawingml/2006/main">
+            <a:pPr>
+              <a:defRPr sz="1350" b="0">
+                <a:solidFill>
+                  <a:srgbClr val="111827"/>
+                </a:solidFill>
+              </a:defRPr>
+            </a:pPr>
+            <a:r>
+              <a:rPr sz="1350" b="0">
+                <a:solidFill>
+                  <a:srgbClr val="111827"/>
+                </a:solidFill>
+              </a:rPr>
+              <a:t>Families: EMA, breakout, pullback, volatility breakout, no-trade</a:t>
+            </a:r>
+          </a:p>
+        </p:txBody>
+      </p:sp>
+      <p:sp>
+        <p:nvSpPr>
+          <p:cNvPr id="16" name="">
+            <a:extLst xmlns:a="http://schemas.openxmlformats.org/drawingml/2006/main">
+              <a:ext uri="{FF2B5EF4-FFF2-40B4-BE49-F238E27FC236}">
+                <a16:creationId xmlns:a16="http://schemas.microsoft.com/office/drawing/2014/main" id="{79B06206-3877-438C-B4D1-926C5A9916CA}"/>
+              </a:ext>
+            </a:extLst>
+          </p:cNvPr>
+          <p:cNvSpPr>
+            <a:spLocks xmlns:a="http://schemas.openxmlformats.org/drawingml/2006/main" noGrp="1"/>
+          </p:cNvSpPr>
+          <p:nvPr/>
+        </p:nvSpPr>
+        <p:spPr>
+          <a:xfrm xmlns:a="http://schemas.openxmlformats.org/drawingml/2006/main">
+            <a:off x="6496050" y="1943100"/>
+            <a:ext cx="4953000" cy="3333750"/>
+          </a:xfrm>
+          <a:prstGeom xmlns:a="http://schemas.openxmlformats.org/drawingml/2006/main" prst="roundRect">
+            <a:avLst>
+              <a:gd name="adj" fmla="val 2286"/>
+            </a:avLst>
+          </a:prstGeom>
+          <a:solidFill xmlns:a="http://schemas.openxmlformats.org/drawingml/2006/main">
+            <a:srgbClr val="F0FDF4"/>
+          </a:solidFill>
+          <a:ln xmlns:a="http://schemas.openxmlformats.org/drawingml/2006/main" w="9525">
+            <a:solidFill>
+              <a:srgbClr val="A7F3D0"/>
+            </a:solidFill>
+            <a:prstDash val="solid"/>
+          </a:ln>
+        </p:spPr>
+      </p:sp>
+      <p:sp>
+        <p:nvSpPr>
+          <p:cNvPr id="17" name="">
+            <a:extLst xmlns:a="http://schemas.openxmlformats.org/drawingml/2006/main">
+              <a:ext uri="{FF2B5EF4-FFF2-40B4-BE49-F238E27FC236}">
+                <a16:creationId xmlns:a16="http://schemas.microsoft.com/office/drawing/2014/main" id="{D4666629-F56D-4D53-AB7E-44ECB1F297AD}"/>
+              </a:ext>
+            </a:extLst>
+          </p:cNvPr>
+          <p:cNvSpPr>
+            <a:spLocks xmlns:a="http://schemas.openxmlformats.org/drawingml/2006/main" noGrp="1"/>
+          </p:cNvSpPr>
+          <p:nvPr/>
+        </p:nvSpPr>
+        <p:spPr>
+          <a:xfrm xmlns:a="http://schemas.openxmlformats.org/drawingml/2006/main">
+            <a:off x="6819900" y="2247900"/>
+            <a:ext cx="3429000" cy="304800"/>
+          </a:xfrm>
+          <a:prstGeom xmlns:a="http://schemas.openxmlformats.org/drawingml/2006/main" prst="rect">
+            <a:avLst/>
+          </a:prstGeom>
+          <a:noFill xmlns:a="http://schemas.openxmlformats.org/drawingml/2006/main"/>
+          <a:ln xmlns:a="http://schemas.openxmlformats.org/drawingml/2006/main" w="0">
+            <a:noFill/>
+            <a:prstDash val="solid"/>
+          </a:ln>
+        </p:spPr>
+        <p:txBody>
+          <a:bodyPr xmlns:a="http://schemas.openxmlformats.org/drawingml/2006/main"/>
+          <a:lstStyle xmlns:a="http://schemas.openxmlformats.org/drawingml/2006/main"/>
+          <a:p xmlns:a="http://schemas.openxmlformats.org/drawingml/2006/main">
+            <a:pPr>
+              <a:defRPr sz="2025" b="1">
+                <a:solidFill>
+                  <a:srgbClr val="177A55"/>
+                </a:solidFill>
+              </a:defRPr>
+            </a:pPr>
+            <a:r>
+              <a:rPr sz="2025" b="1">
+                <a:solidFill>
+                  <a:srgbClr val="177A55"/>
+                </a:solidFill>
+              </a:rPr>
+              <a:t>Why this matters</a:t>
+            </a:r>
+          </a:p>
+        </p:txBody>
+      </p:sp>
+      <p:sp>
+        <p:nvSpPr>
+          <p:cNvPr id="18" name="">
+            <a:extLst xmlns:a="http://schemas.openxmlformats.org/drawingml/2006/main">
+              <a:ext uri="{FF2B5EF4-FFF2-40B4-BE49-F238E27FC236}">
+                <a16:creationId xmlns:a16="http://schemas.microsoft.com/office/drawing/2014/main" id="{E20C6ADF-34D4-49F1-BCDF-3AFCDD95D209}"/>
+              </a:ext>
+            </a:extLst>
+          </p:cNvPr>
+          <p:cNvSpPr>
+            <a:spLocks xmlns:a="http://schemas.openxmlformats.org/drawingml/2006/main" noGrp="1"/>
+          </p:cNvSpPr>
+          <p:nvPr/>
+        </p:nvSpPr>
+        <p:spPr>
+          <a:xfrm xmlns:a="http://schemas.openxmlformats.org/drawingml/2006/main">
+            <a:off x="6838950" y="3000375"/>
+            <a:ext cx="76200" cy="76200"/>
+          </a:xfrm>
+          <a:prstGeom xmlns:a="http://schemas.openxmlformats.org/drawingml/2006/main" prst="ellipse">
+            <a:avLst/>
+          </a:prstGeom>
+          <a:solidFill xmlns:a="http://schemas.openxmlformats.org/drawingml/2006/main">
+            <a:srgbClr val="177A55"/>
+          </a:solidFill>
+          <a:ln xmlns:a="http://schemas.openxmlformats.org/drawingml/2006/main" w="0">
+            <a:noFill/>
+            <a:prstDash val="solid"/>
+          </a:ln>
+        </p:spPr>
+      </p:sp>
+      <p:sp>
+        <p:nvSpPr>
+          <p:cNvPr id="19" name="">
+            <a:extLst xmlns:a="http://schemas.openxmlformats.org/drawingml/2006/main">
+              <a:ext uri="{FF2B5EF4-FFF2-40B4-BE49-F238E27FC236}">
+                <a16:creationId xmlns:a16="http://schemas.microsoft.com/office/drawing/2014/main" id="{7CC1659A-0079-400B-9CDD-D13683EE02CA}"/>
+              </a:ext>
+            </a:extLst>
+          </p:cNvPr>
+          <p:cNvSpPr>
+            <a:spLocks xmlns:a="http://schemas.openxmlformats.org/drawingml/2006/main" noGrp="1"/>
+          </p:cNvSpPr>
+          <p:nvPr/>
+        </p:nvSpPr>
+        <p:spPr>
+          <a:xfrm xmlns:a="http://schemas.openxmlformats.org/drawingml/2006/main">
+            <a:off x="7048500" y="2914650"/>
+            <a:ext cx="3695700" cy="409575"/>
+          </a:xfrm>
+          <a:prstGeom xmlns:a="http://schemas.openxmlformats.org/drawingml/2006/main" prst="rect">
+            <a:avLst/>
+          </a:prstGeom>
+          <a:noFill xmlns:a="http://schemas.openxmlformats.org/drawingml/2006/main"/>
+          <a:ln xmlns:a="http://schemas.openxmlformats.org/drawingml/2006/main" w="0">
+            <a:noFill/>
+            <a:prstDash val="solid"/>
+          </a:ln>
+        </p:spPr>
+        <p:txBody>
+          <a:bodyPr xmlns:a="http://schemas.openxmlformats.org/drawingml/2006/main"/>
+          <a:lstStyle xmlns:a="http://schemas.openxmlformats.org/drawingml/2006/main"/>
+          <a:p xmlns:a="http://schemas.openxmlformats.org/drawingml/2006/main">
+            <a:pPr>
+              <a:defRPr sz="1350" b="0">
+                <a:solidFill>
+                  <a:srgbClr val="111827"/>
+                </a:solidFill>
+              </a:defRPr>
+            </a:pPr>
+            <a:r>
+              <a:rPr sz="1350" b="0">
+                <a:solidFill>
+                  <a:srgbClr val="111827"/>
+                </a:solidFill>
+              </a:rPr>
+              <a:t>It tests participation quality before adding basket curation</a:t>
+            </a:r>
+          </a:p>
+        </p:txBody>
+      </p:sp>
+      <p:sp>
+        <p:nvSpPr>
+          <p:cNvPr id="20" name="">
+            <a:extLst xmlns:a="http://schemas.openxmlformats.org/drawingml/2006/main">
+              <a:ext uri="{FF2B5EF4-FFF2-40B4-BE49-F238E27FC236}">
+                <a16:creationId xmlns:a16="http://schemas.microsoft.com/office/drawing/2014/main" id="{6F37CB97-20AC-400D-AF2D-3AB96B633B85}"/>
+              </a:ext>
+            </a:extLst>
+          </p:cNvPr>
+          <p:cNvSpPr>
+            <a:spLocks xmlns:a="http://schemas.openxmlformats.org/drawingml/2006/main" noGrp="1"/>
+          </p:cNvSpPr>
+          <p:nvPr/>
+        </p:nvSpPr>
+        <p:spPr>
+          <a:xfrm xmlns:a="http://schemas.openxmlformats.org/drawingml/2006/main">
+            <a:off x="6838950" y="3371850"/>
+            <a:ext cx="76200" cy="76200"/>
+          </a:xfrm>
+          <a:prstGeom xmlns:a="http://schemas.openxmlformats.org/drawingml/2006/main" prst="ellipse">
+            <a:avLst/>
+          </a:prstGeom>
+          <a:solidFill xmlns:a="http://schemas.openxmlformats.org/drawingml/2006/main">
+            <a:srgbClr val="177A55"/>
+          </a:solidFill>
+          <a:ln xmlns:a="http://schemas.openxmlformats.org/drawingml/2006/main" w="0">
+            <a:noFill/>
+            <a:prstDash val="solid"/>
+          </a:ln>
+        </p:spPr>
+      </p:sp>
+      <p:sp>
+        <p:nvSpPr>
+          <p:cNvPr id="21" name="">
+            <a:extLst xmlns:a="http://schemas.openxmlformats.org/drawingml/2006/main">
+              <a:ext uri="{FF2B5EF4-FFF2-40B4-BE49-F238E27FC236}">
+                <a16:creationId xmlns:a16="http://schemas.microsoft.com/office/drawing/2014/main" id="{16BF09B5-2693-4564-B5CF-03A4D31DE5B2}"/>
+              </a:ext>
+            </a:extLst>
+          </p:cNvPr>
+          <p:cNvSpPr>
+            <a:spLocks xmlns:a="http://schemas.openxmlformats.org/drawingml/2006/main" noGrp="1"/>
+          </p:cNvSpPr>
+          <p:nvPr/>
+        </p:nvSpPr>
+        <p:spPr>
+          <a:xfrm xmlns:a="http://schemas.openxmlformats.org/drawingml/2006/main">
+            <a:off x="7048500" y="3286125"/>
+            <a:ext cx="3695700" cy="409575"/>
+          </a:xfrm>
+          <a:prstGeom xmlns:a="http://schemas.openxmlformats.org/drawingml/2006/main" prst="rect">
+            <a:avLst/>
+          </a:prstGeom>
+          <a:noFill xmlns:a="http://schemas.openxmlformats.org/drawingml/2006/main"/>
+          <a:ln xmlns:a="http://schemas.openxmlformats.org/drawingml/2006/main" w="0">
+            <a:noFill/>
+            <a:prstDash val="solid"/>
+          </a:ln>
+        </p:spPr>
+        <p:txBody>
+          <a:bodyPr xmlns:a="http://schemas.openxmlformats.org/drawingml/2006/main"/>
+          <a:lstStyle xmlns:a="http://schemas.openxmlformats.org/drawingml/2006/main"/>
+          <a:p xmlns:a="http://schemas.openxmlformats.org/drawingml/2006/main">
+            <a:pPr>
+              <a:defRPr sz="1350" b="0">
+                <a:solidFill>
+                  <a:srgbClr val="111827"/>
+                </a:solidFill>
+              </a:defRPr>
+            </a:pPr>
+            <a:r>
+              <a:rPr sz="1350" b="0">
+                <a:solidFill>
+                  <a:srgbClr val="111827"/>
+                </a:solidFill>
+              </a:rPr>
+              <a:t>It keeps mean reversion and SMA out of the first specialist baseline</a:t>
+            </a:r>
+          </a:p>
+        </p:txBody>
+      </p:sp>
+      <p:sp>
+        <p:nvSpPr>
+          <p:cNvPr id="22" name="">
+            <a:extLst xmlns:a="http://schemas.openxmlformats.org/drawingml/2006/main">
+              <a:ext uri="{FF2B5EF4-FFF2-40B4-BE49-F238E27FC236}">
+                <a16:creationId xmlns:a16="http://schemas.microsoft.com/office/drawing/2014/main" id="{B92E38F8-E3EA-44F9-96D0-EE718C4C21F0}"/>
+              </a:ext>
+            </a:extLst>
+          </p:cNvPr>
+          <p:cNvSpPr>
+            <a:spLocks xmlns:a="http://schemas.openxmlformats.org/drawingml/2006/main" noGrp="1"/>
+          </p:cNvSpPr>
+          <p:nvPr/>
+        </p:nvSpPr>
+        <p:spPr>
+          <a:xfrm xmlns:a="http://schemas.openxmlformats.org/drawingml/2006/main">
+            <a:off x="6838950" y="3743325"/>
+            <a:ext cx="76200" cy="76200"/>
+          </a:xfrm>
+          <a:prstGeom xmlns:a="http://schemas.openxmlformats.org/drawingml/2006/main" prst="ellipse">
+            <a:avLst/>
+          </a:prstGeom>
+          <a:solidFill xmlns:a="http://schemas.openxmlformats.org/drawingml/2006/main">
+            <a:srgbClr val="177A55"/>
+          </a:solidFill>
+          <a:ln xmlns:a="http://schemas.openxmlformats.org/drawingml/2006/main" w="0">
+            <a:noFill/>
+            <a:prstDash val="solid"/>
+          </a:ln>
+        </p:spPr>
+      </p:sp>
+      <p:sp>
+        <p:nvSpPr>
+          <p:cNvPr id="23" name="">
+            <a:extLst xmlns:a="http://schemas.openxmlformats.org/drawingml/2006/main">
+              <a:ext uri="{FF2B5EF4-FFF2-40B4-BE49-F238E27FC236}">
+                <a16:creationId xmlns:a16="http://schemas.microsoft.com/office/drawing/2014/main" id="{E15FA4CF-E644-41F2-8418-05E4495488F2}"/>
+              </a:ext>
+            </a:extLst>
+          </p:cNvPr>
+          <p:cNvSpPr>
+            <a:spLocks xmlns:a="http://schemas.openxmlformats.org/drawingml/2006/main" noGrp="1"/>
+          </p:cNvSpPr>
+          <p:nvPr/>
+        </p:nvSpPr>
+        <p:spPr>
+          <a:xfrm xmlns:a="http://schemas.openxmlformats.org/drawingml/2006/main">
+            <a:off x="7048500" y="3657600"/>
+            <a:ext cx="3695700" cy="409575"/>
+          </a:xfrm>
+          <a:prstGeom xmlns:a="http://schemas.openxmlformats.org/drawingml/2006/main" prst="rect">
+            <a:avLst/>
+          </a:prstGeom>
+          <a:noFill xmlns:a="http://schemas.openxmlformats.org/drawingml/2006/main"/>
+          <a:ln xmlns:a="http://schemas.openxmlformats.org/drawingml/2006/main" w="0">
+            <a:noFill/>
+            <a:prstDash val="solid"/>
+          </a:ln>
+        </p:spPr>
+        <p:txBody>
+          <a:bodyPr xmlns:a="http://schemas.openxmlformats.org/drawingml/2006/main"/>
+          <a:lstStyle xmlns:a="http://schemas.openxmlformats.org/drawingml/2006/main"/>
+          <a:p xmlns:a="http://schemas.openxmlformats.org/drawingml/2006/main">
+            <a:pPr>
+              <a:defRPr sz="1350" b="0">
+                <a:solidFill>
+                  <a:srgbClr val="111827"/>
+                </a:solidFill>
+              </a:defRPr>
+            </a:pPr>
+            <a:r>
+              <a:rPr sz="1350" b="0">
+                <a:solidFill>
+                  <a:srgbClr val="111827"/>
+                </a:solidFill>
+              </a:rPr>
+              <a:t>It judges the system against the hard comparator: holding the exact basket</a:t>
+            </a:r>
+          </a:p>
+        </p:txBody>
+      </p:sp>
+      <p:sp>
+        <p:nvSpPr>
+          <p:cNvPr id="24" name="">
+            <a:extLst xmlns:a="http://schemas.openxmlformats.org/drawingml/2006/main">
+              <a:ext uri="{FF2B5EF4-FFF2-40B4-BE49-F238E27FC236}">
+                <a16:creationId xmlns:a16="http://schemas.microsoft.com/office/drawing/2014/main" id="{977B37E7-8306-433D-B7C3-5E95DCFA8B8F}"/>
+              </a:ext>
+            </a:extLst>
+          </p:cNvPr>
+          <p:cNvSpPr>
+            <a:spLocks xmlns:a="http://schemas.openxmlformats.org/drawingml/2006/main" noGrp="1"/>
+          </p:cNvSpPr>
+          <p:nvPr/>
+        </p:nvSpPr>
+        <p:spPr>
+          <a:xfrm xmlns:a="http://schemas.openxmlformats.org/drawingml/2006/main">
+            <a:off x="6838950" y="4114800"/>
+            <a:ext cx="76200" cy="76200"/>
+          </a:xfrm>
+          <a:prstGeom xmlns:a="http://schemas.openxmlformats.org/drawingml/2006/main" prst="ellipse">
+            <a:avLst/>
+          </a:prstGeom>
+          <a:solidFill xmlns:a="http://schemas.openxmlformats.org/drawingml/2006/main">
+            <a:srgbClr val="177A55"/>
+          </a:solidFill>
+          <a:ln xmlns:a="http://schemas.openxmlformats.org/drawingml/2006/main" w="0">
+            <a:noFill/>
+            <a:prstDash val="solid"/>
+          </a:ln>
+        </p:spPr>
+      </p:sp>
+      <p:sp>
+        <p:nvSpPr>
+          <p:cNvPr id="25" name="">
+            <a:extLst xmlns:a="http://schemas.openxmlformats.org/drawingml/2006/main">
+              <a:ext uri="{FF2B5EF4-FFF2-40B4-BE49-F238E27FC236}">
+                <a16:creationId xmlns:a16="http://schemas.microsoft.com/office/drawing/2014/main" id="{6C877C2E-399A-4358-91A6-A325F9805CE5}"/>
+              </a:ext>
+            </a:extLst>
+          </p:cNvPr>
+          <p:cNvSpPr>
+            <a:spLocks xmlns:a="http://schemas.openxmlformats.org/drawingml/2006/main" noGrp="1"/>
+          </p:cNvSpPr>
+          <p:nvPr/>
+        </p:nvSpPr>
+        <p:spPr>
+          <a:xfrm xmlns:a="http://schemas.openxmlformats.org/drawingml/2006/main">
+            <a:off x="7048500" y="4029075"/>
+            <a:ext cx="3695700" cy="409575"/>
+          </a:xfrm>
+          <a:prstGeom xmlns:a="http://schemas.openxmlformats.org/drawingml/2006/main" prst="rect">
+            <a:avLst/>
+          </a:prstGeom>
+          <a:noFill xmlns:a="http://schemas.openxmlformats.org/drawingml/2006/main"/>
+          <a:ln xmlns:a="http://schemas.openxmlformats.org/drawingml/2006/main" w="0">
+            <a:noFill/>
+            <a:prstDash val="solid"/>
+          </a:ln>
+        </p:spPr>
+        <p:txBody>
+          <a:bodyPr xmlns:a="http://schemas.openxmlformats.org/drawingml/2006/main"/>
+          <a:lstStyle xmlns:a="http://schemas.openxmlformats.org/drawingml/2006/main"/>
+          <a:p xmlns:a="http://schemas.openxmlformats.org/drawingml/2006/main">
+            <a:pPr>
+              <a:defRPr sz="1350" b="0">
+                <a:solidFill>
+                  <a:srgbClr val="111827"/>
+                </a:solidFill>
+              </a:defRPr>
+            </a:pPr>
+            <a:r>
+              <a:rPr sz="1350" b="0">
+                <a:solidFill>
+                  <a:srgbClr val="111827"/>
+                </a:solidFill>
+              </a:rPr>
+              <a:t>It separates upside capture from drawdown avoidance</a:t>
+            </a:r>
+          </a:p>
+        </p:txBody>
+      </p:sp>
+    </p:spTree>
+    <p:extLst>
+      <p:ext uri="{BB962C8B-B14F-4D97-AF65-F5344CB8AC3E}">
+        <p14:creationId xmlns:p14="http://schemas.microsoft.com/office/powerpoint/2010/main" val="1282990229"/>
+      </p:ext>
+    </p:extLst>
+  </p:cSld>
+</p:sld>
+</file>
+
+<file path=ppt/slides/slide11.xml><?xml version="1.0" encoding="utf-8"?>
+<p:sld xmlns:p="http://schemas.openxmlformats.org/presentationml/2006/main">
+  <p:cSld>
+    <p:bg>
+      <p:bgPr>
+        <a:solidFill xmlns:a="http://schemas.openxmlformats.org/drawingml/2006/main">
+          <a:srgbClr val="FFFFFF"/>
+        </a:solidFill>
+      </p:bgPr>
+    </p:bg>
+    <p:spTree>
+      <p:nvGrpSpPr>
+        <p:cNvPr id="1" name=""/>
+        <p:cNvGrpSpPr/>
+        <p:nvPr/>
+      </p:nvGrpSpPr>
+      <p:grpSpPr>
+        <a:xfrm xmlns:a="http://schemas.openxmlformats.org/drawingml/2006/main"/>
+      </p:grpSpPr>
+      <p:sp>
+        <p:nvSpPr>
+          <p:cNvPr id="1" name="">
+            <a:extLst xmlns:a="http://schemas.openxmlformats.org/drawingml/2006/main">
+              <a:ext uri="{FF2B5EF4-FFF2-40B4-BE49-F238E27FC236}">
+                <a16:creationId xmlns:a16="http://schemas.microsoft.com/office/drawing/2014/main" id="{70CD79F7-CC52-4B5B-9E87-16A329432F58}"/>
+              </a:ext>
+            </a:extLst>
+          </p:cNvPr>
+          <p:cNvSpPr>
+            <a:spLocks xmlns:a="http://schemas.openxmlformats.org/drawingml/2006/main" noGrp="1"/>
+          </p:cNvSpPr>
+          <p:nvPr/>
+        </p:nvSpPr>
+        <p:spPr>
+          <a:xfrm xmlns:a="http://schemas.openxmlformats.org/drawingml/2006/main">
+            <a:off x="609600" y="304800"/>
+            <a:ext cx="5334000" cy="209550"/>
+          </a:xfrm>
+          <a:prstGeom xmlns:a="http://schemas.openxmlformats.org/drawingml/2006/main" prst="rect">
+            <a:avLst/>
+          </a:prstGeom>
+          <a:noFill xmlns:a="http://schemas.openxmlformats.org/drawingml/2006/main"/>
+          <a:ln xmlns:a="http://schemas.openxmlformats.org/drawingml/2006/main" w="0">
+            <a:noFill/>
+            <a:prstDash val="solid"/>
+          </a:ln>
+        </p:spPr>
+        <p:txBody>
+          <a:bodyPr xmlns:a="http://schemas.openxmlformats.org/drawingml/2006/main"/>
+          <a:lstStyle xmlns:a="http://schemas.openxmlformats.org/drawingml/2006/main"/>
+          <a:p xmlns:a="http://schemas.openxmlformats.org/drawingml/2006/main">
+            <a:pPr>
+              <a:defRPr sz="975" b="1">
+                <a:solidFill>
+                  <a:srgbClr val="2563EB"/>
+                </a:solidFill>
+              </a:defRPr>
+            </a:pPr>
+            <a:r>
+              <a:rPr sz="975" b="1">
+                <a:solidFill>
+                  <a:srgbClr val="2563EB"/>
+                </a:solidFill>
+              </a:rPr>
+              <a:t>GEN5.3 PCA RESEARCH PIVOT</a:t>
+            </a:r>
+          </a:p>
+        </p:txBody>
+      </p:sp>
+      <p:sp>
+        <p:nvSpPr>
+          <p:cNvPr id="2" name="">
+            <a:extLst xmlns:a="http://schemas.openxmlformats.org/drawingml/2006/main">
+              <a:ext uri="{FF2B5EF4-FFF2-40B4-BE49-F238E27FC236}">
+                <a16:creationId xmlns:a16="http://schemas.microsoft.com/office/drawing/2014/main" id="{84C4786C-A965-468D-98B5-1E1DC94F5841}"/>
+              </a:ext>
+            </a:extLst>
+          </p:cNvPr>
+          <p:cNvSpPr>
+            <a:spLocks xmlns:a="http://schemas.openxmlformats.org/drawingml/2006/main" noGrp="1"/>
+          </p:cNvSpPr>
+          <p:nvPr/>
+        </p:nvSpPr>
+        <p:spPr>
+          <a:xfrm xmlns:a="http://schemas.openxmlformats.org/drawingml/2006/main">
+            <a:off x="609600" y="647700"/>
+            <a:ext cx="9334500" cy="876300"/>
+          </a:xfrm>
+          <a:prstGeom xmlns:a="http://schemas.openxmlformats.org/drawingml/2006/main" prst="rect">
+            <a:avLst/>
+          </a:prstGeom>
+          <a:noFill xmlns:a="http://schemas.openxmlformats.org/drawingml/2006/main"/>
+          <a:ln xmlns:a="http://schemas.openxmlformats.org/drawingml/2006/main" w="0">
+            <a:noFill/>
+            <a:prstDash val="solid"/>
+          </a:ln>
+        </p:spPr>
+        <p:txBody>
+          <a:bodyPr xmlns:a="http://schemas.openxmlformats.org/drawingml/2006/main"/>
+          <a:lstStyle xmlns:a="http://schemas.openxmlformats.org/drawingml/2006/main"/>
+          <a:p xmlns:a="http://schemas.openxmlformats.org/drawingml/2006/main">
+            <a:pPr>
+              <a:defRPr sz="2775" b="1">
+                <a:solidFill>
+                  <a:srgbClr val="111827"/>
+                </a:solidFill>
+              </a:defRPr>
+            </a:pPr>
+            <a:r>
+              <a:rPr sz="2775" b="1">
+                <a:solidFill>
+                  <a:srgbClr val="111827"/>
+                </a:solidFill>
+              </a:rPr>
+              <a:t>The baseline protected capital in stress but still undercaptured the rebound</a:t>
+            </a:r>
+          </a:p>
+        </p:txBody>
+      </p:sp>
+      <p:sp>
+        <p:nvSpPr>
+          <p:cNvPr id="3" name="">
+            <a:extLst xmlns:a="http://schemas.openxmlformats.org/drawingml/2006/main">
+              <a:ext uri="{FF2B5EF4-FFF2-40B4-BE49-F238E27FC236}">
+                <a16:creationId xmlns:a16="http://schemas.microsoft.com/office/drawing/2014/main" id="{14F1C752-0696-46AC-A71B-53B41F53F791}"/>
+              </a:ext>
+            </a:extLst>
+          </p:cNvPr>
+          <p:cNvSpPr>
+            <a:spLocks xmlns:a="http://schemas.openxmlformats.org/drawingml/2006/main" noGrp="1"/>
+          </p:cNvSpPr>
+          <p:nvPr/>
+        </p:nvSpPr>
+        <p:spPr>
+          <a:xfrm xmlns:a="http://schemas.openxmlformats.org/drawingml/2006/main">
+            <a:off x="609600" y="1485900"/>
+            <a:ext cx="10572750" cy="9525"/>
+          </a:xfrm>
+          <a:prstGeom xmlns:a="http://schemas.openxmlformats.org/drawingml/2006/main" prst="rect">
+            <a:avLst/>
+          </a:prstGeom>
+          <a:solidFill xmlns:a="http://schemas.openxmlformats.org/drawingml/2006/main">
+            <a:srgbClr val="CBD3DD"/>
+          </a:solidFill>
+          <a:ln xmlns:a="http://schemas.openxmlformats.org/drawingml/2006/main" w="0">
+            <a:solidFill>
+              <a:srgbClr val="CBD3DD"/>
+            </a:solidFill>
+            <a:prstDash val="solid"/>
+          </a:ln>
+        </p:spPr>
+      </p:sp>
+      <p:sp>
+        <p:nvSpPr>
+          <p:cNvPr id="4" name="">
+            <a:extLst xmlns:a="http://schemas.openxmlformats.org/drawingml/2006/main">
+              <a:ext uri="{FF2B5EF4-FFF2-40B4-BE49-F238E27FC236}">
+                <a16:creationId xmlns:a16="http://schemas.microsoft.com/office/drawing/2014/main" id="{68EE189A-3DFF-4A5E-B1DE-9358766A46DA}"/>
+              </a:ext>
+            </a:extLst>
+          </p:cNvPr>
+          <p:cNvSpPr>
+            <a:spLocks xmlns:a="http://schemas.openxmlformats.org/drawingml/2006/main" noGrp="1"/>
+          </p:cNvSpPr>
+          <p:nvPr/>
+        </p:nvSpPr>
+        <p:spPr>
+          <a:xfrm xmlns:a="http://schemas.openxmlformats.org/drawingml/2006/main">
+            <a:off x="685800" y="2000250"/>
+            <a:ext cx="2571750" cy="1333500"/>
+          </a:xfrm>
+          <a:prstGeom xmlns:a="http://schemas.openxmlformats.org/drawingml/2006/main" prst="roundRect">
+            <a:avLst>
+              <a:gd name="adj" fmla="val 5714"/>
+            </a:avLst>
+          </a:prstGeom>
+          <a:solidFill xmlns:a="http://schemas.openxmlformats.org/drawingml/2006/main">
+            <a:srgbClr val="FFF1F2"/>
+          </a:solidFill>
+          <a:ln xmlns:a="http://schemas.openxmlformats.org/drawingml/2006/main" w="9525">
+            <a:solidFill>
+              <a:srgbClr val="FDA4AF"/>
+            </a:solidFill>
+            <a:prstDash val="solid"/>
+          </a:ln>
+        </p:spPr>
+      </p:sp>
+      <p:sp>
+        <p:nvSpPr>
+          <p:cNvPr id="5" name="">
+            <a:extLst xmlns:a="http://schemas.openxmlformats.org/drawingml/2006/main">
+              <a:ext uri="{FF2B5EF4-FFF2-40B4-BE49-F238E27FC236}">
+                <a16:creationId xmlns:a16="http://schemas.microsoft.com/office/drawing/2014/main" id="{5D4838EE-EB96-4EEC-832C-583C99B959FF}"/>
+              </a:ext>
+            </a:extLst>
+          </p:cNvPr>
+          <p:cNvSpPr>
+            <a:spLocks xmlns:a="http://schemas.openxmlformats.org/drawingml/2006/main" noGrp="1"/>
+          </p:cNvSpPr>
+          <p:nvPr/>
+        </p:nvSpPr>
+        <p:spPr>
+          <a:xfrm xmlns:a="http://schemas.openxmlformats.org/drawingml/2006/main">
+            <a:off x="914400" y="2266950"/>
+            <a:ext cx="2000250" cy="438150"/>
+          </a:xfrm>
+          <a:prstGeom xmlns:a="http://schemas.openxmlformats.org/drawingml/2006/main" prst="rect">
+            <a:avLst/>
+          </a:prstGeom>
+          <a:noFill xmlns:a="http://schemas.openxmlformats.org/drawingml/2006/main"/>
+          <a:ln xmlns:a="http://schemas.openxmlformats.org/drawingml/2006/main" w="0">
+            <a:noFill/>
+            <a:prstDash val="solid"/>
+          </a:ln>
+        </p:spPr>
+        <p:txBody>
+          <a:bodyPr xmlns:a="http://schemas.openxmlformats.org/drawingml/2006/main"/>
+          <a:lstStyle xmlns:a="http://schemas.openxmlformats.org/drawingml/2006/main"/>
+          <a:p xmlns:a="http://schemas.openxmlformats.org/drawingml/2006/main">
+            <a:pPr algn="ctr">
+              <a:defRPr sz="2550" b="1">
+                <a:solidFill>
+                  <a:srgbClr val="D1495B"/>
+                </a:solidFill>
+              </a:defRPr>
+            </a:pPr>
+            <a:r>
+              <a:rPr sz="2550" b="1">
+                <a:solidFill>
+                  <a:srgbClr val="D1495B"/>
+                </a:solidFill>
+              </a:rPr>
+              <a:t>-31.9 pp</a:t>
+            </a:r>
+          </a:p>
+        </p:txBody>
+      </p:sp>
+      <p:sp>
+        <p:nvSpPr>
+          <p:cNvPr id="6" name="">
+            <a:extLst xmlns:a="http://schemas.openxmlformats.org/drawingml/2006/main">
+              <a:ext uri="{FF2B5EF4-FFF2-40B4-BE49-F238E27FC236}">
+                <a16:creationId xmlns:a16="http://schemas.microsoft.com/office/drawing/2014/main" id="{C41DBB9B-A087-47E9-B5A0-840B923BE7AE}"/>
+              </a:ext>
+            </a:extLst>
+          </p:cNvPr>
+          <p:cNvSpPr>
+            <a:spLocks xmlns:a="http://schemas.openxmlformats.org/drawingml/2006/main" noGrp="1"/>
+          </p:cNvSpPr>
+          <p:nvPr/>
+        </p:nvSpPr>
+        <p:spPr>
+          <a:xfrm xmlns:a="http://schemas.openxmlformats.org/drawingml/2006/main">
+            <a:off x="933450" y="2800350"/>
+            <a:ext cx="2000250" cy="361950"/>
+          </a:xfrm>
+          <a:prstGeom xmlns:a="http://schemas.openxmlformats.org/drawingml/2006/main" prst="rect">
+            <a:avLst/>
+          </a:prstGeom>
+          <a:noFill xmlns:a="http://schemas.openxmlformats.org/drawingml/2006/main"/>
+          <a:ln xmlns:a="http://schemas.openxmlformats.org/drawingml/2006/main" w="0">
+            <a:noFill/>
+            <a:prstDash val="solid"/>
+          </a:ln>
+        </p:spPr>
+        <p:txBody>
+          <a:bodyPr xmlns:a="http://schemas.openxmlformats.org/drawingml/2006/main"/>
+          <a:lstStyle xmlns:a="http://schemas.openxmlformats.org/drawingml/2006/main"/>
+          <a:p xmlns:a="http://schemas.openxmlformats.org/drawingml/2006/main">
+            <a:pPr algn="ctr">
+              <a:defRPr sz="1200" b="0">
+                <a:solidFill>
+                  <a:srgbClr val="5B6472"/>
+                </a:solidFill>
+              </a:defRPr>
+            </a:pPr>
+            <a:r>
+              <a:rPr sz="1200" b="0">
+                <a:solidFill>
+                  <a:srgbClr val="5B6472"/>
+                </a:solidFill>
+              </a:rPr>
+              <a:t>Continuation alpha vs hold in 2020Q3</a:t>
+            </a:r>
+          </a:p>
+        </p:txBody>
+      </p:sp>
+      <p:sp>
+        <p:nvSpPr>
+          <p:cNvPr id="7" name="">
+            <a:extLst xmlns:a="http://schemas.openxmlformats.org/drawingml/2006/main">
+              <a:ext uri="{FF2B5EF4-FFF2-40B4-BE49-F238E27FC236}">
+                <a16:creationId xmlns:a16="http://schemas.microsoft.com/office/drawing/2014/main" id="{97F24DF0-767F-4E4F-ABF6-110329071EF9}"/>
+              </a:ext>
+            </a:extLst>
+          </p:cNvPr>
+          <p:cNvSpPr>
+            <a:spLocks xmlns:a="http://schemas.openxmlformats.org/drawingml/2006/main" noGrp="1"/>
+          </p:cNvSpPr>
+          <p:nvPr/>
+        </p:nvSpPr>
+        <p:spPr>
+          <a:xfrm xmlns:a="http://schemas.openxmlformats.org/drawingml/2006/main">
+            <a:off x="685800" y="3714750"/>
+            <a:ext cx="2571750" cy="1333500"/>
+          </a:xfrm>
+          <a:prstGeom xmlns:a="http://schemas.openxmlformats.org/drawingml/2006/main" prst="roundRect">
+            <a:avLst>
+              <a:gd name="adj" fmla="val 5714"/>
+            </a:avLst>
+          </a:prstGeom>
+          <a:solidFill xmlns:a="http://schemas.openxmlformats.org/drawingml/2006/main">
+            <a:srgbClr val="ECFDF5"/>
+          </a:solidFill>
+          <a:ln xmlns:a="http://schemas.openxmlformats.org/drawingml/2006/main" w="9525">
+            <a:solidFill>
+              <a:srgbClr val="A7F3D0"/>
+            </a:solidFill>
+            <a:prstDash val="solid"/>
+          </a:ln>
+        </p:spPr>
+      </p:sp>
+      <p:sp>
+        <p:nvSpPr>
+          <p:cNvPr id="8" name="">
+            <a:extLst xmlns:a="http://schemas.openxmlformats.org/drawingml/2006/main">
+              <a:ext uri="{FF2B5EF4-FFF2-40B4-BE49-F238E27FC236}">
+                <a16:creationId xmlns:a16="http://schemas.microsoft.com/office/drawing/2014/main" id="{6AC8CE07-F207-43E9-B447-C4675B480F28}"/>
+              </a:ext>
+            </a:extLst>
+          </p:cNvPr>
+          <p:cNvSpPr>
+            <a:spLocks xmlns:a="http://schemas.openxmlformats.org/drawingml/2006/main" noGrp="1"/>
+          </p:cNvSpPr>
+          <p:nvPr/>
+        </p:nvSpPr>
+        <p:spPr>
+          <a:xfrm xmlns:a="http://schemas.openxmlformats.org/drawingml/2006/main">
+            <a:off x="914400" y="3981450"/>
+            <a:ext cx="2000250" cy="438150"/>
+          </a:xfrm>
+          <a:prstGeom xmlns:a="http://schemas.openxmlformats.org/drawingml/2006/main" prst="rect">
+            <a:avLst/>
+          </a:prstGeom>
+          <a:noFill xmlns:a="http://schemas.openxmlformats.org/drawingml/2006/main"/>
+          <a:ln xmlns:a="http://schemas.openxmlformats.org/drawingml/2006/main" w="0">
+            <a:noFill/>
+            <a:prstDash val="solid"/>
+          </a:ln>
+        </p:spPr>
+        <p:txBody>
+          <a:bodyPr xmlns:a="http://schemas.openxmlformats.org/drawingml/2006/main"/>
+          <a:lstStyle xmlns:a="http://schemas.openxmlformats.org/drawingml/2006/main"/>
+          <a:p xmlns:a="http://schemas.openxmlformats.org/drawingml/2006/main">
+            <a:pPr algn="ctr">
+              <a:defRPr sz="2550" b="1">
+                <a:solidFill>
+                  <a:srgbClr val="177A55"/>
+                </a:solidFill>
+              </a:defRPr>
+            </a:pPr>
+            <a:r>
+              <a:rPr sz="2550" b="1">
+                <a:solidFill>
+                  <a:srgbClr val="177A55"/>
+                </a:solidFill>
+              </a:rPr>
+              <a:t>+12.2 pp</a:t>
+            </a:r>
+          </a:p>
+        </p:txBody>
+      </p:sp>
+      <p:sp>
+        <p:nvSpPr>
+          <p:cNvPr id="9" name="">
+            <a:extLst xmlns:a="http://schemas.openxmlformats.org/drawingml/2006/main">
+              <a:ext uri="{FF2B5EF4-FFF2-40B4-BE49-F238E27FC236}">
+                <a16:creationId xmlns:a16="http://schemas.microsoft.com/office/drawing/2014/main" id="{49A7CF44-E324-476F-B66F-A92273B710CC}"/>
+              </a:ext>
+            </a:extLst>
+          </p:cNvPr>
+          <p:cNvSpPr>
+            <a:spLocks xmlns:a="http://schemas.openxmlformats.org/drawingml/2006/main" noGrp="1"/>
+          </p:cNvSpPr>
+          <p:nvPr/>
+        </p:nvSpPr>
+        <p:spPr>
+          <a:xfrm xmlns:a="http://schemas.openxmlformats.org/drawingml/2006/main">
+            <a:off x="933450" y="4514850"/>
+            <a:ext cx="2000250" cy="361950"/>
+          </a:xfrm>
+          <a:prstGeom xmlns:a="http://schemas.openxmlformats.org/drawingml/2006/main" prst="rect">
+            <a:avLst/>
+          </a:prstGeom>
+          <a:noFill xmlns:a="http://schemas.openxmlformats.org/drawingml/2006/main"/>
+          <a:ln xmlns:a="http://schemas.openxmlformats.org/drawingml/2006/main" w="0">
+            <a:noFill/>
+            <a:prstDash val="solid"/>
+          </a:ln>
+        </p:spPr>
+        <p:txBody>
+          <a:bodyPr xmlns:a="http://schemas.openxmlformats.org/drawingml/2006/main"/>
+          <a:lstStyle xmlns:a="http://schemas.openxmlformats.org/drawingml/2006/main"/>
+          <a:p xmlns:a="http://schemas.openxmlformats.org/drawingml/2006/main">
+            <a:pPr algn="ctr">
+              <a:defRPr sz="1200" b="0">
+                <a:solidFill>
+                  <a:srgbClr val="5B6472"/>
+                </a:solidFill>
+              </a:defRPr>
+            </a:pPr>
+            <a:r>
+              <a:rPr sz="1200" b="0">
+                <a:solidFill>
+                  <a:srgbClr val="5B6472"/>
+                </a:solidFill>
+              </a:rPr>
+              <a:t>Continuation alpha vs hold in 2022Q1</a:t>
+            </a:r>
+          </a:p>
+        </p:txBody>
+      </p:sp>
+      <p:sp>
+        <p:nvSpPr>
+          <p:cNvPr id="10" name="">
+            <a:extLst xmlns:a="http://schemas.openxmlformats.org/drawingml/2006/main">
+              <a:ext uri="{FF2B5EF4-FFF2-40B4-BE49-F238E27FC236}">
+                <a16:creationId xmlns:a16="http://schemas.microsoft.com/office/drawing/2014/main" id="{E50BBEF9-5B1D-4F04-862D-80266BD1D07F}"/>
+              </a:ext>
+            </a:extLst>
+          </p:cNvPr>
+          <p:cNvSpPr>
+            <a:spLocks xmlns:a="http://schemas.openxmlformats.org/drawingml/2006/main" noGrp="1"/>
+          </p:cNvSpPr>
+          <p:nvPr/>
+        </p:nvSpPr>
+        <p:spPr>
+          <a:xfrm xmlns:a="http://schemas.openxmlformats.org/drawingml/2006/main">
+            <a:off x="3562350" y="2000250"/>
+            <a:ext cx="2571750" cy="1333500"/>
+          </a:xfrm>
+          <a:prstGeom xmlns:a="http://schemas.openxmlformats.org/drawingml/2006/main" prst="roundRect">
+            <a:avLst>
+              <a:gd name="adj" fmla="val 5714"/>
+            </a:avLst>
+          </a:prstGeom>
+          <a:solidFill xmlns:a="http://schemas.openxmlformats.org/drawingml/2006/main">
+            <a:srgbClr val="F8FAFC"/>
+          </a:solidFill>
+          <a:ln xmlns:a="http://schemas.openxmlformats.org/drawingml/2006/main" w="9525">
+            <a:solidFill>
+              <a:srgbClr val="CBD5E1"/>
+            </a:solidFill>
+            <a:prstDash val="solid"/>
+          </a:ln>
+        </p:spPr>
+      </p:sp>
+      <p:sp>
+        <p:nvSpPr>
+          <p:cNvPr id="11" name="">
+            <a:extLst xmlns:a="http://schemas.openxmlformats.org/drawingml/2006/main">
+              <a:ext uri="{FF2B5EF4-FFF2-40B4-BE49-F238E27FC236}">
+                <a16:creationId xmlns:a16="http://schemas.microsoft.com/office/drawing/2014/main" id="{62F08763-2A0D-4849-9048-B4E69D45C0A8}"/>
+              </a:ext>
+            </a:extLst>
+          </p:cNvPr>
+          <p:cNvSpPr>
+            <a:spLocks xmlns:a="http://schemas.openxmlformats.org/drawingml/2006/main" noGrp="1"/>
+          </p:cNvSpPr>
+          <p:nvPr/>
+        </p:nvSpPr>
+        <p:spPr>
+          <a:xfrm xmlns:a="http://schemas.openxmlformats.org/drawingml/2006/main">
+            <a:off x="3790950" y="2266950"/>
+            <a:ext cx="2000250" cy="438150"/>
+          </a:xfrm>
+          <a:prstGeom xmlns:a="http://schemas.openxmlformats.org/drawingml/2006/main" prst="rect">
+            <a:avLst/>
+          </a:prstGeom>
+          <a:noFill xmlns:a="http://schemas.openxmlformats.org/drawingml/2006/main"/>
+          <a:ln xmlns:a="http://schemas.openxmlformats.org/drawingml/2006/main" w="0">
+            <a:noFill/>
+            <a:prstDash val="solid"/>
+          </a:ln>
+        </p:spPr>
+        <p:txBody>
+          <a:bodyPr xmlns:a="http://schemas.openxmlformats.org/drawingml/2006/main"/>
+          <a:lstStyle xmlns:a="http://schemas.openxmlformats.org/drawingml/2006/main"/>
+          <a:p xmlns:a="http://schemas.openxmlformats.org/drawingml/2006/main">
+            <a:pPr algn="ctr">
+              <a:defRPr sz="2550" b="1">
+                <a:solidFill>
+                  <a:srgbClr val="0F9F8F"/>
+                </a:solidFill>
+              </a:defRPr>
+            </a:pPr>
+            <a:r>
+              <a:rPr sz="2550" b="1">
+                <a:solidFill>
+                  <a:srgbClr val="0F9F8F"/>
+                </a:solidFill>
+              </a:rPr>
+              <a:t>57.2%</a:t>
+            </a:r>
+          </a:p>
+        </p:txBody>
+      </p:sp>
+      <p:sp>
+        <p:nvSpPr>
+          <p:cNvPr id="12" name="">
+            <a:extLst xmlns:a="http://schemas.openxmlformats.org/drawingml/2006/main">
+              <a:ext uri="{FF2B5EF4-FFF2-40B4-BE49-F238E27FC236}">
+                <a16:creationId xmlns:a16="http://schemas.microsoft.com/office/drawing/2014/main" id="{DDD8C620-B4FD-4BE9-996B-09E6C1796601}"/>
+              </a:ext>
+            </a:extLst>
+          </p:cNvPr>
+          <p:cNvSpPr>
+            <a:spLocks xmlns:a="http://schemas.openxmlformats.org/drawingml/2006/main" noGrp="1"/>
+          </p:cNvSpPr>
+          <p:nvPr/>
+        </p:nvSpPr>
+        <p:spPr>
+          <a:xfrm xmlns:a="http://schemas.openxmlformats.org/drawingml/2006/main">
+            <a:off x="3810000" y="2800350"/>
+            <a:ext cx="2000250" cy="361950"/>
+          </a:xfrm>
+          <a:prstGeom xmlns:a="http://schemas.openxmlformats.org/drawingml/2006/main" prst="rect">
+            <a:avLst/>
+          </a:prstGeom>
+          <a:noFill xmlns:a="http://schemas.openxmlformats.org/drawingml/2006/main"/>
+          <a:ln xmlns:a="http://schemas.openxmlformats.org/drawingml/2006/main" w="0">
+            <a:noFill/>
+            <a:prstDash val="solid"/>
+          </a:ln>
+        </p:spPr>
+        <p:txBody>
+          <a:bodyPr xmlns:a="http://schemas.openxmlformats.org/drawingml/2006/main"/>
+          <a:lstStyle xmlns:a="http://schemas.openxmlformats.org/drawingml/2006/main"/>
+          <a:p xmlns:a="http://schemas.openxmlformats.org/drawingml/2006/main">
+            <a:pPr algn="ctr">
+              <a:defRPr sz="1200" b="0">
+                <a:solidFill>
+                  <a:srgbClr val="5B6472"/>
+                </a:solidFill>
+              </a:defRPr>
+            </a:pPr>
+            <a:r>
+              <a:rPr sz="1200" b="0">
+                <a:solidFill>
+                  <a:srgbClr val="5B6472"/>
+                </a:solidFill>
+              </a:rPr>
+              <a:t>Continuation exposure in 2020Q3</a:t>
+            </a:r>
+          </a:p>
+        </p:txBody>
+      </p:sp>
+      <p:sp>
+        <p:nvSpPr>
+          <p:cNvPr id="13" name="">
+            <a:extLst xmlns:a="http://schemas.openxmlformats.org/drawingml/2006/main">
+              <a:ext uri="{FF2B5EF4-FFF2-40B4-BE49-F238E27FC236}">
+                <a16:creationId xmlns:a16="http://schemas.microsoft.com/office/drawing/2014/main" id="{315AA798-8273-420D-953D-0C81C2AC7EB6}"/>
+              </a:ext>
+            </a:extLst>
+          </p:cNvPr>
+          <p:cNvSpPr>
+            <a:spLocks xmlns:a="http://schemas.openxmlformats.org/drawingml/2006/main" noGrp="1"/>
+          </p:cNvSpPr>
+          <p:nvPr/>
+        </p:nvSpPr>
+        <p:spPr>
+          <a:xfrm xmlns:a="http://schemas.openxmlformats.org/drawingml/2006/main">
+            <a:off x="3562350" y="3714750"/>
+            <a:ext cx="2571750" cy="1333500"/>
+          </a:xfrm>
+          <a:prstGeom xmlns:a="http://schemas.openxmlformats.org/drawingml/2006/main" prst="roundRect">
+            <a:avLst>
+              <a:gd name="adj" fmla="val 5714"/>
+            </a:avLst>
+          </a:prstGeom>
+          <a:solidFill xmlns:a="http://schemas.openxmlformats.org/drawingml/2006/main">
+            <a:srgbClr val="F8FAFC"/>
+          </a:solidFill>
+          <a:ln xmlns:a="http://schemas.openxmlformats.org/drawingml/2006/main" w="9525">
+            <a:solidFill>
+              <a:srgbClr val="CBD5E1"/>
+            </a:solidFill>
+            <a:prstDash val="solid"/>
+          </a:ln>
+        </p:spPr>
+      </p:sp>
+      <p:sp>
+        <p:nvSpPr>
+          <p:cNvPr id="14" name="">
+            <a:extLst xmlns:a="http://schemas.openxmlformats.org/drawingml/2006/main">
+              <a:ext uri="{FF2B5EF4-FFF2-40B4-BE49-F238E27FC236}">
+                <a16:creationId xmlns:a16="http://schemas.microsoft.com/office/drawing/2014/main" id="{EBBE8E46-A404-4138-A0C0-323D2D4C38B5}"/>
+              </a:ext>
+            </a:extLst>
+          </p:cNvPr>
+          <p:cNvSpPr>
+            <a:spLocks xmlns:a="http://schemas.openxmlformats.org/drawingml/2006/main" noGrp="1"/>
+          </p:cNvSpPr>
+          <p:nvPr/>
+        </p:nvSpPr>
+        <p:spPr>
+          <a:xfrm xmlns:a="http://schemas.openxmlformats.org/drawingml/2006/main">
+            <a:off x="3790950" y="3981450"/>
+            <a:ext cx="2000250" cy="438150"/>
+          </a:xfrm>
+          <a:prstGeom xmlns:a="http://schemas.openxmlformats.org/drawingml/2006/main" prst="rect">
+            <a:avLst/>
+          </a:prstGeom>
+          <a:noFill xmlns:a="http://schemas.openxmlformats.org/drawingml/2006/main"/>
+          <a:ln xmlns:a="http://schemas.openxmlformats.org/drawingml/2006/main" w="0">
+            <a:noFill/>
+            <a:prstDash val="solid"/>
+          </a:ln>
+        </p:spPr>
+        <p:txBody>
+          <a:bodyPr xmlns:a="http://schemas.openxmlformats.org/drawingml/2006/main"/>
+          <a:lstStyle xmlns:a="http://schemas.openxmlformats.org/drawingml/2006/main"/>
+          <a:p xmlns:a="http://schemas.openxmlformats.org/drawingml/2006/main">
+            <a:pPr algn="ctr">
+              <a:defRPr sz="2550" b="1">
+                <a:solidFill>
+                  <a:srgbClr val="0F9F8F"/>
+                </a:solidFill>
+              </a:defRPr>
+            </a:pPr>
+            <a:r>
+              <a:rPr sz="2550" b="1">
+                <a:solidFill>
+                  <a:srgbClr val="0F9F8F"/>
+                </a:solidFill>
+              </a:rPr>
+              <a:t>12.6%</a:t>
+            </a:r>
+          </a:p>
+        </p:txBody>
+      </p:sp>
+      <p:sp>
+        <p:nvSpPr>
+          <p:cNvPr id="15" name="">
+            <a:extLst xmlns:a="http://schemas.openxmlformats.org/drawingml/2006/main">
+              <a:ext uri="{FF2B5EF4-FFF2-40B4-BE49-F238E27FC236}">
+                <a16:creationId xmlns:a16="http://schemas.microsoft.com/office/drawing/2014/main" id="{96F826CE-F39B-4959-BD8C-4B72E8A4DDBC}"/>
+              </a:ext>
+            </a:extLst>
+          </p:cNvPr>
+          <p:cNvSpPr>
+            <a:spLocks xmlns:a="http://schemas.openxmlformats.org/drawingml/2006/main" noGrp="1"/>
+          </p:cNvSpPr>
+          <p:nvPr/>
+        </p:nvSpPr>
+        <p:spPr>
+          <a:xfrm xmlns:a="http://schemas.openxmlformats.org/drawingml/2006/main">
+            <a:off x="3810000" y="4514850"/>
+            <a:ext cx="2000250" cy="361950"/>
+          </a:xfrm>
+          <a:prstGeom xmlns:a="http://schemas.openxmlformats.org/drawingml/2006/main" prst="rect">
+            <a:avLst/>
+          </a:prstGeom>
+          <a:noFill xmlns:a="http://schemas.openxmlformats.org/drawingml/2006/main"/>
+          <a:ln xmlns:a="http://schemas.openxmlformats.org/drawingml/2006/main" w="0">
+            <a:noFill/>
+            <a:prstDash val="solid"/>
+          </a:ln>
+        </p:spPr>
+        <p:txBody>
+          <a:bodyPr xmlns:a="http://schemas.openxmlformats.org/drawingml/2006/main"/>
+          <a:lstStyle xmlns:a="http://schemas.openxmlformats.org/drawingml/2006/main"/>
+          <a:p xmlns:a="http://schemas.openxmlformats.org/drawingml/2006/main">
+            <a:pPr algn="ctr">
+              <a:defRPr sz="1200" b="0">
+                <a:solidFill>
+                  <a:srgbClr val="5B6472"/>
+                </a:solidFill>
+              </a:defRPr>
+            </a:pPr>
+            <a:r>
+              <a:rPr sz="1200" b="0">
+                <a:solidFill>
+                  <a:srgbClr val="5B6472"/>
+                </a:solidFill>
+              </a:rPr>
+              <a:t>Continuation exposure in 2022Q1</a:t>
+            </a:r>
+          </a:p>
+        </p:txBody>
+      </p:sp>
+      <p:pic>
+        <p:nvPicPr>
+          <p:cNvPr id="33" name=""/>
+          <p:cNvPicPr>
+            <a:picLocks xmlns:a="http://schemas.openxmlformats.org/drawingml/2006/main" noChangeAspect="1"/>
+          </p:cNvPicPr>
+          <p:nvPr/>
+        </p:nvPicPr>
+        <p:blipFill>
+          <a:blip xmlns:r="http://schemas.openxmlformats.org/officeDocument/2006/relationships" xmlns:a="http://schemas.openxmlformats.org/drawingml/2006/main" r:embed="R278f100491ba4b25"/>
+          <a:stretch xmlns:a="http://schemas.openxmlformats.org/drawingml/2006/main"/>
+        </p:blipFill>
+        <p:spPr>
+          <a:xfrm xmlns:a="http://schemas.openxmlformats.org/drawingml/2006/main">
+            <a:off x="7091570" y="1809750"/>
+            <a:ext cx="3571461" cy="3733800"/>
+          </a:xfrm>
+          <a:prstGeom xmlns:a="http://schemas.openxmlformats.org/drawingml/2006/main" prst="rect">
+            <a:avLst/>
+          </a:prstGeom>
+        </p:spPr>
+      </p:pic>
+      <p:sp>
+        <p:nvSpPr>
+          <p:cNvPr id="17" name="">
+            <a:extLst xmlns:a="http://schemas.openxmlformats.org/drawingml/2006/main">
+              <a:ext uri="{FF2B5EF4-FFF2-40B4-BE49-F238E27FC236}">
+                <a16:creationId xmlns:a16="http://schemas.microsoft.com/office/drawing/2014/main" id="{B6220455-213F-4FC2-A029-0A0A975BCF7D}"/>
+              </a:ext>
+            </a:extLst>
+          </p:cNvPr>
+          <p:cNvSpPr>
+            <a:spLocks xmlns:a="http://schemas.openxmlformats.org/drawingml/2006/main" noGrp="1"/>
+          </p:cNvSpPr>
+          <p:nvPr/>
+        </p:nvSpPr>
+        <p:spPr>
+          <a:xfrm xmlns:a="http://schemas.openxmlformats.org/drawingml/2006/main">
+            <a:off x="1085850" y="5676900"/>
+            <a:ext cx="9810750" cy="419100"/>
+          </a:xfrm>
+          <a:prstGeom xmlns:a="http://schemas.openxmlformats.org/drawingml/2006/main" prst="rect">
+            <a:avLst/>
+          </a:prstGeom>
+          <a:noFill xmlns:a="http://schemas.openxmlformats.org/drawingml/2006/main"/>
+          <a:ln xmlns:a="http://schemas.openxmlformats.org/drawingml/2006/main" w="0">
+            <a:noFill/>
+            <a:prstDash val="solid"/>
+          </a:ln>
+        </p:spPr>
+        <p:txBody>
+          <a:bodyPr xmlns:a="http://schemas.openxmlformats.org/drawingml/2006/main"/>
+          <a:lstStyle xmlns:a="http://schemas.openxmlformats.org/drawingml/2006/main"/>
+          <a:p xmlns:a="http://schemas.openxmlformats.org/drawingml/2006/main">
+            <a:pPr algn="ctr">
+              <a:defRPr sz="1650" b="1">
+                <a:solidFill>
+                  <a:srgbClr val="111827"/>
+                </a:solidFill>
+              </a:defRPr>
+            </a:pPr>
+            <a:r>
+              <a:rPr sz="1650" b="1">
+                <a:solidFill>
+                  <a:srgbClr val="111827"/>
+                </a:solidFill>
+              </a:rPr>
+              <a:t>Aggregate mean alpha was -13.5 pp for fresh and -9.8 pp for continuation. This is not a victory lap; it is a sharper diagnosis.</a:t>
+            </a:r>
+          </a:p>
+        </p:txBody>
+      </p:sp>
+    </p:spTree>
+    <p:extLst>
+      <p:ext uri="{BB962C8B-B14F-4D97-AF65-F5344CB8AC3E}">
+        <p14:creationId xmlns:p14="http://schemas.microsoft.com/office/powerpoint/2010/main" val="1358957094"/>
+      </p:ext>
+    </p:extLst>
+  </p:cSld>
+</p:sld>
+</file>
+
+<file path=ppt/slides/slide12.xml><?xml version="1.0" encoding="utf-8"?>
+<p:sld xmlns:p="http://schemas.openxmlformats.org/presentationml/2006/main">
+  <p:cSld>
+    <p:bg>
+      <p:bgPr>
+        <a:solidFill xmlns:a="http://schemas.openxmlformats.org/drawingml/2006/main">
+          <a:srgbClr val="FFFFFF"/>
+        </a:solidFill>
+      </p:bgPr>
+    </p:bg>
+    <p:spTree>
+      <p:nvGrpSpPr>
+        <p:cNvPr id="1" name=""/>
+        <p:cNvGrpSpPr/>
+        <p:nvPr/>
+      </p:nvGrpSpPr>
+      <p:grpSpPr>
+        <a:xfrm xmlns:a="http://schemas.openxmlformats.org/drawingml/2006/main"/>
+      </p:grpSpPr>
+      <p:sp>
+        <p:nvSpPr>
+          <p:cNvPr id="1" name="">
+            <a:extLst xmlns:a="http://schemas.openxmlformats.org/drawingml/2006/main">
+              <a:ext uri="{FF2B5EF4-FFF2-40B4-BE49-F238E27FC236}">
+                <a16:creationId xmlns:a16="http://schemas.microsoft.com/office/drawing/2014/main" id="{509C3F20-768F-423E-9B77-847C66881538}"/>
+              </a:ext>
+            </a:extLst>
+          </p:cNvPr>
+          <p:cNvSpPr>
+            <a:spLocks xmlns:a="http://schemas.openxmlformats.org/drawingml/2006/main" noGrp="1"/>
+          </p:cNvSpPr>
+          <p:nvPr/>
+        </p:nvSpPr>
+        <p:spPr>
+          <a:xfrm xmlns:a="http://schemas.openxmlformats.org/drawingml/2006/main">
+            <a:off x="609600" y="304800"/>
+            <a:ext cx="5334000" cy="209550"/>
+          </a:xfrm>
+          <a:prstGeom xmlns:a="http://schemas.openxmlformats.org/drawingml/2006/main" prst="rect">
+            <a:avLst/>
+          </a:prstGeom>
+          <a:noFill xmlns:a="http://schemas.openxmlformats.org/drawingml/2006/main"/>
+          <a:ln xmlns:a="http://schemas.openxmlformats.org/drawingml/2006/main" w="0">
+            <a:noFill/>
+            <a:prstDash val="solid"/>
+          </a:ln>
+        </p:spPr>
+        <p:txBody>
+          <a:bodyPr xmlns:a="http://schemas.openxmlformats.org/drawingml/2006/main"/>
+          <a:lstStyle xmlns:a="http://schemas.openxmlformats.org/drawingml/2006/main"/>
+          <a:p xmlns:a="http://schemas.openxmlformats.org/drawingml/2006/main">
+            <a:pPr>
+              <a:defRPr sz="975" b="1">
+                <a:solidFill>
+                  <a:srgbClr val="2563EB"/>
+                </a:solidFill>
+              </a:defRPr>
+            </a:pPr>
+            <a:r>
+              <a:rPr sz="975" b="1">
+                <a:solidFill>
+                  <a:srgbClr val="2563EB"/>
+                </a:solidFill>
+              </a:rPr>
+              <a:t>GEN5.3 PCA RESEARCH PIVOT</a:t>
+            </a:r>
+          </a:p>
+        </p:txBody>
+      </p:sp>
+      <p:sp>
+        <p:nvSpPr>
+          <p:cNvPr id="2" name="">
+            <a:extLst xmlns:a="http://schemas.openxmlformats.org/drawingml/2006/main">
+              <a:ext uri="{FF2B5EF4-FFF2-40B4-BE49-F238E27FC236}">
+                <a16:creationId xmlns:a16="http://schemas.microsoft.com/office/drawing/2014/main" id="{2D13A5C7-EB63-489A-9AFC-4F47C39D9345}"/>
+              </a:ext>
+            </a:extLst>
+          </p:cNvPr>
+          <p:cNvSpPr>
+            <a:spLocks xmlns:a="http://schemas.openxmlformats.org/drawingml/2006/main" noGrp="1"/>
+          </p:cNvSpPr>
+          <p:nvPr/>
+        </p:nvSpPr>
+        <p:spPr>
+          <a:xfrm xmlns:a="http://schemas.openxmlformats.org/drawingml/2006/main">
+            <a:off x="609600" y="647700"/>
+            <a:ext cx="9334500" cy="876300"/>
+          </a:xfrm>
+          <a:prstGeom xmlns:a="http://schemas.openxmlformats.org/drawingml/2006/main" prst="rect">
+            <a:avLst/>
+          </a:prstGeom>
+          <a:noFill xmlns:a="http://schemas.openxmlformats.org/drawingml/2006/main"/>
+          <a:ln xmlns:a="http://schemas.openxmlformats.org/drawingml/2006/main" w="0">
+            <a:noFill/>
+            <a:prstDash val="solid"/>
+          </a:ln>
+        </p:spPr>
+        <p:txBody>
+          <a:bodyPr xmlns:a="http://schemas.openxmlformats.org/drawingml/2006/main"/>
+          <a:lstStyle xmlns:a="http://schemas.openxmlformats.org/drawingml/2006/main"/>
+          <a:p xmlns:a="http://schemas.openxmlformats.org/drawingml/2006/main">
+            <a:pPr>
+              <a:defRPr sz="2775" b="1">
+                <a:solidFill>
+                  <a:srgbClr val="111827"/>
+                </a:solidFill>
+              </a:defRPr>
+            </a:pPr>
+            <a:r>
+              <a:rPr sz="2775" b="1">
+                <a:solidFill>
+                  <a:srgbClr val="111827"/>
+                </a:solidFill>
+              </a:rPr>
+              <a:t>The audit points to participation timing, not just strategy availability</a:t>
+            </a:r>
+          </a:p>
+        </p:txBody>
+      </p:sp>
+      <p:sp>
+        <p:nvSpPr>
+          <p:cNvPr id="3" name="">
+            <a:extLst xmlns:a="http://schemas.openxmlformats.org/drawingml/2006/main">
+              <a:ext uri="{FF2B5EF4-FFF2-40B4-BE49-F238E27FC236}">
+                <a16:creationId xmlns:a16="http://schemas.microsoft.com/office/drawing/2014/main" id="{F6FF025A-78A2-42A2-8D0B-FB7AA17B2A2A}"/>
+              </a:ext>
+            </a:extLst>
+          </p:cNvPr>
+          <p:cNvSpPr>
+            <a:spLocks xmlns:a="http://schemas.openxmlformats.org/drawingml/2006/main" noGrp="1"/>
+          </p:cNvSpPr>
+          <p:nvPr/>
+        </p:nvSpPr>
+        <p:spPr>
+          <a:xfrm xmlns:a="http://schemas.openxmlformats.org/drawingml/2006/main">
+            <a:off x="609600" y="1485900"/>
+            <a:ext cx="10572750" cy="9525"/>
+          </a:xfrm>
+          <a:prstGeom xmlns:a="http://schemas.openxmlformats.org/drawingml/2006/main" prst="rect">
+            <a:avLst/>
+          </a:prstGeom>
+          <a:solidFill xmlns:a="http://schemas.openxmlformats.org/drawingml/2006/main">
+            <a:srgbClr val="CBD3DD"/>
+          </a:solidFill>
+          <a:ln xmlns:a="http://schemas.openxmlformats.org/drawingml/2006/main" w="0">
+            <a:solidFill>
+              <a:srgbClr val="CBD3DD"/>
+            </a:solidFill>
+            <a:prstDash val="solid"/>
+          </a:ln>
+        </p:spPr>
+      </p:sp>
+      <p:pic>
+        <p:nvPicPr>
+          <p:cNvPr id="10" name=""/>
+          <p:cNvPicPr>
+            <a:picLocks xmlns:a="http://schemas.openxmlformats.org/drawingml/2006/main" noChangeAspect="1"/>
+          </p:cNvPicPr>
+          <p:nvPr/>
+        </p:nvPicPr>
+        <p:blipFill>
+          <a:blip xmlns:r="http://schemas.openxmlformats.org/officeDocument/2006/relationships" xmlns:a="http://schemas.openxmlformats.org/drawingml/2006/main" r:embed="R79cdf432fdbc4868"/>
+          <a:stretch xmlns:a="http://schemas.openxmlformats.org/drawingml/2006/main"/>
+        </p:blipFill>
+        <p:spPr>
+          <a:xfrm xmlns:a="http://schemas.openxmlformats.org/drawingml/2006/main">
+            <a:off x="698256" y="1809750"/>
+            <a:ext cx="5671038" cy="4095750"/>
+          </a:xfrm>
+          <a:prstGeom xmlns:a="http://schemas.openxmlformats.org/drawingml/2006/main" prst="rect">
+            <a:avLst/>
+          </a:prstGeom>
+        </p:spPr>
+      </p:pic>
+      <p:pic>
+        <p:nvPicPr>
+          <p:cNvPr id="11" name=""/>
+          <p:cNvPicPr>
+            <a:picLocks xmlns:a="http://schemas.openxmlformats.org/drawingml/2006/main" noChangeAspect="1"/>
+          </p:cNvPicPr>
+          <p:nvPr/>
+        </p:nvPicPr>
+        <p:blipFill>
+          <a:blip xmlns:r="http://schemas.openxmlformats.org/officeDocument/2006/relationships" xmlns:a="http://schemas.openxmlformats.org/drawingml/2006/main" r:embed="R62952b35a6db4f65"/>
+          <a:stretch xmlns:a="http://schemas.openxmlformats.org/drawingml/2006/main"/>
+        </p:blipFill>
+        <p:spPr>
+          <a:xfrm xmlns:a="http://schemas.openxmlformats.org/drawingml/2006/main">
+            <a:off x="6877050" y="1929179"/>
+            <a:ext cx="4762500" cy="3113942"/>
+          </a:xfrm>
+          <a:prstGeom xmlns:a="http://schemas.openxmlformats.org/drawingml/2006/main" prst="rect">
+            <a:avLst/>
+          </a:prstGeom>
+        </p:spPr>
+      </p:pic>
+      <p:sp>
+        <p:nvSpPr>
+          <p:cNvPr id="6" name="">
+            <a:extLst xmlns:a="http://schemas.openxmlformats.org/drawingml/2006/main">
+              <a:ext uri="{FF2B5EF4-FFF2-40B4-BE49-F238E27FC236}">
+                <a16:creationId xmlns:a16="http://schemas.microsoft.com/office/drawing/2014/main" id="{C4AA4F32-5D3E-48CE-BE03-D089C827E0A2}"/>
+              </a:ext>
+            </a:extLst>
+          </p:cNvPr>
+          <p:cNvSpPr>
+            <a:spLocks xmlns:a="http://schemas.openxmlformats.org/drawingml/2006/main" noGrp="1"/>
+          </p:cNvSpPr>
+          <p:nvPr/>
+        </p:nvSpPr>
+        <p:spPr>
+          <a:xfrm xmlns:a="http://schemas.openxmlformats.org/drawingml/2006/main">
+            <a:off x="7067550" y="5276850"/>
+            <a:ext cx="4191000" cy="819150"/>
+          </a:xfrm>
+          <a:prstGeom xmlns:a="http://schemas.openxmlformats.org/drawingml/2006/main" prst="rect">
+            <a:avLst/>
+          </a:prstGeom>
+          <a:noFill xmlns:a="http://schemas.openxmlformats.org/drawingml/2006/main"/>
+          <a:ln xmlns:a="http://schemas.openxmlformats.org/drawingml/2006/main" w="0">
+            <a:noFill/>
+            <a:prstDash val="solid"/>
+          </a:ln>
+        </p:spPr>
+        <p:txBody>
+          <a:bodyPr xmlns:a="http://schemas.openxmlformats.org/drawingml/2006/main"/>
+          <a:lstStyle xmlns:a="http://schemas.openxmlformats.org/drawingml/2006/main"/>
+          <a:p xmlns:a="http://schemas.openxmlformats.org/drawingml/2006/main">
+            <a:pPr>
+              <a:defRPr sz="1350" b="0">
+                <a:solidFill>
+                  <a:srgbClr val="5B6472"/>
+                </a:solidFill>
+              </a:defRPr>
+            </a:pPr>
+            <a:r>
+              <a:rPr sz="1350" b="0">
+                <a:solidFill>
+                  <a:srgbClr val="5B6472"/>
+                </a:solidFill>
+              </a:rPr>
+              <a:t>The state/family map selected plenty of momentum candidates, so the first failure mode is not that no-trade swallowed the whole system. The problem is more specific: exposure still arrived too late or too lightly in the rebound while drawdown avoidance worked better in the stress window.</a:t>
+            </a:r>
+          </a:p>
+        </p:txBody>
+      </p:sp>
+    </p:spTree>
+    <p:extLst>
+      <p:ext uri="{BB962C8B-B14F-4D97-AF65-F5344CB8AC3E}">
+        <p14:creationId xmlns:p14="http://schemas.microsoft.com/office/powerpoint/2010/main" val="766357857"/>
+      </p:ext>
+    </p:extLst>
+  </p:cSld>
+</p:sld>
+</file>
+
+<file path=ppt/slides/slide13.xml><?xml version="1.0" encoding="utf-8"?>
+<p:sld xmlns:p="http://schemas.openxmlformats.org/presentationml/2006/main">
+  <p:cSld>
+    <p:bg>
+      <p:bgPr>
+        <a:solidFill xmlns:a="http://schemas.openxmlformats.org/drawingml/2006/main">
+          <a:srgbClr val="FFFFFF"/>
+        </a:solidFill>
+      </p:bgPr>
+    </p:bg>
+    <p:spTree>
+      <p:nvGrpSpPr>
+        <p:cNvPr id="1" name=""/>
+        <p:cNvGrpSpPr/>
+        <p:nvPr/>
+      </p:nvGrpSpPr>
+      <p:grpSpPr>
+        <a:xfrm xmlns:a="http://schemas.openxmlformats.org/drawingml/2006/main"/>
+      </p:grpSpPr>
+      <p:sp>
+        <p:nvSpPr>
+          <p:cNvPr id="1" name="">
+            <a:extLst xmlns:a="http://schemas.openxmlformats.org/drawingml/2006/main">
+              <a:ext uri="{FF2B5EF4-FFF2-40B4-BE49-F238E27FC236}">
+                <a16:creationId xmlns:a16="http://schemas.microsoft.com/office/drawing/2014/main" id="{3A32EB45-078B-4261-8835-BB19AD1FEBA3}"/>
+              </a:ext>
+            </a:extLst>
+          </p:cNvPr>
+          <p:cNvSpPr>
+            <a:spLocks xmlns:a="http://schemas.openxmlformats.org/drawingml/2006/main" noGrp="1"/>
+          </p:cNvSpPr>
+          <p:nvPr/>
+        </p:nvSpPr>
+        <p:spPr>
+          <a:xfrm xmlns:a="http://schemas.openxmlformats.org/drawingml/2006/main">
+            <a:off x="609600" y="304800"/>
+            <a:ext cx="5334000" cy="209550"/>
+          </a:xfrm>
+          <a:prstGeom xmlns:a="http://schemas.openxmlformats.org/drawingml/2006/main" prst="rect">
+            <a:avLst/>
+          </a:prstGeom>
+          <a:noFill xmlns:a="http://schemas.openxmlformats.org/drawingml/2006/main"/>
+          <a:ln xmlns:a="http://schemas.openxmlformats.org/drawingml/2006/main" w="0">
+            <a:noFill/>
+            <a:prstDash val="solid"/>
+          </a:ln>
+        </p:spPr>
+        <p:txBody>
+          <a:bodyPr xmlns:a="http://schemas.openxmlformats.org/drawingml/2006/main"/>
+          <a:lstStyle xmlns:a="http://schemas.openxmlformats.org/drawingml/2006/main"/>
+          <a:p xmlns:a="http://schemas.openxmlformats.org/drawingml/2006/main">
+            <a:pPr>
+              <a:defRPr sz="975" b="1">
+                <a:solidFill>
+                  <a:srgbClr val="2563EB"/>
+                </a:solidFill>
+              </a:defRPr>
+            </a:pPr>
+            <a:r>
+              <a:rPr sz="975" b="1">
+                <a:solidFill>
+                  <a:srgbClr val="2563EB"/>
+                </a:solidFill>
+              </a:rPr>
+              <a:t>GEN5.3 PCA RESEARCH PIVOT</a:t>
+            </a:r>
+          </a:p>
+        </p:txBody>
+      </p:sp>
+      <p:sp>
+        <p:nvSpPr>
+          <p:cNvPr id="2" name="">
+            <a:extLst xmlns:a="http://schemas.openxmlformats.org/drawingml/2006/main">
+              <a:ext uri="{FF2B5EF4-FFF2-40B4-BE49-F238E27FC236}">
+                <a16:creationId xmlns:a16="http://schemas.microsoft.com/office/drawing/2014/main" id="{1E237E4E-DC9D-4D4B-A15C-37818A57564F}"/>
+              </a:ext>
+            </a:extLst>
+          </p:cNvPr>
+          <p:cNvSpPr>
+            <a:spLocks xmlns:a="http://schemas.openxmlformats.org/drawingml/2006/main" noGrp="1"/>
+          </p:cNvSpPr>
+          <p:nvPr/>
+        </p:nvSpPr>
+        <p:spPr>
+          <a:xfrm xmlns:a="http://schemas.openxmlformats.org/drawingml/2006/main">
+            <a:off x="609600" y="647700"/>
+            <a:ext cx="9334500" cy="876300"/>
+          </a:xfrm>
+          <a:prstGeom xmlns:a="http://schemas.openxmlformats.org/drawingml/2006/main" prst="rect">
+            <a:avLst/>
+          </a:prstGeom>
+          <a:noFill xmlns:a="http://schemas.openxmlformats.org/drawingml/2006/main"/>
+          <a:ln xmlns:a="http://schemas.openxmlformats.org/drawingml/2006/main" w="0">
+            <a:noFill/>
+            <a:prstDash val="solid"/>
+          </a:ln>
+        </p:spPr>
+        <p:txBody>
+          <a:bodyPr xmlns:a="http://schemas.openxmlformats.org/drawingml/2006/main"/>
+          <a:lstStyle xmlns:a="http://schemas.openxmlformats.org/drawingml/2006/main"/>
+          <a:p xmlns:a="http://schemas.openxmlformats.org/drawingml/2006/main">
+            <a:pPr>
+              <a:defRPr sz="2775" b="1">
+                <a:solidFill>
+                  <a:srgbClr val="111827"/>
+                </a:solidFill>
+              </a:defRPr>
+            </a:pPr>
+            <a:r>
+              <a:rPr sz="2775" b="1">
+                <a:solidFill>
+                  <a:srgbClr val="111827"/>
+                </a:solidFill>
+              </a:rPr>
+              <a:t>Next Gen5.3 slice: diagnose why bullish participation is still late</a:t>
+            </a:r>
+          </a:p>
+        </p:txBody>
+      </p:sp>
+      <p:sp>
+        <p:nvSpPr>
+          <p:cNvPr id="3" name="">
+            <a:extLst xmlns:a="http://schemas.openxmlformats.org/drawingml/2006/main">
+              <a:ext uri="{FF2B5EF4-FFF2-40B4-BE49-F238E27FC236}">
+                <a16:creationId xmlns:a16="http://schemas.microsoft.com/office/drawing/2014/main" id="{AFC7B80E-D94E-41C7-A38A-5530914D5ABD}"/>
+              </a:ext>
+            </a:extLst>
+          </p:cNvPr>
+          <p:cNvSpPr>
+            <a:spLocks xmlns:a="http://schemas.openxmlformats.org/drawingml/2006/main" noGrp="1"/>
+          </p:cNvSpPr>
+          <p:nvPr/>
+        </p:nvSpPr>
+        <p:spPr>
+          <a:xfrm xmlns:a="http://schemas.openxmlformats.org/drawingml/2006/main">
+            <a:off x="609600" y="1485900"/>
+            <a:ext cx="10572750" cy="9525"/>
+          </a:xfrm>
+          <a:prstGeom xmlns:a="http://schemas.openxmlformats.org/drawingml/2006/main" prst="rect">
+            <a:avLst/>
+          </a:prstGeom>
+          <a:solidFill xmlns:a="http://schemas.openxmlformats.org/drawingml/2006/main">
+            <a:srgbClr val="CBD3DD"/>
+          </a:solidFill>
+          <a:ln xmlns:a="http://schemas.openxmlformats.org/drawingml/2006/main" w="0">
+            <a:solidFill>
+              <a:srgbClr val="CBD3DD"/>
+            </a:solidFill>
+            <a:prstDash val="solid"/>
+          </a:ln>
+        </p:spPr>
+      </p:sp>
+      <p:sp>
+        <p:nvSpPr>
+          <p:cNvPr id="4" name="">
+            <a:extLst xmlns:a="http://schemas.openxmlformats.org/drawingml/2006/main">
+              <a:ext uri="{FF2B5EF4-FFF2-40B4-BE49-F238E27FC236}">
+                <a16:creationId xmlns:a16="http://schemas.microsoft.com/office/drawing/2014/main" id="{A8D9F19F-1B92-46A0-BCC1-5C44691BFE29}"/>
+              </a:ext>
+            </a:extLst>
+          </p:cNvPr>
+          <p:cNvSpPr>
+            <a:spLocks xmlns:a="http://schemas.openxmlformats.org/drawingml/2006/main" noGrp="1"/>
+          </p:cNvSpPr>
+          <p:nvPr/>
+        </p:nvSpPr>
+        <p:spPr>
+          <a:xfrm xmlns:a="http://schemas.openxmlformats.org/drawingml/2006/main">
+            <a:off x="781050" y="2038350"/>
+            <a:ext cx="10382250" cy="3143250"/>
+          </a:xfrm>
+          <a:prstGeom xmlns:a="http://schemas.openxmlformats.org/drawingml/2006/main" prst="roundRect">
+            <a:avLst>
+              <a:gd name="adj" fmla="val 2424"/>
+            </a:avLst>
+          </a:prstGeom>
+          <a:solidFill xmlns:a="http://schemas.openxmlformats.org/drawingml/2006/main">
+            <a:srgbClr val="F8FAFC"/>
+          </a:solidFill>
+          <a:ln xmlns:a="http://schemas.openxmlformats.org/drawingml/2006/main" w="9525">
+            <a:solidFill>
+              <a:srgbClr val="D7DEE8"/>
+            </a:solidFill>
+            <a:prstDash val="solid"/>
+          </a:ln>
+        </p:spPr>
+      </p:sp>
+      <p:sp>
+        <p:nvSpPr>
+          <p:cNvPr id="5" name="">
+            <a:extLst xmlns:a="http://schemas.openxmlformats.org/drawingml/2006/main">
+              <a:ext uri="{FF2B5EF4-FFF2-40B4-BE49-F238E27FC236}">
+                <a16:creationId xmlns:a16="http://schemas.microsoft.com/office/drawing/2014/main" id="{CE98FB16-782F-4777-BBDE-1BFA4DFBC24D}"/>
+              </a:ext>
+            </a:extLst>
+          </p:cNvPr>
+          <p:cNvSpPr>
+            <a:spLocks xmlns:a="http://schemas.openxmlformats.org/drawingml/2006/main" noGrp="1"/>
+          </p:cNvSpPr>
+          <p:nvPr/>
+        </p:nvSpPr>
+        <p:spPr>
+          <a:xfrm xmlns:a="http://schemas.openxmlformats.org/drawingml/2006/main">
+            <a:off x="1143000" y="2362200"/>
+            <a:ext cx="4095750" cy="323850"/>
+          </a:xfrm>
+          <a:prstGeom xmlns:a="http://schemas.openxmlformats.org/drawingml/2006/main" prst="rect">
+            <a:avLst/>
+          </a:prstGeom>
+          <a:noFill xmlns:a="http://schemas.openxmlformats.org/drawingml/2006/main"/>
+          <a:ln xmlns:a="http://schemas.openxmlformats.org/drawingml/2006/main" w="0">
+            <a:noFill/>
+            <a:prstDash val="solid"/>
+          </a:ln>
+        </p:spPr>
+        <p:txBody>
+          <a:bodyPr xmlns:a="http://schemas.openxmlformats.org/drawingml/2006/main"/>
+          <a:lstStyle xmlns:a="http://schemas.openxmlformats.org/drawingml/2006/main"/>
+          <a:p xmlns:a="http://schemas.openxmlformats.org/drawingml/2006/main">
+            <a:pPr>
+              <a:defRPr sz="2025" b="1">
+                <a:solidFill>
+                  <a:srgbClr val="111827"/>
+                </a:solidFill>
+              </a:defRPr>
+            </a:pPr>
+            <a:r>
+              <a:rPr sz="2025" b="1">
+                <a:solidFill>
+                  <a:srgbClr val="111827"/>
+                </a:solidFill>
+              </a:rPr>
+              <a:t>Recommended next question</a:t>
+            </a:r>
+          </a:p>
+        </p:txBody>
+      </p:sp>
+      <p:sp>
+        <p:nvSpPr>
+          <p:cNvPr id="6" name="">
+            <a:extLst xmlns:a="http://schemas.openxmlformats.org/drawingml/2006/main">
+              <a:ext uri="{FF2B5EF4-FFF2-40B4-BE49-F238E27FC236}">
+                <a16:creationId xmlns:a16="http://schemas.microsoft.com/office/drawing/2014/main" id="{338F9BD9-D933-4A2C-AC6A-0D194C2185C1}"/>
+              </a:ext>
+            </a:extLst>
+          </p:cNvPr>
+          <p:cNvSpPr>
+            <a:spLocks xmlns:a="http://schemas.openxmlformats.org/drawingml/2006/main" noGrp="1"/>
+          </p:cNvSpPr>
+          <p:nvPr/>
+        </p:nvSpPr>
+        <p:spPr>
+          <a:xfrm xmlns:a="http://schemas.openxmlformats.org/drawingml/2006/main">
+            <a:off x="1143000" y="2971800"/>
+            <a:ext cx="8953500" cy="742950"/>
+          </a:xfrm>
+          <a:prstGeom xmlns:a="http://schemas.openxmlformats.org/drawingml/2006/main" prst="rect">
+            <a:avLst/>
+          </a:prstGeom>
+          <a:noFill xmlns:a="http://schemas.openxmlformats.org/drawingml/2006/main"/>
+          <a:ln xmlns:a="http://schemas.openxmlformats.org/drawingml/2006/main" w="0">
+            <a:noFill/>
+            <a:prstDash val="solid"/>
+          </a:ln>
+        </p:spPr>
+        <p:txBody>
+          <a:bodyPr xmlns:a="http://schemas.openxmlformats.org/drawingml/2006/main"/>
+          <a:lstStyle xmlns:a="http://schemas.openxmlformats.org/drawingml/2006/main"/>
+          <a:p xmlns:a="http://schemas.openxmlformats.org/drawingml/2006/main">
+            <a:pPr>
+              <a:defRPr sz="1875" b="0">
+                <a:solidFill>
+                  <a:srgbClr val="111827"/>
+                </a:solidFill>
+              </a:defRPr>
+            </a:pPr>
+            <a:r>
+              <a:rPr sz="1875" b="0">
+                <a:solidFill>
+                  <a:srgbClr val="111827"/>
+                </a:solidFill>
+              </a:rPr>
+              <a:t>Do improved momentum-participation features make PCA states enter and stay long earlier during obvious high-beta upside without surrendering the 2022 drawdown protection?</a:t>
+            </a:r>
+          </a:p>
+        </p:txBody>
+      </p:sp>
+      <p:sp>
+        <p:nvSpPr>
+          <p:cNvPr id="7" name="">
+            <a:extLst xmlns:a="http://schemas.openxmlformats.org/drawingml/2006/main">
+              <a:ext uri="{FF2B5EF4-FFF2-40B4-BE49-F238E27FC236}">
+                <a16:creationId xmlns:a16="http://schemas.microsoft.com/office/drawing/2014/main" id="{B3F5F196-1666-49A7-BCD6-EC81AD2B63F7}"/>
+              </a:ext>
+            </a:extLst>
+          </p:cNvPr>
+          <p:cNvSpPr>
+            <a:spLocks xmlns:a="http://schemas.openxmlformats.org/drawingml/2006/main" noGrp="1"/>
+          </p:cNvSpPr>
+          <p:nvPr/>
+        </p:nvSpPr>
+        <p:spPr>
+          <a:xfrm xmlns:a="http://schemas.openxmlformats.org/drawingml/2006/main">
+            <a:off x="1181100" y="4181475"/>
+            <a:ext cx="76200" cy="76200"/>
+          </a:xfrm>
+          <a:prstGeom xmlns:a="http://schemas.openxmlformats.org/drawingml/2006/main" prst="ellipse">
+            <a:avLst/>
+          </a:prstGeom>
+          <a:solidFill xmlns:a="http://schemas.openxmlformats.org/drawingml/2006/main">
+            <a:srgbClr val="D97706"/>
+          </a:solidFill>
+          <a:ln xmlns:a="http://schemas.openxmlformats.org/drawingml/2006/main" w="0">
+            <a:noFill/>
+            <a:prstDash val="solid"/>
+          </a:ln>
+        </p:spPr>
+      </p:sp>
+      <p:sp>
+        <p:nvSpPr>
+          <p:cNvPr id="8" name="">
+            <a:extLst xmlns:a="http://schemas.openxmlformats.org/drawingml/2006/main">
+              <a:ext uri="{FF2B5EF4-FFF2-40B4-BE49-F238E27FC236}">
+                <a16:creationId xmlns:a16="http://schemas.microsoft.com/office/drawing/2014/main" id="{0D8FAC86-95B7-4BF9-91F0-0ECA9CB447E0}"/>
+              </a:ext>
+            </a:extLst>
+          </p:cNvPr>
+          <p:cNvSpPr>
+            <a:spLocks xmlns:a="http://schemas.openxmlformats.org/drawingml/2006/main" noGrp="1"/>
+          </p:cNvSpPr>
+          <p:nvPr/>
+        </p:nvSpPr>
+        <p:spPr>
+          <a:xfrm xmlns:a="http://schemas.openxmlformats.org/drawingml/2006/main">
+            <a:off x="1390650" y="4095750"/>
+            <a:ext cx="8743950" cy="342900"/>
+          </a:xfrm>
+          <a:prstGeom xmlns:a="http://schemas.openxmlformats.org/drawingml/2006/main" prst="rect">
+            <a:avLst/>
+          </a:prstGeom>
+          <a:noFill xmlns:a="http://schemas.openxmlformats.org/drawingml/2006/main"/>
+          <a:ln xmlns:a="http://schemas.openxmlformats.org/drawingml/2006/main" w="0">
+            <a:noFill/>
+            <a:prstDash val="solid"/>
+          </a:ln>
+        </p:spPr>
+        <p:txBody>
+          <a:bodyPr xmlns:a="http://schemas.openxmlformats.org/drawingml/2006/main"/>
+          <a:lstStyle xmlns:a="http://schemas.openxmlformats.org/drawingml/2006/main"/>
+          <a:p xmlns:a="http://schemas.openxmlformats.org/drawingml/2006/main">
+            <a:pPr>
+              <a:defRPr sz="1350" b="0">
+                <a:solidFill>
+                  <a:srgbClr val="111827"/>
+                </a:solidFill>
+              </a:defRPr>
+            </a:pPr>
+            <a:r>
+              <a:rPr sz="1350" b="0">
+                <a:solidFill>
+                  <a:srgbClr val="111827"/>
+                </a:solidFill>
+              </a:rPr>
+              <a:t>Keep the same basket, context, 3x3 PCA, pooled-family policy, and benchmark.</a:t>
+            </a:r>
+          </a:p>
+        </p:txBody>
+      </p:sp>
+      <p:sp>
+        <p:nvSpPr>
+          <p:cNvPr id="9" name="">
+            <a:extLst xmlns:a="http://schemas.openxmlformats.org/drawingml/2006/main">
+              <a:ext uri="{FF2B5EF4-FFF2-40B4-BE49-F238E27FC236}">
+                <a16:creationId xmlns:a16="http://schemas.microsoft.com/office/drawing/2014/main" id="{1FA72D4A-C5A1-4A50-AF2D-A8DE6D0C144F}"/>
+              </a:ext>
+            </a:extLst>
+          </p:cNvPr>
+          <p:cNvSpPr>
+            <a:spLocks xmlns:a="http://schemas.openxmlformats.org/drawingml/2006/main" noGrp="1"/>
+          </p:cNvSpPr>
+          <p:nvPr/>
+        </p:nvSpPr>
+        <p:spPr>
+          <a:xfrm xmlns:a="http://schemas.openxmlformats.org/drawingml/2006/main">
+            <a:off x="1181100" y="4486275"/>
+            <a:ext cx="76200" cy="76200"/>
+          </a:xfrm>
+          <a:prstGeom xmlns:a="http://schemas.openxmlformats.org/drawingml/2006/main" prst="ellipse">
+            <a:avLst/>
+          </a:prstGeom>
+          <a:solidFill xmlns:a="http://schemas.openxmlformats.org/drawingml/2006/main">
+            <a:srgbClr val="D97706"/>
+          </a:solidFill>
+          <a:ln xmlns:a="http://schemas.openxmlformats.org/drawingml/2006/main" w="0">
+            <a:noFill/>
+            <a:prstDash val="solid"/>
+          </a:ln>
+        </p:spPr>
+      </p:sp>
+      <p:sp>
+        <p:nvSpPr>
+          <p:cNvPr id="10" name="">
+            <a:extLst xmlns:a="http://schemas.openxmlformats.org/drawingml/2006/main">
+              <a:ext uri="{FF2B5EF4-FFF2-40B4-BE49-F238E27FC236}">
+                <a16:creationId xmlns:a16="http://schemas.microsoft.com/office/drawing/2014/main" id="{91FDB32A-5FF4-4F4A-BF49-5D777F7159A3}"/>
+              </a:ext>
+            </a:extLst>
+          </p:cNvPr>
+          <p:cNvSpPr>
+            <a:spLocks xmlns:a="http://schemas.openxmlformats.org/drawingml/2006/main" noGrp="1"/>
+          </p:cNvSpPr>
+          <p:nvPr/>
+        </p:nvSpPr>
+        <p:spPr>
+          <a:xfrm xmlns:a="http://schemas.openxmlformats.org/drawingml/2006/main">
+            <a:off x="1390650" y="4400550"/>
+            <a:ext cx="8743950" cy="342900"/>
+          </a:xfrm>
+          <a:prstGeom xmlns:a="http://schemas.openxmlformats.org/drawingml/2006/main" prst="rect">
+            <a:avLst/>
+          </a:prstGeom>
+          <a:noFill xmlns:a="http://schemas.openxmlformats.org/drawingml/2006/main"/>
+          <a:ln xmlns:a="http://schemas.openxmlformats.org/drawingml/2006/main" w="0">
+            <a:noFill/>
+            <a:prstDash val="solid"/>
+          </a:ln>
+        </p:spPr>
+        <p:txBody>
+          <a:bodyPr xmlns:a="http://schemas.openxmlformats.org/drawingml/2006/main"/>
+          <a:lstStyle xmlns:a="http://schemas.openxmlformats.org/drawingml/2006/main"/>
+          <a:p xmlns:a="http://schemas.openxmlformats.org/drawingml/2006/main">
+            <a:pPr>
+              <a:defRPr sz="1350" b="0">
+                <a:solidFill>
+                  <a:srgbClr val="111827"/>
+                </a:solidFill>
+              </a:defRPr>
+            </a:pPr>
+            <a:r>
+              <a:rPr sz="1350" b="0">
+                <a:solidFill>
+                  <a:srgbClr val="111827"/>
+                </a:solidFill>
+              </a:rPr>
+              <a:t>Add one compact feature-set challenger focused on trend slope, relative strength, and drawdown recovery.</a:t>
+            </a:r>
+          </a:p>
+        </p:txBody>
+      </p:sp>
+      <p:sp>
+        <p:nvSpPr>
+          <p:cNvPr id="11" name="">
+            <a:extLst xmlns:a="http://schemas.openxmlformats.org/drawingml/2006/main">
+              <a:ext uri="{FF2B5EF4-FFF2-40B4-BE49-F238E27FC236}">
+                <a16:creationId xmlns:a16="http://schemas.microsoft.com/office/drawing/2014/main" id="{A400D0AA-86EE-4B9A-B254-0571CF439806}"/>
+              </a:ext>
+            </a:extLst>
+          </p:cNvPr>
+          <p:cNvSpPr>
+            <a:spLocks xmlns:a="http://schemas.openxmlformats.org/drawingml/2006/main" noGrp="1"/>
+          </p:cNvSpPr>
+          <p:nvPr/>
+        </p:nvSpPr>
+        <p:spPr>
+          <a:xfrm xmlns:a="http://schemas.openxmlformats.org/drawingml/2006/main">
+            <a:off x="1181100" y="4791075"/>
+            <a:ext cx="76200" cy="76200"/>
+          </a:xfrm>
+          <a:prstGeom xmlns:a="http://schemas.openxmlformats.org/drawingml/2006/main" prst="ellipse">
+            <a:avLst/>
+          </a:prstGeom>
+          <a:solidFill xmlns:a="http://schemas.openxmlformats.org/drawingml/2006/main">
+            <a:srgbClr val="D97706"/>
+          </a:solidFill>
+          <a:ln xmlns:a="http://schemas.openxmlformats.org/drawingml/2006/main" w="0">
+            <a:noFill/>
+            <a:prstDash val="solid"/>
+          </a:ln>
+        </p:spPr>
+      </p:sp>
+      <p:sp>
+        <p:nvSpPr>
+          <p:cNvPr id="12" name="">
+            <a:extLst xmlns:a="http://schemas.openxmlformats.org/drawingml/2006/main">
+              <a:ext uri="{FF2B5EF4-FFF2-40B4-BE49-F238E27FC236}">
+                <a16:creationId xmlns:a16="http://schemas.microsoft.com/office/drawing/2014/main" id="{7DD09877-F53F-465F-98E0-F2F73361D395}"/>
+              </a:ext>
+            </a:extLst>
+          </p:cNvPr>
+          <p:cNvSpPr>
+            <a:spLocks xmlns:a="http://schemas.openxmlformats.org/drawingml/2006/main" noGrp="1"/>
+          </p:cNvSpPr>
+          <p:nvPr/>
+        </p:nvSpPr>
+        <p:spPr>
+          <a:xfrm xmlns:a="http://schemas.openxmlformats.org/drawingml/2006/main">
+            <a:off x="1390650" y="4705350"/>
+            <a:ext cx="8743950" cy="342900"/>
+          </a:xfrm>
+          <a:prstGeom xmlns:a="http://schemas.openxmlformats.org/drawingml/2006/main" prst="rect">
+            <a:avLst/>
+          </a:prstGeom>
+          <a:noFill xmlns:a="http://schemas.openxmlformats.org/drawingml/2006/main"/>
+          <a:ln xmlns:a="http://schemas.openxmlformats.org/drawingml/2006/main" w="0">
+            <a:noFill/>
+            <a:prstDash val="solid"/>
+          </a:ln>
+        </p:spPr>
+        <p:txBody>
+          <a:bodyPr xmlns:a="http://schemas.openxmlformats.org/drawingml/2006/main"/>
+          <a:lstStyle xmlns:a="http://schemas.openxmlformats.org/drawingml/2006/main"/>
+          <a:p xmlns:a="http://schemas.openxmlformats.org/drawingml/2006/main">
+            <a:pPr>
+              <a:defRPr sz="1350" b="0">
+                <a:solidFill>
+                  <a:srgbClr val="111827"/>
+                </a:solidFill>
+              </a:defRPr>
+            </a:pPr>
+            <a:r>
+              <a:rPr sz="1350" b="0">
+                <a:solidFill>
+                  <a:srgbClr val="111827"/>
+                </a:solidFill>
+              </a:rPr>
+              <a:t>Run 2020Q3 and 2022Q1 first; expand windows only if the behavior changes mechanically.</a:t>
+            </a:r>
+          </a:p>
+        </p:txBody>
+      </p:sp>
+      <p:sp>
+        <p:nvSpPr>
+          <p:cNvPr id="13" name="">
+            <a:extLst xmlns:a="http://schemas.openxmlformats.org/drawingml/2006/main">
+              <a:ext uri="{FF2B5EF4-FFF2-40B4-BE49-F238E27FC236}">
+                <a16:creationId xmlns:a16="http://schemas.microsoft.com/office/drawing/2014/main" id="{FADED8C5-8ECF-41C7-B5AA-37414E0C5A75}"/>
+              </a:ext>
+            </a:extLst>
+          </p:cNvPr>
+          <p:cNvSpPr>
+            <a:spLocks xmlns:a="http://schemas.openxmlformats.org/drawingml/2006/main" noGrp="1"/>
+          </p:cNvSpPr>
+          <p:nvPr/>
+        </p:nvSpPr>
+        <p:spPr>
+          <a:xfrm xmlns:a="http://schemas.openxmlformats.org/drawingml/2006/main">
+            <a:off x="1219200" y="5810250"/>
+            <a:ext cx="9620250" cy="400050"/>
+          </a:xfrm>
+          <a:prstGeom xmlns:a="http://schemas.openxmlformats.org/drawingml/2006/main" prst="rect">
+            <a:avLst/>
+          </a:prstGeom>
+          <a:noFill xmlns:a="http://schemas.openxmlformats.org/drawingml/2006/main"/>
+          <a:ln xmlns:a="http://schemas.openxmlformats.org/drawingml/2006/main" w="0">
+            <a:noFill/>
+            <a:prstDash val="solid"/>
+          </a:ln>
+        </p:spPr>
+        <p:txBody>
+          <a:bodyPr xmlns:a="http://schemas.openxmlformats.org/drawingml/2006/main"/>
+          <a:lstStyle xmlns:a="http://schemas.openxmlformats.org/drawingml/2006/main"/>
+          <a:p xmlns:a="http://schemas.openxmlformats.org/drawingml/2006/main">
+            <a:pPr algn="ctr">
+              <a:defRPr sz="1500" b="1">
+                <a:solidFill>
+                  <a:srgbClr val="111827"/>
+                </a:solidFill>
+              </a:defRPr>
+            </a:pPr>
+            <a:r>
+              <a:rPr sz="1500" b="1">
+                <a:solidFill>
+                  <a:srgbClr val="111827"/>
+                </a:solidFill>
+              </a:rPr>
+              <a:t>Compute note: full Gen4 daily-default breadth is expensive enough that feature engineering should start with compact grids, then confirm with full breadth after the mechanism is visible.</a:t>
+            </a:r>
+          </a:p>
+        </p:txBody>
+      </p:sp>
+    </p:spTree>
+    <p:extLst>
+      <p:ext uri="{BB962C8B-B14F-4D97-AF65-F5344CB8AC3E}">
+        <p14:creationId xmlns:p14="http://schemas.microsoft.com/office/powerpoint/2010/main" val="71963633"/>
       </p:ext>
     </p:extLst>
   </p:cSld>
@@ -2052,7 +5001,7 @@
           <p:cNvPr id="1" name="">
             <a:extLst xmlns:a="http://schemas.openxmlformats.org/drawingml/2006/main">
               <a:ext uri="{FF2B5EF4-FFF2-40B4-BE49-F238E27FC236}">
-                <a16:creationId xmlns:a16="http://schemas.microsoft.com/office/drawing/2014/main" id="{92A73E12-C761-4208-8A64-AFB697F1A462}"/>
+                <a16:creationId xmlns:a16="http://schemas.microsoft.com/office/drawing/2014/main" id="{56FF4BE9-853A-4D90-A041-E3F808DCD5BB}"/>
               </a:ext>
             </a:extLst>
           </p:cNvPr>
@@ -2102,7 +5051,7 @@
           <p:cNvPr id="2" name="">
             <a:extLst xmlns:a="http://schemas.openxmlformats.org/drawingml/2006/main">
               <a:ext uri="{FF2B5EF4-FFF2-40B4-BE49-F238E27FC236}">
-                <a16:creationId xmlns:a16="http://schemas.microsoft.com/office/drawing/2014/main" id="{09E3F0A1-6F84-42B9-A6CF-1249E5991638}"/>
+                <a16:creationId xmlns:a16="http://schemas.microsoft.com/office/drawing/2014/main" id="{50871AA7-C3BB-47BE-97AD-DC12E6757797}"/>
               </a:ext>
             </a:extLst>
           </p:cNvPr>
@@ -2152,7 +5101,7 @@
           <p:cNvPr id="3" name="">
             <a:extLst xmlns:a="http://schemas.openxmlformats.org/drawingml/2006/main">
               <a:ext uri="{FF2B5EF4-FFF2-40B4-BE49-F238E27FC236}">
-                <a16:creationId xmlns:a16="http://schemas.microsoft.com/office/drawing/2014/main" id="{3A00565A-88BA-4767-8267-57A4AE3DB678}"/>
+                <a16:creationId xmlns:a16="http://schemas.microsoft.com/office/drawing/2014/main" id="{C824441C-47DF-4A3B-AC0A-3894885AD635}"/>
               </a:ext>
             </a:extLst>
           </p:cNvPr>
@@ -2185,7 +5134,7 @@
           <p:cNvPr id="4" name="">
             <a:extLst xmlns:a="http://schemas.openxmlformats.org/drawingml/2006/main">
               <a:ext uri="{FF2B5EF4-FFF2-40B4-BE49-F238E27FC236}">
-                <a16:creationId xmlns:a16="http://schemas.microsoft.com/office/drawing/2014/main" id="{BE8B146B-6FCE-47F1-96B3-385224988DF4}"/>
+                <a16:creationId xmlns:a16="http://schemas.microsoft.com/office/drawing/2014/main" id="{D76A394C-50C7-471B-8C22-9BB1A25041B4}"/>
               </a:ext>
             </a:extLst>
           </p:cNvPr>
@@ -2220,7 +5169,7 @@
           <p:cNvPr id="5" name="">
             <a:extLst xmlns:a="http://schemas.openxmlformats.org/drawingml/2006/main">
               <a:ext uri="{FF2B5EF4-FFF2-40B4-BE49-F238E27FC236}">
-                <a16:creationId xmlns:a16="http://schemas.microsoft.com/office/drawing/2014/main" id="{3F4252CB-FB18-4175-84C1-A96839639291}"/>
+                <a16:creationId xmlns:a16="http://schemas.microsoft.com/office/drawing/2014/main" id="{608CFF40-39F5-4437-8BAE-B814631A1455}"/>
               </a:ext>
             </a:extLst>
           </p:cNvPr>
@@ -2270,7 +5219,7 @@
           <p:cNvPr id="6" name="">
             <a:extLst xmlns:a="http://schemas.openxmlformats.org/drawingml/2006/main">
               <a:ext uri="{FF2B5EF4-FFF2-40B4-BE49-F238E27FC236}">
-                <a16:creationId xmlns:a16="http://schemas.microsoft.com/office/drawing/2014/main" id="{EC9F182E-AF1B-45C7-A324-C8AB937DBCA1}"/>
+                <a16:creationId xmlns:a16="http://schemas.microsoft.com/office/drawing/2014/main" id="{3AD0750A-7CB9-41D9-8EBE-A8D10DFAFBD9}"/>
               </a:ext>
             </a:extLst>
           </p:cNvPr>
@@ -2301,7 +5250,7 @@
           <p:cNvPr id="7" name="">
             <a:extLst xmlns:a="http://schemas.openxmlformats.org/drawingml/2006/main">
               <a:ext uri="{FF2B5EF4-FFF2-40B4-BE49-F238E27FC236}">
-                <a16:creationId xmlns:a16="http://schemas.microsoft.com/office/drawing/2014/main" id="{DDE30F4C-F8B7-4B6A-BBDD-F5F9B6853A80}"/>
+                <a16:creationId xmlns:a16="http://schemas.microsoft.com/office/drawing/2014/main" id="{EE174954-FBEC-483B-B138-85AE35B0101A}"/>
               </a:ext>
             </a:extLst>
           </p:cNvPr>
@@ -2351,7 +5300,7 @@
           <p:cNvPr id="8" name="">
             <a:extLst xmlns:a="http://schemas.openxmlformats.org/drawingml/2006/main">
               <a:ext uri="{FF2B5EF4-FFF2-40B4-BE49-F238E27FC236}">
-                <a16:creationId xmlns:a16="http://schemas.microsoft.com/office/drawing/2014/main" id="{48EB970E-B6BF-4448-AD95-7D21898B20C1}"/>
+                <a16:creationId xmlns:a16="http://schemas.microsoft.com/office/drawing/2014/main" id="{457A7F49-5706-4F19-BC04-E3D740ECE589}"/>
               </a:ext>
             </a:extLst>
           </p:cNvPr>
@@ -2382,7 +5331,7 @@
           <p:cNvPr id="9" name="">
             <a:extLst xmlns:a="http://schemas.openxmlformats.org/drawingml/2006/main">
               <a:ext uri="{FF2B5EF4-FFF2-40B4-BE49-F238E27FC236}">
-                <a16:creationId xmlns:a16="http://schemas.microsoft.com/office/drawing/2014/main" id="{14474B6A-1FF1-48DF-BB21-1129EF0064E7}"/>
+                <a16:creationId xmlns:a16="http://schemas.microsoft.com/office/drawing/2014/main" id="{B6A857AC-5EA5-4446-A0A2-5ECCBB2732D4}"/>
               </a:ext>
             </a:extLst>
           </p:cNvPr>
@@ -2432,7 +5381,7 @@
           <p:cNvPr id="10" name="">
             <a:extLst xmlns:a="http://schemas.openxmlformats.org/drawingml/2006/main">
               <a:ext uri="{FF2B5EF4-FFF2-40B4-BE49-F238E27FC236}">
-                <a16:creationId xmlns:a16="http://schemas.microsoft.com/office/drawing/2014/main" id="{9F626EFD-6BF0-441E-9C43-79C93FF49D18}"/>
+                <a16:creationId xmlns:a16="http://schemas.microsoft.com/office/drawing/2014/main" id="{65F7332E-78CF-4343-A53B-277E98DDDD9A}"/>
               </a:ext>
             </a:extLst>
           </p:cNvPr>
@@ -2463,7 +5412,7 @@
           <p:cNvPr id="11" name="">
             <a:extLst xmlns:a="http://schemas.openxmlformats.org/drawingml/2006/main">
               <a:ext uri="{FF2B5EF4-FFF2-40B4-BE49-F238E27FC236}">
-                <a16:creationId xmlns:a16="http://schemas.microsoft.com/office/drawing/2014/main" id="{CD29C328-02F2-4068-813F-E2454BB16C1B}"/>
+                <a16:creationId xmlns:a16="http://schemas.microsoft.com/office/drawing/2014/main" id="{0EBE3D20-2538-47DD-B072-F2823878FEA2}"/>
               </a:ext>
             </a:extLst>
           </p:cNvPr>
@@ -2513,7 +5462,7 @@
           <p:cNvPr id="12" name="">
             <a:extLst xmlns:a="http://schemas.openxmlformats.org/drawingml/2006/main">
               <a:ext uri="{FF2B5EF4-FFF2-40B4-BE49-F238E27FC236}">
-                <a16:creationId xmlns:a16="http://schemas.microsoft.com/office/drawing/2014/main" id="{15431394-429A-48B4-94E5-9E5C74926582}"/>
+                <a16:creationId xmlns:a16="http://schemas.microsoft.com/office/drawing/2014/main" id="{037E0167-547C-482F-B78E-A5EF1D1F4FEF}"/>
               </a:ext>
             </a:extLst>
           </p:cNvPr>
@@ -2544,7 +5493,7 @@
           <p:cNvPr id="13" name="">
             <a:extLst xmlns:a="http://schemas.openxmlformats.org/drawingml/2006/main">
               <a:ext uri="{FF2B5EF4-FFF2-40B4-BE49-F238E27FC236}">
-                <a16:creationId xmlns:a16="http://schemas.microsoft.com/office/drawing/2014/main" id="{8D400C4C-A4C3-419A-AD1C-DCF8FAA9E481}"/>
+                <a16:creationId xmlns:a16="http://schemas.microsoft.com/office/drawing/2014/main" id="{E0CCF127-389E-47ED-B0B2-617D692BA24D}"/>
               </a:ext>
             </a:extLst>
           </p:cNvPr>
@@ -2594,7 +5543,7 @@
           <p:cNvPr id="14" name="">
             <a:extLst xmlns:a="http://schemas.openxmlformats.org/drawingml/2006/main">
               <a:ext uri="{FF2B5EF4-FFF2-40B4-BE49-F238E27FC236}">
-                <a16:creationId xmlns:a16="http://schemas.microsoft.com/office/drawing/2014/main" id="{EA87E221-9BC4-4A08-BE2D-36F556944003}"/>
+                <a16:creationId xmlns:a16="http://schemas.microsoft.com/office/drawing/2014/main" id="{3E5793A2-C081-45B1-834A-9E5E8E5160BB}"/>
               </a:ext>
             </a:extLst>
           </p:cNvPr>
@@ -2625,7 +5574,7 @@
           <p:cNvPr id="15" name="">
             <a:extLst xmlns:a="http://schemas.openxmlformats.org/drawingml/2006/main">
               <a:ext uri="{FF2B5EF4-FFF2-40B4-BE49-F238E27FC236}">
-                <a16:creationId xmlns:a16="http://schemas.microsoft.com/office/drawing/2014/main" id="{721F31EC-49B2-496E-A01E-5EF68B6FBF6D}"/>
+                <a16:creationId xmlns:a16="http://schemas.microsoft.com/office/drawing/2014/main" id="{3FCA4997-78B9-46B7-A02C-264EB4FE7D83}"/>
               </a:ext>
             </a:extLst>
           </p:cNvPr>
@@ -2675,7 +5624,7 @@
           <p:cNvPr id="16" name="">
             <a:extLst xmlns:a="http://schemas.openxmlformats.org/drawingml/2006/main">
               <a:ext uri="{FF2B5EF4-FFF2-40B4-BE49-F238E27FC236}">
-                <a16:creationId xmlns:a16="http://schemas.microsoft.com/office/drawing/2014/main" id="{7654710D-F146-43B8-A44D-32FAE9501429}"/>
+                <a16:creationId xmlns:a16="http://schemas.microsoft.com/office/drawing/2014/main" id="{41E06B2A-C501-41BB-B677-F2FCDE45D13F}"/>
               </a:ext>
             </a:extLst>
           </p:cNvPr>
@@ -2710,7 +5659,7 @@
           <p:cNvPr id="17" name="">
             <a:extLst xmlns:a="http://schemas.openxmlformats.org/drawingml/2006/main">
               <a:ext uri="{FF2B5EF4-FFF2-40B4-BE49-F238E27FC236}">
-                <a16:creationId xmlns:a16="http://schemas.microsoft.com/office/drawing/2014/main" id="{A147732A-42D8-43F2-8166-3924962F7CC8}"/>
+                <a16:creationId xmlns:a16="http://schemas.microsoft.com/office/drawing/2014/main" id="{F20FF216-BA8B-4AC5-A13F-D0D6254D84FF}"/>
               </a:ext>
             </a:extLst>
           </p:cNvPr>
@@ -2760,7 +5709,7 @@
           <p:cNvPr id="18" name="">
             <a:extLst xmlns:a="http://schemas.openxmlformats.org/drawingml/2006/main">
               <a:ext uri="{FF2B5EF4-FFF2-40B4-BE49-F238E27FC236}">
-                <a16:creationId xmlns:a16="http://schemas.microsoft.com/office/drawing/2014/main" id="{0A7F3E51-2558-41D7-8D9F-E2D66D0AC8FF}"/>
+                <a16:creationId xmlns:a16="http://schemas.microsoft.com/office/drawing/2014/main" id="{AFF661A5-A840-4B6A-8BA7-638C73AA082C}"/>
               </a:ext>
             </a:extLst>
           </p:cNvPr>
@@ -2791,7 +5740,7 @@
           <p:cNvPr id="19" name="">
             <a:extLst xmlns:a="http://schemas.openxmlformats.org/drawingml/2006/main">
               <a:ext uri="{FF2B5EF4-FFF2-40B4-BE49-F238E27FC236}">
-                <a16:creationId xmlns:a16="http://schemas.microsoft.com/office/drawing/2014/main" id="{C34A3CB1-D27F-4459-923F-193520DFD66A}"/>
+                <a16:creationId xmlns:a16="http://schemas.microsoft.com/office/drawing/2014/main" id="{C05BBF29-7D38-4E93-93E9-3ADC9664037F}"/>
               </a:ext>
             </a:extLst>
           </p:cNvPr>
@@ -2841,7 +5790,7 @@
           <p:cNvPr id="20" name="">
             <a:extLst xmlns:a="http://schemas.openxmlformats.org/drawingml/2006/main">
               <a:ext uri="{FF2B5EF4-FFF2-40B4-BE49-F238E27FC236}">
-                <a16:creationId xmlns:a16="http://schemas.microsoft.com/office/drawing/2014/main" id="{BAEA1BED-1298-4DCE-83D5-4C26FB70D50B}"/>
+                <a16:creationId xmlns:a16="http://schemas.microsoft.com/office/drawing/2014/main" id="{9A00D305-4ED3-4D1B-8944-3C78885C40EF}"/>
               </a:ext>
             </a:extLst>
           </p:cNvPr>
@@ -2872,7 +5821,7 @@
           <p:cNvPr id="21" name="">
             <a:extLst xmlns:a="http://schemas.openxmlformats.org/drawingml/2006/main">
               <a:ext uri="{FF2B5EF4-FFF2-40B4-BE49-F238E27FC236}">
-                <a16:creationId xmlns:a16="http://schemas.microsoft.com/office/drawing/2014/main" id="{E147369E-6DBE-4C77-A56C-589211A9BDAF}"/>
+                <a16:creationId xmlns:a16="http://schemas.microsoft.com/office/drawing/2014/main" id="{BCCE2957-721F-4D22-A5FB-A802DD76829D}"/>
               </a:ext>
             </a:extLst>
           </p:cNvPr>
@@ -2922,7 +5871,7 @@
           <p:cNvPr id="22" name="">
             <a:extLst xmlns:a="http://schemas.openxmlformats.org/drawingml/2006/main">
               <a:ext uri="{FF2B5EF4-FFF2-40B4-BE49-F238E27FC236}">
-                <a16:creationId xmlns:a16="http://schemas.microsoft.com/office/drawing/2014/main" id="{96AB5E69-6CD1-460F-9784-537E95EE249D}"/>
+                <a16:creationId xmlns:a16="http://schemas.microsoft.com/office/drawing/2014/main" id="{51FFA570-664A-4441-8CFB-96881B24F52E}"/>
               </a:ext>
             </a:extLst>
           </p:cNvPr>
@@ -2953,7 +5902,7 @@
           <p:cNvPr id="23" name="">
             <a:extLst xmlns:a="http://schemas.openxmlformats.org/drawingml/2006/main">
               <a:ext uri="{FF2B5EF4-FFF2-40B4-BE49-F238E27FC236}">
-                <a16:creationId xmlns:a16="http://schemas.microsoft.com/office/drawing/2014/main" id="{037F47ED-9371-403B-92E3-6A96C2F2D8CF}"/>
+                <a16:creationId xmlns:a16="http://schemas.microsoft.com/office/drawing/2014/main" id="{65633EE2-0DFF-496C-A049-875D671FDBEB}"/>
               </a:ext>
             </a:extLst>
           </p:cNvPr>
@@ -3003,7 +5952,7 @@
           <p:cNvPr id="24" name="">
             <a:extLst xmlns:a="http://schemas.openxmlformats.org/drawingml/2006/main">
               <a:ext uri="{FF2B5EF4-FFF2-40B4-BE49-F238E27FC236}">
-                <a16:creationId xmlns:a16="http://schemas.microsoft.com/office/drawing/2014/main" id="{A82ED345-C7DB-44A1-811E-9AB7CEF0D011}"/>
+                <a16:creationId xmlns:a16="http://schemas.microsoft.com/office/drawing/2014/main" id="{15DA309B-B513-421F-8D24-38B1F029B44F}"/>
               </a:ext>
             </a:extLst>
           </p:cNvPr>
@@ -3034,7 +5983,7 @@
           <p:cNvPr id="25" name="">
             <a:extLst xmlns:a="http://schemas.openxmlformats.org/drawingml/2006/main">
               <a:ext uri="{FF2B5EF4-FFF2-40B4-BE49-F238E27FC236}">
-                <a16:creationId xmlns:a16="http://schemas.microsoft.com/office/drawing/2014/main" id="{C9A6E6C7-C9C1-49B4-9DF4-9862DB921963}"/>
+                <a16:creationId xmlns:a16="http://schemas.microsoft.com/office/drawing/2014/main" id="{717F9C7C-B1B2-43C9-8A0B-283A4F6F0802}"/>
               </a:ext>
             </a:extLst>
           </p:cNvPr>
@@ -3084,7 +6033,7 @@
           <p:cNvPr id="26" name="">
             <a:extLst xmlns:a="http://schemas.openxmlformats.org/drawingml/2006/main">
               <a:ext uri="{FF2B5EF4-FFF2-40B4-BE49-F238E27FC236}">
-                <a16:creationId xmlns:a16="http://schemas.microsoft.com/office/drawing/2014/main" id="{5F0CC7C2-CF07-46B6-BB19-46B21AA1AFF1}"/>
+                <a16:creationId xmlns:a16="http://schemas.microsoft.com/office/drawing/2014/main" id="{97BF6F11-E197-4588-953A-FA82B478A557}"/>
               </a:ext>
             </a:extLst>
           </p:cNvPr>
@@ -3132,7 +6081,7 @@
     </p:spTree>
     <p:extLst>
       <p:ext uri="{BB962C8B-B14F-4D97-AF65-F5344CB8AC3E}">
-        <p14:creationId xmlns:p14="http://schemas.microsoft.com/office/powerpoint/2010/main" val="88718730"/>
+        <p14:creationId xmlns:p14="http://schemas.microsoft.com/office/powerpoint/2010/main" val="138071836"/>
       </p:ext>
     </p:extLst>
   </p:cSld>
@@ -3163,7 +6112,7 @@
           <p:cNvPr id="1" name="">
             <a:extLst xmlns:a="http://schemas.openxmlformats.org/drawingml/2006/main">
               <a:ext uri="{FF2B5EF4-FFF2-40B4-BE49-F238E27FC236}">
-                <a16:creationId xmlns:a16="http://schemas.microsoft.com/office/drawing/2014/main" id="{113F643C-1317-424E-872C-9298236352A5}"/>
+                <a16:creationId xmlns:a16="http://schemas.microsoft.com/office/drawing/2014/main" id="{BF4DB844-203E-4B76-83AC-ABF7E1D7DD1F}"/>
               </a:ext>
             </a:extLst>
           </p:cNvPr>
@@ -3213,7 +6162,7 @@
           <p:cNvPr id="2" name="">
             <a:extLst xmlns:a="http://schemas.openxmlformats.org/drawingml/2006/main">
               <a:ext uri="{FF2B5EF4-FFF2-40B4-BE49-F238E27FC236}">
-                <a16:creationId xmlns:a16="http://schemas.microsoft.com/office/drawing/2014/main" id="{D0067FA3-510C-444C-99CF-595354A91792}"/>
+                <a16:creationId xmlns:a16="http://schemas.microsoft.com/office/drawing/2014/main" id="{F657AF1B-EE97-466D-8235-14881E0B5A7C}"/>
               </a:ext>
             </a:extLst>
           </p:cNvPr>
@@ -3263,7 +6212,7 @@
           <p:cNvPr id="3" name="">
             <a:extLst xmlns:a="http://schemas.openxmlformats.org/drawingml/2006/main">
               <a:ext uri="{FF2B5EF4-FFF2-40B4-BE49-F238E27FC236}">
-                <a16:creationId xmlns:a16="http://schemas.microsoft.com/office/drawing/2014/main" id="{3A3044CC-4330-42B5-B670-F0330F52657E}"/>
+                <a16:creationId xmlns:a16="http://schemas.microsoft.com/office/drawing/2014/main" id="{2C5CC106-91BA-4226-BFDA-3324D764B0A9}"/>
               </a:ext>
             </a:extLst>
           </p:cNvPr>
@@ -3296,7 +6245,7 @@
           <p:cNvPr id="4" name="">
             <a:extLst xmlns:a="http://schemas.openxmlformats.org/drawingml/2006/main">
               <a:ext uri="{FF2B5EF4-FFF2-40B4-BE49-F238E27FC236}">
-                <a16:creationId xmlns:a16="http://schemas.microsoft.com/office/drawing/2014/main" id="{60BC9219-EC69-42D1-8EE5-D8F73B7792C7}"/>
+                <a16:creationId xmlns:a16="http://schemas.microsoft.com/office/drawing/2014/main" id="{7BB18FA5-5856-4786-A876-9F78BF416430}"/>
               </a:ext>
             </a:extLst>
           </p:cNvPr>
@@ -3331,7 +6280,7 @@
           <p:cNvPr id="5" name="">
             <a:extLst xmlns:a="http://schemas.openxmlformats.org/drawingml/2006/main">
               <a:ext uri="{FF2B5EF4-FFF2-40B4-BE49-F238E27FC236}">
-                <a16:creationId xmlns:a16="http://schemas.microsoft.com/office/drawing/2014/main" id="{1D6EB0ED-A6FE-4983-9F26-52166E597EA6}"/>
+                <a16:creationId xmlns:a16="http://schemas.microsoft.com/office/drawing/2014/main" id="{642B28B0-2934-4492-A20C-5EF2575250BB}"/>
               </a:ext>
             </a:extLst>
           </p:cNvPr>
@@ -3381,7 +6330,7 @@
           <p:cNvPr id="6" name="">
             <a:extLst xmlns:a="http://schemas.openxmlformats.org/drawingml/2006/main">
               <a:ext uri="{FF2B5EF4-FFF2-40B4-BE49-F238E27FC236}">
-                <a16:creationId xmlns:a16="http://schemas.microsoft.com/office/drawing/2014/main" id="{52168A71-8274-4A0A-A3B4-728366C9EF19}"/>
+                <a16:creationId xmlns:a16="http://schemas.microsoft.com/office/drawing/2014/main" id="{1F451813-8BE4-47EB-91D4-75EC29674B67}"/>
               </a:ext>
             </a:extLst>
           </p:cNvPr>
@@ -3412,7 +6361,7 @@
           <p:cNvPr id="7" name="">
             <a:extLst xmlns:a="http://schemas.openxmlformats.org/drawingml/2006/main">
               <a:ext uri="{FF2B5EF4-FFF2-40B4-BE49-F238E27FC236}">
-                <a16:creationId xmlns:a16="http://schemas.microsoft.com/office/drawing/2014/main" id="{093EBA2D-BAFE-4D5A-90D7-FFE9DC51E11F}"/>
+                <a16:creationId xmlns:a16="http://schemas.microsoft.com/office/drawing/2014/main" id="{207D013A-30B6-489A-B37B-91F09E4D80A6}"/>
               </a:ext>
             </a:extLst>
           </p:cNvPr>
@@ -3447,7 +6396,7 @@
           <p:cNvPr id="8" name="">
             <a:extLst xmlns:a="http://schemas.openxmlformats.org/drawingml/2006/main">
               <a:ext uri="{FF2B5EF4-FFF2-40B4-BE49-F238E27FC236}">
-                <a16:creationId xmlns:a16="http://schemas.microsoft.com/office/drawing/2014/main" id="{5D00213C-275C-414B-94B9-C54230F33EF5}"/>
+                <a16:creationId xmlns:a16="http://schemas.microsoft.com/office/drawing/2014/main" id="{B9635D39-9F8C-4517-A239-A2E47C4A55CE}"/>
               </a:ext>
             </a:extLst>
           </p:cNvPr>
@@ -3497,7 +6446,7 @@
           <p:cNvPr id="9" name="">
             <a:extLst xmlns:a="http://schemas.openxmlformats.org/drawingml/2006/main">
               <a:ext uri="{FF2B5EF4-FFF2-40B4-BE49-F238E27FC236}">
-                <a16:creationId xmlns:a16="http://schemas.microsoft.com/office/drawing/2014/main" id="{1945C528-552F-4948-B8A1-FA5685739BE3}"/>
+                <a16:creationId xmlns:a16="http://schemas.microsoft.com/office/drawing/2014/main" id="{D7AF7FE6-F5B8-4B8F-8C4D-47A2BB986536}"/>
               </a:ext>
             </a:extLst>
           </p:cNvPr>
@@ -3528,7 +6477,7 @@
           <p:cNvPr id="10" name="">
             <a:extLst xmlns:a="http://schemas.openxmlformats.org/drawingml/2006/main">
               <a:ext uri="{FF2B5EF4-FFF2-40B4-BE49-F238E27FC236}">
-                <a16:creationId xmlns:a16="http://schemas.microsoft.com/office/drawing/2014/main" id="{3875C78D-FEB9-4A3E-892D-C2337C0A9E03}"/>
+                <a16:creationId xmlns:a16="http://schemas.microsoft.com/office/drawing/2014/main" id="{E67FF066-BF73-4D6D-861B-D7D9D8F052BA}"/>
               </a:ext>
             </a:extLst>
           </p:cNvPr>
@@ -3563,7 +6512,7 @@
           <p:cNvPr id="11" name="">
             <a:extLst xmlns:a="http://schemas.openxmlformats.org/drawingml/2006/main">
               <a:ext uri="{FF2B5EF4-FFF2-40B4-BE49-F238E27FC236}">
-                <a16:creationId xmlns:a16="http://schemas.microsoft.com/office/drawing/2014/main" id="{8C83008E-DC38-42B8-8A7E-BACAF37F9FEF}"/>
+                <a16:creationId xmlns:a16="http://schemas.microsoft.com/office/drawing/2014/main" id="{BE47F05B-960C-47AA-9ADF-8D066C83732C}"/>
               </a:ext>
             </a:extLst>
           </p:cNvPr>
@@ -3613,7 +6562,7 @@
           <p:cNvPr id="12" name="">
             <a:extLst xmlns:a="http://schemas.openxmlformats.org/drawingml/2006/main">
               <a:ext uri="{FF2B5EF4-FFF2-40B4-BE49-F238E27FC236}">
-                <a16:creationId xmlns:a16="http://schemas.microsoft.com/office/drawing/2014/main" id="{270A7B76-0F06-41BC-9E52-148F03EFB24B}"/>
+                <a16:creationId xmlns:a16="http://schemas.microsoft.com/office/drawing/2014/main" id="{F0460358-2E2C-44A0-9338-C2967EAAB0A4}"/>
               </a:ext>
             </a:extLst>
           </p:cNvPr>
@@ -3644,7 +6593,7 @@
           <p:cNvPr id="13" name="">
             <a:extLst xmlns:a="http://schemas.openxmlformats.org/drawingml/2006/main">
               <a:ext uri="{FF2B5EF4-FFF2-40B4-BE49-F238E27FC236}">
-                <a16:creationId xmlns:a16="http://schemas.microsoft.com/office/drawing/2014/main" id="{B90CBA53-68BF-47D0-B2BF-A0241C710949}"/>
+                <a16:creationId xmlns:a16="http://schemas.microsoft.com/office/drawing/2014/main" id="{1092F0FD-3477-40A5-9136-AB936622F2B7}"/>
               </a:ext>
             </a:extLst>
           </p:cNvPr>
@@ -3679,7 +6628,7 @@
           <p:cNvPr id="14" name="">
             <a:extLst xmlns:a="http://schemas.openxmlformats.org/drawingml/2006/main">
               <a:ext uri="{FF2B5EF4-FFF2-40B4-BE49-F238E27FC236}">
-                <a16:creationId xmlns:a16="http://schemas.microsoft.com/office/drawing/2014/main" id="{8482194B-E1DF-46B0-B830-80CFC81D19C2}"/>
+                <a16:creationId xmlns:a16="http://schemas.microsoft.com/office/drawing/2014/main" id="{AFD92E67-1725-44B3-810C-FBE6CAEF0F1B}"/>
               </a:ext>
             </a:extLst>
           </p:cNvPr>
@@ -3729,7 +6678,7 @@
           <p:cNvPr id="15" name="">
             <a:extLst xmlns:a="http://schemas.openxmlformats.org/drawingml/2006/main">
               <a:ext uri="{FF2B5EF4-FFF2-40B4-BE49-F238E27FC236}">
-                <a16:creationId xmlns:a16="http://schemas.microsoft.com/office/drawing/2014/main" id="{5D6B960D-CD88-4ECC-93B5-7514FD5E704D}"/>
+                <a16:creationId xmlns:a16="http://schemas.microsoft.com/office/drawing/2014/main" id="{A0654890-1D3B-43A3-91AC-51560F022E39}"/>
               </a:ext>
             </a:extLst>
           </p:cNvPr>
@@ -3764,7 +6713,7 @@
           <p:cNvPr id="16" name="">
             <a:extLst xmlns:a="http://schemas.openxmlformats.org/drawingml/2006/main">
               <a:ext uri="{FF2B5EF4-FFF2-40B4-BE49-F238E27FC236}">
-                <a16:creationId xmlns:a16="http://schemas.microsoft.com/office/drawing/2014/main" id="{EBD6F740-333A-4E80-B8E4-0E894F72DBF5}"/>
+                <a16:creationId xmlns:a16="http://schemas.microsoft.com/office/drawing/2014/main" id="{615048F9-EB4E-4077-92CD-ECE171728AAB}"/>
               </a:ext>
             </a:extLst>
           </p:cNvPr>
@@ -3814,7 +6763,7 @@
           <p:cNvPr id="17" name="">
             <a:extLst xmlns:a="http://schemas.openxmlformats.org/drawingml/2006/main">
               <a:ext uri="{FF2B5EF4-FFF2-40B4-BE49-F238E27FC236}">
-                <a16:creationId xmlns:a16="http://schemas.microsoft.com/office/drawing/2014/main" id="{A9739E00-EFF1-471A-AD29-CC644F8463D1}"/>
+                <a16:creationId xmlns:a16="http://schemas.microsoft.com/office/drawing/2014/main" id="{AD9AF367-4D20-436E-BC2C-CBC8F24DD3E5}"/>
               </a:ext>
             </a:extLst>
           </p:cNvPr>
@@ -3862,7 +6811,7 @@
     </p:spTree>
     <p:extLst>
       <p:ext uri="{BB962C8B-B14F-4D97-AF65-F5344CB8AC3E}">
-        <p14:creationId xmlns:p14="http://schemas.microsoft.com/office/powerpoint/2010/main" val="1991208593"/>
+        <p14:creationId xmlns:p14="http://schemas.microsoft.com/office/powerpoint/2010/main" val="2002627261"/>
       </p:ext>
     </p:extLst>
   </p:cSld>
@@ -3893,7 +6842,7 @@
           <p:cNvPr id="1" name="">
             <a:extLst xmlns:a="http://schemas.openxmlformats.org/drawingml/2006/main">
               <a:ext uri="{FF2B5EF4-FFF2-40B4-BE49-F238E27FC236}">
-                <a16:creationId xmlns:a16="http://schemas.microsoft.com/office/drawing/2014/main" id="{CF4EA7C2-683A-4106-A8A9-C85901CFF31B}"/>
+                <a16:creationId xmlns:a16="http://schemas.microsoft.com/office/drawing/2014/main" id="{CE5F6DBB-CC7D-4EBD-BB07-D6F9D329AB2E}"/>
               </a:ext>
             </a:extLst>
           </p:cNvPr>
@@ -3943,7 +6892,7 @@
           <p:cNvPr id="2" name="">
             <a:extLst xmlns:a="http://schemas.openxmlformats.org/drawingml/2006/main">
               <a:ext uri="{FF2B5EF4-FFF2-40B4-BE49-F238E27FC236}">
-                <a16:creationId xmlns:a16="http://schemas.microsoft.com/office/drawing/2014/main" id="{ECC2EE0F-8DAC-4049-B3B3-2311D3947B32}"/>
+                <a16:creationId xmlns:a16="http://schemas.microsoft.com/office/drawing/2014/main" id="{E5F98F62-C008-4FB2-AF3F-86DBBD2484CC}"/>
               </a:ext>
             </a:extLst>
           </p:cNvPr>
@@ -3993,7 +6942,7 @@
           <p:cNvPr id="3" name="">
             <a:extLst xmlns:a="http://schemas.openxmlformats.org/drawingml/2006/main">
               <a:ext uri="{FF2B5EF4-FFF2-40B4-BE49-F238E27FC236}">
-                <a16:creationId xmlns:a16="http://schemas.microsoft.com/office/drawing/2014/main" id="{71584582-EBC1-4F39-A984-500DA3436223}"/>
+                <a16:creationId xmlns:a16="http://schemas.microsoft.com/office/drawing/2014/main" id="{61093D7C-3021-4458-869D-820E63CA7550}"/>
               </a:ext>
             </a:extLst>
           </p:cNvPr>
@@ -4026,7 +6975,7 @@
           <p:cNvPr id="4" name="">
             <a:extLst xmlns:a="http://schemas.openxmlformats.org/drawingml/2006/main">
               <a:ext uri="{FF2B5EF4-FFF2-40B4-BE49-F238E27FC236}">
-                <a16:creationId xmlns:a16="http://schemas.microsoft.com/office/drawing/2014/main" id="{3AC7D129-BB05-422C-9A44-15B87DC1CAB9}"/>
+                <a16:creationId xmlns:a16="http://schemas.microsoft.com/office/drawing/2014/main" id="{AE96D7ED-87FC-43DC-B44D-B10033550293}"/>
               </a:ext>
             </a:extLst>
           </p:cNvPr>
@@ -4061,7 +7010,7 @@
           <p:cNvPr id="5" name="">
             <a:extLst xmlns:a="http://schemas.openxmlformats.org/drawingml/2006/main">
               <a:ext uri="{FF2B5EF4-FFF2-40B4-BE49-F238E27FC236}">
-                <a16:creationId xmlns:a16="http://schemas.microsoft.com/office/drawing/2014/main" id="{3DCA4A70-5F03-4F1A-B21A-8BE9AEB17E71}"/>
+                <a16:creationId xmlns:a16="http://schemas.microsoft.com/office/drawing/2014/main" id="{853B821C-60FA-434F-8BF2-95762B98A7F2}"/>
               </a:ext>
             </a:extLst>
           </p:cNvPr>
@@ -4096,7 +7045,7 @@
           <p:cNvPr id="6" name="">
             <a:extLst xmlns:a="http://schemas.openxmlformats.org/drawingml/2006/main">
               <a:ext uri="{FF2B5EF4-FFF2-40B4-BE49-F238E27FC236}">
-                <a16:creationId xmlns:a16="http://schemas.microsoft.com/office/drawing/2014/main" id="{89D62C55-69E8-4500-9A45-96F3CC59E269}"/>
+                <a16:creationId xmlns:a16="http://schemas.microsoft.com/office/drawing/2014/main" id="{A8A24997-3FDD-4164-AA8E-037211CB1AC1}"/>
               </a:ext>
             </a:extLst>
           </p:cNvPr>
@@ -4146,7 +7095,7 @@
           <p:cNvPr id="7" name="">
             <a:extLst xmlns:a="http://schemas.openxmlformats.org/drawingml/2006/main">
               <a:ext uri="{FF2B5EF4-FFF2-40B4-BE49-F238E27FC236}">
-                <a16:creationId xmlns:a16="http://schemas.microsoft.com/office/drawing/2014/main" id="{AACDD46C-6EBE-404C-8178-C887CE636FAA}"/>
+                <a16:creationId xmlns:a16="http://schemas.microsoft.com/office/drawing/2014/main" id="{E6C50622-B418-45EF-8803-5B302920C30D}"/>
               </a:ext>
             </a:extLst>
           </p:cNvPr>
@@ -4196,7 +7145,7 @@
           <p:cNvPr id="8" name="">
             <a:extLst xmlns:a="http://schemas.openxmlformats.org/drawingml/2006/main">
               <a:ext uri="{FF2B5EF4-FFF2-40B4-BE49-F238E27FC236}">
-                <a16:creationId xmlns:a16="http://schemas.microsoft.com/office/drawing/2014/main" id="{21A96731-294E-4627-B4CE-751D50A0AD4E}"/>
+                <a16:creationId xmlns:a16="http://schemas.microsoft.com/office/drawing/2014/main" id="{13AB00C2-7B08-42F7-AED8-7DC001D94F14}"/>
               </a:ext>
             </a:extLst>
           </p:cNvPr>
@@ -4227,7 +7176,7 @@
           <p:cNvPr id="9" name="">
             <a:extLst xmlns:a="http://schemas.openxmlformats.org/drawingml/2006/main">
               <a:ext uri="{FF2B5EF4-FFF2-40B4-BE49-F238E27FC236}">
-                <a16:creationId xmlns:a16="http://schemas.microsoft.com/office/drawing/2014/main" id="{8091DFBB-5A62-4136-97CB-CAC31EE0DADF}"/>
+                <a16:creationId xmlns:a16="http://schemas.microsoft.com/office/drawing/2014/main" id="{4658822D-511A-4F2A-A409-7FF15DC9227A}"/>
               </a:ext>
             </a:extLst>
           </p:cNvPr>
@@ -4277,7 +7226,7 @@
           <p:cNvPr id="10" name="">
             <a:extLst xmlns:a="http://schemas.openxmlformats.org/drawingml/2006/main">
               <a:ext uri="{FF2B5EF4-FFF2-40B4-BE49-F238E27FC236}">
-                <a16:creationId xmlns:a16="http://schemas.microsoft.com/office/drawing/2014/main" id="{B4A73292-7EFB-4686-85AC-F06A283D6363}"/>
+                <a16:creationId xmlns:a16="http://schemas.microsoft.com/office/drawing/2014/main" id="{DF441EA0-F8CE-4C7C-A62B-9AB7DF5FB977}"/>
               </a:ext>
             </a:extLst>
           </p:cNvPr>
@@ -4308,7 +7257,7 @@
           <p:cNvPr id="11" name="">
             <a:extLst xmlns:a="http://schemas.openxmlformats.org/drawingml/2006/main">
               <a:ext uri="{FF2B5EF4-FFF2-40B4-BE49-F238E27FC236}">
-                <a16:creationId xmlns:a16="http://schemas.microsoft.com/office/drawing/2014/main" id="{DC41979B-3A4C-40AE-AF83-D7D560F8B20E}"/>
+                <a16:creationId xmlns:a16="http://schemas.microsoft.com/office/drawing/2014/main" id="{A448222B-6AD0-4123-BA27-84902E663F56}"/>
               </a:ext>
             </a:extLst>
           </p:cNvPr>
@@ -4358,7 +7307,7 @@
           <p:cNvPr id="12" name="">
             <a:extLst xmlns:a="http://schemas.openxmlformats.org/drawingml/2006/main">
               <a:ext uri="{FF2B5EF4-FFF2-40B4-BE49-F238E27FC236}">
-                <a16:creationId xmlns:a16="http://schemas.microsoft.com/office/drawing/2014/main" id="{5E56CA24-85B9-42B7-A0BD-E7A62E1F2BD4}"/>
+                <a16:creationId xmlns:a16="http://schemas.microsoft.com/office/drawing/2014/main" id="{A4573205-E61D-49BD-9F21-B36235632CEE}"/>
               </a:ext>
             </a:extLst>
           </p:cNvPr>
@@ -4389,7 +7338,7 @@
           <p:cNvPr id="13" name="">
             <a:extLst xmlns:a="http://schemas.openxmlformats.org/drawingml/2006/main">
               <a:ext uri="{FF2B5EF4-FFF2-40B4-BE49-F238E27FC236}">
-                <a16:creationId xmlns:a16="http://schemas.microsoft.com/office/drawing/2014/main" id="{CD5429EF-79F6-4D45-875A-9CFF672D93FA}"/>
+                <a16:creationId xmlns:a16="http://schemas.microsoft.com/office/drawing/2014/main" id="{67AFEFA9-3421-4F34-A284-682E5C90A116}"/>
               </a:ext>
             </a:extLst>
           </p:cNvPr>
@@ -4439,7 +7388,7 @@
           <p:cNvPr id="14" name="">
             <a:extLst xmlns:a="http://schemas.openxmlformats.org/drawingml/2006/main">
               <a:ext uri="{FF2B5EF4-FFF2-40B4-BE49-F238E27FC236}">
-                <a16:creationId xmlns:a16="http://schemas.microsoft.com/office/drawing/2014/main" id="{0005C85E-EF50-49E7-B2A1-2FC00482F445}"/>
+                <a16:creationId xmlns:a16="http://schemas.microsoft.com/office/drawing/2014/main" id="{D7329E7A-5070-4C70-9144-E8AB1B07995B}"/>
               </a:ext>
             </a:extLst>
           </p:cNvPr>
@@ -4470,7 +7419,7 @@
           <p:cNvPr id="15" name="">
             <a:extLst xmlns:a="http://schemas.openxmlformats.org/drawingml/2006/main">
               <a:ext uri="{FF2B5EF4-FFF2-40B4-BE49-F238E27FC236}">
-                <a16:creationId xmlns:a16="http://schemas.microsoft.com/office/drawing/2014/main" id="{A1541F8C-E27C-4CDC-9768-AF9C85934A26}"/>
+                <a16:creationId xmlns:a16="http://schemas.microsoft.com/office/drawing/2014/main" id="{5A403A76-4BAC-407C-8E15-08F56F72A358}"/>
               </a:ext>
             </a:extLst>
           </p:cNvPr>
@@ -4520,7 +7469,7 @@
           <p:cNvPr id="16" name="">
             <a:extLst xmlns:a="http://schemas.openxmlformats.org/drawingml/2006/main">
               <a:ext uri="{FF2B5EF4-FFF2-40B4-BE49-F238E27FC236}">
-                <a16:creationId xmlns:a16="http://schemas.microsoft.com/office/drawing/2014/main" id="{14A0DF7F-A80F-46FE-96FB-2BDF85DF4627}"/>
+                <a16:creationId xmlns:a16="http://schemas.microsoft.com/office/drawing/2014/main" id="{EBDF9DF3-5E29-46C2-814E-A67B44E6604D}"/>
               </a:ext>
             </a:extLst>
           </p:cNvPr>
@@ -4551,7 +7500,7 @@
           <p:cNvPr id="17" name="">
             <a:extLst xmlns:a="http://schemas.openxmlformats.org/drawingml/2006/main">
               <a:ext uri="{FF2B5EF4-FFF2-40B4-BE49-F238E27FC236}">
-                <a16:creationId xmlns:a16="http://schemas.microsoft.com/office/drawing/2014/main" id="{95F82F0B-10A9-4454-AE89-04A0FA91A197}"/>
+                <a16:creationId xmlns:a16="http://schemas.microsoft.com/office/drawing/2014/main" id="{D9ED026A-4174-4406-9F8F-23102F79DD1F}"/>
               </a:ext>
             </a:extLst>
           </p:cNvPr>
@@ -4601,7 +7550,7 @@
           <p:cNvPr id="18" name="">
             <a:extLst xmlns:a="http://schemas.openxmlformats.org/drawingml/2006/main">
               <a:ext uri="{FF2B5EF4-FFF2-40B4-BE49-F238E27FC236}">
-                <a16:creationId xmlns:a16="http://schemas.microsoft.com/office/drawing/2014/main" id="{28E82B3C-63CB-433D-BB93-BC1FBAD2BF1B}"/>
+                <a16:creationId xmlns:a16="http://schemas.microsoft.com/office/drawing/2014/main" id="{5092516C-0586-45E5-9D88-A97853DAB758}"/>
               </a:ext>
             </a:extLst>
           </p:cNvPr>
@@ -4632,7 +7581,7 @@
           <p:cNvPr id="19" name="">
             <a:extLst xmlns:a="http://schemas.openxmlformats.org/drawingml/2006/main">
               <a:ext uri="{FF2B5EF4-FFF2-40B4-BE49-F238E27FC236}">
-                <a16:creationId xmlns:a16="http://schemas.microsoft.com/office/drawing/2014/main" id="{19A92C15-A4BA-436C-91B9-C8760A0C84BF}"/>
+                <a16:creationId xmlns:a16="http://schemas.microsoft.com/office/drawing/2014/main" id="{7B2C9635-1D94-4F5E-AA03-7F1A1295531F}"/>
               </a:ext>
             </a:extLst>
           </p:cNvPr>
@@ -4682,7 +7631,7 @@
           <p:cNvPr id="20" name="">
             <a:extLst xmlns:a="http://schemas.openxmlformats.org/drawingml/2006/main">
               <a:ext uri="{FF2B5EF4-FFF2-40B4-BE49-F238E27FC236}">
-                <a16:creationId xmlns:a16="http://schemas.microsoft.com/office/drawing/2014/main" id="{AD107892-C845-43B2-88E7-B482169B5372}"/>
+                <a16:creationId xmlns:a16="http://schemas.microsoft.com/office/drawing/2014/main" id="{392E08F9-CB24-45BC-802F-626AC9917505}"/>
               </a:ext>
             </a:extLst>
           </p:cNvPr>
@@ -4713,7 +7662,7 @@
           <p:cNvPr id="21" name="">
             <a:extLst xmlns:a="http://schemas.openxmlformats.org/drawingml/2006/main">
               <a:ext uri="{FF2B5EF4-FFF2-40B4-BE49-F238E27FC236}">
-                <a16:creationId xmlns:a16="http://schemas.microsoft.com/office/drawing/2014/main" id="{72B5519C-B13E-4FDB-9670-A8F529D5EB72}"/>
+                <a16:creationId xmlns:a16="http://schemas.microsoft.com/office/drawing/2014/main" id="{E440289E-6001-4106-86D5-EF4122F7B3C6}"/>
               </a:ext>
             </a:extLst>
           </p:cNvPr>
@@ -4763,7 +7712,7 @@
           <p:cNvPr id="22" name="">
             <a:extLst xmlns:a="http://schemas.openxmlformats.org/drawingml/2006/main">
               <a:ext uri="{FF2B5EF4-FFF2-40B4-BE49-F238E27FC236}">
-                <a16:creationId xmlns:a16="http://schemas.microsoft.com/office/drawing/2014/main" id="{3EF2ADE9-9822-4C8B-8CB2-0C6C7F15BDDD}"/>
+                <a16:creationId xmlns:a16="http://schemas.microsoft.com/office/drawing/2014/main" id="{624AAC33-05FA-474B-A984-920B8C39015F}"/>
               </a:ext>
             </a:extLst>
           </p:cNvPr>
@@ -4794,7 +7743,7 @@
           <p:cNvPr id="23" name="">
             <a:extLst xmlns:a="http://schemas.openxmlformats.org/drawingml/2006/main">
               <a:ext uri="{FF2B5EF4-FFF2-40B4-BE49-F238E27FC236}">
-                <a16:creationId xmlns:a16="http://schemas.microsoft.com/office/drawing/2014/main" id="{5FEB6B80-9100-434B-954B-C20EE88FD4AB}"/>
+                <a16:creationId xmlns:a16="http://schemas.microsoft.com/office/drawing/2014/main" id="{F11FA9B6-BAFF-4E61-97E0-F01A283E6866}"/>
               </a:ext>
             </a:extLst>
           </p:cNvPr>
@@ -4842,7 +7791,7 @@
     </p:spTree>
     <p:extLst>
       <p:ext uri="{BB962C8B-B14F-4D97-AF65-F5344CB8AC3E}">
-        <p14:creationId xmlns:p14="http://schemas.microsoft.com/office/powerpoint/2010/main" val="1652170530"/>
+        <p14:creationId xmlns:p14="http://schemas.microsoft.com/office/powerpoint/2010/main" val="1094014076"/>
       </p:ext>
     </p:extLst>
   </p:cSld>
@@ -4873,7 +7822,7 @@
           <p:cNvPr id="1" name="">
             <a:extLst xmlns:a="http://schemas.openxmlformats.org/drawingml/2006/main">
               <a:ext uri="{FF2B5EF4-FFF2-40B4-BE49-F238E27FC236}">
-                <a16:creationId xmlns:a16="http://schemas.microsoft.com/office/drawing/2014/main" id="{A40F26AD-CC0E-4F56-84B5-C3AEC6F33CEC}"/>
+                <a16:creationId xmlns:a16="http://schemas.microsoft.com/office/drawing/2014/main" id="{4957E6DF-8D33-48F0-BFD5-07A2B86B989D}"/>
               </a:ext>
             </a:extLst>
           </p:cNvPr>
@@ -4923,7 +7872,7 @@
           <p:cNvPr id="2" name="">
             <a:extLst xmlns:a="http://schemas.openxmlformats.org/drawingml/2006/main">
               <a:ext uri="{FF2B5EF4-FFF2-40B4-BE49-F238E27FC236}">
-                <a16:creationId xmlns:a16="http://schemas.microsoft.com/office/drawing/2014/main" id="{3EDD8F47-1FF8-45EC-A36C-60784049E0D1}"/>
+                <a16:creationId xmlns:a16="http://schemas.microsoft.com/office/drawing/2014/main" id="{F0823E1B-4541-469A-A946-29C0C8BC124A}"/>
               </a:ext>
             </a:extLst>
           </p:cNvPr>
@@ -4973,7 +7922,7 @@
           <p:cNvPr id="3" name="">
             <a:extLst xmlns:a="http://schemas.openxmlformats.org/drawingml/2006/main">
               <a:ext uri="{FF2B5EF4-FFF2-40B4-BE49-F238E27FC236}">
-                <a16:creationId xmlns:a16="http://schemas.microsoft.com/office/drawing/2014/main" id="{59EE1A05-53B2-4204-ABCA-AE68182DF189}"/>
+                <a16:creationId xmlns:a16="http://schemas.microsoft.com/office/drawing/2014/main" id="{25121B9D-0B0E-4783-BFBA-6390CE346164}"/>
               </a:ext>
             </a:extLst>
           </p:cNvPr>
@@ -5006,7 +7955,7 @@
           <p:cNvPr id="4" name="">
             <a:extLst xmlns:a="http://schemas.openxmlformats.org/drawingml/2006/main">
               <a:ext uri="{FF2B5EF4-FFF2-40B4-BE49-F238E27FC236}">
-                <a16:creationId xmlns:a16="http://schemas.microsoft.com/office/drawing/2014/main" id="{D94D5D2B-C39D-4EF5-AB92-B0E47769BE1C}"/>
+                <a16:creationId xmlns:a16="http://schemas.microsoft.com/office/drawing/2014/main" id="{554F84EB-DE9D-4180-9A77-9F795A621564}"/>
               </a:ext>
             </a:extLst>
           </p:cNvPr>
@@ -5041,7 +7990,7 @@
           <p:cNvPr id="5" name="">
             <a:extLst xmlns:a="http://schemas.openxmlformats.org/drawingml/2006/main">
               <a:ext uri="{FF2B5EF4-FFF2-40B4-BE49-F238E27FC236}">
-                <a16:creationId xmlns:a16="http://schemas.microsoft.com/office/drawing/2014/main" id="{7E6F220B-A0F7-44D5-9162-97FDE09C7683}"/>
+                <a16:creationId xmlns:a16="http://schemas.microsoft.com/office/drawing/2014/main" id="{D1310A29-0109-4B97-8D1C-B275B98E177B}"/>
               </a:ext>
             </a:extLst>
           </p:cNvPr>
@@ -5076,7 +8025,7 @@
           <p:cNvPr id="6" name="">
             <a:extLst xmlns:a="http://schemas.openxmlformats.org/drawingml/2006/main">
               <a:ext uri="{FF2B5EF4-FFF2-40B4-BE49-F238E27FC236}">
-                <a16:creationId xmlns:a16="http://schemas.microsoft.com/office/drawing/2014/main" id="{1DB184D0-6288-4DEF-996E-E6B4F2113813}"/>
+                <a16:creationId xmlns:a16="http://schemas.microsoft.com/office/drawing/2014/main" id="{E38230A1-5BA5-4702-A822-DDA122EAAB33}"/>
               </a:ext>
             </a:extLst>
           </p:cNvPr>
@@ -5111,7 +8060,7 @@
           <p:cNvPr id="7" name="">
             <a:extLst xmlns:a="http://schemas.openxmlformats.org/drawingml/2006/main">
               <a:ext uri="{FF2B5EF4-FFF2-40B4-BE49-F238E27FC236}">
-                <a16:creationId xmlns:a16="http://schemas.microsoft.com/office/drawing/2014/main" id="{DFA85068-F631-4A45-8842-BBD99DB9E039}"/>
+                <a16:creationId xmlns:a16="http://schemas.microsoft.com/office/drawing/2014/main" id="{F31348D2-EDE4-4EC3-B216-3F53FA0CD19E}"/>
               </a:ext>
             </a:extLst>
           </p:cNvPr>
@@ -5161,7 +8110,7 @@
           <p:cNvPr id="8" name="">
             <a:extLst xmlns:a="http://schemas.openxmlformats.org/drawingml/2006/main">
               <a:ext uri="{FF2B5EF4-FFF2-40B4-BE49-F238E27FC236}">
-                <a16:creationId xmlns:a16="http://schemas.microsoft.com/office/drawing/2014/main" id="{8641B10E-940F-4982-8297-27453084FF43}"/>
+                <a16:creationId xmlns:a16="http://schemas.microsoft.com/office/drawing/2014/main" id="{3C00BD6A-EEE3-432D-B9D2-59957176FF5E}"/>
               </a:ext>
             </a:extLst>
           </p:cNvPr>
@@ -5211,7 +8160,7 @@
           <p:cNvPr id="9" name="">
             <a:extLst xmlns:a="http://schemas.openxmlformats.org/drawingml/2006/main">
               <a:ext uri="{FF2B5EF4-FFF2-40B4-BE49-F238E27FC236}">
-                <a16:creationId xmlns:a16="http://schemas.microsoft.com/office/drawing/2014/main" id="{F7CB844F-F86E-43BF-8DAD-FCE69364E395}"/>
+                <a16:creationId xmlns:a16="http://schemas.microsoft.com/office/drawing/2014/main" id="{DE49B5CF-AA58-4B4A-9247-E6CB868B8EFC}"/>
               </a:ext>
             </a:extLst>
           </p:cNvPr>
@@ -5261,7 +8210,7 @@
           <p:cNvPr id="10" name="">
             <a:extLst xmlns:a="http://schemas.openxmlformats.org/drawingml/2006/main">
               <a:ext uri="{FF2B5EF4-FFF2-40B4-BE49-F238E27FC236}">
-                <a16:creationId xmlns:a16="http://schemas.microsoft.com/office/drawing/2014/main" id="{49A96E07-6F5C-4E75-9C87-6EA14A7C08FC}"/>
+                <a16:creationId xmlns:a16="http://schemas.microsoft.com/office/drawing/2014/main" id="{C849A663-6CAF-438F-8021-2908343EC0B9}"/>
               </a:ext>
             </a:extLst>
           </p:cNvPr>
@@ -5311,7 +8260,7 @@
           <p:cNvPr id="11" name="">
             <a:extLst xmlns:a="http://schemas.openxmlformats.org/drawingml/2006/main">
               <a:ext uri="{FF2B5EF4-FFF2-40B4-BE49-F238E27FC236}">
-                <a16:creationId xmlns:a16="http://schemas.microsoft.com/office/drawing/2014/main" id="{13872D7D-8D9E-47EA-AFA2-2A30AF86D2C2}"/>
+                <a16:creationId xmlns:a16="http://schemas.microsoft.com/office/drawing/2014/main" id="{FA6BAE1E-D37E-468E-8CAA-5FF9A7D1F73F}"/>
               </a:ext>
             </a:extLst>
           </p:cNvPr>
@@ -5361,7 +8310,7 @@
           <p:cNvPr id="12" name="">
             <a:extLst xmlns:a="http://schemas.openxmlformats.org/drawingml/2006/main">
               <a:ext uri="{FF2B5EF4-FFF2-40B4-BE49-F238E27FC236}">
-                <a16:creationId xmlns:a16="http://schemas.microsoft.com/office/drawing/2014/main" id="{7DBE6663-1CD9-4250-9C90-77FC3D30BE10}"/>
+                <a16:creationId xmlns:a16="http://schemas.microsoft.com/office/drawing/2014/main" id="{10E2EEA2-35B6-4345-8C7C-574EA0B41DFD}"/>
               </a:ext>
             </a:extLst>
           </p:cNvPr>
@@ -5411,7 +8360,7 @@
           <p:cNvPr id="13" name="">
             <a:extLst xmlns:a="http://schemas.openxmlformats.org/drawingml/2006/main">
               <a:ext uri="{FF2B5EF4-FFF2-40B4-BE49-F238E27FC236}">
-                <a16:creationId xmlns:a16="http://schemas.microsoft.com/office/drawing/2014/main" id="{31564C52-5664-4E35-9120-193A148851B4}"/>
+                <a16:creationId xmlns:a16="http://schemas.microsoft.com/office/drawing/2014/main" id="{32F08A7D-6002-4052-8683-7943D1C98359}"/>
               </a:ext>
             </a:extLst>
           </p:cNvPr>
@@ -5459,7 +8408,7 @@
     </p:spTree>
     <p:extLst>
       <p:ext uri="{BB962C8B-B14F-4D97-AF65-F5344CB8AC3E}">
-        <p14:creationId xmlns:p14="http://schemas.microsoft.com/office/powerpoint/2010/main" val="1136434094"/>
+        <p14:creationId xmlns:p14="http://schemas.microsoft.com/office/powerpoint/2010/main" val="1404789962"/>
       </p:ext>
     </p:extLst>
   </p:cSld>
@@ -5490,7 +8439,7 @@
           <p:cNvPr id="1" name="">
             <a:extLst xmlns:a="http://schemas.openxmlformats.org/drawingml/2006/main">
               <a:ext uri="{FF2B5EF4-FFF2-40B4-BE49-F238E27FC236}">
-                <a16:creationId xmlns:a16="http://schemas.microsoft.com/office/drawing/2014/main" id="{49D0E76B-962D-494C-9F04-9AFDB4EADEA5}"/>
+                <a16:creationId xmlns:a16="http://schemas.microsoft.com/office/drawing/2014/main" id="{B1F4F06C-685D-4FB0-A1F7-77EADF5397A2}"/>
               </a:ext>
             </a:extLst>
           </p:cNvPr>
@@ -5540,7 +8489,7 @@
           <p:cNvPr id="2" name="">
             <a:extLst xmlns:a="http://schemas.openxmlformats.org/drawingml/2006/main">
               <a:ext uri="{FF2B5EF4-FFF2-40B4-BE49-F238E27FC236}">
-                <a16:creationId xmlns:a16="http://schemas.microsoft.com/office/drawing/2014/main" id="{54F069F2-9B07-4ABE-9A71-26B871EE6B61}"/>
+                <a16:creationId xmlns:a16="http://schemas.microsoft.com/office/drawing/2014/main" id="{A6444397-8ED2-4192-81AF-FB1BC2C53825}"/>
               </a:ext>
             </a:extLst>
           </p:cNvPr>
@@ -5590,7 +8539,7 @@
           <p:cNvPr id="3" name="">
             <a:extLst xmlns:a="http://schemas.openxmlformats.org/drawingml/2006/main">
               <a:ext uri="{FF2B5EF4-FFF2-40B4-BE49-F238E27FC236}">
-                <a16:creationId xmlns:a16="http://schemas.microsoft.com/office/drawing/2014/main" id="{C74E3635-78B7-49AE-928E-46C7E15DBDAC}"/>
+                <a16:creationId xmlns:a16="http://schemas.microsoft.com/office/drawing/2014/main" id="{E8562D3F-9004-49CC-93EF-FC14EFD2E659}"/>
               </a:ext>
             </a:extLst>
           </p:cNvPr>
@@ -5623,7 +8572,7 @@
           <p:cNvPr id="4" name="">
             <a:extLst xmlns:a="http://schemas.openxmlformats.org/drawingml/2006/main">
               <a:ext uri="{FF2B5EF4-FFF2-40B4-BE49-F238E27FC236}">
-                <a16:creationId xmlns:a16="http://schemas.microsoft.com/office/drawing/2014/main" id="{92800960-8AEE-4848-A777-24BE5B0DCAE3}"/>
+                <a16:creationId xmlns:a16="http://schemas.microsoft.com/office/drawing/2014/main" id="{88C4C8D9-CBEE-4149-A7DA-F9EA53CD9A7D}"/>
               </a:ext>
             </a:extLst>
           </p:cNvPr>
@@ -5658,7 +8607,7 @@
           <p:cNvPr id="5" name="">
             <a:extLst xmlns:a="http://schemas.openxmlformats.org/drawingml/2006/main">
               <a:ext uri="{FF2B5EF4-FFF2-40B4-BE49-F238E27FC236}">
-                <a16:creationId xmlns:a16="http://schemas.microsoft.com/office/drawing/2014/main" id="{0E271B70-02CF-469B-8E95-9C1CDDEBBB4E}"/>
+                <a16:creationId xmlns:a16="http://schemas.microsoft.com/office/drawing/2014/main" id="{91B6BC0E-3A56-4921-85FD-F766A57817E0}"/>
               </a:ext>
             </a:extLst>
           </p:cNvPr>
@@ -5708,7 +8657,7 @@
           <p:cNvPr id="6" name="">
             <a:extLst xmlns:a="http://schemas.openxmlformats.org/drawingml/2006/main">
               <a:ext uri="{FF2B5EF4-FFF2-40B4-BE49-F238E27FC236}">
-                <a16:creationId xmlns:a16="http://schemas.microsoft.com/office/drawing/2014/main" id="{2FA083DB-99B4-4123-A1FC-8B0707263040}"/>
+                <a16:creationId xmlns:a16="http://schemas.microsoft.com/office/drawing/2014/main" id="{6D485949-F335-4448-8DF2-7A1C1895E7CF}"/>
               </a:ext>
             </a:extLst>
           </p:cNvPr>
@@ -5739,7 +8688,7 @@
           <p:cNvPr id="7" name="">
             <a:extLst xmlns:a="http://schemas.openxmlformats.org/drawingml/2006/main">
               <a:ext uri="{FF2B5EF4-FFF2-40B4-BE49-F238E27FC236}">
-                <a16:creationId xmlns:a16="http://schemas.microsoft.com/office/drawing/2014/main" id="{49CA97D9-EEBE-4F0B-8D18-D22F812103B3}"/>
+                <a16:creationId xmlns:a16="http://schemas.microsoft.com/office/drawing/2014/main" id="{80554F95-8511-4FC9-8B43-DB13C12F421A}"/>
               </a:ext>
             </a:extLst>
           </p:cNvPr>
@@ -5789,7 +8738,7 @@
           <p:cNvPr id="8" name="">
             <a:extLst xmlns:a="http://schemas.openxmlformats.org/drawingml/2006/main">
               <a:ext uri="{FF2B5EF4-FFF2-40B4-BE49-F238E27FC236}">
-                <a16:creationId xmlns:a16="http://schemas.microsoft.com/office/drawing/2014/main" id="{C895F8D8-5954-427A-AE71-4D8EDF151033}"/>
+                <a16:creationId xmlns:a16="http://schemas.microsoft.com/office/drawing/2014/main" id="{D272D281-7496-4142-8A75-842F52FCDB90}"/>
               </a:ext>
             </a:extLst>
           </p:cNvPr>
@@ -5820,7 +8769,7 @@
           <p:cNvPr id="9" name="">
             <a:extLst xmlns:a="http://schemas.openxmlformats.org/drawingml/2006/main">
               <a:ext uri="{FF2B5EF4-FFF2-40B4-BE49-F238E27FC236}">
-                <a16:creationId xmlns:a16="http://schemas.microsoft.com/office/drawing/2014/main" id="{984ECBF7-B8CF-4E58-9F6E-974C6C0D0143}"/>
+                <a16:creationId xmlns:a16="http://schemas.microsoft.com/office/drawing/2014/main" id="{14F19489-3C17-47C3-987B-13F433A28DDD}"/>
               </a:ext>
             </a:extLst>
           </p:cNvPr>
@@ -5870,7 +8819,7 @@
           <p:cNvPr id="10" name="">
             <a:extLst xmlns:a="http://schemas.openxmlformats.org/drawingml/2006/main">
               <a:ext uri="{FF2B5EF4-FFF2-40B4-BE49-F238E27FC236}">
-                <a16:creationId xmlns:a16="http://schemas.microsoft.com/office/drawing/2014/main" id="{BD28F50E-660B-44E6-B860-768662542540}"/>
+                <a16:creationId xmlns:a16="http://schemas.microsoft.com/office/drawing/2014/main" id="{D5980CA1-48DA-4A19-ADF3-1CEB47FE0ACC}"/>
               </a:ext>
             </a:extLst>
           </p:cNvPr>
@@ -5901,7 +8850,7 @@
           <p:cNvPr id="11" name="">
             <a:extLst xmlns:a="http://schemas.openxmlformats.org/drawingml/2006/main">
               <a:ext uri="{FF2B5EF4-FFF2-40B4-BE49-F238E27FC236}">
-                <a16:creationId xmlns:a16="http://schemas.microsoft.com/office/drawing/2014/main" id="{D7F804CC-C438-4E79-A4C7-CABE4D5811FC}"/>
+                <a16:creationId xmlns:a16="http://schemas.microsoft.com/office/drawing/2014/main" id="{EF03EFB7-D871-43AB-A38B-66F2D9603F0D}"/>
               </a:ext>
             </a:extLst>
           </p:cNvPr>
@@ -5951,7 +8900,7 @@
           <p:cNvPr id="12" name="">
             <a:extLst xmlns:a="http://schemas.openxmlformats.org/drawingml/2006/main">
               <a:ext uri="{FF2B5EF4-FFF2-40B4-BE49-F238E27FC236}">
-                <a16:creationId xmlns:a16="http://schemas.microsoft.com/office/drawing/2014/main" id="{2E6EC131-BFAA-407C-9CB3-4D03D80045FF}"/>
+                <a16:creationId xmlns:a16="http://schemas.microsoft.com/office/drawing/2014/main" id="{E87BE44E-CE9B-4CFA-BC12-0121E77024B1}"/>
               </a:ext>
             </a:extLst>
           </p:cNvPr>
@@ -5982,7 +8931,7 @@
           <p:cNvPr id="13" name="">
             <a:extLst xmlns:a="http://schemas.openxmlformats.org/drawingml/2006/main">
               <a:ext uri="{FF2B5EF4-FFF2-40B4-BE49-F238E27FC236}">
-                <a16:creationId xmlns:a16="http://schemas.microsoft.com/office/drawing/2014/main" id="{7FB8DB7E-594A-4BAF-977E-A0B095FBA13C}"/>
+                <a16:creationId xmlns:a16="http://schemas.microsoft.com/office/drawing/2014/main" id="{9B0988AF-C765-41B1-A38A-5C77F29F40AD}"/>
               </a:ext>
             </a:extLst>
           </p:cNvPr>
@@ -6032,7 +8981,7 @@
           <p:cNvPr id="14" name="">
             <a:extLst xmlns:a="http://schemas.openxmlformats.org/drawingml/2006/main">
               <a:ext uri="{FF2B5EF4-FFF2-40B4-BE49-F238E27FC236}">
-                <a16:creationId xmlns:a16="http://schemas.microsoft.com/office/drawing/2014/main" id="{0B5713AA-A00B-41FF-B230-FD631A3472CC}"/>
+                <a16:creationId xmlns:a16="http://schemas.microsoft.com/office/drawing/2014/main" id="{E0091A29-20C3-4098-97ED-B1C41F108921}"/>
               </a:ext>
             </a:extLst>
           </p:cNvPr>
@@ -6067,7 +9016,7 @@
           <p:cNvPr id="15" name="">
             <a:extLst xmlns:a="http://schemas.openxmlformats.org/drawingml/2006/main">
               <a:ext uri="{FF2B5EF4-FFF2-40B4-BE49-F238E27FC236}">
-                <a16:creationId xmlns:a16="http://schemas.microsoft.com/office/drawing/2014/main" id="{B6D6A035-EE9B-4F44-8E54-327BBE4BE9C0}"/>
+                <a16:creationId xmlns:a16="http://schemas.microsoft.com/office/drawing/2014/main" id="{D37B2C7D-2A68-45CC-95AC-DFAB12FD79A1}"/>
               </a:ext>
             </a:extLst>
           </p:cNvPr>
@@ -6117,7 +9066,7 @@
           <p:cNvPr id="16" name="">
             <a:extLst xmlns:a="http://schemas.openxmlformats.org/drawingml/2006/main">
               <a:ext uri="{FF2B5EF4-FFF2-40B4-BE49-F238E27FC236}">
-                <a16:creationId xmlns:a16="http://schemas.microsoft.com/office/drawing/2014/main" id="{BBE8485E-7A6B-466C-8BF2-1F985850CFB6}"/>
+                <a16:creationId xmlns:a16="http://schemas.microsoft.com/office/drawing/2014/main" id="{2546B165-BB8A-4DC0-8742-DD490817F4E9}"/>
               </a:ext>
             </a:extLst>
           </p:cNvPr>
@@ -6148,7 +9097,7 @@
           <p:cNvPr id="17" name="">
             <a:extLst xmlns:a="http://schemas.openxmlformats.org/drawingml/2006/main">
               <a:ext uri="{FF2B5EF4-FFF2-40B4-BE49-F238E27FC236}">
-                <a16:creationId xmlns:a16="http://schemas.microsoft.com/office/drawing/2014/main" id="{875DFC83-9D25-453F-9EBB-D8FB23023F93}"/>
+                <a16:creationId xmlns:a16="http://schemas.microsoft.com/office/drawing/2014/main" id="{A01493C1-0437-44E4-B728-561519AE8D18}"/>
               </a:ext>
             </a:extLst>
           </p:cNvPr>
@@ -6198,7 +9147,7 @@
           <p:cNvPr id="18" name="">
             <a:extLst xmlns:a="http://schemas.openxmlformats.org/drawingml/2006/main">
               <a:ext uri="{FF2B5EF4-FFF2-40B4-BE49-F238E27FC236}">
-                <a16:creationId xmlns:a16="http://schemas.microsoft.com/office/drawing/2014/main" id="{AB2BE5BA-79C0-4E36-BD60-9616ECF4ABB6}"/>
+                <a16:creationId xmlns:a16="http://schemas.microsoft.com/office/drawing/2014/main" id="{88328B99-A0D4-4973-A1A2-2E7C644F399B}"/>
               </a:ext>
             </a:extLst>
           </p:cNvPr>
@@ -6229,7 +9178,7 @@
           <p:cNvPr id="19" name="">
             <a:extLst xmlns:a="http://schemas.openxmlformats.org/drawingml/2006/main">
               <a:ext uri="{FF2B5EF4-FFF2-40B4-BE49-F238E27FC236}">
-                <a16:creationId xmlns:a16="http://schemas.microsoft.com/office/drawing/2014/main" id="{25CCE8EA-CE35-42A0-9C6D-0115CDBC6AAE}"/>
+                <a16:creationId xmlns:a16="http://schemas.microsoft.com/office/drawing/2014/main" id="{9D06EDD3-3943-4ADF-99E9-D27B00A4B46E}"/>
               </a:ext>
             </a:extLst>
           </p:cNvPr>
@@ -6279,7 +9228,7 @@
           <p:cNvPr id="20" name="">
             <a:extLst xmlns:a="http://schemas.openxmlformats.org/drawingml/2006/main">
               <a:ext uri="{FF2B5EF4-FFF2-40B4-BE49-F238E27FC236}">
-                <a16:creationId xmlns:a16="http://schemas.microsoft.com/office/drawing/2014/main" id="{941474C3-049C-4BA7-AF0F-E9D717D11828}"/>
+                <a16:creationId xmlns:a16="http://schemas.microsoft.com/office/drawing/2014/main" id="{2992B66F-22D6-4E62-8F2D-EC65E951FF8B}"/>
               </a:ext>
             </a:extLst>
           </p:cNvPr>
@@ -6310,7 +9259,7 @@
           <p:cNvPr id="21" name="">
             <a:extLst xmlns:a="http://schemas.openxmlformats.org/drawingml/2006/main">
               <a:ext uri="{FF2B5EF4-FFF2-40B4-BE49-F238E27FC236}">
-                <a16:creationId xmlns:a16="http://schemas.microsoft.com/office/drawing/2014/main" id="{E42A0478-B6DF-42F7-B747-A5CF7EE52CCA}"/>
+                <a16:creationId xmlns:a16="http://schemas.microsoft.com/office/drawing/2014/main" id="{B0A57169-0B98-42EC-B805-39988D0154CC}"/>
               </a:ext>
             </a:extLst>
           </p:cNvPr>
@@ -6360,7 +9309,7 @@
           <p:cNvPr id="22" name="">
             <a:extLst xmlns:a="http://schemas.openxmlformats.org/drawingml/2006/main">
               <a:ext uri="{FF2B5EF4-FFF2-40B4-BE49-F238E27FC236}">
-                <a16:creationId xmlns:a16="http://schemas.microsoft.com/office/drawing/2014/main" id="{6ADB618A-8CF4-4D90-AA80-0E1A8A6491D2}"/>
+                <a16:creationId xmlns:a16="http://schemas.microsoft.com/office/drawing/2014/main" id="{0367FE2E-3109-49D2-B732-6BA880E4E282}"/>
               </a:ext>
             </a:extLst>
           </p:cNvPr>
@@ -6391,7 +9340,7 @@
           <p:cNvPr id="23" name="">
             <a:extLst xmlns:a="http://schemas.openxmlformats.org/drawingml/2006/main">
               <a:ext uri="{FF2B5EF4-FFF2-40B4-BE49-F238E27FC236}">
-                <a16:creationId xmlns:a16="http://schemas.microsoft.com/office/drawing/2014/main" id="{B2DA6E1C-6486-4E1A-84F4-C885BD4B28CD}"/>
+                <a16:creationId xmlns:a16="http://schemas.microsoft.com/office/drawing/2014/main" id="{FDE63C90-6CFF-447B-ABA0-1597606B19F7}"/>
               </a:ext>
             </a:extLst>
           </p:cNvPr>
@@ -6441,7 +9390,7 @@
           <p:cNvPr id="24" name="">
             <a:extLst xmlns:a="http://schemas.openxmlformats.org/drawingml/2006/main">
               <a:ext uri="{FF2B5EF4-FFF2-40B4-BE49-F238E27FC236}">
-                <a16:creationId xmlns:a16="http://schemas.microsoft.com/office/drawing/2014/main" id="{02ED9FB2-28EC-4120-85BB-E03CAF67BA54}"/>
+                <a16:creationId xmlns:a16="http://schemas.microsoft.com/office/drawing/2014/main" id="{83FD460C-7163-425D-B61A-9092E693EFBD}"/>
               </a:ext>
             </a:extLst>
           </p:cNvPr>
@@ -6476,7 +9425,7 @@
           <p:cNvPr id="25" name="">
             <a:extLst xmlns:a="http://schemas.openxmlformats.org/drawingml/2006/main">
               <a:ext uri="{FF2B5EF4-FFF2-40B4-BE49-F238E27FC236}">
-                <a16:creationId xmlns:a16="http://schemas.microsoft.com/office/drawing/2014/main" id="{2F3B08E7-5C27-4936-8D6A-669BFCEB4ABE}"/>
+                <a16:creationId xmlns:a16="http://schemas.microsoft.com/office/drawing/2014/main" id="{A64B0DAB-50A1-4597-B47D-E18071333834}"/>
               </a:ext>
             </a:extLst>
           </p:cNvPr>
@@ -6526,7 +9475,7 @@
           <p:cNvPr id="26" name="">
             <a:extLst xmlns:a="http://schemas.openxmlformats.org/drawingml/2006/main">
               <a:ext uri="{FF2B5EF4-FFF2-40B4-BE49-F238E27FC236}">
-                <a16:creationId xmlns:a16="http://schemas.microsoft.com/office/drawing/2014/main" id="{292436E6-F374-4C65-8EEF-EEB455AE096E}"/>
+                <a16:creationId xmlns:a16="http://schemas.microsoft.com/office/drawing/2014/main" id="{81C412B8-EB74-4A78-AB4B-0C19578DD944}"/>
               </a:ext>
             </a:extLst>
           </p:cNvPr>
@@ -6557,7 +9506,7 @@
           <p:cNvPr id="27" name="">
             <a:extLst xmlns:a="http://schemas.openxmlformats.org/drawingml/2006/main">
               <a:ext uri="{FF2B5EF4-FFF2-40B4-BE49-F238E27FC236}">
-                <a16:creationId xmlns:a16="http://schemas.microsoft.com/office/drawing/2014/main" id="{82D74C28-DAF9-4B92-9A65-65E91B3E814F}"/>
+                <a16:creationId xmlns:a16="http://schemas.microsoft.com/office/drawing/2014/main" id="{1E7A64A5-F2B0-46D1-9F3A-91F7DAA05572}"/>
               </a:ext>
             </a:extLst>
           </p:cNvPr>
@@ -6607,7 +9556,7 @@
           <p:cNvPr id="28" name="">
             <a:extLst xmlns:a="http://schemas.openxmlformats.org/drawingml/2006/main">
               <a:ext uri="{FF2B5EF4-FFF2-40B4-BE49-F238E27FC236}">
-                <a16:creationId xmlns:a16="http://schemas.microsoft.com/office/drawing/2014/main" id="{97E31E10-E21A-4829-AF07-DD1E7ADFA9C8}"/>
+                <a16:creationId xmlns:a16="http://schemas.microsoft.com/office/drawing/2014/main" id="{54BC4305-DA21-482E-BA3A-AD92FCA5A8FA}"/>
               </a:ext>
             </a:extLst>
           </p:cNvPr>
@@ -6638,7 +9587,7 @@
           <p:cNvPr id="29" name="">
             <a:extLst xmlns:a="http://schemas.openxmlformats.org/drawingml/2006/main">
               <a:ext uri="{FF2B5EF4-FFF2-40B4-BE49-F238E27FC236}">
-                <a16:creationId xmlns:a16="http://schemas.microsoft.com/office/drawing/2014/main" id="{823B1313-7112-44C8-AA3F-EAB7FCF8C66C}"/>
+                <a16:creationId xmlns:a16="http://schemas.microsoft.com/office/drawing/2014/main" id="{B26AC21E-9303-4B7E-BBB1-17D0E831DA17}"/>
               </a:ext>
             </a:extLst>
           </p:cNvPr>
@@ -6688,7 +9637,7 @@
           <p:cNvPr id="30" name="">
             <a:extLst xmlns:a="http://schemas.openxmlformats.org/drawingml/2006/main">
               <a:ext uri="{FF2B5EF4-FFF2-40B4-BE49-F238E27FC236}">
-                <a16:creationId xmlns:a16="http://schemas.microsoft.com/office/drawing/2014/main" id="{0F2D323E-01B7-44FC-B354-C1A58E2F3BE2}"/>
+                <a16:creationId xmlns:a16="http://schemas.microsoft.com/office/drawing/2014/main" id="{629978CC-66A6-4858-8C0E-D1731A086524}"/>
               </a:ext>
             </a:extLst>
           </p:cNvPr>
@@ -6719,7 +9668,7 @@
           <p:cNvPr id="31" name="">
             <a:extLst xmlns:a="http://schemas.openxmlformats.org/drawingml/2006/main">
               <a:ext uri="{FF2B5EF4-FFF2-40B4-BE49-F238E27FC236}">
-                <a16:creationId xmlns:a16="http://schemas.microsoft.com/office/drawing/2014/main" id="{6A2FA2E4-C756-41F3-873D-00FFD1C3D6CD}"/>
+                <a16:creationId xmlns:a16="http://schemas.microsoft.com/office/drawing/2014/main" id="{7FF8F6ED-DBA3-42B3-A5D1-FEDF775A9CC0}"/>
               </a:ext>
             </a:extLst>
           </p:cNvPr>
@@ -6769,7 +9718,7 @@
           <p:cNvPr id="32" name="">
             <a:extLst xmlns:a="http://schemas.openxmlformats.org/drawingml/2006/main">
               <a:ext uri="{FF2B5EF4-FFF2-40B4-BE49-F238E27FC236}">
-                <a16:creationId xmlns:a16="http://schemas.microsoft.com/office/drawing/2014/main" id="{CF4C7076-6529-4FCE-A758-0BBADEB5286B}"/>
+                <a16:creationId xmlns:a16="http://schemas.microsoft.com/office/drawing/2014/main" id="{AFEF79DA-FA80-4901-9639-F84E0BE3B1A7}"/>
               </a:ext>
             </a:extLst>
           </p:cNvPr>
@@ -6800,7 +9749,7 @@
           <p:cNvPr id="33" name="">
             <a:extLst xmlns:a="http://schemas.openxmlformats.org/drawingml/2006/main">
               <a:ext uri="{FF2B5EF4-FFF2-40B4-BE49-F238E27FC236}">
-                <a16:creationId xmlns:a16="http://schemas.microsoft.com/office/drawing/2014/main" id="{D0A103EA-58BE-4369-B397-3274EBF38BAB}"/>
+                <a16:creationId xmlns:a16="http://schemas.microsoft.com/office/drawing/2014/main" id="{A58CDB32-E6EC-48F8-9C0B-6ADB2BBF6AEE}"/>
               </a:ext>
             </a:extLst>
           </p:cNvPr>
@@ -6850,7 +9799,7 @@
           <p:cNvPr id="34" name="">
             <a:extLst xmlns:a="http://schemas.openxmlformats.org/drawingml/2006/main">
               <a:ext uri="{FF2B5EF4-FFF2-40B4-BE49-F238E27FC236}">
-                <a16:creationId xmlns:a16="http://schemas.microsoft.com/office/drawing/2014/main" id="{ACA90780-FDE2-4D73-A917-A30BBFC92532}"/>
+                <a16:creationId xmlns:a16="http://schemas.microsoft.com/office/drawing/2014/main" id="{E180D554-77EC-4DFD-B443-4507B8E5CBD1}"/>
               </a:ext>
             </a:extLst>
           </p:cNvPr>
@@ -6885,7 +9834,7 @@
           <p:cNvPr id="35" name="">
             <a:extLst xmlns:a="http://schemas.openxmlformats.org/drawingml/2006/main">
               <a:ext uri="{FF2B5EF4-FFF2-40B4-BE49-F238E27FC236}">
-                <a16:creationId xmlns:a16="http://schemas.microsoft.com/office/drawing/2014/main" id="{669E0B81-EACC-44F0-8E07-7BF023B6BC1A}"/>
+                <a16:creationId xmlns:a16="http://schemas.microsoft.com/office/drawing/2014/main" id="{4BB1AB8B-F3F8-48C3-A6A6-74605F888791}"/>
               </a:ext>
             </a:extLst>
           </p:cNvPr>
@@ -6935,7 +9884,7 @@
           <p:cNvPr id="36" name="">
             <a:extLst xmlns:a="http://schemas.openxmlformats.org/drawingml/2006/main">
               <a:ext uri="{FF2B5EF4-FFF2-40B4-BE49-F238E27FC236}">
-                <a16:creationId xmlns:a16="http://schemas.microsoft.com/office/drawing/2014/main" id="{42250177-7DC4-43BD-BF38-2539897766B6}"/>
+                <a16:creationId xmlns:a16="http://schemas.microsoft.com/office/drawing/2014/main" id="{999D0240-2780-45B9-830B-5A429C17673A}"/>
               </a:ext>
             </a:extLst>
           </p:cNvPr>
@@ -6966,7 +9915,7 @@
           <p:cNvPr id="37" name="">
             <a:extLst xmlns:a="http://schemas.openxmlformats.org/drawingml/2006/main">
               <a:ext uri="{FF2B5EF4-FFF2-40B4-BE49-F238E27FC236}">
-                <a16:creationId xmlns:a16="http://schemas.microsoft.com/office/drawing/2014/main" id="{EB809749-0370-4795-8018-CCEC75022CF9}"/>
+                <a16:creationId xmlns:a16="http://schemas.microsoft.com/office/drawing/2014/main" id="{FFFBFAF0-52B6-4D3C-BD0F-82241EA6C351}"/>
               </a:ext>
             </a:extLst>
           </p:cNvPr>
@@ -7016,7 +9965,7 @@
           <p:cNvPr id="38" name="">
             <a:extLst xmlns:a="http://schemas.openxmlformats.org/drawingml/2006/main">
               <a:ext uri="{FF2B5EF4-FFF2-40B4-BE49-F238E27FC236}">
-                <a16:creationId xmlns:a16="http://schemas.microsoft.com/office/drawing/2014/main" id="{3E05986E-652A-49A9-9968-197E1B2FE922}"/>
+                <a16:creationId xmlns:a16="http://schemas.microsoft.com/office/drawing/2014/main" id="{35677099-F116-43B0-AD51-1E179C831C27}"/>
               </a:ext>
             </a:extLst>
           </p:cNvPr>
@@ -7047,7 +9996,7 @@
           <p:cNvPr id="39" name="">
             <a:extLst xmlns:a="http://schemas.openxmlformats.org/drawingml/2006/main">
               <a:ext uri="{FF2B5EF4-FFF2-40B4-BE49-F238E27FC236}">
-                <a16:creationId xmlns:a16="http://schemas.microsoft.com/office/drawing/2014/main" id="{8D58CC91-AF4B-4809-A0F6-37C12ECA4B88}"/>
+                <a16:creationId xmlns:a16="http://schemas.microsoft.com/office/drawing/2014/main" id="{50B47728-B64B-45C9-B801-FE2DFD548239}"/>
               </a:ext>
             </a:extLst>
           </p:cNvPr>
@@ -7097,7 +10046,7 @@
           <p:cNvPr id="40" name="">
             <a:extLst xmlns:a="http://schemas.openxmlformats.org/drawingml/2006/main">
               <a:ext uri="{FF2B5EF4-FFF2-40B4-BE49-F238E27FC236}">
-                <a16:creationId xmlns:a16="http://schemas.microsoft.com/office/drawing/2014/main" id="{7C29C235-4EC7-4A2A-9142-8F2653DB943B}"/>
+                <a16:creationId xmlns:a16="http://schemas.microsoft.com/office/drawing/2014/main" id="{7459A0AB-16A3-428D-B523-3E3B1DB7C67B}"/>
               </a:ext>
             </a:extLst>
           </p:cNvPr>
@@ -7128,7 +10077,7 @@
           <p:cNvPr id="41" name="">
             <a:extLst xmlns:a="http://schemas.openxmlformats.org/drawingml/2006/main">
               <a:ext uri="{FF2B5EF4-FFF2-40B4-BE49-F238E27FC236}">
-                <a16:creationId xmlns:a16="http://schemas.microsoft.com/office/drawing/2014/main" id="{52A26C57-CA36-4ADF-82D7-67EE2BAAE819}"/>
+                <a16:creationId xmlns:a16="http://schemas.microsoft.com/office/drawing/2014/main" id="{1E295C43-B9D9-467C-B4B8-1DF91FF65C6E}"/>
               </a:ext>
             </a:extLst>
           </p:cNvPr>
@@ -7178,7 +10127,7 @@
           <p:cNvPr id="42" name="">
             <a:extLst xmlns:a="http://schemas.openxmlformats.org/drawingml/2006/main">
               <a:ext uri="{FF2B5EF4-FFF2-40B4-BE49-F238E27FC236}">
-                <a16:creationId xmlns:a16="http://schemas.microsoft.com/office/drawing/2014/main" id="{7893B418-BEC6-4A1D-8D53-8CAF1E3D8900}"/>
+                <a16:creationId xmlns:a16="http://schemas.microsoft.com/office/drawing/2014/main" id="{36AA5F9B-29FF-4639-9933-0428E1EC048E}"/>
               </a:ext>
             </a:extLst>
           </p:cNvPr>
@@ -7209,7 +10158,7 @@
           <p:cNvPr id="43" name="">
             <a:extLst xmlns:a="http://schemas.openxmlformats.org/drawingml/2006/main">
               <a:ext uri="{FF2B5EF4-FFF2-40B4-BE49-F238E27FC236}">
-                <a16:creationId xmlns:a16="http://schemas.microsoft.com/office/drawing/2014/main" id="{6ACA1FEB-FD69-47AA-AD53-EDCBBB5795C5}"/>
+                <a16:creationId xmlns:a16="http://schemas.microsoft.com/office/drawing/2014/main" id="{5194972A-891C-4AED-B5B5-681228FAF003}"/>
               </a:ext>
             </a:extLst>
           </p:cNvPr>
@@ -7259,7 +10208,7 @@
           <p:cNvPr id="44" name="">
             <a:extLst xmlns:a="http://schemas.openxmlformats.org/drawingml/2006/main">
               <a:ext uri="{FF2B5EF4-FFF2-40B4-BE49-F238E27FC236}">
-                <a16:creationId xmlns:a16="http://schemas.microsoft.com/office/drawing/2014/main" id="{4BC40F52-31DA-42F0-B536-3A441368113D}"/>
+                <a16:creationId xmlns:a16="http://schemas.microsoft.com/office/drawing/2014/main" id="{CEC407D1-67AF-4A6A-A24F-3117419E8D1B}"/>
               </a:ext>
             </a:extLst>
           </p:cNvPr>
@@ -7307,7 +10256,7 @@
     </p:spTree>
     <p:extLst>
       <p:ext uri="{BB962C8B-B14F-4D97-AF65-F5344CB8AC3E}">
-        <p14:creationId xmlns:p14="http://schemas.microsoft.com/office/powerpoint/2010/main" val="833482016"/>
+        <p14:creationId xmlns:p14="http://schemas.microsoft.com/office/powerpoint/2010/main" val="483779356"/>
       </p:ext>
     </p:extLst>
   </p:cSld>
@@ -7338,7 +10287,7 @@
           <p:cNvPr id="1" name="">
             <a:extLst xmlns:a="http://schemas.openxmlformats.org/drawingml/2006/main">
               <a:ext uri="{FF2B5EF4-FFF2-40B4-BE49-F238E27FC236}">
-                <a16:creationId xmlns:a16="http://schemas.microsoft.com/office/drawing/2014/main" id="{D0CD4D1D-03AA-4663-9DF8-B0B8AE096B44}"/>
+                <a16:creationId xmlns:a16="http://schemas.microsoft.com/office/drawing/2014/main" id="{426A956C-4E27-4AD1-9576-0EBD8A44844B}"/>
               </a:ext>
             </a:extLst>
           </p:cNvPr>
@@ -7388,7 +10337,7 @@
           <p:cNvPr id="2" name="">
             <a:extLst xmlns:a="http://schemas.openxmlformats.org/drawingml/2006/main">
               <a:ext uri="{FF2B5EF4-FFF2-40B4-BE49-F238E27FC236}">
-                <a16:creationId xmlns:a16="http://schemas.microsoft.com/office/drawing/2014/main" id="{FF5485CA-7DB3-426D-8283-007E72211D7B}"/>
+                <a16:creationId xmlns:a16="http://schemas.microsoft.com/office/drawing/2014/main" id="{D2F26F6E-CC1F-47C5-AD54-D74FBF8C6BDA}"/>
               </a:ext>
             </a:extLst>
           </p:cNvPr>
@@ -7438,7 +10387,7 @@
           <p:cNvPr id="3" name="">
             <a:extLst xmlns:a="http://schemas.openxmlformats.org/drawingml/2006/main">
               <a:ext uri="{FF2B5EF4-FFF2-40B4-BE49-F238E27FC236}">
-                <a16:creationId xmlns:a16="http://schemas.microsoft.com/office/drawing/2014/main" id="{BAD76897-E523-4973-A38F-3E9D99FC6202}"/>
+                <a16:creationId xmlns:a16="http://schemas.microsoft.com/office/drawing/2014/main" id="{D12E49DA-FD9A-4924-809A-D10C1A00F55E}"/>
               </a:ext>
             </a:extLst>
           </p:cNvPr>
@@ -7471,7 +10420,7 @@
           <p:cNvPr id="4" name="">
             <a:extLst xmlns:a="http://schemas.openxmlformats.org/drawingml/2006/main">
               <a:ext uri="{FF2B5EF4-FFF2-40B4-BE49-F238E27FC236}">
-                <a16:creationId xmlns:a16="http://schemas.microsoft.com/office/drawing/2014/main" id="{06068611-D2B3-4C77-964A-DD0E03B0F999}"/>
+                <a16:creationId xmlns:a16="http://schemas.microsoft.com/office/drawing/2014/main" id="{72DDFE06-2867-4D16-B214-7A0AC662D13C}"/>
               </a:ext>
             </a:extLst>
           </p:cNvPr>
@@ -7506,7 +10455,7 @@
           <p:cNvPr id="5" name="">
             <a:extLst xmlns:a="http://schemas.openxmlformats.org/drawingml/2006/main">
               <a:ext uri="{FF2B5EF4-FFF2-40B4-BE49-F238E27FC236}">
-                <a16:creationId xmlns:a16="http://schemas.microsoft.com/office/drawing/2014/main" id="{A970FE27-90C1-4CE9-AC34-D3DE6107FE98}"/>
+                <a16:creationId xmlns:a16="http://schemas.microsoft.com/office/drawing/2014/main" id="{5A23349B-5DF6-46F3-A8CF-FB44EE45A9F4}"/>
               </a:ext>
             </a:extLst>
           </p:cNvPr>
@@ -7541,7 +10490,7 @@
           <p:cNvPr id="6" name="">
             <a:extLst xmlns:a="http://schemas.openxmlformats.org/drawingml/2006/main">
               <a:ext uri="{FF2B5EF4-FFF2-40B4-BE49-F238E27FC236}">
-                <a16:creationId xmlns:a16="http://schemas.microsoft.com/office/drawing/2014/main" id="{2084FC0F-8C7E-4630-B0E3-C87E6A5BCDBE}"/>
+                <a16:creationId xmlns:a16="http://schemas.microsoft.com/office/drawing/2014/main" id="{9CB499FF-AB35-42FB-9FB5-20AD51239BDB}"/>
               </a:ext>
             </a:extLst>
           </p:cNvPr>
@@ -7591,7 +10540,7 @@
           <p:cNvPr id="7" name="">
             <a:extLst xmlns:a="http://schemas.openxmlformats.org/drawingml/2006/main">
               <a:ext uri="{FF2B5EF4-FFF2-40B4-BE49-F238E27FC236}">
-                <a16:creationId xmlns:a16="http://schemas.microsoft.com/office/drawing/2014/main" id="{DA86F69A-313C-44DC-9569-C6D40BE31E66}"/>
+                <a16:creationId xmlns:a16="http://schemas.microsoft.com/office/drawing/2014/main" id="{6847BE81-E7AA-48A6-B870-6C15B0AED325}"/>
               </a:ext>
             </a:extLst>
           </p:cNvPr>
@@ -7622,7 +10571,7 @@
           <p:cNvPr id="8" name="">
             <a:extLst xmlns:a="http://schemas.openxmlformats.org/drawingml/2006/main">
               <a:ext uri="{FF2B5EF4-FFF2-40B4-BE49-F238E27FC236}">
-                <a16:creationId xmlns:a16="http://schemas.microsoft.com/office/drawing/2014/main" id="{0DD52A69-6D5B-4F0A-AABC-B4C60FD4E018}"/>
+                <a16:creationId xmlns:a16="http://schemas.microsoft.com/office/drawing/2014/main" id="{11057EFC-7D8F-4368-8F06-F97111A0F739}"/>
               </a:ext>
             </a:extLst>
           </p:cNvPr>
@@ -7672,7 +10621,7 @@
           <p:cNvPr id="9" name="">
             <a:extLst xmlns:a="http://schemas.openxmlformats.org/drawingml/2006/main">
               <a:ext uri="{FF2B5EF4-FFF2-40B4-BE49-F238E27FC236}">
-                <a16:creationId xmlns:a16="http://schemas.microsoft.com/office/drawing/2014/main" id="{5E6F7325-0E5A-43CA-9450-CB36ED1ACA18}"/>
+                <a16:creationId xmlns:a16="http://schemas.microsoft.com/office/drawing/2014/main" id="{40AA5754-166C-4E66-ACC9-666B48E23333}"/>
               </a:ext>
             </a:extLst>
           </p:cNvPr>
@@ -7703,7 +10652,7 @@
           <p:cNvPr id="10" name="">
             <a:extLst xmlns:a="http://schemas.openxmlformats.org/drawingml/2006/main">
               <a:ext uri="{FF2B5EF4-FFF2-40B4-BE49-F238E27FC236}">
-                <a16:creationId xmlns:a16="http://schemas.microsoft.com/office/drawing/2014/main" id="{7BF990B8-D136-4286-BB4A-C8B3B8178949}"/>
+                <a16:creationId xmlns:a16="http://schemas.microsoft.com/office/drawing/2014/main" id="{836D618F-7983-491B-85E2-270E178B28BD}"/>
               </a:ext>
             </a:extLst>
           </p:cNvPr>
@@ -7753,7 +10702,7 @@
           <p:cNvPr id="11" name="">
             <a:extLst xmlns:a="http://schemas.openxmlformats.org/drawingml/2006/main">
               <a:ext uri="{FF2B5EF4-FFF2-40B4-BE49-F238E27FC236}">
-                <a16:creationId xmlns:a16="http://schemas.microsoft.com/office/drawing/2014/main" id="{9B1779E9-162A-44BD-BC5D-53933CD9408D}"/>
+                <a16:creationId xmlns:a16="http://schemas.microsoft.com/office/drawing/2014/main" id="{1F972EDB-D6ED-41B1-A38B-0F1D291688F1}"/>
               </a:ext>
             </a:extLst>
           </p:cNvPr>
@@ -7784,7 +10733,7 @@
           <p:cNvPr id="12" name="">
             <a:extLst xmlns:a="http://schemas.openxmlformats.org/drawingml/2006/main">
               <a:ext uri="{FF2B5EF4-FFF2-40B4-BE49-F238E27FC236}">
-                <a16:creationId xmlns:a16="http://schemas.microsoft.com/office/drawing/2014/main" id="{4CDFE46E-3E6F-468D-A12C-CDD19A06532A}"/>
+                <a16:creationId xmlns:a16="http://schemas.microsoft.com/office/drawing/2014/main" id="{10DF9544-D978-41D7-B0DE-5B3D30DA5F5B}"/>
               </a:ext>
             </a:extLst>
           </p:cNvPr>
@@ -7834,7 +10783,7 @@
           <p:cNvPr id="13" name="">
             <a:extLst xmlns:a="http://schemas.openxmlformats.org/drawingml/2006/main">
               <a:ext uri="{FF2B5EF4-FFF2-40B4-BE49-F238E27FC236}">
-                <a16:creationId xmlns:a16="http://schemas.microsoft.com/office/drawing/2014/main" id="{7070537C-49C3-45B1-BD38-B07AB2C5A509}"/>
+                <a16:creationId xmlns:a16="http://schemas.microsoft.com/office/drawing/2014/main" id="{B37AA124-7991-4002-BEB0-ACBABE3BFC4A}"/>
               </a:ext>
             </a:extLst>
           </p:cNvPr>
@@ -7865,7 +10814,7 @@
           <p:cNvPr id="14" name="">
             <a:extLst xmlns:a="http://schemas.openxmlformats.org/drawingml/2006/main">
               <a:ext uri="{FF2B5EF4-FFF2-40B4-BE49-F238E27FC236}">
-                <a16:creationId xmlns:a16="http://schemas.microsoft.com/office/drawing/2014/main" id="{B7141405-8B1A-4B3F-8F16-63B3337094B7}"/>
+                <a16:creationId xmlns:a16="http://schemas.microsoft.com/office/drawing/2014/main" id="{7AFE5E4A-8568-4372-BCAD-3860EBDF5E9D}"/>
               </a:ext>
             </a:extLst>
           </p:cNvPr>
@@ -7915,7 +10864,7 @@
           <p:cNvPr id="15" name="">
             <a:extLst xmlns:a="http://schemas.openxmlformats.org/drawingml/2006/main">
               <a:ext uri="{FF2B5EF4-FFF2-40B4-BE49-F238E27FC236}">
-                <a16:creationId xmlns:a16="http://schemas.microsoft.com/office/drawing/2014/main" id="{78775E77-EB16-41A1-93E3-507F3F3C3917}"/>
+                <a16:creationId xmlns:a16="http://schemas.microsoft.com/office/drawing/2014/main" id="{31A5EFC7-A4B4-4973-A1DE-8FC123220B74}"/>
               </a:ext>
             </a:extLst>
           </p:cNvPr>
@@ -7946,7 +10895,7 @@
           <p:cNvPr id="16" name="">
             <a:extLst xmlns:a="http://schemas.openxmlformats.org/drawingml/2006/main">
               <a:ext uri="{FF2B5EF4-FFF2-40B4-BE49-F238E27FC236}">
-                <a16:creationId xmlns:a16="http://schemas.microsoft.com/office/drawing/2014/main" id="{6C4F0CEC-24EA-44EA-A206-A7BF8B8EEC6B}"/>
+                <a16:creationId xmlns:a16="http://schemas.microsoft.com/office/drawing/2014/main" id="{EDEB1705-5B33-4A5D-B074-7D89D5DC9EC0}"/>
               </a:ext>
             </a:extLst>
           </p:cNvPr>
@@ -7996,7 +10945,7 @@
           <p:cNvPr id="17" name="">
             <a:extLst xmlns:a="http://schemas.openxmlformats.org/drawingml/2006/main">
               <a:ext uri="{FF2B5EF4-FFF2-40B4-BE49-F238E27FC236}">
-                <a16:creationId xmlns:a16="http://schemas.microsoft.com/office/drawing/2014/main" id="{A044F030-52BE-4B6C-8D65-2F3756185A49}"/>
+                <a16:creationId xmlns:a16="http://schemas.microsoft.com/office/drawing/2014/main" id="{D312FF90-713C-4833-96BE-50FA47340DA2}"/>
               </a:ext>
             </a:extLst>
           </p:cNvPr>
@@ -8046,7 +10995,7 @@
           <p:cNvPr id="18" name="">
             <a:extLst xmlns:a="http://schemas.openxmlformats.org/drawingml/2006/main">
               <a:ext uri="{FF2B5EF4-FFF2-40B4-BE49-F238E27FC236}">
-                <a16:creationId xmlns:a16="http://schemas.microsoft.com/office/drawing/2014/main" id="{727480D5-D6AD-465D-8F5C-3A8A565474FE}"/>
+                <a16:creationId xmlns:a16="http://schemas.microsoft.com/office/drawing/2014/main" id="{86014AC8-554C-4C32-BBFB-B6C24D092D53}"/>
               </a:ext>
             </a:extLst>
           </p:cNvPr>
@@ -8077,7 +11026,7 @@
           <p:cNvPr id="19" name="">
             <a:extLst xmlns:a="http://schemas.openxmlformats.org/drawingml/2006/main">
               <a:ext uri="{FF2B5EF4-FFF2-40B4-BE49-F238E27FC236}">
-                <a16:creationId xmlns:a16="http://schemas.microsoft.com/office/drawing/2014/main" id="{A8172C9C-A02A-440D-A2A6-E27D533A94EA}"/>
+                <a16:creationId xmlns:a16="http://schemas.microsoft.com/office/drawing/2014/main" id="{F6DEB681-4F75-4633-B7E1-3382109EB04C}"/>
               </a:ext>
             </a:extLst>
           </p:cNvPr>
@@ -8127,7 +11076,7 @@
           <p:cNvPr id="20" name="">
             <a:extLst xmlns:a="http://schemas.openxmlformats.org/drawingml/2006/main">
               <a:ext uri="{FF2B5EF4-FFF2-40B4-BE49-F238E27FC236}">
-                <a16:creationId xmlns:a16="http://schemas.microsoft.com/office/drawing/2014/main" id="{7D4EFE5C-3485-4EE7-B8F0-FB95176E4E6E}"/>
+                <a16:creationId xmlns:a16="http://schemas.microsoft.com/office/drawing/2014/main" id="{C37CFAF3-B2D7-42DE-81A5-FFD4F83656B2}"/>
               </a:ext>
             </a:extLst>
           </p:cNvPr>
@@ -8158,7 +11107,7 @@
           <p:cNvPr id="21" name="">
             <a:extLst xmlns:a="http://schemas.openxmlformats.org/drawingml/2006/main">
               <a:ext uri="{FF2B5EF4-FFF2-40B4-BE49-F238E27FC236}">
-                <a16:creationId xmlns:a16="http://schemas.microsoft.com/office/drawing/2014/main" id="{562E8D8D-A05F-4CCF-94B3-2D7DD9FA0E1D}"/>
+                <a16:creationId xmlns:a16="http://schemas.microsoft.com/office/drawing/2014/main" id="{7CD4B05A-0A9B-49A4-8946-C5AA0C27AF30}"/>
               </a:ext>
             </a:extLst>
           </p:cNvPr>
@@ -8208,7 +11157,7 @@
           <p:cNvPr id="22" name="">
             <a:extLst xmlns:a="http://schemas.openxmlformats.org/drawingml/2006/main">
               <a:ext uri="{FF2B5EF4-FFF2-40B4-BE49-F238E27FC236}">
-                <a16:creationId xmlns:a16="http://schemas.microsoft.com/office/drawing/2014/main" id="{5F6B446E-571E-435A-9E82-0823B69CD16B}"/>
+                <a16:creationId xmlns:a16="http://schemas.microsoft.com/office/drawing/2014/main" id="{32E3D37B-11D0-4702-9789-D0D0C6A3DE96}"/>
               </a:ext>
             </a:extLst>
           </p:cNvPr>
@@ -8239,7 +11188,7 @@
           <p:cNvPr id="23" name="">
             <a:extLst xmlns:a="http://schemas.openxmlformats.org/drawingml/2006/main">
               <a:ext uri="{FF2B5EF4-FFF2-40B4-BE49-F238E27FC236}">
-                <a16:creationId xmlns:a16="http://schemas.microsoft.com/office/drawing/2014/main" id="{CAD70CF1-0703-49A1-BDC6-A75E7EC0DB6C}"/>
+                <a16:creationId xmlns:a16="http://schemas.microsoft.com/office/drawing/2014/main" id="{D40D0D79-A11A-4940-BEC6-CF728A6FA9DC}"/>
               </a:ext>
             </a:extLst>
           </p:cNvPr>
@@ -8289,7 +11238,7 @@
           <p:cNvPr id="24" name="">
             <a:extLst xmlns:a="http://schemas.openxmlformats.org/drawingml/2006/main">
               <a:ext uri="{FF2B5EF4-FFF2-40B4-BE49-F238E27FC236}">
-                <a16:creationId xmlns:a16="http://schemas.microsoft.com/office/drawing/2014/main" id="{18797125-7ABE-4BF3-B0BC-A69BCE9F9D4C}"/>
+                <a16:creationId xmlns:a16="http://schemas.microsoft.com/office/drawing/2014/main" id="{CA4A5C98-5D4C-4040-853D-8893620171EC}"/>
               </a:ext>
             </a:extLst>
           </p:cNvPr>
@@ -8320,7 +11269,7 @@
           <p:cNvPr id="25" name="">
             <a:extLst xmlns:a="http://schemas.openxmlformats.org/drawingml/2006/main">
               <a:ext uri="{FF2B5EF4-FFF2-40B4-BE49-F238E27FC236}">
-                <a16:creationId xmlns:a16="http://schemas.microsoft.com/office/drawing/2014/main" id="{0B70231A-EC74-4AAE-B92C-2CE84FC6ECD0}"/>
+                <a16:creationId xmlns:a16="http://schemas.microsoft.com/office/drawing/2014/main" id="{04AD8E6A-20B4-4E12-A8A0-C7B81E448B7A}"/>
               </a:ext>
             </a:extLst>
           </p:cNvPr>
@@ -8370,7 +11319,7 @@
           <p:cNvPr id="26" name="">
             <a:extLst xmlns:a="http://schemas.openxmlformats.org/drawingml/2006/main">
               <a:ext uri="{FF2B5EF4-FFF2-40B4-BE49-F238E27FC236}">
-                <a16:creationId xmlns:a16="http://schemas.microsoft.com/office/drawing/2014/main" id="{072B13AF-B30E-4BFC-A498-3E3ECC74F831}"/>
+                <a16:creationId xmlns:a16="http://schemas.microsoft.com/office/drawing/2014/main" id="{FB8C8295-3C64-48FA-BDC1-F40BDACD566C}"/>
               </a:ext>
             </a:extLst>
           </p:cNvPr>
@@ -8401,7 +11350,7 @@
           <p:cNvPr id="27" name="">
             <a:extLst xmlns:a="http://schemas.openxmlformats.org/drawingml/2006/main">
               <a:ext uri="{FF2B5EF4-FFF2-40B4-BE49-F238E27FC236}">
-                <a16:creationId xmlns:a16="http://schemas.microsoft.com/office/drawing/2014/main" id="{4191BCAE-0D6A-4384-8F42-86C83D14AAE0}"/>
+                <a16:creationId xmlns:a16="http://schemas.microsoft.com/office/drawing/2014/main" id="{A190BC24-CF7A-46B6-ADF8-3D24FE063B75}"/>
               </a:ext>
             </a:extLst>
           </p:cNvPr>
@@ -8449,7 +11398,7 @@
     </p:spTree>
     <p:extLst>
       <p:ext uri="{BB962C8B-B14F-4D97-AF65-F5344CB8AC3E}">
-        <p14:creationId xmlns:p14="http://schemas.microsoft.com/office/powerpoint/2010/main" val="635840943"/>
+        <p14:creationId xmlns:p14="http://schemas.microsoft.com/office/powerpoint/2010/main" val="1222737422"/>
       </p:ext>
     </p:extLst>
   </p:cSld>
@@ -8480,7 +11429,7 @@
           <p:cNvPr id="1" name="">
             <a:extLst xmlns:a="http://schemas.openxmlformats.org/drawingml/2006/main">
               <a:ext uri="{FF2B5EF4-FFF2-40B4-BE49-F238E27FC236}">
-                <a16:creationId xmlns:a16="http://schemas.microsoft.com/office/drawing/2014/main" id="{2D53863B-00FD-4F33-B1C0-988F87EE49D9}"/>
+                <a16:creationId xmlns:a16="http://schemas.microsoft.com/office/drawing/2014/main" id="{443739F3-E4E2-4386-8C6F-C1A92E027867}"/>
               </a:ext>
             </a:extLst>
           </p:cNvPr>
@@ -8530,7 +11479,7 @@
           <p:cNvPr id="2" name="">
             <a:extLst xmlns:a="http://schemas.openxmlformats.org/drawingml/2006/main">
               <a:ext uri="{FF2B5EF4-FFF2-40B4-BE49-F238E27FC236}">
-                <a16:creationId xmlns:a16="http://schemas.microsoft.com/office/drawing/2014/main" id="{766217F2-478D-4904-82AD-5C5368A6307B}"/>
+                <a16:creationId xmlns:a16="http://schemas.microsoft.com/office/drawing/2014/main" id="{5B25765E-ED48-4188-906A-96F05F7791A9}"/>
               </a:ext>
             </a:extLst>
           </p:cNvPr>
@@ -8580,7 +11529,7 @@
           <p:cNvPr id="3" name="">
             <a:extLst xmlns:a="http://schemas.openxmlformats.org/drawingml/2006/main">
               <a:ext uri="{FF2B5EF4-FFF2-40B4-BE49-F238E27FC236}">
-                <a16:creationId xmlns:a16="http://schemas.microsoft.com/office/drawing/2014/main" id="{CB0CA937-6FD6-480A-BB4E-499B2C9CB3D2}"/>
+                <a16:creationId xmlns:a16="http://schemas.microsoft.com/office/drawing/2014/main" id="{7E201075-0734-4C0C-92D7-94F23300D0E7}"/>
               </a:ext>
             </a:extLst>
           </p:cNvPr>
@@ -8613,7 +11562,7 @@
           <p:cNvPr id="4" name="">
             <a:extLst xmlns:a="http://schemas.openxmlformats.org/drawingml/2006/main">
               <a:ext uri="{FF2B5EF4-FFF2-40B4-BE49-F238E27FC236}">
-                <a16:creationId xmlns:a16="http://schemas.microsoft.com/office/drawing/2014/main" id="{91DF3392-ABC1-407D-A6C4-BD7202A11A39}"/>
+                <a16:creationId xmlns:a16="http://schemas.microsoft.com/office/drawing/2014/main" id="{59801B92-BF97-46F7-A832-90257EE21026}"/>
               </a:ext>
             </a:extLst>
           </p:cNvPr>
@@ -8648,7 +11597,7 @@
           <p:cNvPr id="5" name="">
             <a:extLst xmlns:a="http://schemas.openxmlformats.org/drawingml/2006/main">
               <a:ext uri="{FF2B5EF4-FFF2-40B4-BE49-F238E27FC236}">
-                <a16:creationId xmlns:a16="http://schemas.microsoft.com/office/drawing/2014/main" id="{1B2F4D32-1F9D-46B5-A5F1-1279D78A2FEF}"/>
+                <a16:creationId xmlns:a16="http://schemas.microsoft.com/office/drawing/2014/main" id="{B98A012F-BC1B-4241-B906-587C5DC430E9}"/>
               </a:ext>
             </a:extLst>
           </p:cNvPr>
@@ -8698,7 +11647,7 @@
           <p:cNvPr id="6" name="">
             <a:extLst xmlns:a="http://schemas.openxmlformats.org/drawingml/2006/main">
               <a:ext uri="{FF2B5EF4-FFF2-40B4-BE49-F238E27FC236}">
-                <a16:creationId xmlns:a16="http://schemas.microsoft.com/office/drawing/2014/main" id="{B1351248-F07A-4856-8FEA-182D31A9B719}"/>
+                <a16:creationId xmlns:a16="http://schemas.microsoft.com/office/drawing/2014/main" id="{29A3E5FD-C5D0-41E7-8733-62AA07F9B2A6}"/>
               </a:ext>
             </a:extLst>
           </p:cNvPr>
@@ -8729,7 +11678,7 @@
           <p:cNvPr id="7" name="">
             <a:extLst xmlns:a="http://schemas.openxmlformats.org/drawingml/2006/main">
               <a:ext uri="{FF2B5EF4-FFF2-40B4-BE49-F238E27FC236}">
-                <a16:creationId xmlns:a16="http://schemas.microsoft.com/office/drawing/2014/main" id="{9E221B55-3E41-411D-9E13-CEA97237FF4E}"/>
+                <a16:creationId xmlns:a16="http://schemas.microsoft.com/office/drawing/2014/main" id="{AB02C42D-0D22-418B-A7B6-9B8852C49BC6}"/>
               </a:ext>
             </a:extLst>
           </p:cNvPr>
@@ -8779,7 +11728,7 @@
           <p:cNvPr id="8" name="">
             <a:extLst xmlns:a="http://schemas.openxmlformats.org/drawingml/2006/main">
               <a:ext uri="{FF2B5EF4-FFF2-40B4-BE49-F238E27FC236}">
-                <a16:creationId xmlns:a16="http://schemas.microsoft.com/office/drawing/2014/main" id="{25004774-A442-497C-AAE4-BAE21C9A2167}"/>
+                <a16:creationId xmlns:a16="http://schemas.microsoft.com/office/drawing/2014/main" id="{90AC6970-9560-4BBE-8574-D411BCC11692}"/>
               </a:ext>
             </a:extLst>
           </p:cNvPr>
@@ -8810,7 +11759,7 @@
           <p:cNvPr id="9" name="">
             <a:extLst xmlns:a="http://schemas.openxmlformats.org/drawingml/2006/main">
               <a:ext uri="{FF2B5EF4-FFF2-40B4-BE49-F238E27FC236}">
-                <a16:creationId xmlns:a16="http://schemas.microsoft.com/office/drawing/2014/main" id="{70F5AB6C-2B5F-49CD-BCED-8CAAEAE181CF}"/>
+                <a16:creationId xmlns:a16="http://schemas.microsoft.com/office/drawing/2014/main" id="{02112D7D-EF2D-4744-8F38-31D66768A2DF}"/>
               </a:ext>
             </a:extLst>
           </p:cNvPr>
@@ -8860,7 +11809,7 @@
           <p:cNvPr id="10" name="">
             <a:extLst xmlns:a="http://schemas.openxmlformats.org/drawingml/2006/main">
               <a:ext uri="{FF2B5EF4-FFF2-40B4-BE49-F238E27FC236}">
-                <a16:creationId xmlns:a16="http://schemas.microsoft.com/office/drawing/2014/main" id="{607B7907-912A-479E-A1B1-54D130F86FAF}"/>
+                <a16:creationId xmlns:a16="http://schemas.microsoft.com/office/drawing/2014/main" id="{CB49A0E3-6224-4287-9D12-7E649166D382}"/>
               </a:ext>
             </a:extLst>
           </p:cNvPr>
@@ -8891,7 +11840,7 @@
           <p:cNvPr id="11" name="">
             <a:extLst xmlns:a="http://schemas.openxmlformats.org/drawingml/2006/main">
               <a:ext uri="{FF2B5EF4-FFF2-40B4-BE49-F238E27FC236}">
-                <a16:creationId xmlns:a16="http://schemas.microsoft.com/office/drawing/2014/main" id="{8348F3D9-1AAD-4FD1-BF9D-932BCA0C8A63}"/>
+                <a16:creationId xmlns:a16="http://schemas.microsoft.com/office/drawing/2014/main" id="{476B76B2-363D-4071-B575-52B747CCD983}"/>
               </a:ext>
             </a:extLst>
           </p:cNvPr>
@@ -8941,7 +11890,7 @@
           <p:cNvPr id="12" name="">
             <a:extLst xmlns:a="http://schemas.openxmlformats.org/drawingml/2006/main">
               <a:ext uri="{FF2B5EF4-FFF2-40B4-BE49-F238E27FC236}">
-                <a16:creationId xmlns:a16="http://schemas.microsoft.com/office/drawing/2014/main" id="{96A102BB-15F6-47AD-A1C4-B2DA90FDCA81}"/>
+                <a16:creationId xmlns:a16="http://schemas.microsoft.com/office/drawing/2014/main" id="{74C95184-7FCB-49D6-8979-1BEA7F86D791}"/>
               </a:ext>
             </a:extLst>
           </p:cNvPr>
@@ -8972,7 +11921,7 @@
           <p:cNvPr id="13" name="">
             <a:extLst xmlns:a="http://schemas.openxmlformats.org/drawingml/2006/main">
               <a:ext uri="{FF2B5EF4-FFF2-40B4-BE49-F238E27FC236}">
-                <a16:creationId xmlns:a16="http://schemas.microsoft.com/office/drawing/2014/main" id="{4326E059-8F9C-4948-AF2F-B7DA4FA65A3D}"/>
+                <a16:creationId xmlns:a16="http://schemas.microsoft.com/office/drawing/2014/main" id="{C4CFE570-02AD-4ED2-8A44-4277EE8AE748}"/>
               </a:ext>
             </a:extLst>
           </p:cNvPr>
@@ -9022,7 +11971,7 @@
           <p:cNvPr id="14" name="">
             <a:extLst xmlns:a="http://schemas.openxmlformats.org/drawingml/2006/main">
               <a:ext uri="{FF2B5EF4-FFF2-40B4-BE49-F238E27FC236}">
-                <a16:creationId xmlns:a16="http://schemas.microsoft.com/office/drawing/2014/main" id="{1EC9554C-EACD-4BBD-9FD4-52778684139B}"/>
+                <a16:creationId xmlns:a16="http://schemas.microsoft.com/office/drawing/2014/main" id="{A612F7D1-6FB2-4619-A386-B58A816C53FE}"/>
               </a:ext>
             </a:extLst>
           </p:cNvPr>
@@ -9053,7 +12002,7 @@
           <p:cNvPr id="15" name="">
             <a:extLst xmlns:a="http://schemas.openxmlformats.org/drawingml/2006/main">
               <a:ext uri="{FF2B5EF4-FFF2-40B4-BE49-F238E27FC236}">
-                <a16:creationId xmlns:a16="http://schemas.microsoft.com/office/drawing/2014/main" id="{0A17A06C-7148-448B-B593-8E0429096C67}"/>
+                <a16:creationId xmlns:a16="http://schemas.microsoft.com/office/drawing/2014/main" id="{0DA2D9F3-13C7-46B0-9DAA-91183F64659A}"/>
               </a:ext>
             </a:extLst>
           </p:cNvPr>
@@ -9103,7 +12052,7 @@
           <p:cNvPr id="16" name="">
             <a:extLst xmlns:a="http://schemas.openxmlformats.org/drawingml/2006/main">
               <a:ext uri="{FF2B5EF4-FFF2-40B4-BE49-F238E27FC236}">
-                <a16:creationId xmlns:a16="http://schemas.microsoft.com/office/drawing/2014/main" id="{C5F0BDC0-8CFF-4800-B280-80E5A5E94F48}"/>
+                <a16:creationId xmlns:a16="http://schemas.microsoft.com/office/drawing/2014/main" id="{4C9EF156-8836-4ED3-9E70-D95A3D2D64C3}"/>
               </a:ext>
             </a:extLst>
           </p:cNvPr>
@@ -9138,7 +12087,7 @@
           <p:cNvPr id="17" name="">
             <a:extLst xmlns:a="http://schemas.openxmlformats.org/drawingml/2006/main">
               <a:ext uri="{FF2B5EF4-FFF2-40B4-BE49-F238E27FC236}">
-                <a16:creationId xmlns:a16="http://schemas.microsoft.com/office/drawing/2014/main" id="{FFCC535B-525C-4880-AFC5-99E9C96D361A}"/>
+                <a16:creationId xmlns:a16="http://schemas.microsoft.com/office/drawing/2014/main" id="{DAA57325-C61F-4CC0-BEE5-E88185683898}"/>
               </a:ext>
             </a:extLst>
           </p:cNvPr>
@@ -9188,7 +12137,7 @@
           <p:cNvPr id="18" name="">
             <a:extLst xmlns:a="http://schemas.openxmlformats.org/drawingml/2006/main">
               <a:ext uri="{FF2B5EF4-FFF2-40B4-BE49-F238E27FC236}">
-                <a16:creationId xmlns:a16="http://schemas.microsoft.com/office/drawing/2014/main" id="{937D829F-74C3-432C-9768-525829A6CF2F}"/>
+                <a16:creationId xmlns:a16="http://schemas.microsoft.com/office/drawing/2014/main" id="{BB0FAF69-2690-49E8-AAC5-92561201468E}"/>
               </a:ext>
             </a:extLst>
           </p:cNvPr>
@@ -9219,7 +12168,7 @@
           <p:cNvPr id="19" name="">
             <a:extLst xmlns:a="http://schemas.openxmlformats.org/drawingml/2006/main">
               <a:ext uri="{FF2B5EF4-FFF2-40B4-BE49-F238E27FC236}">
-                <a16:creationId xmlns:a16="http://schemas.microsoft.com/office/drawing/2014/main" id="{AAD9D4C1-6643-4933-BA8F-2A86737873E8}"/>
+                <a16:creationId xmlns:a16="http://schemas.microsoft.com/office/drawing/2014/main" id="{846092FB-6AA2-4D5B-8093-EF4C05E00488}"/>
               </a:ext>
             </a:extLst>
           </p:cNvPr>
@@ -9269,7 +12218,7 @@
           <p:cNvPr id="20" name="">
             <a:extLst xmlns:a="http://schemas.openxmlformats.org/drawingml/2006/main">
               <a:ext uri="{FF2B5EF4-FFF2-40B4-BE49-F238E27FC236}">
-                <a16:creationId xmlns:a16="http://schemas.microsoft.com/office/drawing/2014/main" id="{9ECF8C7C-4DEC-4718-82AA-5F82390D53DE}"/>
+                <a16:creationId xmlns:a16="http://schemas.microsoft.com/office/drawing/2014/main" id="{E56BCAE5-30DC-4780-A94B-5431EFC9593F}"/>
               </a:ext>
             </a:extLst>
           </p:cNvPr>
@@ -9300,7 +12249,7 @@
           <p:cNvPr id="21" name="">
             <a:extLst xmlns:a="http://schemas.openxmlformats.org/drawingml/2006/main">
               <a:ext uri="{FF2B5EF4-FFF2-40B4-BE49-F238E27FC236}">
-                <a16:creationId xmlns:a16="http://schemas.microsoft.com/office/drawing/2014/main" id="{8A753F43-E765-4290-BD66-5D32CC8D6859}"/>
+                <a16:creationId xmlns:a16="http://schemas.microsoft.com/office/drawing/2014/main" id="{78BEFB06-8D1E-4515-8DE8-101CA3EC9EA9}"/>
               </a:ext>
             </a:extLst>
           </p:cNvPr>
@@ -9350,7 +12299,7 @@
           <p:cNvPr id="22" name="">
             <a:extLst xmlns:a="http://schemas.openxmlformats.org/drawingml/2006/main">
               <a:ext uri="{FF2B5EF4-FFF2-40B4-BE49-F238E27FC236}">
-                <a16:creationId xmlns:a16="http://schemas.microsoft.com/office/drawing/2014/main" id="{974A7E84-BCB3-4620-AA8F-D98C59A9AC84}"/>
+                <a16:creationId xmlns:a16="http://schemas.microsoft.com/office/drawing/2014/main" id="{987EAAA9-88D2-4F8B-BDFB-EF36AE0696CF}"/>
               </a:ext>
             </a:extLst>
           </p:cNvPr>
@@ -9381,7 +12330,7 @@
           <p:cNvPr id="23" name="">
             <a:extLst xmlns:a="http://schemas.openxmlformats.org/drawingml/2006/main">
               <a:ext uri="{FF2B5EF4-FFF2-40B4-BE49-F238E27FC236}">
-                <a16:creationId xmlns:a16="http://schemas.microsoft.com/office/drawing/2014/main" id="{1DAC7103-2291-4337-ABBE-E56F4DA8ACB3}"/>
+                <a16:creationId xmlns:a16="http://schemas.microsoft.com/office/drawing/2014/main" id="{3C72785F-F410-40A1-A386-FE50B8CB3FC2}"/>
               </a:ext>
             </a:extLst>
           </p:cNvPr>
@@ -9431,7 +12380,7 @@
           <p:cNvPr id="24" name="">
             <a:extLst xmlns:a="http://schemas.openxmlformats.org/drawingml/2006/main">
               <a:ext uri="{FF2B5EF4-FFF2-40B4-BE49-F238E27FC236}">
-                <a16:creationId xmlns:a16="http://schemas.microsoft.com/office/drawing/2014/main" id="{9666F099-6C2B-4D73-B7EF-08E687B4A03D}"/>
+                <a16:creationId xmlns:a16="http://schemas.microsoft.com/office/drawing/2014/main" id="{2AFACE8C-5DAB-4C97-84C1-7468A2947D5A}"/>
               </a:ext>
             </a:extLst>
           </p:cNvPr>
@@ -9462,7 +12411,7 @@
           <p:cNvPr id="25" name="">
             <a:extLst xmlns:a="http://schemas.openxmlformats.org/drawingml/2006/main">
               <a:ext uri="{FF2B5EF4-FFF2-40B4-BE49-F238E27FC236}">
-                <a16:creationId xmlns:a16="http://schemas.microsoft.com/office/drawing/2014/main" id="{13BAD1CA-0169-46EF-AAD3-2EBED6738D99}"/>
+                <a16:creationId xmlns:a16="http://schemas.microsoft.com/office/drawing/2014/main" id="{D20EAA42-F412-45DF-8A27-15A5C0D1564C}"/>
               </a:ext>
             </a:extLst>
           </p:cNvPr>
@@ -9512,7 +12461,7 @@
           <p:cNvPr id="26" name="">
             <a:extLst xmlns:a="http://schemas.openxmlformats.org/drawingml/2006/main">
               <a:ext uri="{FF2B5EF4-FFF2-40B4-BE49-F238E27FC236}">
-                <a16:creationId xmlns:a16="http://schemas.microsoft.com/office/drawing/2014/main" id="{06505205-A510-4D2C-B2BC-1895B71EA5EB}"/>
+                <a16:creationId xmlns:a16="http://schemas.microsoft.com/office/drawing/2014/main" id="{E17432BB-6AF3-4375-B4BE-A6672F82F283}"/>
               </a:ext>
             </a:extLst>
           </p:cNvPr>
@@ -9543,7 +12492,7 @@
           <p:cNvPr id="27" name="">
             <a:extLst xmlns:a="http://schemas.openxmlformats.org/drawingml/2006/main">
               <a:ext uri="{FF2B5EF4-FFF2-40B4-BE49-F238E27FC236}">
-                <a16:creationId xmlns:a16="http://schemas.microsoft.com/office/drawing/2014/main" id="{35F7665B-A9DE-49B9-9756-977C86ECA981}"/>
+                <a16:creationId xmlns:a16="http://schemas.microsoft.com/office/drawing/2014/main" id="{E751F110-620B-4A2D-84EA-03D7A77BAC3C}"/>
               </a:ext>
             </a:extLst>
           </p:cNvPr>
@@ -9591,7 +12540,7 @@
     </p:spTree>
     <p:extLst>
       <p:ext uri="{BB962C8B-B14F-4D97-AF65-F5344CB8AC3E}">
-        <p14:creationId xmlns:p14="http://schemas.microsoft.com/office/powerpoint/2010/main" val="375766020"/>
+        <p14:creationId xmlns:p14="http://schemas.microsoft.com/office/powerpoint/2010/main" val="139311800"/>
       </p:ext>
     </p:extLst>
   </p:cSld>
@@ -9622,7 +12571,7 @@
           <p:cNvPr id="1" name="">
             <a:extLst xmlns:a="http://schemas.openxmlformats.org/drawingml/2006/main">
               <a:ext uri="{FF2B5EF4-FFF2-40B4-BE49-F238E27FC236}">
-                <a16:creationId xmlns:a16="http://schemas.microsoft.com/office/drawing/2014/main" id="{C21F1DC0-5166-476F-8AA2-2D8FCBE72E2C}"/>
+                <a16:creationId xmlns:a16="http://schemas.microsoft.com/office/drawing/2014/main" id="{B2FCFE4B-ADFF-4A97-AC14-BFCBA9E7EED7}"/>
               </a:ext>
             </a:extLst>
           </p:cNvPr>
@@ -9672,7 +12621,7 @@
           <p:cNvPr id="2" name="">
             <a:extLst xmlns:a="http://schemas.openxmlformats.org/drawingml/2006/main">
               <a:ext uri="{FF2B5EF4-FFF2-40B4-BE49-F238E27FC236}">
-                <a16:creationId xmlns:a16="http://schemas.microsoft.com/office/drawing/2014/main" id="{54352E64-4C54-41B8-9DDB-B625284A4764}"/>
+                <a16:creationId xmlns:a16="http://schemas.microsoft.com/office/drawing/2014/main" id="{59779B16-C44F-4C19-9B9B-BB057B52FE3A}"/>
               </a:ext>
             </a:extLst>
           </p:cNvPr>
@@ -9722,7 +12671,7 @@
           <p:cNvPr id="3" name="">
             <a:extLst xmlns:a="http://schemas.openxmlformats.org/drawingml/2006/main">
               <a:ext uri="{FF2B5EF4-FFF2-40B4-BE49-F238E27FC236}">
-                <a16:creationId xmlns:a16="http://schemas.microsoft.com/office/drawing/2014/main" id="{698F6855-7EF6-48F9-95A3-9BEDBAD09C98}"/>
+                <a16:creationId xmlns:a16="http://schemas.microsoft.com/office/drawing/2014/main" id="{5EF2B354-683B-47E9-93C7-CC6C0BF54AC9}"/>
               </a:ext>
             </a:extLst>
           </p:cNvPr>
@@ -9755,7 +12704,7 @@
           <p:cNvPr id="4" name="">
             <a:extLst xmlns:a="http://schemas.openxmlformats.org/drawingml/2006/main">
               <a:ext uri="{FF2B5EF4-FFF2-40B4-BE49-F238E27FC236}">
-                <a16:creationId xmlns:a16="http://schemas.microsoft.com/office/drawing/2014/main" id="{73DAC494-DE83-408A-99CB-63AD861C8051}"/>
+                <a16:creationId xmlns:a16="http://schemas.microsoft.com/office/drawing/2014/main" id="{1F425E80-7B50-43B4-A713-F3FF703F4DB3}"/>
               </a:ext>
             </a:extLst>
           </p:cNvPr>
@@ -9790,7 +12739,7 @@
           <p:cNvPr id="5" name="">
             <a:extLst xmlns:a="http://schemas.openxmlformats.org/drawingml/2006/main">
               <a:ext uri="{FF2B5EF4-FFF2-40B4-BE49-F238E27FC236}">
-                <a16:creationId xmlns:a16="http://schemas.microsoft.com/office/drawing/2014/main" id="{70BF5479-AC19-4E67-9A61-B518C679AEC5}"/>
+                <a16:creationId xmlns:a16="http://schemas.microsoft.com/office/drawing/2014/main" id="{F9325BCF-2B76-4C40-B1C7-C3A39E2078FA}"/>
               </a:ext>
             </a:extLst>
           </p:cNvPr>
@@ -9840,7 +12789,7 @@
           <p:cNvPr id="6" name="">
             <a:extLst xmlns:a="http://schemas.openxmlformats.org/drawingml/2006/main">
               <a:ext uri="{FF2B5EF4-FFF2-40B4-BE49-F238E27FC236}">
-                <a16:creationId xmlns:a16="http://schemas.microsoft.com/office/drawing/2014/main" id="{5AC33AF2-A81A-4496-87A0-82701BB6F72F}"/>
+                <a16:creationId xmlns:a16="http://schemas.microsoft.com/office/drawing/2014/main" id="{67BF0B49-C6FF-4035-ABE1-96E99C62C653}"/>
               </a:ext>
             </a:extLst>
           </p:cNvPr>
@@ -9890,7 +12839,7 @@
           <p:cNvPr id="7" name="">
             <a:extLst xmlns:a="http://schemas.openxmlformats.org/drawingml/2006/main">
               <a:ext uri="{FF2B5EF4-FFF2-40B4-BE49-F238E27FC236}">
-                <a16:creationId xmlns:a16="http://schemas.microsoft.com/office/drawing/2014/main" id="{6DEA1A93-8811-4D9D-8EE3-5DF92BB318A0}"/>
+                <a16:creationId xmlns:a16="http://schemas.microsoft.com/office/drawing/2014/main" id="{0FCDED2C-6AAF-4CAA-813D-DE233C543599}"/>
               </a:ext>
             </a:extLst>
           </p:cNvPr>
@@ -9925,7 +12874,7 @@
           <p:cNvPr id="8" name="">
             <a:extLst xmlns:a="http://schemas.openxmlformats.org/drawingml/2006/main">
               <a:ext uri="{FF2B5EF4-FFF2-40B4-BE49-F238E27FC236}">
-                <a16:creationId xmlns:a16="http://schemas.microsoft.com/office/drawing/2014/main" id="{E9085633-7C48-44D9-B383-91EAE084A87E}"/>
+                <a16:creationId xmlns:a16="http://schemas.microsoft.com/office/drawing/2014/main" id="{1E4403BC-6D00-4688-A5C2-01DA5ABE4F2F}"/>
               </a:ext>
             </a:extLst>
           </p:cNvPr>
@@ -9975,7 +12924,7 @@
           <p:cNvPr id="9" name="">
             <a:extLst xmlns:a="http://schemas.openxmlformats.org/drawingml/2006/main">
               <a:ext uri="{FF2B5EF4-FFF2-40B4-BE49-F238E27FC236}">
-                <a16:creationId xmlns:a16="http://schemas.microsoft.com/office/drawing/2014/main" id="{7543C56B-3832-46A8-B22F-C5791487C653}"/>
+                <a16:creationId xmlns:a16="http://schemas.microsoft.com/office/drawing/2014/main" id="{BC1670DD-7F47-4655-B269-7D3CC9DC0FDB}"/>
               </a:ext>
             </a:extLst>
           </p:cNvPr>
@@ -10006,7 +12955,7 @@
           <p:cNvPr id="10" name="">
             <a:extLst xmlns:a="http://schemas.openxmlformats.org/drawingml/2006/main">
               <a:ext uri="{FF2B5EF4-FFF2-40B4-BE49-F238E27FC236}">
-                <a16:creationId xmlns:a16="http://schemas.microsoft.com/office/drawing/2014/main" id="{7FCEF72C-CF0F-47EC-A37B-E3BE5F7772F4}"/>
+                <a16:creationId xmlns:a16="http://schemas.microsoft.com/office/drawing/2014/main" id="{518416F0-3103-446E-A79E-29834758F0B7}"/>
               </a:ext>
             </a:extLst>
           </p:cNvPr>
@@ -10056,7 +13005,7 @@
           <p:cNvPr id="11" name="">
             <a:extLst xmlns:a="http://schemas.openxmlformats.org/drawingml/2006/main">
               <a:ext uri="{FF2B5EF4-FFF2-40B4-BE49-F238E27FC236}">
-                <a16:creationId xmlns:a16="http://schemas.microsoft.com/office/drawing/2014/main" id="{9486BEC5-DD0E-4949-A702-921F84F972B6}"/>
+                <a16:creationId xmlns:a16="http://schemas.microsoft.com/office/drawing/2014/main" id="{1ECC40C0-5A11-4EE8-903D-6640A28B57DE}"/>
               </a:ext>
             </a:extLst>
           </p:cNvPr>
@@ -10087,7 +13036,7 @@
           <p:cNvPr id="12" name="">
             <a:extLst xmlns:a="http://schemas.openxmlformats.org/drawingml/2006/main">
               <a:ext uri="{FF2B5EF4-FFF2-40B4-BE49-F238E27FC236}">
-                <a16:creationId xmlns:a16="http://schemas.microsoft.com/office/drawing/2014/main" id="{4F8BA426-5726-46E5-8C4C-CA41B70E1820}"/>
+                <a16:creationId xmlns:a16="http://schemas.microsoft.com/office/drawing/2014/main" id="{F2268646-A00A-4992-BD04-9E3645E84731}"/>
               </a:ext>
             </a:extLst>
           </p:cNvPr>
@@ -10137,7 +13086,7 @@
           <p:cNvPr id="13" name="">
             <a:extLst xmlns:a="http://schemas.openxmlformats.org/drawingml/2006/main">
               <a:ext uri="{FF2B5EF4-FFF2-40B4-BE49-F238E27FC236}">
-                <a16:creationId xmlns:a16="http://schemas.microsoft.com/office/drawing/2014/main" id="{DB9AF9CD-9A16-4158-86CA-12894FA56A59}"/>
+                <a16:creationId xmlns:a16="http://schemas.microsoft.com/office/drawing/2014/main" id="{C6A1DDCE-CBAC-42B7-A646-AC78CDFC7D77}"/>
               </a:ext>
             </a:extLst>
           </p:cNvPr>
@@ -10168,7 +13117,7 @@
           <p:cNvPr id="14" name="">
             <a:extLst xmlns:a="http://schemas.openxmlformats.org/drawingml/2006/main">
               <a:ext uri="{FF2B5EF4-FFF2-40B4-BE49-F238E27FC236}">
-                <a16:creationId xmlns:a16="http://schemas.microsoft.com/office/drawing/2014/main" id="{8C93D43A-6947-4061-8ECA-19A99AC9582C}"/>
+                <a16:creationId xmlns:a16="http://schemas.microsoft.com/office/drawing/2014/main" id="{80CD4DE7-9EF7-4DCD-AF5D-2B880AFD02C5}"/>
               </a:ext>
             </a:extLst>
           </p:cNvPr>
@@ -10218,7 +13167,7 @@
           <p:cNvPr id="15" name="">
             <a:extLst xmlns:a="http://schemas.openxmlformats.org/drawingml/2006/main">
               <a:ext uri="{FF2B5EF4-FFF2-40B4-BE49-F238E27FC236}">
-                <a16:creationId xmlns:a16="http://schemas.microsoft.com/office/drawing/2014/main" id="{853B3BF0-EA8C-49F7-80A4-EB6AFB42FB92}"/>
+                <a16:creationId xmlns:a16="http://schemas.microsoft.com/office/drawing/2014/main" id="{39B6AF1F-3798-41BC-9ED3-D715D81BD9F9}"/>
               </a:ext>
             </a:extLst>
           </p:cNvPr>
@@ -10249,7 +13198,7 @@
           <p:cNvPr id="16" name="">
             <a:extLst xmlns:a="http://schemas.openxmlformats.org/drawingml/2006/main">
               <a:ext uri="{FF2B5EF4-FFF2-40B4-BE49-F238E27FC236}">
-                <a16:creationId xmlns:a16="http://schemas.microsoft.com/office/drawing/2014/main" id="{18C67C4E-3707-417B-9F6A-801A7862E26E}"/>
+                <a16:creationId xmlns:a16="http://schemas.microsoft.com/office/drawing/2014/main" id="{1A620B9E-4068-4BE7-A32A-0280D0FAE5E0}"/>
               </a:ext>
             </a:extLst>
           </p:cNvPr>
@@ -10299,7 +13248,7 @@
           <p:cNvPr id="17" name="">
             <a:extLst xmlns:a="http://schemas.openxmlformats.org/drawingml/2006/main">
               <a:ext uri="{FF2B5EF4-FFF2-40B4-BE49-F238E27FC236}">
-                <a16:creationId xmlns:a16="http://schemas.microsoft.com/office/drawing/2014/main" id="{DCFED356-48FB-4F2D-B6A7-74ABAED81F28}"/>
+                <a16:creationId xmlns:a16="http://schemas.microsoft.com/office/drawing/2014/main" id="{6D3FE26B-8FC4-4988-B039-08DF9F63AD23}"/>
               </a:ext>
             </a:extLst>
           </p:cNvPr>
@@ -10347,7 +13296,7 @@
     </p:spTree>
     <p:extLst>
       <p:ext uri="{BB962C8B-B14F-4D97-AF65-F5344CB8AC3E}">
-        <p14:creationId xmlns:p14="http://schemas.microsoft.com/office/powerpoint/2010/main" val="2029024405"/>
+        <p14:creationId xmlns:p14="http://schemas.microsoft.com/office/powerpoint/2010/main" val="249256092"/>
       </p:ext>
     </p:extLst>
   </p:cSld>

--- a/presentations/gen5_3_bull_momentum_specialist_plan.pptx
+++ b/presentations/gen5_3_bull_momentum_specialist_plan.pptx
@@ -2,25 +2,26 @@
 <file path=ppt/presentation.xml><?xml version="1.0" encoding="utf-8"?>
 <p:presentation xmlns:p="http://schemas.openxmlformats.org/presentationml/2006/main">
   <p:sldMasterIdLst>
-    <p:sldMasterId xmlns:r="http://schemas.openxmlformats.org/officeDocument/2006/relationships" id="2147483648" r:id="Rffc1a028262e4739"/>
+    <p:sldMasterId xmlns:r="http://schemas.openxmlformats.org/officeDocument/2006/relationships" id="2147483648" r:id="Raa45211ec0ff4887"/>
   </p:sldMasterIdLst>
   <p:notesMasterIdLst>
-    <p:notesMasterId xmlns:r="http://schemas.openxmlformats.org/officeDocument/2006/relationships" r:id="Re5715b932fd345ed"/>
+    <p:notesMasterId xmlns:r="http://schemas.openxmlformats.org/officeDocument/2006/relationships" r:id="Reef466d9dcfa4e89"/>
   </p:notesMasterIdLst>
   <p:sldIdLst>
-    <p:sldId xmlns:r="http://schemas.openxmlformats.org/officeDocument/2006/relationships" id="256" r:id="Rf1bb3d7fb46c447c"/>
-    <p:sldId xmlns:r="http://schemas.openxmlformats.org/officeDocument/2006/relationships" id="257" r:id="R88a8ef7417ba4719"/>
-    <p:sldId xmlns:r="http://schemas.openxmlformats.org/officeDocument/2006/relationships" id="258" r:id="R6f6780d49d6f4419"/>
-    <p:sldId xmlns:r="http://schemas.openxmlformats.org/officeDocument/2006/relationships" id="259" r:id="R93af5d5a86d24e96"/>
-    <p:sldId xmlns:r="http://schemas.openxmlformats.org/officeDocument/2006/relationships" id="260" r:id="R684b6c2954884bc8"/>
-    <p:sldId xmlns:r="http://schemas.openxmlformats.org/officeDocument/2006/relationships" id="261" r:id="R8a05b78f19694027"/>
-    <p:sldId xmlns:r="http://schemas.openxmlformats.org/officeDocument/2006/relationships" id="262" r:id="R8073d5dd73ab41b8"/>
-    <p:sldId xmlns:r="http://schemas.openxmlformats.org/officeDocument/2006/relationships" id="263" r:id="R1491b24603014c2b"/>
-    <p:sldId xmlns:r="http://schemas.openxmlformats.org/officeDocument/2006/relationships" id="264" r:id="R16b1a4373991483b"/>
-    <p:sldId xmlns:r="http://schemas.openxmlformats.org/officeDocument/2006/relationships" id="265" r:id="Ra7d3c940f4d6418d"/>
-    <p:sldId xmlns:r="http://schemas.openxmlformats.org/officeDocument/2006/relationships" id="266" r:id="R319079a09bab4c78"/>
-    <p:sldId xmlns:r="http://schemas.openxmlformats.org/officeDocument/2006/relationships" id="267" r:id="R14ac2b761943420d"/>
-    <p:sldId xmlns:r="http://schemas.openxmlformats.org/officeDocument/2006/relationships" id="268" r:id="R38acd66fbbad4d66"/>
+    <p:sldId xmlns:r="http://schemas.openxmlformats.org/officeDocument/2006/relationships" id="256" r:id="Rb3c30fb8852c4220"/>
+    <p:sldId xmlns:r="http://schemas.openxmlformats.org/officeDocument/2006/relationships" id="257" r:id="Rc706546d613c48a2"/>
+    <p:sldId xmlns:r="http://schemas.openxmlformats.org/officeDocument/2006/relationships" id="258" r:id="R74eb1b3da3984f7a"/>
+    <p:sldId xmlns:r="http://schemas.openxmlformats.org/officeDocument/2006/relationships" id="259" r:id="R05e1e9f00d1940c2"/>
+    <p:sldId xmlns:r="http://schemas.openxmlformats.org/officeDocument/2006/relationships" id="260" r:id="R2b29d76b352e42b3"/>
+    <p:sldId xmlns:r="http://schemas.openxmlformats.org/officeDocument/2006/relationships" id="261" r:id="Rbc4a5ad60a984fb0"/>
+    <p:sldId xmlns:r="http://schemas.openxmlformats.org/officeDocument/2006/relationships" id="262" r:id="Rd74302f855894819"/>
+    <p:sldId xmlns:r="http://schemas.openxmlformats.org/officeDocument/2006/relationships" id="263" r:id="R61570a3bb4194786"/>
+    <p:sldId xmlns:r="http://schemas.openxmlformats.org/officeDocument/2006/relationships" id="264" r:id="Rd48d3ce50e4f4b52"/>
+    <p:sldId xmlns:r="http://schemas.openxmlformats.org/officeDocument/2006/relationships" id="265" r:id="R0d3e502721fb46f5"/>
+    <p:sldId xmlns:r="http://schemas.openxmlformats.org/officeDocument/2006/relationships" id="266" r:id="R5bfe041ab62f409b"/>
+    <p:sldId xmlns:r="http://schemas.openxmlformats.org/officeDocument/2006/relationships" id="267" r:id="R2b782f655cc94610"/>
+    <p:sldId xmlns:r="http://schemas.openxmlformats.org/officeDocument/2006/relationships" id="268" r:id="Rd4617074c7834014"/>
+    <p:sldId xmlns:r="http://schemas.openxmlformats.org/officeDocument/2006/relationships" id="269" r:id="R60b5437a28c24c45"/>
   </p:sldIdLst>
   <p:sldSz cx="12192000" cy="6858000"/>
   <p:notesSz cx="6858000" cy="9144000"/>
@@ -839,6 +840,72 @@
 </p:notes>
 </file>
 
+<file path=ppt/notesSlides/notesSlide14.xml><?xml version="1.0" encoding="utf-8"?>
+<p:notes xmlns:p="http://schemas.openxmlformats.org/presentationml/2006/main">
+  <p:cSld>
+    <p:spTree>
+      <p:nvGrpSpPr>
+        <p:cNvPr id="1" name=""/>
+        <p:cNvGrpSpPr/>
+        <p:nvPr/>
+      </p:nvGrpSpPr>
+      <p:grpSpPr>
+        <a:xfrm xmlns:a="http://schemas.openxmlformats.org/drawingml/2006/main"/>
+      </p:grpSpPr>
+      <p:sp>
+        <p:nvSpPr>
+          <p:cNvPr id="2" name="Slide Image Placeholder 1"/>
+          <p:cNvSpPr>
+            <a:spLocks xmlns:a="http://schemas.openxmlformats.org/drawingml/2006/main" noGrp="1"/>
+          </p:cNvSpPr>
+          <p:nvPr>
+            <p:ph type="sldImg" idx="0"/>
+          </p:nvPr>
+        </p:nvSpPr>
+        <p:spPr/>
+      </p:sp>
+      <p:sp>
+        <p:nvSpPr>
+          <p:cNvPr id="3" name="Notes Placeholder 2"/>
+          <p:cNvSpPr>
+            <a:spLocks xmlns:a="http://schemas.openxmlformats.org/drawingml/2006/main" noGrp="1"/>
+          </p:cNvSpPr>
+          <p:nvPr>
+            <p:ph type="body" idx="1"/>
+          </p:nvPr>
+        </p:nvSpPr>
+        <p:spPr/>
+        <p:txBody>
+          <a:bodyPr xmlns:a="http://schemas.openxmlformats.org/drawingml/2006/main"/>
+          <a:lstStyle xmlns:a="http://schemas.openxmlformats.org/drawingml/2006/main"/>
+          <a:p xmlns:a="http://schemas.openxmlformats.org/drawingml/2006/main"/>
+        </p:txBody>
+      </p:sp>
+      <p:sp>
+        <p:nvSpPr>
+          <p:cNvPr id="4" name="Slide Number Placeholder 3"/>
+          <p:cNvSpPr>
+            <a:spLocks xmlns:a="http://schemas.openxmlformats.org/drawingml/2006/main" noGrp="1"/>
+          </p:cNvSpPr>
+          <p:nvPr>
+            <p:ph type="sldNum" idx="5"/>
+          </p:nvPr>
+        </p:nvSpPr>
+        <p:spPr/>
+        <p:txBody>
+          <a:bodyPr xmlns:a="http://schemas.openxmlformats.org/drawingml/2006/main"/>
+          <a:lstStyle xmlns:a="http://schemas.openxmlformats.org/drawingml/2006/main"/>
+          <a:p xmlns:a="http://schemas.openxmlformats.org/drawingml/2006/main"/>
+        </p:txBody>
+      </p:sp>
+    </p:spTree>
+  </p:cSld>
+  <p:clrMapOvr>
+    <a:masterClrMapping xmlns:a="http://schemas.openxmlformats.org/drawingml/2006/main"/>
+  </p:clrMapOvr>
+</p:notes>
+</file>
+
 <file path=ppt/notesSlides/notesSlide2.xml><?xml version="1.0" encoding="utf-8"?>
 <p:notes xmlns:p="http://schemas.openxmlformats.org/presentationml/2006/main">
   <p:cSld>
@@ -1405,7 +1472,7 @@
   </p:cSld>
   <p:clrMap bg1="lt1" tx1="dk1" bg2="lt2" tx2="dk2" accent1="accent1" accent2="accent2" accent3="accent3" accent4="accent4" accent5="accent5" accent6="accent6" hlink="hlink" folHlink="folHlink"/>
   <p:sldLayoutIdLst>
-    <p:sldLayoutId xmlns:r="http://schemas.openxmlformats.org/officeDocument/2006/relationships" id="2147483649" r:id="R240ed903c0b34d75"/>
+    <p:sldLayoutId xmlns:r="http://schemas.openxmlformats.org/officeDocument/2006/relationships" id="2147483649" r:id="R667a5a0485454720"/>
   </p:sldLayoutIdLst>
   <p:txStyles>
     <p:titleStyle>
@@ -1956,7 +2023,7 @@
           <p:cNvPr id="1" name="">
             <a:extLst xmlns:a="http://schemas.openxmlformats.org/drawingml/2006/main">
               <a:ext uri="{FF2B5EF4-FFF2-40B4-BE49-F238E27FC236}">
-                <a16:creationId xmlns:a16="http://schemas.microsoft.com/office/drawing/2014/main" id="{2BFEAC4A-957D-4A47-95DB-6A56AC60EAAF}"/>
+                <a16:creationId xmlns:a16="http://schemas.microsoft.com/office/drawing/2014/main" id="{657000B1-E6FC-4252-A977-DC7F313FA1C1}"/>
               </a:ext>
             </a:extLst>
           </p:cNvPr>
@@ -2006,7 +2073,7 @@
           <p:cNvPr id="2" name="">
             <a:extLst xmlns:a="http://schemas.openxmlformats.org/drawingml/2006/main">
               <a:ext uri="{FF2B5EF4-FFF2-40B4-BE49-F238E27FC236}">
-                <a16:creationId xmlns:a16="http://schemas.microsoft.com/office/drawing/2014/main" id="{92F76554-9CF5-46F4-B0B1-F6945E83BBFE}"/>
+                <a16:creationId xmlns:a16="http://schemas.microsoft.com/office/drawing/2014/main" id="{59D99581-2A1C-4D0C-8672-C961667688C0}"/>
               </a:ext>
             </a:extLst>
           </p:cNvPr>
@@ -2056,7 +2123,7 @@
           <p:cNvPr id="3" name="">
             <a:extLst xmlns:a="http://schemas.openxmlformats.org/drawingml/2006/main">
               <a:ext uri="{FF2B5EF4-FFF2-40B4-BE49-F238E27FC236}">
-                <a16:creationId xmlns:a16="http://schemas.microsoft.com/office/drawing/2014/main" id="{ED232ACF-A13F-4192-9AD8-C30CE7E378EC}"/>
+                <a16:creationId xmlns:a16="http://schemas.microsoft.com/office/drawing/2014/main" id="{D038FDC5-C479-49A3-8117-0EA5AC58C002}"/>
               </a:ext>
             </a:extLst>
           </p:cNvPr>
@@ -2106,7 +2173,7 @@
           <p:cNvPr id="4" name="">
             <a:extLst xmlns:a="http://schemas.openxmlformats.org/drawingml/2006/main">
               <a:ext uri="{FF2B5EF4-FFF2-40B4-BE49-F238E27FC236}">
-                <a16:creationId xmlns:a16="http://schemas.microsoft.com/office/drawing/2014/main" id="{B2B9F2DA-D573-4559-9FFF-47C11C7D0AA4}"/>
+                <a16:creationId xmlns:a16="http://schemas.microsoft.com/office/drawing/2014/main" id="{FD4403A8-37E3-4075-B560-E67617793979}"/>
               </a:ext>
             </a:extLst>
           </p:cNvPr>
@@ -2141,7 +2208,7 @@
           <p:cNvPr id="5" name="">
             <a:extLst xmlns:a="http://schemas.openxmlformats.org/drawingml/2006/main">
               <a:ext uri="{FF2B5EF4-FFF2-40B4-BE49-F238E27FC236}">
-                <a16:creationId xmlns:a16="http://schemas.microsoft.com/office/drawing/2014/main" id="{376A605F-C51F-4C6C-B7F6-97CD7934731B}"/>
+                <a16:creationId xmlns:a16="http://schemas.microsoft.com/office/drawing/2014/main" id="{BEB18E2C-609A-485D-8693-32FD01A06CB9}"/>
               </a:ext>
             </a:extLst>
           </p:cNvPr>
@@ -2191,7 +2258,7 @@
           <p:cNvPr id="6" name="">
             <a:extLst xmlns:a="http://schemas.openxmlformats.org/drawingml/2006/main">
               <a:ext uri="{FF2B5EF4-FFF2-40B4-BE49-F238E27FC236}">
-                <a16:creationId xmlns:a16="http://schemas.microsoft.com/office/drawing/2014/main" id="{3FD3B4CB-0407-4782-8CAE-FDFCF65373BD}"/>
+                <a16:creationId xmlns:a16="http://schemas.microsoft.com/office/drawing/2014/main" id="{CB59A9B9-23AF-4332-AA42-E764F10ADBC5}"/>
               </a:ext>
             </a:extLst>
           </p:cNvPr>
@@ -2241,7 +2308,7 @@
           <p:cNvPr id="7" name="">
             <a:extLst xmlns:a="http://schemas.openxmlformats.org/drawingml/2006/main">
               <a:ext uri="{FF2B5EF4-FFF2-40B4-BE49-F238E27FC236}">
-                <a16:creationId xmlns:a16="http://schemas.microsoft.com/office/drawing/2014/main" id="{A3BAA75E-F23C-4F30-B972-C2A1265B5C1B}"/>
+                <a16:creationId xmlns:a16="http://schemas.microsoft.com/office/drawing/2014/main" id="{E3C6C031-6524-428F-822B-BF3AEDA203DE}"/>
               </a:ext>
             </a:extLst>
           </p:cNvPr>
@@ -2289,7 +2356,7 @@
     </p:spTree>
     <p:extLst>
       <p:ext uri="{BB962C8B-B14F-4D97-AF65-F5344CB8AC3E}">
-        <p14:creationId xmlns:p14="http://schemas.microsoft.com/office/powerpoint/2010/main" val="563850745"/>
+        <p14:creationId xmlns:p14="http://schemas.microsoft.com/office/powerpoint/2010/main" val="355922960"/>
       </p:ext>
     </p:extLst>
   </p:cSld>
@@ -2320,7 +2387,7 @@
           <p:cNvPr id="1" name="">
             <a:extLst xmlns:a="http://schemas.openxmlformats.org/drawingml/2006/main">
               <a:ext uri="{FF2B5EF4-FFF2-40B4-BE49-F238E27FC236}">
-                <a16:creationId xmlns:a16="http://schemas.microsoft.com/office/drawing/2014/main" id="{23FC7A45-F790-4641-956E-1021CB3C1B51}"/>
+                <a16:creationId xmlns:a16="http://schemas.microsoft.com/office/drawing/2014/main" id="{D0F9134A-B2C0-4660-8A56-79B3ACB4A704}"/>
               </a:ext>
             </a:extLst>
           </p:cNvPr>
@@ -2370,7 +2437,7 @@
           <p:cNvPr id="2" name="">
             <a:extLst xmlns:a="http://schemas.openxmlformats.org/drawingml/2006/main">
               <a:ext uri="{FF2B5EF4-FFF2-40B4-BE49-F238E27FC236}">
-                <a16:creationId xmlns:a16="http://schemas.microsoft.com/office/drawing/2014/main" id="{29A9BC32-4796-4D97-AE25-5A65F73F16C3}"/>
+                <a16:creationId xmlns:a16="http://schemas.microsoft.com/office/drawing/2014/main" id="{CAB2261E-2117-442A-AB03-1E7B2F6BE58B}"/>
               </a:ext>
             </a:extLst>
           </p:cNvPr>
@@ -2420,7 +2487,7 @@
           <p:cNvPr id="3" name="">
             <a:extLst xmlns:a="http://schemas.openxmlformats.org/drawingml/2006/main">
               <a:ext uri="{FF2B5EF4-FFF2-40B4-BE49-F238E27FC236}">
-                <a16:creationId xmlns:a16="http://schemas.microsoft.com/office/drawing/2014/main" id="{E24DE787-D63A-4D71-8268-0A833CBE4F2B}"/>
+                <a16:creationId xmlns:a16="http://schemas.microsoft.com/office/drawing/2014/main" id="{2B693E31-E2D4-4A38-83B0-B6CC1242AA6B}"/>
               </a:ext>
             </a:extLst>
           </p:cNvPr>
@@ -2453,7 +2520,7 @@
           <p:cNvPr id="4" name="">
             <a:extLst xmlns:a="http://schemas.openxmlformats.org/drawingml/2006/main">
               <a:ext uri="{FF2B5EF4-FFF2-40B4-BE49-F238E27FC236}">
-                <a16:creationId xmlns:a16="http://schemas.microsoft.com/office/drawing/2014/main" id="{88341BA6-A0C7-4389-A348-0EDE8444AF55}"/>
+                <a16:creationId xmlns:a16="http://schemas.microsoft.com/office/drawing/2014/main" id="{21144CBD-EC85-47A2-A2DA-BFC5B46649F4}"/>
               </a:ext>
             </a:extLst>
           </p:cNvPr>
@@ -2488,7 +2555,7 @@
           <p:cNvPr id="5" name="">
             <a:extLst xmlns:a="http://schemas.openxmlformats.org/drawingml/2006/main">
               <a:ext uri="{FF2B5EF4-FFF2-40B4-BE49-F238E27FC236}">
-                <a16:creationId xmlns:a16="http://schemas.microsoft.com/office/drawing/2014/main" id="{946ECB9C-7386-4FAC-8147-EE10B7234CF0}"/>
+                <a16:creationId xmlns:a16="http://schemas.microsoft.com/office/drawing/2014/main" id="{F595C2AB-622C-46DA-92E0-E4824F8BA3E4}"/>
               </a:ext>
             </a:extLst>
           </p:cNvPr>
@@ -2538,7 +2605,7 @@
           <p:cNvPr id="6" name="">
             <a:extLst xmlns:a="http://schemas.openxmlformats.org/drawingml/2006/main">
               <a:ext uri="{FF2B5EF4-FFF2-40B4-BE49-F238E27FC236}">
-                <a16:creationId xmlns:a16="http://schemas.microsoft.com/office/drawing/2014/main" id="{C48F1386-E841-49EF-A08F-F88963D64767}"/>
+                <a16:creationId xmlns:a16="http://schemas.microsoft.com/office/drawing/2014/main" id="{C1B67922-11D4-457B-8C19-6152474089B2}"/>
               </a:ext>
             </a:extLst>
           </p:cNvPr>
@@ -2569,7 +2636,7 @@
           <p:cNvPr id="7" name="">
             <a:extLst xmlns:a="http://schemas.openxmlformats.org/drawingml/2006/main">
               <a:ext uri="{FF2B5EF4-FFF2-40B4-BE49-F238E27FC236}">
-                <a16:creationId xmlns:a16="http://schemas.microsoft.com/office/drawing/2014/main" id="{CEF94EC5-F88D-419C-8787-27A92ECAA2B2}"/>
+                <a16:creationId xmlns:a16="http://schemas.microsoft.com/office/drawing/2014/main" id="{04441526-D86A-4809-9451-5CD076450C1E}"/>
               </a:ext>
             </a:extLst>
           </p:cNvPr>
@@ -2619,7 +2686,7 @@
           <p:cNvPr id="8" name="">
             <a:extLst xmlns:a="http://schemas.openxmlformats.org/drawingml/2006/main">
               <a:ext uri="{FF2B5EF4-FFF2-40B4-BE49-F238E27FC236}">
-                <a16:creationId xmlns:a16="http://schemas.microsoft.com/office/drawing/2014/main" id="{D3ABC21C-1006-4A43-B782-46DF7D13F5E6}"/>
+                <a16:creationId xmlns:a16="http://schemas.microsoft.com/office/drawing/2014/main" id="{03134629-D0A3-4212-A7E2-CF785CA47556}"/>
               </a:ext>
             </a:extLst>
           </p:cNvPr>
@@ -2650,7 +2717,7 @@
           <p:cNvPr id="9" name="">
             <a:extLst xmlns:a="http://schemas.openxmlformats.org/drawingml/2006/main">
               <a:ext uri="{FF2B5EF4-FFF2-40B4-BE49-F238E27FC236}">
-                <a16:creationId xmlns:a16="http://schemas.microsoft.com/office/drawing/2014/main" id="{226EE91E-4877-4D4A-A319-37CFDBA3F934}"/>
+                <a16:creationId xmlns:a16="http://schemas.microsoft.com/office/drawing/2014/main" id="{312F420F-C7D7-4706-83C8-19BB37C00EE1}"/>
               </a:ext>
             </a:extLst>
           </p:cNvPr>
@@ -2700,7 +2767,7 @@
           <p:cNvPr id="10" name="">
             <a:extLst xmlns:a="http://schemas.openxmlformats.org/drawingml/2006/main">
               <a:ext uri="{FF2B5EF4-FFF2-40B4-BE49-F238E27FC236}">
-                <a16:creationId xmlns:a16="http://schemas.microsoft.com/office/drawing/2014/main" id="{AB940544-8A0A-4C1A-A2D3-56112916A610}"/>
+                <a16:creationId xmlns:a16="http://schemas.microsoft.com/office/drawing/2014/main" id="{F7C8F83F-E7A5-429A-BD1F-91A8A04286ED}"/>
               </a:ext>
             </a:extLst>
           </p:cNvPr>
@@ -2731,7 +2798,7 @@
           <p:cNvPr id="11" name="">
             <a:extLst xmlns:a="http://schemas.openxmlformats.org/drawingml/2006/main">
               <a:ext uri="{FF2B5EF4-FFF2-40B4-BE49-F238E27FC236}">
-                <a16:creationId xmlns:a16="http://schemas.microsoft.com/office/drawing/2014/main" id="{86CA11B9-23ED-4EA7-A27E-52D9F1B4D7B0}"/>
+                <a16:creationId xmlns:a16="http://schemas.microsoft.com/office/drawing/2014/main" id="{B10F79D4-6C0B-4F0A-A538-6D3A15CD359D}"/>
               </a:ext>
             </a:extLst>
           </p:cNvPr>
@@ -2781,7 +2848,7 @@
           <p:cNvPr id="12" name="">
             <a:extLst xmlns:a="http://schemas.openxmlformats.org/drawingml/2006/main">
               <a:ext uri="{FF2B5EF4-FFF2-40B4-BE49-F238E27FC236}">
-                <a16:creationId xmlns:a16="http://schemas.microsoft.com/office/drawing/2014/main" id="{618126D9-1435-48C4-99F2-63BC7F47CB9D}"/>
+                <a16:creationId xmlns:a16="http://schemas.microsoft.com/office/drawing/2014/main" id="{EBB49F8B-0263-490F-9D44-C6335DF435D3}"/>
               </a:ext>
             </a:extLst>
           </p:cNvPr>
@@ -2812,7 +2879,7 @@
           <p:cNvPr id="13" name="">
             <a:extLst xmlns:a="http://schemas.openxmlformats.org/drawingml/2006/main">
               <a:ext uri="{FF2B5EF4-FFF2-40B4-BE49-F238E27FC236}">
-                <a16:creationId xmlns:a16="http://schemas.microsoft.com/office/drawing/2014/main" id="{3AEBBC96-9B67-4488-8414-423F59D7463D}"/>
+                <a16:creationId xmlns:a16="http://schemas.microsoft.com/office/drawing/2014/main" id="{3ED7936D-AA14-42E4-B363-8217A4AE3BE0}"/>
               </a:ext>
             </a:extLst>
           </p:cNvPr>
@@ -2862,7 +2929,7 @@
           <p:cNvPr id="14" name="">
             <a:extLst xmlns:a="http://schemas.openxmlformats.org/drawingml/2006/main">
               <a:ext uri="{FF2B5EF4-FFF2-40B4-BE49-F238E27FC236}">
-                <a16:creationId xmlns:a16="http://schemas.microsoft.com/office/drawing/2014/main" id="{6F48D719-5AF5-42F6-8F17-11DA2E7ED6B8}"/>
+                <a16:creationId xmlns:a16="http://schemas.microsoft.com/office/drawing/2014/main" id="{BA0AC52F-13E8-4CBF-BA34-5B912240680A}"/>
               </a:ext>
             </a:extLst>
           </p:cNvPr>
@@ -2893,7 +2960,7 @@
           <p:cNvPr id="15" name="">
             <a:extLst xmlns:a="http://schemas.openxmlformats.org/drawingml/2006/main">
               <a:ext uri="{FF2B5EF4-FFF2-40B4-BE49-F238E27FC236}">
-                <a16:creationId xmlns:a16="http://schemas.microsoft.com/office/drawing/2014/main" id="{6EF81309-8F0C-412D-8A67-C6DB5089B12E}"/>
+                <a16:creationId xmlns:a16="http://schemas.microsoft.com/office/drawing/2014/main" id="{2DE07A93-3118-4255-ACD3-4166B8A118A1}"/>
               </a:ext>
             </a:extLst>
           </p:cNvPr>
@@ -2943,7 +3010,7 @@
           <p:cNvPr id="16" name="">
             <a:extLst xmlns:a="http://schemas.openxmlformats.org/drawingml/2006/main">
               <a:ext uri="{FF2B5EF4-FFF2-40B4-BE49-F238E27FC236}">
-                <a16:creationId xmlns:a16="http://schemas.microsoft.com/office/drawing/2014/main" id="{79B06206-3877-438C-B4D1-926C5A9916CA}"/>
+                <a16:creationId xmlns:a16="http://schemas.microsoft.com/office/drawing/2014/main" id="{73B03C8B-C1AE-4FC6-8724-20B9C7B7F543}"/>
               </a:ext>
             </a:extLst>
           </p:cNvPr>
@@ -2978,7 +3045,7 @@
           <p:cNvPr id="17" name="">
             <a:extLst xmlns:a="http://schemas.openxmlformats.org/drawingml/2006/main">
               <a:ext uri="{FF2B5EF4-FFF2-40B4-BE49-F238E27FC236}">
-                <a16:creationId xmlns:a16="http://schemas.microsoft.com/office/drawing/2014/main" id="{D4666629-F56D-4D53-AB7E-44ECB1F297AD}"/>
+                <a16:creationId xmlns:a16="http://schemas.microsoft.com/office/drawing/2014/main" id="{AC296602-EB28-49F0-9F0C-B3975742C4AE}"/>
               </a:ext>
             </a:extLst>
           </p:cNvPr>
@@ -3028,7 +3095,7 @@
           <p:cNvPr id="18" name="">
             <a:extLst xmlns:a="http://schemas.openxmlformats.org/drawingml/2006/main">
               <a:ext uri="{FF2B5EF4-FFF2-40B4-BE49-F238E27FC236}">
-                <a16:creationId xmlns:a16="http://schemas.microsoft.com/office/drawing/2014/main" id="{E20C6ADF-34D4-49F1-BCDF-3AFCDD95D209}"/>
+                <a16:creationId xmlns:a16="http://schemas.microsoft.com/office/drawing/2014/main" id="{A403CE8B-F00B-42EF-AABB-910B047ADE61}"/>
               </a:ext>
             </a:extLst>
           </p:cNvPr>
@@ -3059,7 +3126,7 @@
           <p:cNvPr id="19" name="">
             <a:extLst xmlns:a="http://schemas.openxmlformats.org/drawingml/2006/main">
               <a:ext uri="{FF2B5EF4-FFF2-40B4-BE49-F238E27FC236}">
-                <a16:creationId xmlns:a16="http://schemas.microsoft.com/office/drawing/2014/main" id="{7CC1659A-0079-400B-9CDD-D13683EE02CA}"/>
+                <a16:creationId xmlns:a16="http://schemas.microsoft.com/office/drawing/2014/main" id="{919247C3-DD73-4B51-A8C3-7094ADA2EE79}"/>
               </a:ext>
             </a:extLst>
           </p:cNvPr>
@@ -3109,7 +3176,7 @@
           <p:cNvPr id="20" name="">
             <a:extLst xmlns:a="http://schemas.openxmlformats.org/drawingml/2006/main">
               <a:ext uri="{FF2B5EF4-FFF2-40B4-BE49-F238E27FC236}">
-                <a16:creationId xmlns:a16="http://schemas.microsoft.com/office/drawing/2014/main" id="{6F37CB97-20AC-400D-AF2D-3AB96B633B85}"/>
+                <a16:creationId xmlns:a16="http://schemas.microsoft.com/office/drawing/2014/main" id="{1C7AFD57-0124-480C-B50D-A772EF90194A}"/>
               </a:ext>
             </a:extLst>
           </p:cNvPr>
@@ -3140,7 +3207,7 @@
           <p:cNvPr id="21" name="">
             <a:extLst xmlns:a="http://schemas.openxmlformats.org/drawingml/2006/main">
               <a:ext uri="{FF2B5EF4-FFF2-40B4-BE49-F238E27FC236}">
-                <a16:creationId xmlns:a16="http://schemas.microsoft.com/office/drawing/2014/main" id="{16BF09B5-2693-4564-B5CF-03A4D31DE5B2}"/>
+                <a16:creationId xmlns:a16="http://schemas.microsoft.com/office/drawing/2014/main" id="{F8FE5E65-0542-4DF5-809C-691E9EEAEB1A}"/>
               </a:ext>
             </a:extLst>
           </p:cNvPr>
@@ -3190,7 +3257,7 @@
           <p:cNvPr id="22" name="">
             <a:extLst xmlns:a="http://schemas.openxmlformats.org/drawingml/2006/main">
               <a:ext uri="{FF2B5EF4-FFF2-40B4-BE49-F238E27FC236}">
-                <a16:creationId xmlns:a16="http://schemas.microsoft.com/office/drawing/2014/main" id="{B92E38F8-E3EA-44F9-96D0-EE718C4C21F0}"/>
+                <a16:creationId xmlns:a16="http://schemas.microsoft.com/office/drawing/2014/main" id="{6329E18C-F325-4AAE-8C03-A5C32CB4C1A2}"/>
               </a:ext>
             </a:extLst>
           </p:cNvPr>
@@ -3221,7 +3288,7 @@
           <p:cNvPr id="23" name="">
             <a:extLst xmlns:a="http://schemas.openxmlformats.org/drawingml/2006/main">
               <a:ext uri="{FF2B5EF4-FFF2-40B4-BE49-F238E27FC236}">
-                <a16:creationId xmlns:a16="http://schemas.microsoft.com/office/drawing/2014/main" id="{E15FA4CF-E644-41F2-8418-05E4495488F2}"/>
+                <a16:creationId xmlns:a16="http://schemas.microsoft.com/office/drawing/2014/main" id="{20036279-6843-40A5-8BBE-E80C5687C76E}"/>
               </a:ext>
             </a:extLst>
           </p:cNvPr>
@@ -3271,7 +3338,7 @@
           <p:cNvPr id="24" name="">
             <a:extLst xmlns:a="http://schemas.openxmlformats.org/drawingml/2006/main">
               <a:ext uri="{FF2B5EF4-FFF2-40B4-BE49-F238E27FC236}">
-                <a16:creationId xmlns:a16="http://schemas.microsoft.com/office/drawing/2014/main" id="{977B37E7-8306-433D-B7C3-5E95DCFA8B8F}"/>
+                <a16:creationId xmlns:a16="http://schemas.microsoft.com/office/drawing/2014/main" id="{27A94E94-122B-428D-9750-10C59BA62880}"/>
               </a:ext>
             </a:extLst>
           </p:cNvPr>
@@ -3302,7 +3369,7 @@
           <p:cNvPr id="25" name="">
             <a:extLst xmlns:a="http://schemas.openxmlformats.org/drawingml/2006/main">
               <a:ext uri="{FF2B5EF4-FFF2-40B4-BE49-F238E27FC236}">
-                <a16:creationId xmlns:a16="http://schemas.microsoft.com/office/drawing/2014/main" id="{6C877C2E-399A-4358-91A6-A325F9805CE5}"/>
+                <a16:creationId xmlns:a16="http://schemas.microsoft.com/office/drawing/2014/main" id="{5A44AA0E-A1F1-4A0C-A3A1-B87CD2260468}"/>
               </a:ext>
             </a:extLst>
           </p:cNvPr>
@@ -3350,7 +3417,7 @@
     </p:spTree>
     <p:extLst>
       <p:ext uri="{BB962C8B-B14F-4D97-AF65-F5344CB8AC3E}">
-        <p14:creationId xmlns:p14="http://schemas.microsoft.com/office/powerpoint/2010/main" val="1282990229"/>
+        <p14:creationId xmlns:p14="http://schemas.microsoft.com/office/powerpoint/2010/main" val="1396399350"/>
       </p:ext>
     </p:extLst>
   </p:cSld>
@@ -3381,7 +3448,7 @@
           <p:cNvPr id="1" name="">
             <a:extLst xmlns:a="http://schemas.openxmlformats.org/drawingml/2006/main">
               <a:ext uri="{FF2B5EF4-FFF2-40B4-BE49-F238E27FC236}">
-                <a16:creationId xmlns:a16="http://schemas.microsoft.com/office/drawing/2014/main" id="{70CD79F7-CC52-4B5B-9E87-16A329432F58}"/>
+                <a16:creationId xmlns:a16="http://schemas.microsoft.com/office/drawing/2014/main" id="{249F7537-583E-4CDE-80E2-8B33C29FC1AD}"/>
               </a:ext>
             </a:extLst>
           </p:cNvPr>
@@ -3431,7 +3498,7 @@
           <p:cNvPr id="2" name="">
             <a:extLst xmlns:a="http://schemas.openxmlformats.org/drawingml/2006/main">
               <a:ext uri="{FF2B5EF4-FFF2-40B4-BE49-F238E27FC236}">
-                <a16:creationId xmlns:a16="http://schemas.microsoft.com/office/drawing/2014/main" id="{84C4786C-A965-468D-98B5-1E1DC94F5841}"/>
+                <a16:creationId xmlns:a16="http://schemas.microsoft.com/office/drawing/2014/main" id="{E6D2230D-2AF8-44DC-AE47-C9E67A7D6610}"/>
               </a:ext>
             </a:extLst>
           </p:cNvPr>
@@ -3481,7 +3548,7 @@
           <p:cNvPr id="3" name="">
             <a:extLst xmlns:a="http://schemas.openxmlformats.org/drawingml/2006/main">
               <a:ext uri="{FF2B5EF4-FFF2-40B4-BE49-F238E27FC236}">
-                <a16:creationId xmlns:a16="http://schemas.microsoft.com/office/drawing/2014/main" id="{14F1C752-0696-46AC-A71B-53B41F53F791}"/>
+                <a16:creationId xmlns:a16="http://schemas.microsoft.com/office/drawing/2014/main" id="{B437C5AE-8CC7-466A-9A5F-019174F60E37}"/>
               </a:ext>
             </a:extLst>
           </p:cNvPr>
@@ -3514,7 +3581,7 @@
           <p:cNvPr id="4" name="">
             <a:extLst xmlns:a="http://schemas.openxmlformats.org/drawingml/2006/main">
               <a:ext uri="{FF2B5EF4-FFF2-40B4-BE49-F238E27FC236}">
-                <a16:creationId xmlns:a16="http://schemas.microsoft.com/office/drawing/2014/main" id="{68EE189A-3DFF-4A5E-B1DE-9358766A46DA}"/>
+                <a16:creationId xmlns:a16="http://schemas.microsoft.com/office/drawing/2014/main" id="{D967A81E-87DB-467D-BD99-B4C8875E13CE}"/>
               </a:ext>
             </a:extLst>
           </p:cNvPr>
@@ -3549,7 +3616,7 @@
           <p:cNvPr id="5" name="">
             <a:extLst xmlns:a="http://schemas.openxmlformats.org/drawingml/2006/main">
               <a:ext uri="{FF2B5EF4-FFF2-40B4-BE49-F238E27FC236}">
-                <a16:creationId xmlns:a16="http://schemas.microsoft.com/office/drawing/2014/main" id="{5D4838EE-EB96-4EEC-832C-583C99B959FF}"/>
+                <a16:creationId xmlns:a16="http://schemas.microsoft.com/office/drawing/2014/main" id="{EFF8B982-3B6C-409D-9108-92612075EAC0}"/>
               </a:ext>
             </a:extLst>
           </p:cNvPr>
@@ -3599,7 +3666,7 @@
           <p:cNvPr id="6" name="">
             <a:extLst xmlns:a="http://schemas.openxmlformats.org/drawingml/2006/main">
               <a:ext uri="{FF2B5EF4-FFF2-40B4-BE49-F238E27FC236}">
-                <a16:creationId xmlns:a16="http://schemas.microsoft.com/office/drawing/2014/main" id="{C41DBB9B-A087-47E9-B5A0-840B923BE7AE}"/>
+                <a16:creationId xmlns:a16="http://schemas.microsoft.com/office/drawing/2014/main" id="{29337049-1753-4E42-8858-C251CD0EBB27}"/>
               </a:ext>
             </a:extLst>
           </p:cNvPr>
@@ -3649,7 +3716,7 @@
           <p:cNvPr id="7" name="">
             <a:extLst xmlns:a="http://schemas.openxmlformats.org/drawingml/2006/main">
               <a:ext uri="{FF2B5EF4-FFF2-40B4-BE49-F238E27FC236}">
-                <a16:creationId xmlns:a16="http://schemas.microsoft.com/office/drawing/2014/main" id="{97F24DF0-767F-4E4F-ABF6-110329071EF9}"/>
+                <a16:creationId xmlns:a16="http://schemas.microsoft.com/office/drawing/2014/main" id="{8742C28A-98AF-406F-B8EF-E9109F1309AF}"/>
               </a:ext>
             </a:extLst>
           </p:cNvPr>
@@ -3684,7 +3751,7 @@
           <p:cNvPr id="8" name="">
             <a:extLst xmlns:a="http://schemas.openxmlformats.org/drawingml/2006/main">
               <a:ext uri="{FF2B5EF4-FFF2-40B4-BE49-F238E27FC236}">
-                <a16:creationId xmlns:a16="http://schemas.microsoft.com/office/drawing/2014/main" id="{6AC8CE07-F207-43E9-B447-C4675B480F28}"/>
+                <a16:creationId xmlns:a16="http://schemas.microsoft.com/office/drawing/2014/main" id="{6DEBF121-9DC3-45DD-BBEF-73683C84EFF6}"/>
               </a:ext>
             </a:extLst>
           </p:cNvPr>
@@ -3734,7 +3801,7 @@
           <p:cNvPr id="9" name="">
             <a:extLst xmlns:a="http://schemas.openxmlformats.org/drawingml/2006/main">
               <a:ext uri="{FF2B5EF4-FFF2-40B4-BE49-F238E27FC236}">
-                <a16:creationId xmlns:a16="http://schemas.microsoft.com/office/drawing/2014/main" id="{49A7CF44-E324-476F-B66F-A92273B710CC}"/>
+                <a16:creationId xmlns:a16="http://schemas.microsoft.com/office/drawing/2014/main" id="{90027C1D-F24C-49B7-B2F3-C1966ECE8949}"/>
               </a:ext>
             </a:extLst>
           </p:cNvPr>
@@ -3784,7 +3851,7 @@
           <p:cNvPr id="10" name="">
             <a:extLst xmlns:a="http://schemas.openxmlformats.org/drawingml/2006/main">
               <a:ext uri="{FF2B5EF4-FFF2-40B4-BE49-F238E27FC236}">
-                <a16:creationId xmlns:a16="http://schemas.microsoft.com/office/drawing/2014/main" id="{E50BBEF9-5B1D-4F04-862D-80266BD1D07F}"/>
+                <a16:creationId xmlns:a16="http://schemas.microsoft.com/office/drawing/2014/main" id="{77F4463B-7216-4906-9F65-EEC1047BA9F9}"/>
               </a:ext>
             </a:extLst>
           </p:cNvPr>
@@ -3819,7 +3886,7 @@
           <p:cNvPr id="11" name="">
             <a:extLst xmlns:a="http://schemas.openxmlformats.org/drawingml/2006/main">
               <a:ext uri="{FF2B5EF4-FFF2-40B4-BE49-F238E27FC236}">
-                <a16:creationId xmlns:a16="http://schemas.microsoft.com/office/drawing/2014/main" id="{62F08763-2A0D-4849-9048-B4E69D45C0A8}"/>
+                <a16:creationId xmlns:a16="http://schemas.microsoft.com/office/drawing/2014/main" id="{ACFDE75D-5577-43C0-AAFE-3C51CBDEF3F7}"/>
               </a:ext>
             </a:extLst>
           </p:cNvPr>
@@ -3869,7 +3936,7 @@
           <p:cNvPr id="12" name="">
             <a:extLst xmlns:a="http://schemas.openxmlformats.org/drawingml/2006/main">
               <a:ext uri="{FF2B5EF4-FFF2-40B4-BE49-F238E27FC236}">
-                <a16:creationId xmlns:a16="http://schemas.microsoft.com/office/drawing/2014/main" id="{DDD8C620-B4FD-4BE9-996B-09E6C1796601}"/>
+                <a16:creationId xmlns:a16="http://schemas.microsoft.com/office/drawing/2014/main" id="{D48D45ED-25A2-4A04-9CE6-E845AB67E81B}"/>
               </a:ext>
             </a:extLst>
           </p:cNvPr>
@@ -3919,7 +3986,7 @@
           <p:cNvPr id="13" name="">
             <a:extLst xmlns:a="http://schemas.openxmlformats.org/drawingml/2006/main">
               <a:ext uri="{FF2B5EF4-FFF2-40B4-BE49-F238E27FC236}">
-                <a16:creationId xmlns:a16="http://schemas.microsoft.com/office/drawing/2014/main" id="{315AA798-8273-420D-953D-0C81C2AC7EB6}"/>
+                <a16:creationId xmlns:a16="http://schemas.microsoft.com/office/drawing/2014/main" id="{B596AF4E-E30D-4A71-9D76-945AB50C484B}"/>
               </a:ext>
             </a:extLst>
           </p:cNvPr>
@@ -3954,7 +4021,7 @@
           <p:cNvPr id="14" name="">
             <a:extLst xmlns:a="http://schemas.openxmlformats.org/drawingml/2006/main">
               <a:ext uri="{FF2B5EF4-FFF2-40B4-BE49-F238E27FC236}">
-                <a16:creationId xmlns:a16="http://schemas.microsoft.com/office/drawing/2014/main" id="{EBBE8E46-A404-4138-A0C0-323D2D4C38B5}"/>
+                <a16:creationId xmlns:a16="http://schemas.microsoft.com/office/drawing/2014/main" id="{A813CF60-63DA-4664-BF1F-0CA2A4CAFED5}"/>
               </a:ext>
             </a:extLst>
           </p:cNvPr>
@@ -4004,7 +4071,7 @@
           <p:cNvPr id="15" name="">
             <a:extLst xmlns:a="http://schemas.openxmlformats.org/drawingml/2006/main">
               <a:ext uri="{FF2B5EF4-FFF2-40B4-BE49-F238E27FC236}">
-                <a16:creationId xmlns:a16="http://schemas.microsoft.com/office/drawing/2014/main" id="{96F826CE-F39B-4959-BD8C-4B72E8A4DDBC}"/>
+                <a16:creationId xmlns:a16="http://schemas.microsoft.com/office/drawing/2014/main" id="{0FB1046F-2141-4944-A1F8-18AD9AD5F24F}"/>
               </a:ext>
             </a:extLst>
           </p:cNvPr>
@@ -4058,7 +4125,7 @@
           <p:nvPr/>
         </p:nvPicPr>
         <p:blipFill>
-          <a:blip xmlns:r="http://schemas.openxmlformats.org/officeDocument/2006/relationships" xmlns:a="http://schemas.openxmlformats.org/drawingml/2006/main" r:embed="R278f100491ba4b25"/>
+          <a:blip xmlns:r="http://schemas.openxmlformats.org/officeDocument/2006/relationships" xmlns:a="http://schemas.openxmlformats.org/drawingml/2006/main" r:embed="R00fde917fbcb4c62"/>
           <a:stretch xmlns:a="http://schemas.openxmlformats.org/drawingml/2006/main"/>
         </p:blipFill>
         <p:spPr>
@@ -4076,7 +4143,7 @@
           <p:cNvPr id="17" name="">
             <a:extLst xmlns:a="http://schemas.openxmlformats.org/drawingml/2006/main">
               <a:ext uri="{FF2B5EF4-FFF2-40B4-BE49-F238E27FC236}">
-                <a16:creationId xmlns:a16="http://schemas.microsoft.com/office/drawing/2014/main" id="{B6220455-213F-4FC2-A029-0A0A975BCF7D}"/>
+                <a16:creationId xmlns:a16="http://schemas.microsoft.com/office/drawing/2014/main" id="{B0A16371-B82E-4848-BDCE-4B76AD1EAD4E}"/>
               </a:ext>
             </a:extLst>
           </p:cNvPr>
@@ -4124,7 +4191,7 @@
     </p:spTree>
     <p:extLst>
       <p:ext uri="{BB962C8B-B14F-4D97-AF65-F5344CB8AC3E}">
-        <p14:creationId xmlns:p14="http://schemas.microsoft.com/office/powerpoint/2010/main" val="1358957094"/>
+        <p14:creationId xmlns:p14="http://schemas.microsoft.com/office/powerpoint/2010/main" val="1448227414"/>
       </p:ext>
     </p:extLst>
   </p:cSld>
@@ -4155,7 +4222,7 @@
           <p:cNvPr id="1" name="">
             <a:extLst xmlns:a="http://schemas.openxmlformats.org/drawingml/2006/main">
               <a:ext uri="{FF2B5EF4-FFF2-40B4-BE49-F238E27FC236}">
-                <a16:creationId xmlns:a16="http://schemas.microsoft.com/office/drawing/2014/main" id="{509C3F20-768F-423E-9B77-847C66881538}"/>
+                <a16:creationId xmlns:a16="http://schemas.microsoft.com/office/drawing/2014/main" id="{131E2AA2-27C8-43C7-8269-8728E6D51DE8}"/>
               </a:ext>
             </a:extLst>
           </p:cNvPr>
@@ -4205,7 +4272,7 @@
           <p:cNvPr id="2" name="">
             <a:extLst xmlns:a="http://schemas.openxmlformats.org/drawingml/2006/main">
               <a:ext uri="{FF2B5EF4-FFF2-40B4-BE49-F238E27FC236}">
-                <a16:creationId xmlns:a16="http://schemas.microsoft.com/office/drawing/2014/main" id="{2D13A5C7-EB63-489A-9AFC-4F47C39D9345}"/>
+                <a16:creationId xmlns:a16="http://schemas.microsoft.com/office/drawing/2014/main" id="{E1F25699-8E57-49C3-8705-F465473B8955}"/>
               </a:ext>
             </a:extLst>
           </p:cNvPr>
@@ -4255,7 +4322,7 @@
           <p:cNvPr id="3" name="">
             <a:extLst xmlns:a="http://schemas.openxmlformats.org/drawingml/2006/main">
               <a:ext uri="{FF2B5EF4-FFF2-40B4-BE49-F238E27FC236}">
-                <a16:creationId xmlns:a16="http://schemas.microsoft.com/office/drawing/2014/main" id="{F6FF025A-78A2-42A2-8D0B-FB7AA17B2A2A}"/>
+                <a16:creationId xmlns:a16="http://schemas.microsoft.com/office/drawing/2014/main" id="{CE311341-B0D5-4011-8E66-EC0B8E9B88E3}"/>
               </a:ext>
             </a:extLst>
           </p:cNvPr>
@@ -4292,7 +4359,7 @@
           <p:nvPr/>
         </p:nvPicPr>
         <p:blipFill>
-          <a:blip xmlns:r="http://schemas.openxmlformats.org/officeDocument/2006/relationships" xmlns:a="http://schemas.openxmlformats.org/drawingml/2006/main" r:embed="R79cdf432fdbc4868"/>
+          <a:blip xmlns:r="http://schemas.openxmlformats.org/officeDocument/2006/relationships" xmlns:a="http://schemas.openxmlformats.org/drawingml/2006/main" r:embed="Rc0afda9ebc1b4c29"/>
           <a:stretch xmlns:a="http://schemas.openxmlformats.org/drawingml/2006/main"/>
         </p:blipFill>
         <p:spPr>
@@ -4314,7 +4381,7 @@
           <p:nvPr/>
         </p:nvPicPr>
         <p:blipFill>
-          <a:blip xmlns:r="http://schemas.openxmlformats.org/officeDocument/2006/relationships" xmlns:a="http://schemas.openxmlformats.org/drawingml/2006/main" r:embed="R62952b35a6db4f65"/>
+          <a:blip xmlns:r="http://schemas.openxmlformats.org/officeDocument/2006/relationships" xmlns:a="http://schemas.openxmlformats.org/drawingml/2006/main" r:embed="R4e64226368784307"/>
           <a:stretch xmlns:a="http://schemas.openxmlformats.org/drawingml/2006/main"/>
         </p:blipFill>
         <p:spPr>
@@ -4332,7 +4399,7 @@
           <p:cNvPr id="6" name="">
             <a:extLst xmlns:a="http://schemas.openxmlformats.org/drawingml/2006/main">
               <a:ext uri="{FF2B5EF4-FFF2-40B4-BE49-F238E27FC236}">
-                <a16:creationId xmlns:a16="http://schemas.microsoft.com/office/drawing/2014/main" id="{C4AA4F32-5D3E-48CE-BE03-D089C827E0A2}"/>
+                <a16:creationId xmlns:a16="http://schemas.microsoft.com/office/drawing/2014/main" id="{3767862E-9659-48BE-82BA-6113549A717E}"/>
               </a:ext>
             </a:extLst>
           </p:cNvPr>
@@ -4380,7 +4447,7 @@
     </p:spTree>
     <p:extLst>
       <p:ext uri="{BB962C8B-B14F-4D97-AF65-F5344CB8AC3E}">
-        <p14:creationId xmlns:p14="http://schemas.microsoft.com/office/powerpoint/2010/main" val="766357857"/>
+        <p14:creationId xmlns:p14="http://schemas.microsoft.com/office/powerpoint/2010/main" val="2034478583"/>
       </p:ext>
     </p:extLst>
   </p:cSld>
@@ -4411,7 +4478,7 @@
           <p:cNvPr id="1" name="">
             <a:extLst xmlns:a="http://schemas.openxmlformats.org/drawingml/2006/main">
               <a:ext uri="{FF2B5EF4-FFF2-40B4-BE49-F238E27FC236}">
-                <a16:creationId xmlns:a16="http://schemas.microsoft.com/office/drawing/2014/main" id="{3A32EB45-078B-4261-8835-BB19AD1FEBA3}"/>
+                <a16:creationId xmlns:a16="http://schemas.microsoft.com/office/drawing/2014/main" id="{2E49CE19-4708-4CCB-9256-165C27CFEB2F}"/>
               </a:ext>
             </a:extLst>
           </p:cNvPr>
@@ -4461,7 +4528,7 @@
           <p:cNvPr id="2" name="">
             <a:extLst xmlns:a="http://schemas.openxmlformats.org/drawingml/2006/main">
               <a:ext uri="{FF2B5EF4-FFF2-40B4-BE49-F238E27FC236}">
-                <a16:creationId xmlns:a16="http://schemas.microsoft.com/office/drawing/2014/main" id="{1E237E4E-DC9D-4D4B-A15C-37818A57564F}"/>
+                <a16:creationId xmlns:a16="http://schemas.microsoft.com/office/drawing/2014/main" id="{9637C673-C2A4-4F73-9425-60168B86A4AD}"/>
               </a:ext>
             </a:extLst>
           </p:cNvPr>
@@ -4501,7 +4568,7 @@
                   <a:srgbClr val="111827"/>
                 </a:solidFill>
               </a:rPr>
-              <a:t>Next Gen5.3 slice: diagnose why bullish participation is still late</a:t>
+              <a:t>Representative trade tapes show the system joined the move but did not stay with enough of it</a:t>
             </a:r>
           </a:p>
         </p:txBody>
@@ -4511,7 +4578,7 @@
           <p:cNvPr id="3" name="">
             <a:extLst xmlns:a="http://schemas.openxmlformats.org/drawingml/2006/main">
               <a:ext uri="{FF2B5EF4-FFF2-40B4-BE49-F238E27FC236}">
-                <a16:creationId xmlns:a16="http://schemas.microsoft.com/office/drawing/2014/main" id="{AFC7B80E-D94E-41C7-A38A-5530914D5ABD}"/>
+                <a16:creationId xmlns:a16="http://schemas.microsoft.com/office/drawing/2014/main" id="{8E60BA35-98BB-48A4-B1AD-092AC13939A7}"/>
               </a:ext>
             </a:extLst>
           </p:cNvPr>
@@ -4539,12 +4606,655 @@
           </a:ln>
         </p:spPr>
       </p:sp>
+      <p:pic>
+        <p:nvPicPr>
+          <p:cNvPr id="19" name=""/>
+          <p:cNvPicPr>
+            <a:picLocks xmlns:a="http://schemas.openxmlformats.org/drawingml/2006/main" noChangeAspect="1"/>
+          </p:cNvPicPr>
+          <p:nvPr/>
+        </p:nvPicPr>
+        <p:blipFill>
+          <a:blip xmlns:r="http://schemas.openxmlformats.org/officeDocument/2006/relationships" xmlns:a="http://schemas.openxmlformats.org/drawingml/2006/main" r:embed="R1e78d08c35044ac2"/>
+          <a:stretch xmlns:a="http://schemas.openxmlformats.org/drawingml/2006/main"/>
+        </p:blipFill>
+        <p:spPr>
+          <a:xfrm xmlns:a="http://schemas.openxmlformats.org/drawingml/2006/main">
+            <a:off x="1225717" y="1695450"/>
+            <a:ext cx="5930566" cy="4333875"/>
+          </a:xfrm>
+          <a:prstGeom xmlns:a="http://schemas.openxmlformats.org/drawingml/2006/main" prst="rect">
+            <a:avLst/>
+          </a:prstGeom>
+        </p:spPr>
+      </p:pic>
+      <p:sp>
+        <p:nvSpPr>
+          <p:cNvPr id="5" name="">
+            <a:extLst xmlns:a="http://schemas.openxmlformats.org/drawingml/2006/main">
+              <a:ext uri="{FF2B5EF4-FFF2-40B4-BE49-F238E27FC236}">
+                <a16:creationId xmlns:a16="http://schemas.microsoft.com/office/drawing/2014/main" id="{CDC7019C-E289-4BCC-A149-EEF64D8D6327}"/>
+              </a:ext>
+            </a:extLst>
+          </p:cNvPr>
+          <p:cNvSpPr>
+            <a:spLocks xmlns:a="http://schemas.openxmlformats.org/drawingml/2006/main" noGrp="1"/>
+          </p:cNvSpPr>
+          <p:nvPr/>
+        </p:nvSpPr>
+        <p:spPr>
+          <a:xfrm xmlns:a="http://schemas.openxmlformats.org/drawingml/2006/main">
+            <a:off x="8229600" y="1962150"/>
+            <a:ext cx="3048000" cy="3219450"/>
+          </a:xfrm>
+          <a:prstGeom xmlns:a="http://schemas.openxmlformats.org/drawingml/2006/main" prst="roundRect">
+            <a:avLst>
+              <a:gd name="adj" fmla="val 2500"/>
+            </a:avLst>
+          </a:prstGeom>
+          <a:solidFill xmlns:a="http://schemas.openxmlformats.org/drawingml/2006/main">
+            <a:srgbClr val="F8FAFC"/>
+          </a:solidFill>
+          <a:ln xmlns:a="http://schemas.openxmlformats.org/drawingml/2006/main" w="9525">
+            <a:solidFill>
+              <a:srgbClr val="D7DEE8"/>
+            </a:solidFill>
+            <a:prstDash val="solid"/>
+          </a:ln>
+        </p:spPr>
+      </p:sp>
+      <p:sp>
+        <p:nvSpPr>
+          <p:cNvPr id="6" name="">
+            <a:extLst xmlns:a="http://schemas.openxmlformats.org/drawingml/2006/main">
+              <a:ext uri="{FF2B5EF4-FFF2-40B4-BE49-F238E27FC236}">
+                <a16:creationId xmlns:a16="http://schemas.microsoft.com/office/drawing/2014/main" id="{220AB060-612F-47B2-81A0-AFBD6C5321CF}"/>
+              </a:ext>
+            </a:extLst>
+          </p:cNvPr>
+          <p:cNvSpPr>
+            <a:spLocks xmlns:a="http://schemas.openxmlformats.org/drawingml/2006/main" noGrp="1"/>
+          </p:cNvSpPr>
+          <p:nvPr/>
+        </p:nvSpPr>
+        <p:spPr>
+          <a:xfrm xmlns:a="http://schemas.openxmlformats.org/drawingml/2006/main">
+            <a:off x="8515350" y="2247900"/>
+            <a:ext cx="2381250" cy="285750"/>
+          </a:xfrm>
+          <a:prstGeom xmlns:a="http://schemas.openxmlformats.org/drawingml/2006/main" prst="rect">
+            <a:avLst/>
+          </a:prstGeom>
+          <a:noFill xmlns:a="http://schemas.openxmlformats.org/drawingml/2006/main"/>
+          <a:ln xmlns:a="http://schemas.openxmlformats.org/drawingml/2006/main" w="0">
+            <a:noFill/>
+            <a:prstDash val="solid"/>
+          </a:ln>
+        </p:spPr>
+        <p:txBody>
+          <a:bodyPr xmlns:a="http://schemas.openxmlformats.org/drawingml/2006/main"/>
+          <a:lstStyle xmlns:a="http://schemas.openxmlformats.org/drawingml/2006/main"/>
+          <a:p xmlns:a="http://schemas.openxmlformats.org/drawingml/2006/main">
+            <a:pPr>
+              <a:defRPr sz="1875" b="1">
+                <a:solidFill>
+                  <a:srgbClr val="111827"/>
+                </a:solidFill>
+              </a:defRPr>
+            </a:pPr>
+            <a:r>
+              <a:rPr sz="1875" b="1">
+                <a:solidFill>
+                  <a:srgbClr val="111827"/>
+                </a:solidFill>
+              </a:rPr>
+              <a:t>What to look for</a:t>
+            </a:r>
+          </a:p>
+        </p:txBody>
+      </p:sp>
+      <p:sp>
+        <p:nvSpPr>
+          <p:cNvPr id="7" name="">
+            <a:extLst xmlns:a="http://schemas.openxmlformats.org/drawingml/2006/main">
+              <a:ext uri="{FF2B5EF4-FFF2-40B4-BE49-F238E27FC236}">
+                <a16:creationId xmlns:a16="http://schemas.microsoft.com/office/drawing/2014/main" id="{76027923-78BB-48AE-9339-92859393047A}"/>
+              </a:ext>
+            </a:extLst>
+          </p:cNvPr>
+          <p:cNvSpPr>
+            <a:spLocks xmlns:a="http://schemas.openxmlformats.org/drawingml/2006/main" noGrp="1"/>
+          </p:cNvSpPr>
+          <p:nvPr/>
+        </p:nvSpPr>
+        <p:spPr>
+          <a:xfrm xmlns:a="http://schemas.openxmlformats.org/drawingml/2006/main">
+            <a:off x="8534400" y="2905125"/>
+            <a:ext cx="76200" cy="76200"/>
+          </a:xfrm>
+          <a:prstGeom xmlns:a="http://schemas.openxmlformats.org/drawingml/2006/main" prst="ellipse">
+            <a:avLst/>
+          </a:prstGeom>
+          <a:solidFill xmlns:a="http://schemas.openxmlformats.org/drawingml/2006/main">
+            <a:srgbClr val="D97706"/>
+          </a:solidFill>
+          <a:ln xmlns:a="http://schemas.openxmlformats.org/drawingml/2006/main" w="0">
+            <a:noFill/>
+            <a:prstDash val="solid"/>
+          </a:ln>
+        </p:spPr>
+      </p:sp>
+      <p:sp>
+        <p:nvSpPr>
+          <p:cNvPr id="8" name="">
+            <a:extLst xmlns:a="http://schemas.openxmlformats.org/drawingml/2006/main">
+              <a:ext uri="{FF2B5EF4-FFF2-40B4-BE49-F238E27FC236}">
+                <a16:creationId xmlns:a16="http://schemas.microsoft.com/office/drawing/2014/main" id="{5AADE182-F029-433F-A645-126896DFFDFD}"/>
+              </a:ext>
+            </a:extLst>
+          </p:cNvPr>
+          <p:cNvSpPr>
+            <a:spLocks xmlns:a="http://schemas.openxmlformats.org/drawingml/2006/main" noGrp="1"/>
+          </p:cNvSpPr>
+          <p:nvPr/>
+        </p:nvSpPr>
+        <p:spPr>
+          <a:xfrm xmlns:a="http://schemas.openxmlformats.org/drawingml/2006/main">
+            <a:off x="8743950" y="2819400"/>
+            <a:ext cx="2152650" cy="533400"/>
+          </a:xfrm>
+          <a:prstGeom xmlns:a="http://schemas.openxmlformats.org/drawingml/2006/main" prst="rect">
+            <a:avLst/>
+          </a:prstGeom>
+          <a:noFill xmlns:a="http://schemas.openxmlformats.org/drawingml/2006/main"/>
+          <a:ln xmlns:a="http://schemas.openxmlformats.org/drawingml/2006/main" w="0">
+            <a:noFill/>
+            <a:prstDash val="solid"/>
+          </a:ln>
+        </p:spPr>
+        <p:txBody>
+          <a:bodyPr xmlns:a="http://schemas.openxmlformats.org/drawingml/2006/main"/>
+          <a:lstStyle xmlns:a="http://schemas.openxmlformats.org/drawingml/2006/main"/>
+          <a:p xmlns:a="http://schemas.openxmlformats.org/drawingml/2006/main">
+            <a:pPr>
+              <a:defRPr sz="1125" b="0">
+                <a:solidFill>
+                  <a:srgbClr val="111827"/>
+                </a:solidFill>
+              </a:defRPr>
+            </a:pPr>
+            <a:r>
+              <a:rPr sz="1125" b="0">
+                <a:solidFill>
+                  <a:srgbClr val="111827"/>
+                </a:solidFill>
+              </a:rPr>
+              <a:t>Blue markers are entries; yellow markers are exits.</a:t>
+            </a:r>
+          </a:p>
+        </p:txBody>
+      </p:sp>
+      <p:sp>
+        <p:nvSpPr>
+          <p:cNvPr id="9" name="">
+            <a:extLst xmlns:a="http://schemas.openxmlformats.org/drawingml/2006/main">
+              <a:ext uri="{FF2B5EF4-FFF2-40B4-BE49-F238E27FC236}">
+                <a16:creationId xmlns:a16="http://schemas.microsoft.com/office/drawing/2014/main" id="{E2F121F3-A0E9-4F50-9C4C-E3136732FE8F}"/>
+              </a:ext>
+            </a:extLst>
+          </p:cNvPr>
+          <p:cNvSpPr>
+            <a:spLocks xmlns:a="http://schemas.openxmlformats.org/drawingml/2006/main" noGrp="1"/>
+          </p:cNvSpPr>
+          <p:nvPr/>
+        </p:nvSpPr>
+        <p:spPr>
+          <a:xfrm xmlns:a="http://schemas.openxmlformats.org/drawingml/2006/main">
+            <a:off x="8534400" y="3400425"/>
+            <a:ext cx="76200" cy="76200"/>
+          </a:xfrm>
+          <a:prstGeom xmlns:a="http://schemas.openxmlformats.org/drawingml/2006/main" prst="ellipse">
+            <a:avLst/>
+          </a:prstGeom>
+          <a:solidFill xmlns:a="http://schemas.openxmlformats.org/drawingml/2006/main">
+            <a:srgbClr val="D97706"/>
+          </a:solidFill>
+          <a:ln xmlns:a="http://schemas.openxmlformats.org/drawingml/2006/main" w="0">
+            <a:noFill/>
+            <a:prstDash val="solid"/>
+          </a:ln>
+        </p:spPr>
+      </p:sp>
+      <p:sp>
+        <p:nvSpPr>
+          <p:cNvPr id="10" name="">
+            <a:extLst xmlns:a="http://schemas.openxmlformats.org/drawingml/2006/main">
+              <a:ext uri="{FF2B5EF4-FFF2-40B4-BE49-F238E27FC236}">
+                <a16:creationId xmlns:a16="http://schemas.microsoft.com/office/drawing/2014/main" id="{1EA18AB2-A17F-42E3-8199-678CCBE02E13}"/>
+              </a:ext>
+            </a:extLst>
+          </p:cNvPr>
+          <p:cNvSpPr>
+            <a:spLocks xmlns:a="http://schemas.openxmlformats.org/drawingml/2006/main" noGrp="1"/>
+          </p:cNvSpPr>
+          <p:nvPr/>
+        </p:nvSpPr>
+        <p:spPr>
+          <a:xfrm xmlns:a="http://schemas.openxmlformats.org/drawingml/2006/main">
+            <a:off x="8743950" y="3314700"/>
+            <a:ext cx="2152650" cy="533400"/>
+          </a:xfrm>
+          <a:prstGeom xmlns:a="http://schemas.openxmlformats.org/drawingml/2006/main" prst="rect">
+            <a:avLst/>
+          </a:prstGeom>
+          <a:noFill xmlns:a="http://schemas.openxmlformats.org/drawingml/2006/main"/>
+          <a:ln xmlns:a="http://schemas.openxmlformats.org/drawingml/2006/main" w="0">
+            <a:noFill/>
+            <a:prstDash val="solid"/>
+          </a:ln>
+        </p:spPr>
+        <p:txBody>
+          <a:bodyPr xmlns:a="http://schemas.openxmlformats.org/drawingml/2006/main"/>
+          <a:lstStyle xmlns:a="http://schemas.openxmlformats.org/drawingml/2006/main"/>
+          <a:p xmlns:a="http://schemas.openxmlformats.org/drawingml/2006/main">
+            <a:pPr>
+              <a:defRPr sz="1125" b="0">
+                <a:solidFill>
+                  <a:srgbClr val="111827"/>
+                </a:solidFill>
+              </a:defRPr>
+            </a:pPr>
+            <a:r>
+              <a:rPr sz="1125" b="0">
+                <a:solidFill>
+                  <a:srgbClr val="111827"/>
+                </a:solidFill>
+              </a:rPr>
+              <a:t>Dashed lines trace completed or open trades.</a:t>
+            </a:r>
+          </a:p>
+        </p:txBody>
+      </p:sp>
+      <p:sp>
+        <p:nvSpPr>
+          <p:cNvPr id="11" name="">
+            <a:extLst xmlns:a="http://schemas.openxmlformats.org/drawingml/2006/main">
+              <a:ext uri="{FF2B5EF4-FFF2-40B4-BE49-F238E27FC236}">
+                <a16:creationId xmlns:a16="http://schemas.microsoft.com/office/drawing/2014/main" id="{5AA48097-B65D-4190-A1FF-66D0BAA83209}"/>
+              </a:ext>
+            </a:extLst>
+          </p:cNvPr>
+          <p:cNvSpPr>
+            <a:spLocks xmlns:a="http://schemas.openxmlformats.org/drawingml/2006/main" noGrp="1"/>
+          </p:cNvSpPr>
+          <p:nvPr/>
+        </p:nvSpPr>
+        <p:spPr>
+          <a:xfrm xmlns:a="http://schemas.openxmlformats.org/drawingml/2006/main">
+            <a:off x="8534400" y="3895725"/>
+            <a:ext cx="76200" cy="76200"/>
+          </a:xfrm>
+          <a:prstGeom xmlns:a="http://schemas.openxmlformats.org/drawingml/2006/main" prst="ellipse">
+            <a:avLst/>
+          </a:prstGeom>
+          <a:solidFill xmlns:a="http://schemas.openxmlformats.org/drawingml/2006/main">
+            <a:srgbClr val="D97706"/>
+          </a:solidFill>
+          <a:ln xmlns:a="http://schemas.openxmlformats.org/drawingml/2006/main" w="0">
+            <a:noFill/>
+            <a:prstDash val="solid"/>
+          </a:ln>
+        </p:spPr>
+      </p:sp>
+      <p:sp>
+        <p:nvSpPr>
+          <p:cNvPr id="12" name="">
+            <a:extLst xmlns:a="http://schemas.openxmlformats.org/drawingml/2006/main">
+              <a:ext uri="{FF2B5EF4-FFF2-40B4-BE49-F238E27FC236}">
+                <a16:creationId xmlns:a16="http://schemas.microsoft.com/office/drawing/2014/main" id="{8808AEC8-3A93-4578-97B3-AEFD798C2CAF}"/>
+              </a:ext>
+            </a:extLst>
+          </p:cNvPr>
+          <p:cNvSpPr>
+            <a:spLocks xmlns:a="http://schemas.openxmlformats.org/drawingml/2006/main" noGrp="1"/>
+          </p:cNvSpPr>
+          <p:nvPr/>
+        </p:nvSpPr>
+        <p:spPr>
+          <a:xfrm xmlns:a="http://schemas.openxmlformats.org/drawingml/2006/main">
+            <a:off x="8743950" y="3810000"/>
+            <a:ext cx="2152650" cy="533400"/>
+          </a:xfrm>
+          <a:prstGeom xmlns:a="http://schemas.openxmlformats.org/drawingml/2006/main" prst="rect">
+            <a:avLst/>
+          </a:prstGeom>
+          <a:noFill xmlns:a="http://schemas.openxmlformats.org/drawingml/2006/main"/>
+          <a:ln xmlns:a="http://schemas.openxmlformats.org/drawingml/2006/main" w="0">
+            <a:noFill/>
+            <a:prstDash val="solid"/>
+          </a:ln>
+        </p:spPr>
+        <p:txBody>
+          <a:bodyPr xmlns:a="http://schemas.openxmlformats.org/drawingml/2006/main"/>
+          <a:lstStyle xmlns:a="http://schemas.openxmlformats.org/drawingml/2006/main"/>
+          <a:p xmlns:a="http://schemas.openxmlformats.org/drawingml/2006/main">
+            <a:pPr>
+              <a:defRPr sz="1125" b="0">
+                <a:solidFill>
+                  <a:srgbClr val="111827"/>
+                </a:solidFill>
+              </a:defRPr>
+            </a:pPr>
+            <a:r>
+              <a:rPr sz="1125" b="0">
+                <a:solidFill>
+                  <a:srgbClr val="111827"/>
+                </a:solidFill>
+              </a:rPr>
+              <a:t>State bands often change after the trend is underway.</a:t>
+            </a:r>
+          </a:p>
+        </p:txBody>
+      </p:sp>
+      <p:sp>
+        <p:nvSpPr>
+          <p:cNvPr id="13" name="">
+            <a:extLst xmlns:a="http://schemas.openxmlformats.org/drawingml/2006/main">
+              <a:ext uri="{FF2B5EF4-FFF2-40B4-BE49-F238E27FC236}">
+                <a16:creationId xmlns:a16="http://schemas.microsoft.com/office/drawing/2014/main" id="{BAFD8EAD-356B-46D5-9303-840C642D623B}"/>
+              </a:ext>
+            </a:extLst>
+          </p:cNvPr>
+          <p:cNvSpPr>
+            <a:spLocks xmlns:a="http://schemas.openxmlformats.org/drawingml/2006/main" noGrp="1"/>
+          </p:cNvSpPr>
+          <p:nvPr/>
+        </p:nvSpPr>
+        <p:spPr>
+          <a:xfrm xmlns:a="http://schemas.openxmlformats.org/drawingml/2006/main">
+            <a:off x="8534400" y="4391025"/>
+            <a:ext cx="76200" cy="76200"/>
+          </a:xfrm>
+          <a:prstGeom xmlns:a="http://schemas.openxmlformats.org/drawingml/2006/main" prst="ellipse">
+            <a:avLst/>
+          </a:prstGeom>
+          <a:solidFill xmlns:a="http://schemas.openxmlformats.org/drawingml/2006/main">
+            <a:srgbClr val="D97706"/>
+          </a:solidFill>
+          <a:ln xmlns:a="http://schemas.openxmlformats.org/drawingml/2006/main" w="0">
+            <a:noFill/>
+            <a:prstDash val="solid"/>
+          </a:ln>
+        </p:spPr>
+      </p:sp>
+      <p:sp>
+        <p:nvSpPr>
+          <p:cNvPr id="14" name="">
+            <a:extLst xmlns:a="http://schemas.openxmlformats.org/drawingml/2006/main">
+              <a:ext uri="{FF2B5EF4-FFF2-40B4-BE49-F238E27FC236}">
+                <a16:creationId xmlns:a16="http://schemas.microsoft.com/office/drawing/2014/main" id="{66B06686-B98F-42CD-A7E4-0DF90FE4DE7D}"/>
+              </a:ext>
+            </a:extLst>
+          </p:cNvPr>
+          <p:cNvSpPr>
+            <a:spLocks xmlns:a="http://schemas.openxmlformats.org/drawingml/2006/main" noGrp="1"/>
+          </p:cNvSpPr>
+          <p:nvPr/>
+        </p:nvSpPr>
+        <p:spPr>
+          <a:xfrm xmlns:a="http://schemas.openxmlformats.org/drawingml/2006/main">
+            <a:off x="8743950" y="4305300"/>
+            <a:ext cx="2152650" cy="533400"/>
+          </a:xfrm>
+          <a:prstGeom xmlns:a="http://schemas.openxmlformats.org/drawingml/2006/main" prst="rect">
+            <a:avLst/>
+          </a:prstGeom>
+          <a:noFill xmlns:a="http://schemas.openxmlformats.org/drawingml/2006/main"/>
+          <a:ln xmlns:a="http://schemas.openxmlformats.org/drawingml/2006/main" w="0">
+            <a:noFill/>
+            <a:prstDash val="solid"/>
+          </a:ln>
+        </p:spPr>
+        <p:txBody>
+          <a:bodyPr xmlns:a="http://schemas.openxmlformats.org/drawingml/2006/main"/>
+          <a:lstStyle xmlns:a="http://schemas.openxmlformats.org/drawingml/2006/main"/>
+          <a:p xmlns:a="http://schemas.openxmlformats.org/drawingml/2006/main">
+            <a:pPr>
+              <a:defRPr sz="1125" b="0">
+                <a:solidFill>
+                  <a:srgbClr val="111827"/>
+                </a:solidFill>
+              </a:defRPr>
+            </a:pPr>
+            <a:r>
+              <a:rPr sz="1125" b="0">
+                <a:solidFill>
+                  <a:srgbClr val="111827"/>
+                </a:solidFill>
+              </a:rPr>
+              <a:t>Continuation helps, but it still misses part of the move.</a:t>
+            </a:r>
+          </a:p>
+        </p:txBody>
+      </p:sp>
+      <p:sp>
+        <p:nvSpPr>
+          <p:cNvPr id="15" name="">
+            <a:extLst xmlns:a="http://schemas.openxmlformats.org/drawingml/2006/main">
+              <a:ext uri="{FF2B5EF4-FFF2-40B4-BE49-F238E27FC236}">
+                <a16:creationId xmlns:a16="http://schemas.microsoft.com/office/drawing/2014/main" id="{6DD43B7F-4896-47BD-A452-F2C9CE6E0324}"/>
+              </a:ext>
+            </a:extLst>
+          </p:cNvPr>
+          <p:cNvSpPr>
+            <a:spLocks xmlns:a="http://schemas.openxmlformats.org/drawingml/2006/main" noGrp="1"/>
+          </p:cNvSpPr>
+          <p:nvPr/>
+        </p:nvSpPr>
+        <p:spPr>
+          <a:xfrm xmlns:a="http://schemas.openxmlformats.org/drawingml/2006/main">
+            <a:off x="1123950" y="6172200"/>
+            <a:ext cx="9334500" cy="285750"/>
+          </a:xfrm>
+          <a:prstGeom xmlns:a="http://schemas.openxmlformats.org/drawingml/2006/main" prst="rect">
+            <a:avLst/>
+          </a:prstGeom>
+          <a:noFill xmlns:a="http://schemas.openxmlformats.org/drawingml/2006/main"/>
+          <a:ln xmlns:a="http://schemas.openxmlformats.org/drawingml/2006/main" w="0">
+            <a:noFill/>
+            <a:prstDash val="solid"/>
+          </a:ln>
+        </p:spPr>
+        <p:txBody>
+          <a:bodyPr xmlns:a="http://schemas.openxmlformats.org/drawingml/2006/main"/>
+          <a:lstStyle xmlns:a="http://schemas.openxmlformats.org/drawingml/2006/main"/>
+          <a:p xmlns:a="http://schemas.openxmlformats.org/drawingml/2006/main">
+            <a:pPr algn="ctr">
+              <a:defRPr sz="1350" b="1">
+                <a:solidFill>
+                  <a:srgbClr val="111827"/>
+                </a:solidFill>
+              </a:defRPr>
+            </a:pPr>
+            <a:r>
+              <a:rPr sz="1350" b="1">
+                <a:solidFill>
+                  <a:srgbClr val="111827"/>
+                </a:solidFill>
+              </a:rPr>
+              <a:t>For exploratory POCs, include representative trade tapes whenever timing, participation, or state behavior is central.</a:t>
+            </a:r>
+          </a:p>
+        </p:txBody>
+      </p:sp>
+    </p:spTree>
+    <p:extLst>
+      <p:ext uri="{BB962C8B-B14F-4D97-AF65-F5344CB8AC3E}">
+        <p14:creationId xmlns:p14="http://schemas.microsoft.com/office/powerpoint/2010/main" val="1650519962"/>
+      </p:ext>
+    </p:extLst>
+  </p:cSld>
+</p:sld>
+</file>
+
+<file path=ppt/slides/slide14.xml><?xml version="1.0" encoding="utf-8"?>
+<p:sld xmlns:p="http://schemas.openxmlformats.org/presentationml/2006/main">
+  <p:cSld>
+    <p:bg>
+      <p:bgPr>
+        <a:solidFill xmlns:a="http://schemas.openxmlformats.org/drawingml/2006/main">
+          <a:srgbClr val="FFFFFF"/>
+        </a:solidFill>
+      </p:bgPr>
+    </p:bg>
+    <p:spTree>
+      <p:nvGrpSpPr>
+        <p:cNvPr id="1" name=""/>
+        <p:cNvGrpSpPr/>
+        <p:nvPr/>
+      </p:nvGrpSpPr>
+      <p:grpSpPr>
+        <a:xfrm xmlns:a="http://schemas.openxmlformats.org/drawingml/2006/main"/>
+      </p:grpSpPr>
+      <p:sp>
+        <p:nvSpPr>
+          <p:cNvPr id="1" name="">
+            <a:extLst xmlns:a="http://schemas.openxmlformats.org/drawingml/2006/main">
+              <a:ext uri="{FF2B5EF4-FFF2-40B4-BE49-F238E27FC236}">
+                <a16:creationId xmlns:a16="http://schemas.microsoft.com/office/drawing/2014/main" id="{E9D326F1-D9B4-4207-863E-76E2C37C77DE}"/>
+              </a:ext>
+            </a:extLst>
+          </p:cNvPr>
+          <p:cNvSpPr>
+            <a:spLocks xmlns:a="http://schemas.openxmlformats.org/drawingml/2006/main" noGrp="1"/>
+          </p:cNvSpPr>
+          <p:nvPr/>
+        </p:nvSpPr>
+        <p:spPr>
+          <a:xfrm xmlns:a="http://schemas.openxmlformats.org/drawingml/2006/main">
+            <a:off x="609600" y="304800"/>
+            <a:ext cx="5334000" cy="209550"/>
+          </a:xfrm>
+          <a:prstGeom xmlns:a="http://schemas.openxmlformats.org/drawingml/2006/main" prst="rect">
+            <a:avLst/>
+          </a:prstGeom>
+          <a:noFill xmlns:a="http://schemas.openxmlformats.org/drawingml/2006/main"/>
+          <a:ln xmlns:a="http://schemas.openxmlformats.org/drawingml/2006/main" w="0">
+            <a:noFill/>
+            <a:prstDash val="solid"/>
+          </a:ln>
+        </p:spPr>
+        <p:txBody>
+          <a:bodyPr xmlns:a="http://schemas.openxmlformats.org/drawingml/2006/main"/>
+          <a:lstStyle xmlns:a="http://schemas.openxmlformats.org/drawingml/2006/main"/>
+          <a:p xmlns:a="http://schemas.openxmlformats.org/drawingml/2006/main">
+            <a:pPr>
+              <a:defRPr sz="975" b="1">
+                <a:solidFill>
+                  <a:srgbClr val="2563EB"/>
+                </a:solidFill>
+              </a:defRPr>
+            </a:pPr>
+            <a:r>
+              <a:rPr sz="975" b="1">
+                <a:solidFill>
+                  <a:srgbClr val="2563EB"/>
+                </a:solidFill>
+              </a:rPr>
+              <a:t>GEN5.3 PCA RESEARCH PIVOT</a:t>
+            </a:r>
+          </a:p>
+        </p:txBody>
+      </p:sp>
+      <p:sp>
+        <p:nvSpPr>
+          <p:cNvPr id="2" name="">
+            <a:extLst xmlns:a="http://schemas.openxmlformats.org/drawingml/2006/main">
+              <a:ext uri="{FF2B5EF4-FFF2-40B4-BE49-F238E27FC236}">
+                <a16:creationId xmlns:a16="http://schemas.microsoft.com/office/drawing/2014/main" id="{E586E8DD-493E-4A39-8FF3-35A16863F5FE}"/>
+              </a:ext>
+            </a:extLst>
+          </p:cNvPr>
+          <p:cNvSpPr>
+            <a:spLocks xmlns:a="http://schemas.openxmlformats.org/drawingml/2006/main" noGrp="1"/>
+          </p:cNvSpPr>
+          <p:nvPr/>
+        </p:nvSpPr>
+        <p:spPr>
+          <a:xfrm xmlns:a="http://schemas.openxmlformats.org/drawingml/2006/main">
+            <a:off x="609600" y="647700"/>
+            <a:ext cx="9334500" cy="876300"/>
+          </a:xfrm>
+          <a:prstGeom xmlns:a="http://schemas.openxmlformats.org/drawingml/2006/main" prst="rect">
+            <a:avLst/>
+          </a:prstGeom>
+          <a:noFill xmlns:a="http://schemas.openxmlformats.org/drawingml/2006/main"/>
+          <a:ln xmlns:a="http://schemas.openxmlformats.org/drawingml/2006/main" w="0">
+            <a:noFill/>
+            <a:prstDash val="solid"/>
+          </a:ln>
+        </p:spPr>
+        <p:txBody>
+          <a:bodyPr xmlns:a="http://schemas.openxmlformats.org/drawingml/2006/main"/>
+          <a:lstStyle xmlns:a="http://schemas.openxmlformats.org/drawingml/2006/main"/>
+          <a:p xmlns:a="http://schemas.openxmlformats.org/drawingml/2006/main">
+            <a:pPr>
+              <a:defRPr sz="2775" b="1">
+                <a:solidFill>
+                  <a:srgbClr val="111827"/>
+                </a:solidFill>
+              </a:defRPr>
+            </a:pPr>
+            <a:r>
+              <a:rPr sz="2775" b="1">
+                <a:solidFill>
+                  <a:srgbClr val="111827"/>
+                </a:solidFill>
+              </a:rPr>
+              <a:t>Next Gen5.3 slice: diagnose why bullish participation is still late</a:t>
+            </a:r>
+          </a:p>
+        </p:txBody>
+      </p:sp>
+      <p:sp>
+        <p:nvSpPr>
+          <p:cNvPr id="3" name="">
+            <a:extLst xmlns:a="http://schemas.openxmlformats.org/drawingml/2006/main">
+              <a:ext uri="{FF2B5EF4-FFF2-40B4-BE49-F238E27FC236}">
+                <a16:creationId xmlns:a16="http://schemas.microsoft.com/office/drawing/2014/main" id="{BDE6A1F6-684A-4614-8BB0-BB35FAB66D31}"/>
+              </a:ext>
+            </a:extLst>
+          </p:cNvPr>
+          <p:cNvSpPr>
+            <a:spLocks xmlns:a="http://schemas.openxmlformats.org/drawingml/2006/main" noGrp="1"/>
+          </p:cNvSpPr>
+          <p:nvPr/>
+        </p:nvSpPr>
+        <p:spPr>
+          <a:xfrm xmlns:a="http://schemas.openxmlformats.org/drawingml/2006/main">
+            <a:off x="609600" y="1485900"/>
+            <a:ext cx="10572750" cy="9525"/>
+          </a:xfrm>
+          <a:prstGeom xmlns:a="http://schemas.openxmlformats.org/drawingml/2006/main" prst="rect">
+            <a:avLst/>
+          </a:prstGeom>
+          <a:solidFill xmlns:a="http://schemas.openxmlformats.org/drawingml/2006/main">
+            <a:srgbClr val="CBD3DD"/>
+          </a:solidFill>
+          <a:ln xmlns:a="http://schemas.openxmlformats.org/drawingml/2006/main" w="0">
+            <a:solidFill>
+              <a:srgbClr val="CBD3DD"/>
+            </a:solidFill>
+            <a:prstDash val="solid"/>
+          </a:ln>
+        </p:spPr>
+      </p:sp>
       <p:sp>
         <p:nvSpPr>
           <p:cNvPr id="4" name="">
             <a:extLst xmlns:a="http://schemas.openxmlformats.org/drawingml/2006/main">
               <a:ext uri="{FF2B5EF4-FFF2-40B4-BE49-F238E27FC236}">
-                <a16:creationId xmlns:a16="http://schemas.microsoft.com/office/drawing/2014/main" id="{A8D9F19F-1B92-46A0-BCC1-5C44691BFE29}"/>
+                <a16:creationId xmlns:a16="http://schemas.microsoft.com/office/drawing/2014/main" id="{57B8F3AF-64F1-46D3-A0CA-3FD974AB7344}"/>
               </a:ext>
             </a:extLst>
           </p:cNvPr>
@@ -4579,7 +5289,7 @@
           <p:cNvPr id="5" name="">
             <a:extLst xmlns:a="http://schemas.openxmlformats.org/drawingml/2006/main">
               <a:ext uri="{FF2B5EF4-FFF2-40B4-BE49-F238E27FC236}">
-                <a16:creationId xmlns:a16="http://schemas.microsoft.com/office/drawing/2014/main" id="{CE98FB16-782F-4777-BBDE-1BFA4DFBC24D}"/>
+                <a16:creationId xmlns:a16="http://schemas.microsoft.com/office/drawing/2014/main" id="{317C030A-04F8-408F-95EF-82ED9D7E500D}"/>
               </a:ext>
             </a:extLst>
           </p:cNvPr>
@@ -4629,7 +5339,7 @@
           <p:cNvPr id="6" name="">
             <a:extLst xmlns:a="http://schemas.openxmlformats.org/drawingml/2006/main">
               <a:ext uri="{FF2B5EF4-FFF2-40B4-BE49-F238E27FC236}">
-                <a16:creationId xmlns:a16="http://schemas.microsoft.com/office/drawing/2014/main" id="{338F9BD9-D933-4A2C-AC6A-0D194C2185C1}"/>
+                <a16:creationId xmlns:a16="http://schemas.microsoft.com/office/drawing/2014/main" id="{ECF7FC39-3F15-44B2-BCB2-FE01A3B6A889}"/>
               </a:ext>
             </a:extLst>
           </p:cNvPr>
@@ -4679,7 +5389,7 @@
           <p:cNvPr id="7" name="">
             <a:extLst xmlns:a="http://schemas.openxmlformats.org/drawingml/2006/main">
               <a:ext uri="{FF2B5EF4-FFF2-40B4-BE49-F238E27FC236}">
-                <a16:creationId xmlns:a16="http://schemas.microsoft.com/office/drawing/2014/main" id="{B3F5F196-1666-49A7-BCD6-EC81AD2B63F7}"/>
+                <a16:creationId xmlns:a16="http://schemas.microsoft.com/office/drawing/2014/main" id="{5C8E5DA0-6873-4B17-A0BF-90BB939B6F5A}"/>
               </a:ext>
             </a:extLst>
           </p:cNvPr>
@@ -4710,7 +5420,7 @@
           <p:cNvPr id="8" name="">
             <a:extLst xmlns:a="http://schemas.openxmlformats.org/drawingml/2006/main">
               <a:ext uri="{FF2B5EF4-FFF2-40B4-BE49-F238E27FC236}">
-                <a16:creationId xmlns:a16="http://schemas.microsoft.com/office/drawing/2014/main" id="{0D8FAC86-95B7-4BF9-91F0-0ECA9CB447E0}"/>
+                <a16:creationId xmlns:a16="http://schemas.microsoft.com/office/drawing/2014/main" id="{B37FD213-C355-4854-A17A-A5C78F4DA9DB}"/>
               </a:ext>
             </a:extLst>
           </p:cNvPr>
@@ -4760,7 +5470,7 @@
           <p:cNvPr id="9" name="">
             <a:extLst xmlns:a="http://schemas.openxmlformats.org/drawingml/2006/main">
               <a:ext uri="{FF2B5EF4-FFF2-40B4-BE49-F238E27FC236}">
-                <a16:creationId xmlns:a16="http://schemas.microsoft.com/office/drawing/2014/main" id="{1FA72D4A-C5A1-4A50-AF2D-A8DE6D0C144F}"/>
+                <a16:creationId xmlns:a16="http://schemas.microsoft.com/office/drawing/2014/main" id="{E4577EBD-2667-4D29-B856-7E5E5BAA003D}"/>
               </a:ext>
             </a:extLst>
           </p:cNvPr>
@@ -4791,7 +5501,7 @@
           <p:cNvPr id="10" name="">
             <a:extLst xmlns:a="http://schemas.openxmlformats.org/drawingml/2006/main">
               <a:ext uri="{FF2B5EF4-FFF2-40B4-BE49-F238E27FC236}">
-                <a16:creationId xmlns:a16="http://schemas.microsoft.com/office/drawing/2014/main" id="{91FDB32A-5FF4-4F4A-BF49-5D777F7159A3}"/>
+                <a16:creationId xmlns:a16="http://schemas.microsoft.com/office/drawing/2014/main" id="{6CC0C929-6633-4EFC-B8C9-DF9F3A52FDBA}"/>
               </a:ext>
             </a:extLst>
           </p:cNvPr>
@@ -4841,7 +5551,7 @@
           <p:cNvPr id="11" name="">
             <a:extLst xmlns:a="http://schemas.openxmlformats.org/drawingml/2006/main">
               <a:ext uri="{FF2B5EF4-FFF2-40B4-BE49-F238E27FC236}">
-                <a16:creationId xmlns:a16="http://schemas.microsoft.com/office/drawing/2014/main" id="{A400D0AA-86EE-4B9A-B254-0571CF439806}"/>
+                <a16:creationId xmlns:a16="http://schemas.microsoft.com/office/drawing/2014/main" id="{219500A9-8E13-4A10-BBE6-CFD3075DF204}"/>
               </a:ext>
             </a:extLst>
           </p:cNvPr>
@@ -4872,7 +5582,7 @@
           <p:cNvPr id="12" name="">
             <a:extLst xmlns:a="http://schemas.openxmlformats.org/drawingml/2006/main">
               <a:ext uri="{FF2B5EF4-FFF2-40B4-BE49-F238E27FC236}">
-                <a16:creationId xmlns:a16="http://schemas.microsoft.com/office/drawing/2014/main" id="{7DD09877-F53F-465F-98E0-F2F73361D395}"/>
+                <a16:creationId xmlns:a16="http://schemas.microsoft.com/office/drawing/2014/main" id="{8E387EF0-2676-4A3B-A928-10F85ECDCE96}"/>
               </a:ext>
             </a:extLst>
           </p:cNvPr>
@@ -4922,7 +5632,7 @@
           <p:cNvPr id="13" name="">
             <a:extLst xmlns:a="http://schemas.openxmlformats.org/drawingml/2006/main">
               <a:ext uri="{FF2B5EF4-FFF2-40B4-BE49-F238E27FC236}">
-                <a16:creationId xmlns:a16="http://schemas.microsoft.com/office/drawing/2014/main" id="{FADED8C5-8ECF-41C7-B5AA-37414E0C5A75}"/>
+                <a16:creationId xmlns:a16="http://schemas.microsoft.com/office/drawing/2014/main" id="{396D3758-C954-4F19-8CF1-5186036AA24D}"/>
               </a:ext>
             </a:extLst>
           </p:cNvPr>
@@ -4970,7 +5680,7 @@
     </p:spTree>
     <p:extLst>
       <p:ext uri="{BB962C8B-B14F-4D97-AF65-F5344CB8AC3E}">
-        <p14:creationId xmlns:p14="http://schemas.microsoft.com/office/powerpoint/2010/main" val="71963633"/>
+        <p14:creationId xmlns:p14="http://schemas.microsoft.com/office/powerpoint/2010/main" val="1263480480"/>
       </p:ext>
     </p:extLst>
   </p:cSld>
@@ -5001,7 +5711,7 @@
           <p:cNvPr id="1" name="">
             <a:extLst xmlns:a="http://schemas.openxmlformats.org/drawingml/2006/main">
               <a:ext uri="{FF2B5EF4-FFF2-40B4-BE49-F238E27FC236}">
-                <a16:creationId xmlns:a16="http://schemas.microsoft.com/office/drawing/2014/main" id="{56FF4BE9-853A-4D90-A041-E3F808DCD5BB}"/>
+                <a16:creationId xmlns:a16="http://schemas.microsoft.com/office/drawing/2014/main" id="{59E0DA4E-2A5A-4143-864B-B03F49131AB2}"/>
               </a:ext>
             </a:extLst>
           </p:cNvPr>
@@ -5051,7 +5761,7 @@
           <p:cNvPr id="2" name="">
             <a:extLst xmlns:a="http://schemas.openxmlformats.org/drawingml/2006/main">
               <a:ext uri="{FF2B5EF4-FFF2-40B4-BE49-F238E27FC236}">
-                <a16:creationId xmlns:a16="http://schemas.microsoft.com/office/drawing/2014/main" id="{50871AA7-C3BB-47BE-97AD-DC12E6757797}"/>
+                <a16:creationId xmlns:a16="http://schemas.microsoft.com/office/drawing/2014/main" id="{2016C719-33F5-4D52-AC8F-C6944F85301E}"/>
               </a:ext>
             </a:extLst>
           </p:cNvPr>
@@ -5101,7 +5811,7 @@
           <p:cNvPr id="3" name="">
             <a:extLst xmlns:a="http://schemas.openxmlformats.org/drawingml/2006/main">
               <a:ext uri="{FF2B5EF4-FFF2-40B4-BE49-F238E27FC236}">
-                <a16:creationId xmlns:a16="http://schemas.microsoft.com/office/drawing/2014/main" id="{C824441C-47DF-4A3B-AC0A-3894885AD635}"/>
+                <a16:creationId xmlns:a16="http://schemas.microsoft.com/office/drawing/2014/main" id="{E2890007-8DFB-425F-9AD4-6388B895E510}"/>
               </a:ext>
             </a:extLst>
           </p:cNvPr>
@@ -5134,7 +5844,7 @@
           <p:cNvPr id="4" name="">
             <a:extLst xmlns:a="http://schemas.openxmlformats.org/drawingml/2006/main">
               <a:ext uri="{FF2B5EF4-FFF2-40B4-BE49-F238E27FC236}">
-                <a16:creationId xmlns:a16="http://schemas.microsoft.com/office/drawing/2014/main" id="{D76A394C-50C7-471B-8C22-9BB1A25041B4}"/>
+                <a16:creationId xmlns:a16="http://schemas.microsoft.com/office/drawing/2014/main" id="{5ABA1610-68D6-4C50-9EF4-C88C358A56DE}"/>
               </a:ext>
             </a:extLst>
           </p:cNvPr>
@@ -5169,7 +5879,7 @@
           <p:cNvPr id="5" name="">
             <a:extLst xmlns:a="http://schemas.openxmlformats.org/drawingml/2006/main">
               <a:ext uri="{FF2B5EF4-FFF2-40B4-BE49-F238E27FC236}">
-                <a16:creationId xmlns:a16="http://schemas.microsoft.com/office/drawing/2014/main" id="{608CFF40-39F5-4437-8BAE-B814631A1455}"/>
+                <a16:creationId xmlns:a16="http://schemas.microsoft.com/office/drawing/2014/main" id="{0EEA3DCB-A856-4051-A366-AAA135A0628F}"/>
               </a:ext>
             </a:extLst>
           </p:cNvPr>
@@ -5219,7 +5929,7 @@
           <p:cNvPr id="6" name="">
             <a:extLst xmlns:a="http://schemas.openxmlformats.org/drawingml/2006/main">
               <a:ext uri="{FF2B5EF4-FFF2-40B4-BE49-F238E27FC236}">
-                <a16:creationId xmlns:a16="http://schemas.microsoft.com/office/drawing/2014/main" id="{3AD0750A-7CB9-41D9-8EBE-A8D10DFAFBD9}"/>
+                <a16:creationId xmlns:a16="http://schemas.microsoft.com/office/drawing/2014/main" id="{C93D0F24-3378-4D19-B9AE-719315278D4C}"/>
               </a:ext>
             </a:extLst>
           </p:cNvPr>
@@ -5250,7 +5960,7 @@
           <p:cNvPr id="7" name="">
             <a:extLst xmlns:a="http://schemas.openxmlformats.org/drawingml/2006/main">
               <a:ext uri="{FF2B5EF4-FFF2-40B4-BE49-F238E27FC236}">
-                <a16:creationId xmlns:a16="http://schemas.microsoft.com/office/drawing/2014/main" id="{EE174954-FBEC-483B-B138-85AE35B0101A}"/>
+                <a16:creationId xmlns:a16="http://schemas.microsoft.com/office/drawing/2014/main" id="{EFE09788-8B43-45DA-9447-E84EFA2BAA81}"/>
               </a:ext>
             </a:extLst>
           </p:cNvPr>
@@ -5300,7 +6010,7 @@
           <p:cNvPr id="8" name="">
             <a:extLst xmlns:a="http://schemas.openxmlformats.org/drawingml/2006/main">
               <a:ext uri="{FF2B5EF4-FFF2-40B4-BE49-F238E27FC236}">
-                <a16:creationId xmlns:a16="http://schemas.microsoft.com/office/drawing/2014/main" id="{457A7F49-5706-4F19-BC04-E3D740ECE589}"/>
+                <a16:creationId xmlns:a16="http://schemas.microsoft.com/office/drawing/2014/main" id="{B1AC6FB2-956C-4731-9471-12E60065B91E}"/>
               </a:ext>
             </a:extLst>
           </p:cNvPr>
@@ -5331,7 +6041,7 @@
           <p:cNvPr id="9" name="">
             <a:extLst xmlns:a="http://schemas.openxmlformats.org/drawingml/2006/main">
               <a:ext uri="{FF2B5EF4-FFF2-40B4-BE49-F238E27FC236}">
-                <a16:creationId xmlns:a16="http://schemas.microsoft.com/office/drawing/2014/main" id="{B6A857AC-5EA5-4446-A0A2-5ECCBB2732D4}"/>
+                <a16:creationId xmlns:a16="http://schemas.microsoft.com/office/drawing/2014/main" id="{7D828120-AF67-4780-A9AF-A7E11FC0999A}"/>
               </a:ext>
             </a:extLst>
           </p:cNvPr>
@@ -5381,7 +6091,7 @@
           <p:cNvPr id="10" name="">
             <a:extLst xmlns:a="http://schemas.openxmlformats.org/drawingml/2006/main">
               <a:ext uri="{FF2B5EF4-FFF2-40B4-BE49-F238E27FC236}">
-                <a16:creationId xmlns:a16="http://schemas.microsoft.com/office/drawing/2014/main" id="{65F7332E-78CF-4343-A53B-277E98DDDD9A}"/>
+                <a16:creationId xmlns:a16="http://schemas.microsoft.com/office/drawing/2014/main" id="{A56DA876-E51D-4279-8969-A49082AFF13E}"/>
               </a:ext>
             </a:extLst>
           </p:cNvPr>
@@ -5412,7 +6122,7 @@
           <p:cNvPr id="11" name="">
             <a:extLst xmlns:a="http://schemas.openxmlformats.org/drawingml/2006/main">
               <a:ext uri="{FF2B5EF4-FFF2-40B4-BE49-F238E27FC236}">
-                <a16:creationId xmlns:a16="http://schemas.microsoft.com/office/drawing/2014/main" id="{0EBE3D20-2538-47DD-B072-F2823878FEA2}"/>
+                <a16:creationId xmlns:a16="http://schemas.microsoft.com/office/drawing/2014/main" id="{4F59F405-447C-4137-A4F6-40F6FAC939FE}"/>
               </a:ext>
             </a:extLst>
           </p:cNvPr>
@@ -5462,7 +6172,7 @@
           <p:cNvPr id="12" name="">
             <a:extLst xmlns:a="http://schemas.openxmlformats.org/drawingml/2006/main">
               <a:ext uri="{FF2B5EF4-FFF2-40B4-BE49-F238E27FC236}">
-                <a16:creationId xmlns:a16="http://schemas.microsoft.com/office/drawing/2014/main" id="{037E0167-547C-482F-B78E-A5EF1D1F4FEF}"/>
+                <a16:creationId xmlns:a16="http://schemas.microsoft.com/office/drawing/2014/main" id="{13D0AB8F-742D-4654-967C-B4620E0654D5}"/>
               </a:ext>
             </a:extLst>
           </p:cNvPr>
@@ -5493,7 +6203,7 @@
           <p:cNvPr id="13" name="">
             <a:extLst xmlns:a="http://schemas.openxmlformats.org/drawingml/2006/main">
               <a:ext uri="{FF2B5EF4-FFF2-40B4-BE49-F238E27FC236}">
-                <a16:creationId xmlns:a16="http://schemas.microsoft.com/office/drawing/2014/main" id="{E0CCF127-389E-47ED-B0B2-617D692BA24D}"/>
+                <a16:creationId xmlns:a16="http://schemas.microsoft.com/office/drawing/2014/main" id="{DDCD89D2-AD27-416D-A2B3-3A6A7FA8C79B}"/>
               </a:ext>
             </a:extLst>
           </p:cNvPr>
@@ -5543,7 +6253,7 @@
           <p:cNvPr id="14" name="">
             <a:extLst xmlns:a="http://schemas.openxmlformats.org/drawingml/2006/main">
               <a:ext uri="{FF2B5EF4-FFF2-40B4-BE49-F238E27FC236}">
-                <a16:creationId xmlns:a16="http://schemas.microsoft.com/office/drawing/2014/main" id="{3E5793A2-C081-45B1-834A-9E5E8E5160BB}"/>
+                <a16:creationId xmlns:a16="http://schemas.microsoft.com/office/drawing/2014/main" id="{9C4922AE-E2D4-4938-9335-1F5BCAE26AC8}"/>
               </a:ext>
             </a:extLst>
           </p:cNvPr>
@@ -5574,7 +6284,7 @@
           <p:cNvPr id="15" name="">
             <a:extLst xmlns:a="http://schemas.openxmlformats.org/drawingml/2006/main">
               <a:ext uri="{FF2B5EF4-FFF2-40B4-BE49-F238E27FC236}">
-                <a16:creationId xmlns:a16="http://schemas.microsoft.com/office/drawing/2014/main" id="{3FCA4997-78B9-46B7-A02C-264EB4FE7D83}"/>
+                <a16:creationId xmlns:a16="http://schemas.microsoft.com/office/drawing/2014/main" id="{A1541E48-17B3-4FF5-92B1-761A069F099B}"/>
               </a:ext>
             </a:extLst>
           </p:cNvPr>
@@ -5624,7 +6334,7 @@
           <p:cNvPr id="16" name="">
             <a:extLst xmlns:a="http://schemas.openxmlformats.org/drawingml/2006/main">
               <a:ext uri="{FF2B5EF4-FFF2-40B4-BE49-F238E27FC236}">
-                <a16:creationId xmlns:a16="http://schemas.microsoft.com/office/drawing/2014/main" id="{41E06B2A-C501-41BB-B677-F2FCDE45D13F}"/>
+                <a16:creationId xmlns:a16="http://schemas.microsoft.com/office/drawing/2014/main" id="{D646A760-138C-4EF3-8895-26483272AB30}"/>
               </a:ext>
             </a:extLst>
           </p:cNvPr>
@@ -5659,7 +6369,7 @@
           <p:cNvPr id="17" name="">
             <a:extLst xmlns:a="http://schemas.openxmlformats.org/drawingml/2006/main">
               <a:ext uri="{FF2B5EF4-FFF2-40B4-BE49-F238E27FC236}">
-                <a16:creationId xmlns:a16="http://schemas.microsoft.com/office/drawing/2014/main" id="{F20FF216-BA8B-4AC5-A13F-D0D6254D84FF}"/>
+                <a16:creationId xmlns:a16="http://schemas.microsoft.com/office/drawing/2014/main" id="{1CEAA359-9E00-4943-93DF-E4C38F3A51B9}"/>
               </a:ext>
             </a:extLst>
           </p:cNvPr>
@@ -5709,7 +6419,7 @@
           <p:cNvPr id="18" name="">
             <a:extLst xmlns:a="http://schemas.openxmlformats.org/drawingml/2006/main">
               <a:ext uri="{FF2B5EF4-FFF2-40B4-BE49-F238E27FC236}">
-                <a16:creationId xmlns:a16="http://schemas.microsoft.com/office/drawing/2014/main" id="{AFF661A5-A840-4B6A-8BA7-638C73AA082C}"/>
+                <a16:creationId xmlns:a16="http://schemas.microsoft.com/office/drawing/2014/main" id="{22CF6CA0-327E-4846-9924-D5A71EC4241A}"/>
               </a:ext>
             </a:extLst>
           </p:cNvPr>
@@ -5740,7 +6450,7 @@
           <p:cNvPr id="19" name="">
             <a:extLst xmlns:a="http://schemas.openxmlformats.org/drawingml/2006/main">
               <a:ext uri="{FF2B5EF4-FFF2-40B4-BE49-F238E27FC236}">
-                <a16:creationId xmlns:a16="http://schemas.microsoft.com/office/drawing/2014/main" id="{C05BBF29-7D38-4E93-93E9-3ADC9664037F}"/>
+                <a16:creationId xmlns:a16="http://schemas.microsoft.com/office/drawing/2014/main" id="{8E2BE86C-5F0D-48F9-8CFB-EC43AD8DEE05}"/>
               </a:ext>
             </a:extLst>
           </p:cNvPr>
@@ -5790,7 +6500,7 @@
           <p:cNvPr id="20" name="">
             <a:extLst xmlns:a="http://schemas.openxmlformats.org/drawingml/2006/main">
               <a:ext uri="{FF2B5EF4-FFF2-40B4-BE49-F238E27FC236}">
-                <a16:creationId xmlns:a16="http://schemas.microsoft.com/office/drawing/2014/main" id="{9A00D305-4ED3-4D1B-8944-3C78885C40EF}"/>
+                <a16:creationId xmlns:a16="http://schemas.microsoft.com/office/drawing/2014/main" id="{8610215F-9D9D-4B1E-9A31-02F79C350529}"/>
               </a:ext>
             </a:extLst>
           </p:cNvPr>
@@ -5821,7 +6531,7 @@
           <p:cNvPr id="21" name="">
             <a:extLst xmlns:a="http://schemas.openxmlformats.org/drawingml/2006/main">
               <a:ext uri="{FF2B5EF4-FFF2-40B4-BE49-F238E27FC236}">
-                <a16:creationId xmlns:a16="http://schemas.microsoft.com/office/drawing/2014/main" id="{BCCE2957-721F-4D22-A5FB-A802DD76829D}"/>
+                <a16:creationId xmlns:a16="http://schemas.microsoft.com/office/drawing/2014/main" id="{85F6C6AE-7FD6-4FC4-B525-A42CDCB7779A}"/>
               </a:ext>
             </a:extLst>
           </p:cNvPr>
@@ -5871,7 +6581,7 @@
           <p:cNvPr id="22" name="">
             <a:extLst xmlns:a="http://schemas.openxmlformats.org/drawingml/2006/main">
               <a:ext uri="{FF2B5EF4-FFF2-40B4-BE49-F238E27FC236}">
-                <a16:creationId xmlns:a16="http://schemas.microsoft.com/office/drawing/2014/main" id="{51FFA570-664A-4441-8CFB-96881B24F52E}"/>
+                <a16:creationId xmlns:a16="http://schemas.microsoft.com/office/drawing/2014/main" id="{F4354BC0-B30E-4725-B0B7-DAF51E709E37}"/>
               </a:ext>
             </a:extLst>
           </p:cNvPr>
@@ -5902,7 +6612,7 @@
           <p:cNvPr id="23" name="">
             <a:extLst xmlns:a="http://schemas.openxmlformats.org/drawingml/2006/main">
               <a:ext uri="{FF2B5EF4-FFF2-40B4-BE49-F238E27FC236}">
-                <a16:creationId xmlns:a16="http://schemas.microsoft.com/office/drawing/2014/main" id="{65633EE2-0DFF-496C-A049-875D671FDBEB}"/>
+                <a16:creationId xmlns:a16="http://schemas.microsoft.com/office/drawing/2014/main" id="{E754C1C3-853F-4158-A650-89296055152F}"/>
               </a:ext>
             </a:extLst>
           </p:cNvPr>
@@ -5952,7 +6662,7 @@
           <p:cNvPr id="24" name="">
             <a:extLst xmlns:a="http://schemas.openxmlformats.org/drawingml/2006/main">
               <a:ext uri="{FF2B5EF4-FFF2-40B4-BE49-F238E27FC236}">
-                <a16:creationId xmlns:a16="http://schemas.microsoft.com/office/drawing/2014/main" id="{15DA309B-B513-421F-8D24-38B1F029B44F}"/>
+                <a16:creationId xmlns:a16="http://schemas.microsoft.com/office/drawing/2014/main" id="{0E266711-0298-411C-B716-76852D663B74}"/>
               </a:ext>
             </a:extLst>
           </p:cNvPr>
@@ -5983,7 +6693,7 @@
           <p:cNvPr id="25" name="">
             <a:extLst xmlns:a="http://schemas.openxmlformats.org/drawingml/2006/main">
               <a:ext uri="{FF2B5EF4-FFF2-40B4-BE49-F238E27FC236}">
-                <a16:creationId xmlns:a16="http://schemas.microsoft.com/office/drawing/2014/main" id="{717F9C7C-B1B2-43C9-8A0B-283A4F6F0802}"/>
+                <a16:creationId xmlns:a16="http://schemas.microsoft.com/office/drawing/2014/main" id="{24FBF112-BB6F-4504-B029-C11E37F49354}"/>
               </a:ext>
             </a:extLst>
           </p:cNvPr>
@@ -6033,7 +6743,7 @@
           <p:cNvPr id="26" name="">
             <a:extLst xmlns:a="http://schemas.openxmlformats.org/drawingml/2006/main">
               <a:ext uri="{FF2B5EF4-FFF2-40B4-BE49-F238E27FC236}">
-                <a16:creationId xmlns:a16="http://schemas.microsoft.com/office/drawing/2014/main" id="{97BF6F11-E197-4588-953A-FA82B478A557}"/>
+                <a16:creationId xmlns:a16="http://schemas.microsoft.com/office/drawing/2014/main" id="{AEF493FF-C33C-44B8-B27B-332AD176F358}"/>
               </a:ext>
             </a:extLst>
           </p:cNvPr>
@@ -6081,7 +6791,7 @@
     </p:spTree>
     <p:extLst>
       <p:ext uri="{BB962C8B-B14F-4D97-AF65-F5344CB8AC3E}">
-        <p14:creationId xmlns:p14="http://schemas.microsoft.com/office/powerpoint/2010/main" val="138071836"/>
+        <p14:creationId xmlns:p14="http://schemas.microsoft.com/office/powerpoint/2010/main" val="1695962986"/>
       </p:ext>
     </p:extLst>
   </p:cSld>
@@ -6112,7 +6822,7 @@
           <p:cNvPr id="1" name="">
             <a:extLst xmlns:a="http://schemas.openxmlformats.org/drawingml/2006/main">
               <a:ext uri="{FF2B5EF4-FFF2-40B4-BE49-F238E27FC236}">
-                <a16:creationId xmlns:a16="http://schemas.microsoft.com/office/drawing/2014/main" id="{BF4DB844-203E-4B76-83AC-ABF7E1D7DD1F}"/>
+                <a16:creationId xmlns:a16="http://schemas.microsoft.com/office/drawing/2014/main" id="{6A840E08-C67F-4D29-8350-C5800C17C5B4}"/>
               </a:ext>
             </a:extLst>
           </p:cNvPr>
@@ -6162,7 +6872,7 @@
           <p:cNvPr id="2" name="">
             <a:extLst xmlns:a="http://schemas.openxmlformats.org/drawingml/2006/main">
               <a:ext uri="{FF2B5EF4-FFF2-40B4-BE49-F238E27FC236}">
-                <a16:creationId xmlns:a16="http://schemas.microsoft.com/office/drawing/2014/main" id="{F657AF1B-EE97-466D-8235-14881E0B5A7C}"/>
+                <a16:creationId xmlns:a16="http://schemas.microsoft.com/office/drawing/2014/main" id="{D9C3AFFA-8663-49B0-8D80-D36BFC030491}"/>
               </a:ext>
             </a:extLst>
           </p:cNvPr>
@@ -6212,7 +6922,7 @@
           <p:cNvPr id="3" name="">
             <a:extLst xmlns:a="http://schemas.openxmlformats.org/drawingml/2006/main">
               <a:ext uri="{FF2B5EF4-FFF2-40B4-BE49-F238E27FC236}">
-                <a16:creationId xmlns:a16="http://schemas.microsoft.com/office/drawing/2014/main" id="{2C5CC106-91BA-4226-BFDA-3324D764B0A9}"/>
+                <a16:creationId xmlns:a16="http://schemas.microsoft.com/office/drawing/2014/main" id="{56C854DF-8FDD-4D3D-AFC2-1A3279B4ED8C}"/>
               </a:ext>
             </a:extLst>
           </p:cNvPr>
@@ -6245,7 +6955,7 @@
           <p:cNvPr id="4" name="">
             <a:extLst xmlns:a="http://schemas.openxmlformats.org/drawingml/2006/main">
               <a:ext uri="{FF2B5EF4-FFF2-40B4-BE49-F238E27FC236}">
-                <a16:creationId xmlns:a16="http://schemas.microsoft.com/office/drawing/2014/main" id="{7BB18FA5-5856-4786-A876-9F78BF416430}"/>
+                <a16:creationId xmlns:a16="http://schemas.microsoft.com/office/drawing/2014/main" id="{DF113309-8E05-416C-9D15-7D5D7A2D0151}"/>
               </a:ext>
             </a:extLst>
           </p:cNvPr>
@@ -6280,7 +6990,7 @@
           <p:cNvPr id="5" name="">
             <a:extLst xmlns:a="http://schemas.openxmlformats.org/drawingml/2006/main">
               <a:ext uri="{FF2B5EF4-FFF2-40B4-BE49-F238E27FC236}">
-                <a16:creationId xmlns:a16="http://schemas.microsoft.com/office/drawing/2014/main" id="{642B28B0-2934-4492-A20C-5EF2575250BB}"/>
+                <a16:creationId xmlns:a16="http://schemas.microsoft.com/office/drawing/2014/main" id="{DE08D470-1FE3-4826-973D-C51D593E3371}"/>
               </a:ext>
             </a:extLst>
           </p:cNvPr>
@@ -6330,7 +7040,7 @@
           <p:cNvPr id="6" name="">
             <a:extLst xmlns:a="http://schemas.openxmlformats.org/drawingml/2006/main">
               <a:ext uri="{FF2B5EF4-FFF2-40B4-BE49-F238E27FC236}">
-                <a16:creationId xmlns:a16="http://schemas.microsoft.com/office/drawing/2014/main" id="{1F451813-8BE4-47EB-91D4-75EC29674B67}"/>
+                <a16:creationId xmlns:a16="http://schemas.microsoft.com/office/drawing/2014/main" id="{3D42E8E7-D448-4DB1-BD79-FE89822E2E01}"/>
               </a:ext>
             </a:extLst>
           </p:cNvPr>
@@ -6361,7 +7071,7 @@
           <p:cNvPr id="7" name="">
             <a:extLst xmlns:a="http://schemas.openxmlformats.org/drawingml/2006/main">
               <a:ext uri="{FF2B5EF4-FFF2-40B4-BE49-F238E27FC236}">
-                <a16:creationId xmlns:a16="http://schemas.microsoft.com/office/drawing/2014/main" id="{207D013A-30B6-489A-B37B-91F09E4D80A6}"/>
+                <a16:creationId xmlns:a16="http://schemas.microsoft.com/office/drawing/2014/main" id="{C6AA491D-B115-443C-A18B-3F1BE83A2AB4}"/>
               </a:ext>
             </a:extLst>
           </p:cNvPr>
@@ -6396,7 +7106,7 @@
           <p:cNvPr id="8" name="">
             <a:extLst xmlns:a="http://schemas.openxmlformats.org/drawingml/2006/main">
               <a:ext uri="{FF2B5EF4-FFF2-40B4-BE49-F238E27FC236}">
-                <a16:creationId xmlns:a16="http://schemas.microsoft.com/office/drawing/2014/main" id="{B9635D39-9F8C-4517-A239-A2E47C4A55CE}"/>
+                <a16:creationId xmlns:a16="http://schemas.microsoft.com/office/drawing/2014/main" id="{EA322CF6-CAE4-4F04-A1BD-363184007EF1}"/>
               </a:ext>
             </a:extLst>
           </p:cNvPr>
@@ -6446,7 +7156,7 @@
           <p:cNvPr id="9" name="">
             <a:extLst xmlns:a="http://schemas.openxmlformats.org/drawingml/2006/main">
               <a:ext uri="{FF2B5EF4-FFF2-40B4-BE49-F238E27FC236}">
-                <a16:creationId xmlns:a16="http://schemas.microsoft.com/office/drawing/2014/main" id="{D7AF7FE6-F5B8-4B8F-8C4D-47A2BB986536}"/>
+                <a16:creationId xmlns:a16="http://schemas.microsoft.com/office/drawing/2014/main" id="{1A4117E9-093C-4F57-B62C-CC8CF2114CE0}"/>
               </a:ext>
             </a:extLst>
           </p:cNvPr>
@@ -6477,7 +7187,7 @@
           <p:cNvPr id="10" name="">
             <a:extLst xmlns:a="http://schemas.openxmlformats.org/drawingml/2006/main">
               <a:ext uri="{FF2B5EF4-FFF2-40B4-BE49-F238E27FC236}">
-                <a16:creationId xmlns:a16="http://schemas.microsoft.com/office/drawing/2014/main" id="{E67FF066-BF73-4D6D-861B-D7D9D8F052BA}"/>
+                <a16:creationId xmlns:a16="http://schemas.microsoft.com/office/drawing/2014/main" id="{1C713534-0B45-4277-A66F-3BE47ADB0EE6}"/>
               </a:ext>
             </a:extLst>
           </p:cNvPr>
@@ -6512,7 +7222,7 @@
           <p:cNvPr id="11" name="">
             <a:extLst xmlns:a="http://schemas.openxmlformats.org/drawingml/2006/main">
               <a:ext uri="{FF2B5EF4-FFF2-40B4-BE49-F238E27FC236}">
-                <a16:creationId xmlns:a16="http://schemas.microsoft.com/office/drawing/2014/main" id="{BE47F05B-960C-47AA-9ADF-8D066C83732C}"/>
+                <a16:creationId xmlns:a16="http://schemas.microsoft.com/office/drawing/2014/main" id="{527A480E-7668-4B98-A75D-D16A6FF6115C}"/>
               </a:ext>
             </a:extLst>
           </p:cNvPr>
@@ -6562,7 +7272,7 @@
           <p:cNvPr id="12" name="">
             <a:extLst xmlns:a="http://schemas.openxmlformats.org/drawingml/2006/main">
               <a:ext uri="{FF2B5EF4-FFF2-40B4-BE49-F238E27FC236}">
-                <a16:creationId xmlns:a16="http://schemas.microsoft.com/office/drawing/2014/main" id="{F0460358-2E2C-44A0-9338-C2967EAAB0A4}"/>
+                <a16:creationId xmlns:a16="http://schemas.microsoft.com/office/drawing/2014/main" id="{72D7D8CB-C828-4DBD-8B87-9165170D53E9}"/>
               </a:ext>
             </a:extLst>
           </p:cNvPr>
@@ -6593,7 +7303,7 @@
           <p:cNvPr id="13" name="">
             <a:extLst xmlns:a="http://schemas.openxmlformats.org/drawingml/2006/main">
               <a:ext uri="{FF2B5EF4-FFF2-40B4-BE49-F238E27FC236}">
-                <a16:creationId xmlns:a16="http://schemas.microsoft.com/office/drawing/2014/main" id="{1092F0FD-3477-40A5-9136-AB936622F2B7}"/>
+                <a16:creationId xmlns:a16="http://schemas.microsoft.com/office/drawing/2014/main" id="{973FBD33-D260-430E-9EF0-B939D200C336}"/>
               </a:ext>
             </a:extLst>
           </p:cNvPr>
@@ -6628,7 +7338,7 @@
           <p:cNvPr id="14" name="">
             <a:extLst xmlns:a="http://schemas.openxmlformats.org/drawingml/2006/main">
               <a:ext uri="{FF2B5EF4-FFF2-40B4-BE49-F238E27FC236}">
-                <a16:creationId xmlns:a16="http://schemas.microsoft.com/office/drawing/2014/main" id="{AFD92E67-1725-44B3-810C-FBE6CAEF0F1B}"/>
+                <a16:creationId xmlns:a16="http://schemas.microsoft.com/office/drawing/2014/main" id="{0C5389FB-8945-4D51-BD00-F9C56689973E}"/>
               </a:ext>
             </a:extLst>
           </p:cNvPr>
@@ -6678,7 +7388,7 @@
           <p:cNvPr id="15" name="">
             <a:extLst xmlns:a="http://schemas.openxmlformats.org/drawingml/2006/main">
               <a:ext uri="{FF2B5EF4-FFF2-40B4-BE49-F238E27FC236}">
-                <a16:creationId xmlns:a16="http://schemas.microsoft.com/office/drawing/2014/main" id="{A0654890-1D3B-43A3-91AC-51560F022E39}"/>
+                <a16:creationId xmlns:a16="http://schemas.microsoft.com/office/drawing/2014/main" id="{40DE107D-F137-4AFA-9318-E221DDA4B78D}"/>
               </a:ext>
             </a:extLst>
           </p:cNvPr>
@@ -6713,7 +7423,7 @@
           <p:cNvPr id="16" name="">
             <a:extLst xmlns:a="http://schemas.openxmlformats.org/drawingml/2006/main">
               <a:ext uri="{FF2B5EF4-FFF2-40B4-BE49-F238E27FC236}">
-                <a16:creationId xmlns:a16="http://schemas.microsoft.com/office/drawing/2014/main" id="{615048F9-EB4E-4077-92CD-ECE171728AAB}"/>
+                <a16:creationId xmlns:a16="http://schemas.microsoft.com/office/drawing/2014/main" id="{3568DB2C-935C-44EF-B56A-2843D527C75C}"/>
               </a:ext>
             </a:extLst>
           </p:cNvPr>
@@ -6763,7 +7473,7 @@
           <p:cNvPr id="17" name="">
             <a:extLst xmlns:a="http://schemas.openxmlformats.org/drawingml/2006/main">
               <a:ext uri="{FF2B5EF4-FFF2-40B4-BE49-F238E27FC236}">
-                <a16:creationId xmlns:a16="http://schemas.microsoft.com/office/drawing/2014/main" id="{AD9AF367-4D20-436E-BC2C-CBC8F24DD3E5}"/>
+                <a16:creationId xmlns:a16="http://schemas.microsoft.com/office/drawing/2014/main" id="{A0B88127-D66C-4CAA-BCAF-3B77643C01AA}"/>
               </a:ext>
             </a:extLst>
           </p:cNvPr>
@@ -6811,7 +7521,7 @@
     </p:spTree>
     <p:extLst>
       <p:ext uri="{BB962C8B-B14F-4D97-AF65-F5344CB8AC3E}">
-        <p14:creationId xmlns:p14="http://schemas.microsoft.com/office/powerpoint/2010/main" val="2002627261"/>
+        <p14:creationId xmlns:p14="http://schemas.microsoft.com/office/powerpoint/2010/main" val="1727269420"/>
       </p:ext>
     </p:extLst>
   </p:cSld>
@@ -6842,7 +7552,7 @@
           <p:cNvPr id="1" name="">
             <a:extLst xmlns:a="http://schemas.openxmlformats.org/drawingml/2006/main">
               <a:ext uri="{FF2B5EF4-FFF2-40B4-BE49-F238E27FC236}">
-                <a16:creationId xmlns:a16="http://schemas.microsoft.com/office/drawing/2014/main" id="{CE5F6DBB-CC7D-4EBD-BB07-D6F9D329AB2E}"/>
+                <a16:creationId xmlns:a16="http://schemas.microsoft.com/office/drawing/2014/main" id="{E423FE18-49C8-4C39-B352-7D4F101C4898}"/>
               </a:ext>
             </a:extLst>
           </p:cNvPr>
@@ -6892,7 +7602,7 @@
           <p:cNvPr id="2" name="">
             <a:extLst xmlns:a="http://schemas.openxmlformats.org/drawingml/2006/main">
               <a:ext uri="{FF2B5EF4-FFF2-40B4-BE49-F238E27FC236}">
-                <a16:creationId xmlns:a16="http://schemas.microsoft.com/office/drawing/2014/main" id="{E5F98F62-C008-4FB2-AF3F-86DBBD2484CC}"/>
+                <a16:creationId xmlns:a16="http://schemas.microsoft.com/office/drawing/2014/main" id="{2DF759A4-99E1-4FA2-9073-157D5C9D0190}"/>
               </a:ext>
             </a:extLst>
           </p:cNvPr>
@@ -6942,7 +7652,7 @@
           <p:cNvPr id="3" name="">
             <a:extLst xmlns:a="http://schemas.openxmlformats.org/drawingml/2006/main">
               <a:ext uri="{FF2B5EF4-FFF2-40B4-BE49-F238E27FC236}">
-                <a16:creationId xmlns:a16="http://schemas.microsoft.com/office/drawing/2014/main" id="{61093D7C-3021-4458-869D-820E63CA7550}"/>
+                <a16:creationId xmlns:a16="http://schemas.microsoft.com/office/drawing/2014/main" id="{A01F0FF0-4E95-429D-AE04-E913F6C0C504}"/>
               </a:ext>
             </a:extLst>
           </p:cNvPr>
@@ -6975,7 +7685,7 @@
           <p:cNvPr id="4" name="">
             <a:extLst xmlns:a="http://schemas.openxmlformats.org/drawingml/2006/main">
               <a:ext uri="{FF2B5EF4-FFF2-40B4-BE49-F238E27FC236}">
-                <a16:creationId xmlns:a16="http://schemas.microsoft.com/office/drawing/2014/main" id="{AE96D7ED-87FC-43DC-B44D-B10033550293}"/>
+                <a16:creationId xmlns:a16="http://schemas.microsoft.com/office/drawing/2014/main" id="{D63798DA-C16A-4CAB-9AFA-9877F6058EF4}"/>
               </a:ext>
             </a:extLst>
           </p:cNvPr>
@@ -7010,7 +7720,7 @@
           <p:cNvPr id="5" name="">
             <a:extLst xmlns:a="http://schemas.openxmlformats.org/drawingml/2006/main">
               <a:ext uri="{FF2B5EF4-FFF2-40B4-BE49-F238E27FC236}">
-                <a16:creationId xmlns:a16="http://schemas.microsoft.com/office/drawing/2014/main" id="{853B821C-60FA-434F-8BF2-95762B98A7F2}"/>
+                <a16:creationId xmlns:a16="http://schemas.microsoft.com/office/drawing/2014/main" id="{B576E540-1FC4-4C5E-89FB-4192A43686E7}"/>
               </a:ext>
             </a:extLst>
           </p:cNvPr>
@@ -7045,7 +7755,7 @@
           <p:cNvPr id="6" name="">
             <a:extLst xmlns:a="http://schemas.openxmlformats.org/drawingml/2006/main">
               <a:ext uri="{FF2B5EF4-FFF2-40B4-BE49-F238E27FC236}">
-                <a16:creationId xmlns:a16="http://schemas.microsoft.com/office/drawing/2014/main" id="{A8A24997-3FDD-4164-AA8E-037211CB1AC1}"/>
+                <a16:creationId xmlns:a16="http://schemas.microsoft.com/office/drawing/2014/main" id="{3C0F001A-AE11-4725-9D49-0E223B769962}"/>
               </a:ext>
             </a:extLst>
           </p:cNvPr>
@@ -7095,7 +7805,7 @@
           <p:cNvPr id="7" name="">
             <a:extLst xmlns:a="http://schemas.openxmlformats.org/drawingml/2006/main">
               <a:ext uri="{FF2B5EF4-FFF2-40B4-BE49-F238E27FC236}">
-                <a16:creationId xmlns:a16="http://schemas.microsoft.com/office/drawing/2014/main" id="{E6C50622-B418-45EF-8803-5B302920C30D}"/>
+                <a16:creationId xmlns:a16="http://schemas.microsoft.com/office/drawing/2014/main" id="{FA68A66F-1BF8-4F9D-B0A9-AA6818D1B91F}"/>
               </a:ext>
             </a:extLst>
           </p:cNvPr>
@@ -7145,7 +7855,7 @@
           <p:cNvPr id="8" name="">
             <a:extLst xmlns:a="http://schemas.openxmlformats.org/drawingml/2006/main">
               <a:ext uri="{FF2B5EF4-FFF2-40B4-BE49-F238E27FC236}">
-                <a16:creationId xmlns:a16="http://schemas.microsoft.com/office/drawing/2014/main" id="{13AB00C2-7B08-42F7-AED8-7DC001D94F14}"/>
+                <a16:creationId xmlns:a16="http://schemas.microsoft.com/office/drawing/2014/main" id="{F9D6F89E-CC2D-4294-902C-59375AE807BD}"/>
               </a:ext>
             </a:extLst>
           </p:cNvPr>
@@ -7176,7 +7886,7 @@
           <p:cNvPr id="9" name="">
             <a:extLst xmlns:a="http://schemas.openxmlformats.org/drawingml/2006/main">
               <a:ext uri="{FF2B5EF4-FFF2-40B4-BE49-F238E27FC236}">
-                <a16:creationId xmlns:a16="http://schemas.microsoft.com/office/drawing/2014/main" id="{4658822D-511A-4F2A-A409-7FF15DC9227A}"/>
+                <a16:creationId xmlns:a16="http://schemas.microsoft.com/office/drawing/2014/main" id="{D2A8682C-66A7-4F59-8827-160A800EA7E3}"/>
               </a:ext>
             </a:extLst>
           </p:cNvPr>
@@ -7226,7 +7936,7 @@
           <p:cNvPr id="10" name="">
             <a:extLst xmlns:a="http://schemas.openxmlformats.org/drawingml/2006/main">
               <a:ext uri="{FF2B5EF4-FFF2-40B4-BE49-F238E27FC236}">
-                <a16:creationId xmlns:a16="http://schemas.microsoft.com/office/drawing/2014/main" id="{DF441EA0-F8CE-4C7C-A62B-9AB7DF5FB977}"/>
+                <a16:creationId xmlns:a16="http://schemas.microsoft.com/office/drawing/2014/main" id="{7A9F803A-D8B8-421C-B260-918EAEEA114D}"/>
               </a:ext>
             </a:extLst>
           </p:cNvPr>
@@ -7257,7 +7967,7 @@
           <p:cNvPr id="11" name="">
             <a:extLst xmlns:a="http://schemas.openxmlformats.org/drawingml/2006/main">
               <a:ext uri="{FF2B5EF4-FFF2-40B4-BE49-F238E27FC236}">
-                <a16:creationId xmlns:a16="http://schemas.microsoft.com/office/drawing/2014/main" id="{A448222B-6AD0-4123-BA27-84902E663F56}"/>
+                <a16:creationId xmlns:a16="http://schemas.microsoft.com/office/drawing/2014/main" id="{6B5B968B-BBC9-4B63-883F-E0FBFF4FA70C}"/>
               </a:ext>
             </a:extLst>
           </p:cNvPr>
@@ -7307,7 +8017,7 @@
           <p:cNvPr id="12" name="">
             <a:extLst xmlns:a="http://schemas.openxmlformats.org/drawingml/2006/main">
               <a:ext uri="{FF2B5EF4-FFF2-40B4-BE49-F238E27FC236}">
-                <a16:creationId xmlns:a16="http://schemas.microsoft.com/office/drawing/2014/main" id="{A4573205-E61D-49BD-9F21-B36235632CEE}"/>
+                <a16:creationId xmlns:a16="http://schemas.microsoft.com/office/drawing/2014/main" id="{DFB4318D-1616-4699-8420-CA743EA51CFF}"/>
               </a:ext>
             </a:extLst>
           </p:cNvPr>
@@ -7338,7 +8048,7 @@
           <p:cNvPr id="13" name="">
             <a:extLst xmlns:a="http://schemas.openxmlformats.org/drawingml/2006/main">
               <a:ext uri="{FF2B5EF4-FFF2-40B4-BE49-F238E27FC236}">
-                <a16:creationId xmlns:a16="http://schemas.microsoft.com/office/drawing/2014/main" id="{67AFEFA9-3421-4F34-A284-682E5C90A116}"/>
+                <a16:creationId xmlns:a16="http://schemas.microsoft.com/office/drawing/2014/main" id="{3218905C-B2A5-4C05-9D82-E80F0BC8F46C}"/>
               </a:ext>
             </a:extLst>
           </p:cNvPr>
@@ -7388,7 +8098,7 @@
           <p:cNvPr id="14" name="">
             <a:extLst xmlns:a="http://schemas.openxmlformats.org/drawingml/2006/main">
               <a:ext uri="{FF2B5EF4-FFF2-40B4-BE49-F238E27FC236}">
-                <a16:creationId xmlns:a16="http://schemas.microsoft.com/office/drawing/2014/main" id="{D7329E7A-5070-4C70-9144-E8AB1B07995B}"/>
+                <a16:creationId xmlns:a16="http://schemas.microsoft.com/office/drawing/2014/main" id="{40DDF0C6-F60A-493C-AB55-3A3742C710F3}"/>
               </a:ext>
             </a:extLst>
           </p:cNvPr>
@@ -7419,7 +8129,7 @@
           <p:cNvPr id="15" name="">
             <a:extLst xmlns:a="http://schemas.openxmlformats.org/drawingml/2006/main">
               <a:ext uri="{FF2B5EF4-FFF2-40B4-BE49-F238E27FC236}">
-                <a16:creationId xmlns:a16="http://schemas.microsoft.com/office/drawing/2014/main" id="{5A403A76-4BAC-407C-8E15-08F56F72A358}"/>
+                <a16:creationId xmlns:a16="http://schemas.microsoft.com/office/drawing/2014/main" id="{8C227A99-73E3-4C78-AF48-50AEF3E808D9}"/>
               </a:ext>
             </a:extLst>
           </p:cNvPr>
@@ -7469,7 +8179,7 @@
           <p:cNvPr id="16" name="">
             <a:extLst xmlns:a="http://schemas.openxmlformats.org/drawingml/2006/main">
               <a:ext uri="{FF2B5EF4-FFF2-40B4-BE49-F238E27FC236}">
-                <a16:creationId xmlns:a16="http://schemas.microsoft.com/office/drawing/2014/main" id="{EBDF9DF3-5E29-46C2-814E-A67B44E6604D}"/>
+                <a16:creationId xmlns:a16="http://schemas.microsoft.com/office/drawing/2014/main" id="{B689206B-6294-434D-B049-EDEABA365E84}"/>
               </a:ext>
             </a:extLst>
           </p:cNvPr>
@@ -7500,7 +8210,7 @@
           <p:cNvPr id="17" name="">
             <a:extLst xmlns:a="http://schemas.openxmlformats.org/drawingml/2006/main">
               <a:ext uri="{FF2B5EF4-FFF2-40B4-BE49-F238E27FC236}">
-                <a16:creationId xmlns:a16="http://schemas.microsoft.com/office/drawing/2014/main" id="{D9ED026A-4174-4406-9F8F-23102F79DD1F}"/>
+                <a16:creationId xmlns:a16="http://schemas.microsoft.com/office/drawing/2014/main" id="{EAB62372-87D4-43E6-840A-731D9B2B640E}"/>
               </a:ext>
             </a:extLst>
           </p:cNvPr>
@@ -7550,7 +8260,7 @@
           <p:cNvPr id="18" name="">
             <a:extLst xmlns:a="http://schemas.openxmlformats.org/drawingml/2006/main">
               <a:ext uri="{FF2B5EF4-FFF2-40B4-BE49-F238E27FC236}">
-                <a16:creationId xmlns:a16="http://schemas.microsoft.com/office/drawing/2014/main" id="{5092516C-0586-45E5-9D88-A97853DAB758}"/>
+                <a16:creationId xmlns:a16="http://schemas.microsoft.com/office/drawing/2014/main" id="{D0CD1280-FD28-48B2-BF63-42D448393601}"/>
               </a:ext>
             </a:extLst>
           </p:cNvPr>
@@ -7581,7 +8291,7 @@
           <p:cNvPr id="19" name="">
             <a:extLst xmlns:a="http://schemas.openxmlformats.org/drawingml/2006/main">
               <a:ext uri="{FF2B5EF4-FFF2-40B4-BE49-F238E27FC236}">
-                <a16:creationId xmlns:a16="http://schemas.microsoft.com/office/drawing/2014/main" id="{7B2C9635-1D94-4F5E-AA03-7F1A1295531F}"/>
+                <a16:creationId xmlns:a16="http://schemas.microsoft.com/office/drawing/2014/main" id="{465DE92B-61F7-48B3-BDAB-FEA46F3912D4}"/>
               </a:ext>
             </a:extLst>
           </p:cNvPr>
@@ -7631,7 +8341,7 @@
           <p:cNvPr id="20" name="">
             <a:extLst xmlns:a="http://schemas.openxmlformats.org/drawingml/2006/main">
               <a:ext uri="{FF2B5EF4-FFF2-40B4-BE49-F238E27FC236}">
-                <a16:creationId xmlns:a16="http://schemas.microsoft.com/office/drawing/2014/main" id="{392E08F9-CB24-45BC-802F-626AC9917505}"/>
+                <a16:creationId xmlns:a16="http://schemas.microsoft.com/office/drawing/2014/main" id="{02133AA9-684F-4D66-9B33-B8509A1B73FB}"/>
               </a:ext>
             </a:extLst>
           </p:cNvPr>
@@ -7662,7 +8372,7 @@
           <p:cNvPr id="21" name="">
             <a:extLst xmlns:a="http://schemas.openxmlformats.org/drawingml/2006/main">
               <a:ext uri="{FF2B5EF4-FFF2-40B4-BE49-F238E27FC236}">
-                <a16:creationId xmlns:a16="http://schemas.microsoft.com/office/drawing/2014/main" id="{E440289E-6001-4106-86D5-EF4122F7B3C6}"/>
+                <a16:creationId xmlns:a16="http://schemas.microsoft.com/office/drawing/2014/main" id="{6DFA0F5D-EC87-4188-89A6-F95D966AB9E9}"/>
               </a:ext>
             </a:extLst>
           </p:cNvPr>
@@ -7712,7 +8422,7 @@
           <p:cNvPr id="22" name="">
             <a:extLst xmlns:a="http://schemas.openxmlformats.org/drawingml/2006/main">
               <a:ext uri="{FF2B5EF4-FFF2-40B4-BE49-F238E27FC236}">
-                <a16:creationId xmlns:a16="http://schemas.microsoft.com/office/drawing/2014/main" id="{624AAC33-05FA-474B-A984-920B8C39015F}"/>
+                <a16:creationId xmlns:a16="http://schemas.microsoft.com/office/drawing/2014/main" id="{15FF4E0D-D2AC-42AA-8731-24D9C7418620}"/>
               </a:ext>
             </a:extLst>
           </p:cNvPr>
@@ -7743,7 +8453,7 @@
           <p:cNvPr id="23" name="">
             <a:extLst xmlns:a="http://schemas.openxmlformats.org/drawingml/2006/main">
               <a:ext uri="{FF2B5EF4-FFF2-40B4-BE49-F238E27FC236}">
-                <a16:creationId xmlns:a16="http://schemas.microsoft.com/office/drawing/2014/main" id="{F11FA9B6-BAFF-4E61-97E0-F01A283E6866}"/>
+                <a16:creationId xmlns:a16="http://schemas.microsoft.com/office/drawing/2014/main" id="{043426F0-B7B7-45A3-A468-DB0D524F2EB5}"/>
               </a:ext>
             </a:extLst>
           </p:cNvPr>
@@ -7791,7 +8501,7 @@
     </p:spTree>
     <p:extLst>
       <p:ext uri="{BB962C8B-B14F-4D97-AF65-F5344CB8AC3E}">
-        <p14:creationId xmlns:p14="http://schemas.microsoft.com/office/powerpoint/2010/main" val="1094014076"/>
+        <p14:creationId xmlns:p14="http://schemas.microsoft.com/office/powerpoint/2010/main" val="2008708327"/>
       </p:ext>
     </p:extLst>
   </p:cSld>
@@ -7822,7 +8532,7 @@
           <p:cNvPr id="1" name="">
             <a:extLst xmlns:a="http://schemas.openxmlformats.org/drawingml/2006/main">
               <a:ext uri="{FF2B5EF4-FFF2-40B4-BE49-F238E27FC236}">
-                <a16:creationId xmlns:a16="http://schemas.microsoft.com/office/drawing/2014/main" id="{4957E6DF-8D33-48F0-BFD5-07A2B86B989D}"/>
+                <a16:creationId xmlns:a16="http://schemas.microsoft.com/office/drawing/2014/main" id="{524AA359-3563-444C-B55E-F58792039F13}"/>
               </a:ext>
             </a:extLst>
           </p:cNvPr>
@@ -7872,7 +8582,7 @@
           <p:cNvPr id="2" name="">
             <a:extLst xmlns:a="http://schemas.openxmlformats.org/drawingml/2006/main">
               <a:ext uri="{FF2B5EF4-FFF2-40B4-BE49-F238E27FC236}">
-                <a16:creationId xmlns:a16="http://schemas.microsoft.com/office/drawing/2014/main" id="{F0823E1B-4541-469A-A946-29C0C8BC124A}"/>
+                <a16:creationId xmlns:a16="http://schemas.microsoft.com/office/drawing/2014/main" id="{845A48C0-BC00-4C88-A764-A3203DB77200}"/>
               </a:ext>
             </a:extLst>
           </p:cNvPr>
@@ -7922,7 +8632,7 @@
           <p:cNvPr id="3" name="">
             <a:extLst xmlns:a="http://schemas.openxmlformats.org/drawingml/2006/main">
               <a:ext uri="{FF2B5EF4-FFF2-40B4-BE49-F238E27FC236}">
-                <a16:creationId xmlns:a16="http://schemas.microsoft.com/office/drawing/2014/main" id="{25121B9D-0B0E-4783-BFBA-6390CE346164}"/>
+                <a16:creationId xmlns:a16="http://schemas.microsoft.com/office/drawing/2014/main" id="{0D30E0CA-8ABC-4EAC-B0C2-12C615A0127C}"/>
               </a:ext>
             </a:extLst>
           </p:cNvPr>
@@ -7955,7 +8665,7 @@
           <p:cNvPr id="4" name="">
             <a:extLst xmlns:a="http://schemas.openxmlformats.org/drawingml/2006/main">
               <a:ext uri="{FF2B5EF4-FFF2-40B4-BE49-F238E27FC236}">
-                <a16:creationId xmlns:a16="http://schemas.microsoft.com/office/drawing/2014/main" id="{554F84EB-DE9D-4180-9A77-9F795A621564}"/>
+                <a16:creationId xmlns:a16="http://schemas.microsoft.com/office/drawing/2014/main" id="{2153A0FD-A358-4229-B1B3-1FCB56FC2B4A}"/>
               </a:ext>
             </a:extLst>
           </p:cNvPr>
@@ -7990,7 +8700,7 @@
           <p:cNvPr id="5" name="">
             <a:extLst xmlns:a="http://schemas.openxmlformats.org/drawingml/2006/main">
               <a:ext uri="{FF2B5EF4-FFF2-40B4-BE49-F238E27FC236}">
-                <a16:creationId xmlns:a16="http://schemas.microsoft.com/office/drawing/2014/main" id="{D1310A29-0109-4B97-8D1C-B275B98E177B}"/>
+                <a16:creationId xmlns:a16="http://schemas.microsoft.com/office/drawing/2014/main" id="{34CCEA44-D6BB-4DE6-A92B-9BFC2CC331AD}"/>
               </a:ext>
             </a:extLst>
           </p:cNvPr>
@@ -8025,7 +8735,7 @@
           <p:cNvPr id="6" name="">
             <a:extLst xmlns:a="http://schemas.openxmlformats.org/drawingml/2006/main">
               <a:ext uri="{FF2B5EF4-FFF2-40B4-BE49-F238E27FC236}">
-                <a16:creationId xmlns:a16="http://schemas.microsoft.com/office/drawing/2014/main" id="{E38230A1-5BA5-4702-A822-DDA122EAAB33}"/>
+                <a16:creationId xmlns:a16="http://schemas.microsoft.com/office/drawing/2014/main" id="{FF89AAF8-AB11-40BC-8208-A580F89F9AE4}"/>
               </a:ext>
             </a:extLst>
           </p:cNvPr>
@@ -8060,7 +8770,7 @@
           <p:cNvPr id="7" name="">
             <a:extLst xmlns:a="http://schemas.openxmlformats.org/drawingml/2006/main">
               <a:ext uri="{FF2B5EF4-FFF2-40B4-BE49-F238E27FC236}">
-                <a16:creationId xmlns:a16="http://schemas.microsoft.com/office/drawing/2014/main" id="{F31348D2-EDE4-4EC3-B216-3F53FA0CD19E}"/>
+                <a16:creationId xmlns:a16="http://schemas.microsoft.com/office/drawing/2014/main" id="{60137C13-C84F-4646-B25F-969BC134799E}"/>
               </a:ext>
             </a:extLst>
           </p:cNvPr>
@@ -8110,7 +8820,7 @@
           <p:cNvPr id="8" name="">
             <a:extLst xmlns:a="http://schemas.openxmlformats.org/drawingml/2006/main">
               <a:ext uri="{FF2B5EF4-FFF2-40B4-BE49-F238E27FC236}">
-                <a16:creationId xmlns:a16="http://schemas.microsoft.com/office/drawing/2014/main" id="{3C00BD6A-EEE3-432D-B9D2-59957176FF5E}"/>
+                <a16:creationId xmlns:a16="http://schemas.microsoft.com/office/drawing/2014/main" id="{8F180A79-F8B2-4BF8-AA4A-C5A0E534CC81}"/>
               </a:ext>
             </a:extLst>
           </p:cNvPr>
@@ -8160,7 +8870,7 @@
           <p:cNvPr id="9" name="">
             <a:extLst xmlns:a="http://schemas.openxmlformats.org/drawingml/2006/main">
               <a:ext uri="{FF2B5EF4-FFF2-40B4-BE49-F238E27FC236}">
-                <a16:creationId xmlns:a16="http://schemas.microsoft.com/office/drawing/2014/main" id="{DE49B5CF-AA58-4B4A-9247-E6CB868B8EFC}"/>
+                <a16:creationId xmlns:a16="http://schemas.microsoft.com/office/drawing/2014/main" id="{8C76D08E-5A54-468A-B9BE-30CA0375F966}"/>
               </a:ext>
             </a:extLst>
           </p:cNvPr>
@@ -8210,7 +8920,7 @@
           <p:cNvPr id="10" name="">
             <a:extLst xmlns:a="http://schemas.openxmlformats.org/drawingml/2006/main">
               <a:ext uri="{FF2B5EF4-FFF2-40B4-BE49-F238E27FC236}">
-                <a16:creationId xmlns:a16="http://schemas.microsoft.com/office/drawing/2014/main" id="{C849A663-6CAF-438F-8021-2908343EC0B9}"/>
+                <a16:creationId xmlns:a16="http://schemas.microsoft.com/office/drawing/2014/main" id="{14178E92-587B-4B1E-AB38-6A874BB8CE7E}"/>
               </a:ext>
             </a:extLst>
           </p:cNvPr>
@@ -8260,7 +8970,7 @@
           <p:cNvPr id="11" name="">
             <a:extLst xmlns:a="http://schemas.openxmlformats.org/drawingml/2006/main">
               <a:ext uri="{FF2B5EF4-FFF2-40B4-BE49-F238E27FC236}">
-                <a16:creationId xmlns:a16="http://schemas.microsoft.com/office/drawing/2014/main" id="{FA6BAE1E-D37E-468E-8CAA-5FF9A7D1F73F}"/>
+                <a16:creationId xmlns:a16="http://schemas.microsoft.com/office/drawing/2014/main" id="{6E902757-D6D2-45B0-AFB4-8363A3C740E4}"/>
               </a:ext>
             </a:extLst>
           </p:cNvPr>
@@ -8310,7 +9020,7 @@
           <p:cNvPr id="12" name="">
             <a:extLst xmlns:a="http://schemas.openxmlformats.org/drawingml/2006/main">
               <a:ext uri="{FF2B5EF4-FFF2-40B4-BE49-F238E27FC236}">
-                <a16:creationId xmlns:a16="http://schemas.microsoft.com/office/drawing/2014/main" id="{10E2EEA2-35B6-4345-8C7C-574EA0B41DFD}"/>
+                <a16:creationId xmlns:a16="http://schemas.microsoft.com/office/drawing/2014/main" id="{3E5F805B-057C-486A-9310-26D86E45C562}"/>
               </a:ext>
             </a:extLst>
           </p:cNvPr>
@@ -8360,7 +9070,7 @@
           <p:cNvPr id="13" name="">
             <a:extLst xmlns:a="http://schemas.openxmlformats.org/drawingml/2006/main">
               <a:ext uri="{FF2B5EF4-FFF2-40B4-BE49-F238E27FC236}">
-                <a16:creationId xmlns:a16="http://schemas.microsoft.com/office/drawing/2014/main" id="{32F08A7D-6002-4052-8683-7943D1C98359}"/>
+                <a16:creationId xmlns:a16="http://schemas.microsoft.com/office/drawing/2014/main" id="{866F7B0D-E5A9-4EC5-B872-5D9CCD8360EA}"/>
               </a:ext>
             </a:extLst>
           </p:cNvPr>
@@ -8408,7 +9118,7 @@
     </p:spTree>
     <p:extLst>
       <p:ext uri="{BB962C8B-B14F-4D97-AF65-F5344CB8AC3E}">
-        <p14:creationId xmlns:p14="http://schemas.microsoft.com/office/powerpoint/2010/main" val="1404789962"/>
+        <p14:creationId xmlns:p14="http://schemas.microsoft.com/office/powerpoint/2010/main" val="359685640"/>
       </p:ext>
     </p:extLst>
   </p:cSld>
@@ -8439,7 +9149,7 @@
           <p:cNvPr id="1" name="">
             <a:extLst xmlns:a="http://schemas.openxmlformats.org/drawingml/2006/main">
               <a:ext uri="{FF2B5EF4-FFF2-40B4-BE49-F238E27FC236}">
-                <a16:creationId xmlns:a16="http://schemas.microsoft.com/office/drawing/2014/main" id="{B1F4F06C-685D-4FB0-A1F7-77EADF5397A2}"/>
+                <a16:creationId xmlns:a16="http://schemas.microsoft.com/office/drawing/2014/main" id="{D732A811-E5AB-48FB-A9B0-3B57C9921FAB}"/>
               </a:ext>
             </a:extLst>
           </p:cNvPr>
@@ -8489,7 +9199,7 @@
           <p:cNvPr id="2" name="">
             <a:extLst xmlns:a="http://schemas.openxmlformats.org/drawingml/2006/main">
               <a:ext uri="{FF2B5EF4-FFF2-40B4-BE49-F238E27FC236}">
-                <a16:creationId xmlns:a16="http://schemas.microsoft.com/office/drawing/2014/main" id="{A6444397-8ED2-4192-81AF-FB1BC2C53825}"/>
+                <a16:creationId xmlns:a16="http://schemas.microsoft.com/office/drawing/2014/main" id="{50492119-5453-4296-8DA9-919803DA6344}"/>
               </a:ext>
             </a:extLst>
           </p:cNvPr>
@@ -8539,7 +9249,7 @@
           <p:cNvPr id="3" name="">
             <a:extLst xmlns:a="http://schemas.openxmlformats.org/drawingml/2006/main">
               <a:ext uri="{FF2B5EF4-FFF2-40B4-BE49-F238E27FC236}">
-                <a16:creationId xmlns:a16="http://schemas.microsoft.com/office/drawing/2014/main" id="{E8562D3F-9004-49CC-93EF-FC14EFD2E659}"/>
+                <a16:creationId xmlns:a16="http://schemas.microsoft.com/office/drawing/2014/main" id="{F0E7F188-08E8-40EE-B871-048AAE84B257}"/>
               </a:ext>
             </a:extLst>
           </p:cNvPr>
@@ -8572,7 +9282,7 @@
           <p:cNvPr id="4" name="">
             <a:extLst xmlns:a="http://schemas.openxmlformats.org/drawingml/2006/main">
               <a:ext uri="{FF2B5EF4-FFF2-40B4-BE49-F238E27FC236}">
-                <a16:creationId xmlns:a16="http://schemas.microsoft.com/office/drawing/2014/main" id="{88C4C8D9-CBEE-4149-A7DA-F9EA53CD9A7D}"/>
+                <a16:creationId xmlns:a16="http://schemas.microsoft.com/office/drawing/2014/main" id="{C2E41CB6-9DD8-4E90-B352-66283FB50EB5}"/>
               </a:ext>
             </a:extLst>
           </p:cNvPr>
@@ -8607,7 +9317,7 @@
           <p:cNvPr id="5" name="">
             <a:extLst xmlns:a="http://schemas.openxmlformats.org/drawingml/2006/main">
               <a:ext uri="{FF2B5EF4-FFF2-40B4-BE49-F238E27FC236}">
-                <a16:creationId xmlns:a16="http://schemas.microsoft.com/office/drawing/2014/main" id="{91B6BC0E-3A56-4921-85FD-F766A57817E0}"/>
+                <a16:creationId xmlns:a16="http://schemas.microsoft.com/office/drawing/2014/main" id="{0B25E74B-C24B-41F8-AC30-39A5C94777D5}"/>
               </a:ext>
             </a:extLst>
           </p:cNvPr>
@@ -8657,7 +9367,7 @@
           <p:cNvPr id="6" name="">
             <a:extLst xmlns:a="http://schemas.openxmlformats.org/drawingml/2006/main">
               <a:ext uri="{FF2B5EF4-FFF2-40B4-BE49-F238E27FC236}">
-                <a16:creationId xmlns:a16="http://schemas.microsoft.com/office/drawing/2014/main" id="{6D485949-F335-4448-8DF2-7A1C1895E7CF}"/>
+                <a16:creationId xmlns:a16="http://schemas.microsoft.com/office/drawing/2014/main" id="{AC51FD01-9301-4BD9-A835-EED4782EA348}"/>
               </a:ext>
             </a:extLst>
           </p:cNvPr>
@@ -8688,7 +9398,7 @@
           <p:cNvPr id="7" name="">
             <a:extLst xmlns:a="http://schemas.openxmlformats.org/drawingml/2006/main">
               <a:ext uri="{FF2B5EF4-FFF2-40B4-BE49-F238E27FC236}">
-                <a16:creationId xmlns:a16="http://schemas.microsoft.com/office/drawing/2014/main" id="{80554F95-8511-4FC9-8B43-DB13C12F421A}"/>
+                <a16:creationId xmlns:a16="http://schemas.microsoft.com/office/drawing/2014/main" id="{77C15502-0682-43F1-86BD-ADAEC4795C48}"/>
               </a:ext>
             </a:extLst>
           </p:cNvPr>
@@ -8738,7 +9448,7 @@
           <p:cNvPr id="8" name="">
             <a:extLst xmlns:a="http://schemas.openxmlformats.org/drawingml/2006/main">
               <a:ext uri="{FF2B5EF4-FFF2-40B4-BE49-F238E27FC236}">
-                <a16:creationId xmlns:a16="http://schemas.microsoft.com/office/drawing/2014/main" id="{D272D281-7496-4142-8A75-842F52FCDB90}"/>
+                <a16:creationId xmlns:a16="http://schemas.microsoft.com/office/drawing/2014/main" id="{9ABB4E3E-1DAF-4446-B9F7-CB82F1DEF121}"/>
               </a:ext>
             </a:extLst>
           </p:cNvPr>
@@ -8769,7 +9479,7 @@
           <p:cNvPr id="9" name="">
             <a:extLst xmlns:a="http://schemas.openxmlformats.org/drawingml/2006/main">
               <a:ext uri="{FF2B5EF4-FFF2-40B4-BE49-F238E27FC236}">
-                <a16:creationId xmlns:a16="http://schemas.microsoft.com/office/drawing/2014/main" id="{14F19489-3C17-47C3-987B-13F433A28DDD}"/>
+                <a16:creationId xmlns:a16="http://schemas.microsoft.com/office/drawing/2014/main" id="{71D9B4C9-E1B8-414C-B5F4-80F15E2FB16F}"/>
               </a:ext>
             </a:extLst>
           </p:cNvPr>
@@ -8819,7 +9529,7 @@
           <p:cNvPr id="10" name="">
             <a:extLst xmlns:a="http://schemas.openxmlformats.org/drawingml/2006/main">
               <a:ext uri="{FF2B5EF4-FFF2-40B4-BE49-F238E27FC236}">
-                <a16:creationId xmlns:a16="http://schemas.microsoft.com/office/drawing/2014/main" id="{D5980CA1-48DA-4A19-ADF3-1CEB47FE0ACC}"/>
+                <a16:creationId xmlns:a16="http://schemas.microsoft.com/office/drawing/2014/main" id="{8F0DA46C-ECDC-48EF-82E9-A154D85139B8}"/>
               </a:ext>
             </a:extLst>
           </p:cNvPr>
@@ -8850,7 +9560,7 @@
           <p:cNvPr id="11" name="">
             <a:extLst xmlns:a="http://schemas.openxmlformats.org/drawingml/2006/main">
               <a:ext uri="{FF2B5EF4-FFF2-40B4-BE49-F238E27FC236}">
-                <a16:creationId xmlns:a16="http://schemas.microsoft.com/office/drawing/2014/main" id="{EF03EFB7-D871-43AB-A38B-66F2D9603F0D}"/>
+                <a16:creationId xmlns:a16="http://schemas.microsoft.com/office/drawing/2014/main" id="{FEE0F941-3587-4E2C-9BF5-37EFFB5B875C}"/>
               </a:ext>
             </a:extLst>
           </p:cNvPr>
@@ -8900,7 +9610,7 @@
           <p:cNvPr id="12" name="">
             <a:extLst xmlns:a="http://schemas.openxmlformats.org/drawingml/2006/main">
               <a:ext uri="{FF2B5EF4-FFF2-40B4-BE49-F238E27FC236}">
-                <a16:creationId xmlns:a16="http://schemas.microsoft.com/office/drawing/2014/main" id="{E87BE44E-CE9B-4CFA-BC12-0121E77024B1}"/>
+                <a16:creationId xmlns:a16="http://schemas.microsoft.com/office/drawing/2014/main" id="{E4220817-FDFA-45FF-8A20-B956BFD1E5D9}"/>
               </a:ext>
             </a:extLst>
           </p:cNvPr>
@@ -8931,7 +9641,7 @@
           <p:cNvPr id="13" name="">
             <a:extLst xmlns:a="http://schemas.openxmlformats.org/drawingml/2006/main">
               <a:ext uri="{FF2B5EF4-FFF2-40B4-BE49-F238E27FC236}">
-                <a16:creationId xmlns:a16="http://schemas.microsoft.com/office/drawing/2014/main" id="{9B0988AF-C765-41B1-A38A-5C77F29F40AD}"/>
+                <a16:creationId xmlns:a16="http://schemas.microsoft.com/office/drawing/2014/main" id="{0BAB0FFB-8111-468C-A51A-8BBB54112276}"/>
               </a:ext>
             </a:extLst>
           </p:cNvPr>
@@ -8981,7 +9691,7 @@
           <p:cNvPr id="14" name="">
             <a:extLst xmlns:a="http://schemas.openxmlformats.org/drawingml/2006/main">
               <a:ext uri="{FF2B5EF4-FFF2-40B4-BE49-F238E27FC236}">
-                <a16:creationId xmlns:a16="http://schemas.microsoft.com/office/drawing/2014/main" id="{E0091A29-20C3-4098-97ED-B1C41F108921}"/>
+                <a16:creationId xmlns:a16="http://schemas.microsoft.com/office/drawing/2014/main" id="{9AEE69CA-526F-4846-824E-23B781A9DE0B}"/>
               </a:ext>
             </a:extLst>
           </p:cNvPr>
@@ -9016,7 +9726,7 @@
           <p:cNvPr id="15" name="">
             <a:extLst xmlns:a="http://schemas.openxmlformats.org/drawingml/2006/main">
               <a:ext uri="{FF2B5EF4-FFF2-40B4-BE49-F238E27FC236}">
-                <a16:creationId xmlns:a16="http://schemas.microsoft.com/office/drawing/2014/main" id="{D37B2C7D-2A68-45CC-95AC-DFAB12FD79A1}"/>
+                <a16:creationId xmlns:a16="http://schemas.microsoft.com/office/drawing/2014/main" id="{15E47B87-E538-4C97-9D58-74E1AF29FEFB}"/>
               </a:ext>
             </a:extLst>
           </p:cNvPr>
@@ -9066,7 +9776,7 @@
           <p:cNvPr id="16" name="">
             <a:extLst xmlns:a="http://schemas.openxmlformats.org/drawingml/2006/main">
               <a:ext uri="{FF2B5EF4-FFF2-40B4-BE49-F238E27FC236}">
-                <a16:creationId xmlns:a16="http://schemas.microsoft.com/office/drawing/2014/main" id="{2546B165-BB8A-4DC0-8742-DD490817F4E9}"/>
+                <a16:creationId xmlns:a16="http://schemas.microsoft.com/office/drawing/2014/main" id="{EE534865-3C49-4652-81B3-4C9535F9B15B}"/>
               </a:ext>
             </a:extLst>
           </p:cNvPr>
@@ -9097,7 +9807,7 @@
           <p:cNvPr id="17" name="">
             <a:extLst xmlns:a="http://schemas.openxmlformats.org/drawingml/2006/main">
               <a:ext uri="{FF2B5EF4-FFF2-40B4-BE49-F238E27FC236}">
-                <a16:creationId xmlns:a16="http://schemas.microsoft.com/office/drawing/2014/main" id="{A01493C1-0437-44E4-B728-561519AE8D18}"/>
+                <a16:creationId xmlns:a16="http://schemas.microsoft.com/office/drawing/2014/main" id="{6950AE5E-8D41-4D48-986E-4CA4BC570AA5}"/>
               </a:ext>
             </a:extLst>
           </p:cNvPr>
@@ -9147,7 +9857,7 @@
           <p:cNvPr id="18" name="">
             <a:extLst xmlns:a="http://schemas.openxmlformats.org/drawingml/2006/main">
               <a:ext uri="{FF2B5EF4-FFF2-40B4-BE49-F238E27FC236}">
-                <a16:creationId xmlns:a16="http://schemas.microsoft.com/office/drawing/2014/main" id="{88328B99-A0D4-4973-A1A2-2E7C644F399B}"/>
+                <a16:creationId xmlns:a16="http://schemas.microsoft.com/office/drawing/2014/main" id="{FD607EB2-FDDE-4B7C-BDA6-5326DE6D60FB}"/>
               </a:ext>
             </a:extLst>
           </p:cNvPr>
@@ -9178,7 +9888,7 @@
           <p:cNvPr id="19" name="">
             <a:extLst xmlns:a="http://schemas.openxmlformats.org/drawingml/2006/main">
               <a:ext uri="{FF2B5EF4-FFF2-40B4-BE49-F238E27FC236}">
-                <a16:creationId xmlns:a16="http://schemas.microsoft.com/office/drawing/2014/main" id="{9D06EDD3-3943-4ADF-99E9-D27B00A4B46E}"/>
+                <a16:creationId xmlns:a16="http://schemas.microsoft.com/office/drawing/2014/main" id="{17069432-DA0A-4182-AC1A-CFA2CB5EB0F9}"/>
               </a:ext>
             </a:extLst>
           </p:cNvPr>
@@ -9228,7 +9938,7 @@
           <p:cNvPr id="20" name="">
             <a:extLst xmlns:a="http://schemas.openxmlformats.org/drawingml/2006/main">
               <a:ext uri="{FF2B5EF4-FFF2-40B4-BE49-F238E27FC236}">
-                <a16:creationId xmlns:a16="http://schemas.microsoft.com/office/drawing/2014/main" id="{2992B66F-22D6-4E62-8F2D-EC65E951FF8B}"/>
+                <a16:creationId xmlns:a16="http://schemas.microsoft.com/office/drawing/2014/main" id="{DBFBD00D-5B60-48CF-B48B-E6A5596305BF}"/>
               </a:ext>
             </a:extLst>
           </p:cNvPr>
@@ -9259,7 +9969,7 @@
           <p:cNvPr id="21" name="">
             <a:extLst xmlns:a="http://schemas.openxmlformats.org/drawingml/2006/main">
               <a:ext uri="{FF2B5EF4-FFF2-40B4-BE49-F238E27FC236}">
-                <a16:creationId xmlns:a16="http://schemas.microsoft.com/office/drawing/2014/main" id="{B0A57169-0B98-42EC-B805-39988D0154CC}"/>
+                <a16:creationId xmlns:a16="http://schemas.microsoft.com/office/drawing/2014/main" id="{5DAA6431-963A-4C08-B232-29FE23E8BFE5}"/>
               </a:ext>
             </a:extLst>
           </p:cNvPr>
@@ -9309,7 +10019,7 @@
           <p:cNvPr id="22" name="">
             <a:extLst xmlns:a="http://schemas.openxmlformats.org/drawingml/2006/main">
               <a:ext uri="{FF2B5EF4-FFF2-40B4-BE49-F238E27FC236}">
-                <a16:creationId xmlns:a16="http://schemas.microsoft.com/office/drawing/2014/main" id="{0367FE2E-3109-49D2-B732-6BA880E4E282}"/>
+                <a16:creationId xmlns:a16="http://schemas.microsoft.com/office/drawing/2014/main" id="{4F881C80-47E8-463D-8D74-362CCB0B045C}"/>
               </a:ext>
             </a:extLst>
           </p:cNvPr>
@@ -9340,7 +10050,7 @@
           <p:cNvPr id="23" name="">
             <a:extLst xmlns:a="http://schemas.openxmlformats.org/drawingml/2006/main">
               <a:ext uri="{FF2B5EF4-FFF2-40B4-BE49-F238E27FC236}">
-                <a16:creationId xmlns:a16="http://schemas.microsoft.com/office/drawing/2014/main" id="{FDE63C90-6CFF-447B-ABA0-1597606B19F7}"/>
+                <a16:creationId xmlns:a16="http://schemas.microsoft.com/office/drawing/2014/main" id="{BB4CF5A3-9FBE-46BF-9A5F-9BDE45DC041F}"/>
               </a:ext>
             </a:extLst>
           </p:cNvPr>
@@ -9390,7 +10100,7 @@
           <p:cNvPr id="24" name="">
             <a:extLst xmlns:a="http://schemas.openxmlformats.org/drawingml/2006/main">
               <a:ext uri="{FF2B5EF4-FFF2-40B4-BE49-F238E27FC236}">
-                <a16:creationId xmlns:a16="http://schemas.microsoft.com/office/drawing/2014/main" id="{83FD460C-7163-425D-B61A-9092E693EFBD}"/>
+                <a16:creationId xmlns:a16="http://schemas.microsoft.com/office/drawing/2014/main" id="{A990D80C-4506-40A7-9ED3-4B963CE8E820}"/>
               </a:ext>
             </a:extLst>
           </p:cNvPr>
@@ -9425,7 +10135,7 @@
           <p:cNvPr id="25" name="">
             <a:extLst xmlns:a="http://schemas.openxmlformats.org/drawingml/2006/main">
               <a:ext uri="{FF2B5EF4-FFF2-40B4-BE49-F238E27FC236}">
-                <a16:creationId xmlns:a16="http://schemas.microsoft.com/office/drawing/2014/main" id="{A64B0DAB-50A1-4597-B47D-E18071333834}"/>
+                <a16:creationId xmlns:a16="http://schemas.microsoft.com/office/drawing/2014/main" id="{8187C020-EDF9-481F-B4C0-B9999F7D080C}"/>
               </a:ext>
             </a:extLst>
           </p:cNvPr>
@@ -9475,7 +10185,7 @@
           <p:cNvPr id="26" name="">
             <a:extLst xmlns:a="http://schemas.openxmlformats.org/drawingml/2006/main">
               <a:ext uri="{FF2B5EF4-FFF2-40B4-BE49-F238E27FC236}">
-                <a16:creationId xmlns:a16="http://schemas.microsoft.com/office/drawing/2014/main" id="{81C412B8-EB74-4A78-AB4B-0C19578DD944}"/>
+                <a16:creationId xmlns:a16="http://schemas.microsoft.com/office/drawing/2014/main" id="{1D732429-724E-452F-A562-5994D5FE0727}"/>
               </a:ext>
             </a:extLst>
           </p:cNvPr>
@@ -9506,7 +10216,7 @@
           <p:cNvPr id="27" name="">
             <a:extLst xmlns:a="http://schemas.openxmlformats.org/drawingml/2006/main">
               <a:ext uri="{FF2B5EF4-FFF2-40B4-BE49-F238E27FC236}">
-                <a16:creationId xmlns:a16="http://schemas.microsoft.com/office/drawing/2014/main" id="{1E7A64A5-F2B0-46D1-9F3A-91F7DAA05572}"/>
+                <a16:creationId xmlns:a16="http://schemas.microsoft.com/office/drawing/2014/main" id="{2183682C-48BB-4008-BE7D-F243C3CFB57C}"/>
               </a:ext>
             </a:extLst>
           </p:cNvPr>
@@ -9556,7 +10266,7 @@
           <p:cNvPr id="28" name="">
             <a:extLst xmlns:a="http://schemas.openxmlformats.org/drawingml/2006/main">
               <a:ext uri="{FF2B5EF4-FFF2-40B4-BE49-F238E27FC236}">
-                <a16:creationId xmlns:a16="http://schemas.microsoft.com/office/drawing/2014/main" id="{54BC4305-DA21-482E-BA3A-AD92FCA5A8FA}"/>
+                <a16:creationId xmlns:a16="http://schemas.microsoft.com/office/drawing/2014/main" id="{38886314-B04A-4F9F-85BB-E3B007C78E49}"/>
               </a:ext>
             </a:extLst>
           </p:cNvPr>
@@ -9587,7 +10297,7 @@
           <p:cNvPr id="29" name="">
             <a:extLst xmlns:a="http://schemas.openxmlformats.org/drawingml/2006/main">
               <a:ext uri="{FF2B5EF4-FFF2-40B4-BE49-F238E27FC236}">
-                <a16:creationId xmlns:a16="http://schemas.microsoft.com/office/drawing/2014/main" id="{B26AC21E-9303-4B7E-BBB1-17D0E831DA17}"/>
+                <a16:creationId xmlns:a16="http://schemas.microsoft.com/office/drawing/2014/main" id="{0004A199-189B-4B6C-AEFE-FB91DF907ADD}"/>
               </a:ext>
             </a:extLst>
           </p:cNvPr>
@@ -9637,7 +10347,7 @@
           <p:cNvPr id="30" name="">
             <a:extLst xmlns:a="http://schemas.openxmlformats.org/drawingml/2006/main">
               <a:ext uri="{FF2B5EF4-FFF2-40B4-BE49-F238E27FC236}">
-                <a16:creationId xmlns:a16="http://schemas.microsoft.com/office/drawing/2014/main" id="{629978CC-66A6-4858-8C0E-D1731A086524}"/>
+                <a16:creationId xmlns:a16="http://schemas.microsoft.com/office/drawing/2014/main" id="{D082C4B0-4458-440A-9539-929788004E69}"/>
               </a:ext>
             </a:extLst>
           </p:cNvPr>
@@ -9668,7 +10378,7 @@
           <p:cNvPr id="31" name="">
             <a:extLst xmlns:a="http://schemas.openxmlformats.org/drawingml/2006/main">
               <a:ext uri="{FF2B5EF4-FFF2-40B4-BE49-F238E27FC236}">
-                <a16:creationId xmlns:a16="http://schemas.microsoft.com/office/drawing/2014/main" id="{7FF8F6ED-DBA3-42B3-A5D1-FEDF775A9CC0}"/>
+                <a16:creationId xmlns:a16="http://schemas.microsoft.com/office/drawing/2014/main" id="{527287B8-22DC-42D1-A29B-48A10D2A440E}"/>
               </a:ext>
             </a:extLst>
           </p:cNvPr>
@@ -9718,7 +10428,7 @@
           <p:cNvPr id="32" name="">
             <a:extLst xmlns:a="http://schemas.openxmlformats.org/drawingml/2006/main">
               <a:ext uri="{FF2B5EF4-FFF2-40B4-BE49-F238E27FC236}">
-                <a16:creationId xmlns:a16="http://schemas.microsoft.com/office/drawing/2014/main" id="{AFEF79DA-FA80-4901-9639-F84E0BE3B1A7}"/>
+                <a16:creationId xmlns:a16="http://schemas.microsoft.com/office/drawing/2014/main" id="{2F6124E0-4F4F-492F-9224-BA76E5513742}"/>
               </a:ext>
             </a:extLst>
           </p:cNvPr>
@@ -9749,7 +10459,7 @@
           <p:cNvPr id="33" name="">
             <a:extLst xmlns:a="http://schemas.openxmlformats.org/drawingml/2006/main">
               <a:ext uri="{FF2B5EF4-FFF2-40B4-BE49-F238E27FC236}">
-                <a16:creationId xmlns:a16="http://schemas.microsoft.com/office/drawing/2014/main" id="{A58CDB32-E6EC-48F8-9C0B-6ADB2BBF6AEE}"/>
+                <a16:creationId xmlns:a16="http://schemas.microsoft.com/office/drawing/2014/main" id="{62DB92D5-96F0-40CB-BAAB-CF4192D658DD}"/>
               </a:ext>
             </a:extLst>
           </p:cNvPr>
@@ -9799,7 +10509,7 @@
           <p:cNvPr id="34" name="">
             <a:extLst xmlns:a="http://schemas.openxmlformats.org/drawingml/2006/main">
               <a:ext uri="{FF2B5EF4-FFF2-40B4-BE49-F238E27FC236}">
-                <a16:creationId xmlns:a16="http://schemas.microsoft.com/office/drawing/2014/main" id="{E180D554-77EC-4DFD-B443-4507B8E5CBD1}"/>
+                <a16:creationId xmlns:a16="http://schemas.microsoft.com/office/drawing/2014/main" id="{CDC05822-ACFC-4834-8F18-FFC55B0505A4}"/>
               </a:ext>
             </a:extLst>
           </p:cNvPr>
@@ -9834,7 +10544,7 @@
           <p:cNvPr id="35" name="">
             <a:extLst xmlns:a="http://schemas.openxmlformats.org/drawingml/2006/main">
               <a:ext uri="{FF2B5EF4-FFF2-40B4-BE49-F238E27FC236}">
-                <a16:creationId xmlns:a16="http://schemas.microsoft.com/office/drawing/2014/main" id="{4BB1AB8B-F3F8-48C3-A6A6-74605F888791}"/>
+                <a16:creationId xmlns:a16="http://schemas.microsoft.com/office/drawing/2014/main" id="{DD7F5512-7731-4592-9666-F0FAD833B2A4}"/>
               </a:ext>
             </a:extLst>
           </p:cNvPr>
@@ -9884,7 +10594,7 @@
           <p:cNvPr id="36" name="">
             <a:extLst xmlns:a="http://schemas.openxmlformats.org/drawingml/2006/main">
               <a:ext uri="{FF2B5EF4-FFF2-40B4-BE49-F238E27FC236}">
-                <a16:creationId xmlns:a16="http://schemas.microsoft.com/office/drawing/2014/main" id="{999D0240-2780-45B9-830B-5A429C17673A}"/>
+                <a16:creationId xmlns:a16="http://schemas.microsoft.com/office/drawing/2014/main" id="{9F4CEE3A-EA28-42FF-9333-9AC72DAD86EA}"/>
               </a:ext>
             </a:extLst>
           </p:cNvPr>
@@ -9915,7 +10625,7 @@
           <p:cNvPr id="37" name="">
             <a:extLst xmlns:a="http://schemas.openxmlformats.org/drawingml/2006/main">
               <a:ext uri="{FF2B5EF4-FFF2-40B4-BE49-F238E27FC236}">
-                <a16:creationId xmlns:a16="http://schemas.microsoft.com/office/drawing/2014/main" id="{FFFBFAF0-52B6-4D3C-BD0F-82241EA6C351}"/>
+                <a16:creationId xmlns:a16="http://schemas.microsoft.com/office/drawing/2014/main" id="{9C170797-9D27-42E2-8C07-DC7F14FCF2D1}"/>
               </a:ext>
             </a:extLst>
           </p:cNvPr>
@@ -9965,7 +10675,7 @@
           <p:cNvPr id="38" name="">
             <a:extLst xmlns:a="http://schemas.openxmlformats.org/drawingml/2006/main">
               <a:ext uri="{FF2B5EF4-FFF2-40B4-BE49-F238E27FC236}">
-                <a16:creationId xmlns:a16="http://schemas.microsoft.com/office/drawing/2014/main" id="{35677099-F116-43B0-AD51-1E179C831C27}"/>
+                <a16:creationId xmlns:a16="http://schemas.microsoft.com/office/drawing/2014/main" id="{328A2FDA-0B25-4AE3-BFA6-37758FD01551}"/>
               </a:ext>
             </a:extLst>
           </p:cNvPr>
@@ -9996,7 +10706,7 @@
           <p:cNvPr id="39" name="">
             <a:extLst xmlns:a="http://schemas.openxmlformats.org/drawingml/2006/main">
               <a:ext uri="{FF2B5EF4-FFF2-40B4-BE49-F238E27FC236}">
-                <a16:creationId xmlns:a16="http://schemas.microsoft.com/office/drawing/2014/main" id="{50B47728-B64B-45C9-B801-FE2DFD548239}"/>
+                <a16:creationId xmlns:a16="http://schemas.microsoft.com/office/drawing/2014/main" id="{C4C508D1-4AC3-42AD-8969-95D8E3437625}"/>
               </a:ext>
             </a:extLst>
           </p:cNvPr>
@@ -10046,7 +10756,7 @@
           <p:cNvPr id="40" name="">
             <a:extLst xmlns:a="http://schemas.openxmlformats.org/drawingml/2006/main">
               <a:ext uri="{FF2B5EF4-FFF2-40B4-BE49-F238E27FC236}">
-                <a16:creationId xmlns:a16="http://schemas.microsoft.com/office/drawing/2014/main" id="{7459A0AB-16A3-428D-B523-3E3B1DB7C67B}"/>
+                <a16:creationId xmlns:a16="http://schemas.microsoft.com/office/drawing/2014/main" id="{04A2E119-649A-46BF-8451-62B74CF77B03}"/>
               </a:ext>
             </a:extLst>
           </p:cNvPr>
@@ -10077,7 +10787,7 @@
           <p:cNvPr id="41" name="">
             <a:extLst xmlns:a="http://schemas.openxmlformats.org/drawingml/2006/main">
               <a:ext uri="{FF2B5EF4-FFF2-40B4-BE49-F238E27FC236}">
-                <a16:creationId xmlns:a16="http://schemas.microsoft.com/office/drawing/2014/main" id="{1E295C43-B9D9-467C-B4B8-1DF91FF65C6E}"/>
+                <a16:creationId xmlns:a16="http://schemas.microsoft.com/office/drawing/2014/main" id="{9CF58C8D-90EE-4946-A843-70B4848B6FF0}"/>
               </a:ext>
             </a:extLst>
           </p:cNvPr>
@@ -10127,7 +10837,7 @@
           <p:cNvPr id="42" name="">
             <a:extLst xmlns:a="http://schemas.openxmlformats.org/drawingml/2006/main">
               <a:ext uri="{FF2B5EF4-FFF2-40B4-BE49-F238E27FC236}">
-                <a16:creationId xmlns:a16="http://schemas.microsoft.com/office/drawing/2014/main" id="{36AA5F9B-29FF-4639-9933-0428E1EC048E}"/>
+                <a16:creationId xmlns:a16="http://schemas.microsoft.com/office/drawing/2014/main" id="{427B678F-F936-43AD-AF2D-0AF4D88B0C00}"/>
               </a:ext>
             </a:extLst>
           </p:cNvPr>
@@ -10158,7 +10868,7 @@
           <p:cNvPr id="43" name="">
             <a:extLst xmlns:a="http://schemas.openxmlformats.org/drawingml/2006/main">
               <a:ext uri="{FF2B5EF4-FFF2-40B4-BE49-F238E27FC236}">
-                <a16:creationId xmlns:a16="http://schemas.microsoft.com/office/drawing/2014/main" id="{5194972A-891C-4AED-B5B5-681228FAF003}"/>
+                <a16:creationId xmlns:a16="http://schemas.microsoft.com/office/drawing/2014/main" id="{FC25954F-5279-414E-BA72-F01298331608}"/>
               </a:ext>
             </a:extLst>
           </p:cNvPr>
@@ -10208,7 +10918,7 @@
           <p:cNvPr id="44" name="">
             <a:extLst xmlns:a="http://schemas.openxmlformats.org/drawingml/2006/main">
               <a:ext uri="{FF2B5EF4-FFF2-40B4-BE49-F238E27FC236}">
-                <a16:creationId xmlns:a16="http://schemas.microsoft.com/office/drawing/2014/main" id="{CEC407D1-67AF-4A6A-A24F-3117419E8D1B}"/>
+                <a16:creationId xmlns:a16="http://schemas.microsoft.com/office/drawing/2014/main" id="{1C4DEDC6-04D7-4B99-B6D9-6ABAEDE88668}"/>
               </a:ext>
             </a:extLst>
           </p:cNvPr>
@@ -10256,7 +10966,7 @@
     </p:spTree>
     <p:extLst>
       <p:ext uri="{BB962C8B-B14F-4D97-AF65-F5344CB8AC3E}">
-        <p14:creationId xmlns:p14="http://schemas.microsoft.com/office/powerpoint/2010/main" val="483779356"/>
+        <p14:creationId xmlns:p14="http://schemas.microsoft.com/office/powerpoint/2010/main" val="1229254742"/>
       </p:ext>
     </p:extLst>
   </p:cSld>
@@ -10287,7 +10997,7 @@
           <p:cNvPr id="1" name="">
             <a:extLst xmlns:a="http://schemas.openxmlformats.org/drawingml/2006/main">
               <a:ext uri="{FF2B5EF4-FFF2-40B4-BE49-F238E27FC236}">
-                <a16:creationId xmlns:a16="http://schemas.microsoft.com/office/drawing/2014/main" id="{426A956C-4E27-4AD1-9576-0EBD8A44844B}"/>
+                <a16:creationId xmlns:a16="http://schemas.microsoft.com/office/drawing/2014/main" id="{046ED6DA-3467-4AFB-A7A8-0A1D6574AF1C}"/>
               </a:ext>
             </a:extLst>
           </p:cNvPr>
@@ -10337,7 +11047,7 @@
           <p:cNvPr id="2" name="">
             <a:extLst xmlns:a="http://schemas.openxmlformats.org/drawingml/2006/main">
               <a:ext uri="{FF2B5EF4-FFF2-40B4-BE49-F238E27FC236}">
-                <a16:creationId xmlns:a16="http://schemas.microsoft.com/office/drawing/2014/main" id="{D2F26F6E-CC1F-47C5-AD54-D74FBF8C6BDA}"/>
+                <a16:creationId xmlns:a16="http://schemas.microsoft.com/office/drawing/2014/main" id="{0CF87ED3-7CE4-4391-8BE3-E7B07A5C5F94}"/>
               </a:ext>
             </a:extLst>
           </p:cNvPr>
@@ -10387,7 +11097,7 @@
           <p:cNvPr id="3" name="">
             <a:extLst xmlns:a="http://schemas.openxmlformats.org/drawingml/2006/main">
               <a:ext uri="{FF2B5EF4-FFF2-40B4-BE49-F238E27FC236}">
-                <a16:creationId xmlns:a16="http://schemas.microsoft.com/office/drawing/2014/main" id="{D12E49DA-FD9A-4924-809A-D10C1A00F55E}"/>
+                <a16:creationId xmlns:a16="http://schemas.microsoft.com/office/drawing/2014/main" id="{046AD400-C4BA-439F-BA92-8D086063E4A0}"/>
               </a:ext>
             </a:extLst>
           </p:cNvPr>
@@ -10420,7 +11130,7 @@
           <p:cNvPr id="4" name="">
             <a:extLst xmlns:a="http://schemas.openxmlformats.org/drawingml/2006/main">
               <a:ext uri="{FF2B5EF4-FFF2-40B4-BE49-F238E27FC236}">
-                <a16:creationId xmlns:a16="http://schemas.microsoft.com/office/drawing/2014/main" id="{72DDFE06-2867-4D16-B214-7A0AC662D13C}"/>
+                <a16:creationId xmlns:a16="http://schemas.microsoft.com/office/drawing/2014/main" id="{166293B7-8928-4756-8C88-60525265EA01}"/>
               </a:ext>
             </a:extLst>
           </p:cNvPr>
@@ -10455,7 +11165,7 @@
           <p:cNvPr id="5" name="">
             <a:extLst xmlns:a="http://schemas.openxmlformats.org/drawingml/2006/main">
               <a:ext uri="{FF2B5EF4-FFF2-40B4-BE49-F238E27FC236}">
-                <a16:creationId xmlns:a16="http://schemas.microsoft.com/office/drawing/2014/main" id="{5A23349B-5DF6-46F3-A8CF-FB44EE45A9F4}"/>
+                <a16:creationId xmlns:a16="http://schemas.microsoft.com/office/drawing/2014/main" id="{9E284E98-5CD9-4AA7-B902-EC9A739368E1}"/>
               </a:ext>
             </a:extLst>
           </p:cNvPr>
@@ -10490,7 +11200,7 @@
           <p:cNvPr id="6" name="">
             <a:extLst xmlns:a="http://schemas.openxmlformats.org/drawingml/2006/main">
               <a:ext uri="{FF2B5EF4-FFF2-40B4-BE49-F238E27FC236}">
-                <a16:creationId xmlns:a16="http://schemas.microsoft.com/office/drawing/2014/main" id="{9CB499FF-AB35-42FB-9FB5-20AD51239BDB}"/>
+                <a16:creationId xmlns:a16="http://schemas.microsoft.com/office/drawing/2014/main" id="{165358F0-CFAF-4E55-BB65-5A23E27F7159}"/>
               </a:ext>
             </a:extLst>
           </p:cNvPr>
@@ -10540,7 +11250,7 @@
           <p:cNvPr id="7" name="">
             <a:extLst xmlns:a="http://schemas.openxmlformats.org/drawingml/2006/main">
               <a:ext uri="{FF2B5EF4-FFF2-40B4-BE49-F238E27FC236}">
-                <a16:creationId xmlns:a16="http://schemas.microsoft.com/office/drawing/2014/main" id="{6847BE81-E7AA-48A6-B870-6C15B0AED325}"/>
+                <a16:creationId xmlns:a16="http://schemas.microsoft.com/office/drawing/2014/main" id="{E23C1646-905F-481C-AB9E-42F83EF422F5}"/>
               </a:ext>
             </a:extLst>
           </p:cNvPr>
@@ -10571,7 +11281,7 @@
           <p:cNvPr id="8" name="">
             <a:extLst xmlns:a="http://schemas.openxmlformats.org/drawingml/2006/main">
               <a:ext uri="{FF2B5EF4-FFF2-40B4-BE49-F238E27FC236}">
-                <a16:creationId xmlns:a16="http://schemas.microsoft.com/office/drawing/2014/main" id="{11057EFC-7D8F-4368-8F06-F97111A0F739}"/>
+                <a16:creationId xmlns:a16="http://schemas.microsoft.com/office/drawing/2014/main" id="{ACCC915C-F0CA-42E5-9EDF-8130756507EC}"/>
               </a:ext>
             </a:extLst>
           </p:cNvPr>
@@ -10621,7 +11331,7 @@
           <p:cNvPr id="9" name="">
             <a:extLst xmlns:a="http://schemas.openxmlformats.org/drawingml/2006/main">
               <a:ext uri="{FF2B5EF4-FFF2-40B4-BE49-F238E27FC236}">
-                <a16:creationId xmlns:a16="http://schemas.microsoft.com/office/drawing/2014/main" id="{40AA5754-166C-4E66-ACC9-666B48E23333}"/>
+                <a16:creationId xmlns:a16="http://schemas.microsoft.com/office/drawing/2014/main" id="{005FEF6D-34CE-44D1-BD3A-2198BEEF0B7B}"/>
               </a:ext>
             </a:extLst>
           </p:cNvPr>
@@ -10652,7 +11362,7 @@
           <p:cNvPr id="10" name="">
             <a:extLst xmlns:a="http://schemas.openxmlformats.org/drawingml/2006/main">
               <a:ext uri="{FF2B5EF4-FFF2-40B4-BE49-F238E27FC236}">
-                <a16:creationId xmlns:a16="http://schemas.microsoft.com/office/drawing/2014/main" id="{836D618F-7983-491B-85E2-270E178B28BD}"/>
+                <a16:creationId xmlns:a16="http://schemas.microsoft.com/office/drawing/2014/main" id="{11632DC8-09F4-4CE5-9B42-F1EDA0185DDB}"/>
               </a:ext>
             </a:extLst>
           </p:cNvPr>
@@ -10702,7 +11412,7 @@
           <p:cNvPr id="11" name="">
             <a:extLst xmlns:a="http://schemas.openxmlformats.org/drawingml/2006/main">
               <a:ext uri="{FF2B5EF4-FFF2-40B4-BE49-F238E27FC236}">
-                <a16:creationId xmlns:a16="http://schemas.microsoft.com/office/drawing/2014/main" id="{1F972EDB-D6ED-41B1-A38B-0F1D291688F1}"/>
+                <a16:creationId xmlns:a16="http://schemas.microsoft.com/office/drawing/2014/main" id="{3DC25FD8-14B6-430C-9395-D08E7AB94365}"/>
               </a:ext>
             </a:extLst>
           </p:cNvPr>
@@ -10733,7 +11443,7 @@
           <p:cNvPr id="12" name="">
             <a:extLst xmlns:a="http://schemas.openxmlformats.org/drawingml/2006/main">
               <a:ext uri="{FF2B5EF4-FFF2-40B4-BE49-F238E27FC236}">
-                <a16:creationId xmlns:a16="http://schemas.microsoft.com/office/drawing/2014/main" id="{10DF9544-D978-41D7-B0DE-5B3D30DA5F5B}"/>
+                <a16:creationId xmlns:a16="http://schemas.microsoft.com/office/drawing/2014/main" id="{F847E951-FB66-4D15-B040-CE9A26C81763}"/>
               </a:ext>
             </a:extLst>
           </p:cNvPr>
@@ -10783,7 +11493,7 @@
           <p:cNvPr id="13" name="">
             <a:extLst xmlns:a="http://schemas.openxmlformats.org/drawingml/2006/main">
               <a:ext uri="{FF2B5EF4-FFF2-40B4-BE49-F238E27FC236}">
-                <a16:creationId xmlns:a16="http://schemas.microsoft.com/office/drawing/2014/main" id="{B37AA124-7991-4002-BEB0-ACBABE3BFC4A}"/>
+                <a16:creationId xmlns:a16="http://schemas.microsoft.com/office/drawing/2014/main" id="{B6C368A6-0748-4A92-B7C7-ACCEBDE029EF}"/>
               </a:ext>
             </a:extLst>
           </p:cNvPr>
@@ -10814,7 +11524,7 @@
           <p:cNvPr id="14" name="">
             <a:extLst xmlns:a="http://schemas.openxmlformats.org/drawingml/2006/main">
               <a:ext uri="{FF2B5EF4-FFF2-40B4-BE49-F238E27FC236}">
-                <a16:creationId xmlns:a16="http://schemas.microsoft.com/office/drawing/2014/main" id="{7AFE5E4A-8568-4372-BCAD-3860EBDF5E9D}"/>
+                <a16:creationId xmlns:a16="http://schemas.microsoft.com/office/drawing/2014/main" id="{D7A99D9B-F06B-4802-88B4-A26291DC447D}"/>
               </a:ext>
             </a:extLst>
           </p:cNvPr>
@@ -10864,7 +11574,7 @@
           <p:cNvPr id="15" name="">
             <a:extLst xmlns:a="http://schemas.openxmlformats.org/drawingml/2006/main">
               <a:ext uri="{FF2B5EF4-FFF2-40B4-BE49-F238E27FC236}">
-                <a16:creationId xmlns:a16="http://schemas.microsoft.com/office/drawing/2014/main" id="{31A5EFC7-A4B4-4973-A1DE-8FC123220B74}"/>
+                <a16:creationId xmlns:a16="http://schemas.microsoft.com/office/drawing/2014/main" id="{B356F06F-3886-485D-A64E-796C945C7067}"/>
               </a:ext>
             </a:extLst>
           </p:cNvPr>
@@ -10895,7 +11605,7 @@
           <p:cNvPr id="16" name="">
             <a:extLst xmlns:a="http://schemas.openxmlformats.org/drawingml/2006/main">
               <a:ext uri="{FF2B5EF4-FFF2-40B4-BE49-F238E27FC236}">
-                <a16:creationId xmlns:a16="http://schemas.microsoft.com/office/drawing/2014/main" id="{EDEB1705-5B33-4A5D-B074-7D89D5DC9EC0}"/>
+                <a16:creationId xmlns:a16="http://schemas.microsoft.com/office/drawing/2014/main" id="{59DAA904-5F24-425E-BBE7-DA8DE5FF11B4}"/>
               </a:ext>
             </a:extLst>
           </p:cNvPr>
@@ -10945,7 +11655,7 @@
           <p:cNvPr id="17" name="">
             <a:extLst xmlns:a="http://schemas.openxmlformats.org/drawingml/2006/main">
               <a:ext uri="{FF2B5EF4-FFF2-40B4-BE49-F238E27FC236}">
-                <a16:creationId xmlns:a16="http://schemas.microsoft.com/office/drawing/2014/main" id="{D312FF90-713C-4833-96BE-50FA47340DA2}"/>
+                <a16:creationId xmlns:a16="http://schemas.microsoft.com/office/drawing/2014/main" id="{D403FB37-5B51-4460-8B47-D52A021DBE5A}"/>
               </a:ext>
             </a:extLst>
           </p:cNvPr>
@@ -10995,7 +11705,7 @@
           <p:cNvPr id="18" name="">
             <a:extLst xmlns:a="http://schemas.openxmlformats.org/drawingml/2006/main">
               <a:ext uri="{FF2B5EF4-FFF2-40B4-BE49-F238E27FC236}">
-                <a16:creationId xmlns:a16="http://schemas.microsoft.com/office/drawing/2014/main" id="{86014AC8-554C-4C32-BBFB-B6C24D092D53}"/>
+                <a16:creationId xmlns:a16="http://schemas.microsoft.com/office/drawing/2014/main" id="{5BC5BE08-A79D-44DF-AD94-04F0D18FF1C1}"/>
               </a:ext>
             </a:extLst>
           </p:cNvPr>
@@ -11026,7 +11736,7 @@
           <p:cNvPr id="19" name="">
             <a:extLst xmlns:a="http://schemas.openxmlformats.org/drawingml/2006/main">
               <a:ext uri="{FF2B5EF4-FFF2-40B4-BE49-F238E27FC236}">
-                <a16:creationId xmlns:a16="http://schemas.microsoft.com/office/drawing/2014/main" id="{F6DEB681-4F75-4633-B7E1-3382109EB04C}"/>
+                <a16:creationId xmlns:a16="http://schemas.microsoft.com/office/drawing/2014/main" id="{CC1B8650-0CA2-489B-BB9B-23C59E032886}"/>
               </a:ext>
             </a:extLst>
           </p:cNvPr>
@@ -11076,7 +11786,7 @@
           <p:cNvPr id="20" name="">
             <a:extLst xmlns:a="http://schemas.openxmlformats.org/drawingml/2006/main">
               <a:ext uri="{FF2B5EF4-FFF2-40B4-BE49-F238E27FC236}">
-                <a16:creationId xmlns:a16="http://schemas.microsoft.com/office/drawing/2014/main" id="{C37CFAF3-B2D7-42DE-81A5-FFD4F83656B2}"/>
+                <a16:creationId xmlns:a16="http://schemas.microsoft.com/office/drawing/2014/main" id="{0F42FB7F-77EC-4FFF-AEB4-82AFEDD73C95}"/>
               </a:ext>
             </a:extLst>
           </p:cNvPr>
@@ -11107,7 +11817,7 @@
           <p:cNvPr id="21" name="">
             <a:extLst xmlns:a="http://schemas.openxmlformats.org/drawingml/2006/main">
               <a:ext uri="{FF2B5EF4-FFF2-40B4-BE49-F238E27FC236}">
-                <a16:creationId xmlns:a16="http://schemas.microsoft.com/office/drawing/2014/main" id="{7CD4B05A-0A9B-49A4-8946-C5AA0C27AF30}"/>
+                <a16:creationId xmlns:a16="http://schemas.microsoft.com/office/drawing/2014/main" id="{136E9EF0-F4FD-4BF8-A55A-4E2447108CC8}"/>
               </a:ext>
             </a:extLst>
           </p:cNvPr>
@@ -11157,7 +11867,7 @@
           <p:cNvPr id="22" name="">
             <a:extLst xmlns:a="http://schemas.openxmlformats.org/drawingml/2006/main">
               <a:ext uri="{FF2B5EF4-FFF2-40B4-BE49-F238E27FC236}">
-                <a16:creationId xmlns:a16="http://schemas.microsoft.com/office/drawing/2014/main" id="{32E3D37B-11D0-4702-9789-D0D0C6A3DE96}"/>
+                <a16:creationId xmlns:a16="http://schemas.microsoft.com/office/drawing/2014/main" id="{B3C8774F-B4AC-4E5F-A9DE-15AA47C29E02}"/>
               </a:ext>
             </a:extLst>
           </p:cNvPr>
@@ -11188,7 +11898,7 @@
           <p:cNvPr id="23" name="">
             <a:extLst xmlns:a="http://schemas.openxmlformats.org/drawingml/2006/main">
               <a:ext uri="{FF2B5EF4-FFF2-40B4-BE49-F238E27FC236}">
-                <a16:creationId xmlns:a16="http://schemas.microsoft.com/office/drawing/2014/main" id="{D40D0D79-A11A-4940-BEC6-CF728A6FA9DC}"/>
+                <a16:creationId xmlns:a16="http://schemas.microsoft.com/office/drawing/2014/main" id="{389E3284-BF96-4D99-A225-A8AF3570337D}"/>
               </a:ext>
             </a:extLst>
           </p:cNvPr>
@@ -11238,7 +11948,7 @@
           <p:cNvPr id="24" name="">
             <a:extLst xmlns:a="http://schemas.openxmlformats.org/drawingml/2006/main">
               <a:ext uri="{FF2B5EF4-FFF2-40B4-BE49-F238E27FC236}">
-                <a16:creationId xmlns:a16="http://schemas.microsoft.com/office/drawing/2014/main" id="{CA4A5C98-5D4C-4040-853D-8893620171EC}"/>
+                <a16:creationId xmlns:a16="http://schemas.microsoft.com/office/drawing/2014/main" id="{409059DA-A156-4932-9EB7-47D2D9269F27}"/>
               </a:ext>
             </a:extLst>
           </p:cNvPr>
@@ -11269,7 +11979,7 @@
           <p:cNvPr id="25" name="">
             <a:extLst xmlns:a="http://schemas.openxmlformats.org/drawingml/2006/main">
               <a:ext uri="{FF2B5EF4-FFF2-40B4-BE49-F238E27FC236}">
-                <a16:creationId xmlns:a16="http://schemas.microsoft.com/office/drawing/2014/main" id="{04AD8E6A-20B4-4E12-A8A0-C7B81E448B7A}"/>
+                <a16:creationId xmlns:a16="http://schemas.microsoft.com/office/drawing/2014/main" id="{36FD26D6-7E64-4A79-BA59-2C22549219AC}"/>
               </a:ext>
             </a:extLst>
           </p:cNvPr>
@@ -11319,7 +12029,7 @@
           <p:cNvPr id="26" name="">
             <a:extLst xmlns:a="http://schemas.openxmlformats.org/drawingml/2006/main">
               <a:ext uri="{FF2B5EF4-FFF2-40B4-BE49-F238E27FC236}">
-                <a16:creationId xmlns:a16="http://schemas.microsoft.com/office/drawing/2014/main" id="{FB8C8295-3C64-48FA-BDC1-F40BDACD566C}"/>
+                <a16:creationId xmlns:a16="http://schemas.microsoft.com/office/drawing/2014/main" id="{4C521710-D3DF-4235-841D-9103BA9C6046}"/>
               </a:ext>
             </a:extLst>
           </p:cNvPr>
@@ -11350,7 +12060,7 @@
           <p:cNvPr id="27" name="">
             <a:extLst xmlns:a="http://schemas.openxmlformats.org/drawingml/2006/main">
               <a:ext uri="{FF2B5EF4-FFF2-40B4-BE49-F238E27FC236}">
-                <a16:creationId xmlns:a16="http://schemas.microsoft.com/office/drawing/2014/main" id="{A190BC24-CF7A-46B6-ADF8-3D24FE063B75}"/>
+                <a16:creationId xmlns:a16="http://schemas.microsoft.com/office/drawing/2014/main" id="{1E3B1D21-59A4-445E-B3AC-8F14A3695935}"/>
               </a:ext>
             </a:extLst>
           </p:cNvPr>
@@ -11398,7 +12108,7 @@
     </p:spTree>
     <p:extLst>
       <p:ext uri="{BB962C8B-B14F-4D97-AF65-F5344CB8AC3E}">
-        <p14:creationId xmlns:p14="http://schemas.microsoft.com/office/powerpoint/2010/main" val="1222737422"/>
+        <p14:creationId xmlns:p14="http://schemas.microsoft.com/office/powerpoint/2010/main" val="1291274272"/>
       </p:ext>
     </p:extLst>
   </p:cSld>
@@ -11429,7 +12139,7 @@
           <p:cNvPr id="1" name="">
             <a:extLst xmlns:a="http://schemas.openxmlformats.org/drawingml/2006/main">
               <a:ext uri="{FF2B5EF4-FFF2-40B4-BE49-F238E27FC236}">
-                <a16:creationId xmlns:a16="http://schemas.microsoft.com/office/drawing/2014/main" id="{443739F3-E4E2-4386-8C6F-C1A92E027867}"/>
+                <a16:creationId xmlns:a16="http://schemas.microsoft.com/office/drawing/2014/main" id="{816CDB7C-284E-401B-8C56-E56DA74BBD7C}"/>
               </a:ext>
             </a:extLst>
           </p:cNvPr>
@@ -11479,7 +12189,7 @@
           <p:cNvPr id="2" name="">
             <a:extLst xmlns:a="http://schemas.openxmlformats.org/drawingml/2006/main">
               <a:ext uri="{FF2B5EF4-FFF2-40B4-BE49-F238E27FC236}">
-                <a16:creationId xmlns:a16="http://schemas.microsoft.com/office/drawing/2014/main" id="{5B25765E-ED48-4188-906A-96F05F7791A9}"/>
+                <a16:creationId xmlns:a16="http://schemas.microsoft.com/office/drawing/2014/main" id="{46AEDAC2-5D05-4181-978C-AF922CC10BDF}"/>
               </a:ext>
             </a:extLst>
           </p:cNvPr>
@@ -11529,7 +12239,7 @@
           <p:cNvPr id="3" name="">
             <a:extLst xmlns:a="http://schemas.openxmlformats.org/drawingml/2006/main">
               <a:ext uri="{FF2B5EF4-FFF2-40B4-BE49-F238E27FC236}">
-                <a16:creationId xmlns:a16="http://schemas.microsoft.com/office/drawing/2014/main" id="{7E201075-0734-4C0C-92D7-94F23300D0E7}"/>
+                <a16:creationId xmlns:a16="http://schemas.microsoft.com/office/drawing/2014/main" id="{E666DFF6-EEBD-418B-BD5D-5D93F69F3D1E}"/>
               </a:ext>
             </a:extLst>
           </p:cNvPr>
@@ -11562,7 +12272,7 @@
           <p:cNvPr id="4" name="">
             <a:extLst xmlns:a="http://schemas.openxmlformats.org/drawingml/2006/main">
               <a:ext uri="{FF2B5EF4-FFF2-40B4-BE49-F238E27FC236}">
-                <a16:creationId xmlns:a16="http://schemas.microsoft.com/office/drawing/2014/main" id="{59801B92-BF97-46F7-A832-90257EE21026}"/>
+                <a16:creationId xmlns:a16="http://schemas.microsoft.com/office/drawing/2014/main" id="{F1A84ABF-41CF-4766-86EA-05F83527D7C1}"/>
               </a:ext>
             </a:extLst>
           </p:cNvPr>
@@ -11597,7 +12307,7 @@
           <p:cNvPr id="5" name="">
             <a:extLst xmlns:a="http://schemas.openxmlformats.org/drawingml/2006/main">
               <a:ext uri="{FF2B5EF4-FFF2-40B4-BE49-F238E27FC236}">
-                <a16:creationId xmlns:a16="http://schemas.microsoft.com/office/drawing/2014/main" id="{B98A012F-BC1B-4241-B906-587C5DC430E9}"/>
+                <a16:creationId xmlns:a16="http://schemas.microsoft.com/office/drawing/2014/main" id="{57A23CD1-1CA0-474B-875D-A6750957388F}"/>
               </a:ext>
             </a:extLst>
           </p:cNvPr>
@@ -11647,7 +12357,7 @@
           <p:cNvPr id="6" name="">
             <a:extLst xmlns:a="http://schemas.openxmlformats.org/drawingml/2006/main">
               <a:ext uri="{FF2B5EF4-FFF2-40B4-BE49-F238E27FC236}">
-                <a16:creationId xmlns:a16="http://schemas.microsoft.com/office/drawing/2014/main" id="{29A3E5FD-C5D0-41E7-8733-62AA07F9B2A6}"/>
+                <a16:creationId xmlns:a16="http://schemas.microsoft.com/office/drawing/2014/main" id="{174E92A9-9509-419A-A9BC-84605253F077}"/>
               </a:ext>
             </a:extLst>
           </p:cNvPr>
@@ -11678,7 +12388,7 @@
           <p:cNvPr id="7" name="">
             <a:extLst xmlns:a="http://schemas.openxmlformats.org/drawingml/2006/main">
               <a:ext uri="{FF2B5EF4-FFF2-40B4-BE49-F238E27FC236}">
-                <a16:creationId xmlns:a16="http://schemas.microsoft.com/office/drawing/2014/main" id="{AB02C42D-0D22-418B-A7B6-9B8852C49BC6}"/>
+                <a16:creationId xmlns:a16="http://schemas.microsoft.com/office/drawing/2014/main" id="{F9A61E31-F741-4E02-8899-827FD1AC2C50}"/>
               </a:ext>
             </a:extLst>
           </p:cNvPr>
@@ -11728,7 +12438,7 @@
           <p:cNvPr id="8" name="">
             <a:extLst xmlns:a="http://schemas.openxmlformats.org/drawingml/2006/main">
               <a:ext uri="{FF2B5EF4-FFF2-40B4-BE49-F238E27FC236}">
-                <a16:creationId xmlns:a16="http://schemas.microsoft.com/office/drawing/2014/main" id="{90AC6970-9560-4BBE-8574-D411BCC11692}"/>
+                <a16:creationId xmlns:a16="http://schemas.microsoft.com/office/drawing/2014/main" id="{6EA51F5B-6088-44ED-9A07-08C586F2DD0A}"/>
               </a:ext>
             </a:extLst>
           </p:cNvPr>
@@ -11759,7 +12469,7 @@
           <p:cNvPr id="9" name="">
             <a:extLst xmlns:a="http://schemas.openxmlformats.org/drawingml/2006/main">
               <a:ext uri="{FF2B5EF4-FFF2-40B4-BE49-F238E27FC236}">
-                <a16:creationId xmlns:a16="http://schemas.microsoft.com/office/drawing/2014/main" id="{02112D7D-EF2D-4744-8F38-31D66768A2DF}"/>
+                <a16:creationId xmlns:a16="http://schemas.microsoft.com/office/drawing/2014/main" id="{CDD74DC5-58C2-4001-BC56-392828B71D06}"/>
               </a:ext>
             </a:extLst>
           </p:cNvPr>
@@ -11809,7 +12519,7 @@
           <p:cNvPr id="10" name="">
             <a:extLst xmlns:a="http://schemas.openxmlformats.org/drawingml/2006/main">
               <a:ext uri="{FF2B5EF4-FFF2-40B4-BE49-F238E27FC236}">
-                <a16:creationId xmlns:a16="http://schemas.microsoft.com/office/drawing/2014/main" id="{CB49A0E3-6224-4287-9D12-7E649166D382}"/>
+                <a16:creationId xmlns:a16="http://schemas.microsoft.com/office/drawing/2014/main" id="{F29CE372-017A-4DCF-BF78-709820F71493}"/>
               </a:ext>
             </a:extLst>
           </p:cNvPr>
@@ -11840,7 +12550,7 @@
           <p:cNvPr id="11" name="">
             <a:extLst xmlns:a="http://schemas.openxmlformats.org/drawingml/2006/main">
               <a:ext uri="{FF2B5EF4-FFF2-40B4-BE49-F238E27FC236}">
-                <a16:creationId xmlns:a16="http://schemas.microsoft.com/office/drawing/2014/main" id="{476B76B2-363D-4071-B575-52B747CCD983}"/>
+                <a16:creationId xmlns:a16="http://schemas.microsoft.com/office/drawing/2014/main" id="{1E3DFC1C-B0B2-442D-BDAB-B18FE038CB9F}"/>
               </a:ext>
             </a:extLst>
           </p:cNvPr>
@@ -11890,7 +12600,7 @@
           <p:cNvPr id="12" name="">
             <a:extLst xmlns:a="http://schemas.openxmlformats.org/drawingml/2006/main">
               <a:ext uri="{FF2B5EF4-FFF2-40B4-BE49-F238E27FC236}">
-                <a16:creationId xmlns:a16="http://schemas.microsoft.com/office/drawing/2014/main" id="{74C95184-7FCB-49D6-8979-1BEA7F86D791}"/>
+                <a16:creationId xmlns:a16="http://schemas.microsoft.com/office/drawing/2014/main" id="{12D2EF3D-7CB2-42B8-AEEE-707C8267910E}"/>
               </a:ext>
             </a:extLst>
           </p:cNvPr>
@@ -11921,7 +12631,7 @@
           <p:cNvPr id="13" name="">
             <a:extLst xmlns:a="http://schemas.openxmlformats.org/drawingml/2006/main">
               <a:ext uri="{FF2B5EF4-FFF2-40B4-BE49-F238E27FC236}">
-                <a16:creationId xmlns:a16="http://schemas.microsoft.com/office/drawing/2014/main" id="{C4CFE570-02AD-4ED2-8A44-4277EE8AE748}"/>
+                <a16:creationId xmlns:a16="http://schemas.microsoft.com/office/drawing/2014/main" id="{0045F10E-1165-4E54-9391-7999225B1E17}"/>
               </a:ext>
             </a:extLst>
           </p:cNvPr>
@@ -11971,7 +12681,7 @@
           <p:cNvPr id="14" name="">
             <a:extLst xmlns:a="http://schemas.openxmlformats.org/drawingml/2006/main">
               <a:ext uri="{FF2B5EF4-FFF2-40B4-BE49-F238E27FC236}">
-                <a16:creationId xmlns:a16="http://schemas.microsoft.com/office/drawing/2014/main" id="{A612F7D1-6FB2-4619-A386-B58A816C53FE}"/>
+                <a16:creationId xmlns:a16="http://schemas.microsoft.com/office/drawing/2014/main" id="{81ABA04B-F1E7-4405-BA7E-4CF6A232CE22}"/>
               </a:ext>
             </a:extLst>
           </p:cNvPr>
@@ -12002,7 +12712,7 @@
           <p:cNvPr id="15" name="">
             <a:extLst xmlns:a="http://schemas.openxmlformats.org/drawingml/2006/main">
               <a:ext uri="{FF2B5EF4-FFF2-40B4-BE49-F238E27FC236}">
-                <a16:creationId xmlns:a16="http://schemas.microsoft.com/office/drawing/2014/main" id="{0DA2D9F3-13C7-46B0-9DAA-91183F64659A}"/>
+                <a16:creationId xmlns:a16="http://schemas.microsoft.com/office/drawing/2014/main" id="{C4E7DE7B-5E79-43AB-97B0-0FFC3A78DF02}"/>
               </a:ext>
             </a:extLst>
           </p:cNvPr>
@@ -12052,7 +12762,7 @@
           <p:cNvPr id="16" name="">
             <a:extLst xmlns:a="http://schemas.openxmlformats.org/drawingml/2006/main">
               <a:ext uri="{FF2B5EF4-FFF2-40B4-BE49-F238E27FC236}">
-                <a16:creationId xmlns:a16="http://schemas.microsoft.com/office/drawing/2014/main" id="{4C9EF156-8836-4ED3-9E70-D95A3D2D64C3}"/>
+                <a16:creationId xmlns:a16="http://schemas.microsoft.com/office/drawing/2014/main" id="{D2A837EB-E01D-45B4-A768-D56E0258DA2C}"/>
               </a:ext>
             </a:extLst>
           </p:cNvPr>
@@ -12087,7 +12797,7 @@
           <p:cNvPr id="17" name="">
             <a:extLst xmlns:a="http://schemas.openxmlformats.org/drawingml/2006/main">
               <a:ext uri="{FF2B5EF4-FFF2-40B4-BE49-F238E27FC236}">
-                <a16:creationId xmlns:a16="http://schemas.microsoft.com/office/drawing/2014/main" id="{DAA57325-C61F-4CC0-BEE5-E88185683898}"/>
+                <a16:creationId xmlns:a16="http://schemas.microsoft.com/office/drawing/2014/main" id="{C293FC30-BE95-4CED-A2CC-FEA218966E44}"/>
               </a:ext>
             </a:extLst>
           </p:cNvPr>
@@ -12137,7 +12847,7 @@
           <p:cNvPr id="18" name="">
             <a:extLst xmlns:a="http://schemas.openxmlformats.org/drawingml/2006/main">
               <a:ext uri="{FF2B5EF4-FFF2-40B4-BE49-F238E27FC236}">
-                <a16:creationId xmlns:a16="http://schemas.microsoft.com/office/drawing/2014/main" id="{BB0FAF69-2690-49E8-AAC5-92561201468E}"/>
+                <a16:creationId xmlns:a16="http://schemas.microsoft.com/office/drawing/2014/main" id="{1E086AAD-35B9-4711-8864-497BCF8D8214}"/>
               </a:ext>
             </a:extLst>
           </p:cNvPr>
@@ -12168,7 +12878,7 @@
           <p:cNvPr id="19" name="">
             <a:extLst xmlns:a="http://schemas.openxmlformats.org/drawingml/2006/main">
               <a:ext uri="{FF2B5EF4-FFF2-40B4-BE49-F238E27FC236}">
-                <a16:creationId xmlns:a16="http://schemas.microsoft.com/office/drawing/2014/main" id="{846092FB-6AA2-4D5B-8093-EF4C05E00488}"/>
+                <a16:creationId xmlns:a16="http://schemas.microsoft.com/office/drawing/2014/main" id="{F04FECEE-2678-4D8C-B334-7D41C104F312}"/>
               </a:ext>
             </a:extLst>
           </p:cNvPr>
@@ -12218,7 +12928,7 @@
           <p:cNvPr id="20" name="">
             <a:extLst xmlns:a="http://schemas.openxmlformats.org/drawingml/2006/main">
               <a:ext uri="{FF2B5EF4-FFF2-40B4-BE49-F238E27FC236}">
-                <a16:creationId xmlns:a16="http://schemas.microsoft.com/office/drawing/2014/main" id="{E56BCAE5-30DC-4780-A94B-5431EFC9593F}"/>
+                <a16:creationId xmlns:a16="http://schemas.microsoft.com/office/drawing/2014/main" id="{B939450C-CC7B-4C1F-B21F-B06A6DDAAF6D}"/>
               </a:ext>
             </a:extLst>
           </p:cNvPr>
@@ -12249,7 +12959,7 @@
           <p:cNvPr id="21" name="">
             <a:extLst xmlns:a="http://schemas.openxmlformats.org/drawingml/2006/main">
               <a:ext uri="{FF2B5EF4-FFF2-40B4-BE49-F238E27FC236}">
-                <a16:creationId xmlns:a16="http://schemas.microsoft.com/office/drawing/2014/main" id="{78BEFB06-8D1E-4515-8DE8-101CA3EC9EA9}"/>
+                <a16:creationId xmlns:a16="http://schemas.microsoft.com/office/drawing/2014/main" id="{7A51CC34-4BFD-4B51-AB17-713AB578FB43}"/>
               </a:ext>
             </a:extLst>
           </p:cNvPr>
@@ -12299,7 +13009,7 @@
           <p:cNvPr id="22" name="">
             <a:extLst xmlns:a="http://schemas.openxmlformats.org/drawingml/2006/main">
               <a:ext uri="{FF2B5EF4-FFF2-40B4-BE49-F238E27FC236}">
-                <a16:creationId xmlns:a16="http://schemas.microsoft.com/office/drawing/2014/main" id="{987EAAA9-88D2-4F8B-BDFB-EF36AE0696CF}"/>
+                <a16:creationId xmlns:a16="http://schemas.microsoft.com/office/drawing/2014/main" id="{457A66DA-163D-40D3-A266-89A44E9AFCB7}"/>
               </a:ext>
             </a:extLst>
           </p:cNvPr>
@@ -12330,7 +13040,7 @@
           <p:cNvPr id="23" name="">
             <a:extLst xmlns:a="http://schemas.openxmlformats.org/drawingml/2006/main">
               <a:ext uri="{FF2B5EF4-FFF2-40B4-BE49-F238E27FC236}">
-                <a16:creationId xmlns:a16="http://schemas.microsoft.com/office/drawing/2014/main" id="{3C72785F-F410-40A1-A386-FE50B8CB3FC2}"/>
+                <a16:creationId xmlns:a16="http://schemas.microsoft.com/office/drawing/2014/main" id="{E9429C3A-BC11-4736-8338-AE1443CA367A}"/>
               </a:ext>
             </a:extLst>
           </p:cNvPr>
@@ -12380,7 +13090,7 @@
           <p:cNvPr id="24" name="">
             <a:extLst xmlns:a="http://schemas.openxmlformats.org/drawingml/2006/main">
               <a:ext uri="{FF2B5EF4-FFF2-40B4-BE49-F238E27FC236}">
-                <a16:creationId xmlns:a16="http://schemas.microsoft.com/office/drawing/2014/main" id="{2AFACE8C-5DAB-4C97-84C1-7468A2947D5A}"/>
+                <a16:creationId xmlns:a16="http://schemas.microsoft.com/office/drawing/2014/main" id="{98B8CACE-6433-4AC1-BCF9-ED562935DC5A}"/>
               </a:ext>
             </a:extLst>
           </p:cNvPr>
@@ -12411,7 +13121,7 @@
           <p:cNvPr id="25" name="">
             <a:extLst xmlns:a="http://schemas.openxmlformats.org/drawingml/2006/main">
               <a:ext uri="{FF2B5EF4-FFF2-40B4-BE49-F238E27FC236}">
-                <a16:creationId xmlns:a16="http://schemas.microsoft.com/office/drawing/2014/main" id="{D20EAA42-F412-45DF-8A27-15A5C0D1564C}"/>
+                <a16:creationId xmlns:a16="http://schemas.microsoft.com/office/drawing/2014/main" id="{195177CE-5831-48A2-816C-67F70ED29ED0}"/>
               </a:ext>
             </a:extLst>
           </p:cNvPr>
@@ -12461,7 +13171,7 @@
           <p:cNvPr id="26" name="">
             <a:extLst xmlns:a="http://schemas.openxmlformats.org/drawingml/2006/main">
               <a:ext uri="{FF2B5EF4-FFF2-40B4-BE49-F238E27FC236}">
-                <a16:creationId xmlns:a16="http://schemas.microsoft.com/office/drawing/2014/main" id="{E17432BB-6AF3-4375-B4BE-A6672F82F283}"/>
+                <a16:creationId xmlns:a16="http://schemas.microsoft.com/office/drawing/2014/main" id="{CC920F93-20A2-4070-92CC-1C758FE084E5}"/>
               </a:ext>
             </a:extLst>
           </p:cNvPr>
@@ -12492,7 +13202,7 @@
           <p:cNvPr id="27" name="">
             <a:extLst xmlns:a="http://schemas.openxmlformats.org/drawingml/2006/main">
               <a:ext uri="{FF2B5EF4-FFF2-40B4-BE49-F238E27FC236}">
-                <a16:creationId xmlns:a16="http://schemas.microsoft.com/office/drawing/2014/main" id="{E751F110-620B-4A2D-84EA-03D7A77BAC3C}"/>
+                <a16:creationId xmlns:a16="http://schemas.microsoft.com/office/drawing/2014/main" id="{172EEA85-A27E-4719-9E32-EF451E9DC06C}"/>
               </a:ext>
             </a:extLst>
           </p:cNvPr>
@@ -12540,7 +13250,7 @@
     </p:spTree>
     <p:extLst>
       <p:ext uri="{BB962C8B-B14F-4D97-AF65-F5344CB8AC3E}">
-        <p14:creationId xmlns:p14="http://schemas.microsoft.com/office/powerpoint/2010/main" val="139311800"/>
+        <p14:creationId xmlns:p14="http://schemas.microsoft.com/office/powerpoint/2010/main" val="108289799"/>
       </p:ext>
     </p:extLst>
   </p:cSld>
@@ -12571,7 +13281,7 @@
           <p:cNvPr id="1" name="">
             <a:extLst xmlns:a="http://schemas.openxmlformats.org/drawingml/2006/main">
               <a:ext uri="{FF2B5EF4-FFF2-40B4-BE49-F238E27FC236}">
-                <a16:creationId xmlns:a16="http://schemas.microsoft.com/office/drawing/2014/main" id="{B2FCFE4B-ADFF-4A97-AC14-BFCBA9E7EED7}"/>
+                <a16:creationId xmlns:a16="http://schemas.microsoft.com/office/drawing/2014/main" id="{B3ACF61B-1944-477E-8A75-9EF9F207ECBE}"/>
               </a:ext>
             </a:extLst>
           </p:cNvPr>
@@ -12621,7 +13331,7 @@
           <p:cNvPr id="2" name="">
             <a:extLst xmlns:a="http://schemas.openxmlformats.org/drawingml/2006/main">
               <a:ext uri="{FF2B5EF4-FFF2-40B4-BE49-F238E27FC236}">
-                <a16:creationId xmlns:a16="http://schemas.microsoft.com/office/drawing/2014/main" id="{59779B16-C44F-4C19-9B9B-BB057B52FE3A}"/>
+                <a16:creationId xmlns:a16="http://schemas.microsoft.com/office/drawing/2014/main" id="{33520278-EF78-4BB3-965C-02351F79E0A5}"/>
               </a:ext>
             </a:extLst>
           </p:cNvPr>
@@ -12671,7 +13381,7 @@
           <p:cNvPr id="3" name="">
             <a:extLst xmlns:a="http://schemas.openxmlformats.org/drawingml/2006/main">
               <a:ext uri="{FF2B5EF4-FFF2-40B4-BE49-F238E27FC236}">
-                <a16:creationId xmlns:a16="http://schemas.microsoft.com/office/drawing/2014/main" id="{5EF2B354-683B-47E9-93C7-CC6C0BF54AC9}"/>
+                <a16:creationId xmlns:a16="http://schemas.microsoft.com/office/drawing/2014/main" id="{855157BD-15DB-42E2-AD1D-61A7FEBC3670}"/>
               </a:ext>
             </a:extLst>
           </p:cNvPr>
@@ -12704,7 +13414,7 @@
           <p:cNvPr id="4" name="">
             <a:extLst xmlns:a="http://schemas.openxmlformats.org/drawingml/2006/main">
               <a:ext uri="{FF2B5EF4-FFF2-40B4-BE49-F238E27FC236}">
-                <a16:creationId xmlns:a16="http://schemas.microsoft.com/office/drawing/2014/main" id="{1F425E80-7B50-43B4-A713-F3FF703F4DB3}"/>
+                <a16:creationId xmlns:a16="http://schemas.microsoft.com/office/drawing/2014/main" id="{3DA90ED0-E2F4-44B2-9ADF-26C9C17F931F}"/>
               </a:ext>
             </a:extLst>
           </p:cNvPr>
@@ -12739,7 +13449,7 @@
           <p:cNvPr id="5" name="">
             <a:extLst xmlns:a="http://schemas.openxmlformats.org/drawingml/2006/main">
               <a:ext uri="{FF2B5EF4-FFF2-40B4-BE49-F238E27FC236}">
-                <a16:creationId xmlns:a16="http://schemas.microsoft.com/office/drawing/2014/main" id="{F9325BCF-2B76-4C40-B1C7-C3A39E2078FA}"/>
+                <a16:creationId xmlns:a16="http://schemas.microsoft.com/office/drawing/2014/main" id="{637C685F-7D37-4580-BDDF-F387356FC9FA}"/>
               </a:ext>
             </a:extLst>
           </p:cNvPr>
@@ -12789,7 +13499,7 @@
           <p:cNvPr id="6" name="">
             <a:extLst xmlns:a="http://schemas.openxmlformats.org/drawingml/2006/main">
               <a:ext uri="{FF2B5EF4-FFF2-40B4-BE49-F238E27FC236}">
-                <a16:creationId xmlns:a16="http://schemas.microsoft.com/office/drawing/2014/main" id="{67BF0B49-C6FF-4035-ABE1-96E99C62C653}"/>
+                <a16:creationId xmlns:a16="http://schemas.microsoft.com/office/drawing/2014/main" id="{960F78CC-11BB-4C7F-999E-45A6E326060B}"/>
               </a:ext>
             </a:extLst>
           </p:cNvPr>
@@ -12839,7 +13549,7 @@
           <p:cNvPr id="7" name="">
             <a:extLst xmlns:a="http://schemas.openxmlformats.org/drawingml/2006/main">
               <a:ext uri="{FF2B5EF4-FFF2-40B4-BE49-F238E27FC236}">
-                <a16:creationId xmlns:a16="http://schemas.microsoft.com/office/drawing/2014/main" id="{0FCDED2C-6AAF-4CAA-813D-DE233C543599}"/>
+                <a16:creationId xmlns:a16="http://schemas.microsoft.com/office/drawing/2014/main" id="{CFD8887B-EF82-4194-B819-840D01C4FBCD}"/>
               </a:ext>
             </a:extLst>
           </p:cNvPr>
@@ -12874,7 +13584,7 @@
           <p:cNvPr id="8" name="">
             <a:extLst xmlns:a="http://schemas.openxmlformats.org/drawingml/2006/main">
               <a:ext uri="{FF2B5EF4-FFF2-40B4-BE49-F238E27FC236}">
-                <a16:creationId xmlns:a16="http://schemas.microsoft.com/office/drawing/2014/main" id="{1E4403BC-6D00-4688-A5C2-01DA5ABE4F2F}"/>
+                <a16:creationId xmlns:a16="http://schemas.microsoft.com/office/drawing/2014/main" id="{C0325001-D29A-4731-B5C3-50603041BF26}"/>
               </a:ext>
             </a:extLst>
           </p:cNvPr>
@@ -12924,7 +13634,7 @@
           <p:cNvPr id="9" name="">
             <a:extLst xmlns:a="http://schemas.openxmlformats.org/drawingml/2006/main">
               <a:ext uri="{FF2B5EF4-FFF2-40B4-BE49-F238E27FC236}">
-                <a16:creationId xmlns:a16="http://schemas.microsoft.com/office/drawing/2014/main" id="{BC1670DD-7F47-4655-B269-7D3CC9DC0FDB}"/>
+                <a16:creationId xmlns:a16="http://schemas.microsoft.com/office/drawing/2014/main" id="{3A1D0133-C76C-4A84-A275-4904F6655185}"/>
               </a:ext>
             </a:extLst>
           </p:cNvPr>
@@ -12955,7 +13665,7 @@
           <p:cNvPr id="10" name="">
             <a:extLst xmlns:a="http://schemas.openxmlformats.org/drawingml/2006/main">
               <a:ext uri="{FF2B5EF4-FFF2-40B4-BE49-F238E27FC236}">
-                <a16:creationId xmlns:a16="http://schemas.microsoft.com/office/drawing/2014/main" id="{518416F0-3103-446E-A79E-29834758F0B7}"/>
+                <a16:creationId xmlns:a16="http://schemas.microsoft.com/office/drawing/2014/main" id="{60C4F95D-F0D2-435C-B7E2-236852B9AEF1}"/>
               </a:ext>
             </a:extLst>
           </p:cNvPr>
@@ -13005,7 +13715,7 @@
           <p:cNvPr id="11" name="">
             <a:extLst xmlns:a="http://schemas.openxmlformats.org/drawingml/2006/main">
               <a:ext uri="{FF2B5EF4-FFF2-40B4-BE49-F238E27FC236}">
-                <a16:creationId xmlns:a16="http://schemas.microsoft.com/office/drawing/2014/main" id="{1ECC40C0-5A11-4EE8-903D-6640A28B57DE}"/>
+                <a16:creationId xmlns:a16="http://schemas.microsoft.com/office/drawing/2014/main" id="{85324FCE-6EE4-4082-B235-2959D6077100}"/>
               </a:ext>
             </a:extLst>
           </p:cNvPr>
@@ -13036,7 +13746,7 @@
           <p:cNvPr id="12" name="">
             <a:extLst xmlns:a="http://schemas.openxmlformats.org/drawingml/2006/main">
               <a:ext uri="{FF2B5EF4-FFF2-40B4-BE49-F238E27FC236}">
-                <a16:creationId xmlns:a16="http://schemas.microsoft.com/office/drawing/2014/main" id="{F2268646-A00A-4992-BD04-9E3645E84731}"/>
+                <a16:creationId xmlns:a16="http://schemas.microsoft.com/office/drawing/2014/main" id="{734AB775-DC68-450B-872E-4EB8A7DD66A7}"/>
               </a:ext>
             </a:extLst>
           </p:cNvPr>
@@ -13086,7 +13796,7 @@
           <p:cNvPr id="13" name="">
             <a:extLst xmlns:a="http://schemas.openxmlformats.org/drawingml/2006/main">
               <a:ext uri="{FF2B5EF4-FFF2-40B4-BE49-F238E27FC236}">
-                <a16:creationId xmlns:a16="http://schemas.microsoft.com/office/drawing/2014/main" id="{C6A1DDCE-CBAC-42B7-A646-AC78CDFC7D77}"/>
+                <a16:creationId xmlns:a16="http://schemas.microsoft.com/office/drawing/2014/main" id="{AB5799D0-986F-448F-9E5C-8D472C246D71}"/>
               </a:ext>
             </a:extLst>
           </p:cNvPr>
@@ -13117,7 +13827,7 @@
           <p:cNvPr id="14" name="">
             <a:extLst xmlns:a="http://schemas.openxmlformats.org/drawingml/2006/main">
               <a:ext uri="{FF2B5EF4-FFF2-40B4-BE49-F238E27FC236}">
-                <a16:creationId xmlns:a16="http://schemas.microsoft.com/office/drawing/2014/main" id="{80CD4DE7-9EF7-4DCD-AF5D-2B880AFD02C5}"/>
+                <a16:creationId xmlns:a16="http://schemas.microsoft.com/office/drawing/2014/main" id="{3B61B5C4-D339-4C33-AC80-1DFF70911952}"/>
               </a:ext>
             </a:extLst>
           </p:cNvPr>
@@ -13167,7 +13877,7 @@
           <p:cNvPr id="15" name="">
             <a:extLst xmlns:a="http://schemas.openxmlformats.org/drawingml/2006/main">
               <a:ext uri="{FF2B5EF4-FFF2-40B4-BE49-F238E27FC236}">
-                <a16:creationId xmlns:a16="http://schemas.microsoft.com/office/drawing/2014/main" id="{39B6AF1F-3798-41BC-9ED3-D715D81BD9F9}"/>
+                <a16:creationId xmlns:a16="http://schemas.microsoft.com/office/drawing/2014/main" id="{2DD34907-9886-47BA-B036-B991DE6141D8}"/>
               </a:ext>
             </a:extLst>
           </p:cNvPr>
@@ -13198,7 +13908,7 @@
           <p:cNvPr id="16" name="">
             <a:extLst xmlns:a="http://schemas.openxmlformats.org/drawingml/2006/main">
               <a:ext uri="{FF2B5EF4-FFF2-40B4-BE49-F238E27FC236}">
-                <a16:creationId xmlns:a16="http://schemas.microsoft.com/office/drawing/2014/main" id="{1A620B9E-4068-4BE7-A32A-0280D0FAE5E0}"/>
+                <a16:creationId xmlns:a16="http://schemas.microsoft.com/office/drawing/2014/main" id="{70C10A4C-4073-4F96-AA8A-02E3A71EEA46}"/>
               </a:ext>
             </a:extLst>
           </p:cNvPr>
@@ -13248,7 +13958,7 @@
           <p:cNvPr id="17" name="">
             <a:extLst xmlns:a="http://schemas.openxmlformats.org/drawingml/2006/main">
               <a:ext uri="{FF2B5EF4-FFF2-40B4-BE49-F238E27FC236}">
-                <a16:creationId xmlns:a16="http://schemas.microsoft.com/office/drawing/2014/main" id="{6D3FE26B-8FC4-4988-B039-08DF9F63AD23}"/>
+                <a16:creationId xmlns:a16="http://schemas.microsoft.com/office/drawing/2014/main" id="{A93B9574-D93A-4E2E-98E5-2A7430291AC2}"/>
               </a:ext>
             </a:extLst>
           </p:cNvPr>
@@ -13296,7 +14006,7 @@
     </p:spTree>
     <p:extLst>
       <p:ext uri="{BB962C8B-B14F-4D97-AF65-F5344CB8AC3E}">
-        <p14:creationId xmlns:p14="http://schemas.microsoft.com/office/powerpoint/2010/main" val="249256092"/>
+        <p14:creationId xmlns:p14="http://schemas.microsoft.com/office/powerpoint/2010/main" val="787680712"/>
       </p:ext>
     </p:extLst>
   </p:cSld>

--- a/presentations/gen5_3_bull_momentum_specialist_plan.pptx
+++ b/presentations/gen5_3_bull_momentum_specialist_plan.pptx
@@ -2,26 +2,27 @@
 <file path=ppt/presentation.xml><?xml version="1.0" encoding="utf-8"?>
 <p:presentation xmlns:p="http://schemas.openxmlformats.org/presentationml/2006/main">
   <p:sldMasterIdLst>
-    <p:sldMasterId xmlns:r="http://schemas.openxmlformats.org/officeDocument/2006/relationships" id="2147483648" r:id="Raa45211ec0ff4887"/>
+    <p:sldMasterId xmlns:r="http://schemas.openxmlformats.org/officeDocument/2006/relationships" id="2147483648" r:id="R3bf8cdb30e874077"/>
   </p:sldMasterIdLst>
   <p:notesMasterIdLst>
-    <p:notesMasterId xmlns:r="http://schemas.openxmlformats.org/officeDocument/2006/relationships" r:id="Reef466d9dcfa4e89"/>
+    <p:notesMasterId xmlns:r="http://schemas.openxmlformats.org/officeDocument/2006/relationships" r:id="Rffbb19cc19114fef"/>
   </p:notesMasterIdLst>
   <p:sldIdLst>
-    <p:sldId xmlns:r="http://schemas.openxmlformats.org/officeDocument/2006/relationships" id="256" r:id="Rb3c30fb8852c4220"/>
-    <p:sldId xmlns:r="http://schemas.openxmlformats.org/officeDocument/2006/relationships" id="257" r:id="Rc706546d613c48a2"/>
-    <p:sldId xmlns:r="http://schemas.openxmlformats.org/officeDocument/2006/relationships" id="258" r:id="R74eb1b3da3984f7a"/>
-    <p:sldId xmlns:r="http://schemas.openxmlformats.org/officeDocument/2006/relationships" id="259" r:id="R05e1e9f00d1940c2"/>
-    <p:sldId xmlns:r="http://schemas.openxmlformats.org/officeDocument/2006/relationships" id="260" r:id="R2b29d76b352e42b3"/>
-    <p:sldId xmlns:r="http://schemas.openxmlformats.org/officeDocument/2006/relationships" id="261" r:id="Rbc4a5ad60a984fb0"/>
-    <p:sldId xmlns:r="http://schemas.openxmlformats.org/officeDocument/2006/relationships" id="262" r:id="Rd74302f855894819"/>
-    <p:sldId xmlns:r="http://schemas.openxmlformats.org/officeDocument/2006/relationships" id="263" r:id="R61570a3bb4194786"/>
-    <p:sldId xmlns:r="http://schemas.openxmlformats.org/officeDocument/2006/relationships" id="264" r:id="Rd48d3ce50e4f4b52"/>
-    <p:sldId xmlns:r="http://schemas.openxmlformats.org/officeDocument/2006/relationships" id="265" r:id="R0d3e502721fb46f5"/>
-    <p:sldId xmlns:r="http://schemas.openxmlformats.org/officeDocument/2006/relationships" id="266" r:id="R5bfe041ab62f409b"/>
-    <p:sldId xmlns:r="http://schemas.openxmlformats.org/officeDocument/2006/relationships" id="267" r:id="R2b782f655cc94610"/>
-    <p:sldId xmlns:r="http://schemas.openxmlformats.org/officeDocument/2006/relationships" id="268" r:id="Rd4617074c7834014"/>
-    <p:sldId xmlns:r="http://schemas.openxmlformats.org/officeDocument/2006/relationships" id="269" r:id="R60b5437a28c24c45"/>
+    <p:sldId xmlns:r="http://schemas.openxmlformats.org/officeDocument/2006/relationships" id="256" r:id="Rab3edeeac19c47b3"/>
+    <p:sldId xmlns:r="http://schemas.openxmlformats.org/officeDocument/2006/relationships" id="257" r:id="R436d6d6545e64879"/>
+    <p:sldId xmlns:r="http://schemas.openxmlformats.org/officeDocument/2006/relationships" id="258" r:id="Rd013866a8cb64fb9"/>
+    <p:sldId xmlns:r="http://schemas.openxmlformats.org/officeDocument/2006/relationships" id="259" r:id="Re0735c978cc04416"/>
+    <p:sldId xmlns:r="http://schemas.openxmlformats.org/officeDocument/2006/relationships" id="260" r:id="R261af10914f547f4"/>
+    <p:sldId xmlns:r="http://schemas.openxmlformats.org/officeDocument/2006/relationships" id="261" r:id="R499009c40e9d4812"/>
+    <p:sldId xmlns:r="http://schemas.openxmlformats.org/officeDocument/2006/relationships" id="262" r:id="Reb249ed2f6404238"/>
+    <p:sldId xmlns:r="http://schemas.openxmlformats.org/officeDocument/2006/relationships" id="263" r:id="R7b816fdbec4b433b"/>
+    <p:sldId xmlns:r="http://schemas.openxmlformats.org/officeDocument/2006/relationships" id="264" r:id="R6d2c39a9c35349b8"/>
+    <p:sldId xmlns:r="http://schemas.openxmlformats.org/officeDocument/2006/relationships" id="265" r:id="Rc6655ca5b4e246c9"/>
+    <p:sldId xmlns:r="http://schemas.openxmlformats.org/officeDocument/2006/relationships" id="266" r:id="R9db36d7bb8b94e75"/>
+    <p:sldId xmlns:r="http://schemas.openxmlformats.org/officeDocument/2006/relationships" id="267" r:id="R0f7507c77b5142a1"/>
+    <p:sldId xmlns:r="http://schemas.openxmlformats.org/officeDocument/2006/relationships" id="268" r:id="R79bc5ef61cdb4df7"/>
+    <p:sldId xmlns:r="http://schemas.openxmlformats.org/officeDocument/2006/relationships" id="269" r:id="Rccdbebc4192844f5"/>
+    <p:sldId xmlns:r="http://schemas.openxmlformats.org/officeDocument/2006/relationships" id="270" r:id="Rbc63b81c410042be"/>
   </p:sldIdLst>
   <p:sldSz cx="12192000" cy="6858000"/>
   <p:notesSz cx="6858000" cy="9144000"/>
@@ -906,6 +907,72 @@
 </p:notes>
 </file>
 
+<file path=ppt/notesSlides/notesSlide15.xml><?xml version="1.0" encoding="utf-8"?>
+<p:notes xmlns:p="http://schemas.openxmlformats.org/presentationml/2006/main">
+  <p:cSld>
+    <p:spTree>
+      <p:nvGrpSpPr>
+        <p:cNvPr id="1" name=""/>
+        <p:cNvGrpSpPr/>
+        <p:nvPr/>
+      </p:nvGrpSpPr>
+      <p:grpSpPr>
+        <a:xfrm xmlns:a="http://schemas.openxmlformats.org/drawingml/2006/main"/>
+      </p:grpSpPr>
+      <p:sp>
+        <p:nvSpPr>
+          <p:cNvPr id="2" name="Slide Image Placeholder 1"/>
+          <p:cNvSpPr>
+            <a:spLocks xmlns:a="http://schemas.openxmlformats.org/drawingml/2006/main" noGrp="1"/>
+          </p:cNvSpPr>
+          <p:nvPr>
+            <p:ph type="sldImg" idx="0"/>
+          </p:nvPr>
+        </p:nvSpPr>
+        <p:spPr/>
+      </p:sp>
+      <p:sp>
+        <p:nvSpPr>
+          <p:cNvPr id="3" name="Notes Placeholder 2"/>
+          <p:cNvSpPr>
+            <a:spLocks xmlns:a="http://schemas.openxmlformats.org/drawingml/2006/main" noGrp="1"/>
+          </p:cNvSpPr>
+          <p:nvPr>
+            <p:ph type="body" idx="1"/>
+          </p:nvPr>
+        </p:nvSpPr>
+        <p:spPr/>
+        <p:txBody>
+          <a:bodyPr xmlns:a="http://schemas.openxmlformats.org/drawingml/2006/main"/>
+          <a:lstStyle xmlns:a="http://schemas.openxmlformats.org/drawingml/2006/main"/>
+          <a:p xmlns:a="http://schemas.openxmlformats.org/drawingml/2006/main"/>
+        </p:txBody>
+      </p:sp>
+      <p:sp>
+        <p:nvSpPr>
+          <p:cNvPr id="4" name="Slide Number Placeholder 3"/>
+          <p:cNvSpPr>
+            <a:spLocks xmlns:a="http://schemas.openxmlformats.org/drawingml/2006/main" noGrp="1"/>
+          </p:cNvSpPr>
+          <p:nvPr>
+            <p:ph type="sldNum" idx="5"/>
+          </p:nvPr>
+        </p:nvSpPr>
+        <p:spPr/>
+        <p:txBody>
+          <a:bodyPr xmlns:a="http://schemas.openxmlformats.org/drawingml/2006/main"/>
+          <a:lstStyle xmlns:a="http://schemas.openxmlformats.org/drawingml/2006/main"/>
+          <a:p xmlns:a="http://schemas.openxmlformats.org/drawingml/2006/main"/>
+        </p:txBody>
+      </p:sp>
+    </p:spTree>
+  </p:cSld>
+  <p:clrMapOvr>
+    <a:masterClrMapping xmlns:a="http://schemas.openxmlformats.org/drawingml/2006/main"/>
+  </p:clrMapOvr>
+</p:notes>
+</file>
+
 <file path=ppt/notesSlides/notesSlide2.xml><?xml version="1.0" encoding="utf-8"?>
 <p:notes xmlns:p="http://schemas.openxmlformats.org/presentationml/2006/main">
   <p:cSld>
@@ -1472,7 +1539,7 @@
   </p:cSld>
   <p:clrMap bg1="lt1" tx1="dk1" bg2="lt2" tx2="dk2" accent1="accent1" accent2="accent2" accent3="accent3" accent4="accent4" accent5="accent5" accent6="accent6" hlink="hlink" folHlink="folHlink"/>
   <p:sldLayoutIdLst>
-    <p:sldLayoutId xmlns:r="http://schemas.openxmlformats.org/officeDocument/2006/relationships" id="2147483649" r:id="R667a5a0485454720"/>
+    <p:sldLayoutId xmlns:r="http://schemas.openxmlformats.org/officeDocument/2006/relationships" id="2147483649" r:id="R5b95051b2687426e"/>
   </p:sldLayoutIdLst>
   <p:txStyles>
     <p:titleStyle>
@@ -2023,7 +2090,7 @@
           <p:cNvPr id="1" name="">
             <a:extLst xmlns:a="http://schemas.openxmlformats.org/drawingml/2006/main">
               <a:ext uri="{FF2B5EF4-FFF2-40B4-BE49-F238E27FC236}">
-                <a16:creationId xmlns:a16="http://schemas.microsoft.com/office/drawing/2014/main" id="{657000B1-E6FC-4252-A977-DC7F313FA1C1}"/>
+                <a16:creationId xmlns:a16="http://schemas.microsoft.com/office/drawing/2014/main" id="{6F98EF5A-B381-414A-99C2-78DF7DCBEF0B}"/>
               </a:ext>
             </a:extLst>
           </p:cNvPr>
@@ -2073,7 +2140,7 @@
           <p:cNvPr id="2" name="">
             <a:extLst xmlns:a="http://schemas.openxmlformats.org/drawingml/2006/main">
               <a:ext uri="{FF2B5EF4-FFF2-40B4-BE49-F238E27FC236}">
-                <a16:creationId xmlns:a16="http://schemas.microsoft.com/office/drawing/2014/main" id="{59D99581-2A1C-4D0C-8672-C961667688C0}"/>
+                <a16:creationId xmlns:a16="http://schemas.microsoft.com/office/drawing/2014/main" id="{FC039AD9-C8B3-4330-8111-D235328ADBD4}"/>
               </a:ext>
             </a:extLst>
           </p:cNvPr>
@@ -2123,7 +2190,7 @@
           <p:cNvPr id="3" name="">
             <a:extLst xmlns:a="http://schemas.openxmlformats.org/drawingml/2006/main">
               <a:ext uri="{FF2B5EF4-FFF2-40B4-BE49-F238E27FC236}">
-                <a16:creationId xmlns:a16="http://schemas.microsoft.com/office/drawing/2014/main" id="{D038FDC5-C479-49A3-8117-0EA5AC58C002}"/>
+                <a16:creationId xmlns:a16="http://schemas.microsoft.com/office/drawing/2014/main" id="{3770F7E4-0F7F-4277-8F45-674746452F0C}"/>
               </a:ext>
             </a:extLst>
           </p:cNvPr>
@@ -2173,7 +2240,7 @@
           <p:cNvPr id="4" name="">
             <a:extLst xmlns:a="http://schemas.openxmlformats.org/drawingml/2006/main">
               <a:ext uri="{FF2B5EF4-FFF2-40B4-BE49-F238E27FC236}">
-                <a16:creationId xmlns:a16="http://schemas.microsoft.com/office/drawing/2014/main" id="{FD4403A8-37E3-4075-B560-E67617793979}"/>
+                <a16:creationId xmlns:a16="http://schemas.microsoft.com/office/drawing/2014/main" id="{A06B567C-6C3C-4EFF-9F02-05A001C2EC82}"/>
               </a:ext>
             </a:extLst>
           </p:cNvPr>
@@ -2208,7 +2275,7 @@
           <p:cNvPr id="5" name="">
             <a:extLst xmlns:a="http://schemas.openxmlformats.org/drawingml/2006/main">
               <a:ext uri="{FF2B5EF4-FFF2-40B4-BE49-F238E27FC236}">
-                <a16:creationId xmlns:a16="http://schemas.microsoft.com/office/drawing/2014/main" id="{BEB18E2C-609A-485D-8693-32FD01A06CB9}"/>
+                <a16:creationId xmlns:a16="http://schemas.microsoft.com/office/drawing/2014/main" id="{28042FE7-DD9D-458B-B692-203E36EC8C90}"/>
               </a:ext>
             </a:extLst>
           </p:cNvPr>
@@ -2258,7 +2325,7 @@
           <p:cNvPr id="6" name="">
             <a:extLst xmlns:a="http://schemas.openxmlformats.org/drawingml/2006/main">
               <a:ext uri="{FF2B5EF4-FFF2-40B4-BE49-F238E27FC236}">
-                <a16:creationId xmlns:a16="http://schemas.microsoft.com/office/drawing/2014/main" id="{CB59A9B9-23AF-4332-AA42-E764F10ADBC5}"/>
+                <a16:creationId xmlns:a16="http://schemas.microsoft.com/office/drawing/2014/main" id="{EC883CD1-4018-4B0E-A0B5-92DAA87B2BA1}"/>
               </a:ext>
             </a:extLst>
           </p:cNvPr>
@@ -2308,7 +2375,7 @@
           <p:cNvPr id="7" name="">
             <a:extLst xmlns:a="http://schemas.openxmlformats.org/drawingml/2006/main">
               <a:ext uri="{FF2B5EF4-FFF2-40B4-BE49-F238E27FC236}">
-                <a16:creationId xmlns:a16="http://schemas.microsoft.com/office/drawing/2014/main" id="{E3C6C031-6524-428F-822B-BF3AEDA203DE}"/>
+                <a16:creationId xmlns:a16="http://schemas.microsoft.com/office/drawing/2014/main" id="{583DC855-5C08-4600-B7D8-38B64FBA910C}"/>
               </a:ext>
             </a:extLst>
           </p:cNvPr>
@@ -2356,7 +2423,7 @@
     </p:spTree>
     <p:extLst>
       <p:ext uri="{BB962C8B-B14F-4D97-AF65-F5344CB8AC3E}">
-        <p14:creationId xmlns:p14="http://schemas.microsoft.com/office/powerpoint/2010/main" val="355922960"/>
+        <p14:creationId xmlns:p14="http://schemas.microsoft.com/office/powerpoint/2010/main" val="248369817"/>
       </p:ext>
     </p:extLst>
   </p:cSld>
@@ -2387,7 +2454,7 @@
           <p:cNvPr id="1" name="">
             <a:extLst xmlns:a="http://schemas.openxmlformats.org/drawingml/2006/main">
               <a:ext uri="{FF2B5EF4-FFF2-40B4-BE49-F238E27FC236}">
-                <a16:creationId xmlns:a16="http://schemas.microsoft.com/office/drawing/2014/main" id="{D0F9134A-B2C0-4660-8A56-79B3ACB4A704}"/>
+                <a16:creationId xmlns:a16="http://schemas.microsoft.com/office/drawing/2014/main" id="{D6ABC078-72B6-4606-8549-5471E4DB96AE}"/>
               </a:ext>
             </a:extLst>
           </p:cNvPr>
@@ -2437,7 +2504,7 @@
           <p:cNvPr id="2" name="">
             <a:extLst xmlns:a="http://schemas.openxmlformats.org/drawingml/2006/main">
               <a:ext uri="{FF2B5EF4-FFF2-40B4-BE49-F238E27FC236}">
-                <a16:creationId xmlns:a16="http://schemas.microsoft.com/office/drawing/2014/main" id="{CAB2261E-2117-442A-AB03-1E7B2F6BE58B}"/>
+                <a16:creationId xmlns:a16="http://schemas.microsoft.com/office/drawing/2014/main" id="{F605485C-51A8-4485-8524-832E9B8CF31C}"/>
               </a:ext>
             </a:extLst>
           </p:cNvPr>
@@ -2477,7 +2544,7 @@
                   <a:srgbClr val="111827"/>
                 </a:solidFill>
               </a:rPr>
-              <a:t>The first baseline gives us a clean, bounded answer</a:t>
+              <a:t>The feature-set screen keeps the mechanics fixed and changes only the PCA inputs</a:t>
             </a:r>
           </a:p>
         </p:txBody>
@@ -2487,7 +2554,7 @@
           <p:cNvPr id="3" name="">
             <a:extLst xmlns:a="http://schemas.openxmlformats.org/drawingml/2006/main">
               <a:ext uri="{FF2B5EF4-FFF2-40B4-BE49-F238E27FC236}">
-                <a16:creationId xmlns:a16="http://schemas.microsoft.com/office/drawing/2014/main" id="{2B693E31-E2D4-4A38-83B0-B6CC1242AA6B}"/>
+                <a16:creationId xmlns:a16="http://schemas.microsoft.com/office/drawing/2014/main" id="{FB21A7F4-9619-4914-8EB3-B2D63298CC83}"/>
               </a:ext>
             </a:extLst>
           </p:cNvPr>
@@ -2520,7 +2587,7 @@
           <p:cNvPr id="4" name="">
             <a:extLst xmlns:a="http://schemas.openxmlformats.org/drawingml/2006/main">
               <a:ext uri="{FF2B5EF4-FFF2-40B4-BE49-F238E27FC236}">
-                <a16:creationId xmlns:a16="http://schemas.microsoft.com/office/drawing/2014/main" id="{21144CBD-EC85-47A2-A2DA-BFC5B46649F4}"/>
+                <a16:creationId xmlns:a16="http://schemas.microsoft.com/office/drawing/2014/main" id="{1465AAED-282E-4EE9-8FD4-768BFDE4EDA2}"/>
               </a:ext>
             </a:extLst>
           </p:cNvPr>
@@ -2555,7 +2622,7 @@
           <p:cNvPr id="5" name="">
             <a:extLst xmlns:a="http://schemas.openxmlformats.org/drawingml/2006/main">
               <a:ext uri="{FF2B5EF4-FFF2-40B4-BE49-F238E27FC236}">
-                <a16:creationId xmlns:a16="http://schemas.microsoft.com/office/drawing/2014/main" id="{F595C2AB-622C-46DA-92E0-E4824F8BA3E4}"/>
+                <a16:creationId xmlns:a16="http://schemas.microsoft.com/office/drawing/2014/main" id="{131F3D96-BDE1-48C3-8D2E-1B5270592926}"/>
               </a:ext>
             </a:extLst>
           </p:cNvPr>
@@ -2595,7 +2662,7 @@
                   <a:srgbClr val="2563EB"/>
                 </a:solidFill>
               </a:rPr>
-              <a:t>What we tested</a:t>
+              <a:t>Held fixed</a:t>
             </a:r>
           </a:p>
         </p:txBody>
@@ -2605,7 +2672,7 @@
           <p:cNvPr id="6" name="">
             <a:extLst xmlns:a="http://schemas.openxmlformats.org/drawingml/2006/main">
               <a:ext uri="{FF2B5EF4-FFF2-40B4-BE49-F238E27FC236}">
-                <a16:creationId xmlns:a16="http://schemas.microsoft.com/office/drawing/2014/main" id="{C1B67922-11D4-457B-8C19-6152474089B2}"/>
+                <a16:creationId xmlns:a16="http://schemas.microsoft.com/office/drawing/2014/main" id="{D2A0D60C-3D5C-4651-909A-F4F2AAD43418}"/>
               </a:ext>
             </a:extLst>
           </p:cNvPr>
@@ -2636,7 +2703,7 @@
           <p:cNvPr id="7" name="">
             <a:extLst xmlns:a="http://schemas.openxmlformats.org/drawingml/2006/main">
               <a:ext uri="{FF2B5EF4-FFF2-40B4-BE49-F238E27FC236}">
-                <a16:creationId xmlns:a16="http://schemas.microsoft.com/office/drawing/2014/main" id="{04441526-D86A-4809-9451-5CD076450C1E}"/>
+                <a16:creationId xmlns:a16="http://schemas.microsoft.com/office/drawing/2014/main" id="{55829D1B-2591-4233-9FFD-5E889A060A31}"/>
               </a:ext>
             </a:extLst>
           </p:cNvPr>
@@ -2686,7 +2753,7 @@
           <p:cNvPr id="8" name="">
             <a:extLst xmlns:a="http://schemas.openxmlformats.org/drawingml/2006/main">
               <a:ext uri="{FF2B5EF4-FFF2-40B4-BE49-F238E27FC236}">
-                <a16:creationId xmlns:a16="http://schemas.microsoft.com/office/drawing/2014/main" id="{03134629-D0A3-4212-A7E2-CF785CA47556}"/>
+                <a16:creationId xmlns:a16="http://schemas.microsoft.com/office/drawing/2014/main" id="{E72E9A3C-5EF5-4122-A095-0BE7BD704622}"/>
               </a:ext>
             </a:extLst>
           </p:cNvPr>
@@ -2717,7 +2784,7 @@
           <p:cNvPr id="9" name="">
             <a:extLst xmlns:a="http://schemas.openxmlformats.org/drawingml/2006/main">
               <a:ext uri="{FF2B5EF4-FFF2-40B4-BE49-F238E27FC236}">
-                <a16:creationId xmlns:a16="http://schemas.microsoft.com/office/drawing/2014/main" id="{312F420F-C7D7-4706-83C8-19BB37C00EE1}"/>
+                <a16:creationId xmlns:a16="http://schemas.microsoft.com/office/drawing/2014/main" id="{69992CBB-E3EA-4334-AAC4-C43CB23FFF2C}"/>
               </a:ext>
             </a:extLst>
           </p:cNvPr>
@@ -2767,7 +2834,7 @@
           <p:cNvPr id="10" name="">
             <a:extLst xmlns:a="http://schemas.openxmlformats.org/drawingml/2006/main">
               <a:ext uri="{FF2B5EF4-FFF2-40B4-BE49-F238E27FC236}">
-                <a16:creationId xmlns:a16="http://schemas.microsoft.com/office/drawing/2014/main" id="{F7C8F83F-E7A5-429A-BD1F-91A8A04286ED}"/>
+                <a16:creationId xmlns:a16="http://schemas.microsoft.com/office/drawing/2014/main" id="{C5C00068-A752-4807-BCD7-48F0E030DCFA}"/>
               </a:ext>
             </a:extLst>
           </p:cNvPr>
@@ -2798,7 +2865,7 @@
           <p:cNvPr id="11" name="">
             <a:extLst xmlns:a="http://schemas.openxmlformats.org/drawingml/2006/main">
               <a:ext uri="{FF2B5EF4-FFF2-40B4-BE49-F238E27FC236}">
-                <a16:creationId xmlns:a16="http://schemas.microsoft.com/office/drawing/2014/main" id="{B10F79D4-6C0B-4F0A-A538-6D3A15CD359D}"/>
+                <a16:creationId xmlns:a16="http://schemas.microsoft.com/office/drawing/2014/main" id="{9299A4B9-D723-4916-BA78-8E6C74BC3852}"/>
               </a:ext>
             </a:extLst>
           </p:cNvPr>
@@ -2848,7 +2915,7 @@
           <p:cNvPr id="12" name="">
             <a:extLst xmlns:a="http://schemas.openxmlformats.org/drawingml/2006/main">
               <a:ext uri="{FF2B5EF4-FFF2-40B4-BE49-F238E27FC236}">
-                <a16:creationId xmlns:a16="http://schemas.microsoft.com/office/drawing/2014/main" id="{EBB49F8B-0263-490F-9D44-C6335DF435D3}"/>
+                <a16:creationId xmlns:a16="http://schemas.microsoft.com/office/drawing/2014/main" id="{F8DE5143-AEB4-4955-891D-34D9C25461D7}"/>
               </a:ext>
             </a:extLst>
           </p:cNvPr>
@@ -2879,7 +2946,7 @@
           <p:cNvPr id="13" name="">
             <a:extLst xmlns:a="http://schemas.openxmlformats.org/drawingml/2006/main">
               <a:ext uri="{FF2B5EF4-FFF2-40B4-BE49-F238E27FC236}">
-                <a16:creationId xmlns:a16="http://schemas.microsoft.com/office/drawing/2014/main" id="{3ED7936D-AA14-42E4-B363-8217A4AE3BE0}"/>
+                <a16:creationId xmlns:a16="http://schemas.microsoft.com/office/drawing/2014/main" id="{60824192-AEA1-4BED-B032-AABEC1FD855B}"/>
               </a:ext>
             </a:extLst>
           </p:cNvPr>
@@ -2929,7 +2996,7 @@
           <p:cNvPr id="14" name="">
             <a:extLst xmlns:a="http://schemas.openxmlformats.org/drawingml/2006/main">
               <a:ext uri="{FF2B5EF4-FFF2-40B4-BE49-F238E27FC236}">
-                <a16:creationId xmlns:a16="http://schemas.microsoft.com/office/drawing/2014/main" id="{BA0AC52F-13E8-4CBF-BA34-5B912240680A}"/>
+                <a16:creationId xmlns:a16="http://schemas.microsoft.com/office/drawing/2014/main" id="{E111F458-12AC-4DB6-9198-7C241D27D305}"/>
               </a:ext>
             </a:extLst>
           </p:cNvPr>
@@ -2960,7 +3027,7 @@
           <p:cNvPr id="15" name="">
             <a:extLst xmlns:a="http://schemas.openxmlformats.org/drawingml/2006/main">
               <a:ext uri="{FF2B5EF4-FFF2-40B4-BE49-F238E27FC236}">
-                <a16:creationId xmlns:a16="http://schemas.microsoft.com/office/drawing/2014/main" id="{2DE07A93-3118-4255-ACD3-4166B8A118A1}"/>
+                <a16:creationId xmlns:a16="http://schemas.microsoft.com/office/drawing/2014/main" id="{6F25C608-3256-415A-8A9B-F14DD32B2B6D}"/>
               </a:ext>
             </a:extLst>
           </p:cNvPr>
@@ -3010,7 +3077,7 @@
           <p:cNvPr id="16" name="">
             <a:extLst xmlns:a="http://schemas.openxmlformats.org/drawingml/2006/main">
               <a:ext uri="{FF2B5EF4-FFF2-40B4-BE49-F238E27FC236}">
-                <a16:creationId xmlns:a16="http://schemas.microsoft.com/office/drawing/2014/main" id="{73B03C8B-C1AE-4FC6-8724-20B9C7B7F543}"/>
+                <a16:creationId xmlns:a16="http://schemas.microsoft.com/office/drawing/2014/main" id="{65D8638B-20C9-4628-BD28-35F9372DCBFA}"/>
               </a:ext>
             </a:extLst>
           </p:cNvPr>
@@ -3045,7 +3112,7 @@
           <p:cNvPr id="17" name="">
             <a:extLst xmlns:a="http://schemas.openxmlformats.org/drawingml/2006/main">
               <a:ext uri="{FF2B5EF4-FFF2-40B4-BE49-F238E27FC236}">
-                <a16:creationId xmlns:a16="http://schemas.microsoft.com/office/drawing/2014/main" id="{AC296602-EB28-49F0-9F0C-B3975742C4AE}"/>
+                <a16:creationId xmlns:a16="http://schemas.microsoft.com/office/drawing/2014/main" id="{063A0521-0750-4158-93A6-4C907CEEFA26}"/>
               </a:ext>
             </a:extLst>
           </p:cNvPr>
@@ -3085,7 +3152,7 @@
                   <a:srgbClr val="177A55"/>
                 </a:solidFill>
               </a:rPr>
-              <a:t>Why this matters</a:t>
+              <a:t>Varied deliberately</a:t>
             </a:r>
           </a:p>
         </p:txBody>
@@ -3095,7 +3162,7 @@
           <p:cNvPr id="18" name="">
             <a:extLst xmlns:a="http://schemas.openxmlformats.org/drawingml/2006/main">
               <a:ext uri="{FF2B5EF4-FFF2-40B4-BE49-F238E27FC236}">
-                <a16:creationId xmlns:a16="http://schemas.microsoft.com/office/drawing/2014/main" id="{A403CE8B-F00B-42EF-AABB-910B047ADE61}"/>
+                <a16:creationId xmlns:a16="http://schemas.microsoft.com/office/drawing/2014/main" id="{5A2B29E3-1EA5-4302-A7C7-6DB67C5B23D4}"/>
               </a:ext>
             </a:extLst>
           </p:cNvPr>
@@ -3126,7 +3193,7 @@
           <p:cNvPr id="19" name="">
             <a:extLst xmlns:a="http://schemas.openxmlformats.org/drawingml/2006/main">
               <a:ext uri="{FF2B5EF4-FFF2-40B4-BE49-F238E27FC236}">
-                <a16:creationId xmlns:a16="http://schemas.microsoft.com/office/drawing/2014/main" id="{919247C3-DD73-4B51-A8C3-7094ADA2EE79}"/>
+                <a16:creationId xmlns:a16="http://schemas.microsoft.com/office/drawing/2014/main" id="{7D7719E0-9600-486E-8EAC-546E78C4C714}"/>
               </a:ext>
             </a:extLst>
           </p:cNvPr>
@@ -3138,7 +3205,7 @@
         <p:spPr>
           <a:xfrm xmlns:a="http://schemas.openxmlformats.org/drawingml/2006/main">
             <a:off x="7048500" y="2914650"/>
-            <a:ext cx="3695700" cy="409575"/>
+            <a:ext cx="3695700" cy="361950"/>
           </a:xfrm>
           <a:prstGeom xmlns:a="http://schemas.openxmlformats.org/drawingml/2006/main" prst="rect">
             <a:avLst/>
@@ -3166,7 +3233,7 @@
                   <a:srgbClr val="111827"/>
                 </a:solidFill>
               </a:rPr>
-              <a:t>It tests participation quality before adding basket curation</a:t>
+              <a:t>Workhorse enriched</a:t>
             </a:r>
           </a:p>
         </p:txBody>
@@ -3176,18 +3243,18 @@
           <p:cNvPr id="20" name="">
             <a:extLst xmlns:a="http://schemas.openxmlformats.org/drawingml/2006/main">
               <a:ext uri="{FF2B5EF4-FFF2-40B4-BE49-F238E27FC236}">
-                <a16:creationId xmlns:a16="http://schemas.microsoft.com/office/drawing/2014/main" id="{1C7AFD57-0124-480C-B50D-A772EF90194A}"/>
-              </a:ext>
-            </a:extLst>
-          </p:cNvPr>
-          <p:cNvSpPr>
-            <a:spLocks xmlns:a="http://schemas.openxmlformats.org/drawingml/2006/main" noGrp="1"/>
-          </p:cNvSpPr>
-          <p:nvPr/>
-        </p:nvSpPr>
-        <p:spPr>
-          <a:xfrm xmlns:a="http://schemas.openxmlformats.org/drawingml/2006/main">
-            <a:off x="6838950" y="3371850"/>
+                <a16:creationId xmlns:a16="http://schemas.microsoft.com/office/drawing/2014/main" id="{E6F2133A-15E5-4F92-ACE1-3EFCBEF379E8}"/>
+              </a:ext>
+            </a:extLst>
+          </p:cNvPr>
+          <p:cNvSpPr>
+            <a:spLocks xmlns:a="http://schemas.openxmlformats.org/drawingml/2006/main" noGrp="1"/>
+          </p:cNvSpPr>
+          <p:nvPr/>
+        </p:nvSpPr>
+        <p:spPr>
+          <a:xfrm xmlns:a="http://schemas.openxmlformats.org/drawingml/2006/main">
+            <a:off x="6838950" y="3324225"/>
             <a:ext cx="76200" cy="76200"/>
           </a:xfrm>
           <a:prstGeom xmlns:a="http://schemas.openxmlformats.org/drawingml/2006/main" prst="ellipse">
@@ -3207,19 +3274,19 @@
           <p:cNvPr id="21" name="">
             <a:extLst xmlns:a="http://schemas.openxmlformats.org/drawingml/2006/main">
               <a:ext uri="{FF2B5EF4-FFF2-40B4-BE49-F238E27FC236}">
-                <a16:creationId xmlns:a16="http://schemas.microsoft.com/office/drawing/2014/main" id="{F8FE5E65-0542-4DF5-809C-691E9EEAEB1A}"/>
-              </a:ext>
-            </a:extLst>
-          </p:cNvPr>
-          <p:cNvSpPr>
-            <a:spLocks xmlns:a="http://schemas.openxmlformats.org/drawingml/2006/main" noGrp="1"/>
-          </p:cNvSpPr>
-          <p:nvPr/>
-        </p:nvSpPr>
-        <p:spPr>
-          <a:xfrm xmlns:a="http://schemas.openxmlformats.org/drawingml/2006/main">
-            <a:off x="7048500" y="3286125"/>
-            <a:ext cx="3695700" cy="409575"/>
+                <a16:creationId xmlns:a16="http://schemas.microsoft.com/office/drawing/2014/main" id="{4C93AEAC-CA1A-4E56-A0CF-028A7026E5B3}"/>
+              </a:ext>
+            </a:extLst>
+          </p:cNvPr>
+          <p:cNvSpPr>
+            <a:spLocks xmlns:a="http://schemas.openxmlformats.org/drawingml/2006/main" noGrp="1"/>
+          </p:cNvSpPr>
+          <p:nvPr/>
+        </p:nvSpPr>
+        <p:spPr>
+          <a:xfrm xmlns:a="http://schemas.openxmlformats.org/drawingml/2006/main">
+            <a:off x="7048500" y="3238500"/>
+            <a:ext cx="3695700" cy="361950"/>
           </a:xfrm>
           <a:prstGeom xmlns:a="http://schemas.openxmlformats.org/drawingml/2006/main" prst="rect">
             <a:avLst/>
@@ -3247,7 +3314,7 @@
                   <a:srgbClr val="111827"/>
                 </a:solidFill>
               </a:rPr>
-              <a:t>It keeps mean reversion and SMA out of the first specialist baseline</a:t>
+              <a:t>Momentum participation</a:t>
             </a:r>
           </a:p>
         </p:txBody>
@@ -3257,18 +3324,18 @@
           <p:cNvPr id="22" name="">
             <a:extLst xmlns:a="http://schemas.openxmlformats.org/drawingml/2006/main">
               <a:ext uri="{FF2B5EF4-FFF2-40B4-BE49-F238E27FC236}">
-                <a16:creationId xmlns:a16="http://schemas.microsoft.com/office/drawing/2014/main" id="{6329E18C-F325-4AAE-8C03-A5C32CB4C1A2}"/>
-              </a:ext>
-            </a:extLst>
-          </p:cNvPr>
-          <p:cNvSpPr>
-            <a:spLocks xmlns:a="http://schemas.openxmlformats.org/drawingml/2006/main" noGrp="1"/>
-          </p:cNvSpPr>
-          <p:nvPr/>
-        </p:nvSpPr>
-        <p:spPr>
-          <a:xfrm xmlns:a="http://schemas.openxmlformats.org/drawingml/2006/main">
-            <a:off x="6838950" y="3743325"/>
+                <a16:creationId xmlns:a16="http://schemas.microsoft.com/office/drawing/2014/main" id="{7A72C746-622D-40B9-8F8F-F722639A10EB}"/>
+              </a:ext>
+            </a:extLst>
+          </p:cNvPr>
+          <p:cNvSpPr>
+            <a:spLocks xmlns:a="http://schemas.openxmlformats.org/drawingml/2006/main" noGrp="1"/>
+          </p:cNvSpPr>
+          <p:nvPr/>
+        </p:nvSpPr>
+        <p:spPr>
+          <a:xfrm xmlns:a="http://schemas.openxmlformats.org/drawingml/2006/main">
+            <a:off x="6838950" y="3648075"/>
             <a:ext cx="76200" cy="76200"/>
           </a:xfrm>
           <a:prstGeom xmlns:a="http://schemas.openxmlformats.org/drawingml/2006/main" prst="ellipse">
@@ -3288,19 +3355,19 @@
           <p:cNvPr id="23" name="">
             <a:extLst xmlns:a="http://schemas.openxmlformats.org/drawingml/2006/main">
               <a:ext uri="{FF2B5EF4-FFF2-40B4-BE49-F238E27FC236}">
-                <a16:creationId xmlns:a16="http://schemas.microsoft.com/office/drawing/2014/main" id="{20036279-6843-40A5-8BBE-E80C5687C76E}"/>
-              </a:ext>
-            </a:extLst>
-          </p:cNvPr>
-          <p:cNvSpPr>
-            <a:spLocks xmlns:a="http://schemas.openxmlformats.org/drawingml/2006/main" noGrp="1"/>
-          </p:cNvSpPr>
-          <p:nvPr/>
-        </p:nvSpPr>
-        <p:spPr>
-          <a:xfrm xmlns:a="http://schemas.openxmlformats.org/drawingml/2006/main">
-            <a:off x="7048500" y="3657600"/>
-            <a:ext cx="3695700" cy="409575"/>
+                <a16:creationId xmlns:a16="http://schemas.microsoft.com/office/drawing/2014/main" id="{FECC0B68-31F5-46E4-9EDB-97FDC4F7D439}"/>
+              </a:ext>
+            </a:extLst>
+          </p:cNvPr>
+          <p:cNvSpPr>
+            <a:spLocks xmlns:a="http://schemas.openxmlformats.org/drawingml/2006/main" noGrp="1"/>
+          </p:cNvSpPr>
+          <p:nvPr/>
+        </p:nvSpPr>
+        <p:spPr>
+          <a:xfrm xmlns:a="http://schemas.openxmlformats.org/drawingml/2006/main">
+            <a:off x="7048500" y="3562350"/>
+            <a:ext cx="3695700" cy="361950"/>
           </a:xfrm>
           <a:prstGeom xmlns:a="http://schemas.openxmlformats.org/drawingml/2006/main" prst="rect">
             <a:avLst/>
@@ -3328,7 +3395,7 @@
                   <a:srgbClr val="111827"/>
                 </a:solidFill>
               </a:rPr>
-              <a:t>It judges the system against the hard comparator: holding the exact basket</a:t>
+              <a:t>Momentum plus stress</a:t>
             </a:r>
           </a:p>
         </p:txBody>
@@ -3338,18 +3405,18 @@
           <p:cNvPr id="24" name="">
             <a:extLst xmlns:a="http://schemas.openxmlformats.org/drawingml/2006/main">
               <a:ext uri="{FF2B5EF4-FFF2-40B4-BE49-F238E27FC236}">
-                <a16:creationId xmlns:a16="http://schemas.microsoft.com/office/drawing/2014/main" id="{27A94E94-122B-428D-9750-10C59BA62880}"/>
-              </a:ext>
-            </a:extLst>
-          </p:cNvPr>
-          <p:cNvSpPr>
-            <a:spLocks xmlns:a="http://schemas.openxmlformats.org/drawingml/2006/main" noGrp="1"/>
-          </p:cNvSpPr>
-          <p:nvPr/>
-        </p:nvSpPr>
-        <p:spPr>
-          <a:xfrm xmlns:a="http://schemas.openxmlformats.org/drawingml/2006/main">
-            <a:off x="6838950" y="4114800"/>
+                <a16:creationId xmlns:a16="http://schemas.microsoft.com/office/drawing/2014/main" id="{D838AE9D-8AB1-4B2D-8FFE-036A0BB79570}"/>
+              </a:ext>
+            </a:extLst>
+          </p:cNvPr>
+          <p:cNvSpPr>
+            <a:spLocks xmlns:a="http://schemas.openxmlformats.org/drawingml/2006/main" noGrp="1"/>
+          </p:cNvSpPr>
+          <p:nvPr/>
+        </p:nvSpPr>
+        <p:spPr>
+          <a:xfrm xmlns:a="http://schemas.openxmlformats.org/drawingml/2006/main">
+            <a:off x="6838950" y="3971925"/>
             <a:ext cx="76200" cy="76200"/>
           </a:xfrm>
           <a:prstGeom xmlns:a="http://schemas.openxmlformats.org/drawingml/2006/main" prst="ellipse">
@@ -3369,19 +3436,19 @@
           <p:cNvPr id="25" name="">
             <a:extLst xmlns:a="http://schemas.openxmlformats.org/drawingml/2006/main">
               <a:ext uri="{FF2B5EF4-FFF2-40B4-BE49-F238E27FC236}">
-                <a16:creationId xmlns:a16="http://schemas.microsoft.com/office/drawing/2014/main" id="{5A44AA0E-A1F1-4A0C-A3A1-B87CD2260468}"/>
-              </a:ext>
-            </a:extLst>
-          </p:cNvPr>
-          <p:cNvSpPr>
-            <a:spLocks xmlns:a="http://schemas.openxmlformats.org/drawingml/2006/main" noGrp="1"/>
-          </p:cNvSpPr>
-          <p:nvPr/>
-        </p:nvSpPr>
-        <p:spPr>
-          <a:xfrm xmlns:a="http://schemas.openxmlformats.org/drawingml/2006/main">
-            <a:off x="7048500" y="4029075"/>
-            <a:ext cx="3695700" cy="409575"/>
+                <a16:creationId xmlns:a16="http://schemas.microsoft.com/office/drawing/2014/main" id="{562741C3-8BFB-486D-AD57-58B402E227DE}"/>
+              </a:ext>
+            </a:extLst>
+          </p:cNvPr>
+          <p:cNvSpPr>
+            <a:spLocks xmlns:a="http://schemas.openxmlformats.org/drawingml/2006/main" noGrp="1"/>
+          </p:cNvSpPr>
+          <p:nvPr/>
+        </p:nvSpPr>
+        <p:spPr>
+          <a:xfrm xmlns:a="http://schemas.openxmlformats.org/drawingml/2006/main">
+            <a:off x="7048500" y="3886200"/>
+            <a:ext cx="3695700" cy="361950"/>
           </a:xfrm>
           <a:prstGeom xmlns:a="http://schemas.openxmlformats.org/drawingml/2006/main" prst="rect">
             <a:avLst/>
@@ -3409,7 +3476,88 @@
                   <a:srgbClr val="111827"/>
                 </a:solidFill>
               </a:rPr>
-              <a:t>It separates upside capture from drawdown avoidance</a:t>
+              <a:t>Same strategy grid and replay semantics for every lane</a:t>
+            </a:r>
+          </a:p>
+        </p:txBody>
+      </p:sp>
+      <p:sp>
+        <p:nvSpPr>
+          <p:cNvPr id="26" name="">
+            <a:extLst xmlns:a="http://schemas.openxmlformats.org/drawingml/2006/main">
+              <a:ext uri="{FF2B5EF4-FFF2-40B4-BE49-F238E27FC236}">
+                <a16:creationId xmlns:a16="http://schemas.microsoft.com/office/drawing/2014/main" id="{D3E1BE5D-C8E6-45DE-9303-CDA9769F6FDD}"/>
+              </a:ext>
+            </a:extLst>
+          </p:cNvPr>
+          <p:cNvSpPr>
+            <a:spLocks xmlns:a="http://schemas.openxmlformats.org/drawingml/2006/main" noGrp="1"/>
+          </p:cNvSpPr>
+          <p:nvPr/>
+        </p:nvSpPr>
+        <p:spPr>
+          <a:xfrm xmlns:a="http://schemas.openxmlformats.org/drawingml/2006/main">
+            <a:off x="6838950" y="4295775"/>
+            <a:ext cx="76200" cy="76200"/>
+          </a:xfrm>
+          <a:prstGeom xmlns:a="http://schemas.openxmlformats.org/drawingml/2006/main" prst="ellipse">
+            <a:avLst/>
+          </a:prstGeom>
+          <a:solidFill xmlns:a="http://schemas.openxmlformats.org/drawingml/2006/main">
+            <a:srgbClr val="177A55"/>
+          </a:solidFill>
+          <a:ln xmlns:a="http://schemas.openxmlformats.org/drawingml/2006/main" w="0">
+            <a:noFill/>
+            <a:prstDash val="solid"/>
+          </a:ln>
+        </p:spPr>
+      </p:sp>
+      <p:sp>
+        <p:nvSpPr>
+          <p:cNvPr id="27" name="">
+            <a:extLst xmlns:a="http://schemas.openxmlformats.org/drawingml/2006/main">
+              <a:ext uri="{FF2B5EF4-FFF2-40B4-BE49-F238E27FC236}">
+                <a16:creationId xmlns:a16="http://schemas.microsoft.com/office/drawing/2014/main" id="{624333C1-E721-4886-9AF7-B2F107AF2DA8}"/>
+              </a:ext>
+            </a:extLst>
+          </p:cNvPr>
+          <p:cNvSpPr>
+            <a:spLocks xmlns:a="http://schemas.openxmlformats.org/drawingml/2006/main" noGrp="1"/>
+          </p:cNvSpPr>
+          <p:nvPr/>
+        </p:nvSpPr>
+        <p:spPr>
+          <a:xfrm xmlns:a="http://schemas.openxmlformats.org/drawingml/2006/main">
+            <a:off x="7048500" y="4210050"/>
+            <a:ext cx="3695700" cy="361950"/>
+          </a:xfrm>
+          <a:prstGeom xmlns:a="http://schemas.openxmlformats.org/drawingml/2006/main" prst="rect">
+            <a:avLst/>
+          </a:prstGeom>
+          <a:noFill xmlns:a="http://schemas.openxmlformats.org/drawingml/2006/main"/>
+          <a:ln xmlns:a="http://schemas.openxmlformats.org/drawingml/2006/main" w="0">
+            <a:noFill/>
+            <a:prstDash val="solid"/>
+          </a:ln>
+        </p:spPr>
+        <p:txBody>
+          <a:bodyPr xmlns:a="http://schemas.openxmlformats.org/drawingml/2006/main"/>
+          <a:lstStyle xmlns:a="http://schemas.openxmlformats.org/drawingml/2006/main"/>
+          <a:p xmlns:a="http://schemas.openxmlformats.org/drawingml/2006/main">
+            <a:pPr>
+              <a:defRPr sz="1350" b="0">
+                <a:solidFill>
+                  <a:srgbClr val="111827"/>
+                </a:solidFill>
+              </a:defRPr>
+            </a:pPr>
+            <a:r>
+              <a:rPr sz="1350" b="0">
+                <a:solidFill>
+                  <a:srgbClr val="111827"/>
+                </a:solidFill>
+              </a:rPr>
+              <a:t>Same equal-weight basket-hold benchmark</a:t>
             </a:r>
           </a:p>
         </p:txBody>
@@ -3417,7 +3565,7 @@
     </p:spTree>
     <p:extLst>
       <p:ext uri="{BB962C8B-B14F-4D97-AF65-F5344CB8AC3E}">
-        <p14:creationId xmlns:p14="http://schemas.microsoft.com/office/powerpoint/2010/main" val="1396399350"/>
+        <p14:creationId xmlns:p14="http://schemas.microsoft.com/office/powerpoint/2010/main" val="1444552583"/>
       </p:ext>
     </p:extLst>
   </p:cSld>
@@ -3448,7 +3596,7 @@
           <p:cNvPr id="1" name="">
             <a:extLst xmlns:a="http://schemas.openxmlformats.org/drawingml/2006/main">
               <a:ext uri="{FF2B5EF4-FFF2-40B4-BE49-F238E27FC236}">
-                <a16:creationId xmlns:a16="http://schemas.microsoft.com/office/drawing/2014/main" id="{249F7537-583E-4CDE-80E2-8B33C29FC1AD}"/>
+                <a16:creationId xmlns:a16="http://schemas.microsoft.com/office/drawing/2014/main" id="{E7E61B3E-1D62-49D5-B495-6F0AFEA95D37}"/>
               </a:ext>
             </a:extLst>
           </p:cNvPr>
@@ -3498,7 +3646,7 @@
           <p:cNvPr id="2" name="">
             <a:extLst xmlns:a="http://schemas.openxmlformats.org/drawingml/2006/main">
               <a:ext uri="{FF2B5EF4-FFF2-40B4-BE49-F238E27FC236}">
-                <a16:creationId xmlns:a16="http://schemas.microsoft.com/office/drawing/2014/main" id="{E6D2230D-2AF8-44DC-AE47-C9E67A7D6610}"/>
+                <a16:creationId xmlns:a16="http://schemas.microsoft.com/office/drawing/2014/main" id="{1022E68D-B4F0-4149-B4E5-927907862EBB}"/>
               </a:ext>
             </a:extLst>
           </p:cNvPr>
@@ -3538,7 +3686,7 @@
                   <a:srgbClr val="111827"/>
                 </a:solidFill>
               </a:rPr>
-              <a:t>The baseline protected capital in stress but still undercaptured the rebound</a:t>
+              <a:t>Each feature set asks a different question about bullish participation</a:t>
             </a:r>
           </a:p>
         </p:txBody>
@@ -3548,7 +3696,7 @@
           <p:cNvPr id="3" name="">
             <a:extLst xmlns:a="http://schemas.openxmlformats.org/drawingml/2006/main">
               <a:ext uri="{FF2B5EF4-FFF2-40B4-BE49-F238E27FC236}">
-                <a16:creationId xmlns:a16="http://schemas.microsoft.com/office/drawing/2014/main" id="{B437C5AE-8CC7-466A-9A5F-019174F60E37}"/>
+                <a16:creationId xmlns:a16="http://schemas.microsoft.com/office/drawing/2014/main" id="{47D4F3F5-07F5-4FF5-8C5F-4BC302C60074}"/>
               </a:ext>
             </a:extLst>
           </p:cNvPr>
@@ -3581,31 +3729,31 @@
           <p:cNvPr id="4" name="">
             <a:extLst xmlns:a="http://schemas.openxmlformats.org/drawingml/2006/main">
               <a:ext uri="{FF2B5EF4-FFF2-40B4-BE49-F238E27FC236}">
-                <a16:creationId xmlns:a16="http://schemas.microsoft.com/office/drawing/2014/main" id="{D967A81E-87DB-467D-BD99-B4C8875E13CE}"/>
-              </a:ext>
-            </a:extLst>
-          </p:cNvPr>
-          <p:cNvSpPr>
-            <a:spLocks xmlns:a="http://schemas.openxmlformats.org/drawingml/2006/main" noGrp="1"/>
-          </p:cNvSpPr>
-          <p:nvPr/>
-        </p:nvSpPr>
-        <p:spPr>
-          <a:xfrm xmlns:a="http://schemas.openxmlformats.org/drawingml/2006/main">
-            <a:off x="685800" y="2000250"/>
-            <a:ext cx="2571750" cy="1333500"/>
+                <a16:creationId xmlns:a16="http://schemas.microsoft.com/office/drawing/2014/main" id="{5111A2AA-4773-4A56-AB09-6928020D1E96}"/>
+              </a:ext>
+            </a:extLst>
+          </p:cNvPr>
+          <p:cNvSpPr>
+            <a:spLocks xmlns:a="http://schemas.openxmlformats.org/drawingml/2006/main" noGrp="1"/>
+          </p:cNvSpPr>
+          <p:nvPr/>
+        </p:nvSpPr>
+        <p:spPr>
+          <a:xfrm xmlns:a="http://schemas.openxmlformats.org/drawingml/2006/main">
+            <a:off x="704850" y="2076450"/>
+            <a:ext cx="3257550" cy="2724150"/>
           </a:xfrm>
           <a:prstGeom xmlns:a="http://schemas.openxmlformats.org/drawingml/2006/main" prst="roundRect">
             <a:avLst>
-              <a:gd name="adj" fmla="val 5714"/>
+              <a:gd name="adj" fmla="val 2797"/>
             </a:avLst>
           </a:prstGeom>
           <a:solidFill xmlns:a="http://schemas.openxmlformats.org/drawingml/2006/main">
-            <a:srgbClr val="FFF1F2"/>
+            <a:srgbClr val="EFF6FF"/>
           </a:solidFill>
           <a:ln xmlns:a="http://schemas.openxmlformats.org/drawingml/2006/main" w="9525">
             <a:solidFill>
-              <a:srgbClr val="FDA4AF"/>
+              <a:srgbClr val="D7DEE8"/>
             </a:solidFill>
             <a:prstDash val="solid"/>
           </a:ln>
@@ -3616,47 +3764,47 @@
           <p:cNvPr id="5" name="">
             <a:extLst xmlns:a="http://schemas.openxmlformats.org/drawingml/2006/main">
               <a:ext uri="{FF2B5EF4-FFF2-40B4-BE49-F238E27FC236}">
-                <a16:creationId xmlns:a16="http://schemas.microsoft.com/office/drawing/2014/main" id="{EFF8B982-3B6C-409D-9108-92612075EAC0}"/>
-              </a:ext>
-            </a:extLst>
-          </p:cNvPr>
-          <p:cNvSpPr>
-            <a:spLocks xmlns:a="http://schemas.openxmlformats.org/drawingml/2006/main" noGrp="1"/>
-          </p:cNvSpPr>
-          <p:nvPr/>
-        </p:nvSpPr>
-        <p:spPr>
-          <a:xfrm xmlns:a="http://schemas.openxmlformats.org/drawingml/2006/main">
-            <a:off x="914400" y="2266950"/>
-            <a:ext cx="2000250" cy="438150"/>
-          </a:xfrm>
-          <a:prstGeom xmlns:a="http://schemas.openxmlformats.org/drawingml/2006/main" prst="rect">
-            <a:avLst/>
-          </a:prstGeom>
-          <a:noFill xmlns:a="http://schemas.openxmlformats.org/drawingml/2006/main"/>
-          <a:ln xmlns:a="http://schemas.openxmlformats.org/drawingml/2006/main" w="0">
-            <a:noFill/>
-            <a:prstDash val="solid"/>
-          </a:ln>
-        </p:spPr>
-        <p:txBody>
-          <a:bodyPr xmlns:a="http://schemas.openxmlformats.org/drawingml/2006/main"/>
-          <a:lstStyle xmlns:a="http://schemas.openxmlformats.org/drawingml/2006/main"/>
-          <a:p xmlns:a="http://schemas.openxmlformats.org/drawingml/2006/main">
-            <a:pPr algn="ctr">
-              <a:defRPr sz="2550" b="1">
-                <a:solidFill>
-                  <a:srgbClr val="D1495B"/>
-                </a:solidFill>
-              </a:defRPr>
-            </a:pPr>
-            <a:r>
-              <a:rPr sz="2550" b="1">
-                <a:solidFill>
-                  <a:srgbClr val="D1495B"/>
-                </a:solidFill>
-              </a:rPr>
-              <a:t>-31.9 pp</a:t>
+                <a16:creationId xmlns:a16="http://schemas.microsoft.com/office/drawing/2014/main" id="{0FC8538F-C2B6-4945-981D-074D1D6A839C}"/>
+              </a:ext>
+            </a:extLst>
+          </p:cNvPr>
+          <p:cNvSpPr>
+            <a:spLocks xmlns:a="http://schemas.openxmlformats.org/drawingml/2006/main" noGrp="1"/>
+          </p:cNvSpPr>
+          <p:nvPr/>
+        </p:nvSpPr>
+        <p:spPr>
+          <a:xfrm xmlns:a="http://schemas.openxmlformats.org/drawingml/2006/main">
+            <a:off x="952500" y="2343150"/>
+            <a:ext cx="2724150" cy="514350"/>
+          </a:xfrm>
+          <a:prstGeom xmlns:a="http://schemas.openxmlformats.org/drawingml/2006/main" prst="rect">
+            <a:avLst/>
+          </a:prstGeom>
+          <a:noFill xmlns:a="http://schemas.openxmlformats.org/drawingml/2006/main"/>
+          <a:ln xmlns:a="http://schemas.openxmlformats.org/drawingml/2006/main" w="0">
+            <a:noFill/>
+            <a:prstDash val="solid"/>
+          </a:ln>
+        </p:spPr>
+        <p:txBody>
+          <a:bodyPr xmlns:a="http://schemas.openxmlformats.org/drawingml/2006/main"/>
+          <a:lstStyle xmlns:a="http://schemas.openxmlformats.org/drawingml/2006/main"/>
+          <a:p xmlns:a="http://schemas.openxmlformats.org/drawingml/2006/main">
+            <a:pPr>
+              <a:defRPr sz="1875" b="1">
+                <a:solidFill>
+                  <a:srgbClr val="2563EB"/>
+                </a:solidFill>
+              </a:defRPr>
+            </a:pPr>
+            <a:r>
+              <a:rPr sz="1875" b="1">
+                <a:solidFill>
+                  <a:srgbClr val="2563EB"/>
+                </a:solidFill>
+              </a:rPr>
+              <a:t>Workhorse enriched</a:t>
             </a:r>
           </a:p>
         </p:txBody>
@@ -3666,47 +3814,47 @@
           <p:cNvPr id="6" name="">
             <a:extLst xmlns:a="http://schemas.openxmlformats.org/drawingml/2006/main">
               <a:ext uri="{FF2B5EF4-FFF2-40B4-BE49-F238E27FC236}">
-                <a16:creationId xmlns:a16="http://schemas.microsoft.com/office/drawing/2014/main" id="{29337049-1753-4E42-8858-C251CD0EBB27}"/>
-              </a:ext>
-            </a:extLst>
-          </p:cNvPr>
-          <p:cNvSpPr>
-            <a:spLocks xmlns:a="http://schemas.openxmlformats.org/drawingml/2006/main" noGrp="1"/>
-          </p:cNvSpPr>
-          <p:nvPr/>
-        </p:nvSpPr>
-        <p:spPr>
-          <a:xfrm xmlns:a="http://schemas.openxmlformats.org/drawingml/2006/main">
-            <a:off x="933450" y="2800350"/>
-            <a:ext cx="2000250" cy="361950"/>
-          </a:xfrm>
-          <a:prstGeom xmlns:a="http://schemas.openxmlformats.org/drawingml/2006/main" prst="rect">
-            <a:avLst/>
-          </a:prstGeom>
-          <a:noFill xmlns:a="http://schemas.openxmlformats.org/drawingml/2006/main"/>
-          <a:ln xmlns:a="http://schemas.openxmlformats.org/drawingml/2006/main" w="0">
-            <a:noFill/>
-            <a:prstDash val="solid"/>
-          </a:ln>
-        </p:spPr>
-        <p:txBody>
-          <a:bodyPr xmlns:a="http://schemas.openxmlformats.org/drawingml/2006/main"/>
-          <a:lstStyle xmlns:a="http://schemas.openxmlformats.org/drawingml/2006/main"/>
-          <a:p xmlns:a="http://schemas.openxmlformats.org/drawingml/2006/main">
-            <a:pPr algn="ctr">
-              <a:defRPr sz="1200" b="0">
-                <a:solidFill>
-                  <a:srgbClr val="5B6472"/>
-                </a:solidFill>
-              </a:defRPr>
-            </a:pPr>
-            <a:r>
-              <a:rPr sz="1200" b="0">
-                <a:solidFill>
-                  <a:srgbClr val="5B6472"/>
-                </a:solidFill>
-              </a:rPr>
-              <a:t>Continuation alpha vs hold in 2020Q3</a:t>
+                <a16:creationId xmlns:a16="http://schemas.microsoft.com/office/drawing/2014/main" id="{E7083A98-8867-45E1-B6EE-B3CE2451A099}"/>
+              </a:ext>
+            </a:extLst>
+          </p:cNvPr>
+          <p:cNvSpPr>
+            <a:spLocks xmlns:a="http://schemas.openxmlformats.org/drawingml/2006/main" noGrp="1"/>
+          </p:cNvSpPr>
+          <p:nvPr/>
+        </p:nvSpPr>
+        <p:spPr>
+          <a:xfrm xmlns:a="http://schemas.openxmlformats.org/drawingml/2006/main">
+            <a:off x="952500" y="3105150"/>
+            <a:ext cx="2724150" cy="1200150"/>
+          </a:xfrm>
+          <a:prstGeom xmlns:a="http://schemas.openxmlformats.org/drawingml/2006/main" prst="rect">
+            <a:avLst/>
+          </a:prstGeom>
+          <a:noFill xmlns:a="http://schemas.openxmlformats.org/drawingml/2006/main"/>
+          <a:ln xmlns:a="http://schemas.openxmlformats.org/drawingml/2006/main" w="0">
+            <a:noFill/>
+            <a:prstDash val="solid"/>
+          </a:ln>
+        </p:spPr>
+        <p:txBody>
+          <a:bodyPr xmlns:a="http://schemas.openxmlformats.org/drawingml/2006/main"/>
+          <a:lstStyle xmlns:a="http://schemas.openxmlformats.org/drawingml/2006/main"/>
+          <a:p xmlns:a="http://schemas.openxmlformats.org/drawingml/2006/main">
+            <a:pPr>
+              <a:defRPr sz="1500" b="0">
+                <a:solidFill>
+                  <a:srgbClr val="111827"/>
+                </a:solidFill>
+              </a:defRPr>
+            </a:pPr>
+            <a:r>
+              <a:rPr sz="1500" b="0">
+                <a:solidFill>
+                  <a:srgbClr val="111827"/>
+                </a:solidFill>
+              </a:rPr>
+              <a:t>Can the existing broad Gen5 state surface do the job without modification?</a:t>
             </a:r>
           </a:p>
         </p:txBody>
@@ -3716,23 +3864,23 @@
           <p:cNvPr id="7" name="">
             <a:extLst xmlns:a="http://schemas.openxmlformats.org/drawingml/2006/main">
               <a:ext uri="{FF2B5EF4-FFF2-40B4-BE49-F238E27FC236}">
-                <a16:creationId xmlns:a16="http://schemas.microsoft.com/office/drawing/2014/main" id="{8742C28A-98AF-406F-B8EF-E9109F1309AF}"/>
-              </a:ext>
-            </a:extLst>
-          </p:cNvPr>
-          <p:cNvSpPr>
-            <a:spLocks xmlns:a="http://schemas.openxmlformats.org/drawingml/2006/main" noGrp="1"/>
-          </p:cNvSpPr>
-          <p:nvPr/>
-        </p:nvSpPr>
-        <p:spPr>
-          <a:xfrm xmlns:a="http://schemas.openxmlformats.org/drawingml/2006/main">
-            <a:off x="685800" y="3714750"/>
-            <a:ext cx="2571750" cy="1333500"/>
+                <a16:creationId xmlns:a16="http://schemas.microsoft.com/office/drawing/2014/main" id="{0C56CCB6-CF32-48DF-AA4F-9B2342F1735C}"/>
+              </a:ext>
+            </a:extLst>
+          </p:cNvPr>
+          <p:cNvSpPr>
+            <a:spLocks xmlns:a="http://schemas.openxmlformats.org/drawingml/2006/main" noGrp="1"/>
+          </p:cNvSpPr>
+          <p:nvPr/>
+        </p:nvSpPr>
+        <p:spPr>
+          <a:xfrm xmlns:a="http://schemas.openxmlformats.org/drawingml/2006/main">
+            <a:off x="4457700" y="2076450"/>
+            <a:ext cx="3257550" cy="2724150"/>
           </a:xfrm>
           <a:prstGeom xmlns:a="http://schemas.openxmlformats.org/drawingml/2006/main" prst="roundRect">
             <a:avLst>
-              <a:gd name="adj" fmla="val 5714"/>
+              <a:gd name="adj" fmla="val 2797"/>
             </a:avLst>
           </a:prstGeom>
           <a:solidFill xmlns:a="http://schemas.openxmlformats.org/drawingml/2006/main">
@@ -3740,7 +3888,7 @@
           </a:solidFill>
           <a:ln xmlns:a="http://schemas.openxmlformats.org/drawingml/2006/main" w="9525">
             <a:solidFill>
-              <a:srgbClr val="A7F3D0"/>
+              <a:srgbClr val="D7DEE8"/>
             </a:solidFill>
             <a:prstDash val="solid"/>
           </a:ln>
@@ -3751,47 +3899,47 @@
           <p:cNvPr id="8" name="">
             <a:extLst xmlns:a="http://schemas.openxmlformats.org/drawingml/2006/main">
               <a:ext uri="{FF2B5EF4-FFF2-40B4-BE49-F238E27FC236}">
-                <a16:creationId xmlns:a16="http://schemas.microsoft.com/office/drawing/2014/main" id="{6DEBF121-9DC3-45DD-BBEF-73683C84EFF6}"/>
-              </a:ext>
-            </a:extLst>
-          </p:cNvPr>
-          <p:cNvSpPr>
-            <a:spLocks xmlns:a="http://schemas.openxmlformats.org/drawingml/2006/main" noGrp="1"/>
-          </p:cNvSpPr>
-          <p:nvPr/>
-        </p:nvSpPr>
-        <p:spPr>
-          <a:xfrm xmlns:a="http://schemas.openxmlformats.org/drawingml/2006/main">
-            <a:off x="914400" y="3981450"/>
-            <a:ext cx="2000250" cy="438150"/>
-          </a:xfrm>
-          <a:prstGeom xmlns:a="http://schemas.openxmlformats.org/drawingml/2006/main" prst="rect">
-            <a:avLst/>
-          </a:prstGeom>
-          <a:noFill xmlns:a="http://schemas.openxmlformats.org/drawingml/2006/main"/>
-          <a:ln xmlns:a="http://schemas.openxmlformats.org/drawingml/2006/main" w="0">
-            <a:noFill/>
-            <a:prstDash val="solid"/>
-          </a:ln>
-        </p:spPr>
-        <p:txBody>
-          <a:bodyPr xmlns:a="http://schemas.openxmlformats.org/drawingml/2006/main"/>
-          <a:lstStyle xmlns:a="http://schemas.openxmlformats.org/drawingml/2006/main"/>
-          <a:p xmlns:a="http://schemas.openxmlformats.org/drawingml/2006/main">
-            <a:pPr algn="ctr">
-              <a:defRPr sz="2550" b="1">
+                <a16:creationId xmlns:a16="http://schemas.microsoft.com/office/drawing/2014/main" id="{D72724B7-D204-4CC3-93D9-DBBA21F14C2E}"/>
+              </a:ext>
+            </a:extLst>
+          </p:cNvPr>
+          <p:cNvSpPr>
+            <a:spLocks xmlns:a="http://schemas.openxmlformats.org/drawingml/2006/main" noGrp="1"/>
+          </p:cNvSpPr>
+          <p:nvPr/>
+        </p:nvSpPr>
+        <p:spPr>
+          <a:xfrm xmlns:a="http://schemas.openxmlformats.org/drawingml/2006/main">
+            <a:off x="4705350" y="2343150"/>
+            <a:ext cx="2724150" cy="514350"/>
+          </a:xfrm>
+          <a:prstGeom xmlns:a="http://schemas.openxmlformats.org/drawingml/2006/main" prst="rect">
+            <a:avLst/>
+          </a:prstGeom>
+          <a:noFill xmlns:a="http://schemas.openxmlformats.org/drawingml/2006/main"/>
+          <a:ln xmlns:a="http://schemas.openxmlformats.org/drawingml/2006/main" w="0">
+            <a:noFill/>
+            <a:prstDash val="solid"/>
+          </a:ln>
+        </p:spPr>
+        <p:txBody>
+          <a:bodyPr xmlns:a="http://schemas.openxmlformats.org/drawingml/2006/main"/>
+          <a:lstStyle xmlns:a="http://schemas.openxmlformats.org/drawingml/2006/main"/>
+          <a:p xmlns:a="http://schemas.openxmlformats.org/drawingml/2006/main">
+            <a:pPr>
+              <a:defRPr sz="1875" b="1">
                 <a:solidFill>
                   <a:srgbClr val="177A55"/>
                 </a:solidFill>
               </a:defRPr>
             </a:pPr>
             <a:r>
-              <a:rPr sz="2550" b="1">
+              <a:rPr sz="1875" b="1">
                 <a:solidFill>
                   <a:srgbClr val="177A55"/>
                 </a:solidFill>
               </a:rPr>
-              <a:t>+12.2 pp</a:t>
+              <a:t>Momentum participation</a:t>
             </a:r>
           </a:p>
         </p:txBody>
@@ -3801,47 +3949,47 @@
           <p:cNvPr id="9" name="">
             <a:extLst xmlns:a="http://schemas.openxmlformats.org/drawingml/2006/main">
               <a:ext uri="{FF2B5EF4-FFF2-40B4-BE49-F238E27FC236}">
-                <a16:creationId xmlns:a16="http://schemas.microsoft.com/office/drawing/2014/main" id="{90027C1D-F24C-49B7-B2F3-C1966ECE8949}"/>
-              </a:ext>
-            </a:extLst>
-          </p:cNvPr>
-          <p:cNvSpPr>
-            <a:spLocks xmlns:a="http://schemas.openxmlformats.org/drawingml/2006/main" noGrp="1"/>
-          </p:cNvSpPr>
-          <p:nvPr/>
-        </p:nvSpPr>
-        <p:spPr>
-          <a:xfrm xmlns:a="http://schemas.openxmlformats.org/drawingml/2006/main">
-            <a:off x="933450" y="4514850"/>
-            <a:ext cx="2000250" cy="361950"/>
-          </a:xfrm>
-          <a:prstGeom xmlns:a="http://schemas.openxmlformats.org/drawingml/2006/main" prst="rect">
-            <a:avLst/>
-          </a:prstGeom>
-          <a:noFill xmlns:a="http://schemas.openxmlformats.org/drawingml/2006/main"/>
-          <a:ln xmlns:a="http://schemas.openxmlformats.org/drawingml/2006/main" w="0">
-            <a:noFill/>
-            <a:prstDash val="solid"/>
-          </a:ln>
-        </p:spPr>
-        <p:txBody>
-          <a:bodyPr xmlns:a="http://schemas.openxmlformats.org/drawingml/2006/main"/>
-          <a:lstStyle xmlns:a="http://schemas.openxmlformats.org/drawingml/2006/main"/>
-          <a:p xmlns:a="http://schemas.openxmlformats.org/drawingml/2006/main">
-            <a:pPr algn="ctr">
-              <a:defRPr sz="1200" b="0">
-                <a:solidFill>
-                  <a:srgbClr val="5B6472"/>
-                </a:solidFill>
-              </a:defRPr>
-            </a:pPr>
-            <a:r>
-              <a:rPr sz="1200" b="0">
-                <a:solidFill>
-                  <a:srgbClr val="5B6472"/>
-                </a:solidFill>
-              </a:rPr>
-              <a:t>Continuation alpha vs hold in 2022Q1</a:t>
+                <a16:creationId xmlns:a16="http://schemas.microsoft.com/office/drawing/2014/main" id="{A40E96A1-0433-4932-9BBD-7D680E9AB3C8}"/>
+              </a:ext>
+            </a:extLst>
+          </p:cNvPr>
+          <p:cNvSpPr>
+            <a:spLocks xmlns:a="http://schemas.openxmlformats.org/drawingml/2006/main" noGrp="1"/>
+          </p:cNvSpPr>
+          <p:nvPr/>
+        </p:nvSpPr>
+        <p:spPr>
+          <a:xfrm xmlns:a="http://schemas.openxmlformats.org/drawingml/2006/main">
+            <a:off x="4705350" y="3105150"/>
+            <a:ext cx="2724150" cy="1200150"/>
+          </a:xfrm>
+          <a:prstGeom xmlns:a="http://schemas.openxmlformats.org/drawingml/2006/main" prst="rect">
+            <a:avLst/>
+          </a:prstGeom>
+          <a:noFill xmlns:a="http://schemas.openxmlformats.org/drawingml/2006/main"/>
+          <a:ln xmlns:a="http://schemas.openxmlformats.org/drawingml/2006/main" w="0">
+            <a:noFill/>
+            <a:prstDash val="solid"/>
+          </a:ln>
+        </p:spPr>
+        <p:txBody>
+          <a:bodyPr xmlns:a="http://schemas.openxmlformats.org/drawingml/2006/main"/>
+          <a:lstStyle xmlns:a="http://schemas.openxmlformats.org/drawingml/2006/main"/>
+          <a:p xmlns:a="http://schemas.openxmlformats.org/drawingml/2006/main">
+            <a:pPr>
+              <a:defRPr sz="1500" b="0">
+                <a:solidFill>
+                  <a:srgbClr val="111827"/>
+                </a:solidFill>
+              </a:defRPr>
+            </a:pPr>
+            <a:r>
+              <a:rPr sz="1500" b="0">
+                <a:solidFill>
+                  <a:srgbClr val="111827"/>
+                </a:solidFill>
+              </a:rPr>
+              <a:t>Can trend strength, impulse, persistence, range location, drawdown, and recovery sharpen entries?</a:t>
             </a:r>
           </a:p>
         </p:txBody>
@@ -3851,31 +3999,31 @@
           <p:cNvPr id="10" name="">
             <a:extLst xmlns:a="http://schemas.openxmlformats.org/drawingml/2006/main">
               <a:ext uri="{FF2B5EF4-FFF2-40B4-BE49-F238E27FC236}">
-                <a16:creationId xmlns:a16="http://schemas.microsoft.com/office/drawing/2014/main" id="{77F4463B-7216-4906-9F65-EEC1047BA9F9}"/>
-              </a:ext>
-            </a:extLst>
-          </p:cNvPr>
-          <p:cNvSpPr>
-            <a:spLocks xmlns:a="http://schemas.openxmlformats.org/drawingml/2006/main" noGrp="1"/>
-          </p:cNvSpPr>
-          <p:nvPr/>
-        </p:nvSpPr>
-        <p:spPr>
-          <a:xfrm xmlns:a="http://schemas.openxmlformats.org/drawingml/2006/main">
-            <a:off x="3562350" y="2000250"/>
-            <a:ext cx="2571750" cy="1333500"/>
+                <a16:creationId xmlns:a16="http://schemas.microsoft.com/office/drawing/2014/main" id="{BCE9CC9B-A2C2-481B-B34F-46B50C019CC2}"/>
+              </a:ext>
+            </a:extLst>
+          </p:cNvPr>
+          <p:cNvSpPr>
+            <a:spLocks xmlns:a="http://schemas.openxmlformats.org/drawingml/2006/main" noGrp="1"/>
+          </p:cNvSpPr>
+          <p:nvPr/>
+        </p:nvSpPr>
+        <p:spPr>
+          <a:xfrm xmlns:a="http://schemas.openxmlformats.org/drawingml/2006/main">
+            <a:off x="8210550" y="2076450"/>
+            <a:ext cx="3257550" cy="2724150"/>
           </a:xfrm>
           <a:prstGeom xmlns:a="http://schemas.openxmlformats.org/drawingml/2006/main" prst="roundRect">
             <a:avLst>
-              <a:gd name="adj" fmla="val 5714"/>
+              <a:gd name="adj" fmla="val 2797"/>
             </a:avLst>
           </a:prstGeom>
           <a:solidFill xmlns:a="http://schemas.openxmlformats.org/drawingml/2006/main">
-            <a:srgbClr val="F8FAFC"/>
+            <a:srgbClr val="FFF7ED"/>
           </a:solidFill>
           <a:ln xmlns:a="http://schemas.openxmlformats.org/drawingml/2006/main" w="9525">
             <a:solidFill>
-              <a:srgbClr val="CBD5E1"/>
+              <a:srgbClr val="D7DEE8"/>
             </a:solidFill>
             <a:prstDash val="solid"/>
           </a:ln>
@@ -3886,19 +4034,119 @@
           <p:cNvPr id="11" name="">
             <a:extLst xmlns:a="http://schemas.openxmlformats.org/drawingml/2006/main">
               <a:ext uri="{FF2B5EF4-FFF2-40B4-BE49-F238E27FC236}">
-                <a16:creationId xmlns:a16="http://schemas.microsoft.com/office/drawing/2014/main" id="{ACFDE75D-5577-43C0-AAFE-3C51CBDEF3F7}"/>
-              </a:ext>
-            </a:extLst>
-          </p:cNvPr>
-          <p:cNvSpPr>
-            <a:spLocks xmlns:a="http://schemas.openxmlformats.org/drawingml/2006/main" noGrp="1"/>
-          </p:cNvSpPr>
-          <p:nvPr/>
-        </p:nvSpPr>
-        <p:spPr>
-          <a:xfrm xmlns:a="http://schemas.openxmlformats.org/drawingml/2006/main">
-            <a:off x="3790950" y="2266950"/>
-            <a:ext cx="2000250" cy="438150"/>
+                <a16:creationId xmlns:a16="http://schemas.microsoft.com/office/drawing/2014/main" id="{1458A083-8EB5-4F74-BB1B-557C431728F4}"/>
+              </a:ext>
+            </a:extLst>
+          </p:cNvPr>
+          <p:cNvSpPr>
+            <a:spLocks xmlns:a="http://schemas.openxmlformats.org/drawingml/2006/main" noGrp="1"/>
+          </p:cNvSpPr>
+          <p:nvPr/>
+        </p:nvSpPr>
+        <p:spPr>
+          <a:xfrm xmlns:a="http://schemas.openxmlformats.org/drawingml/2006/main">
+            <a:off x="8458200" y="2343150"/>
+            <a:ext cx="2724150" cy="514350"/>
+          </a:xfrm>
+          <a:prstGeom xmlns:a="http://schemas.openxmlformats.org/drawingml/2006/main" prst="rect">
+            <a:avLst/>
+          </a:prstGeom>
+          <a:noFill xmlns:a="http://schemas.openxmlformats.org/drawingml/2006/main"/>
+          <a:ln xmlns:a="http://schemas.openxmlformats.org/drawingml/2006/main" w="0">
+            <a:noFill/>
+            <a:prstDash val="solid"/>
+          </a:ln>
+        </p:spPr>
+        <p:txBody>
+          <a:bodyPr xmlns:a="http://schemas.openxmlformats.org/drawingml/2006/main"/>
+          <a:lstStyle xmlns:a="http://schemas.openxmlformats.org/drawingml/2006/main"/>
+          <a:p xmlns:a="http://schemas.openxmlformats.org/drawingml/2006/main">
+            <a:pPr>
+              <a:defRPr sz="1875" b="1">
+                <a:solidFill>
+                  <a:srgbClr val="D97706"/>
+                </a:solidFill>
+              </a:defRPr>
+            </a:pPr>
+            <a:r>
+              <a:rPr sz="1875" b="1">
+                <a:solidFill>
+                  <a:srgbClr val="D97706"/>
+                </a:solidFill>
+              </a:rPr>
+              <a:t>Momentum plus stress</a:t>
+            </a:r>
+          </a:p>
+        </p:txBody>
+      </p:sp>
+      <p:sp>
+        <p:nvSpPr>
+          <p:cNvPr id="12" name="">
+            <a:extLst xmlns:a="http://schemas.openxmlformats.org/drawingml/2006/main">
+              <a:ext uri="{FF2B5EF4-FFF2-40B4-BE49-F238E27FC236}">
+                <a16:creationId xmlns:a16="http://schemas.microsoft.com/office/drawing/2014/main" id="{48B5AB3D-1F56-4621-A3B2-5A9D507501AB}"/>
+              </a:ext>
+            </a:extLst>
+          </p:cNvPr>
+          <p:cNvSpPr>
+            <a:spLocks xmlns:a="http://schemas.openxmlformats.org/drawingml/2006/main" noGrp="1"/>
+          </p:cNvSpPr>
+          <p:nvPr/>
+        </p:nvSpPr>
+        <p:spPr>
+          <a:xfrm xmlns:a="http://schemas.openxmlformats.org/drawingml/2006/main">
+            <a:off x="8458200" y="3105150"/>
+            <a:ext cx="2724150" cy="1200150"/>
+          </a:xfrm>
+          <a:prstGeom xmlns:a="http://schemas.openxmlformats.org/drawingml/2006/main" prst="rect">
+            <a:avLst/>
+          </a:prstGeom>
+          <a:noFill xmlns:a="http://schemas.openxmlformats.org/drawingml/2006/main"/>
+          <a:ln xmlns:a="http://schemas.openxmlformats.org/drawingml/2006/main" w="0">
+            <a:noFill/>
+            <a:prstDash val="solid"/>
+          </a:ln>
+        </p:spPr>
+        <p:txBody>
+          <a:bodyPr xmlns:a="http://schemas.openxmlformats.org/drawingml/2006/main"/>
+          <a:lstStyle xmlns:a="http://schemas.openxmlformats.org/drawingml/2006/main"/>
+          <a:p xmlns:a="http://schemas.openxmlformats.org/drawingml/2006/main">
+            <a:pPr>
+              <a:defRPr sz="1500" b="0">
+                <a:solidFill>
+                  <a:srgbClr val="111827"/>
+                </a:solidFill>
+              </a:defRPr>
+            </a:pPr>
+            <a:r>
+              <a:rPr sz="1500" b="0">
+                <a:solidFill>
+                  <a:srgbClr val="111827"/>
+                </a:solidFill>
+              </a:rPr>
+              <a:t>Can the participation surface improve upside while keeping volatility and stress context for drawdown windows?</a:t>
+            </a:r>
+          </a:p>
+        </p:txBody>
+      </p:sp>
+      <p:sp>
+        <p:nvSpPr>
+          <p:cNvPr id="13" name="">
+            <a:extLst xmlns:a="http://schemas.openxmlformats.org/drawingml/2006/main">
+              <a:ext uri="{FF2B5EF4-FFF2-40B4-BE49-F238E27FC236}">
+                <a16:creationId xmlns:a16="http://schemas.microsoft.com/office/drawing/2014/main" id="{69B27390-C71A-4DAA-B789-07883D52DA0D}"/>
+              </a:ext>
+            </a:extLst>
+          </p:cNvPr>
+          <p:cNvSpPr>
+            <a:spLocks xmlns:a="http://schemas.openxmlformats.org/drawingml/2006/main" noGrp="1"/>
+          </p:cNvSpPr>
+          <p:nvPr/>
+        </p:nvSpPr>
+        <p:spPr>
+          <a:xfrm xmlns:a="http://schemas.openxmlformats.org/drawingml/2006/main">
+            <a:off x="1238250" y="5638800"/>
+            <a:ext cx="9715500" cy="419100"/>
           </a:xfrm>
           <a:prstGeom xmlns:a="http://schemas.openxmlformats.org/drawingml/2006/main" prst="rect">
             <a:avLst/>
@@ -3914,276 +4162,19 @@
           <a:lstStyle xmlns:a="http://schemas.openxmlformats.org/drawingml/2006/main"/>
           <a:p xmlns:a="http://schemas.openxmlformats.org/drawingml/2006/main">
             <a:pPr algn="ctr">
-              <a:defRPr sz="2550" b="1">
-                <a:solidFill>
-                  <a:srgbClr val="0F9F8F"/>
-                </a:solidFill>
-              </a:defRPr>
-            </a:pPr>
-            <a:r>
-              <a:rPr sz="2550" b="1">
-                <a:solidFill>
-                  <a:srgbClr val="0F9F8F"/>
-                </a:solidFill>
-              </a:rPr>
-              <a:t>57.2%</a:t>
-            </a:r>
-          </a:p>
-        </p:txBody>
-      </p:sp>
-      <p:sp>
-        <p:nvSpPr>
-          <p:cNvPr id="12" name="">
-            <a:extLst xmlns:a="http://schemas.openxmlformats.org/drawingml/2006/main">
-              <a:ext uri="{FF2B5EF4-FFF2-40B4-BE49-F238E27FC236}">
-                <a16:creationId xmlns:a16="http://schemas.microsoft.com/office/drawing/2014/main" id="{D48D45ED-25A2-4A04-9CE6-E845AB67E81B}"/>
-              </a:ext>
-            </a:extLst>
-          </p:cNvPr>
-          <p:cNvSpPr>
-            <a:spLocks xmlns:a="http://schemas.openxmlformats.org/drawingml/2006/main" noGrp="1"/>
-          </p:cNvSpPr>
-          <p:nvPr/>
-        </p:nvSpPr>
-        <p:spPr>
-          <a:xfrm xmlns:a="http://schemas.openxmlformats.org/drawingml/2006/main">
-            <a:off x="3810000" y="2800350"/>
-            <a:ext cx="2000250" cy="361950"/>
-          </a:xfrm>
-          <a:prstGeom xmlns:a="http://schemas.openxmlformats.org/drawingml/2006/main" prst="rect">
-            <a:avLst/>
-          </a:prstGeom>
-          <a:noFill xmlns:a="http://schemas.openxmlformats.org/drawingml/2006/main"/>
-          <a:ln xmlns:a="http://schemas.openxmlformats.org/drawingml/2006/main" w="0">
-            <a:noFill/>
-            <a:prstDash val="solid"/>
-          </a:ln>
-        </p:spPr>
-        <p:txBody>
-          <a:bodyPr xmlns:a="http://schemas.openxmlformats.org/drawingml/2006/main"/>
-          <a:lstStyle xmlns:a="http://schemas.openxmlformats.org/drawingml/2006/main"/>
-          <a:p xmlns:a="http://schemas.openxmlformats.org/drawingml/2006/main">
-            <a:pPr algn="ctr">
-              <a:defRPr sz="1200" b="0">
-                <a:solidFill>
-                  <a:srgbClr val="5B6472"/>
-                </a:solidFill>
-              </a:defRPr>
-            </a:pPr>
-            <a:r>
-              <a:rPr sz="1200" b="0">
-                <a:solidFill>
-                  <a:srgbClr val="5B6472"/>
-                </a:solidFill>
-              </a:rPr>
-              <a:t>Continuation exposure in 2020Q3</a:t>
-            </a:r>
-          </a:p>
-        </p:txBody>
-      </p:sp>
-      <p:sp>
-        <p:nvSpPr>
-          <p:cNvPr id="13" name="">
-            <a:extLst xmlns:a="http://schemas.openxmlformats.org/drawingml/2006/main">
-              <a:ext uri="{FF2B5EF4-FFF2-40B4-BE49-F238E27FC236}">
-                <a16:creationId xmlns:a16="http://schemas.microsoft.com/office/drawing/2014/main" id="{B596AF4E-E30D-4A71-9D76-945AB50C484B}"/>
-              </a:ext>
-            </a:extLst>
-          </p:cNvPr>
-          <p:cNvSpPr>
-            <a:spLocks xmlns:a="http://schemas.openxmlformats.org/drawingml/2006/main" noGrp="1"/>
-          </p:cNvSpPr>
-          <p:nvPr/>
-        </p:nvSpPr>
-        <p:spPr>
-          <a:xfrm xmlns:a="http://schemas.openxmlformats.org/drawingml/2006/main">
-            <a:off x="3562350" y="3714750"/>
-            <a:ext cx="2571750" cy="1333500"/>
-          </a:xfrm>
-          <a:prstGeom xmlns:a="http://schemas.openxmlformats.org/drawingml/2006/main" prst="roundRect">
-            <a:avLst>
-              <a:gd name="adj" fmla="val 5714"/>
-            </a:avLst>
-          </a:prstGeom>
-          <a:solidFill xmlns:a="http://schemas.openxmlformats.org/drawingml/2006/main">
-            <a:srgbClr val="F8FAFC"/>
-          </a:solidFill>
-          <a:ln xmlns:a="http://schemas.openxmlformats.org/drawingml/2006/main" w="9525">
-            <a:solidFill>
-              <a:srgbClr val="CBD5E1"/>
-            </a:solidFill>
-            <a:prstDash val="solid"/>
-          </a:ln>
-        </p:spPr>
-      </p:sp>
-      <p:sp>
-        <p:nvSpPr>
-          <p:cNvPr id="14" name="">
-            <a:extLst xmlns:a="http://schemas.openxmlformats.org/drawingml/2006/main">
-              <a:ext uri="{FF2B5EF4-FFF2-40B4-BE49-F238E27FC236}">
-                <a16:creationId xmlns:a16="http://schemas.microsoft.com/office/drawing/2014/main" id="{A813CF60-63DA-4664-BF1F-0CA2A4CAFED5}"/>
-              </a:ext>
-            </a:extLst>
-          </p:cNvPr>
-          <p:cNvSpPr>
-            <a:spLocks xmlns:a="http://schemas.openxmlformats.org/drawingml/2006/main" noGrp="1"/>
-          </p:cNvSpPr>
-          <p:nvPr/>
-        </p:nvSpPr>
-        <p:spPr>
-          <a:xfrm xmlns:a="http://schemas.openxmlformats.org/drawingml/2006/main">
-            <a:off x="3790950" y="3981450"/>
-            <a:ext cx="2000250" cy="438150"/>
-          </a:xfrm>
-          <a:prstGeom xmlns:a="http://schemas.openxmlformats.org/drawingml/2006/main" prst="rect">
-            <a:avLst/>
-          </a:prstGeom>
-          <a:noFill xmlns:a="http://schemas.openxmlformats.org/drawingml/2006/main"/>
-          <a:ln xmlns:a="http://schemas.openxmlformats.org/drawingml/2006/main" w="0">
-            <a:noFill/>
-            <a:prstDash val="solid"/>
-          </a:ln>
-        </p:spPr>
-        <p:txBody>
-          <a:bodyPr xmlns:a="http://schemas.openxmlformats.org/drawingml/2006/main"/>
-          <a:lstStyle xmlns:a="http://schemas.openxmlformats.org/drawingml/2006/main"/>
-          <a:p xmlns:a="http://schemas.openxmlformats.org/drawingml/2006/main">
-            <a:pPr algn="ctr">
-              <a:defRPr sz="2550" b="1">
-                <a:solidFill>
-                  <a:srgbClr val="0F9F8F"/>
-                </a:solidFill>
-              </a:defRPr>
-            </a:pPr>
-            <a:r>
-              <a:rPr sz="2550" b="1">
-                <a:solidFill>
-                  <a:srgbClr val="0F9F8F"/>
-                </a:solidFill>
-              </a:rPr>
-              <a:t>12.6%</a:t>
-            </a:r>
-          </a:p>
-        </p:txBody>
-      </p:sp>
-      <p:sp>
-        <p:nvSpPr>
-          <p:cNvPr id="15" name="">
-            <a:extLst xmlns:a="http://schemas.openxmlformats.org/drawingml/2006/main">
-              <a:ext uri="{FF2B5EF4-FFF2-40B4-BE49-F238E27FC236}">
-                <a16:creationId xmlns:a16="http://schemas.microsoft.com/office/drawing/2014/main" id="{0FB1046F-2141-4944-A1F8-18AD9AD5F24F}"/>
-              </a:ext>
-            </a:extLst>
-          </p:cNvPr>
-          <p:cNvSpPr>
-            <a:spLocks xmlns:a="http://schemas.openxmlformats.org/drawingml/2006/main" noGrp="1"/>
-          </p:cNvSpPr>
-          <p:nvPr/>
-        </p:nvSpPr>
-        <p:spPr>
-          <a:xfrm xmlns:a="http://schemas.openxmlformats.org/drawingml/2006/main">
-            <a:off x="3810000" y="4514850"/>
-            <a:ext cx="2000250" cy="361950"/>
-          </a:xfrm>
-          <a:prstGeom xmlns:a="http://schemas.openxmlformats.org/drawingml/2006/main" prst="rect">
-            <a:avLst/>
-          </a:prstGeom>
-          <a:noFill xmlns:a="http://schemas.openxmlformats.org/drawingml/2006/main"/>
-          <a:ln xmlns:a="http://schemas.openxmlformats.org/drawingml/2006/main" w="0">
-            <a:noFill/>
-            <a:prstDash val="solid"/>
-          </a:ln>
-        </p:spPr>
-        <p:txBody>
-          <a:bodyPr xmlns:a="http://schemas.openxmlformats.org/drawingml/2006/main"/>
-          <a:lstStyle xmlns:a="http://schemas.openxmlformats.org/drawingml/2006/main"/>
-          <a:p xmlns:a="http://schemas.openxmlformats.org/drawingml/2006/main">
-            <a:pPr algn="ctr">
-              <a:defRPr sz="1200" b="0">
-                <a:solidFill>
-                  <a:srgbClr val="5B6472"/>
-                </a:solidFill>
-              </a:defRPr>
-            </a:pPr>
-            <a:r>
-              <a:rPr sz="1200" b="0">
-                <a:solidFill>
-                  <a:srgbClr val="5B6472"/>
-                </a:solidFill>
-              </a:rPr>
-              <a:t>Continuation exposure in 2022Q1</a:t>
-            </a:r>
-          </a:p>
-        </p:txBody>
-      </p:sp>
-      <p:pic>
-        <p:nvPicPr>
-          <p:cNvPr id="33" name=""/>
-          <p:cNvPicPr>
-            <a:picLocks xmlns:a="http://schemas.openxmlformats.org/drawingml/2006/main" noChangeAspect="1"/>
-          </p:cNvPicPr>
-          <p:nvPr/>
-        </p:nvPicPr>
-        <p:blipFill>
-          <a:blip xmlns:r="http://schemas.openxmlformats.org/officeDocument/2006/relationships" xmlns:a="http://schemas.openxmlformats.org/drawingml/2006/main" r:embed="R00fde917fbcb4c62"/>
-          <a:stretch xmlns:a="http://schemas.openxmlformats.org/drawingml/2006/main"/>
-        </p:blipFill>
-        <p:spPr>
-          <a:xfrm xmlns:a="http://schemas.openxmlformats.org/drawingml/2006/main">
-            <a:off x="7091570" y="1809750"/>
-            <a:ext cx="3571461" cy="3733800"/>
-          </a:xfrm>
-          <a:prstGeom xmlns:a="http://schemas.openxmlformats.org/drawingml/2006/main" prst="rect">
-            <a:avLst/>
-          </a:prstGeom>
-        </p:spPr>
-      </p:pic>
-      <p:sp>
-        <p:nvSpPr>
-          <p:cNvPr id="17" name="">
-            <a:extLst xmlns:a="http://schemas.openxmlformats.org/drawingml/2006/main">
-              <a:ext uri="{FF2B5EF4-FFF2-40B4-BE49-F238E27FC236}">
-                <a16:creationId xmlns:a16="http://schemas.microsoft.com/office/drawing/2014/main" id="{B0A16371-B82E-4848-BDCE-4B76AD1EAD4E}"/>
-              </a:ext>
-            </a:extLst>
-          </p:cNvPr>
-          <p:cNvSpPr>
-            <a:spLocks xmlns:a="http://schemas.openxmlformats.org/drawingml/2006/main" noGrp="1"/>
-          </p:cNvSpPr>
-          <p:nvPr/>
-        </p:nvSpPr>
-        <p:spPr>
-          <a:xfrm xmlns:a="http://schemas.openxmlformats.org/drawingml/2006/main">
-            <a:off x="1085850" y="5676900"/>
-            <a:ext cx="9810750" cy="419100"/>
-          </a:xfrm>
-          <a:prstGeom xmlns:a="http://schemas.openxmlformats.org/drawingml/2006/main" prst="rect">
-            <a:avLst/>
-          </a:prstGeom>
-          <a:noFill xmlns:a="http://schemas.openxmlformats.org/drawingml/2006/main"/>
-          <a:ln xmlns:a="http://schemas.openxmlformats.org/drawingml/2006/main" w="0">
-            <a:noFill/>
-            <a:prstDash val="solid"/>
-          </a:ln>
-        </p:spPr>
-        <p:txBody>
-          <a:bodyPr xmlns:a="http://schemas.openxmlformats.org/drawingml/2006/main"/>
-          <a:lstStyle xmlns:a="http://schemas.openxmlformats.org/drawingml/2006/main"/>
-          <a:p xmlns:a="http://schemas.openxmlformats.org/drawingml/2006/main">
-            <a:pPr algn="ctr">
-              <a:defRPr sz="1650" b="1">
-                <a:solidFill>
-                  <a:srgbClr val="111827"/>
-                </a:solidFill>
-              </a:defRPr>
-            </a:pPr>
-            <a:r>
-              <a:rPr sz="1650" b="1">
-                <a:solidFill>
-                  <a:srgbClr val="111827"/>
-                </a:solidFill>
-              </a:rPr>
-              <a:t>Aggregate mean alpha was -13.5 pp for fresh and -9.8 pp for continuation. This is not a victory lap; it is a sharper diagnosis.</a:t>
+              <a:defRPr sz="1725" b="1">
+                <a:solidFill>
+                  <a:srgbClr val="111827"/>
+                </a:solidFill>
+              </a:defRPr>
+            </a:pPr>
+            <a:r>
+              <a:rPr sz="1725" b="1">
+                <a:solidFill>
+                  <a:srgbClr val="111827"/>
+                </a:solidFill>
+              </a:rPr>
+              <a:t>The feature taxonomy CSV records the exact columns used in each lane, so the interpretation does not depend on memory.</a:t>
             </a:r>
           </a:p>
         </p:txBody>
@@ -4191,7 +4182,7 @@
     </p:spTree>
     <p:extLst>
       <p:ext uri="{BB962C8B-B14F-4D97-AF65-F5344CB8AC3E}">
-        <p14:creationId xmlns:p14="http://schemas.microsoft.com/office/powerpoint/2010/main" val="1448227414"/>
+        <p14:creationId xmlns:p14="http://schemas.microsoft.com/office/powerpoint/2010/main" val="631030048"/>
       </p:ext>
     </p:extLst>
   </p:cSld>
@@ -4222,7 +4213,7 @@
           <p:cNvPr id="1" name="">
             <a:extLst xmlns:a="http://schemas.openxmlformats.org/drawingml/2006/main">
               <a:ext uri="{FF2B5EF4-FFF2-40B4-BE49-F238E27FC236}">
-                <a16:creationId xmlns:a16="http://schemas.microsoft.com/office/drawing/2014/main" id="{131E2AA2-27C8-43C7-8269-8728E6D51DE8}"/>
+                <a16:creationId xmlns:a16="http://schemas.microsoft.com/office/drawing/2014/main" id="{1EDDE3FF-8C3D-4836-BA47-D585E628D8E8}"/>
               </a:ext>
             </a:extLst>
           </p:cNvPr>
@@ -4272,7 +4263,7 @@
           <p:cNvPr id="2" name="">
             <a:extLst xmlns:a="http://schemas.openxmlformats.org/drawingml/2006/main">
               <a:ext uri="{FF2B5EF4-FFF2-40B4-BE49-F238E27FC236}">
-                <a16:creationId xmlns:a16="http://schemas.microsoft.com/office/drawing/2014/main" id="{E1F25699-8E57-49C3-8705-F465473B8955}"/>
+                <a16:creationId xmlns:a16="http://schemas.microsoft.com/office/drawing/2014/main" id="{4604800C-39B2-4537-80DD-A46A8BB77B17}"/>
               </a:ext>
             </a:extLst>
           </p:cNvPr>
@@ -4312,7 +4303,7 @@
                   <a:srgbClr val="111827"/>
                 </a:solidFill>
               </a:rPr>
-              <a:t>The audit points to participation timing, not just strategy availability</a:t>
+              <a:t>Momentum plus stress improved upside capture without losing the stress-window protection</a:t>
             </a:r>
           </a:p>
         </p:txBody>
@@ -4322,7 +4313,7 @@
           <p:cNvPr id="3" name="">
             <a:extLst xmlns:a="http://schemas.openxmlformats.org/drawingml/2006/main">
               <a:ext uri="{FF2B5EF4-FFF2-40B4-BE49-F238E27FC236}">
-                <a16:creationId xmlns:a16="http://schemas.microsoft.com/office/drawing/2014/main" id="{CE311341-B0D5-4011-8E66-EC0B8E9B88E3}"/>
+                <a16:creationId xmlns:a16="http://schemas.microsoft.com/office/drawing/2014/main" id="{DB98F6C1-4E45-4062-AEBF-EC4D459DF469}"/>
               </a:ext>
             </a:extLst>
           </p:cNvPr>
@@ -4350,96 +4341,614 @@
           </a:ln>
         </p:spPr>
       </p:sp>
+      <p:sp>
+        <p:nvSpPr>
+          <p:cNvPr id="4" name="">
+            <a:extLst xmlns:a="http://schemas.openxmlformats.org/drawingml/2006/main">
+              <a:ext uri="{FF2B5EF4-FFF2-40B4-BE49-F238E27FC236}">
+                <a16:creationId xmlns:a16="http://schemas.microsoft.com/office/drawing/2014/main" id="{DE79F12C-875F-4B33-9F14-750EA7C737AC}"/>
+              </a:ext>
+            </a:extLst>
+          </p:cNvPr>
+          <p:cNvSpPr>
+            <a:spLocks xmlns:a="http://schemas.openxmlformats.org/drawingml/2006/main" noGrp="1"/>
+          </p:cNvSpPr>
+          <p:nvPr/>
+        </p:nvSpPr>
+        <p:spPr>
+          <a:xfrm xmlns:a="http://schemas.openxmlformats.org/drawingml/2006/main">
+            <a:off x="685800" y="2000250"/>
+            <a:ext cx="2571750" cy="1333500"/>
+          </a:xfrm>
+          <a:prstGeom xmlns:a="http://schemas.openxmlformats.org/drawingml/2006/main" prst="roundRect">
+            <a:avLst>
+              <a:gd name="adj" fmla="val 5714"/>
+            </a:avLst>
+          </a:prstGeom>
+          <a:solidFill xmlns:a="http://schemas.openxmlformats.org/drawingml/2006/main">
+            <a:srgbClr val="FFF1F2"/>
+          </a:solidFill>
+          <a:ln xmlns:a="http://schemas.openxmlformats.org/drawingml/2006/main" w="9525">
+            <a:solidFill>
+              <a:srgbClr val="FDA4AF"/>
+            </a:solidFill>
+            <a:prstDash val="solid"/>
+          </a:ln>
+        </p:spPr>
+      </p:sp>
+      <p:sp>
+        <p:nvSpPr>
+          <p:cNvPr id="5" name="">
+            <a:extLst xmlns:a="http://schemas.openxmlformats.org/drawingml/2006/main">
+              <a:ext uri="{FF2B5EF4-FFF2-40B4-BE49-F238E27FC236}">
+                <a16:creationId xmlns:a16="http://schemas.microsoft.com/office/drawing/2014/main" id="{38696C53-3F60-4602-90A2-2CDB98BE1A1D}"/>
+              </a:ext>
+            </a:extLst>
+          </p:cNvPr>
+          <p:cNvSpPr>
+            <a:spLocks xmlns:a="http://schemas.openxmlformats.org/drawingml/2006/main" noGrp="1"/>
+          </p:cNvSpPr>
+          <p:nvPr/>
+        </p:nvSpPr>
+        <p:spPr>
+          <a:xfrm xmlns:a="http://schemas.openxmlformats.org/drawingml/2006/main">
+            <a:off x="914400" y="2266950"/>
+            <a:ext cx="2000250" cy="438150"/>
+          </a:xfrm>
+          <a:prstGeom xmlns:a="http://schemas.openxmlformats.org/drawingml/2006/main" prst="rect">
+            <a:avLst/>
+          </a:prstGeom>
+          <a:noFill xmlns:a="http://schemas.openxmlformats.org/drawingml/2006/main"/>
+          <a:ln xmlns:a="http://schemas.openxmlformats.org/drawingml/2006/main" w="0">
+            <a:noFill/>
+            <a:prstDash val="solid"/>
+          </a:ln>
+        </p:spPr>
+        <p:txBody>
+          <a:bodyPr xmlns:a="http://schemas.openxmlformats.org/drawingml/2006/main"/>
+          <a:lstStyle xmlns:a="http://schemas.openxmlformats.org/drawingml/2006/main"/>
+          <a:p xmlns:a="http://schemas.openxmlformats.org/drawingml/2006/main">
+            <a:pPr algn="ctr">
+              <a:defRPr sz="2550" b="1">
+                <a:solidFill>
+                  <a:srgbClr val="D1495B"/>
+                </a:solidFill>
+              </a:defRPr>
+            </a:pPr>
+            <a:r>
+              <a:rPr sz="2550" b="1">
+                <a:solidFill>
+                  <a:srgbClr val="D1495B"/>
+                </a:solidFill>
+              </a:rPr>
+              <a:t>-28.1 pp</a:t>
+            </a:r>
+          </a:p>
+        </p:txBody>
+      </p:sp>
+      <p:sp>
+        <p:nvSpPr>
+          <p:cNvPr id="6" name="">
+            <a:extLst xmlns:a="http://schemas.openxmlformats.org/drawingml/2006/main">
+              <a:ext uri="{FF2B5EF4-FFF2-40B4-BE49-F238E27FC236}">
+                <a16:creationId xmlns:a16="http://schemas.microsoft.com/office/drawing/2014/main" id="{121C6B5A-9CDA-4D0C-909D-0B9646A82938}"/>
+              </a:ext>
+            </a:extLst>
+          </p:cNvPr>
+          <p:cNvSpPr>
+            <a:spLocks xmlns:a="http://schemas.openxmlformats.org/drawingml/2006/main" noGrp="1"/>
+          </p:cNvSpPr>
+          <p:nvPr/>
+        </p:nvSpPr>
+        <p:spPr>
+          <a:xfrm xmlns:a="http://schemas.openxmlformats.org/drawingml/2006/main">
+            <a:off x="933450" y="2781300"/>
+            <a:ext cx="2000250" cy="457200"/>
+          </a:xfrm>
+          <a:prstGeom xmlns:a="http://schemas.openxmlformats.org/drawingml/2006/main" prst="rect">
+            <a:avLst/>
+          </a:prstGeom>
+          <a:noFill xmlns:a="http://schemas.openxmlformats.org/drawingml/2006/main"/>
+          <a:ln xmlns:a="http://schemas.openxmlformats.org/drawingml/2006/main" w="0">
+            <a:noFill/>
+            <a:prstDash val="solid"/>
+          </a:ln>
+        </p:spPr>
+        <p:txBody>
+          <a:bodyPr xmlns:a="http://schemas.openxmlformats.org/drawingml/2006/main"/>
+          <a:lstStyle xmlns:a="http://schemas.openxmlformats.org/drawingml/2006/main"/>
+          <a:p xmlns:a="http://schemas.openxmlformats.org/drawingml/2006/main">
+            <a:pPr algn="ctr">
+              <a:defRPr sz="1200" b="0">
+                <a:solidFill>
+                  <a:srgbClr val="5B6472"/>
+                </a:solidFill>
+              </a:defRPr>
+            </a:pPr>
+            <a:r>
+              <a:rPr sz="1200" b="0">
+                <a:solidFill>
+                  <a:srgbClr val="5B6472"/>
+                </a:solidFill>
+              </a:rPr>
+              <a:t>Momentum+stress continuation alpha in 2020Q3</a:t>
+            </a:r>
+          </a:p>
+        </p:txBody>
+      </p:sp>
+      <p:sp>
+        <p:nvSpPr>
+          <p:cNvPr id="7" name="">
+            <a:extLst xmlns:a="http://schemas.openxmlformats.org/drawingml/2006/main">
+              <a:ext uri="{FF2B5EF4-FFF2-40B4-BE49-F238E27FC236}">
+                <a16:creationId xmlns:a16="http://schemas.microsoft.com/office/drawing/2014/main" id="{295E76B5-2D01-437D-810B-3C1C60E41979}"/>
+              </a:ext>
+            </a:extLst>
+          </p:cNvPr>
+          <p:cNvSpPr>
+            <a:spLocks xmlns:a="http://schemas.openxmlformats.org/drawingml/2006/main" noGrp="1"/>
+          </p:cNvSpPr>
+          <p:nvPr/>
+        </p:nvSpPr>
+        <p:spPr>
+          <a:xfrm xmlns:a="http://schemas.openxmlformats.org/drawingml/2006/main">
+            <a:off x="685800" y="3714750"/>
+            <a:ext cx="2571750" cy="1333500"/>
+          </a:xfrm>
+          <a:prstGeom xmlns:a="http://schemas.openxmlformats.org/drawingml/2006/main" prst="roundRect">
+            <a:avLst>
+              <a:gd name="adj" fmla="val 5714"/>
+            </a:avLst>
+          </a:prstGeom>
+          <a:solidFill xmlns:a="http://schemas.openxmlformats.org/drawingml/2006/main">
+            <a:srgbClr val="ECFDF5"/>
+          </a:solidFill>
+          <a:ln xmlns:a="http://schemas.openxmlformats.org/drawingml/2006/main" w="9525">
+            <a:solidFill>
+              <a:srgbClr val="A7F3D0"/>
+            </a:solidFill>
+            <a:prstDash val="solid"/>
+          </a:ln>
+        </p:spPr>
+      </p:sp>
+      <p:sp>
+        <p:nvSpPr>
+          <p:cNvPr id="8" name="">
+            <a:extLst xmlns:a="http://schemas.openxmlformats.org/drawingml/2006/main">
+              <a:ext uri="{FF2B5EF4-FFF2-40B4-BE49-F238E27FC236}">
+                <a16:creationId xmlns:a16="http://schemas.microsoft.com/office/drawing/2014/main" id="{E3512CCD-D3CD-4740-9117-508DB626C7CD}"/>
+              </a:ext>
+            </a:extLst>
+          </p:cNvPr>
+          <p:cNvSpPr>
+            <a:spLocks xmlns:a="http://schemas.openxmlformats.org/drawingml/2006/main" noGrp="1"/>
+          </p:cNvSpPr>
+          <p:nvPr/>
+        </p:nvSpPr>
+        <p:spPr>
+          <a:xfrm xmlns:a="http://schemas.openxmlformats.org/drawingml/2006/main">
+            <a:off x="914400" y="3981450"/>
+            <a:ext cx="2000250" cy="438150"/>
+          </a:xfrm>
+          <a:prstGeom xmlns:a="http://schemas.openxmlformats.org/drawingml/2006/main" prst="rect">
+            <a:avLst/>
+          </a:prstGeom>
+          <a:noFill xmlns:a="http://schemas.openxmlformats.org/drawingml/2006/main"/>
+          <a:ln xmlns:a="http://schemas.openxmlformats.org/drawingml/2006/main" w="0">
+            <a:noFill/>
+            <a:prstDash val="solid"/>
+          </a:ln>
+        </p:spPr>
+        <p:txBody>
+          <a:bodyPr xmlns:a="http://schemas.openxmlformats.org/drawingml/2006/main"/>
+          <a:lstStyle xmlns:a="http://schemas.openxmlformats.org/drawingml/2006/main"/>
+          <a:p xmlns:a="http://schemas.openxmlformats.org/drawingml/2006/main">
+            <a:pPr algn="ctr">
+              <a:defRPr sz="2550" b="1">
+                <a:solidFill>
+                  <a:srgbClr val="177A55"/>
+                </a:solidFill>
+              </a:defRPr>
+            </a:pPr>
+            <a:r>
+              <a:rPr sz="2550" b="1">
+                <a:solidFill>
+                  <a:srgbClr val="177A55"/>
+                </a:solidFill>
+              </a:rPr>
+              <a:t>+12.1 pp</a:t>
+            </a:r>
+          </a:p>
+        </p:txBody>
+      </p:sp>
+      <p:sp>
+        <p:nvSpPr>
+          <p:cNvPr id="9" name="">
+            <a:extLst xmlns:a="http://schemas.openxmlformats.org/drawingml/2006/main">
+              <a:ext uri="{FF2B5EF4-FFF2-40B4-BE49-F238E27FC236}">
+                <a16:creationId xmlns:a16="http://schemas.microsoft.com/office/drawing/2014/main" id="{17A28114-587E-4F19-82FB-80BC3637FBC6}"/>
+              </a:ext>
+            </a:extLst>
+          </p:cNvPr>
+          <p:cNvSpPr>
+            <a:spLocks xmlns:a="http://schemas.openxmlformats.org/drawingml/2006/main" noGrp="1"/>
+          </p:cNvSpPr>
+          <p:nvPr/>
+        </p:nvSpPr>
+        <p:spPr>
+          <a:xfrm xmlns:a="http://schemas.openxmlformats.org/drawingml/2006/main">
+            <a:off x="933450" y="4495800"/>
+            <a:ext cx="2000250" cy="457200"/>
+          </a:xfrm>
+          <a:prstGeom xmlns:a="http://schemas.openxmlformats.org/drawingml/2006/main" prst="rect">
+            <a:avLst/>
+          </a:prstGeom>
+          <a:noFill xmlns:a="http://schemas.openxmlformats.org/drawingml/2006/main"/>
+          <a:ln xmlns:a="http://schemas.openxmlformats.org/drawingml/2006/main" w="0">
+            <a:noFill/>
+            <a:prstDash val="solid"/>
+          </a:ln>
+        </p:spPr>
+        <p:txBody>
+          <a:bodyPr xmlns:a="http://schemas.openxmlformats.org/drawingml/2006/main"/>
+          <a:lstStyle xmlns:a="http://schemas.openxmlformats.org/drawingml/2006/main"/>
+          <a:p xmlns:a="http://schemas.openxmlformats.org/drawingml/2006/main">
+            <a:pPr algn="ctr">
+              <a:defRPr sz="1200" b="0">
+                <a:solidFill>
+                  <a:srgbClr val="5B6472"/>
+                </a:solidFill>
+              </a:defRPr>
+            </a:pPr>
+            <a:r>
+              <a:rPr sz="1200" b="0">
+                <a:solidFill>
+                  <a:srgbClr val="5B6472"/>
+                </a:solidFill>
+              </a:rPr>
+              <a:t>Momentum+stress continuation alpha in 2022Q1</a:t>
+            </a:r>
+          </a:p>
+        </p:txBody>
+      </p:sp>
+      <p:sp>
+        <p:nvSpPr>
+          <p:cNvPr id="10" name="">
+            <a:extLst xmlns:a="http://schemas.openxmlformats.org/drawingml/2006/main">
+              <a:ext uri="{FF2B5EF4-FFF2-40B4-BE49-F238E27FC236}">
+                <a16:creationId xmlns:a16="http://schemas.microsoft.com/office/drawing/2014/main" id="{6F0BFE69-C2B9-400F-9BC9-B60F06C08602}"/>
+              </a:ext>
+            </a:extLst>
+          </p:cNvPr>
+          <p:cNvSpPr>
+            <a:spLocks xmlns:a="http://schemas.openxmlformats.org/drawingml/2006/main" noGrp="1"/>
+          </p:cNvSpPr>
+          <p:nvPr/>
+        </p:nvSpPr>
+        <p:spPr>
+          <a:xfrm xmlns:a="http://schemas.openxmlformats.org/drawingml/2006/main">
+            <a:off x="3562350" y="2000250"/>
+            <a:ext cx="2571750" cy="1333500"/>
+          </a:xfrm>
+          <a:prstGeom xmlns:a="http://schemas.openxmlformats.org/drawingml/2006/main" prst="roundRect">
+            <a:avLst>
+              <a:gd name="adj" fmla="val 5714"/>
+            </a:avLst>
+          </a:prstGeom>
+          <a:solidFill xmlns:a="http://schemas.openxmlformats.org/drawingml/2006/main">
+            <a:srgbClr val="F8FAFC"/>
+          </a:solidFill>
+          <a:ln xmlns:a="http://schemas.openxmlformats.org/drawingml/2006/main" w="9525">
+            <a:solidFill>
+              <a:srgbClr val="CBD5E1"/>
+            </a:solidFill>
+            <a:prstDash val="solid"/>
+          </a:ln>
+        </p:spPr>
+      </p:sp>
+      <p:sp>
+        <p:nvSpPr>
+          <p:cNvPr id="11" name="">
+            <a:extLst xmlns:a="http://schemas.openxmlformats.org/drawingml/2006/main">
+              <a:ext uri="{FF2B5EF4-FFF2-40B4-BE49-F238E27FC236}">
+                <a16:creationId xmlns:a16="http://schemas.microsoft.com/office/drawing/2014/main" id="{D67F9173-C87C-407E-9CD5-962F55EDAA30}"/>
+              </a:ext>
+            </a:extLst>
+          </p:cNvPr>
+          <p:cNvSpPr>
+            <a:spLocks xmlns:a="http://schemas.openxmlformats.org/drawingml/2006/main" noGrp="1"/>
+          </p:cNvSpPr>
+          <p:nvPr/>
+        </p:nvSpPr>
+        <p:spPr>
+          <a:xfrm xmlns:a="http://schemas.openxmlformats.org/drawingml/2006/main">
+            <a:off x="3790950" y="2266950"/>
+            <a:ext cx="2000250" cy="438150"/>
+          </a:xfrm>
+          <a:prstGeom xmlns:a="http://schemas.openxmlformats.org/drawingml/2006/main" prst="rect">
+            <a:avLst/>
+          </a:prstGeom>
+          <a:noFill xmlns:a="http://schemas.openxmlformats.org/drawingml/2006/main"/>
+          <a:ln xmlns:a="http://schemas.openxmlformats.org/drawingml/2006/main" w="0">
+            <a:noFill/>
+            <a:prstDash val="solid"/>
+          </a:ln>
+        </p:spPr>
+        <p:txBody>
+          <a:bodyPr xmlns:a="http://schemas.openxmlformats.org/drawingml/2006/main"/>
+          <a:lstStyle xmlns:a="http://schemas.openxmlformats.org/drawingml/2006/main"/>
+          <a:p xmlns:a="http://schemas.openxmlformats.org/drawingml/2006/main">
+            <a:pPr algn="ctr">
+              <a:defRPr sz="2550" b="1">
+                <a:solidFill>
+                  <a:srgbClr val="0F9F8F"/>
+                </a:solidFill>
+              </a:defRPr>
+            </a:pPr>
+            <a:r>
+              <a:rPr sz="2550" b="1">
+                <a:solidFill>
+                  <a:srgbClr val="0F9F8F"/>
+                </a:solidFill>
+              </a:rPr>
+              <a:t>55.9%</a:t>
+            </a:r>
+          </a:p>
+        </p:txBody>
+      </p:sp>
+      <p:sp>
+        <p:nvSpPr>
+          <p:cNvPr id="12" name="">
+            <a:extLst xmlns:a="http://schemas.openxmlformats.org/drawingml/2006/main">
+              <a:ext uri="{FF2B5EF4-FFF2-40B4-BE49-F238E27FC236}">
+                <a16:creationId xmlns:a16="http://schemas.microsoft.com/office/drawing/2014/main" id="{DCDC5713-8DE3-4B1E-97F1-DFB4A4F49CBF}"/>
+              </a:ext>
+            </a:extLst>
+          </p:cNvPr>
+          <p:cNvSpPr>
+            <a:spLocks xmlns:a="http://schemas.openxmlformats.org/drawingml/2006/main" noGrp="1"/>
+          </p:cNvSpPr>
+          <p:nvPr/>
+        </p:nvSpPr>
+        <p:spPr>
+          <a:xfrm xmlns:a="http://schemas.openxmlformats.org/drawingml/2006/main">
+            <a:off x="3810000" y="2781300"/>
+            <a:ext cx="2000250" cy="457200"/>
+          </a:xfrm>
+          <a:prstGeom xmlns:a="http://schemas.openxmlformats.org/drawingml/2006/main" prst="rect">
+            <a:avLst/>
+          </a:prstGeom>
+          <a:noFill xmlns:a="http://schemas.openxmlformats.org/drawingml/2006/main"/>
+          <a:ln xmlns:a="http://schemas.openxmlformats.org/drawingml/2006/main" w="0">
+            <a:noFill/>
+            <a:prstDash val="solid"/>
+          </a:ln>
+        </p:spPr>
+        <p:txBody>
+          <a:bodyPr xmlns:a="http://schemas.openxmlformats.org/drawingml/2006/main"/>
+          <a:lstStyle xmlns:a="http://schemas.openxmlformats.org/drawingml/2006/main"/>
+          <a:p xmlns:a="http://schemas.openxmlformats.org/drawingml/2006/main">
+            <a:pPr algn="ctr">
+              <a:defRPr sz="1200" b="0">
+                <a:solidFill>
+                  <a:srgbClr val="5B6472"/>
+                </a:solidFill>
+              </a:defRPr>
+            </a:pPr>
+            <a:r>
+              <a:rPr sz="1200" b="0">
+                <a:solidFill>
+                  <a:srgbClr val="5B6472"/>
+                </a:solidFill>
+              </a:rPr>
+              <a:t>Momentum+stress exposure in 2020Q3</a:t>
+            </a:r>
+          </a:p>
+        </p:txBody>
+      </p:sp>
+      <p:sp>
+        <p:nvSpPr>
+          <p:cNvPr id="13" name="">
+            <a:extLst xmlns:a="http://schemas.openxmlformats.org/drawingml/2006/main">
+              <a:ext uri="{FF2B5EF4-FFF2-40B4-BE49-F238E27FC236}">
+                <a16:creationId xmlns:a16="http://schemas.microsoft.com/office/drawing/2014/main" id="{0294342F-63F9-4A6F-8A6E-CFCE08438E49}"/>
+              </a:ext>
+            </a:extLst>
+          </p:cNvPr>
+          <p:cNvSpPr>
+            <a:spLocks xmlns:a="http://schemas.openxmlformats.org/drawingml/2006/main" noGrp="1"/>
+          </p:cNvSpPr>
+          <p:nvPr/>
+        </p:nvSpPr>
+        <p:spPr>
+          <a:xfrm xmlns:a="http://schemas.openxmlformats.org/drawingml/2006/main">
+            <a:off x="3562350" y="3714750"/>
+            <a:ext cx="2571750" cy="1333500"/>
+          </a:xfrm>
+          <a:prstGeom xmlns:a="http://schemas.openxmlformats.org/drawingml/2006/main" prst="roundRect">
+            <a:avLst>
+              <a:gd name="adj" fmla="val 5714"/>
+            </a:avLst>
+          </a:prstGeom>
+          <a:solidFill xmlns:a="http://schemas.openxmlformats.org/drawingml/2006/main">
+            <a:srgbClr val="F8FAFC"/>
+          </a:solidFill>
+          <a:ln xmlns:a="http://schemas.openxmlformats.org/drawingml/2006/main" w="9525">
+            <a:solidFill>
+              <a:srgbClr val="CBD5E1"/>
+            </a:solidFill>
+            <a:prstDash val="solid"/>
+          </a:ln>
+        </p:spPr>
+      </p:sp>
+      <p:sp>
+        <p:nvSpPr>
+          <p:cNvPr id="14" name="">
+            <a:extLst xmlns:a="http://schemas.openxmlformats.org/drawingml/2006/main">
+              <a:ext uri="{FF2B5EF4-FFF2-40B4-BE49-F238E27FC236}">
+                <a16:creationId xmlns:a16="http://schemas.microsoft.com/office/drawing/2014/main" id="{4D8660CB-88B4-4CB9-88FC-F09B6C6F2FF9}"/>
+              </a:ext>
+            </a:extLst>
+          </p:cNvPr>
+          <p:cNvSpPr>
+            <a:spLocks xmlns:a="http://schemas.openxmlformats.org/drawingml/2006/main" noGrp="1"/>
+          </p:cNvSpPr>
+          <p:nvPr/>
+        </p:nvSpPr>
+        <p:spPr>
+          <a:xfrm xmlns:a="http://schemas.openxmlformats.org/drawingml/2006/main">
+            <a:off x="3790950" y="3981450"/>
+            <a:ext cx="2000250" cy="438150"/>
+          </a:xfrm>
+          <a:prstGeom xmlns:a="http://schemas.openxmlformats.org/drawingml/2006/main" prst="rect">
+            <a:avLst/>
+          </a:prstGeom>
+          <a:noFill xmlns:a="http://schemas.openxmlformats.org/drawingml/2006/main"/>
+          <a:ln xmlns:a="http://schemas.openxmlformats.org/drawingml/2006/main" w="0">
+            <a:noFill/>
+            <a:prstDash val="solid"/>
+          </a:ln>
+        </p:spPr>
+        <p:txBody>
+          <a:bodyPr xmlns:a="http://schemas.openxmlformats.org/drawingml/2006/main"/>
+          <a:lstStyle xmlns:a="http://schemas.openxmlformats.org/drawingml/2006/main"/>
+          <a:p xmlns:a="http://schemas.openxmlformats.org/drawingml/2006/main">
+            <a:pPr algn="ctr">
+              <a:defRPr sz="2550" b="1">
+                <a:solidFill>
+                  <a:srgbClr val="0F9F8F"/>
+                </a:solidFill>
+              </a:defRPr>
+            </a:pPr>
+            <a:r>
+              <a:rPr sz="2550" b="1">
+                <a:solidFill>
+                  <a:srgbClr val="0F9F8F"/>
+                </a:solidFill>
+              </a:rPr>
+              <a:t>12.9%</a:t>
+            </a:r>
+          </a:p>
+        </p:txBody>
+      </p:sp>
+      <p:sp>
+        <p:nvSpPr>
+          <p:cNvPr id="15" name="">
+            <a:extLst xmlns:a="http://schemas.openxmlformats.org/drawingml/2006/main">
+              <a:ext uri="{FF2B5EF4-FFF2-40B4-BE49-F238E27FC236}">
+                <a16:creationId xmlns:a16="http://schemas.microsoft.com/office/drawing/2014/main" id="{55D7910D-E4E0-4BC5-B6FB-F63DF2B8ED17}"/>
+              </a:ext>
+            </a:extLst>
+          </p:cNvPr>
+          <p:cNvSpPr>
+            <a:spLocks xmlns:a="http://schemas.openxmlformats.org/drawingml/2006/main" noGrp="1"/>
+          </p:cNvSpPr>
+          <p:nvPr/>
+        </p:nvSpPr>
+        <p:spPr>
+          <a:xfrm xmlns:a="http://schemas.openxmlformats.org/drawingml/2006/main">
+            <a:off x="3810000" y="4495800"/>
+            <a:ext cx="2000250" cy="457200"/>
+          </a:xfrm>
+          <a:prstGeom xmlns:a="http://schemas.openxmlformats.org/drawingml/2006/main" prst="rect">
+            <a:avLst/>
+          </a:prstGeom>
+          <a:noFill xmlns:a="http://schemas.openxmlformats.org/drawingml/2006/main"/>
+          <a:ln xmlns:a="http://schemas.openxmlformats.org/drawingml/2006/main" w="0">
+            <a:noFill/>
+            <a:prstDash val="solid"/>
+          </a:ln>
+        </p:spPr>
+        <p:txBody>
+          <a:bodyPr xmlns:a="http://schemas.openxmlformats.org/drawingml/2006/main"/>
+          <a:lstStyle xmlns:a="http://schemas.openxmlformats.org/drawingml/2006/main"/>
+          <a:p xmlns:a="http://schemas.openxmlformats.org/drawingml/2006/main">
+            <a:pPr algn="ctr">
+              <a:defRPr sz="1200" b="0">
+                <a:solidFill>
+                  <a:srgbClr val="5B6472"/>
+                </a:solidFill>
+              </a:defRPr>
+            </a:pPr>
+            <a:r>
+              <a:rPr sz="1200" b="0">
+                <a:solidFill>
+                  <a:srgbClr val="5B6472"/>
+                </a:solidFill>
+              </a:rPr>
+              <a:t>Momentum+stress exposure in 2022Q1</a:t>
+            </a:r>
+          </a:p>
+        </p:txBody>
+      </p:sp>
       <p:pic>
         <p:nvPicPr>
-          <p:cNvPr id="10" name=""/>
+          <p:cNvPr id="33" name=""/>
           <p:cNvPicPr>
             <a:picLocks xmlns:a="http://schemas.openxmlformats.org/drawingml/2006/main" noChangeAspect="1"/>
           </p:cNvPicPr>
           <p:nvPr/>
         </p:nvPicPr>
         <p:blipFill>
-          <a:blip xmlns:r="http://schemas.openxmlformats.org/officeDocument/2006/relationships" xmlns:a="http://schemas.openxmlformats.org/drawingml/2006/main" r:embed="Rc0afda9ebc1b4c29"/>
+          <a:blip xmlns:r="http://schemas.openxmlformats.org/officeDocument/2006/relationships" xmlns:a="http://schemas.openxmlformats.org/drawingml/2006/main" r:embed="Rcece4ccee2524eb8"/>
           <a:stretch xmlns:a="http://schemas.openxmlformats.org/drawingml/2006/main"/>
         </p:blipFill>
         <p:spPr>
           <a:xfrm xmlns:a="http://schemas.openxmlformats.org/drawingml/2006/main">
-            <a:off x="698256" y="1809750"/>
-            <a:ext cx="5671038" cy="4095750"/>
+            <a:off x="6882749" y="1809750"/>
+            <a:ext cx="3989103" cy="3733800"/>
           </a:xfrm>
           <a:prstGeom xmlns:a="http://schemas.openxmlformats.org/drawingml/2006/main" prst="rect">
             <a:avLst/>
           </a:prstGeom>
         </p:spPr>
       </p:pic>
-      <p:pic>
-        <p:nvPicPr>
-          <p:cNvPr id="11" name=""/>
-          <p:cNvPicPr>
-            <a:picLocks xmlns:a="http://schemas.openxmlformats.org/drawingml/2006/main" noChangeAspect="1"/>
-          </p:cNvPicPr>
-          <p:nvPr/>
-        </p:nvPicPr>
-        <p:blipFill>
-          <a:blip xmlns:r="http://schemas.openxmlformats.org/officeDocument/2006/relationships" xmlns:a="http://schemas.openxmlformats.org/drawingml/2006/main" r:embed="R4e64226368784307"/>
-          <a:stretch xmlns:a="http://schemas.openxmlformats.org/drawingml/2006/main"/>
-        </p:blipFill>
-        <p:spPr>
-          <a:xfrm xmlns:a="http://schemas.openxmlformats.org/drawingml/2006/main">
-            <a:off x="6877050" y="1929179"/>
-            <a:ext cx="4762500" cy="3113942"/>
-          </a:xfrm>
-          <a:prstGeom xmlns:a="http://schemas.openxmlformats.org/drawingml/2006/main" prst="rect">
-            <a:avLst/>
-          </a:prstGeom>
-        </p:spPr>
-      </p:pic>
-      <p:sp>
-        <p:nvSpPr>
-          <p:cNvPr id="6" name="">
-            <a:extLst xmlns:a="http://schemas.openxmlformats.org/drawingml/2006/main">
-              <a:ext uri="{FF2B5EF4-FFF2-40B4-BE49-F238E27FC236}">
-                <a16:creationId xmlns:a16="http://schemas.microsoft.com/office/drawing/2014/main" id="{3767862E-9659-48BE-82BA-6113549A717E}"/>
-              </a:ext>
-            </a:extLst>
-          </p:cNvPr>
-          <p:cNvSpPr>
-            <a:spLocks xmlns:a="http://schemas.openxmlformats.org/drawingml/2006/main" noGrp="1"/>
-          </p:cNvSpPr>
-          <p:nvPr/>
-        </p:nvSpPr>
-        <p:spPr>
-          <a:xfrm xmlns:a="http://schemas.openxmlformats.org/drawingml/2006/main">
-            <a:off x="7067550" y="5276850"/>
-            <a:ext cx="4191000" cy="819150"/>
-          </a:xfrm>
-          <a:prstGeom xmlns:a="http://schemas.openxmlformats.org/drawingml/2006/main" prst="rect">
-            <a:avLst/>
-          </a:prstGeom>
-          <a:noFill xmlns:a="http://schemas.openxmlformats.org/drawingml/2006/main"/>
-          <a:ln xmlns:a="http://schemas.openxmlformats.org/drawingml/2006/main" w="0">
-            <a:noFill/>
-            <a:prstDash val="solid"/>
-          </a:ln>
-        </p:spPr>
-        <p:txBody>
-          <a:bodyPr xmlns:a="http://schemas.openxmlformats.org/drawingml/2006/main"/>
-          <a:lstStyle xmlns:a="http://schemas.openxmlformats.org/drawingml/2006/main"/>
-          <a:p xmlns:a="http://schemas.openxmlformats.org/drawingml/2006/main">
-            <a:pPr>
-              <a:defRPr sz="1350" b="0">
-                <a:solidFill>
-                  <a:srgbClr val="5B6472"/>
-                </a:solidFill>
-              </a:defRPr>
-            </a:pPr>
-            <a:r>
-              <a:rPr sz="1350" b="0">
-                <a:solidFill>
-                  <a:srgbClr val="5B6472"/>
-                </a:solidFill>
-              </a:rPr>
-              <a:t>The state/family map selected plenty of momentum candidates, so the first failure mode is not that no-trade swallowed the whole system. The problem is more specific: exposure still arrived too late or too lightly in the rebound while drawdown avoidance worked better in the stress window.</a:t>
+      <p:sp>
+        <p:nvSpPr>
+          <p:cNvPr id="17" name="">
+            <a:extLst xmlns:a="http://schemas.openxmlformats.org/drawingml/2006/main">
+              <a:ext uri="{FF2B5EF4-FFF2-40B4-BE49-F238E27FC236}">
+                <a16:creationId xmlns:a16="http://schemas.microsoft.com/office/drawing/2014/main" id="{1E9B502C-2EF4-4E2B-8F34-179DA2B23844}"/>
+              </a:ext>
+            </a:extLst>
+          </p:cNvPr>
+          <p:cNvSpPr>
+            <a:spLocks xmlns:a="http://schemas.openxmlformats.org/drawingml/2006/main" noGrp="1"/>
+          </p:cNvSpPr>
+          <p:nvPr/>
+        </p:nvSpPr>
+        <p:spPr>
+          <a:xfrm xmlns:a="http://schemas.openxmlformats.org/drawingml/2006/main">
+            <a:off x="990600" y="5676900"/>
+            <a:ext cx="10096500" cy="552450"/>
+          </a:xfrm>
+          <a:prstGeom xmlns:a="http://schemas.openxmlformats.org/drawingml/2006/main" prst="rect">
+            <a:avLst/>
+          </a:prstGeom>
+          <a:noFill xmlns:a="http://schemas.openxmlformats.org/drawingml/2006/main"/>
+          <a:ln xmlns:a="http://schemas.openxmlformats.org/drawingml/2006/main" w="0">
+            <a:noFill/>
+            <a:prstDash val="solid"/>
+          </a:ln>
+        </p:spPr>
+        <p:txBody>
+          <a:bodyPr xmlns:a="http://schemas.openxmlformats.org/drawingml/2006/main"/>
+          <a:lstStyle xmlns:a="http://schemas.openxmlformats.org/drawingml/2006/main"/>
+          <a:p xmlns:a="http://schemas.openxmlformats.org/drawingml/2006/main">
+            <a:pPr algn="ctr">
+              <a:defRPr sz="1575" b="1">
+                <a:solidFill>
+                  <a:srgbClr val="111827"/>
+                </a:solidFill>
+              </a:defRPr>
+            </a:pPr>
+            <a:r>
+              <a:rPr sz="1575" b="1">
+                <a:solidFill>
+                  <a:srgbClr val="111827"/>
+                </a:solidFill>
+              </a:rPr>
+              <a:t>Against workhorse continuation, momentum+stress improved mean alpha from -9.8 pp to -8.0 pp. It is still not benchmark-beating, but the feature layer moved in the desired direction.</a:t>
             </a:r>
           </a:p>
         </p:txBody>
@@ -4447,7 +4956,7 @@
     </p:spTree>
     <p:extLst>
       <p:ext uri="{BB962C8B-B14F-4D97-AF65-F5344CB8AC3E}">
-        <p14:creationId xmlns:p14="http://schemas.microsoft.com/office/powerpoint/2010/main" val="2034478583"/>
+        <p14:creationId xmlns:p14="http://schemas.microsoft.com/office/powerpoint/2010/main" val="769948860"/>
       </p:ext>
     </p:extLst>
   </p:cSld>
@@ -4478,7 +4987,7 @@
           <p:cNvPr id="1" name="">
             <a:extLst xmlns:a="http://schemas.openxmlformats.org/drawingml/2006/main">
               <a:ext uri="{FF2B5EF4-FFF2-40B4-BE49-F238E27FC236}">
-                <a16:creationId xmlns:a16="http://schemas.microsoft.com/office/drawing/2014/main" id="{2E49CE19-4708-4CCB-9256-165C27CFEB2F}"/>
+                <a16:creationId xmlns:a16="http://schemas.microsoft.com/office/drawing/2014/main" id="{549FC25B-5E09-433C-B8F9-D0EC3952955B}"/>
               </a:ext>
             </a:extLst>
           </p:cNvPr>
@@ -4528,7 +5037,7 @@
           <p:cNvPr id="2" name="">
             <a:extLst xmlns:a="http://schemas.openxmlformats.org/drawingml/2006/main">
               <a:ext uri="{FF2B5EF4-FFF2-40B4-BE49-F238E27FC236}">
-                <a16:creationId xmlns:a16="http://schemas.microsoft.com/office/drawing/2014/main" id="{9637C673-C2A4-4F73-9425-60168B86A4AD}"/>
+                <a16:creationId xmlns:a16="http://schemas.microsoft.com/office/drawing/2014/main" id="{E8A0EA61-54C9-4662-8FF5-2CF8148D3141}"/>
               </a:ext>
             </a:extLst>
           </p:cNvPr>
@@ -4568,7 +5077,7 @@
                   <a:srgbClr val="111827"/>
                 </a:solidFill>
               </a:rPr>
-              <a:t>Representative trade tapes show the system joined the move but did not stay with enough of it</a:t>
+              <a:t>The audit points to participation timing, not just strategy availability</a:t>
             </a:r>
           </a:p>
         </p:txBody>
@@ -4578,7 +5087,7 @@
           <p:cNvPr id="3" name="">
             <a:extLst xmlns:a="http://schemas.openxmlformats.org/drawingml/2006/main">
               <a:ext uri="{FF2B5EF4-FFF2-40B4-BE49-F238E27FC236}">
-                <a16:creationId xmlns:a16="http://schemas.microsoft.com/office/drawing/2014/main" id="{8E60BA35-98BB-48A4-B1AD-092AC13939A7}"/>
+                <a16:creationId xmlns:a16="http://schemas.microsoft.com/office/drawing/2014/main" id="{3E155258-E6E2-4A28-9C16-79CBA5D664CE}"/>
               </a:ext>
             </a:extLst>
           </p:cNvPr>
@@ -4608,79 +5117,66 @@
       </p:sp>
       <p:pic>
         <p:nvPicPr>
-          <p:cNvPr id="19" name=""/>
+          <p:cNvPr id="10" name=""/>
           <p:cNvPicPr>
             <a:picLocks xmlns:a="http://schemas.openxmlformats.org/drawingml/2006/main" noChangeAspect="1"/>
           </p:cNvPicPr>
           <p:nvPr/>
         </p:nvPicPr>
         <p:blipFill>
-          <a:blip xmlns:r="http://schemas.openxmlformats.org/officeDocument/2006/relationships" xmlns:a="http://schemas.openxmlformats.org/drawingml/2006/main" r:embed="R1e78d08c35044ac2"/>
+          <a:blip xmlns:r="http://schemas.openxmlformats.org/officeDocument/2006/relationships" xmlns:a="http://schemas.openxmlformats.org/drawingml/2006/main" r:embed="R7e773a7d53f04a10"/>
           <a:stretch xmlns:a="http://schemas.openxmlformats.org/drawingml/2006/main"/>
         </p:blipFill>
         <p:spPr>
           <a:xfrm xmlns:a="http://schemas.openxmlformats.org/drawingml/2006/main">
-            <a:off x="1225717" y="1695450"/>
-            <a:ext cx="5930566" cy="4333875"/>
+            <a:off x="803275" y="1809750"/>
+            <a:ext cx="5461000" cy="4095750"/>
           </a:xfrm>
           <a:prstGeom xmlns:a="http://schemas.openxmlformats.org/drawingml/2006/main" prst="rect">
             <a:avLst/>
           </a:prstGeom>
         </p:spPr>
       </p:pic>
-      <p:sp>
-        <p:nvSpPr>
-          <p:cNvPr id="5" name="">
-            <a:extLst xmlns:a="http://schemas.openxmlformats.org/drawingml/2006/main">
-              <a:ext uri="{FF2B5EF4-FFF2-40B4-BE49-F238E27FC236}">
-                <a16:creationId xmlns:a16="http://schemas.microsoft.com/office/drawing/2014/main" id="{CDC7019C-E289-4BCC-A149-EEF64D8D6327}"/>
-              </a:ext>
-            </a:extLst>
-          </p:cNvPr>
-          <p:cNvSpPr>
-            <a:spLocks xmlns:a="http://schemas.openxmlformats.org/drawingml/2006/main" noGrp="1"/>
-          </p:cNvSpPr>
-          <p:nvPr/>
-        </p:nvSpPr>
-        <p:spPr>
-          <a:xfrm xmlns:a="http://schemas.openxmlformats.org/drawingml/2006/main">
-            <a:off x="8229600" y="1962150"/>
-            <a:ext cx="3048000" cy="3219450"/>
-          </a:xfrm>
-          <a:prstGeom xmlns:a="http://schemas.openxmlformats.org/drawingml/2006/main" prst="roundRect">
-            <a:avLst>
-              <a:gd name="adj" fmla="val 2500"/>
-            </a:avLst>
-          </a:prstGeom>
-          <a:solidFill xmlns:a="http://schemas.openxmlformats.org/drawingml/2006/main">
-            <a:srgbClr val="F8FAFC"/>
-          </a:solidFill>
-          <a:ln xmlns:a="http://schemas.openxmlformats.org/drawingml/2006/main" w="9525">
-            <a:solidFill>
-              <a:srgbClr val="D7DEE8"/>
-            </a:solidFill>
-            <a:prstDash val="solid"/>
-          </a:ln>
-        </p:spPr>
-      </p:sp>
+      <p:pic>
+        <p:nvPicPr>
+          <p:cNvPr id="11" name=""/>
+          <p:cNvPicPr>
+            <a:picLocks xmlns:a="http://schemas.openxmlformats.org/drawingml/2006/main" noChangeAspect="1"/>
+          </p:cNvPicPr>
+          <p:nvPr/>
+        </p:nvPicPr>
+        <p:blipFill>
+          <a:blip xmlns:r="http://schemas.openxmlformats.org/officeDocument/2006/relationships" xmlns:a="http://schemas.openxmlformats.org/drawingml/2006/main" r:embed="R0dc6fafee0294e87"/>
+          <a:stretch xmlns:a="http://schemas.openxmlformats.org/drawingml/2006/main"/>
+        </p:blipFill>
+        <p:spPr>
+          <a:xfrm xmlns:a="http://schemas.openxmlformats.org/drawingml/2006/main">
+            <a:off x="6877050" y="1929179"/>
+            <a:ext cx="4762500" cy="3113942"/>
+          </a:xfrm>
+          <a:prstGeom xmlns:a="http://schemas.openxmlformats.org/drawingml/2006/main" prst="rect">
+            <a:avLst/>
+          </a:prstGeom>
+        </p:spPr>
+      </p:pic>
       <p:sp>
         <p:nvSpPr>
           <p:cNvPr id="6" name="">
             <a:extLst xmlns:a="http://schemas.openxmlformats.org/drawingml/2006/main">
               <a:ext uri="{FF2B5EF4-FFF2-40B4-BE49-F238E27FC236}">
-                <a16:creationId xmlns:a16="http://schemas.microsoft.com/office/drawing/2014/main" id="{220AB060-612F-47B2-81A0-AFBD6C5321CF}"/>
-              </a:ext>
-            </a:extLst>
-          </p:cNvPr>
-          <p:cNvSpPr>
-            <a:spLocks xmlns:a="http://schemas.openxmlformats.org/drawingml/2006/main" noGrp="1"/>
-          </p:cNvSpPr>
-          <p:nvPr/>
-        </p:nvSpPr>
-        <p:spPr>
-          <a:xfrm xmlns:a="http://schemas.openxmlformats.org/drawingml/2006/main">
-            <a:off x="8515350" y="2247900"/>
-            <a:ext cx="2381250" cy="285750"/>
+                <a16:creationId xmlns:a16="http://schemas.microsoft.com/office/drawing/2014/main" id="{F9F1ED6D-25CB-4102-9DED-94767419AFC7}"/>
+              </a:ext>
+            </a:extLst>
+          </p:cNvPr>
+          <p:cNvSpPr>
+            <a:spLocks xmlns:a="http://schemas.openxmlformats.org/drawingml/2006/main" noGrp="1"/>
+          </p:cNvSpPr>
+          <p:nvPr/>
+        </p:nvSpPr>
+        <p:spPr>
+          <a:xfrm xmlns:a="http://schemas.openxmlformats.org/drawingml/2006/main">
+            <a:off x="7067550" y="5276850"/>
+            <a:ext cx="4191000" cy="819150"/>
           </a:xfrm>
           <a:prstGeom xmlns:a="http://schemas.openxmlformats.org/drawingml/2006/main" prst="rect">
             <a:avLst/>
@@ -4696,393 +5192,19 @@
           <a:lstStyle xmlns:a="http://schemas.openxmlformats.org/drawingml/2006/main"/>
           <a:p xmlns:a="http://schemas.openxmlformats.org/drawingml/2006/main">
             <a:pPr>
-              <a:defRPr sz="1875" b="1">
-                <a:solidFill>
-                  <a:srgbClr val="111827"/>
-                </a:solidFill>
-              </a:defRPr>
-            </a:pPr>
-            <a:r>
-              <a:rPr sz="1875" b="1">
-                <a:solidFill>
-                  <a:srgbClr val="111827"/>
-                </a:solidFill>
-              </a:rPr>
-              <a:t>What to look for</a:t>
-            </a:r>
-          </a:p>
-        </p:txBody>
-      </p:sp>
-      <p:sp>
-        <p:nvSpPr>
-          <p:cNvPr id="7" name="">
-            <a:extLst xmlns:a="http://schemas.openxmlformats.org/drawingml/2006/main">
-              <a:ext uri="{FF2B5EF4-FFF2-40B4-BE49-F238E27FC236}">
-                <a16:creationId xmlns:a16="http://schemas.microsoft.com/office/drawing/2014/main" id="{76027923-78BB-48AE-9339-92859393047A}"/>
-              </a:ext>
-            </a:extLst>
-          </p:cNvPr>
-          <p:cNvSpPr>
-            <a:spLocks xmlns:a="http://schemas.openxmlformats.org/drawingml/2006/main" noGrp="1"/>
-          </p:cNvSpPr>
-          <p:nvPr/>
-        </p:nvSpPr>
-        <p:spPr>
-          <a:xfrm xmlns:a="http://schemas.openxmlformats.org/drawingml/2006/main">
-            <a:off x="8534400" y="2905125"/>
-            <a:ext cx="76200" cy="76200"/>
-          </a:xfrm>
-          <a:prstGeom xmlns:a="http://schemas.openxmlformats.org/drawingml/2006/main" prst="ellipse">
-            <a:avLst/>
-          </a:prstGeom>
-          <a:solidFill xmlns:a="http://schemas.openxmlformats.org/drawingml/2006/main">
-            <a:srgbClr val="D97706"/>
-          </a:solidFill>
-          <a:ln xmlns:a="http://schemas.openxmlformats.org/drawingml/2006/main" w="0">
-            <a:noFill/>
-            <a:prstDash val="solid"/>
-          </a:ln>
-        </p:spPr>
-      </p:sp>
-      <p:sp>
-        <p:nvSpPr>
-          <p:cNvPr id="8" name="">
-            <a:extLst xmlns:a="http://schemas.openxmlformats.org/drawingml/2006/main">
-              <a:ext uri="{FF2B5EF4-FFF2-40B4-BE49-F238E27FC236}">
-                <a16:creationId xmlns:a16="http://schemas.microsoft.com/office/drawing/2014/main" id="{5AADE182-F029-433F-A645-126896DFFDFD}"/>
-              </a:ext>
-            </a:extLst>
-          </p:cNvPr>
-          <p:cNvSpPr>
-            <a:spLocks xmlns:a="http://schemas.openxmlformats.org/drawingml/2006/main" noGrp="1"/>
-          </p:cNvSpPr>
-          <p:nvPr/>
-        </p:nvSpPr>
-        <p:spPr>
-          <a:xfrm xmlns:a="http://schemas.openxmlformats.org/drawingml/2006/main">
-            <a:off x="8743950" y="2819400"/>
-            <a:ext cx="2152650" cy="533400"/>
-          </a:xfrm>
-          <a:prstGeom xmlns:a="http://schemas.openxmlformats.org/drawingml/2006/main" prst="rect">
-            <a:avLst/>
-          </a:prstGeom>
-          <a:noFill xmlns:a="http://schemas.openxmlformats.org/drawingml/2006/main"/>
-          <a:ln xmlns:a="http://schemas.openxmlformats.org/drawingml/2006/main" w="0">
-            <a:noFill/>
-            <a:prstDash val="solid"/>
-          </a:ln>
-        </p:spPr>
-        <p:txBody>
-          <a:bodyPr xmlns:a="http://schemas.openxmlformats.org/drawingml/2006/main"/>
-          <a:lstStyle xmlns:a="http://schemas.openxmlformats.org/drawingml/2006/main"/>
-          <a:p xmlns:a="http://schemas.openxmlformats.org/drawingml/2006/main">
-            <a:pPr>
-              <a:defRPr sz="1125" b="0">
-                <a:solidFill>
-                  <a:srgbClr val="111827"/>
-                </a:solidFill>
-              </a:defRPr>
-            </a:pPr>
-            <a:r>
-              <a:rPr sz="1125" b="0">
-                <a:solidFill>
-                  <a:srgbClr val="111827"/>
-                </a:solidFill>
-              </a:rPr>
-              <a:t>Blue markers are entries; yellow markers are exits.</a:t>
-            </a:r>
-          </a:p>
-        </p:txBody>
-      </p:sp>
-      <p:sp>
-        <p:nvSpPr>
-          <p:cNvPr id="9" name="">
-            <a:extLst xmlns:a="http://schemas.openxmlformats.org/drawingml/2006/main">
-              <a:ext uri="{FF2B5EF4-FFF2-40B4-BE49-F238E27FC236}">
-                <a16:creationId xmlns:a16="http://schemas.microsoft.com/office/drawing/2014/main" id="{E2F121F3-A0E9-4F50-9C4C-E3136732FE8F}"/>
-              </a:ext>
-            </a:extLst>
-          </p:cNvPr>
-          <p:cNvSpPr>
-            <a:spLocks xmlns:a="http://schemas.openxmlformats.org/drawingml/2006/main" noGrp="1"/>
-          </p:cNvSpPr>
-          <p:nvPr/>
-        </p:nvSpPr>
-        <p:spPr>
-          <a:xfrm xmlns:a="http://schemas.openxmlformats.org/drawingml/2006/main">
-            <a:off x="8534400" y="3400425"/>
-            <a:ext cx="76200" cy="76200"/>
-          </a:xfrm>
-          <a:prstGeom xmlns:a="http://schemas.openxmlformats.org/drawingml/2006/main" prst="ellipse">
-            <a:avLst/>
-          </a:prstGeom>
-          <a:solidFill xmlns:a="http://schemas.openxmlformats.org/drawingml/2006/main">
-            <a:srgbClr val="D97706"/>
-          </a:solidFill>
-          <a:ln xmlns:a="http://schemas.openxmlformats.org/drawingml/2006/main" w="0">
-            <a:noFill/>
-            <a:prstDash val="solid"/>
-          </a:ln>
-        </p:spPr>
-      </p:sp>
-      <p:sp>
-        <p:nvSpPr>
-          <p:cNvPr id="10" name="">
-            <a:extLst xmlns:a="http://schemas.openxmlformats.org/drawingml/2006/main">
-              <a:ext uri="{FF2B5EF4-FFF2-40B4-BE49-F238E27FC236}">
-                <a16:creationId xmlns:a16="http://schemas.microsoft.com/office/drawing/2014/main" id="{1EA18AB2-A17F-42E3-8199-678CCBE02E13}"/>
-              </a:ext>
-            </a:extLst>
-          </p:cNvPr>
-          <p:cNvSpPr>
-            <a:spLocks xmlns:a="http://schemas.openxmlformats.org/drawingml/2006/main" noGrp="1"/>
-          </p:cNvSpPr>
-          <p:nvPr/>
-        </p:nvSpPr>
-        <p:spPr>
-          <a:xfrm xmlns:a="http://schemas.openxmlformats.org/drawingml/2006/main">
-            <a:off x="8743950" y="3314700"/>
-            <a:ext cx="2152650" cy="533400"/>
-          </a:xfrm>
-          <a:prstGeom xmlns:a="http://schemas.openxmlformats.org/drawingml/2006/main" prst="rect">
-            <a:avLst/>
-          </a:prstGeom>
-          <a:noFill xmlns:a="http://schemas.openxmlformats.org/drawingml/2006/main"/>
-          <a:ln xmlns:a="http://schemas.openxmlformats.org/drawingml/2006/main" w="0">
-            <a:noFill/>
-            <a:prstDash val="solid"/>
-          </a:ln>
-        </p:spPr>
-        <p:txBody>
-          <a:bodyPr xmlns:a="http://schemas.openxmlformats.org/drawingml/2006/main"/>
-          <a:lstStyle xmlns:a="http://schemas.openxmlformats.org/drawingml/2006/main"/>
-          <a:p xmlns:a="http://schemas.openxmlformats.org/drawingml/2006/main">
-            <a:pPr>
-              <a:defRPr sz="1125" b="0">
-                <a:solidFill>
-                  <a:srgbClr val="111827"/>
-                </a:solidFill>
-              </a:defRPr>
-            </a:pPr>
-            <a:r>
-              <a:rPr sz="1125" b="0">
-                <a:solidFill>
-                  <a:srgbClr val="111827"/>
-                </a:solidFill>
-              </a:rPr>
-              <a:t>Dashed lines trace completed or open trades.</a:t>
-            </a:r>
-          </a:p>
-        </p:txBody>
-      </p:sp>
-      <p:sp>
-        <p:nvSpPr>
-          <p:cNvPr id="11" name="">
-            <a:extLst xmlns:a="http://schemas.openxmlformats.org/drawingml/2006/main">
-              <a:ext uri="{FF2B5EF4-FFF2-40B4-BE49-F238E27FC236}">
-                <a16:creationId xmlns:a16="http://schemas.microsoft.com/office/drawing/2014/main" id="{5AA48097-B65D-4190-A1FF-66D0BAA83209}"/>
-              </a:ext>
-            </a:extLst>
-          </p:cNvPr>
-          <p:cNvSpPr>
-            <a:spLocks xmlns:a="http://schemas.openxmlformats.org/drawingml/2006/main" noGrp="1"/>
-          </p:cNvSpPr>
-          <p:nvPr/>
-        </p:nvSpPr>
-        <p:spPr>
-          <a:xfrm xmlns:a="http://schemas.openxmlformats.org/drawingml/2006/main">
-            <a:off x="8534400" y="3895725"/>
-            <a:ext cx="76200" cy="76200"/>
-          </a:xfrm>
-          <a:prstGeom xmlns:a="http://schemas.openxmlformats.org/drawingml/2006/main" prst="ellipse">
-            <a:avLst/>
-          </a:prstGeom>
-          <a:solidFill xmlns:a="http://schemas.openxmlformats.org/drawingml/2006/main">
-            <a:srgbClr val="D97706"/>
-          </a:solidFill>
-          <a:ln xmlns:a="http://schemas.openxmlformats.org/drawingml/2006/main" w="0">
-            <a:noFill/>
-            <a:prstDash val="solid"/>
-          </a:ln>
-        </p:spPr>
-      </p:sp>
-      <p:sp>
-        <p:nvSpPr>
-          <p:cNvPr id="12" name="">
-            <a:extLst xmlns:a="http://schemas.openxmlformats.org/drawingml/2006/main">
-              <a:ext uri="{FF2B5EF4-FFF2-40B4-BE49-F238E27FC236}">
-                <a16:creationId xmlns:a16="http://schemas.microsoft.com/office/drawing/2014/main" id="{8808AEC8-3A93-4578-97B3-AEFD798C2CAF}"/>
-              </a:ext>
-            </a:extLst>
-          </p:cNvPr>
-          <p:cNvSpPr>
-            <a:spLocks xmlns:a="http://schemas.openxmlformats.org/drawingml/2006/main" noGrp="1"/>
-          </p:cNvSpPr>
-          <p:nvPr/>
-        </p:nvSpPr>
-        <p:spPr>
-          <a:xfrm xmlns:a="http://schemas.openxmlformats.org/drawingml/2006/main">
-            <a:off x="8743950" y="3810000"/>
-            <a:ext cx="2152650" cy="533400"/>
-          </a:xfrm>
-          <a:prstGeom xmlns:a="http://schemas.openxmlformats.org/drawingml/2006/main" prst="rect">
-            <a:avLst/>
-          </a:prstGeom>
-          <a:noFill xmlns:a="http://schemas.openxmlformats.org/drawingml/2006/main"/>
-          <a:ln xmlns:a="http://schemas.openxmlformats.org/drawingml/2006/main" w="0">
-            <a:noFill/>
-            <a:prstDash val="solid"/>
-          </a:ln>
-        </p:spPr>
-        <p:txBody>
-          <a:bodyPr xmlns:a="http://schemas.openxmlformats.org/drawingml/2006/main"/>
-          <a:lstStyle xmlns:a="http://schemas.openxmlformats.org/drawingml/2006/main"/>
-          <a:p xmlns:a="http://schemas.openxmlformats.org/drawingml/2006/main">
-            <a:pPr>
-              <a:defRPr sz="1125" b="0">
-                <a:solidFill>
-                  <a:srgbClr val="111827"/>
-                </a:solidFill>
-              </a:defRPr>
-            </a:pPr>
-            <a:r>
-              <a:rPr sz="1125" b="0">
-                <a:solidFill>
-                  <a:srgbClr val="111827"/>
-                </a:solidFill>
-              </a:rPr>
-              <a:t>State bands often change after the trend is underway.</a:t>
-            </a:r>
-          </a:p>
-        </p:txBody>
-      </p:sp>
-      <p:sp>
-        <p:nvSpPr>
-          <p:cNvPr id="13" name="">
-            <a:extLst xmlns:a="http://schemas.openxmlformats.org/drawingml/2006/main">
-              <a:ext uri="{FF2B5EF4-FFF2-40B4-BE49-F238E27FC236}">
-                <a16:creationId xmlns:a16="http://schemas.microsoft.com/office/drawing/2014/main" id="{BAFD8EAD-356B-46D5-9303-840C642D623B}"/>
-              </a:ext>
-            </a:extLst>
-          </p:cNvPr>
-          <p:cNvSpPr>
-            <a:spLocks xmlns:a="http://schemas.openxmlformats.org/drawingml/2006/main" noGrp="1"/>
-          </p:cNvSpPr>
-          <p:nvPr/>
-        </p:nvSpPr>
-        <p:spPr>
-          <a:xfrm xmlns:a="http://schemas.openxmlformats.org/drawingml/2006/main">
-            <a:off x="8534400" y="4391025"/>
-            <a:ext cx="76200" cy="76200"/>
-          </a:xfrm>
-          <a:prstGeom xmlns:a="http://schemas.openxmlformats.org/drawingml/2006/main" prst="ellipse">
-            <a:avLst/>
-          </a:prstGeom>
-          <a:solidFill xmlns:a="http://schemas.openxmlformats.org/drawingml/2006/main">
-            <a:srgbClr val="D97706"/>
-          </a:solidFill>
-          <a:ln xmlns:a="http://schemas.openxmlformats.org/drawingml/2006/main" w="0">
-            <a:noFill/>
-            <a:prstDash val="solid"/>
-          </a:ln>
-        </p:spPr>
-      </p:sp>
-      <p:sp>
-        <p:nvSpPr>
-          <p:cNvPr id="14" name="">
-            <a:extLst xmlns:a="http://schemas.openxmlformats.org/drawingml/2006/main">
-              <a:ext uri="{FF2B5EF4-FFF2-40B4-BE49-F238E27FC236}">
-                <a16:creationId xmlns:a16="http://schemas.microsoft.com/office/drawing/2014/main" id="{66B06686-B98F-42CD-A7E4-0DF90FE4DE7D}"/>
-              </a:ext>
-            </a:extLst>
-          </p:cNvPr>
-          <p:cNvSpPr>
-            <a:spLocks xmlns:a="http://schemas.openxmlformats.org/drawingml/2006/main" noGrp="1"/>
-          </p:cNvSpPr>
-          <p:nvPr/>
-        </p:nvSpPr>
-        <p:spPr>
-          <a:xfrm xmlns:a="http://schemas.openxmlformats.org/drawingml/2006/main">
-            <a:off x="8743950" y="4305300"/>
-            <a:ext cx="2152650" cy="533400"/>
-          </a:xfrm>
-          <a:prstGeom xmlns:a="http://schemas.openxmlformats.org/drawingml/2006/main" prst="rect">
-            <a:avLst/>
-          </a:prstGeom>
-          <a:noFill xmlns:a="http://schemas.openxmlformats.org/drawingml/2006/main"/>
-          <a:ln xmlns:a="http://schemas.openxmlformats.org/drawingml/2006/main" w="0">
-            <a:noFill/>
-            <a:prstDash val="solid"/>
-          </a:ln>
-        </p:spPr>
-        <p:txBody>
-          <a:bodyPr xmlns:a="http://schemas.openxmlformats.org/drawingml/2006/main"/>
-          <a:lstStyle xmlns:a="http://schemas.openxmlformats.org/drawingml/2006/main"/>
-          <a:p xmlns:a="http://schemas.openxmlformats.org/drawingml/2006/main">
-            <a:pPr>
-              <a:defRPr sz="1125" b="0">
-                <a:solidFill>
-                  <a:srgbClr val="111827"/>
-                </a:solidFill>
-              </a:defRPr>
-            </a:pPr>
-            <a:r>
-              <a:rPr sz="1125" b="0">
-                <a:solidFill>
-                  <a:srgbClr val="111827"/>
-                </a:solidFill>
-              </a:rPr>
-              <a:t>Continuation helps, but it still misses part of the move.</a:t>
-            </a:r>
-          </a:p>
-        </p:txBody>
-      </p:sp>
-      <p:sp>
-        <p:nvSpPr>
-          <p:cNvPr id="15" name="">
-            <a:extLst xmlns:a="http://schemas.openxmlformats.org/drawingml/2006/main">
-              <a:ext uri="{FF2B5EF4-FFF2-40B4-BE49-F238E27FC236}">
-                <a16:creationId xmlns:a16="http://schemas.microsoft.com/office/drawing/2014/main" id="{6DD43B7F-4896-47BD-A452-F2C9CE6E0324}"/>
-              </a:ext>
-            </a:extLst>
-          </p:cNvPr>
-          <p:cNvSpPr>
-            <a:spLocks xmlns:a="http://schemas.openxmlformats.org/drawingml/2006/main" noGrp="1"/>
-          </p:cNvSpPr>
-          <p:nvPr/>
-        </p:nvSpPr>
-        <p:spPr>
-          <a:xfrm xmlns:a="http://schemas.openxmlformats.org/drawingml/2006/main">
-            <a:off x="1123950" y="6172200"/>
-            <a:ext cx="9334500" cy="285750"/>
-          </a:xfrm>
-          <a:prstGeom xmlns:a="http://schemas.openxmlformats.org/drawingml/2006/main" prst="rect">
-            <a:avLst/>
-          </a:prstGeom>
-          <a:noFill xmlns:a="http://schemas.openxmlformats.org/drawingml/2006/main"/>
-          <a:ln xmlns:a="http://schemas.openxmlformats.org/drawingml/2006/main" w="0">
-            <a:noFill/>
-            <a:prstDash val="solid"/>
-          </a:ln>
-        </p:spPr>
-        <p:txBody>
-          <a:bodyPr xmlns:a="http://schemas.openxmlformats.org/drawingml/2006/main"/>
-          <a:lstStyle xmlns:a="http://schemas.openxmlformats.org/drawingml/2006/main"/>
-          <a:p xmlns:a="http://schemas.openxmlformats.org/drawingml/2006/main">
-            <a:pPr algn="ctr">
-              <a:defRPr sz="1350" b="1">
-                <a:solidFill>
-                  <a:srgbClr val="111827"/>
-                </a:solidFill>
-              </a:defRPr>
-            </a:pPr>
-            <a:r>
-              <a:rPr sz="1350" b="1">
-                <a:solidFill>
-                  <a:srgbClr val="111827"/>
-                </a:solidFill>
-              </a:rPr>
-              <a:t>For exploratory POCs, include representative trade tapes whenever timing, participation, or state behavior is central.</a:t>
+              <a:defRPr sz="1350" b="0">
+                <a:solidFill>
+                  <a:srgbClr val="5B6472"/>
+                </a:solidFill>
+              </a:defRPr>
+            </a:pPr>
+            <a:r>
+              <a:rPr sz="1350" b="0">
+                <a:solidFill>
+                  <a:srgbClr val="5B6472"/>
+                </a:solidFill>
+              </a:rPr>
+              <a:t>The challenger improved participation but still lagged basket hold. That means the feature layer is probably relevant, but not sufficient by itself. The next useful tests should confirm across more windows and inspect whether entries remain late.</a:t>
             </a:r>
           </a:p>
         </p:txBody>
@@ -5090,7 +5212,7 @@
     </p:spTree>
     <p:extLst>
       <p:ext uri="{BB962C8B-B14F-4D97-AF65-F5344CB8AC3E}">
-        <p14:creationId xmlns:p14="http://schemas.microsoft.com/office/powerpoint/2010/main" val="1650519962"/>
+        <p14:creationId xmlns:p14="http://schemas.microsoft.com/office/powerpoint/2010/main" val="965577315"/>
       </p:ext>
     </p:extLst>
   </p:cSld>
@@ -5121,7 +5243,7 @@
           <p:cNvPr id="1" name="">
             <a:extLst xmlns:a="http://schemas.openxmlformats.org/drawingml/2006/main">
               <a:ext uri="{FF2B5EF4-FFF2-40B4-BE49-F238E27FC236}">
-                <a16:creationId xmlns:a16="http://schemas.microsoft.com/office/drawing/2014/main" id="{E9D326F1-D9B4-4207-863E-76E2C37C77DE}"/>
+                <a16:creationId xmlns:a16="http://schemas.microsoft.com/office/drawing/2014/main" id="{732C5EE6-88E6-4766-ADD7-B13B6C0106A0}"/>
               </a:ext>
             </a:extLst>
           </p:cNvPr>
@@ -5171,7 +5293,7 @@
           <p:cNvPr id="2" name="">
             <a:extLst xmlns:a="http://schemas.openxmlformats.org/drawingml/2006/main">
               <a:ext uri="{FF2B5EF4-FFF2-40B4-BE49-F238E27FC236}">
-                <a16:creationId xmlns:a16="http://schemas.microsoft.com/office/drawing/2014/main" id="{E586E8DD-493E-4A39-8FF3-35A16863F5FE}"/>
+                <a16:creationId xmlns:a16="http://schemas.microsoft.com/office/drawing/2014/main" id="{0C3B901B-70FC-47DE-B4FA-1C4804C98956}"/>
               </a:ext>
             </a:extLst>
           </p:cNvPr>
@@ -5211,7 +5333,7 @@
                   <a:srgbClr val="111827"/>
                 </a:solidFill>
               </a:rPr>
-              <a:t>Next Gen5.3 slice: diagnose why bullish participation is still late</a:t>
+              <a:t>Representative trade tapes show the system joined the move but did not stay with enough of it</a:t>
             </a:r>
           </a:p>
         </p:txBody>
@@ -5221,7 +5343,7 @@
           <p:cNvPr id="3" name="">
             <a:extLst xmlns:a="http://schemas.openxmlformats.org/drawingml/2006/main">
               <a:ext uri="{FF2B5EF4-FFF2-40B4-BE49-F238E27FC236}">
-                <a16:creationId xmlns:a16="http://schemas.microsoft.com/office/drawing/2014/main" id="{BDE6A1F6-684A-4614-8BB0-BB35FAB66D31}"/>
+                <a16:creationId xmlns:a16="http://schemas.microsoft.com/office/drawing/2014/main" id="{73D19A74-03D9-4357-B12E-1E6906B8DB63}"/>
               </a:ext>
             </a:extLst>
           </p:cNvPr>
@@ -5249,12 +5371,655 @@
           </a:ln>
         </p:spPr>
       </p:sp>
+      <p:pic>
+        <p:nvPicPr>
+          <p:cNvPr id="19" name=""/>
+          <p:cNvPicPr>
+            <a:picLocks xmlns:a="http://schemas.openxmlformats.org/drawingml/2006/main" noChangeAspect="1"/>
+          </p:cNvPicPr>
+          <p:nvPr/>
+        </p:nvPicPr>
+        <p:blipFill>
+          <a:blip xmlns:r="http://schemas.openxmlformats.org/officeDocument/2006/relationships" xmlns:a="http://schemas.openxmlformats.org/drawingml/2006/main" r:embed="R0444fe9b30724562"/>
+          <a:stretch xmlns:a="http://schemas.openxmlformats.org/drawingml/2006/main"/>
+        </p:blipFill>
+        <p:spPr>
+          <a:xfrm xmlns:a="http://schemas.openxmlformats.org/drawingml/2006/main">
+            <a:off x="1225717" y="1695450"/>
+            <a:ext cx="5930566" cy="4333875"/>
+          </a:xfrm>
+          <a:prstGeom xmlns:a="http://schemas.openxmlformats.org/drawingml/2006/main" prst="rect">
+            <a:avLst/>
+          </a:prstGeom>
+        </p:spPr>
+      </p:pic>
+      <p:sp>
+        <p:nvSpPr>
+          <p:cNvPr id="5" name="">
+            <a:extLst xmlns:a="http://schemas.openxmlformats.org/drawingml/2006/main">
+              <a:ext uri="{FF2B5EF4-FFF2-40B4-BE49-F238E27FC236}">
+                <a16:creationId xmlns:a16="http://schemas.microsoft.com/office/drawing/2014/main" id="{37D4FA2F-A29F-4AE8-BD5B-66B4E9644502}"/>
+              </a:ext>
+            </a:extLst>
+          </p:cNvPr>
+          <p:cNvSpPr>
+            <a:spLocks xmlns:a="http://schemas.openxmlformats.org/drawingml/2006/main" noGrp="1"/>
+          </p:cNvSpPr>
+          <p:nvPr/>
+        </p:nvSpPr>
+        <p:spPr>
+          <a:xfrm xmlns:a="http://schemas.openxmlformats.org/drawingml/2006/main">
+            <a:off x="8229600" y="1962150"/>
+            <a:ext cx="3048000" cy="3219450"/>
+          </a:xfrm>
+          <a:prstGeom xmlns:a="http://schemas.openxmlformats.org/drawingml/2006/main" prst="roundRect">
+            <a:avLst>
+              <a:gd name="adj" fmla="val 2500"/>
+            </a:avLst>
+          </a:prstGeom>
+          <a:solidFill xmlns:a="http://schemas.openxmlformats.org/drawingml/2006/main">
+            <a:srgbClr val="F8FAFC"/>
+          </a:solidFill>
+          <a:ln xmlns:a="http://schemas.openxmlformats.org/drawingml/2006/main" w="9525">
+            <a:solidFill>
+              <a:srgbClr val="D7DEE8"/>
+            </a:solidFill>
+            <a:prstDash val="solid"/>
+          </a:ln>
+        </p:spPr>
+      </p:sp>
+      <p:sp>
+        <p:nvSpPr>
+          <p:cNvPr id="6" name="">
+            <a:extLst xmlns:a="http://schemas.openxmlformats.org/drawingml/2006/main">
+              <a:ext uri="{FF2B5EF4-FFF2-40B4-BE49-F238E27FC236}">
+                <a16:creationId xmlns:a16="http://schemas.microsoft.com/office/drawing/2014/main" id="{350907CA-308C-45C8-B41E-4DD227B07FE1}"/>
+              </a:ext>
+            </a:extLst>
+          </p:cNvPr>
+          <p:cNvSpPr>
+            <a:spLocks xmlns:a="http://schemas.openxmlformats.org/drawingml/2006/main" noGrp="1"/>
+          </p:cNvSpPr>
+          <p:nvPr/>
+        </p:nvSpPr>
+        <p:spPr>
+          <a:xfrm xmlns:a="http://schemas.openxmlformats.org/drawingml/2006/main">
+            <a:off x="8515350" y="2247900"/>
+            <a:ext cx="2381250" cy="285750"/>
+          </a:xfrm>
+          <a:prstGeom xmlns:a="http://schemas.openxmlformats.org/drawingml/2006/main" prst="rect">
+            <a:avLst/>
+          </a:prstGeom>
+          <a:noFill xmlns:a="http://schemas.openxmlformats.org/drawingml/2006/main"/>
+          <a:ln xmlns:a="http://schemas.openxmlformats.org/drawingml/2006/main" w="0">
+            <a:noFill/>
+            <a:prstDash val="solid"/>
+          </a:ln>
+        </p:spPr>
+        <p:txBody>
+          <a:bodyPr xmlns:a="http://schemas.openxmlformats.org/drawingml/2006/main"/>
+          <a:lstStyle xmlns:a="http://schemas.openxmlformats.org/drawingml/2006/main"/>
+          <a:p xmlns:a="http://schemas.openxmlformats.org/drawingml/2006/main">
+            <a:pPr>
+              <a:defRPr sz="1875" b="1">
+                <a:solidFill>
+                  <a:srgbClr val="111827"/>
+                </a:solidFill>
+              </a:defRPr>
+            </a:pPr>
+            <a:r>
+              <a:rPr sz="1875" b="1">
+                <a:solidFill>
+                  <a:srgbClr val="111827"/>
+                </a:solidFill>
+              </a:rPr>
+              <a:t>What to look for</a:t>
+            </a:r>
+          </a:p>
+        </p:txBody>
+      </p:sp>
+      <p:sp>
+        <p:nvSpPr>
+          <p:cNvPr id="7" name="">
+            <a:extLst xmlns:a="http://schemas.openxmlformats.org/drawingml/2006/main">
+              <a:ext uri="{FF2B5EF4-FFF2-40B4-BE49-F238E27FC236}">
+                <a16:creationId xmlns:a16="http://schemas.microsoft.com/office/drawing/2014/main" id="{4F902605-0183-4F2C-834B-B6F0E647AEEB}"/>
+              </a:ext>
+            </a:extLst>
+          </p:cNvPr>
+          <p:cNvSpPr>
+            <a:spLocks xmlns:a="http://schemas.openxmlformats.org/drawingml/2006/main" noGrp="1"/>
+          </p:cNvSpPr>
+          <p:nvPr/>
+        </p:nvSpPr>
+        <p:spPr>
+          <a:xfrm xmlns:a="http://schemas.openxmlformats.org/drawingml/2006/main">
+            <a:off x="8534400" y="2905125"/>
+            <a:ext cx="76200" cy="76200"/>
+          </a:xfrm>
+          <a:prstGeom xmlns:a="http://schemas.openxmlformats.org/drawingml/2006/main" prst="ellipse">
+            <a:avLst/>
+          </a:prstGeom>
+          <a:solidFill xmlns:a="http://schemas.openxmlformats.org/drawingml/2006/main">
+            <a:srgbClr val="D97706"/>
+          </a:solidFill>
+          <a:ln xmlns:a="http://schemas.openxmlformats.org/drawingml/2006/main" w="0">
+            <a:noFill/>
+            <a:prstDash val="solid"/>
+          </a:ln>
+        </p:spPr>
+      </p:sp>
+      <p:sp>
+        <p:nvSpPr>
+          <p:cNvPr id="8" name="">
+            <a:extLst xmlns:a="http://schemas.openxmlformats.org/drawingml/2006/main">
+              <a:ext uri="{FF2B5EF4-FFF2-40B4-BE49-F238E27FC236}">
+                <a16:creationId xmlns:a16="http://schemas.microsoft.com/office/drawing/2014/main" id="{205D601C-AE12-4532-80FB-C4CAF5BEBB2C}"/>
+              </a:ext>
+            </a:extLst>
+          </p:cNvPr>
+          <p:cNvSpPr>
+            <a:spLocks xmlns:a="http://schemas.openxmlformats.org/drawingml/2006/main" noGrp="1"/>
+          </p:cNvSpPr>
+          <p:nvPr/>
+        </p:nvSpPr>
+        <p:spPr>
+          <a:xfrm xmlns:a="http://schemas.openxmlformats.org/drawingml/2006/main">
+            <a:off x="8743950" y="2819400"/>
+            <a:ext cx="2152650" cy="533400"/>
+          </a:xfrm>
+          <a:prstGeom xmlns:a="http://schemas.openxmlformats.org/drawingml/2006/main" prst="rect">
+            <a:avLst/>
+          </a:prstGeom>
+          <a:noFill xmlns:a="http://schemas.openxmlformats.org/drawingml/2006/main"/>
+          <a:ln xmlns:a="http://schemas.openxmlformats.org/drawingml/2006/main" w="0">
+            <a:noFill/>
+            <a:prstDash val="solid"/>
+          </a:ln>
+        </p:spPr>
+        <p:txBody>
+          <a:bodyPr xmlns:a="http://schemas.openxmlformats.org/drawingml/2006/main"/>
+          <a:lstStyle xmlns:a="http://schemas.openxmlformats.org/drawingml/2006/main"/>
+          <a:p xmlns:a="http://schemas.openxmlformats.org/drawingml/2006/main">
+            <a:pPr>
+              <a:defRPr sz="1125" b="0">
+                <a:solidFill>
+                  <a:srgbClr val="111827"/>
+                </a:solidFill>
+              </a:defRPr>
+            </a:pPr>
+            <a:r>
+              <a:rPr sz="1125" b="0">
+                <a:solidFill>
+                  <a:srgbClr val="111827"/>
+                </a:solidFill>
+              </a:rPr>
+              <a:t>Blue markers are entries; yellow markers are exits.</a:t>
+            </a:r>
+          </a:p>
+        </p:txBody>
+      </p:sp>
+      <p:sp>
+        <p:nvSpPr>
+          <p:cNvPr id="9" name="">
+            <a:extLst xmlns:a="http://schemas.openxmlformats.org/drawingml/2006/main">
+              <a:ext uri="{FF2B5EF4-FFF2-40B4-BE49-F238E27FC236}">
+                <a16:creationId xmlns:a16="http://schemas.microsoft.com/office/drawing/2014/main" id="{E4573112-D51F-4FAF-8C41-58C9A3298491}"/>
+              </a:ext>
+            </a:extLst>
+          </p:cNvPr>
+          <p:cNvSpPr>
+            <a:spLocks xmlns:a="http://schemas.openxmlformats.org/drawingml/2006/main" noGrp="1"/>
+          </p:cNvSpPr>
+          <p:nvPr/>
+        </p:nvSpPr>
+        <p:spPr>
+          <a:xfrm xmlns:a="http://schemas.openxmlformats.org/drawingml/2006/main">
+            <a:off x="8534400" y="3400425"/>
+            <a:ext cx="76200" cy="76200"/>
+          </a:xfrm>
+          <a:prstGeom xmlns:a="http://schemas.openxmlformats.org/drawingml/2006/main" prst="ellipse">
+            <a:avLst/>
+          </a:prstGeom>
+          <a:solidFill xmlns:a="http://schemas.openxmlformats.org/drawingml/2006/main">
+            <a:srgbClr val="D97706"/>
+          </a:solidFill>
+          <a:ln xmlns:a="http://schemas.openxmlformats.org/drawingml/2006/main" w="0">
+            <a:noFill/>
+            <a:prstDash val="solid"/>
+          </a:ln>
+        </p:spPr>
+      </p:sp>
+      <p:sp>
+        <p:nvSpPr>
+          <p:cNvPr id="10" name="">
+            <a:extLst xmlns:a="http://schemas.openxmlformats.org/drawingml/2006/main">
+              <a:ext uri="{FF2B5EF4-FFF2-40B4-BE49-F238E27FC236}">
+                <a16:creationId xmlns:a16="http://schemas.microsoft.com/office/drawing/2014/main" id="{A3DD61E5-EC00-4D95-BF1C-F46533AB470D}"/>
+              </a:ext>
+            </a:extLst>
+          </p:cNvPr>
+          <p:cNvSpPr>
+            <a:spLocks xmlns:a="http://schemas.openxmlformats.org/drawingml/2006/main" noGrp="1"/>
+          </p:cNvSpPr>
+          <p:nvPr/>
+        </p:nvSpPr>
+        <p:spPr>
+          <a:xfrm xmlns:a="http://schemas.openxmlformats.org/drawingml/2006/main">
+            <a:off x="8743950" y="3314700"/>
+            <a:ext cx="2152650" cy="533400"/>
+          </a:xfrm>
+          <a:prstGeom xmlns:a="http://schemas.openxmlformats.org/drawingml/2006/main" prst="rect">
+            <a:avLst/>
+          </a:prstGeom>
+          <a:noFill xmlns:a="http://schemas.openxmlformats.org/drawingml/2006/main"/>
+          <a:ln xmlns:a="http://schemas.openxmlformats.org/drawingml/2006/main" w="0">
+            <a:noFill/>
+            <a:prstDash val="solid"/>
+          </a:ln>
+        </p:spPr>
+        <p:txBody>
+          <a:bodyPr xmlns:a="http://schemas.openxmlformats.org/drawingml/2006/main"/>
+          <a:lstStyle xmlns:a="http://schemas.openxmlformats.org/drawingml/2006/main"/>
+          <a:p xmlns:a="http://schemas.openxmlformats.org/drawingml/2006/main">
+            <a:pPr>
+              <a:defRPr sz="1125" b="0">
+                <a:solidFill>
+                  <a:srgbClr val="111827"/>
+                </a:solidFill>
+              </a:defRPr>
+            </a:pPr>
+            <a:r>
+              <a:rPr sz="1125" b="0">
+                <a:solidFill>
+                  <a:srgbClr val="111827"/>
+                </a:solidFill>
+              </a:rPr>
+              <a:t>Dashed lines trace completed or open trades.</a:t>
+            </a:r>
+          </a:p>
+        </p:txBody>
+      </p:sp>
+      <p:sp>
+        <p:nvSpPr>
+          <p:cNvPr id="11" name="">
+            <a:extLst xmlns:a="http://schemas.openxmlformats.org/drawingml/2006/main">
+              <a:ext uri="{FF2B5EF4-FFF2-40B4-BE49-F238E27FC236}">
+                <a16:creationId xmlns:a16="http://schemas.microsoft.com/office/drawing/2014/main" id="{340186D2-C41E-4936-8A80-0E2BCC3B5226}"/>
+              </a:ext>
+            </a:extLst>
+          </p:cNvPr>
+          <p:cNvSpPr>
+            <a:spLocks xmlns:a="http://schemas.openxmlformats.org/drawingml/2006/main" noGrp="1"/>
+          </p:cNvSpPr>
+          <p:nvPr/>
+        </p:nvSpPr>
+        <p:spPr>
+          <a:xfrm xmlns:a="http://schemas.openxmlformats.org/drawingml/2006/main">
+            <a:off x="8534400" y="3895725"/>
+            <a:ext cx="76200" cy="76200"/>
+          </a:xfrm>
+          <a:prstGeom xmlns:a="http://schemas.openxmlformats.org/drawingml/2006/main" prst="ellipse">
+            <a:avLst/>
+          </a:prstGeom>
+          <a:solidFill xmlns:a="http://schemas.openxmlformats.org/drawingml/2006/main">
+            <a:srgbClr val="D97706"/>
+          </a:solidFill>
+          <a:ln xmlns:a="http://schemas.openxmlformats.org/drawingml/2006/main" w="0">
+            <a:noFill/>
+            <a:prstDash val="solid"/>
+          </a:ln>
+        </p:spPr>
+      </p:sp>
+      <p:sp>
+        <p:nvSpPr>
+          <p:cNvPr id="12" name="">
+            <a:extLst xmlns:a="http://schemas.openxmlformats.org/drawingml/2006/main">
+              <a:ext uri="{FF2B5EF4-FFF2-40B4-BE49-F238E27FC236}">
+                <a16:creationId xmlns:a16="http://schemas.microsoft.com/office/drawing/2014/main" id="{B3921FA1-BF0C-4972-B79B-4B15F455B26C}"/>
+              </a:ext>
+            </a:extLst>
+          </p:cNvPr>
+          <p:cNvSpPr>
+            <a:spLocks xmlns:a="http://schemas.openxmlformats.org/drawingml/2006/main" noGrp="1"/>
+          </p:cNvSpPr>
+          <p:nvPr/>
+        </p:nvSpPr>
+        <p:spPr>
+          <a:xfrm xmlns:a="http://schemas.openxmlformats.org/drawingml/2006/main">
+            <a:off x="8743950" y="3810000"/>
+            <a:ext cx="2152650" cy="533400"/>
+          </a:xfrm>
+          <a:prstGeom xmlns:a="http://schemas.openxmlformats.org/drawingml/2006/main" prst="rect">
+            <a:avLst/>
+          </a:prstGeom>
+          <a:noFill xmlns:a="http://schemas.openxmlformats.org/drawingml/2006/main"/>
+          <a:ln xmlns:a="http://schemas.openxmlformats.org/drawingml/2006/main" w="0">
+            <a:noFill/>
+            <a:prstDash val="solid"/>
+          </a:ln>
+        </p:spPr>
+        <p:txBody>
+          <a:bodyPr xmlns:a="http://schemas.openxmlformats.org/drawingml/2006/main"/>
+          <a:lstStyle xmlns:a="http://schemas.openxmlformats.org/drawingml/2006/main"/>
+          <a:p xmlns:a="http://schemas.openxmlformats.org/drawingml/2006/main">
+            <a:pPr>
+              <a:defRPr sz="1125" b="0">
+                <a:solidFill>
+                  <a:srgbClr val="111827"/>
+                </a:solidFill>
+              </a:defRPr>
+            </a:pPr>
+            <a:r>
+              <a:rPr sz="1125" b="0">
+                <a:solidFill>
+                  <a:srgbClr val="111827"/>
+                </a:solidFill>
+              </a:rPr>
+              <a:t>State bands often change after the trend is underway.</a:t>
+            </a:r>
+          </a:p>
+        </p:txBody>
+      </p:sp>
+      <p:sp>
+        <p:nvSpPr>
+          <p:cNvPr id="13" name="">
+            <a:extLst xmlns:a="http://schemas.openxmlformats.org/drawingml/2006/main">
+              <a:ext uri="{FF2B5EF4-FFF2-40B4-BE49-F238E27FC236}">
+                <a16:creationId xmlns:a16="http://schemas.microsoft.com/office/drawing/2014/main" id="{89FBF363-09CC-47E1-A076-E988B347B9FD}"/>
+              </a:ext>
+            </a:extLst>
+          </p:cNvPr>
+          <p:cNvSpPr>
+            <a:spLocks xmlns:a="http://schemas.openxmlformats.org/drawingml/2006/main" noGrp="1"/>
+          </p:cNvSpPr>
+          <p:nvPr/>
+        </p:nvSpPr>
+        <p:spPr>
+          <a:xfrm xmlns:a="http://schemas.openxmlformats.org/drawingml/2006/main">
+            <a:off x="8534400" y="4391025"/>
+            <a:ext cx="76200" cy="76200"/>
+          </a:xfrm>
+          <a:prstGeom xmlns:a="http://schemas.openxmlformats.org/drawingml/2006/main" prst="ellipse">
+            <a:avLst/>
+          </a:prstGeom>
+          <a:solidFill xmlns:a="http://schemas.openxmlformats.org/drawingml/2006/main">
+            <a:srgbClr val="D97706"/>
+          </a:solidFill>
+          <a:ln xmlns:a="http://schemas.openxmlformats.org/drawingml/2006/main" w="0">
+            <a:noFill/>
+            <a:prstDash val="solid"/>
+          </a:ln>
+        </p:spPr>
+      </p:sp>
+      <p:sp>
+        <p:nvSpPr>
+          <p:cNvPr id="14" name="">
+            <a:extLst xmlns:a="http://schemas.openxmlformats.org/drawingml/2006/main">
+              <a:ext uri="{FF2B5EF4-FFF2-40B4-BE49-F238E27FC236}">
+                <a16:creationId xmlns:a16="http://schemas.microsoft.com/office/drawing/2014/main" id="{7BD55E05-F214-43FC-8487-7A58A6C3D3FF}"/>
+              </a:ext>
+            </a:extLst>
+          </p:cNvPr>
+          <p:cNvSpPr>
+            <a:spLocks xmlns:a="http://schemas.openxmlformats.org/drawingml/2006/main" noGrp="1"/>
+          </p:cNvSpPr>
+          <p:nvPr/>
+        </p:nvSpPr>
+        <p:spPr>
+          <a:xfrm xmlns:a="http://schemas.openxmlformats.org/drawingml/2006/main">
+            <a:off x="8743950" y="4305300"/>
+            <a:ext cx="2152650" cy="533400"/>
+          </a:xfrm>
+          <a:prstGeom xmlns:a="http://schemas.openxmlformats.org/drawingml/2006/main" prst="rect">
+            <a:avLst/>
+          </a:prstGeom>
+          <a:noFill xmlns:a="http://schemas.openxmlformats.org/drawingml/2006/main"/>
+          <a:ln xmlns:a="http://schemas.openxmlformats.org/drawingml/2006/main" w="0">
+            <a:noFill/>
+            <a:prstDash val="solid"/>
+          </a:ln>
+        </p:spPr>
+        <p:txBody>
+          <a:bodyPr xmlns:a="http://schemas.openxmlformats.org/drawingml/2006/main"/>
+          <a:lstStyle xmlns:a="http://schemas.openxmlformats.org/drawingml/2006/main"/>
+          <a:p xmlns:a="http://schemas.openxmlformats.org/drawingml/2006/main">
+            <a:pPr>
+              <a:defRPr sz="1125" b="0">
+                <a:solidFill>
+                  <a:srgbClr val="111827"/>
+                </a:solidFill>
+              </a:defRPr>
+            </a:pPr>
+            <a:r>
+              <a:rPr sz="1125" b="0">
+                <a:solidFill>
+                  <a:srgbClr val="111827"/>
+                </a:solidFill>
+              </a:rPr>
+              <a:t>Continuation helps, but it still misses part of the move.</a:t>
+            </a:r>
+          </a:p>
+        </p:txBody>
+      </p:sp>
+      <p:sp>
+        <p:nvSpPr>
+          <p:cNvPr id="15" name="">
+            <a:extLst xmlns:a="http://schemas.openxmlformats.org/drawingml/2006/main">
+              <a:ext uri="{FF2B5EF4-FFF2-40B4-BE49-F238E27FC236}">
+                <a16:creationId xmlns:a16="http://schemas.microsoft.com/office/drawing/2014/main" id="{E476B717-42B7-4DC3-9D7A-A0F0F883C644}"/>
+              </a:ext>
+            </a:extLst>
+          </p:cNvPr>
+          <p:cNvSpPr>
+            <a:spLocks xmlns:a="http://schemas.openxmlformats.org/drawingml/2006/main" noGrp="1"/>
+          </p:cNvSpPr>
+          <p:nvPr/>
+        </p:nvSpPr>
+        <p:spPr>
+          <a:xfrm xmlns:a="http://schemas.openxmlformats.org/drawingml/2006/main">
+            <a:off x="1123950" y="6172200"/>
+            <a:ext cx="9334500" cy="285750"/>
+          </a:xfrm>
+          <a:prstGeom xmlns:a="http://schemas.openxmlformats.org/drawingml/2006/main" prst="rect">
+            <a:avLst/>
+          </a:prstGeom>
+          <a:noFill xmlns:a="http://schemas.openxmlformats.org/drawingml/2006/main"/>
+          <a:ln xmlns:a="http://schemas.openxmlformats.org/drawingml/2006/main" w="0">
+            <a:noFill/>
+            <a:prstDash val="solid"/>
+          </a:ln>
+        </p:spPr>
+        <p:txBody>
+          <a:bodyPr xmlns:a="http://schemas.openxmlformats.org/drawingml/2006/main"/>
+          <a:lstStyle xmlns:a="http://schemas.openxmlformats.org/drawingml/2006/main"/>
+          <a:p xmlns:a="http://schemas.openxmlformats.org/drawingml/2006/main">
+            <a:pPr algn="ctr">
+              <a:defRPr sz="1350" b="1">
+                <a:solidFill>
+                  <a:srgbClr val="111827"/>
+                </a:solidFill>
+              </a:defRPr>
+            </a:pPr>
+            <a:r>
+              <a:rPr sz="1350" b="1">
+                <a:solidFill>
+                  <a:srgbClr val="111827"/>
+                </a:solidFill>
+              </a:rPr>
+              <a:t>For exploratory POCs, include representative trade tapes whenever timing, participation, or state behavior is central.</a:t>
+            </a:r>
+          </a:p>
+        </p:txBody>
+      </p:sp>
+    </p:spTree>
+    <p:extLst>
+      <p:ext uri="{BB962C8B-B14F-4D97-AF65-F5344CB8AC3E}">
+        <p14:creationId xmlns:p14="http://schemas.microsoft.com/office/powerpoint/2010/main" val="2052136155"/>
+      </p:ext>
+    </p:extLst>
+  </p:cSld>
+</p:sld>
+</file>
+
+<file path=ppt/slides/slide15.xml><?xml version="1.0" encoding="utf-8"?>
+<p:sld xmlns:p="http://schemas.openxmlformats.org/presentationml/2006/main">
+  <p:cSld>
+    <p:bg>
+      <p:bgPr>
+        <a:solidFill xmlns:a="http://schemas.openxmlformats.org/drawingml/2006/main">
+          <a:srgbClr val="FFFFFF"/>
+        </a:solidFill>
+      </p:bgPr>
+    </p:bg>
+    <p:spTree>
+      <p:nvGrpSpPr>
+        <p:cNvPr id="1" name=""/>
+        <p:cNvGrpSpPr/>
+        <p:nvPr/>
+      </p:nvGrpSpPr>
+      <p:grpSpPr>
+        <a:xfrm xmlns:a="http://schemas.openxmlformats.org/drawingml/2006/main"/>
+      </p:grpSpPr>
+      <p:sp>
+        <p:nvSpPr>
+          <p:cNvPr id="1" name="">
+            <a:extLst xmlns:a="http://schemas.openxmlformats.org/drawingml/2006/main">
+              <a:ext uri="{FF2B5EF4-FFF2-40B4-BE49-F238E27FC236}">
+                <a16:creationId xmlns:a16="http://schemas.microsoft.com/office/drawing/2014/main" id="{53171E73-6F40-4BDD-AB92-8018F683939D}"/>
+              </a:ext>
+            </a:extLst>
+          </p:cNvPr>
+          <p:cNvSpPr>
+            <a:spLocks xmlns:a="http://schemas.openxmlformats.org/drawingml/2006/main" noGrp="1"/>
+          </p:cNvSpPr>
+          <p:nvPr/>
+        </p:nvSpPr>
+        <p:spPr>
+          <a:xfrm xmlns:a="http://schemas.openxmlformats.org/drawingml/2006/main">
+            <a:off x="609600" y="304800"/>
+            <a:ext cx="5334000" cy="209550"/>
+          </a:xfrm>
+          <a:prstGeom xmlns:a="http://schemas.openxmlformats.org/drawingml/2006/main" prst="rect">
+            <a:avLst/>
+          </a:prstGeom>
+          <a:noFill xmlns:a="http://schemas.openxmlformats.org/drawingml/2006/main"/>
+          <a:ln xmlns:a="http://schemas.openxmlformats.org/drawingml/2006/main" w="0">
+            <a:noFill/>
+            <a:prstDash val="solid"/>
+          </a:ln>
+        </p:spPr>
+        <p:txBody>
+          <a:bodyPr xmlns:a="http://schemas.openxmlformats.org/drawingml/2006/main"/>
+          <a:lstStyle xmlns:a="http://schemas.openxmlformats.org/drawingml/2006/main"/>
+          <a:p xmlns:a="http://schemas.openxmlformats.org/drawingml/2006/main">
+            <a:pPr>
+              <a:defRPr sz="975" b="1">
+                <a:solidFill>
+                  <a:srgbClr val="2563EB"/>
+                </a:solidFill>
+              </a:defRPr>
+            </a:pPr>
+            <a:r>
+              <a:rPr sz="975" b="1">
+                <a:solidFill>
+                  <a:srgbClr val="2563EB"/>
+                </a:solidFill>
+              </a:rPr>
+              <a:t>GEN5.3 PCA RESEARCH PIVOT</a:t>
+            </a:r>
+          </a:p>
+        </p:txBody>
+      </p:sp>
+      <p:sp>
+        <p:nvSpPr>
+          <p:cNvPr id="2" name="">
+            <a:extLst xmlns:a="http://schemas.openxmlformats.org/drawingml/2006/main">
+              <a:ext uri="{FF2B5EF4-FFF2-40B4-BE49-F238E27FC236}">
+                <a16:creationId xmlns:a16="http://schemas.microsoft.com/office/drawing/2014/main" id="{4FAC35D6-D72C-4723-A5D5-FF8209EA6CB4}"/>
+              </a:ext>
+            </a:extLst>
+          </p:cNvPr>
+          <p:cNvSpPr>
+            <a:spLocks xmlns:a="http://schemas.openxmlformats.org/drawingml/2006/main" noGrp="1"/>
+          </p:cNvSpPr>
+          <p:nvPr/>
+        </p:nvSpPr>
+        <p:spPr>
+          <a:xfrm xmlns:a="http://schemas.openxmlformats.org/drawingml/2006/main">
+            <a:off x="609600" y="647700"/>
+            <a:ext cx="9334500" cy="876300"/>
+          </a:xfrm>
+          <a:prstGeom xmlns:a="http://schemas.openxmlformats.org/drawingml/2006/main" prst="rect">
+            <a:avLst/>
+          </a:prstGeom>
+          <a:noFill xmlns:a="http://schemas.openxmlformats.org/drawingml/2006/main"/>
+          <a:ln xmlns:a="http://schemas.openxmlformats.org/drawingml/2006/main" w="0">
+            <a:noFill/>
+            <a:prstDash val="solid"/>
+          </a:ln>
+        </p:spPr>
+        <p:txBody>
+          <a:bodyPr xmlns:a="http://schemas.openxmlformats.org/drawingml/2006/main"/>
+          <a:lstStyle xmlns:a="http://schemas.openxmlformats.org/drawingml/2006/main"/>
+          <a:p xmlns:a="http://schemas.openxmlformats.org/drawingml/2006/main">
+            <a:pPr>
+              <a:defRPr sz="2775" b="1">
+                <a:solidFill>
+                  <a:srgbClr val="111827"/>
+                </a:solidFill>
+              </a:defRPr>
+            </a:pPr>
+            <a:r>
+              <a:rPr sz="2775" b="1">
+                <a:solidFill>
+                  <a:srgbClr val="111827"/>
+                </a:solidFill>
+              </a:rPr>
+              <a:t>Next Gen5.3 slice: confirm the feature signal before widening the grid</a:t>
+            </a:r>
+          </a:p>
+        </p:txBody>
+      </p:sp>
+      <p:sp>
+        <p:nvSpPr>
+          <p:cNvPr id="3" name="">
+            <a:extLst xmlns:a="http://schemas.openxmlformats.org/drawingml/2006/main">
+              <a:ext uri="{FF2B5EF4-FFF2-40B4-BE49-F238E27FC236}">
+                <a16:creationId xmlns:a16="http://schemas.microsoft.com/office/drawing/2014/main" id="{2FC65A3E-AE32-4833-BC76-85DB00FF5EFF}"/>
+              </a:ext>
+            </a:extLst>
+          </p:cNvPr>
+          <p:cNvSpPr>
+            <a:spLocks xmlns:a="http://schemas.openxmlformats.org/drawingml/2006/main" noGrp="1"/>
+          </p:cNvSpPr>
+          <p:nvPr/>
+        </p:nvSpPr>
+        <p:spPr>
+          <a:xfrm xmlns:a="http://schemas.openxmlformats.org/drawingml/2006/main">
+            <a:off x="609600" y="1485900"/>
+            <a:ext cx="10572750" cy="9525"/>
+          </a:xfrm>
+          <a:prstGeom xmlns:a="http://schemas.openxmlformats.org/drawingml/2006/main" prst="rect">
+            <a:avLst/>
+          </a:prstGeom>
+          <a:solidFill xmlns:a="http://schemas.openxmlformats.org/drawingml/2006/main">
+            <a:srgbClr val="CBD3DD"/>
+          </a:solidFill>
+          <a:ln xmlns:a="http://schemas.openxmlformats.org/drawingml/2006/main" w="0">
+            <a:solidFill>
+              <a:srgbClr val="CBD3DD"/>
+            </a:solidFill>
+            <a:prstDash val="solid"/>
+          </a:ln>
+        </p:spPr>
+      </p:sp>
       <p:sp>
         <p:nvSpPr>
           <p:cNvPr id="4" name="">
             <a:extLst xmlns:a="http://schemas.openxmlformats.org/drawingml/2006/main">
               <a:ext uri="{FF2B5EF4-FFF2-40B4-BE49-F238E27FC236}">
-                <a16:creationId xmlns:a16="http://schemas.microsoft.com/office/drawing/2014/main" id="{57B8F3AF-64F1-46D3-A0CA-3FD974AB7344}"/>
+                <a16:creationId xmlns:a16="http://schemas.microsoft.com/office/drawing/2014/main" id="{5FE14686-35AE-4D7A-9AE8-AB5FF16CE42D}"/>
               </a:ext>
             </a:extLst>
           </p:cNvPr>
@@ -5289,7 +6054,7 @@
           <p:cNvPr id="5" name="">
             <a:extLst xmlns:a="http://schemas.openxmlformats.org/drawingml/2006/main">
               <a:ext uri="{FF2B5EF4-FFF2-40B4-BE49-F238E27FC236}">
-                <a16:creationId xmlns:a16="http://schemas.microsoft.com/office/drawing/2014/main" id="{317C030A-04F8-408F-95EF-82ED9D7E500D}"/>
+                <a16:creationId xmlns:a16="http://schemas.microsoft.com/office/drawing/2014/main" id="{9F14E774-11E4-4E4C-85C5-214FE76B5C96}"/>
               </a:ext>
             </a:extLst>
           </p:cNvPr>
@@ -5339,7 +6104,7 @@
           <p:cNvPr id="6" name="">
             <a:extLst xmlns:a="http://schemas.openxmlformats.org/drawingml/2006/main">
               <a:ext uri="{FF2B5EF4-FFF2-40B4-BE49-F238E27FC236}">
-                <a16:creationId xmlns:a16="http://schemas.microsoft.com/office/drawing/2014/main" id="{ECF7FC39-3F15-44B2-BCB2-FE01A3B6A889}"/>
+                <a16:creationId xmlns:a16="http://schemas.microsoft.com/office/drawing/2014/main" id="{04360AA9-C523-4454-B0B6-DF95133F9ECA}"/>
               </a:ext>
             </a:extLst>
           </p:cNvPr>
@@ -5379,7 +6144,7 @@
                   <a:srgbClr val="111827"/>
                 </a:solidFill>
               </a:rPr>
-              <a:t>Do improved momentum-participation features make PCA states enter and stay long earlier during obvious high-beta upside without surrendering the 2022 drawdown protection?</a:t>
+              <a:t>The first challenger moved in the right direction, but it still did not beat the high-beta basket hold. The next question is whether that improvement survives more windows and whether the trade tapes show earlier participation.</a:t>
             </a:r>
           </a:p>
         </p:txBody>
@@ -5389,7 +6154,7 @@
           <p:cNvPr id="7" name="">
             <a:extLst xmlns:a="http://schemas.openxmlformats.org/drawingml/2006/main">
               <a:ext uri="{FF2B5EF4-FFF2-40B4-BE49-F238E27FC236}">
-                <a16:creationId xmlns:a16="http://schemas.microsoft.com/office/drawing/2014/main" id="{5C8E5DA0-6873-4B17-A0BF-90BB939B6F5A}"/>
+                <a16:creationId xmlns:a16="http://schemas.microsoft.com/office/drawing/2014/main" id="{2A3FED1C-00E3-4318-8B02-8395C887F474}"/>
               </a:ext>
             </a:extLst>
           </p:cNvPr>
@@ -5420,7 +6185,7 @@
           <p:cNvPr id="8" name="">
             <a:extLst xmlns:a="http://schemas.openxmlformats.org/drawingml/2006/main">
               <a:ext uri="{FF2B5EF4-FFF2-40B4-BE49-F238E27FC236}">
-                <a16:creationId xmlns:a16="http://schemas.microsoft.com/office/drawing/2014/main" id="{B37FD213-C355-4854-A17A-A5C78F4DA9DB}"/>
+                <a16:creationId xmlns:a16="http://schemas.microsoft.com/office/drawing/2014/main" id="{F8763E26-C7DB-43C7-8371-3776D9B6C9A5}"/>
               </a:ext>
             </a:extLst>
           </p:cNvPr>
@@ -5460,7 +6225,7 @@
                   <a:srgbClr val="111827"/>
                 </a:solidFill>
               </a:rPr>
-              <a:t>Keep the same basket, context, 3x3 PCA, pooled-family policy, and benchmark.</a:t>
+              <a:t>Keep momentum plus stress as the leading feature challenger.</a:t>
             </a:r>
           </a:p>
         </p:txBody>
@@ -5470,7 +6235,7 @@
           <p:cNvPr id="9" name="">
             <a:extLst xmlns:a="http://schemas.openxmlformats.org/drawingml/2006/main">
               <a:ext uri="{FF2B5EF4-FFF2-40B4-BE49-F238E27FC236}">
-                <a16:creationId xmlns:a16="http://schemas.microsoft.com/office/drawing/2014/main" id="{E4577EBD-2667-4D29-B856-7E5E5BAA003D}"/>
+                <a16:creationId xmlns:a16="http://schemas.microsoft.com/office/drawing/2014/main" id="{04E89539-F665-48FF-B7E2-59314EC81546}"/>
               </a:ext>
             </a:extLst>
           </p:cNvPr>
@@ -5501,7 +6266,7 @@
           <p:cNvPr id="10" name="">
             <a:extLst xmlns:a="http://schemas.openxmlformats.org/drawingml/2006/main">
               <a:ext uri="{FF2B5EF4-FFF2-40B4-BE49-F238E27FC236}">
-                <a16:creationId xmlns:a16="http://schemas.microsoft.com/office/drawing/2014/main" id="{6CC0C929-6633-4EFC-B8C9-DF9F3A52FDBA}"/>
+                <a16:creationId xmlns:a16="http://schemas.microsoft.com/office/drawing/2014/main" id="{D49FE827-16F8-450E-8182-16DBA845DE34}"/>
               </a:ext>
             </a:extLst>
           </p:cNvPr>
@@ -5541,7 +6306,7 @@
                   <a:srgbClr val="111827"/>
                 </a:solidFill>
               </a:rPr>
-              <a:t>Add one compact feature-set challenger focused on trend slope, relative strength, and drawdown recovery.</a:t>
+              <a:t>Add several adjacent and non-adjacent high-beta windows before changing strategy parameters.</a:t>
             </a:r>
           </a:p>
         </p:txBody>
@@ -5551,7 +6316,7 @@
           <p:cNvPr id="11" name="">
             <a:extLst xmlns:a="http://schemas.openxmlformats.org/drawingml/2006/main">
               <a:ext uri="{FF2B5EF4-FFF2-40B4-BE49-F238E27FC236}">
-                <a16:creationId xmlns:a16="http://schemas.microsoft.com/office/drawing/2014/main" id="{219500A9-8E13-4A10-BBE6-CFD3075DF204}"/>
+                <a16:creationId xmlns:a16="http://schemas.microsoft.com/office/drawing/2014/main" id="{28CF78BD-26C0-4F70-84C1-120BDA53945A}"/>
               </a:ext>
             </a:extLst>
           </p:cNvPr>
@@ -5582,7 +6347,7 @@
           <p:cNvPr id="12" name="">
             <a:extLst xmlns:a="http://schemas.openxmlformats.org/drawingml/2006/main">
               <a:ext uri="{FF2B5EF4-FFF2-40B4-BE49-F238E27FC236}">
-                <a16:creationId xmlns:a16="http://schemas.microsoft.com/office/drawing/2014/main" id="{8E387EF0-2676-4A3B-A928-10F85ECDCE96}"/>
+                <a16:creationId xmlns:a16="http://schemas.microsoft.com/office/drawing/2014/main" id="{4B1E6E1F-58D8-4565-B775-C6933CC1885A}"/>
               </a:ext>
             </a:extLst>
           </p:cNvPr>
@@ -5622,7 +6387,7 @@
                   <a:srgbClr val="111827"/>
                 </a:solidFill>
               </a:rPr>
-              <a:t>Run 2020Q3 and 2022Q1 first; expand windows only if the behavior changes mechanically.</a:t>
+              <a:t>Use representative trade tapes to verify whether entries actually move earlier.</a:t>
             </a:r>
           </a:p>
         </p:txBody>
@@ -5632,7 +6397,7 @@
           <p:cNvPr id="13" name="">
             <a:extLst xmlns:a="http://schemas.openxmlformats.org/drawingml/2006/main">
               <a:ext uri="{FF2B5EF4-FFF2-40B4-BE49-F238E27FC236}">
-                <a16:creationId xmlns:a16="http://schemas.microsoft.com/office/drawing/2014/main" id="{396D3758-C954-4F19-8CF1-5186036AA24D}"/>
+                <a16:creationId xmlns:a16="http://schemas.microsoft.com/office/drawing/2014/main" id="{8CF518AA-2725-421E-9317-8D90D4DBE41F}"/>
               </a:ext>
             </a:extLst>
           </p:cNvPr>
@@ -5672,7 +6437,7 @@
                   <a:srgbClr val="111827"/>
                 </a:solidFill>
               </a:rPr>
-              <a:t>Compute note: full Gen4 daily-default breadth is expensive enough that feature engineering should start with compact grids, then confirm with full breadth after the mechanism is visible.</a:t>
+              <a:t>A wider strategy grid is still a later confirmation tool. Right now the higher-signal question is whether the state features consistently improve timing.</a:t>
             </a:r>
           </a:p>
         </p:txBody>
@@ -5680,7 +6445,7 @@
     </p:spTree>
     <p:extLst>
       <p:ext uri="{BB962C8B-B14F-4D97-AF65-F5344CB8AC3E}">
-        <p14:creationId xmlns:p14="http://schemas.microsoft.com/office/powerpoint/2010/main" val="1263480480"/>
+        <p14:creationId xmlns:p14="http://schemas.microsoft.com/office/powerpoint/2010/main" val="1001485552"/>
       </p:ext>
     </p:extLst>
   </p:cSld>
@@ -5711,7 +6476,7 @@
           <p:cNvPr id="1" name="">
             <a:extLst xmlns:a="http://schemas.openxmlformats.org/drawingml/2006/main">
               <a:ext uri="{FF2B5EF4-FFF2-40B4-BE49-F238E27FC236}">
-                <a16:creationId xmlns:a16="http://schemas.microsoft.com/office/drawing/2014/main" id="{59E0DA4E-2A5A-4143-864B-B03F49131AB2}"/>
+                <a16:creationId xmlns:a16="http://schemas.microsoft.com/office/drawing/2014/main" id="{328FF8E6-D83B-4405-A555-B98A546ABB54}"/>
               </a:ext>
             </a:extLst>
           </p:cNvPr>
@@ -5761,7 +6526,7 @@
           <p:cNvPr id="2" name="">
             <a:extLst xmlns:a="http://schemas.openxmlformats.org/drawingml/2006/main">
               <a:ext uri="{FF2B5EF4-FFF2-40B4-BE49-F238E27FC236}">
-                <a16:creationId xmlns:a16="http://schemas.microsoft.com/office/drawing/2014/main" id="{2016C719-33F5-4D52-AC8F-C6944F85301E}"/>
+                <a16:creationId xmlns:a16="http://schemas.microsoft.com/office/drawing/2014/main" id="{5E1365D7-F409-4531-A096-D14E1A1AD074}"/>
               </a:ext>
             </a:extLst>
           </p:cNvPr>
@@ -5811,7 +6576,7 @@
           <p:cNvPr id="3" name="">
             <a:extLst xmlns:a="http://schemas.openxmlformats.org/drawingml/2006/main">
               <a:ext uri="{FF2B5EF4-FFF2-40B4-BE49-F238E27FC236}">
-                <a16:creationId xmlns:a16="http://schemas.microsoft.com/office/drawing/2014/main" id="{E2890007-8DFB-425F-9AD4-6388B895E510}"/>
+                <a16:creationId xmlns:a16="http://schemas.microsoft.com/office/drawing/2014/main" id="{EFC11BF5-9506-4BFC-A0D3-F891091B86FF}"/>
               </a:ext>
             </a:extLst>
           </p:cNvPr>
@@ -5844,7 +6609,7 @@
           <p:cNvPr id="4" name="">
             <a:extLst xmlns:a="http://schemas.openxmlformats.org/drawingml/2006/main">
               <a:ext uri="{FF2B5EF4-FFF2-40B4-BE49-F238E27FC236}">
-                <a16:creationId xmlns:a16="http://schemas.microsoft.com/office/drawing/2014/main" id="{5ABA1610-68D6-4C50-9EF4-C88C358A56DE}"/>
+                <a16:creationId xmlns:a16="http://schemas.microsoft.com/office/drawing/2014/main" id="{23CBCC1E-2FB6-4BAF-8CA6-32B4034A528C}"/>
               </a:ext>
             </a:extLst>
           </p:cNvPr>
@@ -5879,7 +6644,7 @@
           <p:cNvPr id="5" name="">
             <a:extLst xmlns:a="http://schemas.openxmlformats.org/drawingml/2006/main">
               <a:ext uri="{FF2B5EF4-FFF2-40B4-BE49-F238E27FC236}">
-                <a16:creationId xmlns:a16="http://schemas.microsoft.com/office/drawing/2014/main" id="{0EEA3DCB-A856-4051-A366-AAA135A0628F}"/>
+                <a16:creationId xmlns:a16="http://schemas.microsoft.com/office/drawing/2014/main" id="{0C2684B6-2253-425B-A88E-BEA6E1E58188}"/>
               </a:ext>
             </a:extLst>
           </p:cNvPr>
@@ -5929,7 +6694,7 @@
           <p:cNvPr id="6" name="">
             <a:extLst xmlns:a="http://schemas.openxmlformats.org/drawingml/2006/main">
               <a:ext uri="{FF2B5EF4-FFF2-40B4-BE49-F238E27FC236}">
-                <a16:creationId xmlns:a16="http://schemas.microsoft.com/office/drawing/2014/main" id="{C93D0F24-3378-4D19-B9AE-719315278D4C}"/>
+                <a16:creationId xmlns:a16="http://schemas.microsoft.com/office/drawing/2014/main" id="{5BD07B27-8C0D-454F-9305-18BF295904EA}"/>
               </a:ext>
             </a:extLst>
           </p:cNvPr>
@@ -5960,7 +6725,7 @@
           <p:cNvPr id="7" name="">
             <a:extLst xmlns:a="http://schemas.openxmlformats.org/drawingml/2006/main">
               <a:ext uri="{FF2B5EF4-FFF2-40B4-BE49-F238E27FC236}">
-                <a16:creationId xmlns:a16="http://schemas.microsoft.com/office/drawing/2014/main" id="{EFE09788-8B43-45DA-9447-E84EFA2BAA81}"/>
+                <a16:creationId xmlns:a16="http://schemas.microsoft.com/office/drawing/2014/main" id="{6AC0D855-EA92-4A53-A23E-D0AE47EE410B}"/>
               </a:ext>
             </a:extLst>
           </p:cNvPr>
@@ -6010,7 +6775,7 @@
           <p:cNvPr id="8" name="">
             <a:extLst xmlns:a="http://schemas.openxmlformats.org/drawingml/2006/main">
               <a:ext uri="{FF2B5EF4-FFF2-40B4-BE49-F238E27FC236}">
-                <a16:creationId xmlns:a16="http://schemas.microsoft.com/office/drawing/2014/main" id="{B1AC6FB2-956C-4731-9471-12E60065B91E}"/>
+                <a16:creationId xmlns:a16="http://schemas.microsoft.com/office/drawing/2014/main" id="{E7AE89B0-6763-411A-962D-DAC9B1DD35DC}"/>
               </a:ext>
             </a:extLst>
           </p:cNvPr>
@@ -6041,7 +6806,7 @@
           <p:cNvPr id="9" name="">
             <a:extLst xmlns:a="http://schemas.openxmlformats.org/drawingml/2006/main">
               <a:ext uri="{FF2B5EF4-FFF2-40B4-BE49-F238E27FC236}">
-                <a16:creationId xmlns:a16="http://schemas.microsoft.com/office/drawing/2014/main" id="{7D828120-AF67-4780-A9AF-A7E11FC0999A}"/>
+                <a16:creationId xmlns:a16="http://schemas.microsoft.com/office/drawing/2014/main" id="{D1282CFA-05F3-4C2E-9DA1-20955CE056C7}"/>
               </a:ext>
             </a:extLst>
           </p:cNvPr>
@@ -6091,7 +6856,7 @@
           <p:cNvPr id="10" name="">
             <a:extLst xmlns:a="http://schemas.openxmlformats.org/drawingml/2006/main">
               <a:ext uri="{FF2B5EF4-FFF2-40B4-BE49-F238E27FC236}">
-                <a16:creationId xmlns:a16="http://schemas.microsoft.com/office/drawing/2014/main" id="{A56DA876-E51D-4279-8969-A49082AFF13E}"/>
+                <a16:creationId xmlns:a16="http://schemas.microsoft.com/office/drawing/2014/main" id="{9111C6D0-2A2C-4903-85DF-930E225AC291}"/>
               </a:ext>
             </a:extLst>
           </p:cNvPr>
@@ -6122,7 +6887,7 @@
           <p:cNvPr id="11" name="">
             <a:extLst xmlns:a="http://schemas.openxmlformats.org/drawingml/2006/main">
               <a:ext uri="{FF2B5EF4-FFF2-40B4-BE49-F238E27FC236}">
-                <a16:creationId xmlns:a16="http://schemas.microsoft.com/office/drawing/2014/main" id="{4F59F405-447C-4137-A4F6-40F6FAC939FE}"/>
+                <a16:creationId xmlns:a16="http://schemas.microsoft.com/office/drawing/2014/main" id="{2A83B4D2-EA5F-4533-9C7D-2019757ACDB3}"/>
               </a:ext>
             </a:extLst>
           </p:cNvPr>
@@ -6172,7 +6937,7 @@
           <p:cNvPr id="12" name="">
             <a:extLst xmlns:a="http://schemas.openxmlformats.org/drawingml/2006/main">
               <a:ext uri="{FF2B5EF4-FFF2-40B4-BE49-F238E27FC236}">
-                <a16:creationId xmlns:a16="http://schemas.microsoft.com/office/drawing/2014/main" id="{13D0AB8F-742D-4654-967C-B4620E0654D5}"/>
+                <a16:creationId xmlns:a16="http://schemas.microsoft.com/office/drawing/2014/main" id="{D9D07C88-A9CE-4AC0-B67D-5DDE26961BE1}"/>
               </a:ext>
             </a:extLst>
           </p:cNvPr>
@@ -6203,7 +6968,7 @@
           <p:cNvPr id="13" name="">
             <a:extLst xmlns:a="http://schemas.openxmlformats.org/drawingml/2006/main">
               <a:ext uri="{FF2B5EF4-FFF2-40B4-BE49-F238E27FC236}">
-                <a16:creationId xmlns:a16="http://schemas.microsoft.com/office/drawing/2014/main" id="{DDCD89D2-AD27-416D-A2B3-3A6A7FA8C79B}"/>
+                <a16:creationId xmlns:a16="http://schemas.microsoft.com/office/drawing/2014/main" id="{D29849F8-E7D0-4D3B-A3C8-426F9F9F6CE7}"/>
               </a:ext>
             </a:extLst>
           </p:cNvPr>
@@ -6253,7 +7018,7 @@
           <p:cNvPr id="14" name="">
             <a:extLst xmlns:a="http://schemas.openxmlformats.org/drawingml/2006/main">
               <a:ext uri="{FF2B5EF4-FFF2-40B4-BE49-F238E27FC236}">
-                <a16:creationId xmlns:a16="http://schemas.microsoft.com/office/drawing/2014/main" id="{9C4922AE-E2D4-4938-9335-1F5BCAE26AC8}"/>
+                <a16:creationId xmlns:a16="http://schemas.microsoft.com/office/drawing/2014/main" id="{EB70C62B-ED73-4B23-8FE7-01ADD6864356}"/>
               </a:ext>
             </a:extLst>
           </p:cNvPr>
@@ -6284,7 +7049,7 @@
           <p:cNvPr id="15" name="">
             <a:extLst xmlns:a="http://schemas.openxmlformats.org/drawingml/2006/main">
               <a:ext uri="{FF2B5EF4-FFF2-40B4-BE49-F238E27FC236}">
-                <a16:creationId xmlns:a16="http://schemas.microsoft.com/office/drawing/2014/main" id="{A1541E48-17B3-4FF5-92B1-761A069F099B}"/>
+                <a16:creationId xmlns:a16="http://schemas.microsoft.com/office/drawing/2014/main" id="{BC76EB12-5333-4389-AD33-E14A04D35874}"/>
               </a:ext>
             </a:extLst>
           </p:cNvPr>
@@ -6334,7 +7099,7 @@
           <p:cNvPr id="16" name="">
             <a:extLst xmlns:a="http://schemas.openxmlformats.org/drawingml/2006/main">
               <a:ext uri="{FF2B5EF4-FFF2-40B4-BE49-F238E27FC236}">
-                <a16:creationId xmlns:a16="http://schemas.microsoft.com/office/drawing/2014/main" id="{D646A760-138C-4EF3-8895-26483272AB30}"/>
+                <a16:creationId xmlns:a16="http://schemas.microsoft.com/office/drawing/2014/main" id="{C7BD721F-4884-41ED-932D-22326F78C2DF}"/>
               </a:ext>
             </a:extLst>
           </p:cNvPr>
@@ -6369,7 +7134,7 @@
           <p:cNvPr id="17" name="">
             <a:extLst xmlns:a="http://schemas.openxmlformats.org/drawingml/2006/main">
               <a:ext uri="{FF2B5EF4-FFF2-40B4-BE49-F238E27FC236}">
-                <a16:creationId xmlns:a16="http://schemas.microsoft.com/office/drawing/2014/main" id="{1CEAA359-9E00-4943-93DF-E4C38F3A51B9}"/>
+                <a16:creationId xmlns:a16="http://schemas.microsoft.com/office/drawing/2014/main" id="{36FF9AFC-9A22-4808-B60D-DF254FC7A2DA}"/>
               </a:ext>
             </a:extLst>
           </p:cNvPr>
@@ -6419,7 +7184,7 @@
           <p:cNvPr id="18" name="">
             <a:extLst xmlns:a="http://schemas.openxmlformats.org/drawingml/2006/main">
               <a:ext uri="{FF2B5EF4-FFF2-40B4-BE49-F238E27FC236}">
-                <a16:creationId xmlns:a16="http://schemas.microsoft.com/office/drawing/2014/main" id="{22CF6CA0-327E-4846-9924-D5A71EC4241A}"/>
+                <a16:creationId xmlns:a16="http://schemas.microsoft.com/office/drawing/2014/main" id="{A8310CD2-55B2-4616-9518-9DE090A0089B}"/>
               </a:ext>
             </a:extLst>
           </p:cNvPr>
@@ -6450,7 +7215,7 @@
           <p:cNvPr id="19" name="">
             <a:extLst xmlns:a="http://schemas.openxmlformats.org/drawingml/2006/main">
               <a:ext uri="{FF2B5EF4-FFF2-40B4-BE49-F238E27FC236}">
-                <a16:creationId xmlns:a16="http://schemas.microsoft.com/office/drawing/2014/main" id="{8E2BE86C-5F0D-48F9-8CFB-EC43AD8DEE05}"/>
+                <a16:creationId xmlns:a16="http://schemas.microsoft.com/office/drawing/2014/main" id="{F8CEA906-35B5-4B9B-B8B9-DA4DD1E1E58B}"/>
               </a:ext>
             </a:extLst>
           </p:cNvPr>
@@ -6500,7 +7265,7 @@
           <p:cNvPr id="20" name="">
             <a:extLst xmlns:a="http://schemas.openxmlformats.org/drawingml/2006/main">
               <a:ext uri="{FF2B5EF4-FFF2-40B4-BE49-F238E27FC236}">
-                <a16:creationId xmlns:a16="http://schemas.microsoft.com/office/drawing/2014/main" id="{8610215F-9D9D-4B1E-9A31-02F79C350529}"/>
+                <a16:creationId xmlns:a16="http://schemas.microsoft.com/office/drawing/2014/main" id="{15E2CF2B-F6CA-40F2-BB01-D92CD5F8E0B1}"/>
               </a:ext>
             </a:extLst>
           </p:cNvPr>
@@ -6531,7 +7296,7 @@
           <p:cNvPr id="21" name="">
             <a:extLst xmlns:a="http://schemas.openxmlformats.org/drawingml/2006/main">
               <a:ext uri="{FF2B5EF4-FFF2-40B4-BE49-F238E27FC236}">
-                <a16:creationId xmlns:a16="http://schemas.microsoft.com/office/drawing/2014/main" id="{85F6C6AE-7FD6-4FC4-B525-A42CDCB7779A}"/>
+                <a16:creationId xmlns:a16="http://schemas.microsoft.com/office/drawing/2014/main" id="{2E5488E5-28F0-4A59-A675-4524D5D27CDA}"/>
               </a:ext>
             </a:extLst>
           </p:cNvPr>
@@ -6581,7 +7346,7 @@
           <p:cNvPr id="22" name="">
             <a:extLst xmlns:a="http://schemas.openxmlformats.org/drawingml/2006/main">
               <a:ext uri="{FF2B5EF4-FFF2-40B4-BE49-F238E27FC236}">
-                <a16:creationId xmlns:a16="http://schemas.microsoft.com/office/drawing/2014/main" id="{F4354BC0-B30E-4725-B0B7-DAF51E709E37}"/>
+                <a16:creationId xmlns:a16="http://schemas.microsoft.com/office/drawing/2014/main" id="{8F521A85-9F51-40B2-8833-71C9CA86E429}"/>
               </a:ext>
             </a:extLst>
           </p:cNvPr>
@@ -6612,7 +7377,7 @@
           <p:cNvPr id="23" name="">
             <a:extLst xmlns:a="http://schemas.openxmlformats.org/drawingml/2006/main">
               <a:ext uri="{FF2B5EF4-FFF2-40B4-BE49-F238E27FC236}">
-                <a16:creationId xmlns:a16="http://schemas.microsoft.com/office/drawing/2014/main" id="{E754C1C3-853F-4158-A650-89296055152F}"/>
+                <a16:creationId xmlns:a16="http://schemas.microsoft.com/office/drawing/2014/main" id="{3D6ACFFC-5B4C-4EDB-A54D-91867088EF98}"/>
               </a:ext>
             </a:extLst>
           </p:cNvPr>
@@ -6662,7 +7427,7 @@
           <p:cNvPr id="24" name="">
             <a:extLst xmlns:a="http://schemas.openxmlformats.org/drawingml/2006/main">
               <a:ext uri="{FF2B5EF4-FFF2-40B4-BE49-F238E27FC236}">
-                <a16:creationId xmlns:a16="http://schemas.microsoft.com/office/drawing/2014/main" id="{0E266711-0298-411C-B716-76852D663B74}"/>
+                <a16:creationId xmlns:a16="http://schemas.microsoft.com/office/drawing/2014/main" id="{16D254AB-9E55-43AA-9C1A-49C0AC122F98}"/>
               </a:ext>
             </a:extLst>
           </p:cNvPr>
@@ -6693,7 +7458,7 @@
           <p:cNvPr id="25" name="">
             <a:extLst xmlns:a="http://schemas.openxmlformats.org/drawingml/2006/main">
               <a:ext uri="{FF2B5EF4-FFF2-40B4-BE49-F238E27FC236}">
-                <a16:creationId xmlns:a16="http://schemas.microsoft.com/office/drawing/2014/main" id="{24FBF112-BB6F-4504-B029-C11E37F49354}"/>
+                <a16:creationId xmlns:a16="http://schemas.microsoft.com/office/drawing/2014/main" id="{48FEC56D-EA8C-46DC-986B-33FDE0DA4726}"/>
               </a:ext>
             </a:extLst>
           </p:cNvPr>
@@ -6743,7 +7508,7 @@
           <p:cNvPr id="26" name="">
             <a:extLst xmlns:a="http://schemas.openxmlformats.org/drawingml/2006/main">
               <a:ext uri="{FF2B5EF4-FFF2-40B4-BE49-F238E27FC236}">
-                <a16:creationId xmlns:a16="http://schemas.microsoft.com/office/drawing/2014/main" id="{AEF493FF-C33C-44B8-B27B-332AD176F358}"/>
+                <a16:creationId xmlns:a16="http://schemas.microsoft.com/office/drawing/2014/main" id="{F94F3288-20B9-4992-AA4E-78BE167EA700}"/>
               </a:ext>
             </a:extLst>
           </p:cNvPr>
@@ -6791,7 +7556,7 @@
     </p:spTree>
     <p:extLst>
       <p:ext uri="{BB962C8B-B14F-4D97-AF65-F5344CB8AC3E}">
-        <p14:creationId xmlns:p14="http://schemas.microsoft.com/office/powerpoint/2010/main" val="1695962986"/>
+        <p14:creationId xmlns:p14="http://schemas.microsoft.com/office/powerpoint/2010/main" val="608214803"/>
       </p:ext>
     </p:extLst>
   </p:cSld>
@@ -6822,7 +7587,7 @@
           <p:cNvPr id="1" name="">
             <a:extLst xmlns:a="http://schemas.openxmlformats.org/drawingml/2006/main">
               <a:ext uri="{FF2B5EF4-FFF2-40B4-BE49-F238E27FC236}">
-                <a16:creationId xmlns:a16="http://schemas.microsoft.com/office/drawing/2014/main" id="{6A840E08-C67F-4D29-8350-C5800C17C5B4}"/>
+                <a16:creationId xmlns:a16="http://schemas.microsoft.com/office/drawing/2014/main" id="{C15F214E-05B8-44B8-B819-18238C46B9AD}"/>
               </a:ext>
             </a:extLst>
           </p:cNvPr>
@@ -6872,7 +7637,7 @@
           <p:cNvPr id="2" name="">
             <a:extLst xmlns:a="http://schemas.openxmlformats.org/drawingml/2006/main">
               <a:ext uri="{FF2B5EF4-FFF2-40B4-BE49-F238E27FC236}">
-                <a16:creationId xmlns:a16="http://schemas.microsoft.com/office/drawing/2014/main" id="{D9C3AFFA-8663-49B0-8D80-D36BFC030491}"/>
+                <a16:creationId xmlns:a16="http://schemas.microsoft.com/office/drawing/2014/main" id="{BD5B5437-3F2B-4BCD-A185-DC1300F2AD7D}"/>
               </a:ext>
             </a:extLst>
           </p:cNvPr>
@@ -6922,7 +7687,7 @@
           <p:cNvPr id="3" name="">
             <a:extLst xmlns:a="http://schemas.openxmlformats.org/drawingml/2006/main">
               <a:ext uri="{FF2B5EF4-FFF2-40B4-BE49-F238E27FC236}">
-                <a16:creationId xmlns:a16="http://schemas.microsoft.com/office/drawing/2014/main" id="{56C854DF-8FDD-4D3D-AFC2-1A3279B4ED8C}"/>
+                <a16:creationId xmlns:a16="http://schemas.microsoft.com/office/drawing/2014/main" id="{4C99609A-BD6D-4809-B7BC-C5951C0AD8E8}"/>
               </a:ext>
             </a:extLst>
           </p:cNvPr>
@@ -6955,7 +7720,7 @@
           <p:cNvPr id="4" name="">
             <a:extLst xmlns:a="http://schemas.openxmlformats.org/drawingml/2006/main">
               <a:ext uri="{FF2B5EF4-FFF2-40B4-BE49-F238E27FC236}">
-                <a16:creationId xmlns:a16="http://schemas.microsoft.com/office/drawing/2014/main" id="{DF113309-8E05-416C-9D15-7D5D7A2D0151}"/>
+                <a16:creationId xmlns:a16="http://schemas.microsoft.com/office/drawing/2014/main" id="{3084BD9D-812C-4F29-AC95-87E750C8FB0F}"/>
               </a:ext>
             </a:extLst>
           </p:cNvPr>
@@ -6990,7 +7755,7 @@
           <p:cNvPr id="5" name="">
             <a:extLst xmlns:a="http://schemas.openxmlformats.org/drawingml/2006/main">
               <a:ext uri="{FF2B5EF4-FFF2-40B4-BE49-F238E27FC236}">
-                <a16:creationId xmlns:a16="http://schemas.microsoft.com/office/drawing/2014/main" id="{DE08D470-1FE3-4826-973D-C51D593E3371}"/>
+                <a16:creationId xmlns:a16="http://schemas.microsoft.com/office/drawing/2014/main" id="{CD8B3127-48AD-4C89-BAF5-92F66F87C049}"/>
               </a:ext>
             </a:extLst>
           </p:cNvPr>
@@ -7040,7 +7805,7 @@
           <p:cNvPr id="6" name="">
             <a:extLst xmlns:a="http://schemas.openxmlformats.org/drawingml/2006/main">
               <a:ext uri="{FF2B5EF4-FFF2-40B4-BE49-F238E27FC236}">
-                <a16:creationId xmlns:a16="http://schemas.microsoft.com/office/drawing/2014/main" id="{3D42E8E7-D448-4DB1-BD79-FE89822E2E01}"/>
+                <a16:creationId xmlns:a16="http://schemas.microsoft.com/office/drawing/2014/main" id="{440572C4-91C1-43CC-8BFF-EF1E2D3418F4}"/>
               </a:ext>
             </a:extLst>
           </p:cNvPr>
@@ -7071,7 +7836,7 @@
           <p:cNvPr id="7" name="">
             <a:extLst xmlns:a="http://schemas.openxmlformats.org/drawingml/2006/main">
               <a:ext uri="{FF2B5EF4-FFF2-40B4-BE49-F238E27FC236}">
-                <a16:creationId xmlns:a16="http://schemas.microsoft.com/office/drawing/2014/main" id="{C6AA491D-B115-443C-A18B-3F1BE83A2AB4}"/>
+                <a16:creationId xmlns:a16="http://schemas.microsoft.com/office/drawing/2014/main" id="{4380645D-4121-43D0-9240-D92528B08C48}"/>
               </a:ext>
             </a:extLst>
           </p:cNvPr>
@@ -7106,7 +7871,7 @@
           <p:cNvPr id="8" name="">
             <a:extLst xmlns:a="http://schemas.openxmlformats.org/drawingml/2006/main">
               <a:ext uri="{FF2B5EF4-FFF2-40B4-BE49-F238E27FC236}">
-                <a16:creationId xmlns:a16="http://schemas.microsoft.com/office/drawing/2014/main" id="{EA322CF6-CAE4-4F04-A1BD-363184007EF1}"/>
+                <a16:creationId xmlns:a16="http://schemas.microsoft.com/office/drawing/2014/main" id="{5FC4C560-C946-4F15-A47B-97A56922FE5B}"/>
               </a:ext>
             </a:extLst>
           </p:cNvPr>
@@ -7156,7 +7921,7 @@
           <p:cNvPr id="9" name="">
             <a:extLst xmlns:a="http://schemas.openxmlformats.org/drawingml/2006/main">
               <a:ext uri="{FF2B5EF4-FFF2-40B4-BE49-F238E27FC236}">
-                <a16:creationId xmlns:a16="http://schemas.microsoft.com/office/drawing/2014/main" id="{1A4117E9-093C-4F57-B62C-CC8CF2114CE0}"/>
+                <a16:creationId xmlns:a16="http://schemas.microsoft.com/office/drawing/2014/main" id="{6864993D-ED4C-4085-9F5D-2D3AB612DA96}"/>
               </a:ext>
             </a:extLst>
           </p:cNvPr>
@@ -7187,7 +7952,7 @@
           <p:cNvPr id="10" name="">
             <a:extLst xmlns:a="http://schemas.openxmlformats.org/drawingml/2006/main">
               <a:ext uri="{FF2B5EF4-FFF2-40B4-BE49-F238E27FC236}">
-                <a16:creationId xmlns:a16="http://schemas.microsoft.com/office/drawing/2014/main" id="{1C713534-0B45-4277-A66F-3BE47ADB0EE6}"/>
+                <a16:creationId xmlns:a16="http://schemas.microsoft.com/office/drawing/2014/main" id="{05608B71-171C-446A-9600-86F450A2B8FC}"/>
               </a:ext>
             </a:extLst>
           </p:cNvPr>
@@ -7222,7 +7987,7 @@
           <p:cNvPr id="11" name="">
             <a:extLst xmlns:a="http://schemas.openxmlformats.org/drawingml/2006/main">
               <a:ext uri="{FF2B5EF4-FFF2-40B4-BE49-F238E27FC236}">
-                <a16:creationId xmlns:a16="http://schemas.microsoft.com/office/drawing/2014/main" id="{527A480E-7668-4B98-A75D-D16A6FF6115C}"/>
+                <a16:creationId xmlns:a16="http://schemas.microsoft.com/office/drawing/2014/main" id="{7A36E81D-E8AD-470B-B434-4B95E809D5D2}"/>
               </a:ext>
             </a:extLst>
           </p:cNvPr>
@@ -7272,7 +8037,7 @@
           <p:cNvPr id="12" name="">
             <a:extLst xmlns:a="http://schemas.openxmlformats.org/drawingml/2006/main">
               <a:ext uri="{FF2B5EF4-FFF2-40B4-BE49-F238E27FC236}">
-                <a16:creationId xmlns:a16="http://schemas.microsoft.com/office/drawing/2014/main" id="{72D7D8CB-C828-4DBD-8B87-9165170D53E9}"/>
+                <a16:creationId xmlns:a16="http://schemas.microsoft.com/office/drawing/2014/main" id="{C85B3B56-C2A4-4D06-A0C2-D9D7984B0C23}"/>
               </a:ext>
             </a:extLst>
           </p:cNvPr>
@@ -7303,7 +8068,7 @@
           <p:cNvPr id="13" name="">
             <a:extLst xmlns:a="http://schemas.openxmlformats.org/drawingml/2006/main">
               <a:ext uri="{FF2B5EF4-FFF2-40B4-BE49-F238E27FC236}">
-                <a16:creationId xmlns:a16="http://schemas.microsoft.com/office/drawing/2014/main" id="{973FBD33-D260-430E-9EF0-B939D200C336}"/>
+                <a16:creationId xmlns:a16="http://schemas.microsoft.com/office/drawing/2014/main" id="{5F2514EA-65B4-471A-8787-173AA32F9A0C}"/>
               </a:ext>
             </a:extLst>
           </p:cNvPr>
@@ -7338,7 +8103,7 @@
           <p:cNvPr id="14" name="">
             <a:extLst xmlns:a="http://schemas.openxmlformats.org/drawingml/2006/main">
               <a:ext uri="{FF2B5EF4-FFF2-40B4-BE49-F238E27FC236}">
-                <a16:creationId xmlns:a16="http://schemas.microsoft.com/office/drawing/2014/main" id="{0C5389FB-8945-4D51-BD00-F9C56689973E}"/>
+                <a16:creationId xmlns:a16="http://schemas.microsoft.com/office/drawing/2014/main" id="{6586D373-A48A-42CA-9F59-947787BFD276}"/>
               </a:ext>
             </a:extLst>
           </p:cNvPr>
@@ -7388,7 +8153,7 @@
           <p:cNvPr id="15" name="">
             <a:extLst xmlns:a="http://schemas.openxmlformats.org/drawingml/2006/main">
               <a:ext uri="{FF2B5EF4-FFF2-40B4-BE49-F238E27FC236}">
-                <a16:creationId xmlns:a16="http://schemas.microsoft.com/office/drawing/2014/main" id="{40DE107D-F137-4AFA-9318-E221DDA4B78D}"/>
+                <a16:creationId xmlns:a16="http://schemas.microsoft.com/office/drawing/2014/main" id="{E757C160-D7D0-4F3F-B431-9E24B69B9F1C}"/>
               </a:ext>
             </a:extLst>
           </p:cNvPr>
@@ -7423,7 +8188,7 @@
           <p:cNvPr id="16" name="">
             <a:extLst xmlns:a="http://schemas.openxmlformats.org/drawingml/2006/main">
               <a:ext uri="{FF2B5EF4-FFF2-40B4-BE49-F238E27FC236}">
-                <a16:creationId xmlns:a16="http://schemas.microsoft.com/office/drawing/2014/main" id="{3568DB2C-935C-44EF-B56A-2843D527C75C}"/>
+                <a16:creationId xmlns:a16="http://schemas.microsoft.com/office/drawing/2014/main" id="{CDEDC66F-94CE-4C0E-8420-180C5529D0C7}"/>
               </a:ext>
             </a:extLst>
           </p:cNvPr>
@@ -7473,7 +8238,7 @@
           <p:cNvPr id="17" name="">
             <a:extLst xmlns:a="http://schemas.openxmlformats.org/drawingml/2006/main">
               <a:ext uri="{FF2B5EF4-FFF2-40B4-BE49-F238E27FC236}">
-                <a16:creationId xmlns:a16="http://schemas.microsoft.com/office/drawing/2014/main" id="{A0B88127-D66C-4CAA-BCAF-3B77643C01AA}"/>
+                <a16:creationId xmlns:a16="http://schemas.microsoft.com/office/drawing/2014/main" id="{A7D12426-D345-4598-AA63-D20BECC1F4A6}"/>
               </a:ext>
             </a:extLst>
           </p:cNvPr>
@@ -7521,7 +8286,7 @@
     </p:spTree>
     <p:extLst>
       <p:ext uri="{BB962C8B-B14F-4D97-AF65-F5344CB8AC3E}">
-        <p14:creationId xmlns:p14="http://schemas.microsoft.com/office/powerpoint/2010/main" val="1727269420"/>
+        <p14:creationId xmlns:p14="http://schemas.microsoft.com/office/powerpoint/2010/main" val="1783061376"/>
       </p:ext>
     </p:extLst>
   </p:cSld>
@@ -7552,7 +8317,7 @@
           <p:cNvPr id="1" name="">
             <a:extLst xmlns:a="http://schemas.openxmlformats.org/drawingml/2006/main">
               <a:ext uri="{FF2B5EF4-FFF2-40B4-BE49-F238E27FC236}">
-                <a16:creationId xmlns:a16="http://schemas.microsoft.com/office/drawing/2014/main" id="{E423FE18-49C8-4C39-B352-7D4F101C4898}"/>
+                <a16:creationId xmlns:a16="http://schemas.microsoft.com/office/drawing/2014/main" id="{BB0D77D7-9D9F-4F19-A1CB-C1145724C5E6}"/>
               </a:ext>
             </a:extLst>
           </p:cNvPr>
@@ -7602,7 +8367,7 @@
           <p:cNvPr id="2" name="">
             <a:extLst xmlns:a="http://schemas.openxmlformats.org/drawingml/2006/main">
               <a:ext uri="{FF2B5EF4-FFF2-40B4-BE49-F238E27FC236}">
-                <a16:creationId xmlns:a16="http://schemas.microsoft.com/office/drawing/2014/main" id="{2DF759A4-99E1-4FA2-9073-157D5C9D0190}"/>
+                <a16:creationId xmlns:a16="http://schemas.microsoft.com/office/drawing/2014/main" id="{02712F4B-E246-48E4-89F4-851E44168DBC}"/>
               </a:ext>
             </a:extLst>
           </p:cNvPr>
@@ -7652,7 +8417,7 @@
           <p:cNvPr id="3" name="">
             <a:extLst xmlns:a="http://schemas.openxmlformats.org/drawingml/2006/main">
               <a:ext uri="{FF2B5EF4-FFF2-40B4-BE49-F238E27FC236}">
-                <a16:creationId xmlns:a16="http://schemas.microsoft.com/office/drawing/2014/main" id="{A01F0FF0-4E95-429D-AE04-E913F6C0C504}"/>
+                <a16:creationId xmlns:a16="http://schemas.microsoft.com/office/drawing/2014/main" id="{BA2A289F-4A8F-4F1A-94F2-923A5F4F6A48}"/>
               </a:ext>
             </a:extLst>
           </p:cNvPr>
@@ -7685,7 +8450,7 @@
           <p:cNvPr id="4" name="">
             <a:extLst xmlns:a="http://schemas.openxmlformats.org/drawingml/2006/main">
               <a:ext uri="{FF2B5EF4-FFF2-40B4-BE49-F238E27FC236}">
-                <a16:creationId xmlns:a16="http://schemas.microsoft.com/office/drawing/2014/main" id="{D63798DA-C16A-4CAB-9AFA-9877F6058EF4}"/>
+                <a16:creationId xmlns:a16="http://schemas.microsoft.com/office/drawing/2014/main" id="{6363BE9D-C247-4B68-89A6-6EAFD4C1CD1D}"/>
               </a:ext>
             </a:extLst>
           </p:cNvPr>
@@ -7720,7 +8485,7 @@
           <p:cNvPr id="5" name="">
             <a:extLst xmlns:a="http://schemas.openxmlformats.org/drawingml/2006/main">
               <a:ext uri="{FF2B5EF4-FFF2-40B4-BE49-F238E27FC236}">
-                <a16:creationId xmlns:a16="http://schemas.microsoft.com/office/drawing/2014/main" id="{B576E540-1FC4-4C5E-89FB-4192A43686E7}"/>
+                <a16:creationId xmlns:a16="http://schemas.microsoft.com/office/drawing/2014/main" id="{6DF38026-FB0A-4CD8-98EC-B260AE5A024A}"/>
               </a:ext>
             </a:extLst>
           </p:cNvPr>
@@ -7755,7 +8520,7 @@
           <p:cNvPr id="6" name="">
             <a:extLst xmlns:a="http://schemas.openxmlformats.org/drawingml/2006/main">
               <a:ext uri="{FF2B5EF4-FFF2-40B4-BE49-F238E27FC236}">
-                <a16:creationId xmlns:a16="http://schemas.microsoft.com/office/drawing/2014/main" id="{3C0F001A-AE11-4725-9D49-0E223B769962}"/>
+                <a16:creationId xmlns:a16="http://schemas.microsoft.com/office/drawing/2014/main" id="{BF32F31E-403A-44D6-80C2-F75BA79716F7}"/>
               </a:ext>
             </a:extLst>
           </p:cNvPr>
@@ -7805,7 +8570,7 @@
           <p:cNvPr id="7" name="">
             <a:extLst xmlns:a="http://schemas.openxmlformats.org/drawingml/2006/main">
               <a:ext uri="{FF2B5EF4-FFF2-40B4-BE49-F238E27FC236}">
-                <a16:creationId xmlns:a16="http://schemas.microsoft.com/office/drawing/2014/main" id="{FA68A66F-1BF8-4F9D-B0A9-AA6818D1B91F}"/>
+                <a16:creationId xmlns:a16="http://schemas.microsoft.com/office/drawing/2014/main" id="{2D2164C8-C351-428D-B1C2-BF1F73F3D742}"/>
               </a:ext>
             </a:extLst>
           </p:cNvPr>
@@ -7855,7 +8620,7 @@
           <p:cNvPr id="8" name="">
             <a:extLst xmlns:a="http://schemas.openxmlformats.org/drawingml/2006/main">
               <a:ext uri="{FF2B5EF4-FFF2-40B4-BE49-F238E27FC236}">
-                <a16:creationId xmlns:a16="http://schemas.microsoft.com/office/drawing/2014/main" id="{F9D6F89E-CC2D-4294-902C-59375AE807BD}"/>
+                <a16:creationId xmlns:a16="http://schemas.microsoft.com/office/drawing/2014/main" id="{325CC5B1-CA68-4D9E-A030-7EFFCB7A637D}"/>
               </a:ext>
             </a:extLst>
           </p:cNvPr>
@@ -7886,7 +8651,7 @@
           <p:cNvPr id="9" name="">
             <a:extLst xmlns:a="http://schemas.openxmlformats.org/drawingml/2006/main">
               <a:ext uri="{FF2B5EF4-FFF2-40B4-BE49-F238E27FC236}">
-                <a16:creationId xmlns:a16="http://schemas.microsoft.com/office/drawing/2014/main" id="{D2A8682C-66A7-4F59-8827-160A800EA7E3}"/>
+                <a16:creationId xmlns:a16="http://schemas.microsoft.com/office/drawing/2014/main" id="{B6C10154-6A7D-4F4E-9F7F-8A2B4BE69702}"/>
               </a:ext>
             </a:extLst>
           </p:cNvPr>
@@ -7936,7 +8701,7 @@
           <p:cNvPr id="10" name="">
             <a:extLst xmlns:a="http://schemas.openxmlformats.org/drawingml/2006/main">
               <a:ext uri="{FF2B5EF4-FFF2-40B4-BE49-F238E27FC236}">
-                <a16:creationId xmlns:a16="http://schemas.microsoft.com/office/drawing/2014/main" id="{7A9F803A-D8B8-421C-B260-918EAEEA114D}"/>
+                <a16:creationId xmlns:a16="http://schemas.microsoft.com/office/drawing/2014/main" id="{23659408-B76E-4B35-A565-6E23373A0122}"/>
               </a:ext>
             </a:extLst>
           </p:cNvPr>
@@ -7967,7 +8732,7 @@
           <p:cNvPr id="11" name="">
             <a:extLst xmlns:a="http://schemas.openxmlformats.org/drawingml/2006/main">
               <a:ext uri="{FF2B5EF4-FFF2-40B4-BE49-F238E27FC236}">
-                <a16:creationId xmlns:a16="http://schemas.microsoft.com/office/drawing/2014/main" id="{6B5B968B-BBC9-4B63-883F-E0FBFF4FA70C}"/>
+                <a16:creationId xmlns:a16="http://schemas.microsoft.com/office/drawing/2014/main" id="{AEEC7B8D-92C3-4841-94FF-FABDC81B3E34}"/>
               </a:ext>
             </a:extLst>
           </p:cNvPr>
@@ -8017,7 +8782,7 @@
           <p:cNvPr id="12" name="">
             <a:extLst xmlns:a="http://schemas.openxmlformats.org/drawingml/2006/main">
               <a:ext uri="{FF2B5EF4-FFF2-40B4-BE49-F238E27FC236}">
-                <a16:creationId xmlns:a16="http://schemas.microsoft.com/office/drawing/2014/main" id="{DFB4318D-1616-4699-8420-CA743EA51CFF}"/>
+                <a16:creationId xmlns:a16="http://schemas.microsoft.com/office/drawing/2014/main" id="{B8D4D3ED-BC22-4664-A3E5-C3A0FC803B01}"/>
               </a:ext>
             </a:extLst>
           </p:cNvPr>
@@ -8048,7 +8813,7 @@
           <p:cNvPr id="13" name="">
             <a:extLst xmlns:a="http://schemas.openxmlformats.org/drawingml/2006/main">
               <a:ext uri="{FF2B5EF4-FFF2-40B4-BE49-F238E27FC236}">
-                <a16:creationId xmlns:a16="http://schemas.microsoft.com/office/drawing/2014/main" id="{3218905C-B2A5-4C05-9D82-E80F0BC8F46C}"/>
+                <a16:creationId xmlns:a16="http://schemas.microsoft.com/office/drawing/2014/main" id="{B49F24CD-16DC-4B17-BF9F-6DBA84204795}"/>
               </a:ext>
             </a:extLst>
           </p:cNvPr>
@@ -8098,7 +8863,7 @@
           <p:cNvPr id="14" name="">
             <a:extLst xmlns:a="http://schemas.openxmlformats.org/drawingml/2006/main">
               <a:ext uri="{FF2B5EF4-FFF2-40B4-BE49-F238E27FC236}">
-                <a16:creationId xmlns:a16="http://schemas.microsoft.com/office/drawing/2014/main" id="{40DDF0C6-F60A-493C-AB55-3A3742C710F3}"/>
+                <a16:creationId xmlns:a16="http://schemas.microsoft.com/office/drawing/2014/main" id="{D3960873-0A85-4CAD-9E28-7C6F3161795D}"/>
               </a:ext>
             </a:extLst>
           </p:cNvPr>
@@ -8129,7 +8894,7 @@
           <p:cNvPr id="15" name="">
             <a:extLst xmlns:a="http://schemas.openxmlformats.org/drawingml/2006/main">
               <a:ext uri="{FF2B5EF4-FFF2-40B4-BE49-F238E27FC236}">
-                <a16:creationId xmlns:a16="http://schemas.microsoft.com/office/drawing/2014/main" id="{8C227A99-73E3-4C78-AF48-50AEF3E808D9}"/>
+                <a16:creationId xmlns:a16="http://schemas.microsoft.com/office/drawing/2014/main" id="{183FEC08-32CF-4132-83B7-114102C9F118}"/>
               </a:ext>
             </a:extLst>
           </p:cNvPr>
@@ -8179,7 +8944,7 @@
           <p:cNvPr id="16" name="">
             <a:extLst xmlns:a="http://schemas.openxmlformats.org/drawingml/2006/main">
               <a:ext uri="{FF2B5EF4-FFF2-40B4-BE49-F238E27FC236}">
-                <a16:creationId xmlns:a16="http://schemas.microsoft.com/office/drawing/2014/main" id="{B689206B-6294-434D-B049-EDEABA365E84}"/>
+                <a16:creationId xmlns:a16="http://schemas.microsoft.com/office/drawing/2014/main" id="{0D24FAD6-9377-4968-BEB8-2E00DB4C6B63}"/>
               </a:ext>
             </a:extLst>
           </p:cNvPr>
@@ -8210,7 +8975,7 @@
           <p:cNvPr id="17" name="">
             <a:extLst xmlns:a="http://schemas.openxmlformats.org/drawingml/2006/main">
               <a:ext uri="{FF2B5EF4-FFF2-40B4-BE49-F238E27FC236}">
-                <a16:creationId xmlns:a16="http://schemas.microsoft.com/office/drawing/2014/main" id="{EAB62372-87D4-43E6-840A-731D9B2B640E}"/>
+                <a16:creationId xmlns:a16="http://schemas.microsoft.com/office/drawing/2014/main" id="{F647F7F5-EA02-4DDF-918E-0A2340CAC3D0}"/>
               </a:ext>
             </a:extLst>
           </p:cNvPr>
@@ -8260,7 +9025,7 @@
           <p:cNvPr id="18" name="">
             <a:extLst xmlns:a="http://schemas.openxmlformats.org/drawingml/2006/main">
               <a:ext uri="{FF2B5EF4-FFF2-40B4-BE49-F238E27FC236}">
-                <a16:creationId xmlns:a16="http://schemas.microsoft.com/office/drawing/2014/main" id="{D0CD1280-FD28-48B2-BF63-42D448393601}"/>
+                <a16:creationId xmlns:a16="http://schemas.microsoft.com/office/drawing/2014/main" id="{0AA8260A-0B8E-4378-8D91-4F41765AC5E7}"/>
               </a:ext>
             </a:extLst>
           </p:cNvPr>
@@ -8291,7 +9056,7 @@
           <p:cNvPr id="19" name="">
             <a:extLst xmlns:a="http://schemas.openxmlformats.org/drawingml/2006/main">
               <a:ext uri="{FF2B5EF4-FFF2-40B4-BE49-F238E27FC236}">
-                <a16:creationId xmlns:a16="http://schemas.microsoft.com/office/drawing/2014/main" id="{465DE92B-61F7-48B3-BDAB-FEA46F3912D4}"/>
+                <a16:creationId xmlns:a16="http://schemas.microsoft.com/office/drawing/2014/main" id="{15B74287-9027-46A5-936E-A763EBD671D2}"/>
               </a:ext>
             </a:extLst>
           </p:cNvPr>
@@ -8341,7 +9106,7 @@
           <p:cNvPr id="20" name="">
             <a:extLst xmlns:a="http://schemas.openxmlformats.org/drawingml/2006/main">
               <a:ext uri="{FF2B5EF4-FFF2-40B4-BE49-F238E27FC236}">
-                <a16:creationId xmlns:a16="http://schemas.microsoft.com/office/drawing/2014/main" id="{02133AA9-684F-4D66-9B33-B8509A1B73FB}"/>
+                <a16:creationId xmlns:a16="http://schemas.microsoft.com/office/drawing/2014/main" id="{E4810946-8487-4032-AE3E-C7A86E822BB0}"/>
               </a:ext>
             </a:extLst>
           </p:cNvPr>
@@ -8372,7 +9137,7 @@
           <p:cNvPr id="21" name="">
             <a:extLst xmlns:a="http://schemas.openxmlformats.org/drawingml/2006/main">
               <a:ext uri="{FF2B5EF4-FFF2-40B4-BE49-F238E27FC236}">
-                <a16:creationId xmlns:a16="http://schemas.microsoft.com/office/drawing/2014/main" id="{6DFA0F5D-EC87-4188-89A6-F95D966AB9E9}"/>
+                <a16:creationId xmlns:a16="http://schemas.microsoft.com/office/drawing/2014/main" id="{84A02C58-8475-4055-A895-E29BCCE9AC90}"/>
               </a:ext>
             </a:extLst>
           </p:cNvPr>
@@ -8422,7 +9187,7 @@
           <p:cNvPr id="22" name="">
             <a:extLst xmlns:a="http://schemas.openxmlformats.org/drawingml/2006/main">
               <a:ext uri="{FF2B5EF4-FFF2-40B4-BE49-F238E27FC236}">
-                <a16:creationId xmlns:a16="http://schemas.microsoft.com/office/drawing/2014/main" id="{15FF4E0D-D2AC-42AA-8731-24D9C7418620}"/>
+                <a16:creationId xmlns:a16="http://schemas.microsoft.com/office/drawing/2014/main" id="{5C4A3295-81A8-4F50-B881-8DED63C277C1}"/>
               </a:ext>
             </a:extLst>
           </p:cNvPr>
@@ -8453,7 +9218,7 @@
           <p:cNvPr id="23" name="">
             <a:extLst xmlns:a="http://schemas.openxmlformats.org/drawingml/2006/main">
               <a:ext uri="{FF2B5EF4-FFF2-40B4-BE49-F238E27FC236}">
-                <a16:creationId xmlns:a16="http://schemas.microsoft.com/office/drawing/2014/main" id="{043426F0-B7B7-45A3-A468-DB0D524F2EB5}"/>
+                <a16:creationId xmlns:a16="http://schemas.microsoft.com/office/drawing/2014/main" id="{CE33B0DF-1EDE-4668-8505-D104A01B1D33}"/>
               </a:ext>
             </a:extLst>
           </p:cNvPr>
@@ -8501,7 +9266,7 @@
     </p:spTree>
     <p:extLst>
       <p:ext uri="{BB962C8B-B14F-4D97-AF65-F5344CB8AC3E}">
-        <p14:creationId xmlns:p14="http://schemas.microsoft.com/office/powerpoint/2010/main" val="2008708327"/>
+        <p14:creationId xmlns:p14="http://schemas.microsoft.com/office/powerpoint/2010/main" val="1284975108"/>
       </p:ext>
     </p:extLst>
   </p:cSld>
@@ -8532,7 +9297,7 @@
           <p:cNvPr id="1" name="">
             <a:extLst xmlns:a="http://schemas.openxmlformats.org/drawingml/2006/main">
               <a:ext uri="{FF2B5EF4-FFF2-40B4-BE49-F238E27FC236}">
-                <a16:creationId xmlns:a16="http://schemas.microsoft.com/office/drawing/2014/main" id="{524AA359-3563-444C-B55E-F58792039F13}"/>
+                <a16:creationId xmlns:a16="http://schemas.microsoft.com/office/drawing/2014/main" id="{1AFFCF48-B574-4CAE-A9FB-37D5CC28FF39}"/>
               </a:ext>
             </a:extLst>
           </p:cNvPr>
@@ -8582,7 +9347,7 @@
           <p:cNvPr id="2" name="">
             <a:extLst xmlns:a="http://schemas.openxmlformats.org/drawingml/2006/main">
               <a:ext uri="{FF2B5EF4-FFF2-40B4-BE49-F238E27FC236}">
-                <a16:creationId xmlns:a16="http://schemas.microsoft.com/office/drawing/2014/main" id="{845A48C0-BC00-4C88-A764-A3203DB77200}"/>
+                <a16:creationId xmlns:a16="http://schemas.microsoft.com/office/drawing/2014/main" id="{F342AEB0-25FC-4D89-9BBC-86181F1A5137}"/>
               </a:ext>
             </a:extLst>
           </p:cNvPr>
@@ -8632,7 +9397,7 @@
           <p:cNvPr id="3" name="">
             <a:extLst xmlns:a="http://schemas.openxmlformats.org/drawingml/2006/main">
               <a:ext uri="{FF2B5EF4-FFF2-40B4-BE49-F238E27FC236}">
-                <a16:creationId xmlns:a16="http://schemas.microsoft.com/office/drawing/2014/main" id="{0D30E0CA-8ABC-4EAC-B0C2-12C615A0127C}"/>
+                <a16:creationId xmlns:a16="http://schemas.microsoft.com/office/drawing/2014/main" id="{2E115C22-19D1-4367-AD7C-2FFFACC79DA5}"/>
               </a:ext>
             </a:extLst>
           </p:cNvPr>
@@ -8665,7 +9430,7 @@
           <p:cNvPr id="4" name="">
             <a:extLst xmlns:a="http://schemas.openxmlformats.org/drawingml/2006/main">
               <a:ext uri="{FF2B5EF4-FFF2-40B4-BE49-F238E27FC236}">
-                <a16:creationId xmlns:a16="http://schemas.microsoft.com/office/drawing/2014/main" id="{2153A0FD-A358-4229-B1B3-1FCB56FC2B4A}"/>
+                <a16:creationId xmlns:a16="http://schemas.microsoft.com/office/drawing/2014/main" id="{32CEFB55-27A8-4764-B964-7A1276B0E5FD}"/>
               </a:ext>
             </a:extLst>
           </p:cNvPr>
@@ -8700,7 +9465,7 @@
           <p:cNvPr id="5" name="">
             <a:extLst xmlns:a="http://schemas.openxmlformats.org/drawingml/2006/main">
               <a:ext uri="{FF2B5EF4-FFF2-40B4-BE49-F238E27FC236}">
-                <a16:creationId xmlns:a16="http://schemas.microsoft.com/office/drawing/2014/main" id="{34CCEA44-D6BB-4DE6-A92B-9BFC2CC331AD}"/>
+                <a16:creationId xmlns:a16="http://schemas.microsoft.com/office/drawing/2014/main" id="{D261A113-87B1-4B4A-8206-DDE5680F8F11}"/>
               </a:ext>
             </a:extLst>
           </p:cNvPr>
@@ -8735,7 +9500,7 @@
           <p:cNvPr id="6" name="">
             <a:extLst xmlns:a="http://schemas.openxmlformats.org/drawingml/2006/main">
               <a:ext uri="{FF2B5EF4-FFF2-40B4-BE49-F238E27FC236}">
-                <a16:creationId xmlns:a16="http://schemas.microsoft.com/office/drawing/2014/main" id="{FF89AAF8-AB11-40BC-8208-A580F89F9AE4}"/>
+                <a16:creationId xmlns:a16="http://schemas.microsoft.com/office/drawing/2014/main" id="{36CDC9BB-C72A-4820-AB95-6C83F2F191BC}"/>
               </a:ext>
             </a:extLst>
           </p:cNvPr>
@@ -8770,7 +9535,7 @@
           <p:cNvPr id="7" name="">
             <a:extLst xmlns:a="http://schemas.openxmlformats.org/drawingml/2006/main">
               <a:ext uri="{FF2B5EF4-FFF2-40B4-BE49-F238E27FC236}">
-                <a16:creationId xmlns:a16="http://schemas.microsoft.com/office/drawing/2014/main" id="{60137C13-C84F-4646-B25F-969BC134799E}"/>
+                <a16:creationId xmlns:a16="http://schemas.microsoft.com/office/drawing/2014/main" id="{E4CF92B6-5FA9-45BE-BCE2-FD5418952BBD}"/>
               </a:ext>
             </a:extLst>
           </p:cNvPr>
@@ -8820,7 +9585,7 @@
           <p:cNvPr id="8" name="">
             <a:extLst xmlns:a="http://schemas.openxmlformats.org/drawingml/2006/main">
               <a:ext uri="{FF2B5EF4-FFF2-40B4-BE49-F238E27FC236}">
-                <a16:creationId xmlns:a16="http://schemas.microsoft.com/office/drawing/2014/main" id="{8F180A79-F8B2-4BF8-AA4A-C5A0E534CC81}"/>
+                <a16:creationId xmlns:a16="http://schemas.microsoft.com/office/drawing/2014/main" id="{D6D66BAC-C64E-4642-93D2-B1A5525FC7BD}"/>
               </a:ext>
             </a:extLst>
           </p:cNvPr>
@@ -8870,7 +9635,7 @@
           <p:cNvPr id="9" name="">
             <a:extLst xmlns:a="http://schemas.openxmlformats.org/drawingml/2006/main">
               <a:ext uri="{FF2B5EF4-FFF2-40B4-BE49-F238E27FC236}">
-                <a16:creationId xmlns:a16="http://schemas.microsoft.com/office/drawing/2014/main" id="{8C76D08E-5A54-468A-B9BE-30CA0375F966}"/>
+                <a16:creationId xmlns:a16="http://schemas.microsoft.com/office/drawing/2014/main" id="{B827CFA7-4FE3-45F7-A3DD-F0D725E4D737}"/>
               </a:ext>
             </a:extLst>
           </p:cNvPr>
@@ -8920,7 +9685,7 @@
           <p:cNvPr id="10" name="">
             <a:extLst xmlns:a="http://schemas.openxmlformats.org/drawingml/2006/main">
               <a:ext uri="{FF2B5EF4-FFF2-40B4-BE49-F238E27FC236}">
-                <a16:creationId xmlns:a16="http://schemas.microsoft.com/office/drawing/2014/main" id="{14178E92-587B-4B1E-AB38-6A874BB8CE7E}"/>
+                <a16:creationId xmlns:a16="http://schemas.microsoft.com/office/drawing/2014/main" id="{5FD6B84C-58AD-4C0B-8C10-1BE7895187E7}"/>
               </a:ext>
             </a:extLst>
           </p:cNvPr>
@@ -8970,7 +9735,7 @@
           <p:cNvPr id="11" name="">
             <a:extLst xmlns:a="http://schemas.openxmlformats.org/drawingml/2006/main">
               <a:ext uri="{FF2B5EF4-FFF2-40B4-BE49-F238E27FC236}">
-                <a16:creationId xmlns:a16="http://schemas.microsoft.com/office/drawing/2014/main" id="{6E902757-D6D2-45B0-AFB4-8363A3C740E4}"/>
+                <a16:creationId xmlns:a16="http://schemas.microsoft.com/office/drawing/2014/main" id="{A7DFC46E-91F1-4B54-A25F-F5E126B8A95A}"/>
               </a:ext>
             </a:extLst>
           </p:cNvPr>
@@ -9020,7 +9785,7 @@
           <p:cNvPr id="12" name="">
             <a:extLst xmlns:a="http://schemas.openxmlformats.org/drawingml/2006/main">
               <a:ext uri="{FF2B5EF4-FFF2-40B4-BE49-F238E27FC236}">
-                <a16:creationId xmlns:a16="http://schemas.microsoft.com/office/drawing/2014/main" id="{3E5F805B-057C-486A-9310-26D86E45C562}"/>
+                <a16:creationId xmlns:a16="http://schemas.microsoft.com/office/drawing/2014/main" id="{F3820D36-ACF8-44D6-B0A3-19F97BEFE44F}"/>
               </a:ext>
             </a:extLst>
           </p:cNvPr>
@@ -9070,7 +9835,7 @@
           <p:cNvPr id="13" name="">
             <a:extLst xmlns:a="http://schemas.openxmlformats.org/drawingml/2006/main">
               <a:ext uri="{FF2B5EF4-FFF2-40B4-BE49-F238E27FC236}">
-                <a16:creationId xmlns:a16="http://schemas.microsoft.com/office/drawing/2014/main" id="{866F7B0D-E5A9-4EC5-B872-5D9CCD8360EA}"/>
+                <a16:creationId xmlns:a16="http://schemas.microsoft.com/office/drawing/2014/main" id="{A2CD96FB-A0C0-4F02-881F-307390AF3163}"/>
               </a:ext>
             </a:extLst>
           </p:cNvPr>
@@ -9118,7 +9883,7 @@
     </p:spTree>
     <p:extLst>
       <p:ext uri="{BB962C8B-B14F-4D97-AF65-F5344CB8AC3E}">
-        <p14:creationId xmlns:p14="http://schemas.microsoft.com/office/powerpoint/2010/main" val="359685640"/>
+        <p14:creationId xmlns:p14="http://schemas.microsoft.com/office/powerpoint/2010/main" val="1750168220"/>
       </p:ext>
     </p:extLst>
   </p:cSld>
@@ -9149,7 +9914,7 @@
           <p:cNvPr id="1" name="">
             <a:extLst xmlns:a="http://schemas.openxmlformats.org/drawingml/2006/main">
               <a:ext uri="{FF2B5EF4-FFF2-40B4-BE49-F238E27FC236}">
-                <a16:creationId xmlns:a16="http://schemas.microsoft.com/office/drawing/2014/main" id="{D732A811-E5AB-48FB-A9B0-3B57C9921FAB}"/>
+                <a16:creationId xmlns:a16="http://schemas.microsoft.com/office/drawing/2014/main" id="{91780806-35CA-423F-BDEB-57DFD9D95CE5}"/>
               </a:ext>
             </a:extLst>
           </p:cNvPr>
@@ -9199,7 +9964,7 @@
           <p:cNvPr id="2" name="">
             <a:extLst xmlns:a="http://schemas.openxmlformats.org/drawingml/2006/main">
               <a:ext uri="{FF2B5EF4-FFF2-40B4-BE49-F238E27FC236}">
-                <a16:creationId xmlns:a16="http://schemas.microsoft.com/office/drawing/2014/main" id="{50492119-5453-4296-8DA9-919803DA6344}"/>
+                <a16:creationId xmlns:a16="http://schemas.microsoft.com/office/drawing/2014/main" id="{6821D755-8018-405A-9790-304CF08451A8}"/>
               </a:ext>
             </a:extLst>
           </p:cNvPr>
@@ -9249,7 +10014,7 @@
           <p:cNvPr id="3" name="">
             <a:extLst xmlns:a="http://schemas.openxmlformats.org/drawingml/2006/main">
               <a:ext uri="{FF2B5EF4-FFF2-40B4-BE49-F238E27FC236}">
-                <a16:creationId xmlns:a16="http://schemas.microsoft.com/office/drawing/2014/main" id="{F0E7F188-08E8-40EE-B871-048AAE84B257}"/>
+                <a16:creationId xmlns:a16="http://schemas.microsoft.com/office/drawing/2014/main" id="{028E71B6-81B2-49A7-B6F8-30303FC2CF95}"/>
               </a:ext>
             </a:extLst>
           </p:cNvPr>
@@ -9282,7 +10047,7 @@
           <p:cNvPr id="4" name="">
             <a:extLst xmlns:a="http://schemas.openxmlformats.org/drawingml/2006/main">
               <a:ext uri="{FF2B5EF4-FFF2-40B4-BE49-F238E27FC236}">
-                <a16:creationId xmlns:a16="http://schemas.microsoft.com/office/drawing/2014/main" id="{C2E41CB6-9DD8-4E90-B352-66283FB50EB5}"/>
+                <a16:creationId xmlns:a16="http://schemas.microsoft.com/office/drawing/2014/main" id="{3E874118-4541-4B73-8BDA-BD3065113EDA}"/>
               </a:ext>
             </a:extLst>
           </p:cNvPr>
@@ -9317,7 +10082,7 @@
           <p:cNvPr id="5" name="">
             <a:extLst xmlns:a="http://schemas.openxmlformats.org/drawingml/2006/main">
               <a:ext uri="{FF2B5EF4-FFF2-40B4-BE49-F238E27FC236}">
-                <a16:creationId xmlns:a16="http://schemas.microsoft.com/office/drawing/2014/main" id="{0B25E74B-C24B-41F8-AC30-39A5C94777D5}"/>
+                <a16:creationId xmlns:a16="http://schemas.microsoft.com/office/drawing/2014/main" id="{025C6E62-5532-4A98-9644-8DEF2E73544C}"/>
               </a:ext>
             </a:extLst>
           </p:cNvPr>
@@ -9367,7 +10132,7 @@
           <p:cNvPr id="6" name="">
             <a:extLst xmlns:a="http://schemas.openxmlformats.org/drawingml/2006/main">
               <a:ext uri="{FF2B5EF4-FFF2-40B4-BE49-F238E27FC236}">
-                <a16:creationId xmlns:a16="http://schemas.microsoft.com/office/drawing/2014/main" id="{AC51FD01-9301-4BD9-A835-EED4782EA348}"/>
+                <a16:creationId xmlns:a16="http://schemas.microsoft.com/office/drawing/2014/main" id="{273C4B3C-7FD6-44C3-BA01-E6FDE7BADE08}"/>
               </a:ext>
             </a:extLst>
           </p:cNvPr>
@@ -9398,7 +10163,7 @@
           <p:cNvPr id="7" name="">
             <a:extLst xmlns:a="http://schemas.openxmlformats.org/drawingml/2006/main">
               <a:ext uri="{FF2B5EF4-FFF2-40B4-BE49-F238E27FC236}">
-                <a16:creationId xmlns:a16="http://schemas.microsoft.com/office/drawing/2014/main" id="{77C15502-0682-43F1-86BD-ADAEC4795C48}"/>
+                <a16:creationId xmlns:a16="http://schemas.microsoft.com/office/drawing/2014/main" id="{CF311231-22AA-4FB5-9BC3-8E521ED01423}"/>
               </a:ext>
             </a:extLst>
           </p:cNvPr>
@@ -9448,7 +10213,7 @@
           <p:cNvPr id="8" name="">
             <a:extLst xmlns:a="http://schemas.openxmlformats.org/drawingml/2006/main">
               <a:ext uri="{FF2B5EF4-FFF2-40B4-BE49-F238E27FC236}">
-                <a16:creationId xmlns:a16="http://schemas.microsoft.com/office/drawing/2014/main" id="{9ABB4E3E-1DAF-4446-B9F7-CB82F1DEF121}"/>
+                <a16:creationId xmlns:a16="http://schemas.microsoft.com/office/drawing/2014/main" id="{32A07AB8-13DE-4680-AF79-2A97CB57E330}"/>
               </a:ext>
             </a:extLst>
           </p:cNvPr>
@@ -9479,7 +10244,7 @@
           <p:cNvPr id="9" name="">
             <a:extLst xmlns:a="http://schemas.openxmlformats.org/drawingml/2006/main">
               <a:ext uri="{FF2B5EF4-FFF2-40B4-BE49-F238E27FC236}">
-                <a16:creationId xmlns:a16="http://schemas.microsoft.com/office/drawing/2014/main" id="{71D9B4C9-E1B8-414C-B5F4-80F15E2FB16F}"/>
+                <a16:creationId xmlns:a16="http://schemas.microsoft.com/office/drawing/2014/main" id="{89DE0F1A-178B-4FD8-992D-4E54692D4659}"/>
               </a:ext>
             </a:extLst>
           </p:cNvPr>
@@ -9529,7 +10294,7 @@
           <p:cNvPr id="10" name="">
             <a:extLst xmlns:a="http://schemas.openxmlformats.org/drawingml/2006/main">
               <a:ext uri="{FF2B5EF4-FFF2-40B4-BE49-F238E27FC236}">
-                <a16:creationId xmlns:a16="http://schemas.microsoft.com/office/drawing/2014/main" id="{8F0DA46C-ECDC-48EF-82E9-A154D85139B8}"/>
+                <a16:creationId xmlns:a16="http://schemas.microsoft.com/office/drawing/2014/main" id="{566A5BDD-5F5D-48B6-9968-BF9275E883EF}"/>
               </a:ext>
             </a:extLst>
           </p:cNvPr>
@@ -9560,7 +10325,7 @@
           <p:cNvPr id="11" name="">
             <a:extLst xmlns:a="http://schemas.openxmlformats.org/drawingml/2006/main">
               <a:ext uri="{FF2B5EF4-FFF2-40B4-BE49-F238E27FC236}">
-                <a16:creationId xmlns:a16="http://schemas.microsoft.com/office/drawing/2014/main" id="{FEE0F941-3587-4E2C-9BF5-37EFFB5B875C}"/>
+                <a16:creationId xmlns:a16="http://schemas.microsoft.com/office/drawing/2014/main" id="{03E79690-FF5D-4FA9-B92A-56CA7CE2CE30}"/>
               </a:ext>
             </a:extLst>
           </p:cNvPr>
@@ -9610,7 +10375,7 @@
           <p:cNvPr id="12" name="">
             <a:extLst xmlns:a="http://schemas.openxmlformats.org/drawingml/2006/main">
               <a:ext uri="{FF2B5EF4-FFF2-40B4-BE49-F238E27FC236}">
-                <a16:creationId xmlns:a16="http://schemas.microsoft.com/office/drawing/2014/main" id="{E4220817-FDFA-45FF-8A20-B956BFD1E5D9}"/>
+                <a16:creationId xmlns:a16="http://schemas.microsoft.com/office/drawing/2014/main" id="{E2D11451-DA7A-4904-B113-E93B2602496B}"/>
               </a:ext>
             </a:extLst>
           </p:cNvPr>
@@ -9641,7 +10406,7 @@
           <p:cNvPr id="13" name="">
             <a:extLst xmlns:a="http://schemas.openxmlformats.org/drawingml/2006/main">
               <a:ext uri="{FF2B5EF4-FFF2-40B4-BE49-F238E27FC236}">
-                <a16:creationId xmlns:a16="http://schemas.microsoft.com/office/drawing/2014/main" id="{0BAB0FFB-8111-468C-A51A-8BBB54112276}"/>
+                <a16:creationId xmlns:a16="http://schemas.microsoft.com/office/drawing/2014/main" id="{9E8C6A88-710B-4188-A60B-D01552C57BA5}"/>
               </a:ext>
             </a:extLst>
           </p:cNvPr>
@@ -9691,7 +10456,7 @@
           <p:cNvPr id="14" name="">
             <a:extLst xmlns:a="http://schemas.openxmlformats.org/drawingml/2006/main">
               <a:ext uri="{FF2B5EF4-FFF2-40B4-BE49-F238E27FC236}">
-                <a16:creationId xmlns:a16="http://schemas.microsoft.com/office/drawing/2014/main" id="{9AEE69CA-526F-4846-824E-23B781A9DE0B}"/>
+                <a16:creationId xmlns:a16="http://schemas.microsoft.com/office/drawing/2014/main" id="{89870E05-823A-4B18-8C60-5B6F9DACB5C0}"/>
               </a:ext>
             </a:extLst>
           </p:cNvPr>
@@ -9726,7 +10491,7 @@
           <p:cNvPr id="15" name="">
             <a:extLst xmlns:a="http://schemas.openxmlformats.org/drawingml/2006/main">
               <a:ext uri="{FF2B5EF4-FFF2-40B4-BE49-F238E27FC236}">
-                <a16:creationId xmlns:a16="http://schemas.microsoft.com/office/drawing/2014/main" id="{15E47B87-E538-4C97-9D58-74E1AF29FEFB}"/>
+                <a16:creationId xmlns:a16="http://schemas.microsoft.com/office/drawing/2014/main" id="{0F59806E-DA94-4CA9-B52C-92C10DC2C43A}"/>
               </a:ext>
             </a:extLst>
           </p:cNvPr>
@@ -9776,7 +10541,7 @@
           <p:cNvPr id="16" name="">
             <a:extLst xmlns:a="http://schemas.openxmlformats.org/drawingml/2006/main">
               <a:ext uri="{FF2B5EF4-FFF2-40B4-BE49-F238E27FC236}">
-                <a16:creationId xmlns:a16="http://schemas.microsoft.com/office/drawing/2014/main" id="{EE534865-3C49-4652-81B3-4C9535F9B15B}"/>
+                <a16:creationId xmlns:a16="http://schemas.microsoft.com/office/drawing/2014/main" id="{5D7DF274-E55B-4B9E-9DB6-C96429C7D288}"/>
               </a:ext>
             </a:extLst>
           </p:cNvPr>
@@ -9807,7 +10572,7 @@
           <p:cNvPr id="17" name="">
             <a:extLst xmlns:a="http://schemas.openxmlformats.org/drawingml/2006/main">
               <a:ext uri="{FF2B5EF4-FFF2-40B4-BE49-F238E27FC236}">
-                <a16:creationId xmlns:a16="http://schemas.microsoft.com/office/drawing/2014/main" id="{6950AE5E-8D41-4D48-986E-4CA4BC570AA5}"/>
+                <a16:creationId xmlns:a16="http://schemas.microsoft.com/office/drawing/2014/main" id="{06F1B4AE-F35D-486C-86A9-5389E5375D00}"/>
               </a:ext>
             </a:extLst>
           </p:cNvPr>
@@ -9857,7 +10622,7 @@
           <p:cNvPr id="18" name="">
             <a:extLst xmlns:a="http://schemas.openxmlformats.org/drawingml/2006/main">
               <a:ext uri="{FF2B5EF4-FFF2-40B4-BE49-F238E27FC236}">
-                <a16:creationId xmlns:a16="http://schemas.microsoft.com/office/drawing/2014/main" id="{FD607EB2-FDDE-4B7C-BDA6-5326DE6D60FB}"/>
+                <a16:creationId xmlns:a16="http://schemas.microsoft.com/office/drawing/2014/main" id="{2F1D0209-2E1F-4C0C-A28E-EFC89E6D250A}"/>
               </a:ext>
             </a:extLst>
           </p:cNvPr>
@@ -9888,7 +10653,7 @@
           <p:cNvPr id="19" name="">
             <a:extLst xmlns:a="http://schemas.openxmlformats.org/drawingml/2006/main">
               <a:ext uri="{FF2B5EF4-FFF2-40B4-BE49-F238E27FC236}">
-                <a16:creationId xmlns:a16="http://schemas.microsoft.com/office/drawing/2014/main" id="{17069432-DA0A-4182-AC1A-CFA2CB5EB0F9}"/>
+                <a16:creationId xmlns:a16="http://schemas.microsoft.com/office/drawing/2014/main" id="{93805E91-CF70-4420-B928-FB6CE815610B}"/>
               </a:ext>
             </a:extLst>
           </p:cNvPr>
@@ -9938,7 +10703,7 @@
           <p:cNvPr id="20" name="">
             <a:extLst xmlns:a="http://schemas.openxmlformats.org/drawingml/2006/main">
               <a:ext uri="{FF2B5EF4-FFF2-40B4-BE49-F238E27FC236}">
-                <a16:creationId xmlns:a16="http://schemas.microsoft.com/office/drawing/2014/main" id="{DBFBD00D-5B60-48CF-B48B-E6A5596305BF}"/>
+                <a16:creationId xmlns:a16="http://schemas.microsoft.com/office/drawing/2014/main" id="{2702BFFA-9C66-41D1-92D7-5670292CB9EB}"/>
               </a:ext>
             </a:extLst>
           </p:cNvPr>
@@ -9969,7 +10734,7 @@
           <p:cNvPr id="21" name="">
             <a:extLst xmlns:a="http://schemas.openxmlformats.org/drawingml/2006/main">
               <a:ext uri="{FF2B5EF4-FFF2-40B4-BE49-F238E27FC236}">
-                <a16:creationId xmlns:a16="http://schemas.microsoft.com/office/drawing/2014/main" id="{5DAA6431-963A-4C08-B232-29FE23E8BFE5}"/>
+                <a16:creationId xmlns:a16="http://schemas.microsoft.com/office/drawing/2014/main" id="{2DB95C3E-5124-4C95-9B85-B98305CEF430}"/>
               </a:ext>
             </a:extLst>
           </p:cNvPr>
@@ -10019,7 +10784,7 @@
           <p:cNvPr id="22" name="">
             <a:extLst xmlns:a="http://schemas.openxmlformats.org/drawingml/2006/main">
               <a:ext uri="{FF2B5EF4-FFF2-40B4-BE49-F238E27FC236}">
-                <a16:creationId xmlns:a16="http://schemas.microsoft.com/office/drawing/2014/main" id="{4F881C80-47E8-463D-8D74-362CCB0B045C}"/>
+                <a16:creationId xmlns:a16="http://schemas.microsoft.com/office/drawing/2014/main" id="{721B2966-967E-4C87-8997-3FF40C77A0C6}"/>
               </a:ext>
             </a:extLst>
           </p:cNvPr>
@@ -10050,7 +10815,7 @@
           <p:cNvPr id="23" name="">
             <a:extLst xmlns:a="http://schemas.openxmlformats.org/drawingml/2006/main">
               <a:ext uri="{FF2B5EF4-FFF2-40B4-BE49-F238E27FC236}">
-                <a16:creationId xmlns:a16="http://schemas.microsoft.com/office/drawing/2014/main" id="{BB4CF5A3-9FBE-46BF-9A5F-9BDE45DC041F}"/>
+                <a16:creationId xmlns:a16="http://schemas.microsoft.com/office/drawing/2014/main" id="{2233FAB8-798C-4D22-A8BD-9834C45E7DB6}"/>
               </a:ext>
             </a:extLst>
           </p:cNvPr>
@@ -10100,7 +10865,7 @@
           <p:cNvPr id="24" name="">
             <a:extLst xmlns:a="http://schemas.openxmlformats.org/drawingml/2006/main">
               <a:ext uri="{FF2B5EF4-FFF2-40B4-BE49-F238E27FC236}">
-                <a16:creationId xmlns:a16="http://schemas.microsoft.com/office/drawing/2014/main" id="{A990D80C-4506-40A7-9ED3-4B963CE8E820}"/>
+                <a16:creationId xmlns:a16="http://schemas.microsoft.com/office/drawing/2014/main" id="{22C330C2-3F7C-466C-876F-D974429005DE}"/>
               </a:ext>
             </a:extLst>
           </p:cNvPr>
@@ -10135,7 +10900,7 @@
           <p:cNvPr id="25" name="">
             <a:extLst xmlns:a="http://schemas.openxmlformats.org/drawingml/2006/main">
               <a:ext uri="{FF2B5EF4-FFF2-40B4-BE49-F238E27FC236}">
-                <a16:creationId xmlns:a16="http://schemas.microsoft.com/office/drawing/2014/main" id="{8187C020-EDF9-481F-B4C0-B9999F7D080C}"/>
+                <a16:creationId xmlns:a16="http://schemas.microsoft.com/office/drawing/2014/main" id="{7CDF3F0C-C260-4926-BEDE-9E7917721269}"/>
               </a:ext>
             </a:extLst>
           </p:cNvPr>
@@ -10185,7 +10950,7 @@
           <p:cNvPr id="26" name="">
             <a:extLst xmlns:a="http://schemas.openxmlformats.org/drawingml/2006/main">
               <a:ext uri="{FF2B5EF4-FFF2-40B4-BE49-F238E27FC236}">
-                <a16:creationId xmlns:a16="http://schemas.microsoft.com/office/drawing/2014/main" id="{1D732429-724E-452F-A562-5994D5FE0727}"/>
+                <a16:creationId xmlns:a16="http://schemas.microsoft.com/office/drawing/2014/main" id="{529FF4F5-9DCB-477A-8E5B-A035DC7A9BF2}"/>
               </a:ext>
             </a:extLst>
           </p:cNvPr>
@@ -10216,7 +10981,7 @@
           <p:cNvPr id="27" name="">
             <a:extLst xmlns:a="http://schemas.openxmlformats.org/drawingml/2006/main">
               <a:ext uri="{FF2B5EF4-FFF2-40B4-BE49-F238E27FC236}">
-                <a16:creationId xmlns:a16="http://schemas.microsoft.com/office/drawing/2014/main" id="{2183682C-48BB-4008-BE7D-F243C3CFB57C}"/>
+                <a16:creationId xmlns:a16="http://schemas.microsoft.com/office/drawing/2014/main" id="{80FD67C4-CC43-4A8A-9D21-2FC171124D75}"/>
               </a:ext>
             </a:extLst>
           </p:cNvPr>
@@ -10266,7 +11031,7 @@
           <p:cNvPr id="28" name="">
             <a:extLst xmlns:a="http://schemas.openxmlformats.org/drawingml/2006/main">
               <a:ext uri="{FF2B5EF4-FFF2-40B4-BE49-F238E27FC236}">
-                <a16:creationId xmlns:a16="http://schemas.microsoft.com/office/drawing/2014/main" id="{38886314-B04A-4F9F-85BB-E3B007C78E49}"/>
+                <a16:creationId xmlns:a16="http://schemas.microsoft.com/office/drawing/2014/main" id="{92A9C507-23AA-4E8F-A9E3-8B9CCDDA48FE}"/>
               </a:ext>
             </a:extLst>
           </p:cNvPr>
@@ -10297,7 +11062,7 @@
           <p:cNvPr id="29" name="">
             <a:extLst xmlns:a="http://schemas.openxmlformats.org/drawingml/2006/main">
               <a:ext uri="{FF2B5EF4-FFF2-40B4-BE49-F238E27FC236}">
-                <a16:creationId xmlns:a16="http://schemas.microsoft.com/office/drawing/2014/main" id="{0004A199-189B-4B6C-AEFE-FB91DF907ADD}"/>
+                <a16:creationId xmlns:a16="http://schemas.microsoft.com/office/drawing/2014/main" id="{75D27D1F-D96B-4116-BC54-F1AFDBC61827}"/>
               </a:ext>
             </a:extLst>
           </p:cNvPr>
@@ -10347,7 +11112,7 @@
           <p:cNvPr id="30" name="">
             <a:extLst xmlns:a="http://schemas.openxmlformats.org/drawingml/2006/main">
               <a:ext uri="{FF2B5EF4-FFF2-40B4-BE49-F238E27FC236}">
-                <a16:creationId xmlns:a16="http://schemas.microsoft.com/office/drawing/2014/main" id="{D082C4B0-4458-440A-9539-929788004E69}"/>
+                <a16:creationId xmlns:a16="http://schemas.microsoft.com/office/drawing/2014/main" id="{546F3714-8D4D-46D5-92C1-4956EF7816D5}"/>
               </a:ext>
             </a:extLst>
           </p:cNvPr>
@@ -10378,7 +11143,7 @@
           <p:cNvPr id="31" name="">
             <a:extLst xmlns:a="http://schemas.openxmlformats.org/drawingml/2006/main">
               <a:ext uri="{FF2B5EF4-FFF2-40B4-BE49-F238E27FC236}">
-                <a16:creationId xmlns:a16="http://schemas.microsoft.com/office/drawing/2014/main" id="{527287B8-22DC-42D1-A29B-48A10D2A440E}"/>
+                <a16:creationId xmlns:a16="http://schemas.microsoft.com/office/drawing/2014/main" id="{88669268-E631-4612-A66F-F07286D3DD19}"/>
               </a:ext>
             </a:extLst>
           </p:cNvPr>
@@ -10428,7 +11193,7 @@
           <p:cNvPr id="32" name="">
             <a:extLst xmlns:a="http://schemas.openxmlformats.org/drawingml/2006/main">
               <a:ext uri="{FF2B5EF4-FFF2-40B4-BE49-F238E27FC236}">
-                <a16:creationId xmlns:a16="http://schemas.microsoft.com/office/drawing/2014/main" id="{2F6124E0-4F4F-492F-9224-BA76E5513742}"/>
+                <a16:creationId xmlns:a16="http://schemas.microsoft.com/office/drawing/2014/main" id="{D8C0ED1A-2232-45ED-A69A-84BBC3D9C1DB}"/>
               </a:ext>
             </a:extLst>
           </p:cNvPr>
@@ -10459,7 +11224,7 @@
           <p:cNvPr id="33" name="">
             <a:extLst xmlns:a="http://schemas.openxmlformats.org/drawingml/2006/main">
               <a:ext uri="{FF2B5EF4-FFF2-40B4-BE49-F238E27FC236}">
-                <a16:creationId xmlns:a16="http://schemas.microsoft.com/office/drawing/2014/main" id="{62DB92D5-96F0-40CB-BAAB-CF4192D658DD}"/>
+                <a16:creationId xmlns:a16="http://schemas.microsoft.com/office/drawing/2014/main" id="{3F17EA6F-3BFE-483B-96C4-10CBB7D959FF}"/>
               </a:ext>
             </a:extLst>
           </p:cNvPr>
@@ -10509,7 +11274,7 @@
           <p:cNvPr id="34" name="">
             <a:extLst xmlns:a="http://schemas.openxmlformats.org/drawingml/2006/main">
               <a:ext uri="{FF2B5EF4-FFF2-40B4-BE49-F238E27FC236}">
-                <a16:creationId xmlns:a16="http://schemas.microsoft.com/office/drawing/2014/main" id="{CDC05822-ACFC-4834-8F18-FFC55B0505A4}"/>
+                <a16:creationId xmlns:a16="http://schemas.microsoft.com/office/drawing/2014/main" id="{87767321-8A40-46D6-ACA3-B04F8595E943}"/>
               </a:ext>
             </a:extLst>
           </p:cNvPr>
@@ -10544,7 +11309,7 @@
           <p:cNvPr id="35" name="">
             <a:extLst xmlns:a="http://schemas.openxmlformats.org/drawingml/2006/main">
               <a:ext uri="{FF2B5EF4-FFF2-40B4-BE49-F238E27FC236}">
-                <a16:creationId xmlns:a16="http://schemas.microsoft.com/office/drawing/2014/main" id="{DD7F5512-7731-4592-9666-F0FAD833B2A4}"/>
+                <a16:creationId xmlns:a16="http://schemas.microsoft.com/office/drawing/2014/main" id="{DD5FE845-541F-4C05-907B-37490C9F19B3}"/>
               </a:ext>
             </a:extLst>
           </p:cNvPr>
@@ -10594,7 +11359,7 @@
           <p:cNvPr id="36" name="">
             <a:extLst xmlns:a="http://schemas.openxmlformats.org/drawingml/2006/main">
               <a:ext uri="{FF2B5EF4-FFF2-40B4-BE49-F238E27FC236}">
-                <a16:creationId xmlns:a16="http://schemas.microsoft.com/office/drawing/2014/main" id="{9F4CEE3A-EA28-42FF-9333-9AC72DAD86EA}"/>
+                <a16:creationId xmlns:a16="http://schemas.microsoft.com/office/drawing/2014/main" id="{F651E86D-981F-45F6-AD3E-16ECDDD71481}"/>
               </a:ext>
             </a:extLst>
           </p:cNvPr>
@@ -10625,7 +11390,7 @@
           <p:cNvPr id="37" name="">
             <a:extLst xmlns:a="http://schemas.openxmlformats.org/drawingml/2006/main">
               <a:ext uri="{FF2B5EF4-FFF2-40B4-BE49-F238E27FC236}">
-                <a16:creationId xmlns:a16="http://schemas.microsoft.com/office/drawing/2014/main" id="{9C170797-9D27-42E2-8C07-DC7F14FCF2D1}"/>
+                <a16:creationId xmlns:a16="http://schemas.microsoft.com/office/drawing/2014/main" id="{19A99BC2-28A9-4518-BEE5-CC3A049B0ED3}"/>
               </a:ext>
             </a:extLst>
           </p:cNvPr>
@@ -10675,7 +11440,7 @@
           <p:cNvPr id="38" name="">
             <a:extLst xmlns:a="http://schemas.openxmlformats.org/drawingml/2006/main">
               <a:ext uri="{FF2B5EF4-FFF2-40B4-BE49-F238E27FC236}">
-                <a16:creationId xmlns:a16="http://schemas.microsoft.com/office/drawing/2014/main" id="{328A2FDA-0B25-4AE3-BFA6-37758FD01551}"/>
+                <a16:creationId xmlns:a16="http://schemas.microsoft.com/office/drawing/2014/main" id="{DD31F483-5061-4F79-8168-FF9C8863EA10}"/>
               </a:ext>
             </a:extLst>
           </p:cNvPr>
@@ -10706,7 +11471,7 @@
           <p:cNvPr id="39" name="">
             <a:extLst xmlns:a="http://schemas.openxmlformats.org/drawingml/2006/main">
               <a:ext uri="{FF2B5EF4-FFF2-40B4-BE49-F238E27FC236}">
-                <a16:creationId xmlns:a16="http://schemas.microsoft.com/office/drawing/2014/main" id="{C4C508D1-4AC3-42AD-8969-95D8E3437625}"/>
+                <a16:creationId xmlns:a16="http://schemas.microsoft.com/office/drawing/2014/main" id="{4E7FE9A5-32F1-4381-9058-974C31913681}"/>
               </a:ext>
             </a:extLst>
           </p:cNvPr>
@@ -10756,7 +11521,7 @@
           <p:cNvPr id="40" name="">
             <a:extLst xmlns:a="http://schemas.openxmlformats.org/drawingml/2006/main">
               <a:ext uri="{FF2B5EF4-FFF2-40B4-BE49-F238E27FC236}">
-                <a16:creationId xmlns:a16="http://schemas.microsoft.com/office/drawing/2014/main" id="{04A2E119-649A-46BF-8451-62B74CF77B03}"/>
+                <a16:creationId xmlns:a16="http://schemas.microsoft.com/office/drawing/2014/main" id="{18A06720-63FD-4747-9D9C-A895EF59A3F4}"/>
               </a:ext>
             </a:extLst>
           </p:cNvPr>
@@ -10787,7 +11552,7 @@
           <p:cNvPr id="41" name="">
             <a:extLst xmlns:a="http://schemas.openxmlformats.org/drawingml/2006/main">
               <a:ext uri="{FF2B5EF4-FFF2-40B4-BE49-F238E27FC236}">
-                <a16:creationId xmlns:a16="http://schemas.microsoft.com/office/drawing/2014/main" id="{9CF58C8D-90EE-4946-A843-70B4848B6FF0}"/>
+                <a16:creationId xmlns:a16="http://schemas.microsoft.com/office/drawing/2014/main" id="{D64339E9-5273-4FA1-9E1B-A0F5736003E5}"/>
               </a:ext>
             </a:extLst>
           </p:cNvPr>
@@ -10837,7 +11602,7 @@
           <p:cNvPr id="42" name="">
             <a:extLst xmlns:a="http://schemas.openxmlformats.org/drawingml/2006/main">
               <a:ext uri="{FF2B5EF4-FFF2-40B4-BE49-F238E27FC236}">
-                <a16:creationId xmlns:a16="http://schemas.microsoft.com/office/drawing/2014/main" id="{427B678F-F936-43AD-AF2D-0AF4D88B0C00}"/>
+                <a16:creationId xmlns:a16="http://schemas.microsoft.com/office/drawing/2014/main" id="{D646DBEE-1ABB-4B01-B9FE-6992A3F8F965}"/>
               </a:ext>
             </a:extLst>
           </p:cNvPr>
@@ -10868,7 +11633,7 @@
           <p:cNvPr id="43" name="">
             <a:extLst xmlns:a="http://schemas.openxmlformats.org/drawingml/2006/main">
               <a:ext uri="{FF2B5EF4-FFF2-40B4-BE49-F238E27FC236}">
-                <a16:creationId xmlns:a16="http://schemas.microsoft.com/office/drawing/2014/main" id="{FC25954F-5279-414E-BA72-F01298331608}"/>
+                <a16:creationId xmlns:a16="http://schemas.microsoft.com/office/drawing/2014/main" id="{741F50ED-89A2-49FB-B013-A04B6BB99144}"/>
               </a:ext>
             </a:extLst>
           </p:cNvPr>
@@ -10918,7 +11683,7 @@
           <p:cNvPr id="44" name="">
             <a:extLst xmlns:a="http://schemas.openxmlformats.org/drawingml/2006/main">
               <a:ext uri="{FF2B5EF4-FFF2-40B4-BE49-F238E27FC236}">
-                <a16:creationId xmlns:a16="http://schemas.microsoft.com/office/drawing/2014/main" id="{1C4DEDC6-04D7-4B99-B6D9-6ABAEDE88668}"/>
+                <a16:creationId xmlns:a16="http://schemas.microsoft.com/office/drawing/2014/main" id="{3476CA9D-EC04-4115-927C-5B829406378C}"/>
               </a:ext>
             </a:extLst>
           </p:cNvPr>
@@ -10966,7 +11731,7 @@
     </p:spTree>
     <p:extLst>
       <p:ext uri="{BB962C8B-B14F-4D97-AF65-F5344CB8AC3E}">
-        <p14:creationId xmlns:p14="http://schemas.microsoft.com/office/powerpoint/2010/main" val="1229254742"/>
+        <p14:creationId xmlns:p14="http://schemas.microsoft.com/office/powerpoint/2010/main" val="701318425"/>
       </p:ext>
     </p:extLst>
   </p:cSld>
@@ -10997,7 +11762,7 @@
           <p:cNvPr id="1" name="">
             <a:extLst xmlns:a="http://schemas.openxmlformats.org/drawingml/2006/main">
               <a:ext uri="{FF2B5EF4-FFF2-40B4-BE49-F238E27FC236}">
-                <a16:creationId xmlns:a16="http://schemas.microsoft.com/office/drawing/2014/main" id="{046ED6DA-3467-4AFB-A7A8-0A1D6574AF1C}"/>
+                <a16:creationId xmlns:a16="http://schemas.microsoft.com/office/drawing/2014/main" id="{A4DB24D7-5EDE-4552-AA75-BE1D758E7FF0}"/>
               </a:ext>
             </a:extLst>
           </p:cNvPr>
@@ -11047,7 +11812,7 @@
           <p:cNvPr id="2" name="">
             <a:extLst xmlns:a="http://schemas.openxmlformats.org/drawingml/2006/main">
               <a:ext uri="{FF2B5EF4-FFF2-40B4-BE49-F238E27FC236}">
-                <a16:creationId xmlns:a16="http://schemas.microsoft.com/office/drawing/2014/main" id="{0CF87ED3-7CE4-4391-8BE3-E7B07A5C5F94}"/>
+                <a16:creationId xmlns:a16="http://schemas.microsoft.com/office/drawing/2014/main" id="{DDBA6157-BFD9-4F88-9D10-6AA5BE68C6E5}"/>
               </a:ext>
             </a:extLst>
           </p:cNvPr>
@@ -11097,7 +11862,7 @@
           <p:cNvPr id="3" name="">
             <a:extLst xmlns:a="http://schemas.openxmlformats.org/drawingml/2006/main">
               <a:ext uri="{FF2B5EF4-FFF2-40B4-BE49-F238E27FC236}">
-                <a16:creationId xmlns:a16="http://schemas.microsoft.com/office/drawing/2014/main" id="{046AD400-C4BA-439F-BA92-8D086063E4A0}"/>
+                <a16:creationId xmlns:a16="http://schemas.microsoft.com/office/drawing/2014/main" id="{92A8E57A-C863-4256-9CA4-CFA02E2E41F5}"/>
               </a:ext>
             </a:extLst>
           </p:cNvPr>
@@ -11130,7 +11895,7 @@
           <p:cNvPr id="4" name="">
             <a:extLst xmlns:a="http://schemas.openxmlformats.org/drawingml/2006/main">
               <a:ext uri="{FF2B5EF4-FFF2-40B4-BE49-F238E27FC236}">
-                <a16:creationId xmlns:a16="http://schemas.microsoft.com/office/drawing/2014/main" id="{166293B7-8928-4756-8C88-60525265EA01}"/>
+                <a16:creationId xmlns:a16="http://schemas.microsoft.com/office/drawing/2014/main" id="{4114112A-9A27-4D1B-8266-EA120BD9A422}"/>
               </a:ext>
             </a:extLst>
           </p:cNvPr>
@@ -11165,7 +11930,7 @@
           <p:cNvPr id="5" name="">
             <a:extLst xmlns:a="http://schemas.openxmlformats.org/drawingml/2006/main">
               <a:ext uri="{FF2B5EF4-FFF2-40B4-BE49-F238E27FC236}">
-                <a16:creationId xmlns:a16="http://schemas.microsoft.com/office/drawing/2014/main" id="{9E284E98-5CD9-4AA7-B902-EC9A739368E1}"/>
+                <a16:creationId xmlns:a16="http://schemas.microsoft.com/office/drawing/2014/main" id="{F1BB0EB4-8B39-4C5B-98B7-8DA3A000A2C3}"/>
               </a:ext>
             </a:extLst>
           </p:cNvPr>
@@ -11200,7 +11965,7 @@
           <p:cNvPr id="6" name="">
             <a:extLst xmlns:a="http://schemas.openxmlformats.org/drawingml/2006/main">
               <a:ext uri="{FF2B5EF4-FFF2-40B4-BE49-F238E27FC236}">
-                <a16:creationId xmlns:a16="http://schemas.microsoft.com/office/drawing/2014/main" id="{165358F0-CFAF-4E55-BB65-5A23E27F7159}"/>
+                <a16:creationId xmlns:a16="http://schemas.microsoft.com/office/drawing/2014/main" id="{CC40C063-3F79-4F91-9609-D16732BFE522}"/>
               </a:ext>
             </a:extLst>
           </p:cNvPr>
@@ -11250,7 +12015,7 @@
           <p:cNvPr id="7" name="">
             <a:extLst xmlns:a="http://schemas.openxmlformats.org/drawingml/2006/main">
               <a:ext uri="{FF2B5EF4-FFF2-40B4-BE49-F238E27FC236}">
-                <a16:creationId xmlns:a16="http://schemas.microsoft.com/office/drawing/2014/main" id="{E23C1646-905F-481C-AB9E-42F83EF422F5}"/>
+                <a16:creationId xmlns:a16="http://schemas.microsoft.com/office/drawing/2014/main" id="{9D2FD98F-544B-4E06-938B-17786420AA38}"/>
               </a:ext>
             </a:extLst>
           </p:cNvPr>
@@ -11281,7 +12046,7 @@
           <p:cNvPr id="8" name="">
             <a:extLst xmlns:a="http://schemas.openxmlformats.org/drawingml/2006/main">
               <a:ext uri="{FF2B5EF4-FFF2-40B4-BE49-F238E27FC236}">
-                <a16:creationId xmlns:a16="http://schemas.microsoft.com/office/drawing/2014/main" id="{ACCC915C-F0CA-42E5-9EDF-8130756507EC}"/>
+                <a16:creationId xmlns:a16="http://schemas.microsoft.com/office/drawing/2014/main" id="{9D61C0B5-2150-4CCC-8329-1AC8F44BFCD0}"/>
               </a:ext>
             </a:extLst>
           </p:cNvPr>
@@ -11331,7 +12096,7 @@
           <p:cNvPr id="9" name="">
             <a:extLst xmlns:a="http://schemas.openxmlformats.org/drawingml/2006/main">
               <a:ext uri="{FF2B5EF4-FFF2-40B4-BE49-F238E27FC236}">
-                <a16:creationId xmlns:a16="http://schemas.microsoft.com/office/drawing/2014/main" id="{005FEF6D-34CE-44D1-BD3A-2198BEEF0B7B}"/>
+                <a16:creationId xmlns:a16="http://schemas.microsoft.com/office/drawing/2014/main" id="{1BE8B076-8D30-4434-8694-4B03573BE0B0}"/>
               </a:ext>
             </a:extLst>
           </p:cNvPr>
@@ -11362,7 +12127,7 @@
           <p:cNvPr id="10" name="">
             <a:extLst xmlns:a="http://schemas.openxmlformats.org/drawingml/2006/main">
               <a:ext uri="{FF2B5EF4-FFF2-40B4-BE49-F238E27FC236}">
-                <a16:creationId xmlns:a16="http://schemas.microsoft.com/office/drawing/2014/main" id="{11632DC8-09F4-4CE5-9B42-F1EDA0185DDB}"/>
+                <a16:creationId xmlns:a16="http://schemas.microsoft.com/office/drawing/2014/main" id="{3E9DB339-5B6D-462D-872F-D677BF6FF663}"/>
               </a:ext>
             </a:extLst>
           </p:cNvPr>
@@ -11412,7 +12177,7 @@
           <p:cNvPr id="11" name="">
             <a:extLst xmlns:a="http://schemas.openxmlformats.org/drawingml/2006/main">
               <a:ext uri="{FF2B5EF4-FFF2-40B4-BE49-F238E27FC236}">
-                <a16:creationId xmlns:a16="http://schemas.microsoft.com/office/drawing/2014/main" id="{3DC25FD8-14B6-430C-9395-D08E7AB94365}"/>
+                <a16:creationId xmlns:a16="http://schemas.microsoft.com/office/drawing/2014/main" id="{5A649992-E3BF-41F8-B04F-0265AF7C28BC}"/>
               </a:ext>
             </a:extLst>
           </p:cNvPr>
@@ -11443,7 +12208,7 @@
           <p:cNvPr id="12" name="">
             <a:extLst xmlns:a="http://schemas.openxmlformats.org/drawingml/2006/main">
               <a:ext uri="{FF2B5EF4-FFF2-40B4-BE49-F238E27FC236}">
-                <a16:creationId xmlns:a16="http://schemas.microsoft.com/office/drawing/2014/main" id="{F847E951-FB66-4D15-B040-CE9A26C81763}"/>
+                <a16:creationId xmlns:a16="http://schemas.microsoft.com/office/drawing/2014/main" id="{491AA861-91AE-4F06-9B3C-9AA8C733FD86}"/>
               </a:ext>
             </a:extLst>
           </p:cNvPr>
@@ -11493,7 +12258,7 @@
           <p:cNvPr id="13" name="">
             <a:extLst xmlns:a="http://schemas.openxmlformats.org/drawingml/2006/main">
               <a:ext uri="{FF2B5EF4-FFF2-40B4-BE49-F238E27FC236}">
-                <a16:creationId xmlns:a16="http://schemas.microsoft.com/office/drawing/2014/main" id="{B6C368A6-0748-4A92-B7C7-ACCEBDE029EF}"/>
+                <a16:creationId xmlns:a16="http://schemas.microsoft.com/office/drawing/2014/main" id="{8FABD360-3C0C-40B9-886F-65A3DDDDCE41}"/>
               </a:ext>
             </a:extLst>
           </p:cNvPr>
@@ -11524,7 +12289,7 @@
           <p:cNvPr id="14" name="">
             <a:extLst xmlns:a="http://schemas.openxmlformats.org/drawingml/2006/main">
               <a:ext uri="{FF2B5EF4-FFF2-40B4-BE49-F238E27FC236}">
-                <a16:creationId xmlns:a16="http://schemas.microsoft.com/office/drawing/2014/main" id="{D7A99D9B-F06B-4802-88B4-A26291DC447D}"/>
+                <a16:creationId xmlns:a16="http://schemas.microsoft.com/office/drawing/2014/main" id="{299A161A-B527-4667-9938-6963C66E24DE}"/>
               </a:ext>
             </a:extLst>
           </p:cNvPr>
@@ -11574,7 +12339,7 @@
           <p:cNvPr id="15" name="">
             <a:extLst xmlns:a="http://schemas.openxmlformats.org/drawingml/2006/main">
               <a:ext uri="{FF2B5EF4-FFF2-40B4-BE49-F238E27FC236}">
-                <a16:creationId xmlns:a16="http://schemas.microsoft.com/office/drawing/2014/main" id="{B356F06F-3886-485D-A64E-796C945C7067}"/>
+                <a16:creationId xmlns:a16="http://schemas.microsoft.com/office/drawing/2014/main" id="{49E0D461-7D6E-4C70-8671-2CE1592F64D3}"/>
               </a:ext>
             </a:extLst>
           </p:cNvPr>
@@ -11605,7 +12370,7 @@
           <p:cNvPr id="16" name="">
             <a:extLst xmlns:a="http://schemas.openxmlformats.org/drawingml/2006/main">
               <a:ext uri="{FF2B5EF4-FFF2-40B4-BE49-F238E27FC236}">
-                <a16:creationId xmlns:a16="http://schemas.microsoft.com/office/drawing/2014/main" id="{59DAA904-5F24-425E-BBE7-DA8DE5FF11B4}"/>
+                <a16:creationId xmlns:a16="http://schemas.microsoft.com/office/drawing/2014/main" id="{25F331F6-7B74-4C8E-8808-10F57FE515E6}"/>
               </a:ext>
             </a:extLst>
           </p:cNvPr>
@@ -11655,7 +12420,7 @@
           <p:cNvPr id="17" name="">
             <a:extLst xmlns:a="http://schemas.openxmlformats.org/drawingml/2006/main">
               <a:ext uri="{FF2B5EF4-FFF2-40B4-BE49-F238E27FC236}">
-                <a16:creationId xmlns:a16="http://schemas.microsoft.com/office/drawing/2014/main" id="{D403FB37-5B51-4460-8B47-D52A021DBE5A}"/>
+                <a16:creationId xmlns:a16="http://schemas.microsoft.com/office/drawing/2014/main" id="{FDDB32E7-A03E-4DE1-A9C8-E6C585B46042}"/>
               </a:ext>
             </a:extLst>
           </p:cNvPr>
@@ -11705,7 +12470,7 @@
           <p:cNvPr id="18" name="">
             <a:extLst xmlns:a="http://schemas.openxmlformats.org/drawingml/2006/main">
               <a:ext uri="{FF2B5EF4-FFF2-40B4-BE49-F238E27FC236}">
-                <a16:creationId xmlns:a16="http://schemas.microsoft.com/office/drawing/2014/main" id="{5BC5BE08-A79D-44DF-AD94-04F0D18FF1C1}"/>
+                <a16:creationId xmlns:a16="http://schemas.microsoft.com/office/drawing/2014/main" id="{131169E4-4410-4D34-B4D1-6750BEF7BFF0}"/>
               </a:ext>
             </a:extLst>
           </p:cNvPr>
@@ -11736,7 +12501,7 @@
           <p:cNvPr id="19" name="">
             <a:extLst xmlns:a="http://schemas.openxmlformats.org/drawingml/2006/main">
               <a:ext uri="{FF2B5EF4-FFF2-40B4-BE49-F238E27FC236}">
-                <a16:creationId xmlns:a16="http://schemas.microsoft.com/office/drawing/2014/main" id="{CC1B8650-0CA2-489B-BB9B-23C59E032886}"/>
+                <a16:creationId xmlns:a16="http://schemas.microsoft.com/office/drawing/2014/main" id="{14E4B76A-0D81-44A2-A9D4-059BF576128B}"/>
               </a:ext>
             </a:extLst>
           </p:cNvPr>
@@ -11786,7 +12551,7 @@
           <p:cNvPr id="20" name="">
             <a:extLst xmlns:a="http://schemas.openxmlformats.org/drawingml/2006/main">
               <a:ext uri="{FF2B5EF4-FFF2-40B4-BE49-F238E27FC236}">
-                <a16:creationId xmlns:a16="http://schemas.microsoft.com/office/drawing/2014/main" id="{0F42FB7F-77EC-4FFF-AEB4-82AFEDD73C95}"/>
+                <a16:creationId xmlns:a16="http://schemas.microsoft.com/office/drawing/2014/main" id="{C1771426-D923-46A9-AB79-DF6442759F91}"/>
               </a:ext>
             </a:extLst>
           </p:cNvPr>
@@ -11817,7 +12582,7 @@
           <p:cNvPr id="21" name="">
             <a:extLst xmlns:a="http://schemas.openxmlformats.org/drawingml/2006/main">
               <a:ext uri="{FF2B5EF4-FFF2-40B4-BE49-F238E27FC236}">
-                <a16:creationId xmlns:a16="http://schemas.microsoft.com/office/drawing/2014/main" id="{136E9EF0-F4FD-4BF8-A55A-4E2447108CC8}"/>
+                <a16:creationId xmlns:a16="http://schemas.microsoft.com/office/drawing/2014/main" id="{4630A390-4EE2-4704-B6C2-C549DF117BAE}"/>
               </a:ext>
             </a:extLst>
           </p:cNvPr>
@@ -11867,7 +12632,7 @@
           <p:cNvPr id="22" name="">
             <a:extLst xmlns:a="http://schemas.openxmlformats.org/drawingml/2006/main">
               <a:ext uri="{FF2B5EF4-FFF2-40B4-BE49-F238E27FC236}">
-                <a16:creationId xmlns:a16="http://schemas.microsoft.com/office/drawing/2014/main" id="{B3C8774F-B4AC-4E5F-A9DE-15AA47C29E02}"/>
+                <a16:creationId xmlns:a16="http://schemas.microsoft.com/office/drawing/2014/main" id="{CB9500D0-887B-42CF-81A2-1B540FF3776E}"/>
               </a:ext>
             </a:extLst>
           </p:cNvPr>
@@ -11898,7 +12663,7 @@
           <p:cNvPr id="23" name="">
             <a:extLst xmlns:a="http://schemas.openxmlformats.org/drawingml/2006/main">
               <a:ext uri="{FF2B5EF4-FFF2-40B4-BE49-F238E27FC236}">
-                <a16:creationId xmlns:a16="http://schemas.microsoft.com/office/drawing/2014/main" id="{389E3284-BF96-4D99-A225-A8AF3570337D}"/>
+                <a16:creationId xmlns:a16="http://schemas.microsoft.com/office/drawing/2014/main" id="{2B69FFD2-9D96-4635-89BA-4517CAE1B749}"/>
               </a:ext>
             </a:extLst>
           </p:cNvPr>
@@ -11948,7 +12713,7 @@
           <p:cNvPr id="24" name="">
             <a:extLst xmlns:a="http://schemas.openxmlformats.org/drawingml/2006/main">
               <a:ext uri="{FF2B5EF4-FFF2-40B4-BE49-F238E27FC236}">
-                <a16:creationId xmlns:a16="http://schemas.microsoft.com/office/drawing/2014/main" id="{409059DA-A156-4932-9EB7-47D2D9269F27}"/>
+                <a16:creationId xmlns:a16="http://schemas.microsoft.com/office/drawing/2014/main" id="{CC387E3D-DDAD-43B4-A0BA-D081FFC3786D}"/>
               </a:ext>
             </a:extLst>
           </p:cNvPr>
@@ -11979,7 +12744,7 @@
           <p:cNvPr id="25" name="">
             <a:extLst xmlns:a="http://schemas.openxmlformats.org/drawingml/2006/main">
               <a:ext uri="{FF2B5EF4-FFF2-40B4-BE49-F238E27FC236}">
-                <a16:creationId xmlns:a16="http://schemas.microsoft.com/office/drawing/2014/main" id="{36FD26D6-7E64-4A79-BA59-2C22549219AC}"/>
+                <a16:creationId xmlns:a16="http://schemas.microsoft.com/office/drawing/2014/main" id="{9E6DF3F1-43BA-48A7-BA21-6F5E86D38691}"/>
               </a:ext>
             </a:extLst>
           </p:cNvPr>
@@ -12029,7 +12794,7 @@
           <p:cNvPr id="26" name="">
             <a:extLst xmlns:a="http://schemas.openxmlformats.org/drawingml/2006/main">
               <a:ext uri="{FF2B5EF4-FFF2-40B4-BE49-F238E27FC236}">
-                <a16:creationId xmlns:a16="http://schemas.microsoft.com/office/drawing/2014/main" id="{4C521710-D3DF-4235-841D-9103BA9C6046}"/>
+                <a16:creationId xmlns:a16="http://schemas.microsoft.com/office/drawing/2014/main" id="{12102295-DA35-4A5F-87E6-E598F0774F71}"/>
               </a:ext>
             </a:extLst>
           </p:cNvPr>
@@ -12060,7 +12825,7 @@
           <p:cNvPr id="27" name="">
             <a:extLst xmlns:a="http://schemas.openxmlformats.org/drawingml/2006/main">
               <a:ext uri="{FF2B5EF4-FFF2-40B4-BE49-F238E27FC236}">
-                <a16:creationId xmlns:a16="http://schemas.microsoft.com/office/drawing/2014/main" id="{1E3B1D21-59A4-445E-B3AC-8F14A3695935}"/>
+                <a16:creationId xmlns:a16="http://schemas.microsoft.com/office/drawing/2014/main" id="{AAFC9128-AC45-424E-9F15-CD0E5D3C2BD3}"/>
               </a:ext>
             </a:extLst>
           </p:cNvPr>
@@ -12108,7 +12873,7 @@
     </p:spTree>
     <p:extLst>
       <p:ext uri="{BB962C8B-B14F-4D97-AF65-F5344CB8AC3E}">
-        <p14:creationId xmlns:p14="http://schemas.microsoft.com/office/powerpoint/2010/main" val="1291274272"/>
+        <p14:creationId xmlns:p14="http://schemas.microsoft.com/office/powerpoint/2010/main" val="281096354"/>
       </p:ext>
     </p:extLst>
   </p:cSld>
@@ -12139,7 +12904,7 @@
           <p:cNvPr id="1" name="">
             <a:extLst xmlns:a="http://schemas.openxmlformats.org/drawingml/2006/main">
               <a:ext uri="{FF2B5EF4-FFF2-40B4-BE49-F238E27FC236}">
-                <a16:creationId xmlns:a16="http://schemas.microsoft.com/office/drawing/2014/main" id="{816CDB7C-284E-401B-8C56-E56DA74BBD7C}"/>
+                <a16:creationId xmlns:a16="http://schemas.microsoft.com/office/drawing/2014/main" id="{C02EC6E6-6755-40BD-85D8-DDC4C6BA0F22}"/>
               </a:ext>
             </a:extLst>
           </p:cNvPr>
@@ -12189,7 +12954,7 @@
           <p:cNvPr id="2" name="">
             <a:extLst xmlns:a="http://schemas.openxmlformats.org/drawingml/2006/main">
               <a:ext uri="{FF2B5EF4-FFF2-40B4-BE49-F238E27FC236}">
-                <a16:creationId xmlns:a16="http://schemas.microsoft.com/office/drawing/2014/main" id="{46AEDAC2-5D05-4181-978C-AF922CC10BDF}"/>
+                <a16:creationId xmlns:a16="http://schemas.microsoft.com/office/drawing/2014/main" id="{D2B2F8BD-AF61-4247-B671-8751BD50A3B2}"/>
               </a:ext>
             </a:extLst>
           </p:cNvPr>
@@ -12239,7 +13004,7 @@
           <p:cNvPr id="3" name="">
             <a:extLst xmlns:a="http://schemas.openxmlformats.org/drawingml/2006/main">
               <a:ext uri="{FF2B5EF4-FFF2-40B4-BE49-F238E27FC236}">
-                <a16:creationId xmlns:a16="http://schemas.microsoft.com/office/drawing/2014/main" id="{E666DFF6-EEBD-418B-BD5D-5D93F69F3D1E}"/>
+                <a16:creationId xmlns:a16="http://schemas.microsoft.com/office/drawing/2014/main" id="{FF4A4517-ED2B-40BB-9610-C5B0D9740184}"/>
               </a:ext>
             </a:extLst>
           </p:cNvPr>
@@ -12272,7 +13037,7 @@
           <p:cNvPr id="4" name="">
             <a:extLst xmlns:a="http://schemas.openxmlformats.org/drawingml/2006/main">
               <a:ext uri="{FF2B5EF4-FFF2-40B4-BE49-F238E27FC236}">
-                <a16:creationId xmlns:a16="http://schemas.microsoft.com/office/drawing/2014/main" id="{F1A84ABF-41CF-4766-86EA-05F83527D7C1}"/>
+                <a16:creationId xmlns:a16="http://schemas.microsoft.com/office/drawing/2014/main" id="{76B88D86-A9B9-467E-8398-38F040E0B19D}"/>
               </a:ext>
             </a:extLst>
           </p:cNvPr>
@@ -12307,7 +13072,7 @@
           <p:cNvPr id="5" name="">
             <a:extLst xmlns:a="http://schemas.openxmlformats.org/drawingml/2006/main">
               <a:ext uri="{FF2B5EF4-FFF2-40B4-BE49-F238E27FC236}">
-                <a16:creationId xmlns:a16="http://schemas.microsoft.com/office/drawing/2014/main" id="{57A23CD1-1CA0-474B-875D-A6750957388F}"/>
+                <a16:creationId xmlns:a16="http://schemas.microsoft.com/office/drawing/2014/main" id="{920586F9-0852-442C-BFE0-98E108AD6E5B}"/>
               </a:ext>
             </a:extLst>
           </p:cNvPr>
@@ -12357,7 +13122,7 @@
           <p:cNvPr id="6" name="">
             <a:extLst xmlns:a="http://schemas.openxmlformats.org/drawingml/2006/main">
               <a:ext uri="{FF2B5EF4-FFF2-40B4-BE49-F238E27FC236}">
-                <a16:creationId xmlns:a16="http://schemas.microsoft.com/office/drawing/2014/main" id="{174E92A9-9509-419A-A9BC-84605253F077}"/>
+                <a16:creationId xmlns:a16="http://schemas.microsoft.com/office/drawing/2014/main" id="{2703224A-9B84-4B8C-BBB1-2ED802C63AF5}"/>
               </a:ext>
             </a:extLst>
           </p:cNvPr>
@@ -12388,7 +13153,7 @@
           <p:cNvPr id="7" name="">
             <a:extLst xmlns:a="http://schemas.openxmlformats.org/drawingml/2006/main">
               <a:ext uri="{FF2B5EF4-FFF2-40B4-BE49-F238E27FC236}">
-                <a16:creationId xmlns:a16="http://schemas.microsoft.com/office/drawing/2014/main" id="{F9A61E31-F741-4E02-8899-827FD1AC2C50}"/>
+                <a16:creationId xmlns:a16="http://schemas.microsoft.com/office/drawing/2014/main" id="{72F38785-D557-4566-BF04-1BB7F5C1F0E6}"/>
               </a:ext>
             </a:extLst>
           </p:cNvPr>
@@ -12438,7 +13203,7 @@
           <p:cNvPr id="8" name="">
             <a:extLst xmlns:a="http://schemas.openxmlformats.org/drawingml/2006/main">
               <a:ext uri="{FF2B5EF4-FFF2-40B4-BE49-F238E27FC236}">
-                <a16:creationId xmlns:a16="http://schemas.microsoft.com/office/drawing/2014/main" id="{6EA51F5B-6088-44ED-9A07-08C586F2DD0A}"/>
+                <a16:creationId xmlns:a16="http://schemas.microsoft.com/office/drawing/2014/main" id="{B8BDFD1E-C18B-402A-AE57-BB155AAFEAC6}"/>
               </a:ext>
             </a:extLst>
           </p:cNvPr>
@@ -12469,7 +13234,7 @@
           <p:cNvPr id="9" name="">
             <a:extLst xmlns:a="http://schemas.openxmlformats.org/drawingml/2006/main">
               <a:ext uri="{FF2B5EF4-FFF2-40B4-BE49-F238E27FC236}">
-                <a16:creationId xmlns:a16="http://schemas.microsoft.com/office/drawing/2014/main" id="{CDD74DC5-58C2-4001-BC56-392828B71D06}"/>
+                <a16:creationId xmlns:a16="http://schemas.microsoft.com/office/drawing/2014/main" id="{448E1FC4-D98D-4AF0-BB2E-1AEDFB4D8B7F}"/>
               </a:ext>
             </a:extLst>
           </p:cNvPr>
@@ -12519,7 +13284,7 @@
           <p:cNvPr id="10" name="">
             <a:extLst xmlns:a="http://schemas.openxmlformats.org/drawingml/2006/main">
               <a:ext uri="{FF2B5EF4-FFF2-40B4-BE49-F238E27FC236}">
-                <a16:creationId xmlns:a16="http://schemas.microsoft.com/office/drawing/2014/main" id="{F29CE372-017A-4DCF-BF78-709820F71493}"/>
+                <a16:creationId xmlns:a16="http://schemas.microsoft.com/office/drawing/2014/main" id="{7048CCEB-09CE-4C23-9173-5BCDDD3ABC63}"/>
               </a:ext>
             </a:extLst>
           </p:cNvPr>
@@ -12550,7 +13315,7 @@
           <p:cNvPr id="11" name="">
             <a:extLst xmlns:a="http://schemas.openxmlformats.org/drawingml/2006/main">
               <a:ext uri="{FF2B5EF4-FFF2-40B4-BE49-F238E27FC236}">
-                <a16:creationId xmlns:a16="http://schemas.microsoft.com/office/drawing/2014/main" id="{1E3DFC1C-B0B2-442D-BDAB-B18FE038CB9F}"/>
+                <a16:creationId xmlns:a16="http://schemas.microsoft.com/office/drawing/2014/main" id="{52A083D6-859B-49E9-9856-753BEC7DE701}"/>
               </a:ext>
             </a:extLst>
           </p:cNvPr>
@@ -12600,7 +13365,7 @@
           <p:cNvPr id="12" name="">
             <a:extLst xmlns:a="http://schemas.openxmlformats.org/drawingml/2006/main">
               <a:ext uri="{FF2B5EF4-FFF2-40B4-BE49-F238E27FC236}">
-                <a16:creationId xmlns:a16="http://schemas.microsoft.com/office/drawing/2014/main" id="{12D2EF3D-7CB2-42B8-AEEE-707C8267910E}"/>
+                <a16:creationId xmlns:a16="http://schemas.microsoft.com/office/drawing/2014/main" id="{E5FC97B8-4EC3-47CF-A506-AD1B49BAC67B}"/>
               </a:ext>
             </a:extLst>
           </p:cNvPr>
@@ -12631,7 +13396,7 @@
           <p:cNvPr id="13" name="">
             <a:extLst xmlns:a="http://schemas.openxmlformats.org/drawingml/2006/main">
               <a:ext uri="{FF2B5EF4-FFF2-40B4-BE49-F238E27FC236}">
-                <a16:creationId xmlns:a16="http://schemas.microsoft.com/office/drawing/2014/main" id="{0045F10E-1165-4E54-9391-7999225B1E17}"/>
+                <a16:creationId xmlns:a16="http://schemas.microsoft.com/office/drawing/2014/main" id="{A7D5C8CC-74F7-4A75-AEC5-5DCCA29023FE}"/>
               </a:ext>
             </a:extLst>
           </p:cNvPr>
@@ -12681,7 +13446,7 @@
           <p:cNvPr id="14" name="">
             <a:extLst xmlns:a="http://schemas.openxmlformats.org/drawingml/2006/main">
               <a:ext uri="{FF2B5EF4-FFF2-40B4-BE49-F238E27FC236}">
-                <a16:creationId xmlns:a16="http://schemas.microsoft.com/office/drawing/2014/main" id="{81ABA04B-F1E7-4405-BA7E-4CF6A232CE22}"/>
+                <a16:creationId xmlns:a16="http://schemas.microsoft.com/office/drawing/2014/main" id="{247B0045-8E0F-4BFB-8AB0-968BFD6C11E1}"/>
               </a:ext>
             </a:extLst>
           </p:cNvPr>
@@ -12712,7 +13477,7 @@
           <p:cNvPr id="15" name="">
             <a:extLst xmlns:a="http://schemas.openxmlformats.org/drawingml/2006/main">
               <a:ext uri="{FF2B5EF4-FFF2-40B4-BE49-F238E27FC236}">
-                <a16:creationId xmlns:a16="http://schemas.microsoft.com/office/drawing/2014/main" id="{C4E7DE7B-5E79-43AB-97B0-0FFC3A78DF02}"/>
+                <a16:creationId xmlns:a16="http://schemas.microsoft.com/office/drawing/2014/main" id="{755E1A07-4C8E-46B0-9A4C-FA471E825107}"/>
               </a:ext>
             </a:extLst>
           </p:cNvPr>
@@ -12762,7 +13527,7 @@
           <p:cNvPr id="16" name="">
             <a:extLst xmlns:a="http://schemas.openxmlformats.org/drawingml/2006/main">
               <a:ext uri="{FF2B5EF4-FFF2-40B4-BE49-F238E27FC236}">
-                <a16:creationId xmlns:a16="http://schemas.microsoft.com/office/drawing/2014/main" id="{D2A837EB-E01D-45B4-A768-D56E0258DA2C}"/>
+                <a16:creationId xmlns:a16="http://schemas.microsoft.com/office/drawing/2014/main" id="{B82AFF50-5E0C-4532-AC75-16FB393F3CAC}"/>
               </a:ext>
             </a:extLst>
           </p:cNvPr>
@@ -12797,7 +13562,7 @@
           <p:cNvPr id="17" name="">
             <a:extLst xmlns:a="http://schemas.openxmlformats.org/drawingml/2006/main">
               <a:ext uri="{FF2B5EF4-FFF2-40B4-BE49-F238E27FC236}">
-                <a16:creationId xmlns:a16="http://schemas.microsoft.com/office/drawing/2014/main" id="{C293FC30-BE95-4CED-A2CC-FEA218966E44}"/>
+                <a16:creationId xmlns:a16="http://schemas.microsoft.com/office/drawing/2014/main" id="{4805C280-D74A-4AAD-91A8-0BF1818EC802}"/>
               </a:ext>
             </a:extLst>
           </p:cNvPr>
@@ -12847,7 +13612,7 @@
           <p:cNvPr id="18" name="">
             <a:extLst xmlns:a="http://schemas.openxmlformats.org/drawingml/2006/main">
               <a:ext uri="{FF2B5EF4-FFF2-40B4-BE49-F238E27FC236}">
-                <a16:creationId xmlns:a16="http://schemas.microsoft.com/office/drawing/2014/main" id="{1E086AAD-35B9-4711-8864-497BCF8D8214}"/>
+                <a16:creationId xmlns:a16="http://schemas.microsoft.com/office/drawing/2014/main" id="{A7972BB5-A574-4410-9862-9571904A4F0C}"/>
               </a:ext>
             </a:extLst>
           </p:cNvPr>
@@ -12878,7 +13643,7 @@
           <p:cNvPr id="19" name="">
             <a:extLst xmlns:a="http://schemas.openxmlformats.org/drawingml/2006/main">
               <a:ext uri="{FF2B5EF4-FFF2-40B4-BE49-F238E27FC236}">
-                <a16:creationId xmlns:a16="http://schemas.microsoft.com/office/drawing/2014/main" id="{F04FECEE-2678-4D8C-B334-7D41C104F312}"/>
+                <a16:creationId xmlns:a16="http://schemas.microsoft.com/office/drawing/2014/main" id="{617CBF18-BBA4-4E5E-A1E4-FB7D4329FDDC}"/>
               </a:ext>
             </a:extLst>
           </p:cNvPr>
@@ -12928,7 +13693,7 @@
           <p:cNvPr id="20" name="">
             <a:extLst xmlns:a="http://schemas.openxmlformats.org/drawingml/2006/main">
               <a:ext uri="{FF2B5EF4-FFF2-40B4-BE49-F238E27FC236}">
-                <a16:creationId xmlns:a16="http://schemas.microsoft.com/office/drawing/2014/main" id="{B939450C-CC7B-4C1F-B21F-B06A6DDAAF6D}"/>
+                <a16:creationId xmlns:a16="http://schemas.microsoft.com/office/drawing/2014/main" id="{0F611520-56CE-4BD4-A4C5-2E3EFEF54B4A}"/>
               </a:ext>
             </a:extLst>
           </p:cNvPr>
@@ -12959,7 +13724,7 @@
           <p:cNvPr id="21" name="">
             <a:extLst xmlns:a="http://schemas.openxmlformats.org/drawingml/2006/main">
               <a:ext uri="{FF2B5EF4-FFF2-40B4-BE49-F238E27FC236}">
-                <a16:creationId xmlns:a16="http://schemas.microsoft.com/office/drawing/2014/main" id="{7A51CC34-4BFD-4B51-AB17-713AB578FB43}"/>
+                <a16:creationId xmlns:a16="http://schemas.microsoft.com/office/drawing/2014/main" id="{029BE230-41DF-4D1B-8396-A312AE10F859}"/>
               </a:ext>
             </a:extLst>
           </p:cNvPr>
@@ -13009,7 +13774,7 @@
           <p:cNvPr id="22" name="">
             <a:extLst xmlns:a="http://schemas.openxmlformats.org/drawingml/2006/main">
               <a:ext uri="{FF2B5EF4-FFF2-40B4-BE49-F238E27FC236}">
-                <a16:creationId xmlns:a16="http://schemas.microsoft.com/office/drawing/2014/main" id="{457A66DA-163D-40D3-A266-89A44E9AFCB7}"/>
+                <a16:creationId xmlns:a16="http://schemas.microsoft.com/office/drawing/2014/main" id="{848313DD-16EE-4A94-9F4E-96101620128B}"/>
               </a:ext>
             </a:extLst>
           </p:cNvPr>
@@ -13040,7 +13805,7 @@
           <p:cNvPr id="23" name="">
             <a:extLst xmlns:a="http://schemas.openxmlformats.org/drawingml/2006/main">
               <a:ext uri="{FF2B5EF4-FFF2-40B4-BE49-F238E27FC236}">
-                <a16:creationId xmlns:a16="http://schemas.microsoft.com/office/drawing/2014/main" id="{E9429C3A-BC11-4736-8338-AE1443CA367A}"/>
+                <a16:creationId xmlns:a16="http://schemas.microsoft.com/office/drawing/2014/main" id="{DF17A539-15D4-484E-880E-91B07BCC4C15}"/>
               </a:ext>
             </a:extLst>
           </p:cNvPr>
@@ -13090,7 +13855,7 @@
           <p:cNvPr id="24" name="">
             <a:extLst xmlns:a="http://schemas.openxmlformats.org/drawingml/2006/main">
               <a:ext uri="{FF2B5EF4-FFF2-40B4-BE49-F238E27FC236}">
-                <a16:creationId xmlns:a16="http://schemas.microsoft.com/office/drawing/2014/main" id="{98B8CACE-6433-4AC1-BCF9-ED562935DC5A}"/>
+                <a16:creationId xmlns:a16="http://schemas.microsoft.com/office/drawing/2014/main" id="{E9E2AE5A-94DA-4BE0-9091-25E9B403C686}"/>
               </a:ext>
             </a:extLst>
           </p:cNvPr>
@@ -13121,7 +13886,7 @@
           <p:cNvPr id="25" name="">
             <a:extLst xmlns:a="http://schemas.openxmlformats.org/drawingml/2006/main">
               <a:ext uri="{FF2B5EF4-FFF2-40B4-BE49-F238E27FC236}">
-                <a16:creationId xmlns:a16="http://schemas.microsoft.com/office/drawing/2014/main" id="{195177CE-5831-48A2-816C-67F70ED29ED0}"/>
+                <a16:creationId xmlns:a16="http://schemas.microsoft.com/office/drawing/2014/main" id="{1EEE67E8-4B00-4EE2-B2CA-7C3379E83760}"/>
               </a:ext>
             </a:extLst>
           </p:cNvPr>
@@ -13171,7 +13936,7 @@
           <p:cNvPr id="26" name="">
             <a:extLst xmlns:a="http://schemas.openxmlformats.org/drawingml/2006/main">
               <a:ext uri="{FF2B5EF4-FFF2-40B4-BE49-F238E27FC236}">
-                <a16:creationId xmlns:a16="http://schemas.microsoft.com/office/drawing/2014/main" id="{CC920F93-20A2-4070-92CC-1C758FE084E5}"/>
+                <a16:creationId xmlns:a16="http://schemas.microsoft.com/office/drawing/2014/main" id="{38A5D8CB-B91F-491A-93D3-2C9F545AADC2}"/>
               </a:ext>
             </a:extLst>
           </p:cNvPr>
@@ -13202,7 +13967,7 @@
           <p:cNvPr id="27" name="">
             <a:extLst xmlns:a="http://schemas.openxmlformats.org/drawingml/2006/main">
               <a:ext uri="{FF2B5EF4-FFF2-40B4-BE49-F238E27FC236}">
-                <a16:creationId xmlns:a16="http://schemas.microsoft.com/office/drawing/2014/main" id="{172EEA85-A27E-4719-9E32-EF451E9DC06C}"/>
+                <a16:creationId xmlns:a16="http://schemas.microsoft.com/office/drawing/2014/main" id="{CD718F0C-8BF9-40C5-BCD9-C7EA3E27E1D4}"/>
               </a:ext>
             </a:extLst>
           </p:cNvPr>
@@ -13250,7 +14015,7 @@
     </p:spTree>
     <p:extLst>
       <p:ext uri="{BB962C8B-B14F-4D97-AF65-F5344CB8AC3E}">
-        <p14:creationId xmlns:p14="http://schemas.microsoft.com/office/powerpoint/2010/main" val="108289799"/>
+        <p14:creationId xmlns:p14="http://schemas.microsoft.com/office/powerpoint/2010/main" val="1980410269"/>
       </p:ext>
     </p:extLst>
   </p:cSld>
@@ -13281,7 +14046,7 @@
           <p:cNvPr id="1" name="">
             <a:extLst xmlns:a="http://schemas.openxmlformats.org/drawingml/2006/main">
               <a:ext uri="{FF2B5EF4-FFF2-40B4-BE49-F238E27FC236}">
-                <a16:creationId xmlns:a16="http://schemas.microsoft.com/office/drawing/2014/main" id="{B3ACF61B-1944-477E-8A75-9EF9F207ECBE}"/>
+                <a16:creationId xmlns:a16="http://schemas.microsoft.com/office/drawing/2014/main" id="{2B6C868B-2C06-47EB-B8ED-1998ACCF710A}"/>
               </a:ext>
             </a:extLst>
           </p:cNvPr>
@@ -13331,7 +14096,7 @@
           <p:cNvPr id="2" name="">
             <a:extLst xmlns:a="http://schemas.openxmlformats.org/drawingml/2006/main">
               <a:ext uri="{FF2B5EF4-FFF2-40B4-BE49-F238E27FC236}">
-                <a16:creationId xmlns:a16="http://schemas.microsoft.com/office/drawing/2014/main" id="{33520278-EF78-4BB3-965C-02351F79E0A5}"/>
+                <a16:creationId xmlns:a16="http://schemas.microsoft.com/office/drawing/2014/main" id="{48370CEA-A4D4-4E7D-B513-7425775F5F08}"/>
               </a:ext>
             </a:extLst>
           </p:cNvPr>
@@ -13381,7 +14146,7 @@
           <p:cNvPr id="3" name="">
             <a:extLst xmlns:a="http://schemas.openxmlformats.org/drawingml/2006/main">
               <a:ext uri="{FF2B5EF4-FFF2-40B4-BE49-F238E27FC236}">
-                <a16:creationId xmlns:a16="http://schemas.microsoft.com/office/drawing/2014/main" id="{855157BD-15DB-42E2-AD1D-61A7FEBC3670}"/>
+                <a16:creationId xmlns:a16="http://schemas.microsoft.com/office/drawing/2014/main" id="{2AA19129-0459-4256-93E6-A7D2496E0879}"/>
               </a:ext>
             </a:extLst>
           </p:cNvPr>
@@ -13414,7 +14179,7 @@
           <p:cNvPr id="4" name="">
             <a:extLst xmlns:a="http://schemas.openxmlformats.org/drawingml/2006/main">
               <a:ext uri="{FF2B5EF4-FFF2-40B4-BE49-F238E27FC236}">
-                <a16:creationId xmlns:a16="http://schemas.microsoft.com/office/drawing/2014/main" id="{3DA90ED0-E2F4-44B2-9ADF-26C9C17F931F}"/>
+                <a16:creationId xmlns:a16="http://schemas.microsoft.com/office/drawing/2014/main" id="{AE071FDF-74D9-476D-8347-90B8AE350FED}"/>
               </a:ext>
             </a:extLst>
           </p:cNvPr>
@@ -13449,7 +14214,7 @@
           <p:cNvPr id="5" name="">
             <a:extLst xmlns:a="http://schemas.openxmlformats.org/drawingml/2006/main">
               <a:ext uri="{FF2B5EF4-FFF2-40B4-BE49-F238E27FC236}">
-                <a16:creationId xmlns:a16="http://schemas.microsoft.com/office/drawing/2014/main" id="{637C685F-7D37-4580-BDDF-F387356FC9FA}"/>
+                <a16:creationId xmlns:a16="http://schemas.microsoft.com/office/drawing/2014/main" id="{EEFF69F8-9CAD-4EAE-BBA1-CE4AD439E34F}"/>
               </a:ext>
             </a:extLst>
           </p:cNvPr>
@@ -13499,7 +14264,7 @@
           <p:cNvPr id="6" name="">
             <a:extLst xmlns:a="http://schemas.openxmlformats.org/drawingml/2006/main">
               <a:ext uri="{FF2B5EF4-FFF2-40B4-BE49-F238E27FC236}">
-                <a16:creationId xmlns:a16="http://schemas.microsoft.com/office/drawing/2014/main" id="{960F78CC-11BB-4C7F-999E-45A6E326060B}"/>
+                <a16:creationId xmlns:a16="http://schemas.microsoft.com/office/drawing/2014/main" id="{BF4E79EF-1E08-4871-963B-A4F60A380E81}"/>
               </a:ext>
             </a:extLst>
           </p:cNvPr>
@@ -13549,7 +14314,7 @@
           <p:cNvPr id="7" name="">
             <a:extLst xmlns:a="http://schemas.openxmlformats.org/drawingml/2006/main">
               <a:ext uri="{FF2B5EF4-FFF2-40B4-BE49-F238E27FC236}">
-                <a16:creationId xmlns:a16="http://schemas.microsoft.com/office/drawing/2014/main" id="{CFD8887B-EF82-4194-B819-840D01C4FBCD}"/>
+                <a16:creationId xmlns:a16="http://schemas.microsoft.com/office/drawing/2014/main" id="{46C31281-F61B-4D5F-A253-2F80879F7208}"/>
               </a:ext>
             </a:extLst>
           </p:cNvPr>
@@ -13584,7 +14349,7 @@
           <p:cNvPr id="8" name="">
             <a:extLst xmlns:a="http://schemas.openxmlformats.org/drawingml/2006/main">
               <a:ext uri="{FF2B5EF4-FFF2-40B4-BE49-F238E27FC236}">
-                <a16:creationId xmlns:a16="http://schemas.microsoft.com/office/drawing/2014/main" id="{C0325001-D29A-4731-B5C3-50603041BF26}"/>
+                <a16:creationId xmlns:a16="http://schemas.microsoft.com/office/drawing/2014/main" id="{993E0F16-7C20-46D6-961B-C8EABFC49DDB}"/>
               </a:ext>
             </a:extLst>
           </p:cNvPr>
@@ -13634,7 +14399,7 @@
           <p:cNvPr id="9" name="">
             <a:extLst xmlns:a="http://schemas.openxmlformats.org/drawingml/2006/main">
               <a:ext uri="{FF2B5EF4-FFF2-40B4-BE49-F238E27FC236}">
-                <a16:creationId xmlns:a16="http://schemas.microsoft.com/office/drawing/2014/main" id="{3A1D0133-C76C-4A84-A275-4904F6655185}"/>
+                <a16:creationId xmlns:a16="http://schemas.microsoft.com/office/drawing/2014/main" id="{D382E2C8-17AA-44B5-951A-DA230CB55BA2}"/>
               </a:ext>
             </a:extLst>
           </p:cNvPr>
@@ -13665,7 +14430,7 @@
           <p:cNvPr id="10" name="">
             <a:extLst xmlns:a="http://schemas.openxmlformats.org/drawingml/2006/main">
               <a:ext uri="{FF2B5EF4-FFF2-40B4-BE49-F238E27FC236}">
-                <a16:creationId xmlns:a16="http://schemas.microsoft.com/office/drawing/2014/main" id="{60C4F95D-F0D2-435C-B7E2-236852B9AEF1}"/>
+                <a16:creationId xmlns:a16="http://schemas.microsoft.com/office/drawing/2014/main" id="{3AF99303-2257-41E3-9E0E-D04E9E523323}"/>
               </a:ext>
             </a:extLst>
           </p:cNvPr>
@@ -13715,7 +14480,7 @@
           <p:cNvPr id="11" name="">
             <a:extLst xmlns:a="http://schemas.openxmlformats.org/drawingml/2006/main">
               <a:ext uri="{FF2B5EF4-FFF2-40B4-BE49-F238E27FC236}">
-                <a16:creationId xmlns:a16="http://schemas.microsoft.com/office/drawing/2014/main" id="{85324FCE-6EE4-4082-B235-2959D6077100}"/>
+                <a16:creationId xmlns:a16="http://schemas.microsoft.com/office/drawing/2014/main" id="{6F7A2850-8EBA-4D6C-8FC8-5E612645904A}"/>
               </a:ext>
             </a:extLst>
           </p:cNvPr>
@@ -13746,7 +14511,7 @@
           <p:cNvPr id="12" name="">
             <a:extLst xmlns:a="http://schemas.openxmlformats.org/drawingml/2006/main">
               <a:ext uri="{FF2B5EF4-FFF2-40B4-BE49-F238E27FC236}">
-                <a16:creationId xmlns:a16="http://schemas.microsoft.com/office/drawing/2014/main" id="{734AB775-DC68-450B-872E-4EB8A7DD66A7}"/>
+                <a16:creationId xmlns:a16="http://schemas.microsoft.com/office/drawing/2014/main" id="{6CDFA5A5-D237-4347-8DEF-BB189468A18D}"/>
               </a:ext>
             </a:extLst>
           </p:cNvPr>
@@ -13796,7 +14561,7 @@
           <p:cNvPr id="13" name="">
             <a:extLst xmlns:a="http://schemas.openxmlformats.org/drawingml/2006/main">
               <a:ext uri="{FF2B5EF4-FFF2-40B4-BE49-F238E27FC236}">
-                <a16:creationId xmlns:a16="http://schemas.microsoft.com/office/drawing/2014/main" id="{AB5799D0-986F-448F-9E5C-8D472C246D71}"/>
+                <a16:creationId xmlns:a16="http://schemas.microsoft.com/office/drawing/2014/main" id="{CAEA47C2-0469-4DEF-9941-35B9ABAA7275}"/>
               </a:ext>
             </a:extLst>
           </p:cNvPr>
@@ -13827,7 +14592,7 @@
           <p:cNvPr id="14" name="">
             <a:extLst xmlns:a="http://schemas.openxmlformats.org/drawingml/2006/main">
               <a:ext uri="{FF2B5EF4-FFF2-40B4-BE49-F238E27FC236}">
-                <a16:creationId xmlns:a16="http://schemas.microsoft.com/office/drawing/2014/main" id="{3B61B5C4-D339-4C33-AC80-1DFF70911952}"/>
+                <a16:creationId xmlns:a16="http://schemas.microsoft.com/office/drawing/2014/main" id="{9B32FD4A-A6E0-4978-BF58-96042FD4F328}"/>
               </a:ext>
             </a:extLst>
           </p:cNvPr>
@@ -13877,7 +14642,7 @@
           <p:cNvPr id="15" name="">
             <a:extLst xmlns:a="http://schemas.openxmlformats.org/drawingml/2006/main">
               <a:ext uri="{FF2B5EF4-FFF2-40B4-BE49-F238E27FC236}">
-                <a16:creationId xmlns:a16="http://schemas.microsoft.com/office/drawing/2014/main" id="{2DD34907-9886-47BA-B036-B991DE6141D8}"/>
+                <a16:creationId xmlns:a16="http://schemas.microsoft.com/office/drawing/2014/main" id="{835CA96E-F357-4B34-A99B-D0D4F4492ECB}"/>
               </a:ext>
             </a:extLst>
           </p:cNvPr>
@@ -13908,7 +14673,7 @@
           <p:cNvPr id="16" name="">
             <a:extLst xmlns:a="http://schemas.openxmlformats.org/drawingml/2006/main">
               <a:ext uri="{FF2B5EF4-FFF2-40B4-BE49-F238E27FC236}">
-                <a16:creationId xmlns:a16="http://schemas.microsoft.com/office/drawing/2014/main" id="{70C10A4C-4073-4F96-AA8A-02E3A71EEA46}"/>
+                <a16:creationId xmlns:a16="http://schemas.microsoft.com/office/drawing/2014/main" id="{FFF8F436-27F1-4DE7-A981-B5444224BBA2}"/>
               </a:ext>
             </a:extLst>
           </p:cNvPr>
@@ -13958,7 +14723,7 @@
           <p:cNvPr id="17" name="">
             <a:extLst xmlns:a="http://schemas.openxmlformats.org/drawingml/2006/main">
               <a:ext uri="{FF2B5EF4-FFF2-40B4-BE49-F238E27FC236}">
-                <a16:creationId xmlns:a16="http://schemas.microsoft.com/office/drawing/2014/main" id="{A93B9574-D93A-4E2E-98E5-2A7430291AC2}"/>
+                <a16:creationId xmlns:a16="http://schemas.microsoft.com/office/drawing/2014/main" id="{CD97D10A-1FD4-4E56-AC22-7BFC8FFC4641}"/>
               </a:ext>
             </a:extLst>
           </p:cNvPr>
@@ -14006,7 +14771,7 @@
     </p:spTree>
     <p:extLst>
       <p:ext uri="{BB962C8B-B14F-4D97-AF65-F5344CB8AC3E}">
-        <p14:creationId xmlns:p14="http://schemas.microsoft.com/office/powerpoint/2010/main" val="787680712"/>
+        <p14:creationId xmlns:p14="http://schemas.microsoft.com/office/powerpoint/2010/main" val="1676298505"/>
       </p:ext>
     </p:extLst>
   </p:cSld>
